--- a/sample/AlignPro-Sample.pptx
+++ b/sample/AlignPro-Sample.pptx
@@ -15,6 +15,9 @@
     <p:sldId id="263" r:id="rId9"/>
     <p:sldId id="264" r:id="rId10"/>
     <p:sldId id="265" r:id="rId11"/>
+    <p:sldId id="266" r:id="rId12"/>
+    <p:sldId id="267" r:id="rId13"/>
+    <p:sldId id="268" r:id="rId14"/>
   </p:sldIdLst>
   <p:sldSz cx="12192000" cy="6858000"/>
   <p:notesSz cx="6858000" cy="9144000"/>
@@ -138,7 +141,7 @@
           <p:cNvPr id="2" name="Title 1">
             <a:extLst>
               <a:ext uri="{FF2B5EF4-FFF2-40B4-BE49-F238E27FC236}">
-                <a16:creationId xmlns:a16="http://schemas.microsoft.com/office/drawing/2014/main" id="{1F848B43-C18B-AA32-5B1F-A02B55E7411F}"/>
+                <a16:creationId xmlns:a16="http://schemas.microsoft.com/office/drawing/2014/main" id="{D63B2A2A-5350-0C46-869F-497276FBA0BF}"/>
               </a:ext>
             </a:extLst>
           </p:cNvPr>
@@ -176,7 +179,7 @@
           <p:cNvPr id="3" name="Subtitle 2">
             <a:extLst>
               <a:ext uri="{FF2B5EF4-FFF2-40B4-BE49-F238E27FC236}">
-                <a16:creationId xmlns:a16="http://schemas.microsoft.com/office/drawing/2014/main" id="{CEF1A651-F632-C161-AD60-970C592D4299}"/>
+                <a16:creationId xmlns:a16="http://schemas.microsoft.com/office/drawing/2014/main" id="{9332EF90-71B2-C140-1CFC-25F351C01980}"/>
               </a:ext>
             </a:extLst>
           </p:cNvPr>
@@ -247,7 +250,7 @@
           <p:cNvPr id="4" name="Date Placeholder 3">
             <a:extLst>
               <a:ext uri="{FF2B5EF4-FFF2-40B4-BE49-F238E27FC236}">
-                <a16:creationId xmlns:a16="http://schemas.microsoft.com/office/drawing/2014/main" id="{C33833C8-FAC5-A1C2-C768-CCBCA89A9156}"/>
+                <a16:creationId xmlns:a16="http://schemas.microsoft.com/office/drawing/2014/main" id="{DB29BDA0-5FA9-B1EB-5B79-60C793644F37}"/>
               </a:ext>
             </a:extLst>
           </p:cNvPr>
@@ -263,9 +266,9 @@
           <a:bodyPr/>
           <a:lstStyle/>
           <a:p>
-            <a:fld id="{B2F68664-1AD9-4835-8FD1-41EFF9726D29}" type="datetimeFigureOut">
+            <a:fld id="{EF1B7D9C-A3FB-4C4C-AE95-809B57867B86}" type="datetimeFigureOut">
               <a:rPr lang="en-AU" smtClean="0"/>
-              <a:t>17/09/2026</a:t>
+              <a:t>19/09/2026</a:t>
             </a:fld>
             <a:endParaRPr lang="en-AU"/>
           </a:p>
@@ -276,7 +279,7 @@
           <p:cNvPr id="5" name="Footer Placeholder 4">
             <a:extLst>
               <a:ext uri="{FF2B5EF4-FFF2-40B4-BE49-F238E27FC236}">
-                <a16:creationId xmlns:a16="http://schemas.microsoft.com/office/drawing/2014/main" id="{ED80542D-D569-B555-D2EB-356897DC112D}"/>
+                <a16:creationId xmlns:a16="http://schemas.microsoft.com/office/drawing/2014/main" id="{6D8B82A9-3474-B8BC-8EA7-C81023F8EF0F}"/>
               </a:ext>
             </a:extLst>
           </p:cNvPr>
@@ -301,7 +304,7 @@
           <p:cNvPr id="6" name="Slide Number Placeholder 5">
             <a:extLst>
               <a:ext uri="{FF2B5EF4-FFF2-40B4-BE49-F238E27FC236}">
-                <a16:creationId xmlns:a16="http://schemas.microsoft.com/office/drawing/2014/main" id="{6FE1EF1C-9D3E-E6E8-483C-A530DDF5F626}"/>
+                <a16:creationId xmlns:a16="http://schemas.microsoft.com/office/drawing/2014/main" id="{C4BEAE6E-DB43-ABF5-4DFA-6C18B0FD3E3A}"/>
               </a:ext>
             </a:extLst>
           </p:cNvPr>
@@ -317,7 +320,7 @@
           <a:bodyPr/>
           <a:lstStyle/>
           <a:p>
-            <a:fld id="{1D27C069-30F2-4954-BF7D-F242A30D399F}" type="slidenum">
+            <a:fld id="{F6C2F819-6852-4071-A1FC-F07BE40F9F0E}" type="slidenum">
               <a:rPr lang="en-AU" smtClean="0"/>
               <a:t>‹#›</a:t>
             </a:fld>
@@ -328,7 +331,7 @@
     </p:spTree>
     <p:extLst>
       <p:ext uri="{BB962C8B-B14F-4D97-AF65-F5344CB8AC3E}">
-        <p14:creationId xmlns:p14="http://schemas.microsoft.com/office/powerpoint/2010/main" val="2715354587"/>
+        <p14:creationId xmlns:p14="http://schemas.microsoft.com/office/powerpoint/2010/main" val="2078619722"/>
       </p:ext>
     </p:extLst>
   </p:cSld>
@@ -360,7 +363,7 @@
           <p:cNvPr id="2" name="Title 1">
             <a:extLst>
               <a:ext uri="{FF2B5EF4-FFF2-40B4-BE49-F238E27FC236}">
-                <a16:creationId xmlns:a16="http://schemas.microsoft.com/office/drawing/2014/main" id="{46E649FE-4E5F-DEAF-1A03-83DFAD38F850}"/>
+                <a16:creationId xmlns:a16="http://schemas.microsoft.com/office/drawing/2014/main" id="{39C52838-02C6-F94B-D6A1-4571737873EE}"/>
               </a:ext>
             </a:extLst>
           </p:cNvPr>
@@ -389,7 +392,7 @@
           <p:cNvPr id="3" name="Vertical Text Placeholder 2">
             <a:extLst>
               <a:ext uri="{FF2B5EF4-FFF2-40B4-BE49-F238E27FC236}">
-                <a16:creationId xmlns:a16="http://schemas.microsoft.com/office/drawing/2014/main" id="{82010F5A-B396-9B6E-E008-FCB4177414F6}"/>
+                <a16:creationId xmlns:a16="http://schemas.microsoft.com/office/drawing/2014/main" id="{D8D52578-789E-29B6-223E-8DFA9ABE766D}"/>
               </a:ext>
             </a:extLst>
           </p:cNvPr>
@@ -447,7 +450,7 @@
           <p:cNvPr id="4" name="Date Placeholder 3">
             <a:extLst>
               <a:ext uri="{FF2B5EF4-FFF2-40B4-BE49-F238E27FC236}">
-                <a16:creationId xmlns:a16="http://schemas.microsoft.com/office/drawing/2014/main" id="{C1B81861-2362-923E-5861-9A816B56E597}"/>
+                <a16:creationId xmlns:a16="http://schemas.microsoft.com/office/drawing/2014/main" id="{C2CA8C41-DCD5-D2B2-64E0-FE053D4F4900}"/>
               </a:ext>
             </a:extLst>
           </p:cNvPr>
@@ -463,9 +466,9 @@
           <a:bodyPr/>
           <a:lstStyle/>
           <a:p>
-            <a:fld id="{B2F68664-1AD9-4835-8FD1-41EFF9726D29}" type="datetimeFigureOut">
+            <a:fld id="{EF1B7D9C-A3FB-4C4C-AE95-809B57867B86}" type="datetimeFigureOut">
               <a:rPr lang="en-AU" smtClean="0"/>
-              <a:t>17/09/2026</a:t>
+              <a:t>19/09/2026</a:t>
             </a:fld>
             <a:endParaRPr lang="en-AU"/>
           </a:p>
@@ -476,7 +479,7 @@
           <p:cNvPr id="5" name="Footer Placeholder 4">
             <a:extLst>
               <a:ext uri="{FF2B5EF4-FFF2-40B4-BE49-F238E27FC236}">
-                <a16:creationId xmlns:a16="http://schemas.microsoft.com/office/drawing/2014/main" id="{2DA395C6-92BB-7710-FC77-8F2A25F7A6A9}"/>
+                <a16:creationId xmlns:a16="http://schemas.microsoft.com/office/drawing/2014/main" id="{FC876212-7F42-9EFB-D8F7-B7CC2A3BEF93}"/>
               </a:ext>
             </a:extLst>
           </p:cNvPr>
@@ -501,7 +504,7 @@
           <p:cNvPr id="6" name="Slide Number Placeholder 5">
             <a:extLst>
               <a:ext uri="{FF2B5EF4-FFF2-40B4-BE49-F238E27FC236}">
-                <a16:creationId xmlns:a16="http://schemas.microsoft.com/office/drawing/2014/main" id="{A7168DD7-8DC1-C833-AAF8-287232367C84}"/>
+                <a16:creationId xmlns:a16="http://schemas.microsoft.com/office/drawing/2014/main" id="{65BBDA61-14C0-8843-5689-F64FE210DF1D}"/>
               </a:ext>
             </a:extLst>
           </p:cNvPr>
@@ -517,7 +520,7 @@
           <a:bodyPr/>
           <a:lstStyle/>
           <a:p>
-            <a:fld id="{1D27C069-30F2-4954-BF7D-F242A30D399F}" type="slidenum">
+            <a:fld id="{F6C2F819-6852-4071-A1FC-F07BE40F9F0E}" type="slidenum">
               <a:rPr lang="en-AU" smtClean="0"/>
               <a:t>‹#›</a:t>
             </a:fld>
@@ -528,7 +531,7 @@
     </p:spTree>
     <p:extLst>
       <p:ext uri="{BB962C8B-B14F-4D97-AF65-F5344CB8AC3E}">
-        <p14:creationId xmlns:p14="http://schemas.microsoft.com/office/powerpoint/2010/main" val="2067999607"/>
+        <p14:creationId xmlns:p14="http://schemas.microsoft.com/office/powerpoint/2010/main" val="1762031750"/>
       </p:ext>
     </p:extLst>
   </p:cSld>
@@ -560,7 +563,7 @@
           <p:cNvPr id="2" name="Vertical Title 1">
             <a:extLst>
               <a:ext uri="{FF2B5EF4-FFF2-40B4-BE49-F238E27FC236}">
-                <a16:creationId xmlns:a16="http://schemas.microsoft.com/office/drawing/2014/main" id="{7EE4AC44-FAC1-3BAF-1E9A-4557681628C9}"/>
+                <a16:creationId xmlns:a16="http://schemas.microsoft.com/office/drawing/2014/main" id="{53BC8213-E688-BB8C-3518-FE790AAE63EE}"/>
               </a:ext>
             </a:extLst>
           </p:cNvPr>
@@ -594,7 +597,7 @@
           <p:cNvPr id="3" name="Vertical Text Placeholder 2">
             <a:extLst>
               <a:ext uri="{FF2B5EF4-FFF2-40B4-BE49-F238E27FC236}">
-                <a16:creationId xmlns:a16="http://schemas.microsoft.com/office/drawing/2014/main" id="{9D11F413-BF5F-7051-35A2-CBB17251415B}"/>
+                <a16:creationId xmlns:a16="http://schemas.microsoft.com/office/drawing/2014/main" id="{79886B73-6DF0-72E9-D624-03CBD11876EC}"/>
               </a:ext>
             </a:extLst>
           </p:cNvPr>
@@ -657,7 +660,7 @@
           <p:cNvPr id="4" name="Date Placeholder 3">
             <a:extLst>
               <a:ext uri="{FF2B5EF4-FFF2-40B4-BE49-F238E27FC236}">
-                <a16:creationId xmlns:a16="http://schemas.microsoft.com/office/drawing/2014/main" id="{91F9916C-E679-D1AE-7E64-AA709A305855}"/>
+                <a16:creationId xmlns:a16="http://schemas.microsoft.com/office/drawing/2014/main" id="{FA4138D5-84C6-EB23-D553-29060391B66A}"/>
               </a:ext>
             </a:extLst>
           </p:cNvPr>
@@ -673,9 +676,9 @@
           <a:bodyPr/>
           <a:lstStyle/>
           <a:p>
-            <a:fld id="{B2F68664-1AD9-4835-8FD1-41EFF9726D29}" type="datetimeFigureOut">
+            <a:fld id="{EF1B7D9C-A3FB-4C4C-AE95-809B57867B86}" type="datetimeFigureOut">
               <a:rPr lang="en-AU" smtClean="0"/>
-              <a:t>17/09/2026</a:t>
+              <a:t>19/09/2026</a:t>
             </a:fld>
             <a:endParaRPr lang="en-AU"/>
           </a:p>
@@ -686,7 +689,7 @@
           <p:cNvPr id="5" name="Footer Placeholder 4">
             <a:extLst>
               <a:ext uri="{FF2B5EF4-FFF2-40B4-BE49-F238E27FC236}">
-                <a16:creationId xmlns:a16="http://schemas.microsoft.com/office/drawing/2014/main" id="{F0A3839C-5DD9-48D8-CF34-4C2C25554458}"/>
+                <a16:creationId xmlns:a16="http://schemas.microsoft.com/office/drawing/2014/main" id="{5FC8EE78-D678-DB1A-54E1-FB6CE97AED39}"/>
               </a:ext>
             </a:extLst>
           </p:cNvPr>
@@ -711,7 +714,7 @@
           <p:cNvPr id="6" name="Slide Number Placeholder 5">
             <a:extLst>
               <a:ext uri="{FF2B5EF4-FFF2-40B4-BE49-F238E27FC236}">
-                <a16:creationId xmlns:a16="http://schemas.microsoft.com/office/drawing/2014/main" id="{9A1DC9C5-9803-D080-3456-595C22A5A70B}"/>
+                <a16:creationId xmlns:a16="http://schemas.microsoft.com/office/drawing/2014/main" id="{D9771760-AD51-8909-66B3-75BEF84C0466}"/>
               </a:ext>
             </a:extLst>
           </p:cNvPr>
@@ -727,7 +730,7 @@
           <a:bodyPr/>
           <a:lstStyle/>
           <a:p>
-            <a:fld id="{1D27C069-30F2-4954-BF7D-F242A30D399F}" type="slidenum">
+            <a:fld id="{F6C2F819-6852-4071-A1FC-F07BE40F9F0E}" type="slidenum">
               <a:rPr lang="en-AU" smtClean="0"/>
               <a:t>‹#›</a:t>
             </a:fld>
@@ -738,7 +741,7 @@
     </p:spTree>
     <p:extLst>
       <p:ext uri="{BB962C8B-B14F-4D97-AF65-F5344CB8AC3E}">
-        <p14:creationId xmlns:p14="http://schemas.microsoft.com/office/powerpoint/2010/main" val="364296117"/>
+        <p14:creationId xmlns:p14="http://schemas.microsoft.com/office/powerpoint/2010/main" val="2462073391"/>
       </p:ext>
     </p:extLst>
   </p:cSld>
@@ -770,7 +773,7 @@
           <p:cNvPr id="2" name="Title 1">
             <a:extLst>
               <a:ext uri="{FF2B5EF4-FFF2-40B4-BE49-F238E27FC236}">
-                <a16:creationId xmlns:a16="http://schemas.microsoft.com/office/drawing/2014/main" id="{4006D3FD-79C8-41DB-6A7E-7CD57D296977}"/>
+                <a16:creationId xmlns:a16="http://schemas.microsoft.com/office/drawing/2014/main" id="{C93DD98A-C929-4AF2-9156-570B6D3F88AB}"/>
               </a:ext>
             </a:extLst>
           </p:cNvPr>
@@ -799,7 +802,7 @@
           <p:cNvPr id="3" name="Content Placeholder 2">
             <a:extLst>
               <a:ext uri="{FF2B5EF4-FFF2-40B4-BE49-F238E27FC236}">
-                <a16:creationId xmlns:a16="http://schemas.microsoft.com/office/drawing/2014/main" id="{4AEDA96E-0AA7-9FCE-54B3-A7824BE01108}"/>
+                <a16:creationId xmlns:a16="http://schemas.microsoft.com/office/drawing/2014/main" id="{31405816-D0B1-BB83-95EB-92D956D3A75C}"/>
               </a:ext>
             </a:extLst>
           </p:cNvPr>
@@ -857,7 +860,7 @@
           <p:cNvPr id="4" name="Date Placeholder 3">
             <a:extLst>
               <a:ext uri="{FF2B5EF4-FFF2-40B4-BE49-F238E27FC236}">
-                <a16:creationId xmlns:a16="http://schemas.microsoft.com/office/drawing/2014/main" id="{BE16CD4D-C825-ED4C-49D0-976293A612F3}"/>
+                <a16:creationId xmlns:a16="http://schemas.microsoft.com/office/drawing/2014/main" id="{E8F15FF3-E945-B90A-F819-FCD6BFB756B4}"/>
               </a:ext>
             </a:extLst>
           </p:cNvPr>
@@ -873,9 +876,9 @@
           <a:bodyPr/>
           <a:lstStyle/>
           <a:p>
-            <a:fld id="{B2F68664-1AD9-4835-8FD1-41EFF9726D29}" type="datetimeFigureOut">
+            <a:fld id="{EF1B7D9C-A3FB-4C4C-AE95-809B57867B86}" type="datetimeFigureOut">
               <a:rPr lang="en-AU" smtClean="0"/>
-              <a:t>17/09/2026</a:t>
+              <a:t>19/09/2026</a:t>
             </a:fld>
             <a:endParaRPr lang="en-AU"/>
           </a:p>
@@ -886,7 +889,7 @@
           <p:cNvPr id="5" name="Footer Placeholder 4">
             <a:extLst>
               <a:ext uri="{FF2B5EF4-FFF2-40B4-BE49-F238E27FC236}">
-                <a16:creationId xmlns:a16="http://schemas.microsoft.com/office/drawing/2014/main" id="{189C58EB-2425-C216-6826-4B6248F8F27A}"/>
+                <a16:creationId xmlns:a16="http://schemas.microsoft.com/office/drawing/2014/main" id="{23752460-6C11-ED28-6965-8628646C86BA}"/>
               </a:ext>
             </a:extLst>
           </p:cNvPr>
@@ -911,7 +914,7 @@
           <p:cNvPr id="6" name="Slide Number Placeholder 5">
             <a:extLst>
               <a:ext uri="{FF2B5EF4-FFF2-40B4-BE49-F238E27FC236}">
-                <a16:creationId xmlns:a16="http://schemas.microsoft.com/office/drawing/2014/main" id="{E7F23BF7-EC88-E225-3CB9-8C8D5A3E644E}"/>
+                <a16:creationId xmlns:a16="http://schemas.microsoft.com/office/drawing/2014/main" id="{4F1EDD37-6325-480A-BAB3-6A41D72E240B}"/>
               </a:ext>
             </a:extLst>
           </p:cNvPr>
@@ -927,7 +930,7 @@
           <a:bodyPr/>
           <a:lstStyle/>
           <a:p>
-            <a:fld id="{1D27C069-30F2-4954-BF7D-F242A30D399F}" type="slidenum">
+            <a:fld id="{F6C2F819-6852-4071-A1FC-F07BE40F9F0E}" type="slidenum">
               <a:rPr lang="en-AU" smtClean="0"/>
               <a:t>‹#›</a:t>
             </a:fld>
@@ -938,7 +941,7 @@
     </p:spTree>
     <p:extLst>
       <p:ext uri="{BB962C8B-B14F-4D97-AF65-F5344CB8AC3E}">
-        <p14:creationId xmlns:p14="http://schemas.microsoft.com/office/powerpoint/2010/main" val="3486304012"/>
+        <p14:creationId xmlns:p14="http://schemas.microsoft.com/office/powerpoint/2010/main" val="862175113"/>
       </p:ext>
     </p:extLst>
   </p:cSld>
@@ -970,7 +973,7 @@
           <p:cNvPr id="2" name="Title 1">
             <a:extLst>
               <a:ext uri="{FF2B5EF4-FFF2-40B4-BE49-F238E27FC236}">
-                <a16:creationId xmlns:a16="http://schemas.microsoft.com/office/drawing/2014/main" id="{FE5D66D7-BE9B-D5F8-925E-18A1BCE84792}"/>
+                <a16:creationId xmlns:a16="http://schemas.microsoft.com/office/drawing/2014/main" id="{5E680730-DAEB-89B0-A482-2B56B6E0D526}"/>
               </a:ext>
             </a:extLst>
           </p:cNvPr>
@@ -1008,7 +1011,7 @@
           <p:cNvPr id="3" name="Text Placeholder 2">
             <a:extLst>
               <a:ext uri="{FF2B5EF4-FFF2-40B4-BE49-F238E27FC236}">
-                <a16:creationId xmlns:a16="http://schemas.microsoft.com/office/drawing/2014/main" id="{F17639FF-580F-7433-FFC5-27DB41EC579A}"/>
+                <a16:creationId xmlns:a16="http://schemas.microsoft.com/office/drawing/2014/main" id="{3D55EA3E-4421-98DB-5527-B6472ED7314E}"/>
               </a:ext>
             </a:extLst>
           </p:cNvPr>
@@ -1133,7 +1136,7 @@
           <p:cNvPr id="4" name="Date Placeholder 3">
             <a:extLst>
               <a:ext uri="{FF2B5EF4-FFF2-40B4-BE49-F238E27FC236}">
-                <a16:creationId xmlns:a16="http://schemas.microsoft.com/office/drawing/2014/main" id="{A08F7E8F-A0DE-470C-8E95-3B58BD6DD15D}"/>
+                <a16:creationId xmlns:a16="http://schemas.microsoft.com/office/drawing/2014/main" id="{87041EA9-99EF-59CB-B097-CEC211C204F6}"/>
               </a:ext>
             </a:extLst>
           </p:cNvPr>
@@ -1149,9 +1152,9 @@
           <a:bodyPr/>
           <a:lstStyle/>
           <a:p>
-            <a:fld id="{B2F68664-1AD9-4835-8FD1-41EFF9726D29}" type="datetimeFigureOut">
+            <a:fld id="{EF1B7D9C-A3FB-4C4C-AE95-809B57867B86}" type="datetimeFigureOut">
               <a:rPr lang="en-AU" smtClean="0"/>
-              <a:t>17/09/2026</a:t>
+              <a:t>19/09/2026</a:t>
             </a:fld>
             <a:endParaRPr lang="en-AU"/>
           </a:p>
@@ -1162,7 +1165,7 @@
           <p:cNvPr id="5" name="Footer Placeholder 4">
             <a:extLst>
               <a:ext uri="{FF2B5EF4-FFF2-40B4-BE49-F238E27FC236}">
-                <a16:creationId xmlns:a16="http://schemas.microsoft.com/office/drawing/2014/main" id="{D09C5D83-BBFE-71AF-1F3C-034107D7CC5A}"/>
+                <a16:creationId xmlns:a16="http://schemas.microsoft.com/office/drawing/2014/main" id="{6F60653E-0C4E-EDD3-DA94-EE3F3E717A77}"/>
               </a:ext>
             </a:extLst>
           </p:cNvPr>
@@ -1187,7 +1190,7 @@
           <p:cNvPr id="6" name="Slide Number Placeholder 5">
             <a:extLst>
               <a:ext uri="{FF2B5EF4-FFF2-40B4-BE49-F238E27FC236}">
-                <a16:creationId xmlns:a16="http://schemas.microsoft.com/office/drawing/2014/main" id="{B5970ABC-71F8-B71F-C802-E88FF8DDACBF}"/>
+                <a16:creationId xmlns:a16="http://schemas.microsoft.com/office/drawing/2014/main" id="{4E2A757C-1E72-8A3D-D1D5-A9C236ACCA1D}"/>
               </a:ext>
             </a:extLst>
           </p:cNvPr>
@@ -1203,7 +1206,7 @@
           <a:bodyPr/>
           <a:lstStyle/>
           <a:p>
-            <a:fld id="{1D27C069-30F2-4954-BF7D-F242A30D399F}" type="slidenum">
+            <a:fld id="{F6C2F819-6852-4071-A1FC-F07BE40F9F0E}" type="slidenum">
               <a:rPr lang="en-AU" smtClean="0"/>
               <a:t>‹#›</a:t>
             </a:fld>
@@ -1214,7 +1217,7 @@
     </p:spTree>
     <p:extLst>
       <p:ext uri="{BB962C8B-B14F-4D97-AF65-F5344CB8AC3E}">
-        <p14:creationId xmlns:p14="http://schemas.microsoft.com/office/powerpoint/2010/main" val="4444992"/>
+        <p14:creationId xmlns:p14="http://schemas.microsoft.com/office/powerpoint/2010/main" val="3032711792"/>
       </p:ext>
     </p:extLst>
   </p:cSld>
@@ -1246,7 +1249,7 @@
           <p:cNvPr id="2" name="Title 1">
             <a:extLst>
               <a:ext uri="{FF2B5EF4-FFF2-40B4-BE49-F238E27FC236}">
-                <a16:creationId xmlns:a16="http://schemas.microsoft.com/office/drawing/2014/main" id="{CEE650DD-F150-3AED-87C2-BD4A549CD046}"/>
+                <a16:creationId xmlns:a16="http://schemas.microsoft.com/office/drawing/2014/main" id="{85423338-8BC0-4E86-92F7-AC5D6A047854}"/>
               </a:ext>
             </a:extLst>
           </p:cNvPr>
@@ -1275,7 +1278,7 @@
           <p:cNvPr id="3" name="Content Placeholder 2">
             <a:extLst>
               <a:ext uri="{FF2B5EF4-FFF2-40B4-BE49-F238E27FC236}">
-                <a16:creationId xmlns:a16="http://schemas.microsoft.com/office/drawing/2014/main" id="{AFC20E57-278B-0165-342A-B4EF31733FEA}"/>
+                <a16:creationId xmlns:a16="http://schemas.microsoft.com/office/drawing/2014/main" id="{38ECBDD8-2741-67E2-FE3F-537CE9E867BA}"/>
               </a:ext>
             </a:extLst>
           </p:cNvPr>
@@ -1338,7 +1341,7 @@
           <p:cNvPr id="4" name="Content Placeholder 3">
             <a:extLst>
               <a:ext uri="{FF2B5EF4-FFF2-40B4-BE49-F238E27FC236}">
-                <a16:creationId xmlns:a16="http://schemas.microsoft.com/office/drawing/2014/main" id="{2A33E2EE-9E9D-6DE9-689E-25FCBE1AF0A4}"/>
+                <a16:creationId xmlns:a16="http://schemas.microsoft.com/office/drawing/2014/main" id="{E11B983E-A0F2-7A51-D348-4384E3A7C7D9}"/>
               </a:ext>
             </a:extLst>
           </p:cNvPr>
@@ -1401,7 +1404,7 @@
           <p:cNvPr id="5" name="Date Placeholder 4">
             <a:extLst>
               <a:ext uri="{FF2B5EF4-FFF2-40B4-BE49-F238E27FC236}">
-                <a16:creationId xmlns:a16="http://schemas.microsoft.com/office/drawing/2014/main" id="{A7F9795D-6D0D-3ED4-9869-A5992859D09B}"/>
+                <a16:creationId xmlns:a16="http://schemas.microsoft.com/office/drawing/2014/main" id="{3DE6CFA4-9A05-0161-6914-C752A1F8A687}"/>
               </a:ext>
             </a:extLst>
           </p:cNvPr>
@@ -1417,9 +1420,9 @@
           <a:bodyPr/>
           <a:lstStyle/>
           <a:p>
-            <a:fld id="{B2F68664-1AD9-4835-8FD1-41EFF9726D29}" type="datetimeFigureOut">
+            <a:fld id="{EF1B7D9C-A3FB-4C4C-AE95-809B57867B86}" type="datetimeFigureOut">
               <a:rPr lang="en-AU" smtClean="0"/>
-              <a:t>17/09/2026</a:t>
+              <a:t>19/09/2026</a:t>
             </a:fld>
             <a:endParaRPr lang="en-AU"/>
           </a:p>
@@ -1430,7 +1433,7 @@
           <p:cNvPr id="6" name="Footer Placeholder 5">
             <a:extLst>
               <a:ext uri="{FF2B5EF4-FFF2-40B4-BE49-F238E27FC236}">
-                <a16:creationId xmlns:a16="http://schemas.microsoft.com/office/drawing/2014/main" id="{7AD7B56D-EA50-9C84-C6A8-D11F8CC11A98}"/>
+                <a16:creationId xmlns:a16="http://schemas.microsoft.com/office/drawing/2014/main" id="{40E3D68F-D2C4-3D6C-A754-25C9F2B99667}"/>
               </a:ext>
             </a:extLst>
           </p:cNvPr>
@@ -1455,7 +1458,7 @@
           <p:cNvPr id="7" name="Slide Number Placeholder 6">
             <a:extLst>
               <a:ext uri="{FF2B5EF4-FFF2-40B4-BE49-F238E27FC236}">
-                <a16:creationId xmlns:a16="http://schemas.microsoft.com/office/drawing/2014/main" id="{3429B0EB-7809-EE29-A4F5-A0184F2E9195}"/>
+                <a16:creationId xmlns:a16="http://schemas.microsoft.com/office/drawing/2014/main" id="{B4AD25EA-E5CC-6D2D-49C8-FFC7B51F1E6C}"/>
               </a:ext>
             </a:extLst>
           </p:cNvPr>
@@ -1471,7 +1474,7 @@
           <a:bodyPr/>
           <a:lstStyle/>
           <a:p>
-            <a:fld id="{1D27C069-30F2-4954-BF7D-F242A30D399F}" type="slidenum">
+            <a:fld id="{F6C2F819-6852-4071-A1FC-F07BE40F9F0E}" type="slidenum">
               <a:rPr lang="en-AU" smtClean="0"/>
               <a:t>‹#›</a:t>
             </a:fld>
@@ -1482,7 +1485,7 @@
     </p:spTree>
     <p:extLst>
       <p:ext uri="{BB962C8B-B14F-4D97-AF65-F5344CB8AC3E}">
-        <p14:creationId xmlns:p14="http://schemas.microsoft.com/office/powerpoint/2010/main" val="3188035468"/>
+        <p14:creationId xmlns:p14="http://schemas.microsoft.com/office/powerpoint/2010/main" val="117373612"/>
       </p:ext>
     </p:extLst>
   </p:cSld>
@@ -1514,7 +1517,7 @@
           <p:cNvPr id="2" name="Title 1">
             <a:extLst>
               <a:ext uri="{FF2B5EF4-FFF2-40B4-BE49-F238E27FC236}">
-                <a16:creationId xmlns:a16="http://schemas.microsoft.com/office/drawing/2014/main" id="{C190AC77-8C74-D061-A967-1308F81DE1BB}"/>
+                <a16:creationId xmlns:a16="http://schemas.microsoft.com/office/drawing/2014/main" id="{9AD8A4FA-C626-97BC-982D-839FF32536CD}"/>
               </a:ext>
             </a:extLst>
           </p:cNvPr>
@@ -1548,7 +1551,7 @@
           <p:cNvPr id="3" name="Text Placeholder 2">
             <a:extLst>
               <a:ext uri="{FF2B5EF4-FFF2-40B4-BE49-F238E27FC236}">
-                <a16:creationId xmlns:a16="http://schemas.microsoft.com/office/drawing/2014/main" id="{10079788-FBF7-A1EA-2C66-17A1DF2EFBE7}"/>
+                <a16:creationId xmlns:a16="http://schemas.microsoft.com/office/drawing/2014/main" id="{0D6F6BD2-69AF-785C-1F37-9C1998B9E9B5}"/>
               </a:ext>
             </a:extLst>
           </p:cNvPr>
@@ -1619,7 +1622,7 @@
           <p:cNvPr id="4" name="Content Placeholder 3">
             <a:extLst>
               <a:ext uri="{FF2B5EF4-FFF2-40B4-BE49-F238E27FC236}">
-                <a16:creationId xmlns:a16="http://schemas.microsoft.com/office/drawing/2014/main" id="{6A077054-948E-4650-5E7E-CE2ADD5C7158}"/>
+                <a16:creationId xmlns:a16="http://schemas.microsoft.com/office/drawing/2014/main" id="{03317624-2645-A4DE-54CF-7628ED8F6B11}"/>
               </a:ext>
             </a:extLst>
           </p:cNvPr>
@@ -1682,7 +1685,7 @@
           <p:cNvPr id="5" name="Text Placeholder 4">
             <a:extLst>
               <a:ext uri="{FF2B5EF4-FFF2-40B4-BE49-F238E27FC236}">
-                <a16:creationId xmlns:a16="http://schemas.microsoft.com/office/drawing/2014/main" id="{C7E8285D-2278-51DD-4EE2-0338215927C9}"/>
+                <a16:creationId xmlns:a16="http://schemas.microsoft.com/office/drawing/2014/main" id="{D4F43B60-BAFA-C197-CD68-1E527FE659A6}"/>
               </a:ext>
             </a:extLst>
           </p:cNvPr>
@@ -1753,7 +1756,7 @@
           <p:cNvPr id="6" name="Content Placeholder 5">
             <a:extLst>
               <a:ext uri="{FF2B5EF4-FFF2-40B4-BE49-F238E27FC236}">
-                <a16:creationId xmlns:a16="http://schemas.microsoft.com/office/drawing/2014/main" id="{ECD0DD26-7EED-62DC-9EA5-4C44BF5E7F29}"/>
+                <a16:creationId xmlns:a16="http://schemas.microsoft.com/office/drawing/2014/main" id="{4311883F-3C16-5A90-CC5E-E6392430C2C9}"/>
               </a:ext>
             </a:extLst>
           </p:cNvPr>
@@ -1816,7 +1819,7 @@
           <p:cNvPr id="7" name="Date Placeholder 6">
             <a:extLst>
               <a:ext uri="{FF2B5EF4-FFF2-40B4-BE49-F238E27FC236}">
-                <a16:creationId xmlns:a16="http://schemas.microsoft.com/office/drawing/2014/main" id="{63403819-2760-7574-829F-0C07182FE7E3}"/>
+                <a16:creationId xmlns:a16="http://schemas.microsoft.com/office/drawing/2014/main" id="{9B3BE2FC-18FF-55C5-2067-118148BF785F}"/>
               </a:ext>
             </a:extLst>
           </p:cNvPr>
@@ -1832,9 +1835,9 @@
           <a:bodyPr/>
           <a:lstStyle/>
           <a:p>
-            <a:fld id="{B2F68664-1AD9-4835-8FD1-41EFF9726D29}" type="datetimeFigureOut">
+            <a:fld id="{EF1B7D9C-A3FB-4C4C-AE95-809B57867B86}" type="datetimeFigureOut">
               <a:rPr lang="en-AU" smtClean="0"/>
-              <a:t>17/09/2026</a:t>
+              <a:t>19/09/2026</a:t>
             </a:fld>
             <a:endParaRPr lang="en-AU"/>
           </a:p>
@@ -1845,7 +1848,7 @@
           <p:cNvPr id="8" name="Footer Placeholder 7">
             <a:extLst>
               <a:ext uri="{FF2B5EF4-FFF2-40B4-BE49-F238E27FC236}">
-                <a16:creationId xmlns:a16="http://schemas.microsoft.com/office/drawing/2014/main" id="{9C1FE065-5FE6-1BC0-F318-F4F5777DAD58}"/>
+                <a16:creationId xmlns:a16="http://schemas.microsoft.com/office/drawing/2014/main" id="{A86A4284-0B9B-9EE6-37BB-C7937DE5F195}"/>
               </a:ext>
             </a:extLst>
           </p:cNvPr>
@@ -1870,7 +1873,7 @@
           <p:cNvPr id="9" name="Slide Number Placeholder 8">
             <a:extLst>
               <a:ext uri="{FF2B5EF4-FFF2-40B4-BE49-F238E27FC236}">
-                <a16:creationId xmlns:a16="http://schemas.microsoft.com/office/drawing/2014/main" id="{B1D374B7-DE48-A08C-537E-CD7553CA072A}"/>
+                <a16:creationId xmlns:a16="http://schemas.microsoft.com/office/drawing/2014/main" id="{E1C0FE6B-E421-E48C-BD21-05BD9C011734}"/>
               </a:ext>
             </a:extLst>
           </p:cNvPr>
@@ -1886,7 +1889,7 @@
           <a:bodyPr/>
           <a:lstStyle/>
           <a:p>
-            <a:fld id="{1D27C069-30F2-4954-BF7D-F242A30D399F}" type="slidenum">
+            <a:fld id="{F6C2F819-6852-4071-A1FC-F07BE40F9F0E}" type="slidenum">
               <a:rPr lang="en-AU" smtClean="0"/>
               <a:t>‹#›</a:t>
             </a:fld>
@@ -1897,7 +1900,7 @@
     </p:spTree>
     <p:extLst>
       <p:ext uri="{BB962C8B-B14F-4D97-AF65-F5344CB8AC3E}">
-        <p14:creationId xmlns:p14="http://schemas.microsoft.com/office/powerpoint/2010/main" val="1641144500"/>
+        <p14:creationId xmlns:p14="http://schemas.microsoft.com/office/powerpoint/2010/main" val="2299158443"/>
       </p:ext>
     </p:extLst>
   </p:cSld>
@@ -1929,7 +1932,7 @@
           <p:cNvPr id="2" name="Title 1">
             <a:extLst>
               <a:ext uri="{FF2B5EF4-FFF2-40B4-BE49-F238E27FC236}">
-                <a16:creationId xmlns:a16="http://schemas.microsoft.com/office/drawing/2014/main" id="{BF3CDA5D-139A-7018-2B34-D66EA0CE9052}"/>
+                <a16:creationId xmlns:a16="http://schemas.microsoft.com/office/drawing/2014/main" id="{64EC750B-9BFC-AE0F-00A2-9F6DBF15E461}"/>
               </a:ext>
             </a:extLst>
           </p:cNvPr>
@@ -1958,7 +1961,7 @@
           <p:cNvPr id="3" name="Date Placeholder 2">
             <a:extLst>
               <a:ext uri="{FF2B5EF4-FFF2-40B4-BE49-F238E27FC236}">
-                <a16:creationId xmlns:a16="http://schemas.microsoft.com/office/drawing/2014/main" id="{6388DE64-CC95-0766-805F-18C7C64D9F81}"/>
+                <a16:creationId xmlns:a16="http://schemas.microsoft.com/office/drawing/2014/main" id="{42E3BECC-A402-63F9-4CF9-8A0C4883608D}"/>
               </a:ext>
             </a:extLst>
           </p:cNvPr>
@@ -1974,9 +1977,9 @@
           <a:bodyPr/>
           <a:lstStyle/>
           <a:p>
-            <a:fld id="{B2F68664-1AD9-4835-8FD1-41EFF9726D29}" type="datetimeFigureOut">
+            <a:fld id="{EF1B7D9C-A3FB-4C4C-AE95-809B57867B86}" type="datetimeFigureOut">
               <a:rPr lang="en-AU" smtClean="0"/>
-              <a:t>17/09/2026</a:t>
+              <a:t>19/09/2026</a:t>
             </a:fld>
             <a:endParaRPr lang="en-AU"/>
           </a:p>
@@ -1987,7 +1990,7 @@
           <p:cNvPr id="4" name="Footer Placeholder 3">
             <a:extLst>
               <a:ext uri="{FF2B5EF4-FFF2-40B4-BE49-F238E27FC236}">
-                <a16:creationId xmlns:a16="http://schemas.microsoft.com/office/drawing/2014/main" id="{75CF4FEA-BC3F-603D-1695-E58C46DE280C}"/>
+                <a16:creationId xmlns:a16="http://schemas.microsoft.com/office/drawing/2014/main" id="{D9D34F7F-EE3E-3A74-4331-2EBF7ED781D8}"/>
               </a:ext>
             </a:extLst>
           </p:cNvPr>
@@ -2012,7 +2015,7 @@
           <p:cNvPr id="5" name="Slide Number Placeholder 4">
             <a:extLst>
               <a:ext uri="{FF2B5EF4-FFF2-40B4-BE49-F238E27FC236}">
-                <a16:creationId xmlns:a16="http://schemas.microsoft.com/office/drawing/2014/main" id="{2864A966-D04C-2911-52D7-939D976A8F86}"/>
+                <a16:creationId xmlns:a16="http://schemas.microsoft.com/office/drawing/2014/main" id="{DF1D944F-2475-6D86-A0A3-5E6884470D1D}"/>
               </a:ext>
             </a:extLst>
           </p:cNvPr>
@@ -2028,7 +2031,7 @@
           <a:bodyPr/>
           <a:lstStyle/>
           <a:p>
-            <a:fld id="{1D27C069-30F2-4954-BF7D-F242A30D399F}" type="slidenum">
+            <a:fld id="{F6C2F819-6852-4071-A1FC-F07BE40F9F0E}" type="slidenum">
               <a:rPr lang="en-AU" smtClean="0"/>
               <a:t>‹#›</a:t>
             </a:fld>
@@ -2039,7 +2042,7 @@
     </p:spTree>
     <p:extLst>
       <p:ext uri="{BB962C8B-B14F-4D97-AF65-F5344CB8AC3E}">
-        <p14:creationId xmlns:p14="http://schemas.microsoft.com/office/powerpoint/2010/main" val="2738630355"/>
+        <p14:creationId xmlns:p14="http://schemas.microsoft.com/office/powerpoint/2010/main" val="2369529714"/>
       </p:ext>
     </p:extLst>
   </p:cSld>
@@ -2071,7 +2074,7 @@
           <p:cNvPr id="2" name="Date Placeholder 1">
             <a:extLst>
               <a:ext uri="{FF2B5EF4-FFF2-40B4-BE49-F238E27FC236}">
-                <a16:creationId xmlns:a16="http://schemas.microsoft.com/office/drawing/2014/main" id="{B03EC4F0-9B36-F167-63FB-444984FD94FA}"/>
+                <a16:creationId xmlns:a16="http://schemas.microsoft.com/office/drawing/2014/main" id="{96BD019C-AB4D-11B1-4EBA-42B2A632BBE7}"/>
               </a:ext>
             </a:extLst>
           </p:cNvPr>
@@ -2087,9 +2090,9 @@
           <a:bodyPr/>
           <a:lstStyle/>
           <a:p>
-            <a:fld id="{B2F68664-1AD9-4835-8FD1-41EFF9726D29}" type="datetimeFigureOut">
+            <a:fld id="{EF1B7D9C-A3FB-4C4C-AE95-809B57867B86}" type="datetimeFigureOut">
               <a:rPr lang="en-AU" smtClean="0"/>
-              <a:t>17/09/2026</a:t>
+              <a:t>19/09/2026</a:t>
             </a:fld>
             <a:endParaRPr lang="en-AU"/>
           </a:p>
@@ -2100,7 +2103,7 @@
           <p:cNvPr id="3" name="Footer Placeholder 2">
             <a:extLst>
               <a:ext uri="{FF2B5EF4-FFF2-40B4-BE49-F238E27FC236}">
-                <a16:creationId xmlns:a16="http://schemas.microsoft.com/office/drawing/2014/main" id="{72EFE8EF-683E-B7F1-AD5A-B7848F2E1839}"/>
+                <a16:creationId xmlns:a16="http://schemas.microsoft.com/office/drawing/2014/main" id="{95269A82-6758-456D-7BBF-58663416B346}"/>
               </a:ext>
             </a:extLst>
           </p:cNvPr>
@@ -2125,7 +2128,7 @@
           <p:cNvPr id="4" name="Slide Number Placeholder 3">
             <a:extLst>
               <a:ext uri="{FF2B5EF4-FFF2-40B4-BE49-F238E27FC236}">
-                <a16:creationId xmlns:a16="http://schemas.microsoft.com/office/drawing/2014/main" id="{25945B45-13F0-3F0D-6C43-E08587C98649}"/>
+                <a16:creationId xmlns:a16="http://schemas.microsoft.com/office/drawing/2014/main" id="{66B7CB78-1872-1F94-F01F-F31A9028DCE4}"/>
               </a:ext>
             </a:extLst>
           </p:cNvPr>
@@ -2141,7 +2144,7 @@
           <a:bodyPr/>
           <a:lstStyle/>
           <a:p>
-            <a:fld id="{1D27C069-30F2-4954-BF7D-F242A30D399F}" type="slidenum">
+            <a:fld id="{F6C2F819-6852-4071-A1FC-F07BE40F9F0E}" type="slidenum">
               <a:rPr lang="en-AU" smtClean="0"/>
               <a:t>‹#›</a:t>
             </a:fld>
@@ -2152,7 +2155,7 @@
     </p:spTree>
     <p:extLst>
       <p:ext uri="{BB962C8B-B14F-4D97-AF65-F5344CB8AC3E}">
-        <p14:creationId xmlns:p14="http://schemas.microsoft.com/office/powerpoint/2010/main" val="3319942880"/>
+        <p14:creationId xmlns:p14="http://schemas.microsoft.com/office/powerpoint/2010/main" val="2561970885"/>
       </p:ext>
     </p:extLst>
   </p:cSld>
@@ -2184,7 +2187,7 @@
           <p:cNvPr id="2" name="Title 1">
             <a:extLst>
               <a:ext uri="{FF2B5EF4-FFF2-40B4-BE49-F238E27FC236}">
-                <a16:creationId xmlns:a16="http://schemas.microsoft.com/office/drawing/2014/main" id="{2B03BF75-BBEA-63AC-DD2F-69A3951C1EF7}"/>
+                <a16:creationId xmlns:a16="http://schemas.microsoft.com/office/drawing/2014/main" id="{2627BDFB-1DEA-0E10-07B6-F8A477F270D1}"/>
               </a:ext>
             </a:extLst>
           </p:cNvPr>
@@ -2222,7 +2225,7 @@
           <p:cNvPr id="3" name="Content Placeholder 2">
             <a:extLst>
               <a:ext uri="{FF2B5EF4-FFF2-40B4-BE49-F238E27FC236}">
-                <a16:creationId xmlns:a16="http://schemas.microsoft.com/office/drawing/2014/main" id="{0626EC60-71A2-9322-5D52-C2BB7F5CD0C9}"/>
+                <a16:creationId xmlns:a16="http://schemas.microsoft.com/office/drawing/2014/main" id="{B6D20737-9456-C381-B26A-F084B1D61A11}"/>
               </a:ext>
             </a:extLst>
           </p:cNvPr>
@@ -2313,7 +2316,7 @@
           <p:cNvPr id="4" name="Text Placeholder 3">
             <a:extLst>
               <a:ext uri="{FF2B5EF4-FFF2-40B4-BE49-F238E27FC236}">
-                <a16:creationId xmlns:a16="http://schemas.microsoft.com/office/drawing/2014/main" id="{D5A95234-C92E-5A3E-F429-044440216FB2}"/>
+                <a16:creationId xmlns:a16="http://schemas.microsoft.com/office/drawing/2014/main" id="{66A22ECD-C96F-076C-7A51-B4974709AC41}"/>
               </a:ext>
             </a:extLst>
           </p:cNvPr>
@@ -2384,7 +2387,7 @@
           <p:cNvPr id="5" name="Date Placeholder 4">
             <a:extLst>
               <a:ext uri="{FF2B5EF4-FFF2-40B4-BE49-F238E27FC236}">
-                <a16:creationId xmlns:a16="http://schemas.microsoft.com/office/drawing/2014/main" id="{A4E696A3-C078-A512-5038-9B273B6A7D0D}"/>
+                <a16:creationId xmlns:a16="http://schemas.microsoft.com/office/drawing/2014/main" id="{84F1B4B9-781A-2683-6C1A-420078E25D98}"/>
               </a:ext>
             </a:extLst>
           </p:cNvPr>
@@ -2400,9 +2403,9 @@
           <a:bodyPr/>
           <a:lstStyle/>
           <a:p>
-            <a:fld id="{B2F68664-1AD9-4835-8FD1-41EFF9726D29}" type="datetimeFigureOut">
+            <a:fld id="{EF1B7D9C-A3FB-4C4C-AE95-809B57867B86}" type="datetimeFigureOut">
               <a:rPr lang="en-AU" smtClean="0"/>
-              <a:t>17/09/2026</a:t>
+              <a:t>19/09/2026</a:t>
             </a:fld>
             <a:endParaRPr lang="en-AU"/>
           </a:p>
@@ -2413,7 +2416,7 @@
           <p:cNvPr id="6" name="Footer Placeholder 5">
             <a:extLst>
               <a:ext uri="{FF2B5EF4-FFF2-40B4-BE49-F238E27FC236}">
-                <a16:creationId xmlns:a16="http://schemas.microsoft.com/office/drawing/2014/main" id="{362966AD-11AC-24B8-A6BE-304876262A7C}"/>
+                <a16:creationId xmlns:a16="http://schemas.microsoft.com/office/drawing/2014/main" id="{690CE395-19DF-780C-06C8-F44C9D24F72A}"/>
               </a:ext>
             </a:extLst>
           </p:cNvPr>
@@ -2438,7 +2441,7 @@
           <p:cNvPr id="7" name="Slide Number Placeholder 6">
             <a:extLst>
               <a:ext uri="{FF2B5EF4-FFF2-40B4-BE49-F238E27FC236}">
-                <a16:creationId xmlns:a16="http://schemas.microsoft.com/office/drawing/2014/main" id="{2C4BF8BD-81E2-0E63-2BBD-455004BFE3FD}"/>
+                <a16:creationId xmlns:a16="http://schemas.microsoft.com/office/drawing/2014/main" id="{525F5275-ED3C-1B0A-679E-924CE85341E9}"/>
               </a:ext>
             </a:extLst>
           </p:cNvPr>
@@ -2454,7 +2457,7 @@
           <a:bodyPr/>
           <a:lstStyle/>
           <a:p>
-            <a:fld id="{1D27C069-30F2-4954-BF7D-F242A30D399F}" type="slidenum">
+            <a:fld id="{F6C2F819-6852-4071-A1FC-F07BE40F9F0E}" type="slidenum">
               <a:rPr lang="en-AU" smtClean="0"/>
               <a:t>‹#›</a:t>
             </a:fld>
@@ -2465,7 +2468,7 @@
     </p:spTree>
     <p:extLst>
       <p:ext uri="{BB962C8B-B14F-4D97-AF65-F5344CB8AC3E}">
-        <p14:creationId xmlns:p14="http://schemas.microsoft.com/office/powerpoint/2010/main" val="3289465223"/>
+        <p14:creationId xmlns:p14="http://schemas.microsoft.com/office/powerpoint/2010/main" val="2765034860"/>
       </p:ext>
     </p:extLst>
   </p:cSld>
@@ -2497,7 +2500,7 @@
           <p:cNvPr id="2" name="Title 1">
             <a:extLst>
               <a:ext uri="{FF2B5EF4-FFF2-40B4-BE49-F238E27FC236}">
-                <a16:creationId xmlns:a16="http://schemas.microsoft.com/office/drawing/2014/main" id="{92B1FC8C-A43E-8413-7763-AD06B7FCB6C0}"/>
+                <a16:creationId xmlns:a16="http://schemas.microsoft.com/office/drawing/2014/main" id="{96B7DD1B-63EA-2AD9-997F-218CABF24358}"/>
               </a:ext>
             </a:extLst>
           </p:cNvPr>
@@ -2535,7 +2538,7 @@
           <p:cNvPr id="3" name="Picture Placeholder 2">
             <a:extLst>
               <a:ext uri="{FF2B5EF4-FFF2-40B4-BE49-F238E27FC236}">
-                <a16:creationId xmlns:a16="http://schemas.microsoft.com/office/drawing/2014/main" id="{FD6417BC-A63F-BE29-55BA-672D742CC057}"/>
+                <a16:creationId xmlns:a16="http://schemas.microsoft.com/office/drawing/2014/main" id="{B7F3FB2C-7486-1874-2B44-35C63A6AD7B5}"/>
               </a:ext>
             </a:extLst>
           </p:cNvPr>
@@ -2602,7 +2605,7 @@
           <p:cNvPr id="4" name="Text Placeholder 3">
             <a:extLst>
               <a:ext uri="{FF2B5EF4-FFF2-40B4-BE49-F238E27FC236}">
-                <a16:creationId xmlns:a16="http://schemas.microsoft.com/office/drawing/2014/main" id="{2694470E-9AC8-020A-0E07-ED8316DC227D}"/>
+                <a16:creationId xmlns:a16="http://schemas.microsoft.com/office/drawing/2014/main" id="{A9E13F48-AD89-2847-3FDC-454A9AF83C59}"/>
               </a:ext>
             </a:extLst>
           </p:cNvPr>
@@ -2673,7 +2676,7 @@
           <p:cNvPr id="5" name="Date Placeholder 4">
             <a:extLst>
               <a:ext uri="{FF2B5EF4-FFF2-40B4-BE49-F238E27FC236}">
-                <a16:creationId xmlns:a16="http://schemas.microsoft.com/office/drawing/2014/main" id="{AA575B2D-33D7-F8CB-38C5-EAC5D42A214B}"/>
+                <a16:creationId xmlns:a16="http://schemas.microsoft.com/office/drawing/2014/main" id="{3B080AF9-05E1-F232-2C70-7DEF8580A95A}"/>
               </a:ext>
             </a:extLst>
           </p:cNvPr>
@@ -2689,9 +2692,9 @@
           <a:bodyPr/>
           <a:lstStyle/>
           <a:p>
-            <a:fld id="{B2F68664-1AD9-4835-8FD1-41EFF9726D29}" type="datetimeFigureOut">
+            <a:fld id="{EF1B7D9C-A3FB-4C4C-AE95-809B57867B86}" type="datetimeFigureOut">
               <a:rPr lang="en-AU" smtClean="0"/>
-              <a:t>17/09/2026</a:t>
+              <a:t>19/09/2026</a:t>
             </a:fld>
             <a:endParaRPr lang="en-AU"/>
           </a:p>
@@ -2702,7 +2705,7 @@
           <p:cNvPr id="6" name="Footer Placeholder 5">
             <a:extLst>
               <a:ext uri="{FF2B5EF4-FFF2-40B4-BE49-F238E27FC236}">
-                <a16:creationId xmlns:a16="http://schemas.microsoft.com/office/drawing/2014/main" id="{ADB70170-1C45-9BE1-3E54-72C96F94B378}"/>
+                <a16:creationId xmlns:a16="http://schemas.microsoft.com/office/drawing/2014/main" id="{62D7BE23-ADED-F50E-E99C-43A621DDDF25}"/>
               </a:ext>
             </a:extLst>
           </p:cNvPr>
@@ -2727,7 +2730,7 @@
           <p:cNvPr id="7" name="Slide Number Placeholder 6">
             <a:extLst>
               <a:ext uri="{FF2B5EF4-FFF2-40B4-BE49-F238E27FC236}">
-                <a16:creationId xmlns:a16="http://schemas.microsoft.com/office/drawing/2014/main" id="{8AD33551-C15C-3D02-44FE-65E75170A7B4}"/>
+                <a16:creationId xmlns:a16="http://schemas.microsoft.com/office/drawing/2014/main" id="{BE6CB237-2A4D-0C20-BD84-C8FA31031596}"/>
               </a:ext>
             </a:extLst>
           </p:cNvPr>
@@ -2743,7 +2746,7 @@
           <a:bodyPr/>
           <a:lstStyle/>
           <a:p>
-            <a:fld id="{1D27C069-30F2-4954-BF7D-F242A30D399F}" type="slidenum">
+            <a:fld id="{F6C2F819-6852-4071-A1FC-F07BE40F9F0E}" type="slidenum">
               <a:rPr lang="en-AU" smtClean="0"/>
               <a:t>‹#›</a:t>
             </a:fld>
@@ -2754,7 +2757,7 @@
     </p:spTree>
     <p:extLst>
       <p:ext uri="{BB962C8B-B14F-4D97-AF65-F5344CB8AC3E}">
-        <p14:creationId xmlns:p14="http://schemas.microsoft.com/office/powerpoint/2010/main" val="1399800201"/>
+        <p14:creationId xmlns:p14="http://schemas.microsoft.com/office/powerpoint/2010/main" val="2015759037"/>
       </p:ext>
     </p:extLst>
   </p:cSld>
@@ -2791,7 +2794,7 @@
           <p:cNvPr id="2" name="Title Placeholder 1">
             <a:extLst>
               <a:ext uri="{FF2B5EF4-FFF2-40B4-BE49-F238E27FC236}">
-                <a16:creationId xmlns:a16="http://schemas.microsoft.com/office/drawing/2014/main" id="{B907C0D3-B7B5-2D5D-7ED0-50A02E53E232}"/>
+                <a16:creationId xmlns:a16="http://schemas.microsoft.com/office/drawing/2014/main" id="{726E4FC6-29B4-1C83-4B49-7494C1B04EC7}"/>
               </a:ext>
             </a:extLst>
           </p:cNvPr>
@@ -2830,7 +2833,7 @@
           <p:cNvPr id="3" name="Text Placeholder 2">
             <a:extLst>
               <a:ext uri="{FF2B5EF4-FFF2-40B4-BE49-F238E27FC236}">
-                <a16:creationId xmlns:a16="http://schemas.microsoft.com/office/drawing/2014/main" id="{34A675B5-6A47-B710-7C27-C197513D118E}"/>
+                <a16:creationId xmlns:a16="http://schemas.microsoft.com/office/drawing/2014/main" id="{652391DF-18CB-9F26-844E-1789153AD533}"/>
               </a:ext>
             </a:extLst>
           </p:cNvPr>
@@ -2898,7 +2901,7 @@
           <p:cNvPr id="4" name="Date Placeholder 3">
             <a:extLst>
               <a:ext uri="{FF2B5EF4-FFF2-40B4-BE49-F238E27FC236}">
-                <a16:creationId xmlns:a16="http://schemas.microsoft.com/office/drawing/2014/main" id="{538E7EEB-DFDB-3614-7FDE-BB02244CB4C1}"/>
+                <a16:creationId xmlns:a16="http://schemas.microsoft.com/office/drawing/2014/main" id="{5495C158-1588-C763-9020-CFC29F4EBCF1}"/>
               </a:ext>
             </a:extLst>
           </p:cNvPr>
@@ -2932,9 +2935,9 @@
             </a:lvl1pPr>
           </a:lstStyle>
           <a:p>
-            <a:fld id="{B2F68664-1AD9-4835-8FD1-41EFF9726D29}" type="datetimeFigureOut">
+            <a:fld id="{EF1B7D9C-A3FB-4C4C-AE95-809B57867B86}" type="datetimeFigureOut">
               <a:rPr lang="en-AU" smtClean="0"/>
-              <a:t>17/09/2026</a:t>
+              <a:t>19/09/2026</a:t>
             </a:fld>
             <a:endParaRPr lang="en-AU"/>
           </a:p>
@@ -2945,7 +2948,7 @@
           <p:cNvPr id="5" name="Footer Placeholder 4">
             <a:extLst>
               <a:ext uri="{FF2B5EF4-FFF2-40B4-BE49-F238E27FC236}">
-                <a16:creationId xmlns:a16="http://schemas.microsoft.com/office/drawing/2014/main" id="{1C328831-1B74-5A5B-E87A-C4B1D8D8DEB4}"/>
+                <a16:creationId xmlns:a16="http://schemas.microsoft.com/office/drawing/2014/main" id="{649320B5-1D62-EC3A-B5C2-BEC3052F3EE2}"/>
               </a:ext>
             </a:extLst>
           </p:cNvPr>
@@ -2988,7 +2991,7 @@
           <p:cNvPr id="6" name="Slide Number Placeholder 5">
             <a:extLst>
               <a:ext uri="{FF2B5EF4-FFF2-40B4-BE49-F238E27FC236}">
-                <a16:creationId xmlns:a16="http://schemas.microsoft.com/office/drawing/2014/main" id="{0E7BFD06-71F0-1559-9890-6FDA279389D5}"/>
+                <a16:creationId xmlns:a16="http://schemas.microsoft.com/office/drawing/2014/main" id="{879B3B8E-E680-1D7E-5050-B5B82FC9B2D0}"/>
               </a:ext>
             </a:extLst>
           </p:cNvPr>
@@ -3022,7 +3025,7 @@
             </a:lvl1pPr>
           </a:lstStyle>
           <a:p>
-            <a:fld id="{1D27C069-30F2-4954-BF7D-F242A30D399F}" type="slidenum">
+            <a:fld id="{F6C2F819-6852-4071-A1FC-F07BE40F9F0E}" type="slidenum">
               <a:rPr lang="en-AU" smtClean="0"/>
               <a:t>‹#›</a:t>
             </a:fld>
@@ -3033,7 +3036,7 @@
     </p:spTree>
     <p:extLst>
       <p:ext uri="{BB962C8B-B14F-4D97-AF65-F5344CB8AC3E}">
-        <p14:creationId xmlns:p14="http://schemas.microsoft.com/office/powerpoint/2010/main" val="583318380"/>
+        <p14:creationId xmlns:p14="http://schemas.microsoft.com/office/powerpoint/2010/main" val="3524654082"/>
       </p:ext>
     </p:extLst>
   </p:cSld>
@@ -3356,7 +3359,7 @@
           <p:cNvPr id="2" name="Heading">
             <a:extLst>
               <a:ext uri="{FF2B5EF4-FFF2-40B4-BE49-F238E27FC236}">
-                <a16:creationId xmlns:a16="http://schemas.microsoft.com/office/drawing/2014/main" id="{91F8B2B0-1120-5847-0B0A-D1E6705D1534}"/>
+                <a16:creationId xmlns:a16="http://schemas.microsoft.com/office/drawing/2014/main" id="{4CC8EB6C-7517-B7B1-B1FD-85E7625CADDF}"/>
               </a:ext>
             </a:extLst>
           </p:cNvPr>
@@ -3395,7 +3398,7 @@
           <p:cNvPr id="3" name="Instructions">
             <a:extLst>
               <a:ext uri="{FF2B5EF4-FFF2-40B4-BE49-F238E27FC236}">
-                <a16:creationId xmlns:a16="http://schemas.microsoft.com/office/drawing/2014/main" id="{DE17DF60-E191-85CF-EADC-AACA9DF7CF7D}"/>
+                <a16:creationId xmlns:a16="http://schemas.microsoft.com/office/drawing/2014/main" id="{ACF7F16E-D68B-3E9B-A0CD-6BBCC05A667F}"/>
               </a:ext>
             </a:extLst>
           </p:cNvPr>
@@ -3434,7 +3437,7 @@
           <p:cNvPr id="4" name="TextBox 3">
             <a:extLst>
               <a:ext uri="{FF2B5EF4-FFF2-40B4-BE49-F238E27FC236}">
-                <a16:creationId xmlns:a16="http://schemas.microsoft.com/office/drawing/2014/main" id="{0C00D208-5216-C788-239E-E2C82707C1FC}"/>
+                <a16:creationId xmlns:a16="http://schemas.microsoft.com/office/drawing/2014/main" id="{E3E0C603-7B3D-255A-72C4-EA7B21CE26BE}"/>
               </a:ext>
             </a:extLst>
           </p:cNvPr>
@@ -3463,16 +3466,132 @@
                   <a:srgbClr val="282828"/>
                 </a:solidFill>
               </a:rPr>
-              <a:t>The AlignPro tab is on the ribbon.
-Two dropdowns carry the state the six align buttons are crossed with:
-    Reference  -  what to align against: the anchor shape, the selection, the slide, the
-                  slide margins, or the layout's content placeholder.
-    Measure    -  which rectangle to align: the shape frame (what PowerPoint itself uses,
-                  which ignores rotation), the visual bounds (what you actually see), or
-                  the text inside.
-Undo is PowerPoint's own - Ctrl+Z, the ribbon button and the Quick Access Toolbar all
-reverse exactly one AlignPro command.
-Slide 2 is the one to try first. It is the reason this add-in exists.</a:t>
+              <a:t>The AlignPro tab is on the ribbon.</a:t>
+            </a:r>
+          </a:p>
+          <a:p>
+            <a:endParaRPr lang="en-AU" sz="1500">
+              <a:solidFill>
+                <a:srgbClr val="282828"/>
+              </a:solidFill>
+            </a:endParaRPr>
+          </a:p>
+          <a:p>
+            <a:r>
+              <a:rPr lang="en-AU" sz="1500">
+                <a:solidFill>
+                  <a:srgbClr val="282828"/>
+                </a:solidFill>
+              </a:rPr>
+              <a:t>Two dropdowns carry the state the six align buttons are crossed with:</a:t>
+            </a:r>
+          </a:p>
+          <a:p>
+            <a:endParaRPr lang="en-AU" sz="1500">
+              <a:solidFill>
+                <a:srgbClr val="282828"/>
+              </a:solidFill>
+            </a:endParaRPr>
+          </a:p>
+          <a:p>
+            <a:r>
+              <a:rPr lang="en-AU" sz="1500">
+                <a:solidFill>
+                  <a:srgbClr val="282828"/>
+                </a:solidFill>
+              </a:rPr>
+              <a:t>    Reference  -  what to align against: the anchor shape, the selection, the slide, the</a:t>
+            </a:r>
+          </a:p>
+          <a:p>
+            <a:r>
+              <a:rPr lang="en-AU" sz="1500">
+                <a:solidFill>
+                  <a:srgbClr val="282828"/>
+                </a:solidFill>
+              </a:rPr>
+              <a:t>                  slide margins, or the layout's content placeholder.</a:t>
+            </a:r>
+          </a:p>
+          <a:p>
+            <a:endParaRPr lang="en-AU" sz="1500">
+              <a:solidFill>
+                <a:srgbClr val="282828"/>
+              </a:solidFill>
+            </a:endParaRPr>
+          </a:p>
+          <a:p>
+            <a:r>
+              <a:rPr lang="en-AU" sz="1500">
+                <a:solidFill>
+                  <a:srgbClr val="282828"/>
+                </a:solidFill>
+              </a:rPr>
+              <a:t>    Measure    -  which rectangle to align: the shape frame (what PowerPoint itself uses,</a:t>
+            </a:r>
+          </a:p>
+          <a:p>
+            <a:r>
+              <a:rPr lang="en-AU" sz="1500">
+                <a:solidFill>
+                  <a:srgbClr val="282828"/>
+                </a:solidFill>
+              </a:rPr>
+              <a:t>                  which ignores rotation), the visual bounds (what you actually see), or</a:t>
+            </a:r>
+          </a:p>
+          <a:p>
+            <a:r>
+              <a:rPr lang="en-AU" sz="1500">
+                <a:solidFill>
+                  <a:srgbClr val="282828"/>
+                </a:solidFill>
+              </a:rPr>
+              <a:t>                  the text inside.</a:t>
+            </a:r>
+          </a:p>
+          <a:p>
+            <a:endParaRPr lang="en-AU" sz="1500">
+              <a:solidFill>
+                <a:srgbClr val="282828"/>
+              </a:solidFill>
+            </a:endParaRPr>
+          </a:p>
+          <a:p>
+            <a:r>
+              <a:rPr lang="en-AU" sz="1500">
+                <a:solidFill>
+                  <a:srgbClr val="282828"/>
+                </a:solidFill>
+              </a:rPr>
+              <a:t>Undo is PowerPoint's own - Ctrl+Z, the ribbon button and the Quick Access Toolbar all</a:t>
+            </a:r>
+          </a:p>
+          <a:p>
+            <a:r>
+              <a:rPr lang="en-AU" sz="1500">
+                <a:solidFill>
+                  <a:srgbClr val="282828"/>
+                </a:solidFill>
+              </a:rPr>
+              <a:t>reverse exactly one AlignPro command.</a:t>
+            </a:r>
+          </a:p>
+          <a:p>
+            <a:endParaRPr lang="en-AU" sz="1500">
+              <a:solidFill>
+                <a:srgbClr val="282828"/>
+              </a:solidFill>
+            </a:endParaRPr>
+          </a:p>
+          <a:p>
+            <a:r>
+              <a:rPr lang="en-AU" sz="1500">
+                <a:solidFill>
+                  <a:srgbClr val="282828"/>
+                </a:solidFill>
+              </a:rPr>
+              <a:t>Slide 2 is the one to try first. It is the reason this add-in exists.</a:t>
             </a:r>
           </a:p>
         </p:txBody>
@@ -3480,7 +3599,7 @@
     </p:spTree>
     <p:extLst>
       <p:ext uri="{BB962C8B-B14F-4D97-AF65-F5344CB8AC3E}">
-        <p14:creationId xmlns:p14="http://schemas.microsoft.com/office/powerpoint/2010/main" val="2832939565"/>
+        <p14:creationId xmlns:p14="http://schemas.microsoft.com/office/powerpoint/2010/main" val="2988810995"/>
       </p:ext>
     </p:extLst>
   </p:cSld>
@@ -3512,7 +3631,7 @@
           <p:cNvPr id="2" name="Heading">
             <a:extLst>
               <a:ext uri="{FF2B5EF4-FFF2-40B4-BE49-F238E27FC236}">
-                <a16:creationId xmlns:a16="http://schemas.microsoft.com/office/drawing/2014/main" id="{9717B2D5-264E-B2A4-0152-64285FD61457}"/>
+                <a16:creationId xmlns:a16="http://schemas.microsoft.com/office/drawing/2014/main" id="{279AB168-05C6-886E-E499-950E711D536D}"/>
               </a:ext>
             </a:extLst>
           </p:cNvPr>
@@ -3541,7 +3660,7 @@
                   <a:srgbClr val="282828"/>
                 </a:solidFill>
               </a:rPr>
-              <a:t>Align to the slide, or to its margins</a:t>
+              <a:t>Groups are one object</a:t>
             </a:r>
           </a:p>
         </p:txBody>
@@ -3551,7 +3670,7 @@
           <p:cNvPr id="3" name="Instructions">
             <a:extLst>
               <a:ext uri="{FF2B5EF4-FFF2-40B4-BE49-F238E27FC236}">
-                <a16:creationId xmlns:a16="http://schemas.microsoft.com/office/drawing/2014/main" id="{2EEF2D3A-8554-49C0-3E54-1EC1ED80352B}"/>
+                <a16:creationId xmlns:a16="http://schemas.microsoft.com/office/drawing/2014/main" id="{EE959B63-63E5-1B92-1DBC-2721A712DC46}"/>
               </a:ext>
             </a:extLst>
           </p:cNvPr>
@@ -3580,2535 +3699,6 @@
                   <a:srgbClr val="7F7F7F"/>
                 </a:solidFill>
               </a:rPr>
-              <a:t>Select one shape. Reference = Slide then Align &gt; Centre. Then Reference = Slide margins with Margin = 36.</a:t>
-            </a:r>
-          </a:p>
-        </p:txBody>
-      </p:sp>
-      <p:sp>
-        <p:nvSpPr>
-          <p:cNvPr id="4" name="Wanderer">
-            <a:extLst>
-              <a:ext uri="{FF2B5EF4-FFF2-40B4-BE49-F238E27FC236}">
-                <a16:creationId xmlns:a16="http://schemas.microsoft.com/office/drawing/2014/main" id="{9F8CC8FF-DDF0-E998-51A8-14A9A2E510D3}"/>
-              </a:ext>
-            </a:extLst>
-          </p:cNvPr>
-          <p:cNvSpPr/>
-          <p:nvPr/>
-        </p:nvSpPr>
-        <p:spPr>
-          <a:xfrm>
-            <a:off x="1905000" y="2540000"/>
-            <a:ext cx="2794000" cy="1524000"/>
-          </a:xfrm>
-          <a:prstGeom prst="rect">
-            <a:avLst/>
-          </a:prstGeom>
-          <a:solidFill>
-            <a:srgbClr val="FF7F0E"/>
-          </a:solidFill>
-          <a:ln w="19050" cap="flat" cmpd="sng" algn="ctr">
-            <a:noFill/>
-            <a:prstDash val="solid"/>
-            <a:miter lim="800000"/>
-          </a:ln>
-          <a:effectLst/>
-          <a:extLst>
-            <a:ext uri="{91240B29-F687-4F45-9708-019B960494DF}">
-              <a14:hiddenLine xmlns:a14="http://schemas.microsoft.com/office/drawing/2010/main" w="19050" cap="flat" cmpd="sng" algn="ctr">
-                <a:solidFill>
-                  <a:schemeClr val="accent1">
-                    <a:shade val="15000"/>
-                  </a:schemeClr>
-                </a:solidFill>
-                <a:prstDash val="solid"/>
-                <a:miter lim="800000"/>
-              </a14:hiddenLine>
-            </a:ext>
-          </a:extLst>
-        </p:spPr>
-        <p:style>
-          <a:lnRef idx="2">
-            <a:schemeClr val="accent1">
-              <a:shade val="15000"/>
-            </a:schemeClr>
-          </a:lnRef>
-          <a:fillRef idx="1">
-            <a:schemeClr val="accent1"/>
-          </a:fillRef>
-          <a:effectRef idx="0">
-            <a:schemeClr val="accent1"/>
-          </a:effectRef>
-          <a:fontRef idx="minor">
-            <a:schemeClr val="lt1"/>
-          </a:fontRef>
-        </p:style>
-        <p:txBody>
-          <a:bodyPr rtlCol="0" anchor="ctr"/>
-          <a:lstStyle/>
-          <a:p>
-            <a:pPr algn="ctr"/>
-            <a:r>
-              <a:rPr lang="en-AU" sz="1400" b="1">
-                <a:solidFill>
-                  <a:srgbClr val="FFFFFF"/>
-                </a:solidFill>
-              </a:rPr>
-              <a:t>Move me</a:t>
-            </a:r>
-          </a:p>
-        </p:txBody>
-      </p:sp>
-      <p:sp>
-        <p:nvSpPr>
-          <p:cNvPr id="5" name="Friend">
-            <a:extLst>
-              <a:ext uri="{FF2B5EF4-FFF2-40B4-BE49-F238E27FC236}">
-                <a16:creationId xmlns:a16="http://schemas.microsoft.com/office/drawing/2014/main" id="{47133852-853B-FB6C-CC34-4C2407B1884A}"/>
-              </a:ext>
-            </a:extLst>
-          </p:cNvPr>
-          <p:cNvSpPr/>
-          <p:nvPr/>
-        </p:nvSpPr>
-        <p:spPr>
-          <a:xfrm>
-            <a:off x="7874000" y="4318000"/>
-            <a:ext cx="2032000" cy="1143000"/>
-          </a:xfrm>
-          <a:prstGeom prst="rect">
-            <a:avLst/>
-          </a:prstGeom>
-          <a:solidFill>
-            <a:srgbClr val="2CA02C"/>
-          </a:solidFill>
-          <a:ln w="19050" cap="flat" cmpd="sng" algn="ctr">
-            <a:noFill/>
-            <a:prstDash val="solid"/>
-            <a:miter lim="800000"/>
-          </a:ln>
-          <a:effectLst/>
-          <a:extLst>
-            <a:ext uri="{91240B29-F687-4F45-9708-019B960494DF}">
-              <a14:hiddenLine xmlns:a14="http://schemas.microsoft.com/office/drawing/2010/main" w="19050" cap="flat" cmpd="sng" algn="ctr">
-                <a:solidFill>
-                  <a:schemeClr val="accent1">
-                    <a:shade val="15000"/>
-                  </a:schemeClr>
-                </a:solidFill>
-                <a:prstDash val="solid"/>
-                <a:miter lim="800000"/>
-              </a14:hiddenLine>
-            </a:ext>
-          </a:extLst>
-        </p:spPr>
-        <p:style>
-          <a:lnRef idx="2">
-            <a:schemeClr val="accent1">
-              <a:shade val="15000"/>
-            </a:schemeClr>
-          </a:lnRef>
-          <a:fillRef idx="1">
-            <a:schemeClr val="accent1"/>
-          </a:fillRef>
-          <a:effectRef idx="0">
-            <a:schemeClr val="accent1"/>
-          </a:effectRef>
-          <a:fontRef idx="minor">
-            <a:schemeClr val="lt1"/>
-          </a:fontRef>
-        </p:style>
-        <p:txBody>
-          <a:bodyPr rtlCol="0" anchor="ctr"/>
-          <a:lstStyle/>
-          <a:p>
-            <a:pPr algn="ctr"/>
-            <a:r>
-              <a:rPr lang="en-AU" sz="1400" b="1">
-                <a:solidFill>
-                  <a:srgbClr val="FFFFFF"/>
-                </a:solidFill>
-              </a:rPr>
-              <a:t>Friend</a:t>
-            </a:r>
-          </a:p>
-        </p:txBody>
-      </p:sp>
-      <p:sp>
-        <p:nvSpPr>
-          <p:cNvPr id="6" name="TextBox 5">
-            <a:extLst>
-              <a:ext uri="{FF2B5EF4-FFF2-40B4-BE49-F238E27FC236}">
-                <a16:creationId xmlns:a16="http://schemas.microsoft.com/office/drawing/2014/main" id="{3773579A-9577-0D5B-AA02-4B78E0AC5F45}"/>
-              </a:ext>
-            </a:extLst>
-          </p:cNvPr>
-          <p:cNvSpPr txBox="1"/>
-          <p:nvPr/>
-        </p:nvSpPr>
-        <p:spPr>
-          <a:xfrm>
-            <a:off x="508000" y="5969000"/>
-            <a:ext cx="11176000" cy="276999"/>
-          </a:xfrm>
-          <a:prstGeom prst="rect">
-            <a:avLst/>
-          </a:prstGeom>
-          <a:noFill/>
-        </p:spPr>
-        <p:txBody>
-          <a:bodyPr vert="horz" rtlCol="0">
-            <a:spAutoFit/>
-          </a:bodyPr>
-          <a:lstStyle/>
-          <a:p>
-            <a:r>
-              <a:rPr lang="en-AU" sz="1200">
-                <a:solidFill>
-                  <a:srgbClr val="7F7F7F"/>
-                </a:solidFill>
-              </a:rPr>
-              <a:t>Aligning a single shape to the selection is meaningless, so AlignPro refuses it and says why. Against the slide it is perfectly meaningful, so it works.</a:t>
-            </a:r>
-          </a:p>
-        </p:txBody>
-      </p:sp>
-    </p:spTree>
-    <p:extLst>
-      <p:ext uri="{BB962C8B-B14F-4D97-AF65-F5344CB8AC3E}">
-        <p14:creationId xmlns:p14="http://schemas.microsoft.com/office/powerpoint/2010/main" val="614560245"/>
-      </p:ext>
-    </p:extLst>
-  </p:cSld>
-  <p:clrMapOvr>
-    <a:masterClrMapping/>
-  </p:clrMapOvr>
-</p:sld>
-</file>
-
-<file path=ppt/slides/slide2.xml><?xml version="1.0" encoding="utf-8"?>
-<p:sld xmlns:a="http://schemas.openxmlformats.org/drawingml/2006/main" xmlns:r="http://schemas.openxmlformats.org/officeDocument/2006/relationships" xmlns:p="http://schemas.openxmlformats.org/presentationml/2006/main">
-  <p:cSld>
-    <p:spTree>
-      <p:nvGrpSpPr>
-        <p:cNvPr id="1" name=""/>
-        <p:cNvGrpSpPr/>
-        <p:nvPr/>
-      </p:nvGrpSpPr>
-      <p:grpSpPr>
-        <a:xfrm>
-          <a:off x="0" y="0"/>
-          <a:ext cx="0" cy="0"/>
-          <a:chOff x="0" y="0"/>
-          <a:chExt cx="0" cy="0"/>
-        </a:xfrm>
-      </p:grpSpPr>
-      <p:sp>
-        <p:nvSpPr>
-          <p:cNvPr id="2" name="Heading">
-            <a:extLst>
-              <a:ext uri="{FF2B5EF4-FFF2-40B4-BE49-F238E27FC236}">
-                <a16:creationId xmlns:a16="http://schemas.microsoft.com/office/drawing/2014/main" id="{4D2320BC-2772-E423-E9CD-60A94269EFEE}"/>
-              </a:ext>
-            </a:extLst>
-          </p:cNvPr>
-          <p:cNvSpPr txBox="1"/>
-          <p:nvPr/>
-        </p:nvSpPr>
-        <p:spPr>
-          <a:xfrm>
-            <a:off x="508000" y="304800"/>
-            <a:ext cx="11176000" cy="461665"/>
-          </a:xfrm>
-          <a:prstGeom prst="rect">
-            <a:avLst/>
-          </a:prstGeom>
-          <a:noFill/>
-        </p:spPr>
-        <p:txBody>
-          <a:bodyPr vert="horz" rtlCol="0">
-            <a:spAutoFit/>
-          </a:bodyPr>
-          <a:lstStyle/>
-          <a:p>
-            <a:r>
-              <a:rPr lang="en-AU" sz="2400" b="1">
-                <a:solidFill>
-                  <a:srgbClr val="282828"/>
-                </a:solidFill>
-              </a:rPr>
-              <a:t>Rotation: the case PowerPoint gets wrong</a:t>
-            </a:r>
-          </a:p>
-        </p:txBody>
-      </p:sp>
-      <p:sp>
-        <p:nvSpPr>
-          <p:cNvPr id="3" name="Instructions">
-            <a:extLst>
-              <a:ext uri="{FF2B5EF4-FFF2-40B4-BE49-F238E27FC236}">
-                <a16:creationId xmlns:a16="http://schemas.microsoft.com/office/drawing/2014/main" id="{E71C122A-F3C4-B9C3-B47A-9982D7CC89EE}"/>
-              </a:ext>
-            </a:extLst>
-          </p:cNvPr>
-          <p:cNvSpPr txBox="1"/>
-          <p:nvPr/>
-        </p:nvSpPr>
-        <p:spPr>
-          <a:xfrm>
-            <a:off x="508000" y="762000"/>
-            <a:ext cx="11176000" cy="292388"/>
-          </a:xfrm>
-          <a:prstGeom prst="rect">
-            <a:avLst/>
-          </a:prstGeom>
-          <a:noFill/>
-        </p:spPr>
-        <p:txBody>
-          <a:bodyPr vert="horz" rtlCol="0">
-            <a:spAutoFit/>
-          </a:bodyPr>
-          <a:lstStyle/>
-          <a:p>
-            <a:r>
-              <a:rPr lang="en-AU" sz="1300">
-                <a:solidFill>
-                  <a:srgbClr val="7F7F7F"/>
-                </a:solidFill>
-              </a:rPr>
-              <a:t>Select all four. Align &gt; Left with Measure = Shape frame, undo, then again with Measure = Visual bounds.</a:t>
-            </a:r>
-          </a:p>
-        </p:txBody>
-      </p:sp>
-      <p:sp>
-        <p:nvSpPr>
-          <p:cNvPr id="4" name="Plain1">
-            <a:extLst>
-              <a:ext uri="{FF2B5EF4-FFF2-40B4-BE49-F238E27FC236}">
-                <a16:creationId xmlns:a16="http://schemas.microsoft.com/office/drawing/2014/main" id="{F94D94CD-8D56-C2EF-A632-525CF8B0A8A5}"/>
-              </a:ext>
-            </a:extLst>
-          </p:cNvPr>
-          <p:cNvSpPr/>
-          <p:nvPr/>
-        </p:nvSpPr>
-        <p:spPr>
-          <a:xfrm>
-            <a:off x="1778000" y="1905000"/>
-            <a:ext cx="1905000" cy="1016000"/>
-          </a:xfrm>
-          <a:prstGeom prst="rect">
-            <a:avLst/>
-          </a:prstGeom>
-          <a:solidFill>
-            <a:srgbClr val="1F77B4"/>
-          </a:solidFill>
-          <a:ln w="19050" cap="flat" cmpd="sng" algn="ctr">
-            <a:noFill/>
-            <a:prstDash val="solid"/>
-            <a:miter lim="800000"/>
-          </a:ln>
-          <a:effectLst/>
-          <a:extLst>
-            <a:ext uri="{91240B29-F687-4F45-9708-019B960494DF}">
-              <a14:hiddenLine xmlns:a14="http://schemas.microsoft.com/office/drawing/2010/main" w="19050" cap="flat" cmpd="sng" algn="ctr">
-                <a:solidFill>
-                  <a:schemeClr val="accent1">
-                    <a:shade val="15000"/>
-                  </a:schemeClr>
-                </a:solidFill>
-                <a:prstDash val="solid"/>
-                <a:miter lim="800000"/>
-              </a14:hiddenLine>
-            </a:ext>
-          </a:extLst>
-        </p:spPr>
-        <p:style>
-          <a:lnRef idx="2">
-            <a:schemeClr val="accent1">
-              <a:shade val="15000"/>
-            </a:schemeClr>
-          </a:lnRef>
-          <a:fillRef idx="1">
-            <a:schemeClr val="accent1"/>
-          </a:fillRef>
-          <a:effectRef idx="0">
-            <a:schemeClr val="accent1"/>
-          </a:effectRef>
-          <a:fontRef idx="minor">
-            <a:schemeClr val="lt1"/>
-          </a:fontRef>
-        </p:style>
-        <p:txBody>
-          <a:bodyPr rtlCol="0" anchor="ctr"/>
-          <a:lstStyle/>
-          <a:p>
-            <a:pPr algn="ctr"/>
-            <a:r>
-              <a:rPr lang="en-AU" sz="1400" b="1">
-                <a:solidFill>
-                  <a:srgbClr val="FFFFFF"/>
-                </a:solidFill>
-              </a:rPr>
-              <a:t>Plain1</a:t>
-            </a:r>
-          </a:p>
-        </p:txBody>
-      </p:sp>
-      <p:sp>
-        <p:nvSpPr>
-          <p:cNvPr id="5" name="Tall">
-            <a:extLst>
-              <a:ext uri="{FF2B5EF4-FFF2-40B4-BE49-F238E27FC236}">
-                <a16:creationId xmlns:a16="http://schemas.microsoft.com/office/drawing/2014/main" id="{6935E25E-B6CE-81B4-230C-36256A9227F3}"/>
-              </a:ext>
-            </a:extLst>
-          </p:cNvPr>
-          <p:cNvSpPr/>
-          <p:nvPr/>
-        </p:nvSpPr>
-        <p:spPr>
-          <a:xfrm>
-            <a:off x="4191000" y="3302000"/>
-            <a:ext cx="1143000" cy="1905000"/>
-          </a:xfrm>
-          <a:prstGeom prst="rect">
-            <a:avLst/>
-          </a:prstGeom>
-          <a:solidFill>
-            <a:srgbClr val="2CA02C"/>
-          </a:solidFill>
-          <a:ln w="19050" cap="flat" cmpd="sng" algn="ctr">
-            <a:noFill/>
-            <a:prstDash val="solid"/>
-            <a:miter lim="800000"/>
-          </a:ln>
-          <a:effectLst/>
-          <a:extLst>
-            <a:ext uri="{91240B29-F687-4F45-9708-019B960494DF}">
-              <a14:hiddenLine xmlns:a14="http://schemas.microsoft.com/office/drawing/2010/main" w="19050" cap="flat" cmpd="sng" algn="ctr">
-                <a:solidFill>
-                  <a:schemeClr val="accent1">
-                    <a:shade val="15000"/>
-                  </a:schemeClr>
-                </a:solidFill>
-                <a:prstDash val="solid"/>
-                <a:miter lim="800000"/>
-              </a14:hiddenLine>
-            </a:ext>
-          </a:extLst>
-        </p:spPr>
-        <p:style>
-          <a:lnRef idx="2">
-            <a:schemeClr val="accent1">
-              <a:shade val="15000"/>
-            </a:schemeClr>
-          </a:lnRef>
-          <a:fillRef idx="1">
-            <a:schemeClr val="accent1"/>
-          </a:fillRef>
-          <a:effectRef idx="0">
-            <a:schemeClr val="accent1"/>
-          </a:effectRef>
-          <a:fontRef idx="minor">
-            <a:schemeClr val="lt1"/>
-          </a:fontRef>
-        </p:style>
-        <p:txBody>
-          <a:bodyPr rtlCol="0" anchor="ctr"/>
-          <a:lstStyle/>
-          <a:p>
-            <a:pPr algn="ctr"/>
-            <a:r>
-              <a:rPr lang="en-AU" sz="1400" b="1">
-                <a:solidFill>
-                  <a:srgbClr val="FFFFFF"/>
-                </a:solidFill>
-              </a:rPr>
-              <a:t>Tall</a:t>
-            </a:r>
-          </a:p>
-        </p:txBody>
-      </p:sp>
-      <p:sp>
-        <p:nvSpPr>
-          <p:cNvPr id="6" name="Rotated">
-            <a:extLst>
-              <a:ext uri="{FF2B5EF4-FFF2-40B4-BE49-F238E27FC236}">
-                <a16:creationId xmlns:a16="http://schemas.microsoft.com/office/drawing/2014/main" id="{26E2C418-B438-8F30-1CA5-15E5ED69CDE2}"/>
-              </a:ext>
-            </a:extLst>
-          </p:cNvPr>
-          <p:cNvSpPr/>
-          <p:nvPr/>
-        </p:nvSpPr>
-        <p:spPr>
-          <a:xfrm rot="1800000">
-            <a:off x="6604000" y="2032000"/>
-            <a:ext cx="2286000" cy="1143000"/>
-          </a:xfrm>
-          <a:prstGeom prst="rect">
-            <a:avLst/>
-          </a:prstGeom>
-          <a:solidFill>
-            <a:srgbClr val="FF7F0E"/>
-          </a:solidFill>
-          <a:ln w="19050" cap="flat" cmpd="sng" algn="ctr">
-            <a:noFill/>
-            <a:prstDash val="solid"/>
-            <a:miter lim="800000"/>
-          </a:ln>
-          <a:effectLst/>
-          <a:extLst>
-            <a:ext uri="{91240B29-F687-4F45-9708-019B960494DF}">
-              <a14:hiddenLine xmlns:a14="http://schemas.microsoft.com/office/drawing/2010/main" w="19050" cap="flat" cmpd="sng" algn="ctr">
-                <a:solidFill>
-                  <a:schemeClr val="accent1">
-                    <a:shade val="15000"/>
-                  </a:schemeClr>
-                </a:solidFill>
-                <a:prstDash val="solid"/>
-                <a:miter lim="800000"/>
-              </a14:hiddenLine>
-            </a:ext>
-          </a:extLst>
-        </p:spPr>
-        <p:style>
-          <a:lnRef idx="2">
-            <a:schemeClr val="accent1">
-              <a:shade val="15000"/>
-            </a:schemeClr>
-          </a:lnRef>
-          <a:fillRef idx="1">
-            <a:schemeClr val="accent1"/>
-          </a:fillRef>
-          <a:effectRef idx="0">
-            <a:schemeClr val="accent1"/>
-          </a:effectRef>
-          <a:fontRef idx="minor">
-            <a:schemeClr val="lt1"/>
-          </a:fontRef>
-        </p:style>
-        <p:txBody>
-          <a:bodyPr rtlCol="0" anchor="ctr"/>
-          <a:lstStyle/>
-          <a:p>
-            <a:pPr algn="ctr"/>
-            <a:r>
-              <a:rPr lang="en-AU" sz="1400" b="1">
-                <a:solidFill>
-                  <a:srgbClr val="FFFFFF"/>
-                </a:solidFill>
-              </a:rPr>
-              <a:t>Rotated 30</a:t>
-            </a:r>
-          </a:p>
-        </p:txBody>
-      </p:sp>
-      <p:sp>
-        <p:nvSpPr>
-          <p:cNvPr id="7" name="Plain2">
-            <a:extLst>
-              <a:ext uri="{FF2B5EF4-FFF2-40B4-BE49-F238E27FC236}">
-                <a16:creationId xmlns:a16="http://schemas.microsoft.com/office/drawing/2014/main" id="{9483BAFC-7E51-C17F-DEBA-BA39AF8CDDB2}"/>
-              </a:ext>
-            </a:extLst>
-          </p:cNvPr>
-          <p:cNvSpPr/>
-          <p:nvPr/>
-        </p:nvSpPr>
-        <p:spPr>
-          <a:xfrm>
-            <a:off x="9398000" y="4191000"/>
-            <a:ext cx="1651000" cy="889000"/>
-          </a:xfrm>
-          <a:prstGeom prst="rect">
-            <a:avLst/>
-          </a:prstGeom>
-          <a:solidFill>
-            <a:srgbClr val="9467BD"/>
-          </a:solidFill>
-          <a:ln w="19050" cap="flat" cmpd="sng" algn="ctr">
-            <a:noFill/>
-            <a:prstDash val="solid"/>
-            <a:miter lim="800000"/>
-          </a:ln>
-          <a:effectLst/>
-          <a:extLst>
-            <a:ext uri="{91240B29-F687-4F45-9708-019B960494DF}">
-              <a14:hiddenLine xmlns:a14="http://schemas.microsoft.com/office/drawing/2010/main" w="19050" cap="flat" cmpd="sng" algn="ctr">
-                <a:solidFill>
-                  <a:schemeClr val="accent1">
-                    <a:shade val="15000"/>
-                  </a:schemeClr>
-                </a:solidFill>
-                <a:prstDash val="solid"/>
-                <a:miter lim="800000"/>
-              </a14:hiddenLine>
-            </a:ext>
-          </a:extLst>
-        </p:spPr>
-        <p:style>
-          <a:lnRef idx="2">
-            <a:schemeClr val="accent1">
-              <a:shade val="15000"/>
-            </a:schemeClr>
-          </a:lnRef>
-          <a:fillRef idx="1">
-            <a:schemeClr val="accent1"/>
-          </a:fillRef>
-          <a:effectRef idx="0">
-            <a:schemeClr val="accent1"/>
-          </a:effectRef>
-          <a:fontRef idx="minor">
-            <a:schemeClr val="lt1"/>
-          </a:fontRef>
-        </p:style>
-        <p:txBody>
-          <a:bodyPr rtlCol="0" anchor="ctr"/>
-          <a:lstStyle/>
-          <a:p>
-            <a:pPr algn="ctr"/>
-            <a:r>
-              <a:rPr lang="en-AU" sz="1400" b="1">
-                <a:solidFill>
-                  <a:srgbClr val="FFFFFF"/>
-                </a:solidFill>
-              </a:rPr>
-              <a:t>Plain2</a:t>
-            </a:r>
-          </a:p>
-        </p:txBody>
-      </p:sp>
-      <p:sp>
-        <p:nvSpPr>
-          <p:cNvPr id="8" name="TextBox 7">
-            <a:extLst>
-              <a:ext uri="{FF2B5EF4-FFF2-40B4-BE49-F238E27FC236}">
-                <a16:creationId xmlns:a16="http://schemas.microsoft.com/office/drawing/2014/main" id="{8671E1AF-16CD-A9E9-302B-BD98F778126B}"/>
-              </a:ext>
-            </a:extLst>
-          </p:cNvPr>
-          <p:cNvSpPr txBox="1"/>
-          <p:nvPr/>
-        </p:nvSpPr>
-        <p:spPr>
-          <a:xfrm>
-            <a:off x="508000" y="5969000"/>
-            <a:ext cx="11176000" cy="276999"/>
-          </a:xfrm>
-          <a:prstGeom prst="rect">
-            <a:avLst/>
-          </a:prstGeom>
-          <a:noFill/>
-        </p:spPr>
-        <p:txBody>
-          <a:bodyPr vert="horz" rtlCol="0">
-            <a:spAutoFit/>
-          </a:bodyPr>
-          <a:lstStyle/>
-          <a:p>
-            <a:r>
-              <a:rPr lang="en-AU" sz="1200">
-                <a:solidFill>
-                  <a:srgbClr val="7F7F7F"/>
-                </a:solidFill>
-              </a:rPr>
-              <a:t>In frame mode the rotated shape looks wrong, because PowerPoint aligns an unrotated rectangle it never draws. Visual bounds fixes it.</a:t>
-            </a:r>
-          </a:p>
-        </p:txBody>
-      </p:sp>
-    </p:spTree>
-    <p:extLst>
-      <p:ext uri="{BB962C8B-B14F-4D97-AF65-F5344CB8AC3E}">
-        <p14:creationId xmlns:p14="http://schemas.microsoft.com/office/powerpoint/2010/main" val="666713107"/>
-      </p:ext>
-    </p:extLst>
-  </p:cSld>
-  <p:clrMapOvr>
-    <a:masterClrMapping/>
-  </p:clrMapOvr>
-</p:sld>
-</file>
-
-<file path=ppt/slides/slide3.xml><?xml version="1.0" encoding="utf-8"?>
-<p:sld xmlns:a="http://schemas.openxmlformats.org/drawingml/2006/main" xmlns:r="http://schemas.openxmlformats.org/officeDocument/2006/relationships" xmlns:p="http://schemas.openxmlformats.org/presentationml/2006/main">
-  <p:cSld>
-    <p:spTree>
-      <p:nvGrpSpPr>
-        <p:cNvPr id="1" name=""/>
-        <p:cNvGrpSpPr/>
-        <p:nvPr/>
-      </p:nvGrpSpPr>
-      <p:grpSpPr>
-        <a:xfrm>
-          <a:off x="0" y="0"/>
-          <a:ext cx="0" cy="0"/>
-          <a:chOff x="0" y="0"/>
-          <a:chExt cx="0" cy="0"/>
-        </a:xfrm>
-      </p:grpSpPr>
-      <p:sp>
-        <p:nvSpPr>
-          <p:cNvPr id="2" name="Heading">
-            <a:extLst>
-              <a:ext uri="{FF2B5EF4-FFF2-40B4-BE49-F238E27FC236}">
-                <a16:creationId xmlns:a16="http://schemas.microsoft.com/office/drawing/2014/main" id="{1CA91E4A-5456-7ABA-DD98-7484F4C179EB}"/>
-              </a:ext>
-            </a:extLst>
-          </p:cNvPr>
-          <p:cNvSpPr txBox="1"/>
-          <p:nvPr/>
-        </p:nvSpPr>
-        <p:spPr>
-          <a:xfrm>
-            <a:off x="508000" y="304800"/>
-            <a:ext cx="11176000" cy="461665"/>
-          </a:xfrm>
-          <a:prstGeom prst="rect">
-            <a:avLst/>
-          </a:prstGeom>
-          <a:noFill/>
-        </p:spPr>
-        <p:txBody>
-          <a:bodyPr vert="horz" rtlCol="0">
-            <a:spAutoFit/>
-          </a:bodyPr>
-          <a:lstStyle/>
-          <a:p>
-            <a:r>
-              <a:rPr lang="en-AU" sz="2400" b="1">
-                <a:solidFill>
-                  <a:srgbClr val="282828"/>
-                </a:solidFill>
-              </a:rPr>
-              <a:t>Align to an anchor</a:t>
-            </a:r>
-          </a:p>
-        </p:txBody>
-      </p:sp>
-      <p:sp>
-        <p:nvSpPr>
-          <p:cNvPr id="3" name="Instructions">
-            <a:extLst>
-              <a:ext uri="{FF2B5EF4-FFF2-40B4-BE49-F238E27FC236}">
-                <a16:creationId xmlns:a16="http://schemas.microsoft.com/office/drawing/2014/main" id="{42239874-37AA-E7B6-D76D-A19B80EDD550}"/>
-              </a:ext>
-            </a:extLst>
-          </p:cNvPr>
-          <p:cNvSpPr txBox="1"/>
-          <p:nvPr/>
-        </p:nvSpPr>
-        <p:spPr>
-          <a:xfrm>
-            <a:off x="508000" y="762000"/>
-            <a:ext cx="11176000" cy="292388"/>
-          </a:xfrm>
-          <a:prstGeom prst="rect">
-            <a:avLst/>
-          </a:prstGeom>
-          <a:noFill/>
-        </p:spPr>
-        <p:txBody>
-          <a:bodyPr vert="horz" rtlCol="0">
-            <a:spAutoFit/>
-          </a:bodyPr>
-          <a:lstStyle/>
-          <a:p>
-            <a:r>
-              <a:rPr lang="en-AU" sz="1300">
-                <a:solidFill>
-                  <a:srgbClr val="7F7F7F"/>
-                </a:solidFill>
-              </a:rPr>
-              <a:t>Set Reference = Anchor. Select the three small shapes, then Ctrl+click BIG ANCHOR last, and Align &gt; Left.</a:t>
-            </a:r>
-          </a:p>
-        </p:txBody>
-      </p:sp>
-      <p:sp>
-        <p:nvSpPr>
-          <p:cNvPr id="4" name="Small1">
-            <a:extLst>
-              <a:ext uri="{FF2B5EF4-FFF2-40B4-BE49-F238E27FC236}">
-                <a16:creationId xmlns:a16="http://schemas.microsoft.com/office/drawing/2014/main" id="{DECBE808-C135-CEEA-38DB-64C6C765E8FD}"/>
-              </a:ext>
-            </a:extLst>
-          </p:cNvPr>
-          <p:cNvSpPr/>
-          <p:nvPr/>
-        </p:nvSpPr>
-        <p:spPr>
-          <a:xfrm>
-            <a:off x="1524000" y="2159000"/>
-            <a:ext cx="1397000" cy="762000"/>
-          </a:xfrm>
-          <a:prstGeom prst="rect">
-            <a:avLst/>
-          </a:prstGeom>
-          <a:solidFill>
-            <a:srgbClr val="1F77B4"/>
-          </a:solidFill>
-          <a:ln w="19050" cap="flat" cmpd="sng" algn="ctr">
-            <a:noFill/>
-            <a:prstDash val="solid"/>
-            <a:miter lim="800000"/>
-          </a:ln>
-          <a:effectLst/>
-          <a:extLst>
-            <a:ext uri="{91240B29-F687-4F45-9708-019B960494DF}">
-              <a14:hiddenLine xmlns:a14="http://schemas.microsoft.com/office/drawing/2010/main" w="19050" cap="flat" cmpd="sng" algn="ctr">
-                <a:solidFill>
-                  <a:schemeClr val="accent1">
-                    <a:shade val="15000"/>
-                  </a:schemeClr>
-                </a:solidFill>
-                <a:prstDash val="solid"/>
-                <a:miter lim="800000"/>
-              </a14:hiddenLine>
-            </a:ext>
-          </a:extLst>
-        </p:spPr>
-        <p:style>
-          <a:lnRef idx="2">
-            <a:schemeClr val="accent1">
-              <a:shade val="15000"/>
-            </a:schemeClr>
-          </a:lnRef>
-          <a:fillRef idx="1">
-            <a:schemeClr val="accent1"/>
-          </a:fillRef>
-          <a:effectRef idx="0">
-            <a:schemeClr val="accent1"/>
-          </a:effectRef>
-          <a:fontRef idx="minor">
-            <a:schemeClr val="lt1"/>
-          </a:fontRef>
-        </p:style>
-        <p:txBody>
-          <a:bodyPr rtlCol="0" anchor="ctr"/>
-          <a:lstStyle/>
-          <a:p>
-            <a:pPr algn="ctr"/>
-            <a:r>
-              <a:rPr lang="en-AU" sz="1400" b="1">
-                <a:solidFill>
-                  <a:srgbClr val="FFFFFF"/>
-                </a:solidFill>
-              </a:rPr>
-              <a:t>Small1</a:t>
-            </a:r>
-          </a:p>
-        </p:txBody>
-      </p:sp>
-      <p:sp>
-        <p:nvSpPr>
-          <p:cNvPr id="5" name="Small2">
-            <a:extLst>
-              <a:ext uri="{FF2B5EF4-FFF2-40B4-BE49-F238E27FC236}">
-                <a16:creationId xmlns:a16="http://schemas.microsoft.com/office/drawing/2014/main" id="{2C5DD125-9487-0EE7-544B-2610C2C2D33E}"/>
-              </a:ext>
-            </a:extLst>
-          </p:cNvPr>
-          <p:cNvSpPr/>
-          <p:nvPr/>
-        </p:nvSpPr>
-        <p:spPr>
-          <a:xfrm>
-            <a:off x="3175000" y="3302000"/>
-            <a:ext cx="1397000" cy="762000"/>
-          </a:xfrm>
-          <a:prstGeom prst="rect">
-            <a:avLst/>
-          </a:prstGeom>
-          <a:solidFill>
-            <a:srgbClr val="2CA02C"/>
-          </a:solidFill>
-          <a:ln w="19050" cap="flat" cmpd="sng" algn="ctr">
-            <a:noFill/>
-            <a:prstDash val="solid"/>
-            <a:miter lim="800000"/>
-          </a:ln>
-          <a:effectLst/>
-          <a:extLst>
-            <a:ext uri="{91240B29-F687-4F45-9708-019B960494DF}">
-              <a14:hiddenLine xmlns:a14="http://schemas.microsoft.com/office/drawing/2010/main" w="19050" cap="flat" cmpd="sng" algn="ctr">
-                <a:solidFill>
-                  <a:schemeClr val="accent1">
-                    <a:shade val="15000"/>
-                  </a:schemeClr>
-                </a:solidFill>
-                <a:prstDash val="solid"/>
-                <a:miter lim="800000"/>
-              </a14:hiddenLine>
-            </a:ext>
-          </a:extLst>
-        </p:spPr>
-        <p:style>
-          <a:lnRef idx="2">
-            <a:schemeClr val="accent1">
-              <a:shade val="15000"/>
-            </a:schemeClr>
-          </a:lnRef>
-          <a:fillRef idx="1">
-            <a:schemeClr val="accent1"/>
-          </a:fillRef>
-          <a:effectRef idx="0">
-            <a:schemeClr val="accent1"/>
-          </a:effectRef>
-          <a:fontRef idx="minor">
-            <a:schemeClr val="lt1"/>
-          </a:fontRef>
-        </p:style>
-        <p:txBody>
-          <a:bodyPr rtlCol="0" anchor="ctr"/>
-          <a:lstStyle/>
-          <a:p>
-            <a:pPr algn="ctr"/>
-            <a:r>
-              <a:rPr lang="en-AU" sz="1400" b="1">
-                <a:solidFill>
-                  <a:srgbClr val="FFFFFF"/>
-                </a:solidFill>
-              </a:rPr>
-              <a:t>Small2</a:t>
-            </a:r>
-          </a:p>
-        </p:txBody>
-      </p:sp>
-      <p:sp>
-        <p:nvSpPr>
-          <p:cNvPr id="6" name="Small3">
-            <a:extLst>
-              <a:ext uri="{FF2B5EF4-FFF2-40B4-BE49-F238E27FC236}">
-                <a16:creationId xmlns:a16="http://schemas.microsoft.com/office/drawing/2014/main" id="{BD20AE5D-8A27-72B2-019D-D6231DCF1B4A}"/>
-              </a:ext>
-            </a:extLst>
-          </p:cNvPr>
-          <p:cNvSpPr/>
-          <p:nvPr/>
-        </p:nvSpPr>
-        <p:spPr>
-          <a:xfrm>
-            <a:off x="2286000" y="4445000"/>
-            <a:ext cx="1397000" cy="762000"/>
-          </a:xfrm>
-          <a:prstGeom prst="rect">
-            <a:avLst/>
-          </a:prstGeom>
-          <a:solidFill>
-            <a:srgbClr val="9467BD"/>
-          </a:solidFill>
-          <a:ln w="19050" cap="flat" cmpd="sng" algn="ctr">
-            <a:noFill/>
-            <a:prstDash val="solid"/>
-            <a:miter lim="800000"/>
-          </a:ln>
-          <a:effectLst/>
-          <a:extLst>
-            <a:ext uri="{91240B29-F687-4F45-9708-019B960494DF}">
-              <a14:hiddenLine xmlns:a14="http://schemas.microsoft.com/office/drawing/2010/main" w="19050" cap="flat" cmpd="sng" algn="ctr">
-                <a:solidFill>
-                  <a:schemeClr val="accent1">
-                    <a:shade val="15000"/>
-                  </a:schemeClr>
-                </a:solidFill>
-                <a:prstDash val="solid"/>
-                <a:miter lim="800000"/>
-              </a14:hiddenLine>
-            </a:ext>
-          </a:extLst>
-        </p:spPr>
-        <p:style>
-          <a:lnRef idx="2">
-            <a:schemeClr val="accent1">
-              <a:shade val="15000"/>
-            </a:schemeClr>
-          </a:lnRef>
-          <a:fillRef idx="1">
-            <a:schemeClr val="accent1"/>
-          </a:fillRef>
-          <a:effectRef idx="0">
-            <a:schemeClr val="accent1"/>
-          </a:effectRef>
-          <a:fontRef idx="minor">
-            <a:schemeClr val="lt1"/>
-          </a:fontRef>
-        </p:style>
-        <p:txBody>
-          <a:bodyPr rtlCol="0" anchor="ctr"/>
-          <a:lstStyle/>
-          <a:p>
-            <a:pPr algn="ctr"/>
-            <a:r>
-              <a:rPr lang="en-AU" sz="1400" b="1">
-                <a:solidFill>
-                  <a:srgbClr val="FFFFFF"/>
-                </a:solidFill>
-              </a:rPr>
-              <a:t>Small3</a:t>
-            </a:r>
-          </a:p>
-        </p:txBody>
-      </p:sp>
-      <p:sp>
-        <p:nvSpPr>
-          <p:cNvPr id="7" name="Anchor">
-            <a:extLst>
-              <a:ext uri="{FF2B5EF4-FFF2-40B4-BE49-F238E27FC236}">
-                <a16:creationId xmlns:a16="http://schemas.microsoft.com/office/drawing/2014/main" id="{958798D7-BFDC-C0F4-03C7-92FBF9118177}"/>
-              </a:ext>
-            </a:extLst>
-          </p:cNvPr>
-          <p:cNvSpPr/>
-          <p:nvPr/>
-        </p:nvSpPr>
-        <p:spPr>
-          <a:xfrm>
-            <a:off x="7112000" y="2540000"/>
-            <a:ext cx="3556000" cy="2540000"/>
-          </a:xfrm>
-          <a:prstGeom prst="rect">
-            <a:avLst/>
-          </a:prstGeom>
-          <a:solidFill>
-            <a:srgbClr val="D62728"/>
-          </a:solidFill>
-          <a:ln w="19050" cap="flat" cmpd="sng" algn="ctr">
-            <a:noFill/>
-            <a:prstDash val="solid"/>
-            <a:miter lim="800000"/>
-          </a:ln>
-          <a:effectLst/>
-          <a:extLst>
-            <a:ext uri="{91240B29-F687-4F45-9708-019B960494DF}">
-              <a14:hiddenLine xmlns:a14="http://schemas.microsoft.com/office/drawing/2010/main" w="19050" cap="flat" cmpd="sng" algn="ctr">
-                <a:solidFill>
-                  <a:schemeClr val="accent1">
-                    <a:shade val="15000"/>
-                  </a:schemeClr>
-                </a:solidFill>
-                <a:prstDash val="solid"/>
-                <a:miter lim="800000"/>
-              </a14:hiddenLine>
-            </a:ext>
-          </a:extLst>
-        </p:spPr>
-        <p:style>
-          <a:lnRef idx="2">
-            <a:schemeClr val="accent1">
-              <a:shade val="15000"/>
-            </a:schemeClr>
-          </a:lnRef>
-          <a:fillRef idx="1">
-            <a:schemeClr val="accent1"/>
-          </a:fillRef>
-          <a:effectRef idx="0">
-            <a:schemeClr val="accent1"/>
-          </a:effectRef>
-          <a:fontRef idx="minor">
-            <a:schemeClr val="lt1"/>
-          </a:fontRef>
-        </p:style>
-        <p:txBody>
-          <a:bodyPr rtlCol="0" anchor="ctr"/>
-          <a:lstStyle/>
-          <a:p>
-            <a:pPr algn="ctr"/>
-            <a:r>
-              <a:rPr lang="en-AU" sz="1400" b="1">
-                <a:solidFill>
-                  <a:srgbClr val="FFFFFF"/>
-                </a:solidFill>
-              </a:rPr>
-              <a:t>BIG ANCHOR</a:t>
-            </a:r>
-          </a:p>
-        </p:txBody>
-      </p:sp>
-    </p:spTree>
-    <p:extLst>
-      <p:ext uri="{BB962C8B-B14F-4D97-AF65-F5344CB8AC3E}">
-        <p14:creationId xmlns:p14="http://schemas.microsoft.com/office/powerpoint/2010/main" val="1805846413"/>
-      </p:ext>
-    </p:extLst>
-  </p:cSld>
-  <p:clrMapOvr>
-    <a:masterClrMapping/>
-  </p:clrMapOvr>
-</p:sld>
-</file>
-
-<file path=ppt/slides/slide4.xml><?xml version="1.0" encoding="utf-8"?>
-<p:sld xmlns:a="http://schemas.openxmlformats.org/drawingml/2006/main" xmlns:r="http://schemas.openxmlformats.org/officeDocument/2006/relationships" xmlns:p="http://schemas.openxmlformats.org/presentationml/2006/main">
-  <p:cSld>
-    <p:spTree>
-      <p:nvGrpSpPr>
-        <p:cNvPr id="1" name=""/>
-        <p:cNvGrpSpPr/>
-        <p:nvPr/>
-      </p:nvGrpSpPr>
-      <p:grpSpPr>
-        <a:xfrm>
-          <a:off x="0" y="0"/>
-          <a:ext cx="0" cy="0"/>
-          <a:chOff x="0" y="0"/>
-          <a:chExt cx="0" cy="0"/>
-        </a:xfrm>
-      </p:grpSpPr>
-      <p:sp>
-        <p:nvSpPr>
-          <p:cNvPr id="2" name="Heading">
-            <a:extLst>
-              <a:ext uri="{FF2B5EF4-FFF2-40B4-BE49-F238E27FC236}">
-                <a16:creationId xmlns:a16="http://schemas.microsoft.com/office/drawing/2014/main" id="{0005E616-D4A3-06D3-9DC6-3B725902829E}"/>
-              </a:ext>
-            </a:extLst>
-          </p:cNvPr>
-          <p:cNvSpPr txBox="1"/>
-          <p:nvPr/>
-        </p:nvSpPr>
-        <p:spPr>
-          <a:xfrm>
-            <a:off x="508000" y="304800"/>
-            <a:ext cx="11176000" cy="461665"/>
-          </a:xfrm>
-          <a:prstGeom prst="rect">
-            <a:avLst/>
-          </a:prstGeom>
-          <a:noFill/>
-        </p:spPr>
-        <p:txBody>
-          <a:bodyPr vert="horz" rtlCol="0">
-            <a:spAutoFit/>
-          </a:bodyPr>
-          <a:lstStyle/>
-          <a:p>
-            <a:r>
-              <a:rPr lang="en-AU" sz="2400" b="1">
-                <a:solidFill>
-                  <a:srgbClr val="282828"/>
-                </a:solidFill>
-              </a:rPr>
-              <a:t>Distribute: four modes, four answers</a:t>
-            </a:r>
-          </a:p>
-        </p:txBody>
-      </p:sp>
-      <p:sp>
-        <p:nvSpPr>
-          <p:cNvPr id="3" name="Instructions">
-            <a:extLst>
-              <a:ext uri="{FF2B5EF4-FFF2-40B4-BE49-F238E27FC236}">
-                <a16:creationId xmlns:a16="http://schemas.microsoft.com/office/drawing/2014/main" id="{C5A598EA-3764-1D34-2AD7-A5E3BF1CDA60}"/>
-              </a:ext>
-            </a:extLst>
-          </p:cNvPr>
-          <p:cNvSpPr txBox="1"/>
-          <p:nvPr/>
-        </p:nvSpPr>
-        <p:spPr>
-          <a:xfrm>
-            <a:off x="508000" y="762000"/>
-            <a:ext cx="11176000" cy="292388"/>
-          </a:xfrm>
-          <a:prstGeom prst="rect">
-            <a:avLst/>
-          </a:prstGeom>
-          <a:noFill/>
-        </p:spPr>
-        <p:txBody>
-          <a:bodyPr vert="horz" rtlCol="0">
-            <a:spAutoFit/>
-          </a:bodyPr>
-          <a:lstStyle/>
-          <a:p>
-            <a:r>
-              <a:rPr lang="en-AU" sz="1300">
-                <a:solidFill>
-                  <a:srgbClr val="7F7F7F"/>
-                </a:solidFill>
-              </a:rPr>
-              <a:t>Select all five. Try Distribute &gt; Horizontally with each Space by setting. Widths differ, so all four differ.</a:t>
-            </a:r>
-          </a:p>
-        </p:txBody>
-      </p:sp>
-      <p:sp>
-        <p:nvSpPr>
-          <p:cNvPr id="4" name="W200">
-            <a:extLst>
-              <a:ext uri="{FF2B5EF4-FFF2-40B4-BE49-F238E27FC236}">
-                <a16:creationId xmlns:a16="http://schemas.microsoft.com/office/drawing/2014/main" id="{780344AF-B245-67C1-4805-0F980C0DCF9C}"/>
-              </a:ext>
-            </a:extLst>
-          </p:cNvPr>
-          <p:cNvSpPr/>
-          <p:nvPr/>
-        </p:nvSpPr>
-        <p:spPr>
-          <a:xfrm>
-            <a:off x="635000" y="3175000"/>
-            <a:ext cx="2540000" cy="1143000"/>
-          </a:xfrm>
-          <a:prstGeom prst="rect">
-            <a:avLst/>
-          </a:prstGeom>
-          <a:solidFill>
-            <a:srgbClr val="1F77B4"/>
-          </a:solidFill>
-          <a:ln w="19050" cap="flat" cmpd="sng" algn="ctr">
-            <a:noFill/>
-            <a:prstDash val="solid"/>
-            <a:miter lim="800000"/>
-          </a:ln>
-          <a:effectLst/>
-          <a:extLst>
-            <a:ext uri="{91240B29-F687-4F45-9708-019B960494DF}">
-              <a14:hiddenLine xmlns:a14="http://schemas.microsoft.com/office/drawing/2010/main" w="19050" cap="flat" cmpd="sng" algn="ctr">
-                <a:solidFill>
-                  <a:schemeClr val="accent1">
-                    <a:shade val="15000"/>
-                  </a:schemeClr>
-                </a:solidFill>
-                <a:prstDash val="solid"/>
-                <a:miter lim="800000"/>
-              </a14:hiddenLine>
-            </a:ext>
-          </a:extLst>
-        </p:spPr>
-        <p:style>
-          <a:lnRef idx="2">
-            <a:schemeClr val="accent1">
-              <a:shade val="15000"/>
-            </a:schemeClr>
-          </a:lnRef>
-          <a:fillRef idx="1">
-            <a:schemeClr val="accent1"/>
-          </a:fillRef>
-          <a:effectRef idx="0">
-            <a:schemeClr val="accent1"/>
-          </a:effectRef>
-          <a:fontRef idx="minor">
-            <a:schemeClr val="lt1"/>
-          </a:fontRef>
-        </p:style>
-        <p:txBody>
-          <a:bodyPr rtlCol="0" anchor="ctr"/>
-          <a:lstStyle/>
-          <a:p>
-            <a:pPr algn="ctr"/>
-            <a:r>
-              <a:rPr lang="en-AU" sz="1400" b="1">
-                <a:solidFill>
-                  <a:srgbClr val="FFFFFF"/>
-                </a:solidFill>
-              </a:rPr>
-              <a:t>200</a:t>
-            </a:r>
-          </a:p>
-        </p:txBody>
-      </p:sp>
-      <p:sp>
-        <p:nvSpPr>
-          <p:cNvPr id="5" name="W60">
-            <a:extLst>
-              <a:ext uri="{FF2B5EF4-FFF2-40B4-BE49-F238E27FC236}">
-                <a16:creationId xmlns:a16="http://schemas.microsoft.com/office/drawing/2014/main" id="{32586B56-5BF9-55BF-7CAB-9080D1EF469C}"/>
-              </a:ext>
-            </a:extLst>
-          </p:cNvPr>
-          <p:cNvSpPr/>
-          <p:nvPr/>
-        </p:nvSpPr>
-        <p:spPr>
-          <a:xfrm>
-            <a:off x="3810000" y="3175000"/>
-            <a:ext cx="762000" cy="1143000"/>
-          </a:xfrm>
-          <a:prstGeom prst="rect">
-            <a:avLst/>
-          </a:prstGeom>
-          <a:solidFill>
-            <a:srgbClr val="FF7F0E"/>
-          </a:solidFill>
-          <a:ln w="19050" cap="flat" cmpd="sng" algn="ctr">
-            <a:noFill/>
-            <a:prstDash val="solid"/>
-            <a:miter lim="800000"/>
-          </a:ln>
-          <a:effectLst/>
-          <a:extLst>
-            <a:ext uri="{91240B29-F687-4F45-9708-019B960494DF}">
-              <a14:hiddenLine xmlns:a14="http://schemas.microsoft.com/office/drawing/2010/main" w="19050" cap="flat" cmpd="sng" algn="ctr">
-                <a:solidFill>
-                  <a:schemeClr val="accent1">
-                    <a:shade val="15000"/>
-                  </a:schemeClr>
-                </a:solidFill>
-                <a:prstDash val="solid"/>
-                <a:miter lim="800000"/>
-              </a14:hiddenLine>
-            </a:ext>
-          </a:extLst>
-        </p:spPr>
-        <p:style>
-          <a:lnRef idx="2">
-            <a:schemeClr val="accent1">
-              <a:shade val="15000"/>
-            </a:schemeClr>
-          </a:lnRef>
-          <a:fillRef idx="1">
-            <a:schemeClr val="accent1"/>
-          </a:fillRef>
-          <a:effectRef idx="0">
-            <a:schemeClr val="accent1"/>
-          </a:effectRef>
-          <a:fontRef idx="minor">
-            <a:schemeClr val="lt1"/>
-          </a:fontRef>
-        </p:style>
-        <p:txBody>
-          <a:bodyPr rtlCol="0" anchor="ctr"/>
-          <a:lstStyle/>
-          <a:p>
-            <a:pPr algn="ctr"/>
-            <a:r>
-              <a:rPr lang="en-AU" sz="1400" b="1">
-                <a:solidFill>
-                  <a:srgbClr val="FFFFFF"/>
-                </a:solidFill>
-              </a:rPr>
-              <a:t>60</a:t>
-            </a:r>
-          </a:p>
-        </p:txBody>
-      </p:sp>
-      <p:sp>
-        <p:nvSpPr>
-          <p:cNvPr id="6" name="W120">
-            <a:extLst>
-              <a:ext uri="{FF2B5EF4-FFF2-40B4-BE49-F238E27FC236}">
-                <a16:creationId xmlns:a16="http://schemas.microsoft.com/office/drawing/2014/main" id="{75CD9908-8A85-6681-7691-18F867702CEB}"/>
-              </a:ext>
-            </a:extLst>
-          </p:cNvPr>
-          <p:cNvSpPr/>
-          <p:nvPr/>
-        </p:nvSpPr>
-        <p:spPr>
-          <a:xfrm>
-            <a:off x="5334000" y="3175000"/>
-            <a:ext cx="1524000" cy="1143000"/>
-          </a:xfrm>
-          <a:prstGeom prst="rect">
-            <a:avLst/>
-          </a:prstGeom>
-          <a:solidFill>
-            <a:srgbClr val="2CA02C"/>
-          </a:solidFill>
-          <a:ln w="19050" cap="flat" cmpd="sng" algn="ctr">
-            <a:noFill/>
-            <a:prstDash val="solid"/>
-            <a:miter lim="800000"/>
-          </a:ln>
-          <a:effectLst/>
-          <a:extLst>
-            <a:ext uri="{91240B29-F687-4F45-9708-019B960494DF}">
-              <a14:hiddenLine xmlns:a14="http://schemas.microsoft.com/office/drawing/2010/main" w="19050" cap="flat" cmpd="sng" algn="ctr">
-                <a:solidFill>
-                  <a:schemeClr val="accent1">
-                    <a:shade val="15000"/>
-                  </a:schemeClr>
-                </a:solidFill>
-                <a:prstDash val="solid"/>
-                <a:miter lim="800000"/>
-              </a14:hiddenLine>
-            </a:ext>
-          </a:extLst>
-        </p:spPr>
-        <p:style>
-          <a:lnRef idx="2">
-            <a:schemeClr val="accent1">
-              <a:shade val="15000"/>
-            </a:schemeClr>
-          </a:lnRef>
-          <a:fillRef idx="1">
-            <a:schemeClr val="accent1"/>
-          </a:fillRef>
-          <a:effectRef idx="0">
-            <a:schemeClr val="accent1"/>
-          </a:effectRef>
-          <a:fontRef idx="minor">
-            <a:schemeClr val="lt1"/>
-          </a:fontRef>
-        </p:style>
-        <p:txBody>
-          <a:bodyPr rtlCol="0" anchor="ctr"/>
-          <a:lstStyle/>
-          <a:p>
-            <a:pPr algn="ctr"/>
-            <a:r>
-              <a:rPr lang="en-AU" sz="1400" b="1">
-                <a:solidFill>
-                  <a:srgbClr val="FFFFFF"/>
-                </a:solidFill>
-              </a:rPr>
-              <a:t>120</a:t>
-            </a:r>
-          </a:p>
-        </p:txBody>
-      </p:sp>
-      <p:sp>
-        <p:nvSpPr>
-          <p:cNvPr id="7" name="W40">
-            <a:extLst>
-              <a:ext uri="{FF2B5EF4-FFF2-40B4-BE49-F238E27FC236}">
-                <a16:creationId xmlns:a16="http://schemas.microsoft.com/office/drawing/2014/main" id="{5028F5A6-AF53-ABED-7259-75A86500CF4A}"/>
-              </a:ext>
-            </a:extLst>
-          </p:cNvPr>
-          <p:cNvSpPr/>
-          <p:nvPr/>
-        </p:nvSpPr>
-        <p:spPr>
-          <a:xfrm>
-            <a:off x="7874000" y="3175000"/>
-            <a:ext cx="508000" cy="1143000"/>
-          </a:xfrm>
-          <a:prstGeom prst="rect">
-            <a:avLst/>
-          </a:prstGeom>
-          <a:solidFill>
-            <a:srgbClr val="D62728"/>
-          </a:solidFill>
-          <a:ln w="19050" cap="flat" cmpd="sng" algn="ctr">
-            <a:noFill/>
-            <a:prstDash val="solid"/>
-            <a:miter lim="800000"/>
-          </a:ln>
-          <a:effectLst/>
-          <a:extLst>
-            <a:ext uri="{91240B29-F687-4F45-9708-019B960494DF}">
-              <a14:hiddenLine xmlns:a14="http://schemas.microsoft.com/office/drawing/2010/main" w="19050" cap="flat" cmpd="sng" algn="ctr">
-                <a:solidFill>
-                  <a:schemeClr val="accent1">
-                    <a:shade val="15000"/>
-                  </a:schemeClr>
-                </a:solidFill>
-                <a:prstDash val="solid"/>
-                <a:miter lim="800000"/>
-              </a14:hiddenLine>
-            </a:ext>
-          </a:extLst>
-        </p:spPr>
-        <p:style>
-          <a:lnRef idx="2">
-            <a:schemeClr val="accent1">
-              <a:shade val="15000"/>
-            </a:schemeClr>
-          </a:lnRef>
-          <a:fillRef idx="1">
-            <a:schemeClr val="accent1"/>
-          </a:fillRef>
-          <a:effectRef idx="0">
-            <a:schemeClr val="accent1"/>
-          </a:effectRef>
-          <a:fontRef idx="minor">
-            <a:schemeClr val="lt1"/>
-          </a:fontRef>
-        </p:style>
-        <p:txBody>
-          <a:bodyPr rtlCol="0" anchor="ctr"/>
-          <a:lstStyle/>
-          <a:p>
-            <a:pPr algn="ctr"/>
-            <a:r>
-              <a:rPr lang="en-AU" sz="1400" b="1">
-                <a:solidFill>
-                  <a:srgbClr val="FFFFFF"/>
-                </a:solidFill>
-              </a:rPr>
-              <a:t>40</a:t>
-            </a:r>
-          </a:p>
-        </p:txBody>
-      </p:sp>
-      <p:sp>
-        <p:nvSpPr>
-          <p:cNvPr id="8" name="W150">
-            <a:extLst>
-              <a:ext uri="{FF2B5EF4-FFF2-40B4-BE49-F238E27FC236}">
-                <a16:creationId xmlns:a16="http://schemas.microsoft.com/office/drawing/2014/main" id="{4F1079F3-BB17-C135-E25F-1F253775A9DA}"/>
-              </a:ext>
-            </a:extLst>
-          </p:cNvPr>
-          <p:cNvSpPr/>
-          <p:nvPr/>
-        </p:nvSpPr>
-        <p:spPr>
-          <a:xfrm>
-            <a:off x="9652000" y="3175000"/>
-            <a:ext cx="1905000" cy="1143000"/>
-          </a:xfrm>
-          <a:prstGeom prst="rect">
-            <a:avLst/>
-          </a:prstGeom>
-          <a:solidFill>
-            <a:srgbClr val="9467BD"/>
-          </a:solidFill>
-          <a:ln w="19050" cap="flat" cmpd="sng" algn="ctr">
-            <a:noFill/>
-            <a:prstDash val="solid"/>
-            <a:miter lim="800000"/>
-          </a:ln>
-          <a:effectLst/>
-          <a:extLst>
-            <a:ext uri="{91240B29-F687-4F45-9708-019B960494DF}">
-              <a14:hiddenLine xmlns:a14="http://schemas.microsoft.com/office/drawing/2010/main" w="19050" cap="flat" cmpd="sng" algn="ctr">
-                <a:solidFill>
-                  <a:schemeClr val="accent1">
-                    <a:shade val="15000"/>
-                  </a:schemeClr>
-                </a:solidFill>
-                <a:prstDash val="solid"/>
-                <a:miter lim="800000"/>
-              </a14:hiddenLine>
-            </a:ext>
-          </a:extLst>
-        </p:spPr>
-        <p:style>
-          <a:lnRef idx="2">
-            <a:schemeClr val="accent1">
-              <a:shade val="15000"/>
-            </a:schemeClr>
-          </a:lnRef>
-          <a:fillRef idx="1">
-            <a:schemeClr val="accent1"/>
-          </a:fillRef>
-          <a:effectRef idx="0">
-            <a:schemeClr val="accent1"/>
-          </a:effectRef>
-          <a:fontRef idx="minor">
-            <a:schemeClr val="lt1"/>
-          </a:fontRef>
-        </p:style>
-        <p:txBody>
-          <a:bodyPr rtlCol="0" anchor="ctr"/>
-          <a:lstStyle/>
-          <a:p>
-            <a:pPr algn="ctr"/>
-            <a:r>
-              <a:rPr lang="en-AU" sz="1400" b="1">
-                <a:solidFill>
-                  <a:srgbClr val="FFFFFF"/>
-                </a:solidFill>
-              </a:rPr>
-              <a:t>150</a:t>
-            </a:r>
-          </a:p>
-        </p:txBody>
-      </p:sp>
-      <p:sp>
-        <p:nvSpPr>
-          <p:cNvPr id="9" name="TextBox 8">
-            <a:extLst>
-              <a:ext uri="{FF2B5EF4-FFF2-40B4-BE49-F238E27FC236}">
-                <a16:creationId xmlns:a16="http://schemas.microsoft.com/office/drawing/2014/main" id="{4144A485-0EB8-06B0-C4E9-CFC1CF62FF51}"/>
-              </a:ext>
-            </a:extLst>
-          </p:cNvPr>
-          <p:cNvSpPr txBox="1"/>
-          <p:nvPr/>
-        </p:nvSpPr>
-        <p:spPr>
-          <a:xfrm>
-            <a:off x="508000" y="4826000"/>
-            <a:ext cx="11176000" cy="461665"/>
-          </a:xfrm>
-          <a:prstGeom prst="rect">
-            <a:avLst/>
-          </a:prstGeom>
-          <a:noFill/>
-        </p:spPr>
-        <p:txBody>
-          <a:bodyPr vert="horz" rtlCol="0">
-            <a:spAutoFit/>
-          </a:bodyPr>
-          <a:lstStyle/>
-          <a:p>
-            <a:r>
-              <a:rPr lang="en-AU" sz="1200">
-                <a:solidFill>
-                  <a:srgbClr val="7F7F7F"/>
-                </a:solidFill>
-              </a:rPr>
-              <a:t>Leading edges lines up the left edges at an even pitch. Centres evens the centres. Trailing edges evens the right edges. Space between evens the visible gaps - the only one of the four that does.</a:t>
-            </a:r>
-          </a:p>
-        </p:txBody>
-      </p:sp>
-    </p:spTree>
-    <p:extLst>
-      <p:ext uri="{BB962C8B-B14F-4D97-AF65-F5344CB8AC3E}">
-        <p14:creationId xmlns:p14="http://schemas.microsoft.com/office/powerpoint/2010/main" val="909781320"/>
-      </p:ext>
-    </p:extLst>
-  </p:cSld>
-  <p:clrMapOvr>
-    <a:masterClrMapping/>
-  </p:clrMapOvr>
-</p:sld>
-</file>
-
-<file path=ppt/slides/slide5.xml><?xml version="1.0" encoding="utf-8"?>
-<p:sld xmlns:a="http://schemas.openxmlformats.org/drawingml/2006/main" xmlns:r="http://schemas.openxmlformats.org/officeDocument/2006/relationships" xmlns:p="http://schemas.openxmlformats.org/presentationml/2006/main">
-  <p:cSld>
-    <p:spTree>
-      <p:nvGrpSpPr>
-        <p:cNvPr id="1" name=""/>
-        <p:cNvGrpSpPr/>
-        <p:nvPr/>
-      </p:nvGrpSpPr>
-      <p:grpSpPr>
-        <a:xfrm>
-          <a:off x="0" y="0"/>
-          <a:ext cx="0" cy="0"/>
-          <a:chOff x="0" y="0"/>
-          <a:chExt cx="0" cy="0"/>
-        </a:xfrm>
-      </p:grpSpPr>
-      <p:sp>
-        <p:nvSpPr>
-          <p:cNvPr id="2" name="Heading">
-            <a:extLst>
-              <a:ext uri="{FF2B5EF4-FFF2-40B4-BE49-F238E27FC236}">
-                <a16:creationId xmlns:a16="http://schemas.microsoft.com/office/drawing/2014/main" id="{33FAB78E-59D1-3EDC-1D26-A0EC113970F9}"/>
-              </a:ext>
-            </a:extLst>
-          </p:cNvPr>
-          <p:cNvSpPr txBox="1"/>
-          <p:nvPr/>
-        </p:nvSpPr>
-        <p:spPr>
-          <a:xfrm>
-            <a:off x="508000" y="304800"/>
-            <a:ext cx="11176000" cy="461665"/>
-          </a:xfrm>
-          <a:prstGeom prst="rect">
-            <a:avLst/>
-          </a:prstGeom>
-          <a:noFill/>
-        </p:spPr>
-        <p:txBody>
-          <a:bodyPr vert="horz" rtlCol="0">
-            <a:spAutoFit/>
-          </a:bodyPr>
-          <a:lstStyle/>
-          <a:p>
-            <a:r>
-              <a:rPr lang="en-AU" sz="2400" b="1">
-                <a:solidFill>
-                  <a:srgbClr val="282828"/>
-                </a:solidFill>
-              </a:rPr>
-              <a:t>Exact spacing</a:t>
-            </a:r>
-          </a:p>
-        </p:txBody>
-      </p:sp>
-      <p:sp>
-        <p:nvSpPr>
-          <p:cNvPr id="3" name="Instructions">
-            <a:extLst>
-              <a:ext uri="{FF2B5EF4-FFF2-40B4-BE49-F238E27FC236}">
-                <a16:creationId xmlns:a16="http://schemas.microsoft.com/office/drawing/2014/main" id="{8A737B20-A0F8-3228-C60F-0DC83348BD4D}"/>
-              </a:ext>
-            </a:extLst>
-          </p:cNvPr>
-          <p:cNvSpPr txBox="1"/>
-          <p:nvPr/>
-        </p:nvSpPr>
-        <p:spPr>
-          <a:xfrm>
-            <a:off x="508000" y="762000"/>
-            <a:ext cx="11176000" cy="292388"/>
-          </a:xfrm>
-          <a:prstGeom prst="rect">
-            <a:avLst/>
-          </a:prstGeom>
-          <a:noFill/>
-        </p:spPr>
-        <p:txBody>
-          <a:bodyPr vert="horz" rtlCol="0">
-            <a:spAutoFit/>
-          </a:bodyPr>
-          <a:lstStyle/>
-          <a:p>
-            <a:r>
-              <a:rPr lang="en-AU" sz="1300">
-                <a:solidFill>
-                  <a:srgbClr val="7F7F7F"/>
-                </a:solidFill>
-              </a:rPr>
-              <a:t>Select all four, put 12 in the Exact (pt) box, Space by = Space between, then Distribute &gt; Horizontally.</a:t>
-            </a:r>
-          </a:p>
-        </p:txBody>
-      </p:sp>
-      <p:sp>
-        <p:nvSpPr>
-          <p:cNvPr id="4" name="Gap0">
-            <a:extLst>
-              <a:ext uri="{FF2B5EF4-FFF2-40B4-BE49-F238E27FC236}">
-                <a16:creationId xmlns:a16="http://schemas.microsoft.com/office/drawing/2014/main" id="{5A548DC6-691F-8AC3-40B9-93C0300E655D}"/>
-              </a:ext>
-            </a:extLst>
-          </p:cNvPr>
-          <p:cNvSpPr/>
-          <p:nvPr/>
-        </p:nvSpPr>
-        <p:spPr>
-          <a:xfrm>
-            <a:off x="1016000" y="3048000"/>
-            <a:ext cx="1524000" cy="1270000"/>
-          </a:xfrm>
-          <a:prstGeom prst="rect">
-            <a:avLst/>
-          </a:prstGeom>
-          <a:solidFill>
-            <a:srgbClr val="1F77B4"/>
-          </a:solidFill>
-          <a:ln w="19050" cap="flat" cmpd="sng" algn="ctr">
-            <a:noFill/>
-            <a:prstDash val="solid"/>
-            <a:miter lim="800000"/>
-          </a:ln>
-          <a:effectLst/>
-          <a:extLst>
-            <a:ext uri="{91240B29-F687-4F45-9708-019B960494DF}">
-              <a14:hiddenLine xmlns:a14="http://schemas.microsoft.com/office/drawing/2010/main" w="19050" cap="flat" cmpd="sng" algn="ctr">
-                <a:solidFill>
-                  <a:schemeClr val="accent1">
-                    <a:shade val="15000"/>
-                  </a:schemeClr>
-                </a:solidFill>
-                <a:prstDash val="solid"/>
-                <a:miter lim="800000"/>
-              </a14:hiddenLine>
-            </a:ext>
-          </a:extLst>
-        </p:spPr>
-        <p:style>
-          <a:lnRef idx="2">
-            <a:schemeClr val="accent1">
-              <a:shade val="15000"/>
-            </a:schemeClr>
-          </a:lnRef>
-          <a:fillRef idx="1">
-            <a:schemeClr val="accent1"/>
-          </a:fillRef>
-          <a:effectRef idx="0">
-            <a:schemeClr val="accent1"/>
-          </a:effectRef>
-          <a:fontRef idx="minor">
-            <a:schemeClr val="lt1"/>
-          </a:fontRef>
-        </p:style>
-        <p:txBody>
-          <a:bodyPr rtlCol="0" anchor="ctr"/>
-          <a:lstStyle/>
-          <a:p>
-            <a:pPr algn="ctr"/>
-            <a:r>
-              <a:rPr lang="en-AU" sz="1400" b="1">
-                <a:solidFill>
-                  <a:srgbClr val="FFFFFF"/>
-                </a:solidFill>
-              </a:rPr>
-              <a:t>#1</a:t>
-            </a:r>
-          </a:p>
-        </p:txBody>
-      </p:sp>
-      <p:sp>
-        <p:nvSpPr>
-          <p:cNvPr id="5" name="Gap1">
-            <a:extLst>
-              <a:ext uri="{FF2B5EF4-FFF2-40B4-BE49-F238E27FC236}">
-                <a16:creationId xmlns:a16="http://schemas.microsoft.com/office/drawing/2014/main" id="{A9922820-CC26-D6B3-3924-F1A896CDDD13}"/>
-              </a:ext>
-            </a:extLst>
-          </p:cNvPr>
-          <p:cNvSpPr/>
-          <p:nvPr/>
-        </p:nvSpPr>
-        <p:spPr>
-          <a:xfrm>
-            <a:off x="3429000" y="3048000"/>
-            <a:ext cx="1524000" cy="1270000"/>
-          </a:xfrm>
-          <a:prstGeom prst="rect">
-            <a:avLst/>
-          </a:prstGeom>
-          <a:solidFill>
-            <a:srgbClr val="1F77B4"/>
-          </a:solidFill>
-          <a:ln w="19050" cap="flat" cmpd="sng" algn="ctr">
-            <a:noFill/>
-            <a:prstDash val="solid"/>
-            <a:miter lim="800000"/>
-          </a:ln>
-          <a:effectLst/>
-          <a:extLst>
-            <a:ext uri="{91240B29-F687-4F45-9708-019B960494DF}">
-              <a14:hiddenLine xmlns:a14="http://schemas.microsoft.com/office/drawing/2010/main" w="19050" cap="flat" cmpd="sng" algn="ctr">
-                <a:solidFill>
-                  <a:schemeClr val="accent1">
-                    <a:shade val="15000"/>
-                  </a:schemeClr>
-                </a:solidFill>
-                <a:prstDash val="solid"/>
-                <a:miter lim="800000"/>
-              </a14:hiddenLine>
-            </a:ext>
-          </a:extLst>
-        </p:spPr>
-        <p:style>
-          <a:lnRef idx="2">
-            <a:schemeClr val="accent1">
-              <a:shade val="15000"/>
-            </a:schemeClr>
-          </a:lnRef>
-          <a:fillRef idx="1">
-            <a:schemeClr val="accent1"/>
-          </a:fillRef>
-          <a:effectRef idx="0">
-            <a:schemeClr val="accent1"/>
-          </a:effectRef>
-          <a:fontRef idx="minor">
-            <a:schemeClr val="lt1"/>
-          </a:fontRef>
-        </p:style>
-        <p:txBody>
-          <a:bodyPr rtlCol="0" anchor="ctr"/>
-          <a:lstStyle/>
-          <a:p>
-            <a:pPr algn="ctr"/>
-            <a:r>
-              <a:rPr lang="en-AU" sz="1400" b="1">
-                <a:solidFill>
-                  <a:srgbClr val="FFFFFF"/>
-                </a:solidFill>
-              </a:rPr>
-              <a:t>#2</a:t>
-            </a:r>
-          </a:p>
-        </p:txBody>
-      </p:sp>
-      <p:sp>
-        <p:nvSpPr>
-          <p:cNvPr id="6" name="Gap2">
-            <a:extLst>
-              <a:ext uri="{FF2B5EF4-FFF2-40B4-BE49-F238E27FC236}">
-                <a16:creationId xmlns:a16="http://schemas.microsoft.com/office/drawing/2014/main" id="{64240C09-BCE0-59DB-8EB9-A6326043BDC9}"/>
-              </a:ext>
-            </a:extLst>
-          </p:cNvPr>
-          <p:cNvSpPr/>
-          <p:nvPr/>
-        </p:nvSpPr>
-        <p:spPr>
-          <a:xfrm>
-            <a:off x="5842000" y="3048000"/>
-            <a:ext cx="1524000" cy="1270000"/>
-          </a:xfrm>
-          <a:prstGeom prst="rect">
-            <a:avLst/>
-          </a:prstGeom>
-          <a:solidFill>
-            <a:srgbClr val="1F77B4"/>
-          </a:solidFill>
-          <a:ln w="19050" cap="flat" cmpd="sng" algn="ctr">
-            <a:noFill/>
-            <a:prstDash val="solid"/>
-            <a:miter lim="800000"/>
-          </a:ln>
-          <a:effectLst/>
-          <a:extLst>
-            <a:ext uri="{91240B29-F687-4F45-9708-019B960494DF}">
-              <a14:hiddenLine xmlns:a14="http://schemas.microsoft.com/office/drawing/2010/main" w="19050" cap="flat" cmpd="sng" algn="ctr">
-                <a:solidFill>
-                  <a:schemeClr val="accent1">
-                    <a:shade val="15000"/>
-                  </a:schemeClr>
-                </a:solidFill>
-                <a:prstDash val="solid"/>
-                <a:miter lim="800000"/>
-              </a14:hiddenLine>
-            </a:ext>
-          </a:extLst>
-        </p:spPr>
-        <p:style>
-          <a:lnRef idx="2">
-            <a:schemeClr val="accent1">
-              <a:shade val="15000"/>
-            </a:schemeClr>
-          </a:lnRef>
-          <a:fillRef idx="1">
-            <a:schemeClr val="accent1"/>
-          </a:fillRef>
-          <a:effectRef idx="0">
-            <a:schemeClr val="accent1"/>
-          </a:effectRef>
-          <a:fontRef idx="minor">
-            <a:schemeClr val="lt1"/>
-          </a:fontRef>
-        </p:style>
-        <p:txBody>
-          <a:bodyPr rtlCol="0" anchor="ctr"/>
-          <a:lstStyle/>
-          <a:p>
-            <a:pPr algn="ctr"/>
-            <a:r>
-              <a:rPr lang="en-AU" sz="1400" b="1">
-                <a:solidFill>
-                  <a:srgbClr val="FFFFFF"/>
-                </a:solidFill>
-              </a:rPr>
-              <a:t>#3</a:t>
-            </a:r>
-          </a:p>
-        </p:txBody>
-      </p:sp>
-      <p:sp>
-        <p:nvSpPr>
-          <p:cNvPr id="7" name="Gap3">
-            <a:extLst>
-              <a:ext uri="{FF2B5EF4-FFF2-40B4-BE49-F238E27FC236}">
-                <a16:creationId xmlns:a16="http://schemas.microsoft.com/office/drawing/2014/main" id="{214B50A7-AB53-92DD-32D4-6BD45600A2BF}"/>
-              </a:ext>
-            </a:extLst>
-          </p:cNvPr>
-          <p:cNvSpPr/>
-          <p:nvPr/>
-        </p:nvSpPr>
-        <p:spPr>
-          <a:xfrm>
-            <a:off x="8255000" y="3048000"/>
-            <a:ext cx="1524000" cy="1270000"/>
-          </a:xfrm>
-          <a:prstGeom prst="rect">
-            <a:avLst/>
-          </a:prstGeom>
-          <a:solidFill>
-            <a:srgbClr val="1F77B4"/>
-          </a:solidFill>
-          <a:ln w="19050" cap="flat" cmpd="sng" algn="ctr">
-            <a:noFill/>
-            <a:prstDash val="solid"/>
-            <a:miter lim="800000"/>
-          </a:ln>
-          <a:effectLst/>
-          <a:extLst>
-            <a:ext uri="{91240B29-F687-4F45-9708-019B960494DF}">
-              <a14:hiddenLine xmlns:a14="http://schemas.microsoft.com/office/drawing/2010/main" w="19050" cap="flat" cmpd="sng" algn="ctr">
-                <a:solidFill>
-                  <a:schemeClr val="accent1">
-                    <a:shade val="15000"/>
-                  </a:schemeClr>
-                </a:solidFill>
-                <a:prstDash val="solid"/>
-                <a:miter lim="800000"/>
-              </a14:hiddenLine>
-            </a:ext>
-          </a:extLst>
-        </p:spPr>
-        <p:style>
-          <a:lnRef idx="2">
-            <a:schemeClr val="accent1">
-              <a:shade val="15000"/>
-            </a:schemeClr>
-          </a:lnRef>
-          <a:fillRef idx="1">
-            <a:schemeClr val="accent1"/>
-          </a:fillRef>
-          <a:effectRef idx="0">
-            <a:schemeClr val="accent1"/>
-          </a:effectRef>
-          <a:fontRef idx="minor">
-            <a:schemeClr val="lt1"/>
-          </a:fontRef>
-        </p:style>
-        <p:txBody>
-          <a:bodyPr rtlCol="0" anchor="ctr"/>
-          <a:lstStyle/>
-          <a:p>
-            <a:pPr algn="ctr"/>
-            <a:r>
-              <a:rPr lang="en-AU" sz="1400" b="1">
-                <a:solidFill>
-                  <a:srgbClr val="FFFFFF"/>
-                </a:solidFill>
-              </a:rPr>
-              <a:t>#4</a:t>
-            </a:r>
-          </a:p>
-        </p:txBody>
-      </p:sp>
-      <p:sp>
-        <p:nvSpPr>
-          <p:cNvPr id="8" name="TextBox 7">
-            <a:extLst>
-              <a:ext uri="{FF2B5EF4-FFF2-40B4-BE49-F238E27FC236}">
-                <a16:creationId xmlns:a16="http://schemas.microsoft.com/office/drawing/2014/main" id="{B11DE18D-9409-5FF6-297F-312E1E17321F}"/>
-              </a:ext>
-            </a:extLst>
-          </p:cNvPr>
-          <p:cNvSpPr txBox="1"/>
-          <p:nvPr/>
-        </p:nvSpPr>
-        <p:spPr>
-          <a:xfrm>
-            <a:off x="508000" y="4826000"/>
-            <a:ext cx="11176000" cy="276999"/>
-          </a:xfrm>
-          <a:prstGeom prst="rect">
-            <a:avLst/>
-          </a:prstGeom>
-          <a:noFill/>
-        </p:spPr>
-        <p:txBody>
-          <a:bodyPr vert="horz" rtlCol="0">
-            <a:spAutoFit/>
-          </a:bodyPr>
-          <a:lstStyle/>
-          <a:p>
-            <a:r>
-              <a:rPr lang="en-AU" sz="1200">
-                <a:solidFill>
-                  <a:srgbClr val="7F7F7F"/>
-                </a:solidFill>
-              </a:rPr>
-              <a:t>Clear the box again to go back to evening out whatever space is already there. In the edge and centre modes the number is a pitch, not a gap.</a:t>
-            </a:r>
-          </a:p>
-        </p:txBody>
-      </p:sp>
-    </p:spTree>
-    <p:extLst>
-      <p:ext uri="{BB962C8B-B14F-4D97-AF65-F5344CB8AC3E}">
-        <p14:creationId xmlns:p14="http://schemas.microsoft.com/office/powerpoint/2010/main" val="3677677072"/>
-      </p:ext>
-    </p:extLst>
-  </p:cSld>
-  <p:clrMapOvr>
-    <a:masterClrMapping/>
-  </p:clrMapOvr>
-</p:sld>
-</file>
-
-<file path=ppt/slides/slide6.xml><?xml version="1.0" encoding="utf-8"?>
-<p:sld xmlns:a="http://schemas.openxmlformats.org/drawingml/2006/main" xmlns:r="http://schemas.openxmlformats.org/officeDocument/2006/relationships" xmlns:p="http://schemas.openxmlformats.org/presentationml/2006/main">
-  <p:cSld>
-    <p:spTree>
-      <p:nvGrpSpPr>
-        <p:cNvPr id="1" name=""/>
-        <p:cNvGrpSpPr/>
-        <p:nvPr/>
-      </p:nvGrpSpPr>
-      <p:grpSpPr>
-        <a:xfrm>
-          <a:off x="0" y="0"/>
-          <a:ext cx="0" cy="0"/>
-          <a:chOff x="0" y="0"/>
-          <a:chExt cx="0" cy="0"/>
-        </a:xfrm>
-      </p:grpSpPr>
-      <p:sp>
-        <p:nvSpPr>
-          <p:cNvPr id="2" name="Heading">
-            <a:extLst>
-              <a:ext uri="{FF2B5EF4-FFF2-40B4-BE49-F238E27FC236}">
-                <a16:creationId xmlns:a16="http://schemas.microsoft.com/office/drawing/2014/main" id="{0A81E201-7C6F-F773-0409-03355439EFAF}"/>
-              </a:ext>
-            </a:extLst>
-          </p:cNvPr>
-          <p:cNvSpPr txBox="1"/>
-          <p:nvPr/>
-        </p:nvSpPr>
-        <p:spPr>
-          <a:xfrm>
-            <a:off x="508000" y="304800"/>
-            <a:ext cx="11176000" cy="461665"/>
-          </a:xfrm>
-          <a:prstGeom prst="rect">
-            <a:avLst/>
-          </a:prstGeom>
-          <a:noFill/>
-        </p:spPr>
-        <p:txBody>
-          <a:bodyPr vert="horz" rtlCol="0">
-            <a:spAutoFit/>
-          </a:bodyPr>
-          <a:lstStyle/>
-          <a:p>
-            <a:r>
-              <a:rPr lang="en-AU" sz="2400" b="1">
-                <a:solidFill>
-                  <a:srgbClr val="282828"/>
-                </a:solidFill>
-              </a:rPr>
-              <a:t>Match size to the anchor</a:t>
-            </a:r>
-          </a:p>
-        </p:txBody>
-      </p:sp>
-      <p:sp>
-        <p:nvSpPr>
-          <p:cNvPr id="3" name="Instructions">
-            <a:extLst>
-              <a:ext uri="{FF2B5EF4-FFF2-40B4-BE49-F238E27FC236}">
-                <a16:creationId xmlns:a16="http://schemas.microsoft.com/office/drawing/2014/main" id="{F4ADDDDE-D37E-D716-84F9-0B4C262524BA}"/>
-              </a:ext>
-            </a:extLst>
-          </p:cNvPr>
-          <p:cNvSpPr txBox="1"/>
-          <p:nvPr/>
-        </p:nvSpPr>
-        <p:spPr>
-          <a:xfrm>
-            <a:off x="508000" y="762000"/>
-            <a:ext cx="11176000" cy="292388"/>
-          </a:xfrm>
-          <a:prstGeom prst="rect">
-            <a:avLst/>
-          </a:prstGeom>
-          <a:noFill/>
-        </p:spPr>
-        <p:txBody>
-          <a:bodyPr vert="horz" rtlCol="0">
-            <a:spAutoFit/>
-          </a:bodyPr>
-          <a:lstStyle/>
-          <a:p>
-            <a:r>
-              <a:rPr lang="en-AU" sz="1300">
-                <a:solidFill>
-                  <a:srgbClr val="7F7F7F"/>
-                </a:solidFill>
-              </a:rPr>
-              <a:t>Select the three odd shapes, then Ctrl+click TARGET last. Match size &gt; Both. Try the From centre toggle too.</a:t>
-            </a:r>
-          </a:p>
-        </p:txBody>
-      </p:sp>
-      <p:sp>
-        <p:nvSpPr>
-          <p:cNvPr id="4" name="Odd1">
-            <a:extLst>
-              <a:ext uri="{FF2B5EF4-FFF2-40B4-BE49-F238E27FC236}">
-                <a16:creationId xmlns:a16="http://schemas.microsoft.com/office/drawing/2014/main" id="{C38BAB03-F82D-F78E-4740-2A59A2C431DE}"/>
-              </a:ext>
-            </a:extLst>
-          </p:cNvPr>
-          <p:cNvSpPr/>
-          <p:nvPr/>
-        </p:nvSpPr>
-        <p:spPr>
-          <a:xfrm>
-            <a:off x="1397000" y="2286000"/>
-            <a:ext cx="1016000" cy="1651000"/>
-          </a:xfrm>
-          <a:prstGeom prst="rect">
-            <a:avLst/>
-          </a:prstGeom>
-          <a:solidFill>
-            <a:srgbClr val="1F77B4"/>
-          </a:solidFill>
-          <a:ln w="19050" cap="flat" cmpd="sng" algn="ctr">
-            <a:noFill/>
-            <a:prstDash val="solid"/>
-            <a:miter lim="800000"/>
-          </a:ln>
-          <a:effectLst/>
-          <a:extLst>
-            <a:ext uri="{91240B29-F687-4F45-9708-019B960494DF}">
-              <a14:hiddenLine xmlns:a14="http://schemas.microsoft.com/office/drawing/2010/main" w="19050" cap="flat" cmpd="sng" algn="ctr">
-                <a:solidFill>
-                  <a:schemeClr val="accent1">
-                    <a:shade val="15000"/>
-                  </a:schemeClr>
-                </a:solidFill>
-                <a:prstDash val="solid"/>
-                <a:miter lim="800000"/>
-              </a14:hiddenLine>
-            </a:ext>
-          </a:extLst>
-        </p:spPr>
-        <p:style>
-          <a:lnRef idx="2">
-            <a:schemeClr val="accent1">
-              <a:shade val="15000"/>
-            </a:schemeClr>
-          </a:lnRef>
-          <a:fillRef idx="1">
-            <a:schemeClr val="accent1"/>
-          </a:fillRef>
-          <a:effectRef idx="0">
-            <a:schemeClr val="accent1"/>
-          </a:effectRef>
-          <a:fontRef idx="minor">
-            <a:schemeClr val="lt1"/>
-          </a:fontRef>
-        </p:style>
-        <p:txBody>
-          <a:bodyPr rtlCol="0" anchor="ctr"/>
-          <a:lstStyle/>
-          <a:p>
-            <a:pPr algn="ctr"/>
-            <a:r>
-              <a:rPr lang="en-AU" sz="1400" b="1">
-                <a:solidFill>
-                  <a:srgbClr val="FFFFFF"/>
-                </a:solidFill>
-              </a:rPr>
-              <a:t>Odd1</a:t>
-            </a:r>
-          </a:p>
-        </p:txBody>
-      </p:sp>
-      <p:sp>
-        <p:nvSpPr>
-          <p:cNvPr id="5" name="Odd2">
-            <a:extLst>
-              <a:ext uri="{FF2B5EF4-FFF2-40B4-BE49-F238E27FC236}">
-                <a16:creationId xmlns:a16="http://schemas.microsoft.com/office/drawing/2014/main" id="{16746223-2CF5-CD1B-52CE-699627368751}"/>
-              </a:ext>
-            </a:extLst>
-          </p:cNvPr>
-          <p:cNvSpPr/>
-          <p:nvPr/>
-        </p:nvSpPr>
-        <p:spPr>
-          <a:xfrm>
-            <a:off x="3048000" y="2794000"/>
-            <a:ext cx="2032000" cy="762000"/>
-          </a:xfrm>
-          <a:prstGeom prst="rect">
-            <a:avLst/>
-          </a:prstGeom>
-          <a:solidFill>
-            <a:srgbClr val="2CA02C"/>
-          </a:solidFill>
-          <a:ln w="19050" cap="flat" cmpd="sng" algn="ctr">
-            <a:noFill/>
-            <a:prstDash val="solid"/>
-            <a:miter lim="800000"/>
-          </a:ln>
-          <a:effectLst/>
-          <a:extLst>
-            <a:ext uri="{91240B29-F687-4F45-9708-019B960494DF}">
-              <a14:hiddenLine xmlns:a14="http://schemas.microsoft.com/office/drawing/2010/main" w="19050" cap="flat" cmpd="sng" algn="ctr">
-                <a:solidFill>
-                  <a:schemeClr val="accent1">
-                    <a:shade val="15000"/>
-                  </a:schemeClr>
-                </a:solidFill>
-                <a:prstDash val="solid"/>
-                <a:miter lim="800000"/>
-              </a14:hiddenLine>
-            </a:ext>
-          </a:extLst>
-        </p:spPr>
-        <p:style>
-          <a:lnRef idx="2">
-            <a:schemeClr val="accent1">
-              <a:shade val="15000"/>
-            </a:schemeClr>
-          </a:lnRef>
-          <a:fillRef idx="1">
-            <a:schemeClr val="accent1"/>
-          </a:fillRef>
-          <a:effectRef idx="0">
-            <a:schemeClr val="accent1"/>
-          </a:effectRef>
-          <a:fontRef idx="minor">
-            <a:schemeClr val="lt1"/>
-          </a:fontRef>
-        </p:style>
-        <p:txBody>
-          <a:bodyPr rtlCol="0" anchor="ctr"/>
-          <a:lstStyle/>
-          <a:p>
-            <a:pPr algn="ctr"/>
-            <a:r>
-              <a:rPr lang="en-AU" sz="1400" b="1">
-                <a:solidFill>
-                  <a:srgbClr val="FFFFFF"/>
-                </a:solidFill>
-              </a:rPr>
-              <a:t>Odd2</a:t>
-            </a:r>
-          </a:p>
-        </p:txBody>
-      </p:sp>
-      <p:sp>
-        <p:nvSpPr>
-          <p:cNvPr id="6" name="Odd3">
-            <a:extLst>
-              <a:ext uri="{FF2B5EF4-FFF2-40B4-BE49-F238E27FC236}">
-                <a16:creationId xmlns:a16="http://schemas.microsoft.com/office/drawing/2014/main" id="{AF5D7A72-F2E8-91C2-55F3-6CD79512B42F}"/>
-              </a:ext>
-            </a:extLst>
-          </p:cNvPr>
-          <p:cNvSpPr/>
-          <p:nvPr/>
-        </p:nvSpPr>
-        <p:spPr>
-          <a:xfrm>
-            <a:off x="1651000" y="4445000"/>
-            <a:ext cx="1397000" cy="1143000"/>
-          </a:xfrm>
-          <a:prstGeom prst="rect">
-            <a:avLst/>
-          </a:prstGeom>
-          <a:solidFill>
-            <a:srgbClr val="9467BD"/>
-          </a:solidFill>
-          <a:ln w="19050" cap="flat" cmpd="sng" algn="ctr">
-            <a:noFill/>
-            <a:prstDash val="solid"/>
-            <a:miter lim="800000"/>
-          </a:ln>
-          <a:effectLst/>
-          <a:extLst>
-            <a:ext uri="{91240B29-F687-4F45-9708-019B960494DF}">
-              <a14:hiddenLine xmlns:a14="http://schemas.microsoft.com/office/drawing/2010/main" w="19050" cap="flat" cmpd="sng" algn="ctr">
-                <a:solidFill>
-                  <a:schemeClr val="accent1">
-                    <a:shade val="15000"/>
-                  </a:schemeClr>
-                </a:solidFill>
-                <a:prstDash val="solid"/>
-                <a:miter lim="800000"/>
-              </a14:hiddenLine>
-            </a:ext>
-          </a:extLst>
-        </p:spPr>
-        <p:style>
-          <a:lnRef idx="2">
-            <a:schemeClr val="accent1">
-              <a:shade val="15000"/>
-            </a:schemeClr>
-          </a:lnRef>
-          <a:fillRef idx="1">
-            <a:schemeClr val="accent1"/>
-          </a:fillRef>
-          <a:effectRef idx="0">
-            <a:schemeClr val="accent1"/>
-          </a:effectRef>
-          <a:fontRef idx="minor">
-            <a:schemeClr val="lt1"/>
-          </a:fontRef>
-        </p:style>
-        <p:txBody>
-          <a:bodyPr rtlCol="0" anchor="ctr"/>
-          <a:lstStyle/>
-          <a:p>
-            <a:pPr algn="ctr"/>
-            <a:r>
-              <a:rPr lang="en-AU" sz="1400" b="1">
-                <a:solidFill>
-                  <a:srgbClr val="FFFFFF"/>
-                </a:solidFill>
-              </a:rPr>
-              <a:t>Odd3</a:t>
-            </a:r>
-          </a:p>
-        </p:txBody>
-      </p:sp>
-      <p:sp>
-        <p:nvSpPr>
-          <p:cNvPr id="7" name="Target">
-            <a:extLst>
-              <a:ext uri="{FF2B5EF4-FFF2-40B4-BE49-F238E27FC236}">
-                <a16:creationId xmlns:a16="http://schemas.microsoft.com/office/drawing/2014/main" id="{1E59E077-6F00-975B-E8AD-A745741CDB1B}"/>
-              </a:ext>
-            </a:extLst>
-          </p:cNvPr>
-          <p:cNvSpPr/>
-          <p:nvPr/>
-        </p:nvSpPr>
-        <p:spPr>
-          <a:xfrm>
-            <a:off x="7620000" y="2921000"/>
-            <a:ext cx="2540000" cy="1524000"/>
-          </a:xfrm>
-          <a:prstGeom prst="rect">
-            <a:avLst/>
-          </a:prstGeom>
-          <a:solidFill>
-            <a:srgbClr val="D62728"/>
-          </a:solidFill>
-          <a:ln w="19050" cap="flat" cmpd="sng" algn="ctr">
-            <a:noFill/>
-            <a:prstDash val="solid"/>
-            <a:miter lim="800000"/>
-          </a:ln>
-          <a:effectLst/>
-          <a:extLst>
-            <a:ext uri="{91240B29-F687-4F45-9708-019B960494DF}">
-              <a14:hiddenLine xmlns:a14="http://schemas.microsoft.com/office/drawing/2010/main" w="19050" cap="flat" cmpd="sng" algn="ctr">
-                <a:solidFill>
-                  <a:schemeClr val="accent1">
-                    <a:shade val="15000"/>
-                  </a:schemeClr>
-                </a:solidFill>
-                <a:prstDash val="solid"/>
-                <a:miter lim="800000"/>
-              </a14:hiddenLine>
-            </a:ext>
-          </a:extLst>
-        </p:spPr>
-        <p:style>
-          <a:lnRef idx="2">
-            <a:schemeClr val="accent1">
-              <a:shade val="15000"/>
-            </a:schemeClr>
-          </a:lnRef>
-          <a:fillRef idx="1">
-            <a:schemeClr val="accent1"/>
-          </a:fillRef>
-          <a:effectRef idx="0">
-            <a:schemeClr val="accent1"/>
-          </a:effectRef>
-          <a:fontRef idx="minor">
-            <a:schemeClr val="lt1"/>
-          </a:fontRef>
-        </p:style>
-        <p:txBody>
-          <a:bodyPr rtlCol="0" anchor="ctr"/>
-          <a:lstStyle/>
-          <a:p>
-            <a:pPr algn="ctr"/>
-            <a:r>
-              <a:rPr lang="en-AU" sz="1400" b="1">
-                <a:solidFill>
-                  <a:srgbClr val="FFFFFF"/>
-                </a:solidFill>
-              </a:rPr>
-              <a:t>TARGET</a:t>
-            </a:r>
-          </a:p>
-        </p:txBody>
-      </p:sp>
-    </p:spTree>
-    <p:extLst>
-      <p:ext uri="{BB962C8B-B14F-4D97-AF65-F5344CB8AC3E}">
-        <p14:creationId xmlns:p14="http://schemas.microsoft.com/office/powerpoint/2010/main" val="512217095"/>
-      </p:ext>
-    </p:extLst>
-  </p:cSld>
-  <p:clrMapOvr>
-    <a:masterClrMapping/>
-  </p:clrMapOvr>
-</p:sld>
-</file>
-
-<file path=ppt/slides/slide7.xml><?xml version="1.0" encoding="utf-8"?>
-<p:sld xmlns:a="http://schemas.openxmlformats.org/drawingml/2006/main" xmlns:r="http://schemas.openxmlformats.org/officeDocument/2006/relationships" xmlns:p="http://schemas.openxmlformats.org/presentationml/2006/main">
-  <p:cSld>
-    <p:spTree>
-      <p:nvGrpSpPr>
-        <p:cNvPr id="1" name=""/>
-        <p:cNvGrpSpPr/>
-        <p:nvPr/>
-      </p:nvGrpSpPr>
-      <p:grpSpPr>
-        <a:xfrm>
-          <a:off x="0" y="0"/>
-          <a:ext cx="0" cy="0"/>
-          <a:chOff x="0" y="0"/>
-          <a:chExt cx="0" cy="0"/>
-        </a:xfrm>
-      </p:grpSpPr>
-      <p:sp>
-        <p:nvSpPr>
-          <p:cNvPr id="2" name="Heading">
-            <a:extLst>
-              <a:ext uri="{FF2B5EF4-FFF2-40B4-BE49-F238E27FC236}">
-                <a16:creationId xmlns:a16="http://schemas.microsoft.com/office/drawing/2014/main" id="{D191635C-CECE-205D-9254-51EBCC1C2B09}"/>
-              </a:ext>
-            </a:extLst>
-          </p:cNvPr>
-          <p:cNvSpPr txBox="1"/>
-          <p:nvPr/>
-        </p:nvSpPr>
-        <p:spPr>
-          <a:xfrm>
-            <a:off x="508000" y="304800"/>
-            <a:ext cx="11176000" cy="461665"/>
-          </a:xfrm>
-          <a:prstGeom prst="rect">
-            <a:avLst/>
-          </a:prstGeom>
-          <a:noFill/>
-        </p:spPr>
-        <p:txBody>
-          <a:bodyPr vert="horz" rtlCol="0">
-            <a:spAutoFit/>
-          </a:bodyPr>
-          <a:lstStyle/>
-          <a:p>
-            <a:r>
-              <a:rPr lang="en-AU" sz="2400" b="1">
-                <a:solidFill>
-                  <a:srgbClr val="282828"/>
-                </a:solidFill>
-              </a:rPr>
-              <a:t>Groups are one object</a:t>
-            </a:r>
-          </a:p>
-        </p:txBody>
-      </p:sp>
-      <p:sp>
-        <p:nvSpPr>
-          <p:cNvPr id="3" name="Instructions">
-            <a:extLst>
-              <a:ext uri="{FF2B5EF4-FFF2-40B4-BE49-F238E27FC236}">
-                <a16:creationId xmlns:a16="http://schemas.microsoft.com/office/drawing/2014/main" id="{DD163F24-6E7C-1A8D-66CE-F6258F4B4070}"/>
-              </a:ext>
-            </a:extLst>
-          </p:cNvPr>
-          <p:cNvSpPr txBox="1"/>
-          <p:nvPr/>
-        </p:nvSpPr>
-        <p:spPr>
-          <a:xfrm>
-            <a:off x="508000" y="762000"/>
-            <a:ext cx="11176000" cy="292388"/>
-          </a:xfrm>
-          <a:prstGeom prst="rect">
-            <a:avLst/>
-          </a:prstGeom>
-          <a:noFill/>
-        </p:spPr>
-        <p:txBody>
-          <a:bodyPr vert="horz" rtlCol="0">
-            <a:spAutoFit/>
-          </a:bodyPr>
-          <a:lstStyle/>
-          <a:p>
-            <a:r>
-              <a:rPr lang="en-AU" sz="1300">
-                <a:solidFill>
-                  <a:srgbClr val="7F7F7F"/>
-                </a:solidFill>
-              </a:rPr>
               <a:t>Align the group with the loose shapes - its internal spacing must not change. Then try Match size on it.</a:t>
             </a:r>
           </a:p>
@@ -6119,7 +3709,7 @@
           <p:cNvPr id="7" name="TheGroup">
             <a:extLst>
               <a:ext uri="{FF2B5EF4-FFF2-40B4-BE49-F238E27FC236}">
-                <a16:creationId xmlns:a16="http://schemas.microsoft.com/office/drawing/2014/main" id="{F54E6CB6-2965-1CD8-0F9E-316D3E2DABAE}"/>
+                <a16:creationId xmlns:a16="http://schemas.microsoft.com/office/drawing/2014/main" id="{8640AA1C-838F-784F-637C-41FAF2DC4FD5}"/>
               </a:ext>
             </a:extLst>
           </p:cNvPr>
@@ -6139,7 +3729,7 @@
             <p:cNvPr id="4" name="G1">
               <a:extLst>
                 <a:ext uri="{FF2B5EF4-FFF2-40B4-BE49-F238E27FC236}">
-                  <a16:creationId xmlns:a16="http://schemas.microsoft.com/office/drawing/2014/main" id="{3DF1BAE6-88DA-2700-6646-E663896CE7C1}"/>
+                  <a16:creationId xmlns:a16="http://schemas.microsoft.com/office/drawing/2014/main" id="{56B4D97C-1216-F4D6-8D43-71A9D9CA76C5}"/>
                 </a:ext>
               </a:extLst>
             </p:cNvPr>
@@ -6214,7 +3804,7 @@
             <p:cNvPr id="5" name="G2">
               <a:extLst>
                 <a:ext uri="{FF2B5EF4-FFF2-40B4-BE49-F238E27FC236}">
-                  <a16:creationId xmlns:a16="http://schemas.microsoft.com/office/drawing/2014/main" id="{4CC5C473-DFBD-7A8D-2854-A71A33321AAB}"/>
+                  <a16:creationId xmlns:a16="http://schemas.microsoft.com/office/drawing/2014/main" id="{390878C7-9B77-C086-5B25-4F9A640BC455}"/>
                 </a:ext>
               </a:extLst>
             </p:cNvPr>
@@ -6289,7 +3879,7 @@
             <p:cNvPr id="6" name="G3">
               <a:extLst>
                 <a:ext uri="{FF2B5EF4-FFF2-40B4-BE49-F238E27FC236}">
-                  <a16:creationId xmlns:a16="http://schemas.microsoft.com/office/drawing/2014/main" id="{EF97760E-F0EE-3320-6C76-F439FC23D52F}"/>
+                  <a16:creationId xmlns:a16="http://schemas.microsoft.com/office/drawing/2014/main" id="{5058CCFD-1B9D-5000-63E8-570FF6A1F26B}"/>
                 </a:ext>
               </a:extLst>
             </p:cNvPr>
@@ -6365,7 +3955,7 @@
           <p:cNvPr id="8" name="Loose1">
             <a:extLst>
               <a:ext uri="{FF2B5EF4-FFF2-40B4-BE49-F238E27FC236}">
-                <a16:creationId xmlns:a16="http://schemas.microsoft.com/office/drawing/2014/main" id="{20EB0308-3A11-ACB6-19CB-8F555431CEEA}"/>
+                <a16:creationId xmlns:a16="http://schemas.microsoft.com/office/drawing/2014/main" id="{B2ADC08E-8403-9AC2-7C0D-DCFC1FB7C77F}"/>
               </a:ext>
             </a:extLst>
           </p:cNvPr>
@@ -6440,7 +4030,7 @@
           <p:cNvPr id="9" name="Loose2">
             <a:extLst>
               <a:ext uri="{FF2B5EF4-FFF2-40B4-BE49-F238E27FC236}">
-                <a16:creationId xmlns:a16="http://schemas.microsoft.com/office/drawing/2014/main" id="{8BC010B2-668C-048A-1581-AC17BD0A6273}"/>
+                <a16:creationId xmlns:a16="http://schemas.microsoft.com/office/drawing/2014/main" id="{54A2369F-9494-87EF-730B-4B214D97ECA9}"/>
               </a:ext>
             </a:extLst>
           </p:cNvPr>
@@ -6515,7 +4105,7 @@
           <p:cNvPr id="10" name="TextBox 9">
             <a:extLst>
               <a:ext uri="{FF2B5EF4-FFF2-40B4-BE49-F238E27FC236}">
-                <a16:creationId xmlns:a16="http://schemas.microsoft.com/office/drawing/2014/main" id="{99DFA963-B4F2-B2A0-A256-7EAF16EAA736}"/>
+                <a16:creationId xmlns:a16="http://schemas.microsoft.com/office/drawing/2014/main" id="{56CD203A-1B27-AEDA-BDE2-9F416038850B}"/>
               </a:ext>
             </a:extLst>
           </p:cNvPr>
@@ -6552,7 +4142,4203 @@
     </p:spTree>
     <p:extLst>
       <p:ext uri="{BB962C8B-B14F-4D97-AF65-F5344CB8AC3E}">
-        <p14:creationId xmlns:p14="http://schemas.microsoft.com/office/powerpoint/2010/main" val="2833574522"/>
+        <p14:creationId xmlns:p14="http://schemas.microsoft.com/office/powerpoint/2010/main" val="421069406"/>
+      </p:ext>
+    </p:extLst>
+  </p:cSld>
+  <p:clrMapOvr>
+    <a:masterClrMapping/>
+  </p:clrMapOvr>
+</p:sld>
+</file>
+
+<file path=ppt/slides/slide11.xml><?xml version="1.0" encoding="utf-8"?>
+<p:sld xmlns:a="http://schemas.openxmlformats.org/drawingml/2006/main" xmlns:r="http://schemas.openxmlformats.org/officeDocument/2006/relationships" xmlns:p="http://schemas.openxmlformats.org/presentationml/2006/main">
+  <p:cSld>
+    <p:spTree>
+      <p:nvGrpSpPr>
+        <p:cNvPr id="1" name=""/>
+        <p:cNvGrpSpPr/>
+        <p:nvPr/>
+      </p:nvGrpSpPr>
+      <p:grpSpPr>
+        <a:xfrm>
+          <a:off x="0" y="0"/>
+          <a:ext cx="0" cy="0"/>
+          <a:chOff x="0" y="0"/>
+          <a:chExt cx="0" cy="0"/>
+        </a:xfrm>
+      </p:grpSpPr>
+      <p:sp>
+        <p:nvSpPr>
+          <p:cNvPr id="2" name="Heading">
+            <a:extLst>
+              <a:ext uri="{FF2B5EF4-FFF2-40B4-BE49-F238E27FC236}">
+                <a16:creationId xmlns:a16="http://schemas.microsoft.com/office/drawing/2014/main" id="{2353DFA9-0094-7BF4-D102-E4776874E124}"/>
+              </a:ext>
+            </a:extLst>
+          </p:cNvPr>
+          <p:cNvSpPr txBox="1"/>
+          <p:nvPr/>
+        </p:nvSpPr>
+        <p:spPr>
+          <a:xfrm>
+            <a:off x="508000" y="304800"/>
+            <a:ext cx="11176000" cy="461665"/>
+          </a:xfrm>
+          <a:prstGeom prst="rect">
+            <a:avLst/>
+          </a:prstGeom>
+          <a:noFill/>
+        </p:spPr>
+        <p:txBody>
+          <a:bodyPr vert="horz" rtlCol="0">
+            <a:spAutoFit/>
+          </a:bodyPr>
+          <a:lstStyle/>
+          <a:p>
+            <a:r>
+              <a:rPr lang="en-AU" sz="2400" b="1">
+                <a:solidFill>
+                  <a:srgbClr val="282828"/>
+                </a:solidFill>
+              </a:rPr>
+              <a:t>Align the text, not the box</a:t>
+            </a:r>
+          </a:p>
+        </p:txBody>
+      </p:sp>
+      <p:sp>
+        <p:nvSpPr>
+          <p:cNvPr id="3" name="Instructions">
+            <a:extLst>
+              <a:ext uri="{FF2B5EF4-FFF2-40B4-BE49-F238E27FC236}">
+                <a16:creationId xmlns:a16="http://schemas.microsoft.com/office/drawing/2014/main" id="{FF582D62-58F9-F1CD-52C5-FC3AE3E92046}"/>
+              </a:ext>
+            </a:extLst>
+          </p:cNvPr>
+          <p:cNvSpPr txBox="1"/>
+          <p:nvPr/>
+        </p:nvSpPr>
+        <p:spPr>
+          <a:xfrm>
+            <a:off x="508000" y="762000"/>
+            <a:ext cx="11176000" cy="292388"/>
+          </a:xfrm>
+          <a:prstGeom prst="rect">
+            <a:avLst/>
+          </a:prstGeom>
+          <a:noFill/>
+        </p:spPr>
+        <p:txBody>
+          <a:bodyPr vert="horz" rtlCol="0">
+            <a:spAutoFit/>
+          </a:bodyPr>
+          <a:lstStyle/>
+          <a:p>
+            <a:r>
+              <a:rPr lang="en-AU" sz="1300">
+                <a:solidFill>
+                  <a:srgbClr val="7F7F7F"/>
+                </a:solidFill>
+              </a:rPr>
+              <a:t>All three frames already start at the same x. Select them and Align &gt; Left with Measure = Text bounds.</a:t>
+            </a:r>
+          </a:p>
+        </p:txBody>
+      </p:sp>
+      <p:sp>
+        <p:nvSpPr>
+          <p:cNvPr id="4" name="Text0">
+            <a:extLst>
+              <a:ext uri="{FF2B5EF4-FFF2-40B4-BE49-F238E27FC236}">
+                <a16:creationId xmlns:a16="http://schemas.microsoft.com/office/drawing/2014/main" id="{6C764BB3-18C0-41D5-48FE-B1A63B5487C1}"/>
+              </a:ext>
+            </a:extLst>
+          </p:cNvPr>
+          <p:cNvSpPr/>
+          <p:nvPr/>
+        </p:nvSpPr>
+        <p:spPr>
+          <a:xfrm>
+            <a:off x="3175000" y="2159000"/>
+            <a:ext cx="5334000" cy="762000"/>
+          </a:xfrm>
+          <a:prstGeom prst="roundRect">
+            <a:avLst/>
+          </a:prstGeom>
+          <a:solidFill>
+            <a:srgbClr val="EBEBF0"/>
+          </a:solidFill>
+          <a:ln>
+            <a:solidFill>
+              <a:srgbClr val="7F7F7F"/>
+            </a:solidFill>
+          </a:ln>
+        </p:spPr>
+        <p:style>
+          <a:lnRef idx="2">
+            <a:schemeClr val="accent1">
+              <a:shade val="15000"/>
+            </a:schemeClr>
+          </a:lnRef>
+          <a:fillRef idx="1">
+            <a:schemeClr val="accent1"/>
+          </a:fillRef>
+          <a:effectRef idx="0">
+            <a:schemeClr val="accent1"/>
+          </a:effectRef>
+          <a:fontRef idx="minor">
+            <a:schemeClr val="lt1"/>
+          </a:fontRef>
+        </p:style>
+        <p:txBody>
+          <a:bodyPr rtlCol="0" anchor="ctr"/>
+          <a:lstStyle/>
+          <a:p>
+            <a:r>
+              <a:rPr lang="en-AU" sz="1600">
+                <a:solidFill>
+                  <a:srgbClr val="282828"/>
+                </a:solidFill>
+              </a:rPr>
+              <a:t>left-aligned text</a:t>
+            </a:r>
+          </a:p>
+        </p:txBody>
+      </p:sp>
+      <p:sp>
+        <p:nvSpPr>
+          <p:cNvPr id="5" name="Text1">
+            <a:extLst>
+              <a:ext uri="{FF2B5EF4-FFF2-40B4-BE49-F238E27FC236}">
+                <a16:creationId xmlns:a16="http://schemas.microsoft.com/office/drawing/2014/main" id="{1F0CD042-947F-06DB-7AE2-F8F193AC58F7}"/>
+              </a:ext>
+            </a:extLst>
+          </p:cNvPr>
+          <p:cNvSpPr/>
+          <p:nvPr/>
+        </p:nvSpPr>
+        <p:spPr>
+          <a:xfrm>
+            <a:off x="3175000" y="3302000"/>
+            <a:ext cx="5334000" cy="762000"/>
+          </a:xfrm>
+          <a:prstGeom prst="roundRect">
+            <a:avLst/>
+          </a:prstGeom>
+          <a:solidFill>
+            <a:srgbClr val="EBEBF0"/>
+          </a:solidFill>
+          <a:ln>
+            <a:solidFill>
+              <a:srgbClr val="7F7F7F"/>
+            </a:solidFill>
+          </a:ln>
+        </p:spPr>
+        <p:style>
+          <a:lnRef idx="2">
+            <a:schemeClr val="accent1">
+              <a:shade val="15000"/>
+            </a:schemeClr>
+          </a:lnRef>
+          <a:fillRef idx="1">
+            <a:schemeClr val="accent1"/>
+          </a:fillRef>
+          <a:effectRef idx="0">
+            <a:schemeClr val="accent1"/>
+          </a:effectRef>
+          <a:fontRef idx="minor">
+            <a:schemeClr val="lt1"/>
+          </a:fontRef>
+        </p:style>
+        <p:txBody>
+          <a:bodyPr rtlCol="0" anchor="ctr"/>
+          <a:lstStyle/>
+          <a:p>
+            <a:pPr algn="ctr"/>
+            <a:r>
+              <a:rPr lang="en-AU" sz="1600">
+                <a:solidFill>
+                  <a:srgbClr val="282828"/>
+                </a:solidFill>
+              </a:rPr>
+              <a:t>centred text</a:t>
+            </a:r>
+          </a:p>
+        </p:txBody>
+      </p:sp>
+      <p:sp>
+        <p:nvSpPr>
+          <p:cNvPr id="6" name="Text2">
+            <a:extLst>
+              <a:ext uri="{FF2B5EF4-FFF2-40B4-BE49-F238E27FC236}">
+                <a16:creationId xmlns:a16="http://schemas.microsoft.com/office/drawing/2014/main" id="{63AB5179-6C5E-A471-ECF1-5AE9A096127F}"/>
+              </a:ext>
+            </a:extLst>
+          </p:cNvPr>
+          <p:cNvSpPr/>
+          <p:nvPr/>
+        </p:nvSpPr>
+        <p:spPr>
+          <a:xfrm>
+            <a:off x="3175000" y="4445000"/>
+            <a:ext cx="5334000" cy="762000"/>
+          </a:xfrm>
+          <a:prstGeom prst="roundRect">
+            <a:avLst/>
+          </a:prstGeom>
+          <a:solidFill>
+            <a:srgbClr val="EBEBF0"/>
+          </a:solidFill>
+          <a:ln>
+            <a:solidFill>
+              <a:srgbClr val="7F7F7F"/>
+            </a:solidFill>
+          </a:ln>
+        </p:spPr>
+        <p:style>
+          <a:lnRef idx="2">
+            <a:schemeClr val="accent1">
+              <a:shade val="15000"/>
+            </a:schemeClr>
+          </a:lnRef>
+          <a:fillRef idx="1">
+            <a:schemeClr val="accent1"/>
+          </a:fillRef>
+          <a:effectRef idx="0">
+            <a:schemeClr val="accent1"/>
+          </a:effectRef>
+          <a:fontRef idx="minor">
+            <a:schemeClr val="lt1"/>
+          </a:fontRef>
+        </p:style>
+        <p:txBody>
+          <a:bodyPr rtlCol="0" anchor="ctr"/>
+          <a:lstStyle/>
+          <a:p>
+            <a:pPr algn="r"/>
+            <a:r>
+              <a:rPr lang="en-AU" sz="1600">
+                <a:solidFill>
+                  <a:srgbClr val="282828"/>
+                </a:solidFill>
+              </a:rPr>
+              <a:t>right-aligned text</a:t>
+            </a:r>
+          </a:p>
+        </p:txBody>
+      </p:sp>
+      <p:sp>
+        <p:nvSpPr>
+          <p:cNvPr id="7" name="TextBox 6">
+            <a:extLst>
+              <a:ext uri="{FF2B5EF4-FFF2-40B4-BE49-F238E27FC236}">
+                <a16:creationId xmlns:a16="http://schemas.microsoft.com/office/drawing/2014/main" id="{33305549-5AFA-90D9-6795-2C8C915DD4C7}"/>
+              </a:ext>
+            </a:extLst>
+          </p:cNvPr>
+          <p:cNvSpPr txBox="1"/>
+          <p:nvPr/>
+        </p:nvSpPr>
+        <p:spPr>
+          <a:xfrm>
+            <a:off x="508000" y="5715000"/>
+            <a:ext cx="11176000" cy="276999"/>
+          </a:xfrm>
+          <a:prstGeom prst="rect">
+            <a:avLst/>
+          </a:prstGeom>
+          <a:noFill/>
+        </p:spPr>
+        <p:txBody>
+          <a:bodyPr vert="horz" rtlCol="0">
+            <a:spAutoFit/>
+          </a:bodyPr>
+          <a:lstStyle/>
+          <a:p>
+            <a:r>
+              <a:rPr lang="en-AU" sz="1200">
+                <a:solidFill>
+                  <a:srgbClr val="7F7F7F"/>
+                </a:solidFill>
+              </a:rPr>
+              <a:t>The frames are identical, so frame mode does nothing. Text bounds moves each box so the text itself lines up.</a:t>
+            </a:r>
+          </a:p>
+        </p:txBody>
+      </p:sp>
+    </p:spTree>
+    <p:extLst>
+      <p:ext uri="{BB962C8B-B14F-4D97-AF65-F5344CB8AC3E}">
+        <p14:creationId xmlns:p14="http://schemas.microsoft.com/office/powerpoint/2010/main" val="1521433332"/>
+      </p:ext>
+    </p:extLst>
+  </p:cSld>
+  <p:clrMapOvr>
+    <a:masterClrMapping/>
+  </p:clrMapOvr>
+</p:sld>
+</file>
+
+<file path=ppt/slides/slide12.xml><?xml version="1.0" encoding="utf-8"?>
+<p:sld xmlns:a="http://schemas.openxmlformats.org/drawingml/2006/main" xmlns:r="http://schemas.openxmlformats.org/officeDocument/2006/relationships" xmlns:p="http://schemas.openxmlformats.org/presentationml/2006/main">
+  <p:cSld>
+    <p:spTree>
+      <p:nvGrpSpPr>
+        <p:cNvPr id="1" name=""/>
+        <p:cNvGrpSpPr/>
+        <p:nvPr/>
+      </p:nvGrpSpPr>
+      <p:grpSpPr>
+        <a:xfrm>
+          <a:off x="0" y="0"/>
+          <a:ext cx="0" cy="0"/>
+          <a:chOff x="0" y="0"/>
+          <a:chExt cx="0" cy="0"/>
+        </a:xfrm>
+      </p:grpSpPr>
+      <p:sp>
+        <p:nvSpPr>
+          <p:cNvPr id="2" name="Heading">
+            <a:extLst>
+              <a:ext uri="{FF2B5EF4-FFF2-40B4-BE49-F238E27FC236}">
+                <a16:creationId xmlns:a16="http://schemas.microsoft.com/office/drawing/2014/main" id="{6C228787-3C14-F8C4-6FFB-FF88D2DEE0D1}"/>
+              </a:ext>
+            </a:extLst>
+          </p:cNvPr>
+          <p:cNvSpPr txBox="1"/>
+          <p:nvPr/>
+        </p:nvSpPr>
+        <p:spPr>
+          <a:xfrm>
+            <a:off x="508000" y="304800"/>
+            <a:ext cx="11176000" cy="461665"/>
+          </a:xfrm>
+          <a:prstGeom prst="rect">
+            <a:avLst/>
+          </a:prstGeom>
+          <a:noFill/>
+        </p:spPr>
+        <p:txBody>
+          <a:bodyPr vert="horz" rtlCol="0">
+            <a:spAutoFit/>
+          </a:bodyPr>
+          <a:lstStyle/>
+          <a:p>
+            <a:r>
+              <a:rPr lang="en-AU" sz="2400" b="1">
+                <a:solidFill>
+                  <a:srgbClr val="282828"/>
+                </a:solidFill>
+              </a:rPr>
+              <a:t>Tidy a scatter into a grid</a:t>
+            </a:r>
+          </a:p>
+        </p:txBody>
+      </p:sp>
+      <p:sp>
+        <p:nvSpPr>
+          <p:cNvPr id="3" name="Instructions">
+            <a:extLst>
+              <a:ext uri="{FF2B5EF4-FFF2-40B4-BE49-F238E27FC236}">
+                <a16:creationId xmlns:a16="http://schemas.microsoft.com/office/drawing/2014/main" id="{EC727660-1527-5D69-D5D4-60B4A7BBC6B9}"/>
+              </a:ext>
+            </a:extLst>
+          </p:cNvPr>
+          <p:cNvSpPr txBox="1"/>
+          <p:nvPr/>
+        </p:nvSpPr>
+        <p:spPr>
+          <a:xfrm>
+            <a:off x="508000" y="762000"/>
+            <a:ext cx="11176000" cy="292388"/>
+          </a:xfrm>
+          <a:prstGeom prst="rect">
+            <a:avLst/>
+          </a:prstGeom>
+          <a:noFill/>
+        </p:spPr>
+        <p:txBody>
+          <a:bodyPr vert="horz" rtlCol="0">
+            <a:spAutoFit/>
+          </a:bodyPr>
+          <a:lstStyle/>
+          <a:p>
+            <a:r>
+              <a:rPr lang="en-AU" sz="1300">
+                <a:solidFill>
+                  <a:srgbClr val="7F7F7F"/>
+                </a:solidFill>
+              </a:rPr>
+              <a:t>Select all nine circles. Leave Columns blank for a near-square grid, or type 3. Then Arrange &gt; Grid.</a:t>
+            </a:r>
+          </a:p>
+        </p:txBody>
+      </p:sp>
+      <p:sp>
+        <p:nvSpPr>
+          <p:cNvPr id="4" name="Dot0">
+            <a:extLst>
+              <a:ext uri="{FF2B5EF4-FFF2-40B4-BE49-F238E27FC236}">
+                <a16:creationId xmlns:a16="http://schemas.microsoft.com/office/drawing/2014/main" id="{A501D444-817E-813D-7A29-7E74E5AA4495}"/>
+              </a:ext>
+            </a:extLst>
+          </p:cNvPr>
+          <p:cNvSpPr/>
+          <p:nvPr/>
+        </p:nvSpPr>
+        <p:spPr>
+          <a:xfrm>
+            <a:off x="1524000" y="1905000"/>
+            <a:ext cx="1016000" cy="1016000"/>
+          </a:xfrm>
+          <a:prstGeom prst="ellipse">
+            <a:avLst/>
+          </a:prstGeom>
+          <a:solidFill>
+            <a:srgbClr val="1F77B4"/>
+          </a:solidFill>
+          <a:ln w="19050" cap="flat" cmpd="sng" algn="ctr">
+            <a:noFill/>
+            <a:prstDash val="solid"/>
+            <a:miter lim="800000"/>
+          </a:ln>
+          <a:effectLst/>
+          <a:extLst>
+            <a:ext uri="{91240B29-F687-4F45-9708-019B960494DF}">
+              <a14:hiddenLine xmlns:a14="http://schemas.microsoft.com/office/drawing/2010/main" w="19050" cap="flat" cmpd="sng" algn="ctr">
+                <a:solidFill>
+                  <a:schemeClr val="accent1">
+                    <a:shade val="15000"/>
+                  </a:schemeClr>
+                </a:solidFill>
+                <a:prstDash val="solid"/>
+                <a:miter lim="800000"/>
+              </a14:hiddenLine>
+            </a:ext>
+          </a:extLst>
+        </p:spPr>
+        <p:style>
+          <a:lnRef idx="2">
+            <a:schemeClr val="accent1">
+              <a:shade val="15000"/>
+            </a:schemeClr>
+          </a:lnRef>
+          <a:fillRef idx="1">
+            <a:schemeClr val="accent1"/>
+          </a:fillRef>
+          <a:effectRef idx="0">
+            <a:schemeClr val="accent1"/>
+          </a:effectRef>
+          <a:fontRef idx="minor">
+            <a:schemeClr val="lt1"/>
+          </a:fontRef>
+        </p:style>
+        <p:txBody>
+          <a:bodyPr rtlCol="0" anchor="ctr"/>
+          <a:lstStyle/>
+          <a:p>
+            <a:pPr algn="ctr"/>
+            <a:r>
+              <a:rPr lang="en-AU" sz="1400" b="1">
+                <a:solidFill>
+                  <a:srgbClr val="FFFFFF"/>
+                </a:solidFill>
+              </a:rPr>
+              <a:t>1</a:t>
+            </a:r>
+          </a:p>
+        </p:txBody>
+      </p:sp>
+      <p:sp>
+        <p:nvSpPr>
+          <p:cNvPr id="5" name="Dot1">
+            <a:extLst>
+              <a:ext uri="{FF2B5EF4-FFF2-40B4-BE49-F238E27FC236}">
+                <a16:creationId xmlns:a16="http://schemas.microsoft.com/office/drawing/2014/main" id="{F8A15C59-81E5-D6E6-4A90-33EC6CC76C6A}"/>
+              </a:ext>
+            </a:extLst>
+          </p:cNvPr>
+          <p:cNvSpPr/>
+          <p:nvPr/>
+        </p:nvSpPr>
+        <p:spPr>
+          <a:xfrm>
+            <a:off x="5461000" y="2413000"/>
+            <a:ext cx="1016000" cy="1016000"/>
+          </a:xfrm>
+          <a:prstGeom prst="ellipse">
+            <a:avLst/>
+          </a:prstGeom>
+          <a:solidFill>
+            <a:srgbClr val="1F77B4"/>
+          </a:solidFill>
+          <a:ln w="19050" cap="flat" cmpd="sng" algn="ctr">
+            <a:noFill/>
+            <a:prstDash val="solid"/>
+            <a:miter lim="800000"/>
+          </a:ln>
+          <a:effectLst/>
+          <a:extLst>
+            <a:ext uri="{91240B29-F687-4F45-9708-019B960494DF}">
+              <a14:hiddenLine xmlns:a14="http://schemas.microsoft.com/office/drawing/2010/main" w="19050" cap="flat" cmpd="sng" algn="ctr">
+                <a:solidFill>
+                  <a:schemeClr val="accent1">
+                    <a:shade val="15000"/>
+                  </a:schemeClr>
+                </a:solidFill>
+                <a:prstDash val="solid"/>
+                <a:miter lim="800000"/>
+              </a14:hiddenLine>
+            </a:ext>
+          </a:extLst>
+        </p:spPr>
+        <p:style>
+          <a:lnRef idx="2">
+            <a:schemeClr val="accent1">
+              <a:shade val="15000"/>
+            </a:schemeClr>
+          </a:lnRef>
+          <a:fillRef idx="1">
+            <a:schemeClr val="accent1"/>
+          </a:fillRef>
+          <a:effectRef idx="0">
+            <a:schemeClr val="accent1"/>
+          </a:effectRef>
+          <a:fontRef idx="minor">
+            <a:schemeClr val="lt1"/>
+          </a:fontRef>
+        </p:style>
+        <p:txBody>
+          <a:bodyPr rtlCol="0" anchor="ctr"/>
+          <a:lstStyle/>
+          <a:p>
+            <a:pPr algn="ctr"/>
+            <a:r>
+              <a:rPr lang="en-AU" sz="1400" b="1">
+                <a:solidFill>
+                  <a:srgbClr val="FFFFFF"/>
+                </a:solidFill>
+              </a:rPr>
+              <a:t>2</a:t>
+            </a:r>
+          </a:p>
+        </p:txBody>
+      </p:sp>
+      <p:sp>
+        <p:nvSpPr>
+          <p:cNvPr id="6" name="Dot2">
+            <a:extLst>
+              <a:ext uri="{FF2B5EF4-FFF2-40B4-BE49-F238E27FC236}">
+                <a16:creationId xmlns:a16="http://schemas.microsoft.com/office/drawing/2014/main" id="{1A52271A-758E-6EA0-3C9D-CF391F6B4F3E}"/>
+              </a:ext>
+            </a:extLst>
+          </p:cNvPr>
+          <p:cNvSpPr/>
+          <p:nvPr/>
+        </p:nvSpPr>
+        <p:spPr>
+          <a:xfrm>
+            <a:off x="9652000" y="1778000"/>
+            <a:ext cx="1016000" cy="1016000"/>
+          </a:xfrm>
+          <a:prstGeom prst="ellipse">
+            <a:avLst/>
+          </a:prstGeom>
+          <a:solidFill>
+            <a:srgbClr val="1F77B4"/>
+          </a:solidFill>
+          <a:ln w="19050" cap="flat" cmpd="sng" algn="ctr">
+            <a:noFill/>
+            <a:prstDash val="solid"/>
+            <a:miter lim="800000"/>
+          </a:ln>
+          <a:effectLst/>
+          <a:extLst>
+            <a:ext uri="{91240B29-F687-4F45-9708-019B960494DF}">
+              <a14:hiddenLine xmlns:a14="http://schemas.microsoft.com/office/drawing/2010/main" w="19050" cap="flat" cmpd="sng" algn="ctr">
+                <a:solidFill>
+                  <a:schemeClr val="accent1">
+                    <a:shade val="15000"/>
+                  </a:schemeClr>
+                </a:solidFill>
+                <a:prstDash val="solid"/>
+                <a:miter lim="800000"/>
+              </a14:hiddenLine>
+            </a:ext>
+          </a:extLst>
+        </p:spPr>
+        <p:style>
+          <a:lnRef idx="2">
+            <a:schemeClr val="accent1">
+              <a:shade val="15000"/>
+            </a:schemeClr>
+          </a:lnRef>
+          <a:fillRef idx="1">
+            <a:schemeClr val="accent1"/>
+          </a:fillRef>
+          <a:effectRef idx="0">
+            <a:schemeClr val="accent1"/>
+          </a:effectRef>
+          <a:fontRef idx="minor">
+            <a:schemeClr val="lt1"/>
+          </a:fontRef>
+        </p:style>
+        <p:txBody>
+          <a:bodyPr rtlCol="0" anchor="ctr"/>
+          <a:lstStyle/>
+          <a:p>
+            <a:pPr algn="ctr"/>
+            <a:r>
+              <a:rPr lang="en-AU" sz="1400" b="1">
+                <a:solidFill>
+                  <a:srgbClr val="FFFFFF"/>
+                </a:solidFill>
+              </a:rPr>
+              <a:t>3</a:t>
+            </a:r>
+          </a:p>
+        </p:txBody>
+      </p:sp>
+      <p:sp>
+        <p:nvSpPr>
+          <p:cNvPr id="7" name="Dot3">
+            <a:extLst>
+              <a:ext uri="{FF2B5EF4-FFF2-40B4-BE49-F238E27FC236}">
+                <a16:creationId xmlns:a16="http://schemas.microsoft.com/office/drawing/2014/main" id="{FB8A0257-AE54-A90D-02A4-494B59971A09}"/>
+              </a:ext>
+            </a:extLst>
+          </p:cNvPr>
+          <p:cNvSpPr/>
+          <p:nvPr/>
+        </p:nvSpPr>
+        <p:spPr>
+          <a:xfrm>
+            <a:off x="2413000" y="3810000"/>
+            <a:ext cx="1016000" cy="1016000"/>
+          </a:xfrm>
+          <a:prstGeom prst="ellipse">
+            <a:avLst/>
+          </a:prstGeom>
+          <a:solidFill>
+            <a:srgbClr val="1F77B4"/>
+          </a:solidFill>
+          <a:ln w="19050" cap="flat" cmpd="sng" algn="ctr">
+            <a:noFill/>
+            <a:prstDash val="solid"/>
+            <a:miter lim="800000"/>
+          </a:ln>
+          <a:effectLst/>
+          <a:extLst>
+            <a:ext uri="{91240B29-F687-4F45-9708-019B960494DF}">
+              <a14:hiddenLine xmlns:a14="http://schemas.microsoft.com/office/drawing/2010/main" w="19050" cap="flat" cmpd="sng" algn="ctr">
+                <a:solidFill>
+                  <a:schemeClr val="accent1">
+                    <a:shade val="15000"/>
+                  </a:schemeClr>
+                </a:solidFill>
+                <a:prstDash val="solid"/>
+                <a:miter lim="800000"/>
+              </a14:hiddenLine>
+            </a:ext>
+          </a:extLst>
+        </p:spPr>
+        <p:style>
+          <a:lnRef idx="2">
+            <a:schemeClr val="accent1">
+              <a:shade val="15000"/>
+            </a:schemeClr>
+          </a:lnRef>
+          <a:fillRef idx="1">
+            <a:schemeClr val="accent1"/>
+          </a:fillRef>
+          <a:effectRef idx="0">
+            <a:schemeClr val="accent1"/>
+          </a:effectRef>
+          <a:fontRef idx="minor">
+            <a:schemeClr val="lt1"/>
+          </a:fontRef>
+        </p:style>
+        <p:txBody>
+          <a:bodyPr rtlCol="0" anchor="ctr"/>
+          <a:lstStyle/>
+          <a:p>
+            <a:pPr algn="ctr"/>
+            <a:r>
+              <a:rPr lang="en-AU" sz="1400" b="1">
+                <a:solidFill>
+                  <a:srgbClr val="FFFFFF"/>
+                </a:solidFill>
+              </a:rPr>
+              <a:t>4</a:t>
+            </a:r>
+          </a:p>
+        </p:txBody>
+      </p:sp>
+      <p:sp>
+        <p:nvSpPr>
+          <p:cNvPr id="8" name="Dot4">
+            <a:extLst>
+              <a:ext uri="{FF2B5EF4-FFF2-40B4-BE49-F238E27FC236}">
+                <a16:creationId xmlns:a16="http://schemas.microsoft.com/office/drawing/2014/main" id="{5B7D2F8C-161C-1157-9EE6-D2727229C073}"/>
+              </a:ext>
+            </a:extLst>
+          </p:cNvPr>
+          <p:cNvSpPr/>
+          <p:nvPr/>
+        </p:nvSpPr>
+        <p:spPr>
+          <a:xfrm>
+            <a:off x="6604000" y="3302000"/>
+            <a:ext cx="1016000" cy="1016000"/>
+          </a:xfrm>
+          <a:prstGeom prst="ellipse">
+            <a:avLst/>
+          </a:prstGeom>
+          <a:solidFill>
+            <a:srgbClr val="1F77B4"/>
+          </a:solidFill>
+          <a:ln w="19050" cap="flat" cmpd="sng" algn="ctr">
+            <a:noFill/>
+            <a:prstDash val="solid"/>
+            <a:miter lim="800000"/>
+          </a:ln>
+          <a:effectLst/>
+          <a:extLst>
+            <a:ext uri="{91240B29-F687-4F45-9708-019B960494DF}">
+              <a14:hiddenLine xmlns:a14="http://schemas.microsoft.com/office/drawing/2010/main" w="19050" cap="flat" cmpd="sng" algn="ctr">
+                <a:solidFill>
+                  <a:schemeClr val="accent1">
+                    <a:shade val="15000"/>
+                  </a:schemeClr>
+                </a:solidFill>
+                <a:prstDash val="solid"/>
+                <a:miter lim="800000"/>
+              </a14:hiddenLine>
+            </a:ext>
+          </a:extLst>
+        </p:spPr>
+        <p:style>
+          <a:lnRef idx="2">
+            <a:schemeClr val="accent1">
+              <a:shade val="15000"/>
+            </a:schemeClr>
+          </a:lnRef>
+          <a:fillRef idx="1">
+            <a:schemeClr val="accent1"/>
+          </a:fillRef>
+          <a:effectRef idx="0">
+            <a:schemeClr val="accent1"/>
+          </a:effectRef>
+          <a:fontRef idx="minor">
+            <a:schemeClr val="lt1"/>
+          </a:fontRef>
+        </p:style>
+        <p:txBody>
+          <a:bodyPr rtlCol="0" anchor="ctr"/>
+          <a:lstStyle/>
+          <a:p>
+            <a:pPr algn="ctr"/>
+            <a:r>
+              <a:rPr lang="en-AU" sz="1400" b="1">
+                <a:solidFill>
+                  <a:srgbClr val="FFFFFF"/>
+                </a:solidFill>
+              </a:rPr>
+              <a:t>5</a:t>
+            </a:r>
+          </a:p>
+        </p:txBody>
+      </p:sp>
+      <p:sp>
+        <p:nvSpPr>
+          <p:cNvPr id="9" name="Dot5">
+            <a:extLst>
+              <a:ext uri="{FF2B5EF4-FFF2-40B4-BE49-F238E27FC236}">
+                <a16:creationId xmlns:a16="http://schemas.microsoft.com/office/drawing/2014/main" id="{5B84C30B-957A-2EE4-B111-A904296D6FA4}"/>
+              </a:ext>
+            </a:extLst>
+          </p:cNvPr>
+          <p:cNvSpPr/>
+          <p:nvPr/>
+        </p:nvSpPr>
+        <p:spPr>
+          <a:xfrm>
+            <a:off x="8763000" y="4191000"/>
+            <a:ext cx="1016000" cy="1016000"/>
+          </a:xfrm>
+          <a:prstGeom prst="ellipse">
+            <a:avLst/>
+          </a:prstGeom>
+          <a:solidFill>
+            <a:srgbClr val="1F77B4"/>
+          </a:solidFill>
+          <a:ln w="19050" cap="flat" cmpd="sng" algn="ctr">
+            <a:noFill/>
+            <a:prstDash val="solid"/>
+            <a:miter lim="800000"/>
+          </a:ln>
+          <a:effectLst/>
+          <a:extLst>
+            <a:ext uri="{91240B29-F687-4F45-9708-019B960494DF}">
+              <a14:hiddenLine xmlns:a14="http://schemas.microsoft.com/office/drawing/2010/main" w="19050" cap="flat" cmpd="sng" algn="ctr">
+                <a:solidFill>
+                  <a:schemeClr val="accent1">
+                    <a:shade val="15000"/>
+                  </a:schemeClr>
+                </a:solidFill>
+                <a:prstDash val="solid"/>
+                <a:miter lim="800000"/>
+              </a14:hiddenLine>
+            </a:ext>
+          </a:extLst>
+        </p:spPr>
+        <p:style>
+          <a:lnRef idx="2">
+            <a:schemeClr val="accent1">
+              <a:shade val="15000"/>
+            </a:schemeClr>
+          </a:lnRef>
+          <a:fillRef idx="1">
+            <a:schemeClr val="accent1"/>
+          </a:fillRef>
+          <a:effectRef idx="0">
+            <a:schemeClr val="accent1"/>
+          </a:effectRef>
+          <a:fontRef idx="minor">
+            <a:schemeClr val="lt1"/>
+          </a:fontRef>
+        </p:style>
+        <p:txBody>
+          <a:bodyPr rtlCol="0" anchor="ctr"/>
+          <a:lstStyle/>
+          <a:p>
+            <a:pPr algn="ctr"/>
+            <a:r>
+              <a:rPr lang="en-AU" sz="1400" b="1">
+                <a:solidFill>
+                  <a:srgbClr val="FFFFFF"/>
+                </a:solidFill>
+              </a:rPr>
+              <a:t>6</a:t>
+            </a:r>
+          </a:p>
+        </p:txBody>
+      </p:sp>
+      <p:sp>
+        <p:nvSpPr>
+          <p:cNvPr id="10" name="Dot6">
+            <a:extLst>
+              <a:ext uri="{FF2B5EF4-FFF2-40B4-BE49-F238E27FC236}">
+                <a16:creationId xmlns:a16="http://schemas.microsoft.com/office/drawing/2014/main" id="{77A0E91B-8BE8-3712-0799-8595A7366F8B}"/>
+              </a:ext>
+            </a:extLst>
+          </p:cNvPr>
+          <p:cNvSpPr/>
+          <p:nvPr/>
+        </p:nvSpPr>
+        <p:spPr>
+          <a:xfrm>
+            <a:off x="1397000" y="5334000"/>
+            <a:ext cx="1016000" cy="1016000"/>
+          </a:xfrm>
+          <a:prstGeom prst="ellipse">
+            <a:avLst/>
+          </a:prstGeom>
+          <a:solidFill>
+            <a:srgbClr val="1F77B4"/>
+          </a:solidFill>
+          <a:ln w="19050" cap="flat" cmpd="sng" algn="ctr">
+            <a:noFill/>
+            <a:prstDash val="solid"/>
+            <a:miter lim="800000"/>
+          </a:ln>
+          <a:effectLst/>
+          <a:extLst>
+            <a:ext uri="{91240B29-F687-4F45-9708-019B960494DF}">
+              <a14:hiddenLine xmlns:a14="http://schemas.microsoft.com/office/drawing/2010/main" w="19050" cap="flat" cmpd="sng" algn="ctr">
+                <a:solidFill>
+                  <a:schemeClr val="accent1">
+                    <a:shade val="15000"/>
+                  </a:schemeClr>
+                </a:solidFill>
+                <a:prstDash val="solid"/>
+                <a:miter lim="800000"/>
+              </a14:hiddenLine>
+            </a:ext>
+          </a:extLst>
+        </p:spPr>
+        <p:style>
+          <a:lnRef idx="2">
+            <a:schemeClr val="accent1">
+              <a:shade val="15000"/>
+            </a:schemeClr>
+          </a:lnRef>
+          <a:fillRef idx="1">
+            <a:schemeClr val="accent1"/>
+          </a:fillRef>
+          <a:effectRef idx="0">
+            <a:schemeClr val="accent1"/>
+          </a:effectRef>
+          <a:fontRef idx="minor">
+            <a:schemeClr val="lt1"/>
+          </a:fontRef>
+        </p:style>
+        <p:txBody>
+          <a:bodyPr rtlCol="0" anchor="ctr"/>
+          <a:lstStyle/>
+          <a:p>
+            <a:pPr algn="ctr"/>
+            <a:r>
+              <a:rPr lang="en-AU" sz="1400" b="1">
+                <a:solidFill>
+                  <a:srgbClr val="FFFFFF"/>
+                </a:solidFill>
+              </a:rPr>
+              <a:t>7</a:t>
+            </a:r>
+          </a:p>
+        </p:txBody>
+      </p:sp>
+      <p:sp>
+        <p:nvSpPr>
+          <p:cNvPr id="11" name="Dot7">
+            <a:extLst>
+              <a:ext uri="{FF2B5EF4-FFF2-40B4-BE49-F238E27FC236}">
+                <a16:creationId xmlns:a16="http://schemas.microsoft.com/office/drawing/2014/main" id="{9AE010EC-AEBE-264E-A450-B42B86591568}"/>
+              </a:ext>
+            </a:extLst>
+          </p:cNvPr>
+          <p:cNvSpPr/>
+          <p:nvPr/>
+        </p:nvSpPr>
+        <p:spPr>
+          <a:xfrm>
+            <a:off x="5080000" y="5080000"/>
+            <a:ext cx="1016000" cy="1016000"/>
+          </a:xfrm>
+          <a:prstGeom prst="ellipse">
+            <a:avLst/>
+          </a:prstGeom>
+          <a:solidFill>
+            <a:srgbClr val="1F77B4"/>
+          </a:solidFill>
+          <a:ln w="19050" cap="flat" cmpd="sng" algn="ctr">
+            <a:noFill/>
+            <a:prstDash val="solid"/>
+            <a:miter lim="800000"/>
+          </a:ln>
+          <a:effectLst/>
+          <a:extLst>
+            <a:ext uri="{91240B29-F687-4F45-9708-019B960494DF}">
+              <a14:hiddenLine xmlns:a14="http://schemas.microsoft.com/office/drawing/2010/main" w="19050" cap="flat" cmpd="sng" algn="ctr">
+                <a:solidFill>
+                  <a:schemeClr val="accent1">
+                    <a:shade val="15000"/>
+                  </a:schemeClr>
+                </a:solidFill>
+                <a:prstDash val="solid"/>
+                <a:miter lim="800000"/>
+              </a14:hiddenLine>
+            </a:ext>
+          </a:extLst>
+        </p:spPr>
+        <p:style>
+          <a:lnRef idx="2">
+            <a:schemeClr val="accent1">
+              <a:shade val="15000"/>
+            </a:schemeClr>
+          </a:lnRef>
+          <a:fillRef idx="1">
+            <a:schemeClr val="accent1"/>
+          </a:fillRef>
+          <a:effectRef idx="0">
+            <a:schemeClr val="accent1"/>
+          </a:effectRef>
+          <a:fontRef idx="minor">
+            <a:schemeClr val="lt1"/>
+          </a:fontRef>
+        </p:style>
+        <p:txBody>
+          <a:bodyPr rtlCol="0" anchor="ctr"/>
+          <a:lstStyle/>
+          <a:p>
+            <a:pPr algn="ctr"/>
+            <a:r>
+              <a:rPr lang="en-AU" sz="1400" b="1">
+                <a:solidFill>
+                  <a:srgbClr val="FFFFFF"/>
+                </a:solidFill>
+              </a:rPr>
+              <a:t>8</a:t>
+            </a:r>
+          </a:p>
+        </p:txBody>
+      </p:sp>
+      <p:sp>
+        <p:nvSpPr>
+          <p:cNvPr id="12" name="Dot8">
+            <a:extLst>
+              <a:ext uri="{FF2B5EF4-FFF2-40B4-BE49-F238E27FC236}">
+                <a16:creationId xmlns:a16="http://schemas.microsoft.com/office/drawing/2014/main" id="{7DA655BC-C6C5-55F4-CEDF-0CEE559A4B90}"/>
+              </a:ext>
+            </a:extLst>
+          </p:cNvPr>
+          <p:cNvSpPr/>
+          <p:nvPr/>
+        </p:nvSpPr>
+        <p:spPr>
+          <a:xfrm>
+            <a:off x="10160000" y="5461000"/>
+            <a:ext cx="1016000" cy="1016000"/>
+          </a:xfrm>
+          <a:prstGeom prst="ellipse">
+            <a:avLst/>
+          </a:prstGeom>
+          <a:solidFill>
+            <a:srgbClr val="1F77B4"/>
+          </a:solidFill>
+          <a:ln w="19050" cap="flat" cmpd="sng" algn="ctr">
+            <a:noFill/>
+            <a:prstDash val="solid"/>
+            <a:miter lim="800000"/>
+          </a:ln>
+          <a:effectLst/>
+          <a:extLst>
+            <a:ext uri="{91240B29-F687-4F45-9708-019B960494DF}">
+              <a14:hiddenLine xmlns:a14="http://schemas.microsoft.com/office/drawing/2010/main" w="19050" cap="flat" cmpd="sng" algn="ctr">
+                <a:solidFill>
+                  <a:schemeClr val="accent1">
+                    <a:shade val="15000"/>
+                  </a:schemeClr>
+                </a:solidFill>
+                <a:prstDash val="solid"/>
+                <a:miter lim="800000"/>
+              </a14:hiddenLine>
+            </a:ext>
+          </a:extLst>
+        </p:spPr>
+        <p:style>
+          <a:lnRef idx="2">
+            <a:schemeClr val="accent1">
+              <a:shade val="15000"/>
+            </a:schemeClr>
+          </a:lnRef>
+          <a:fillRef idx="1">
+            <a:schemeClr val="accent1"/>
+          </a:fillRef>
+          <a:effectRef idx="0">
+            <a:schemeClr val="accent1"/>
+          </a:effectRef>
+          <a:fontRef idx="minor">
+            <a:schemeClr val="lt1"/>
+          </a:fontRef>
+        </p:style>
+        <p:txBody>
+          <a:bodyPr rtlCol="0" anchor="ctr"/>
+          <a:lstStyle/>
+          <a:p>
+            <a:pPr algn="ctr"/>
+            <a:r>
+              <a:rPr lang="en-AU" sz="1400" b="1">
+                <a:solidFill>
+                  <a:srgbClr val="FFFFFF"/>
+                </a:solidFill>
+              </a:rPr>
+              <a:t>9</a:t>
+            </a:r>
+          </a:p>
+        </p:txBody>
+      </p:sp>
+      <p:sp>
+        <p:nvSpPr>
+          <p:cNvPr id="13" name="TextBox 12">
+            <a:extLst>
+              <a:ext uri="{FF2B5EF4-FFF2-40B4-BE49-F238E27FC236}">
+                <a16:creationId xmlns:a16="http://schemas.microsoft.com/office/drawing/2014/main" id="{EC5C1231-9E17-0D24-BDE5-098C5D7FF3C8}"/>
+              </a:ext>
+            </a:extLst>
+          </p:cNvPr>
+          <p:cNvSpPr txBox="1"/>
+          <p:nvPr/>
+        </p:nvSpPr>
+        <p:spPr>
+          <a:xfrm>
+            <a:off x="508000" y="6350000"/>
+            <a:ext cx="11176000" cy="276999"/>
+          </a:xfrm>
+          <a:prstGeom prst="rect">
+            <a:avLst/>
+          </a:prstGeom>
+          <a:noFill/>
+        </p:spPr>
+        <p:txBody>
+          <a:bodyPr vert="horz" rtlCol="0">
+            <a:spAutoFit/>
+          </a:bodyPr>
+          <a:lstStyle/>
+          <a:p>
+            <a:r>
+              <a:rPr lang="en-AU" sz="1200">
+                <a:solidFill>
+                  <a:srgbClr val="7F7F7F"/>
+                </a:solidFill>
+              </a:rPr>
+              <a:t>Grid only repositions - sizes are left alone, so it is safe on groups too. Set Reference = Slide to spread across the whole slide.</a:t>
+            </a:r>
+          </a:p>
+        </p:txBody>
+      </p:sp>
+    </p:spTree>
+    <p:extLst>
+      <p:ext uri="{BB962C8B-B14F-4D97-AF65-F5344CB8AC3E}">
+        <p14:creationId xmlns:p14="http://schemas.microsoft.com/office/powerpoint/2010/main" val="3963424599"/>
+      </p:ext>
+    </p:extLst>
+  </p:cSld>
+  <p:clrMapOvr>
+    <a:masterClrMapping/>
+  </p:clrMapOvr>
+</p:sld>
+</file>
+
+<file path=ppt/slides/slide13.xml><?xml version="1.0" encoding="utf-8"?>
+<p:sld xmlns:a="http://schemas.openxmlformats.org/drawingml/2006/main" xmlns:r="http://schemas.openxmlformats.org/officeDocument/2006/relationships" xmlns:p="http://schemas.openxmlformats.org/presentationml/2006/main">
+  <p:cSld>
+    <p:spTree>
+      <p:nvGrpSpPr>
+        <p:cNvPr id="1" name=""/>
+        <p:cNvGrpSpPr/>
+        <p:nvPr/>
+      </p:nvGrpSpPr>
+      <p:grpSpPr>
+        <a:xfrm>
+          <a:off x="0" y="0"/>
+          <a:ext cx="0" cy="0"/>
+          <a:chOff x="0" y="0"/>
+          <a:chExt cx="0" cy="0"/>
+        </a:xfrm>
+      </p:grpSpPr>
+      <p:sp>
+        <p:nvSpPr>
+          <p:cNvPr id="2" name="Heading">
+            <a:extLst>
+              <a:ext uri="{FF2B5EF4-FFF2-40B4-BE49-F238E27FC236}">
+                <a16:creationId xmlns:a16="http://schemas.microsoft.com/office/drawing/2014/main" id="{BBBA7EFF-B211-2A26-F6BF-ED5256B3DD0B}"/>
+              </a:ext>
+            </a:extLst>
+          </p:cNvPr>
+          <p:cNvSpPr txBox="1"/>
+          <p:nvPr/>
+        </p:nvSpPr>
+        <p:spPr>
+          <a:xfrm>
+            <a:off x="508000" y="304800"/>
+            <a:ext cx="11176000" cy="461665"/>
+          </a:xfrm>
+          <a:prstGeom prst="rect">
+            <a:avLst/>
+          </a:prstGeom>
+          <a:noFill/>
+        </p:spPr>
+        <p:txBody>
+          <a:bodyPr vert="horz" rtlCol="0">
+            <a:spAutoFit/>
+          </a:bodyPr>
+          <a:lstStyle/>
+          <a:p>
+            <a:r>
+              <a:rPr lang="en-AU" sz="2400" b="1">
+                <a:solidFill>
+                  <a:srgbClr val="282828"/>
+                </a:solidFill>
+              </a:rPr>
+              <a:t>Align to the slide, or to its margins</a:t>
+            </a:r>
+          </a:p>
+        </p:txBody>
+      </p:sp>
+      <p:sp>
+        <p:nvSpPr>
+          <p:cNvPr id="3" name="Instructions">
+            <a:extLst>
+              <a:ext uri="{FF2B5EF4-FFF2-40B4-BE49-F238E27FC236}">
+                <a16:creationId xmlns:a16="http://schemas.microsoft.com/office/drawing/2014/main" id="{703D8E30-8FEA-39CE-9822-BFBFD5485F7F}"/>
+              </a:ext>
+            </a:extLst>
+          </p:cNvPr>
+          <p:cNvSpPr txBox="1"/>
+          <p:nvPr/>
+        </p:nvSpPr>
+        <p:spPr>
+          <a:xfrm>
+            <a:off x="508000" y="762000"/>
+            <a:ext cx="11176000" cy="292388"/>
+          </a:xfrm>
+          <a:prstGeom prst="rect">
+            <a:avLst/>
+          </a:prstGeom>
+          <a:noFill/>
+        </p:spPr>
+        <p:txBody>
+          <a:bodyPr vert="horz" rtlCol="0">
+            <a:spAutoFit/>
+          </a:bodyPr>
+          <a:lstStyle/>
+          <a:p>
+            <a:r>
+              <a:rPr lang="en-AU" sz="1300">
+                <a:solidFill>
+                  <a:srgbClr val="7F7F7F"/>
+                </a:solidFill>
+              </a:rPr>
+              <a:t>Select one shape. Reference = Slide then Align &gt; Centre. Then Reference = Slide margins with Margin = 36.</a:t>
+            </a:r>
+          </a:p>
+        </p:txBody>
+      </p:sp>
+      <p:sp>
+        <p:nvSpPr>
+          <p:cNvPr id="4" name="Wanderer">
+            <a:extLst>
+              <a:ext uri="{FF2B5EF4-FFF2-40B4-BE49-F238E27FC236}">
+                <a16:creationId xmlns:a16="http://schemas.microsoft.com/office/drawing/2014/main" id="{84E59930-CE30-B3A4-A6D6-ABFE12E96674}"/>
+              </a:ext>
+            </a:extLst>
+          </p:cNvPr>
+          <p:cNvSpPr/>
+          <p:nvPr/>
+        </p:nvSpPr>
+        <p:spPr>
+          <a:xfrm>
+            <a:off x="1905000" y="2540000"/>
+            <a:ext cx="2794000" cy="1524000"/>
+          </a:xfrm>
+          <a:prstGeom prst="rect">
+            <a:avLst/>
+          </a:prstGeom>
+          <a:solidFill>
+            <a:srgbClr val="FF7F0E"/>
+          </a:solidFill>
+          <a:ln w="19050" cap="flat" cmpd="sng" algn="ctr">
+            <a:noFill/>
+            <a:prstDash val="solid"/>
+            <a:miter lim="800000"/>
+          </a:ln>
+          <a:effectLst/>
+          <a:extLst>
+            <a:ext uri="{91240B29-F687-4F45-9708-019B960494DF}">
+              <a14:hiddenLine xmlns:a14="http://schemas.microsoft.com/office/drawing/2010/main" w="19050" cap="flat" cmpd="sng" algn="ctr">
+                <a:solidFill>
+                  <a:schemeClr val="accent1">
+                    <a:shade val="15000"/>
+                  </a:schemeClr>
+                </a:solidFill>
+                <a:prstDash val="solid"/>
+                <a:miter lim="800000"/>
+              </a14:hiddenLine>
+            </a:ext>
+          </a:extLst>
+        </p:spPr>
+        <p:style>
+          <a:lnRef idx="2">
+            <a:schemeClr val="accent1">
+              <a:shade val="15000"/>
+            </a:schemeClr>
+          </a:lnRef>
+          <a:fillRef idx="1">
+            <a:schemeClr val="accent1"/>
+          </a:fillRef>
+          <a:effectRef idx="0">
+            <a:schemeClr val="accent1"/>
+          </a:effectRef>
+          <a:fontRef idx="minor">
+            <a:schemeClr val="lt1"/>
+          </a:fontRef>
+        </p:style>
+        <p:txBody>
+          <a:bodyPr rtlCol="0" anchor="ctr"/>
+          <a:lstStyle/>
+          <a:p>
+            <a:pPr algn="ctr"/>
+            <a:r>
+              <a:rPr lang="en-AU" sz="1400" b="1">
+                <a:solidFill>
+                  <a:srgbClr val="FFFFFF"/>
+                </a:solidFill>
+              </a:rPr>
+              <a:t>Move me</a:t>
+            </a:r>
+          </a:p>
+        </p:txBody>
+      </p:sp>
+      <p:sp>
+        <p:nvSpPr>
+          <p:cNvPr id="5" name="Friend">
+            <a:extLst>
+              <a:ext uri="{FF2B5EF4-FFF2-40B4-BE49-F238E27FC236}">
+                <a16:creationId xmlns:a16="http://schemas.microsoft.com/office/drawing/2014/main" id="{86240B2C-4773-9E59-41CD-F8F03C0F9B1C}"/>
+              </a:ext>
+            </a:extLst>
+          </p:cNvPr>
+          <p:cNvSpPr/>
+          <p:nvPr/>
+        </p:nvSpPr>
+        <p:spPr>
+          <a:xfrm>
+            <a:off x="7874000" y="4318000"/>
+            <a:ext cx="2032000" cy="1143000"/>
+          </a:xfrm>
+          <a:prstGeom prst="rect">
+            <a:avLst/>
+          </a:prstGeom>
+          <a:solidFill>
+            <a:srgbClr val="2CA02C"/>
+          </a:solidFill>
+          <a:ln w="19050" cap="flat" cmpd="sng" algn="ctr">
+            <a:noFill/>
+            <a:prstDash val="solid"/>
+            <a:miter lim="800000"/>
+          </a:ln>
+          <a:effectLst/>
+          <a:extLst>
+            <a:ext uri="{91240B29-F687-4F45-9708-019B960494DF}">
+              <a14:hiddenLine xmlns:a14="http://schemas.microsoft.com/office/drawing/2010/main" w="19050" cap="flat" cmpd="sng" algn="ctr">
+                <a:solidFill>
+                  <a:schemeClr val="accent1">
+                    <a:shade val="15000"/>
+                  </a:schemeClr>
+                </a:solidFill>
+                <a:prstDash val="solid"/>
+                <a:miter lim="800000"/>
+              </a14:hiddenLine>
+            </a:ext>
+          </a:extLst>
+        </p:spPr>
+        <p:style>
+          <a:lnRef idx="2">
+            <a:schemeClr val="accent1">
+              <a:shade val="15000"/>
+            </a:schemeClr>
+          </a:lnRef>
+          <a:fillRef idx="1">
+            <a:schemeClr val="accent1"/>
+          </a:fillRef>
+          <a:effectRef idx="0">
+            <a:schemeClr val="accent1"/>
+          </a:effectRef>
+          <a:fontRef idx="minor">
+            <a:schemeClr val="lt1"/>
+          </a:fontRef>
+        </p:style>
+        <p:txBody>
+          <a:bodyPr rtlCol="0" anchor="ctr"/>
+          <a:lstStyle/>
+          <a:p>
+            <a:pPr algn="ctr"/>
+            <a:r>
+              <a:rPr lang="en-AU" sz="1400" b="1">
+                <a:solidFill>
+                  <a:srgbClr val="FFFFFF"/>
+                </a:solidFill>
+              </a:rPr>
+              <a:t>Friend</a:t>
+            </a:r>
+          </a:p>
+        </p:txBody>
+      </p:sp>
+      <p:sp>
+        <p:nvSpPr>
+          <p:cNvPr id="6" name="TextBox 5">
+            <a:extLst>
+              <a:ext uri="{FF2B5EF4-FFF2-40B4-BE49-F238E27FC236}">
+                <a16:creationId xmlns:a16="http://schemas.microsoft.com/office/drawing/2014/main" id="{8C8118B5-704A-89E0-8193-BB7DCFC18EEC}"/>
+              </a:ext>
+            </a:extLst>
+          </p:cNvPr>
+          <p:cNvSpPr txBox="1"/>
+          <p:nvPr/>
+        </p:nvSpPr>
+        <p:spPr>
+          <a:xfrm>
+            <a:off x="508000" y="5969000"/>
+            <a:ext cx="11176000" cy="276999"/>
+          </a:xfrm>
+          <a:prstGeom prst="rect">
+            <a:avLst/>
+          </a:prstGeom>
+          <a:noFill/>
+        </p:spPr>
+        <p:txBody>
+          <a:bodyPr vert="horz" rtlCol="0">
+            <a:spAutoFit/>
+          </a:bodyPr>
+          <a:lstStyle/>
+          <a:p>
+            <a:r>
+              <a:rPr lang="en-AU" sz="1200">
+                <a:solidFill>
+                  <a:srgbClr val="7F7F7F"/>
+                </a:solidFill>
+              </a:rPr>
+              <a:t>Aligning a single shape to the selection is meaningless, so AlignPro refuses it and says why. Against the slide it is perfectly meaningful, so it works.</a:t>
+            </a:r>
+          </a:p>
+        </p:txBody>
+      </p:sp>
+    </p:spTree>
+    <p:extLst>
+      <p:ext uri="{BB962C8B-B14F-4D97-AF65-F5344CB8AC3E}">
+        <p14:creationId xmlns:p14="http://schemas.microsoft.com/office/powerpoint/2010/main" val="1041924860"/>
+      </p:ext>
+    </p:extLst>
+  </p:cSld>
+  <p:clrMapOvr>
+    <a:masterClrMapping/>
+  </p:clrMapOvr>
+</p:sld>
+</file>
+
+<file path=ppt/slides/slide2.xml><?xml version="1.0" encoding="utf-8"?>
+<p:sld xmlns:a="http://schemas.openxmlformats.org/drawingml/2006/main" xmlns:r="http://schemas.openxmlformats.org/officeDocument/2006/relationships" xmlns:p="http://schemas.openxmlformats.org/presentationml/2006/main">
+  <p:cSld>
+    <p:spTree>
+      <p:nvGrpSpPr>
+        <p:cNvPr id="1" name=""/>
+        <p:cNvGrpSpPr/>
+        <p:nvPr/>
+      </p:nvGrpSpPr>
+      <p:grpSpPr>
+        <a:xfrm>
+          <a:off x="0" y="0"/>
+          <a:ext cx="0" cy="0"/>
+          <a:chOff x="0" y="0"/>
+          <a:chExt cx="0" cy="0"/>
+        </a:xfrm>
+      </p:grpSpPr>
+      <p:sp>
+        <p:nvSpPr>
+          <p:cNvPr id="2" name="Heading">
+            <a:extLst>
+              <a:ext uri="{FF2B5EF4-FFF2-40B4-BE49-F238E27FC236}">
+                <a16:creationId xmlns:a16="http://schemas.microsoft.com/office/drawing/2014/main" id="{6348EAE4-B3A0-B055-4890-2C2F40D64218}"/>
+              </a:ext>
+            </a:extLst>
+          </p:cNvPr>
+          <p:cNvSpPr txBox="1"/>
+          <p:nvPr/>
+        </p:nvSpPr>
+        <p:spPr>
+          <a:xfrm>
+            <a:off x="508000" y="304800"/>
+            <a:ext cx="11176000" cy="461665"/>
+          </a:xfrm>
+          <a:prstGeom prst="rect">
+            <a:avLst/>
+          </a:prstGeom>
+          <a:noFill/>
+        </p:spPr>
+        <p:txBody>
+          <a:bodyPr vert="horz" rtlCol="0">
+            <a:spAutoFit/>
+          </a:bodyPr>
+          <a:lstStyle/>
+          <a:p>
+            <a:r>
+              <a:rPr lang="en-AU" sz="2400" b="1">
+                <a:solidFill>
+                  <a:srgbClr val="282828"/>
+                </a:solidFill>
+              </a:rPr>
+              <a:t>Rotation: the case PowerPoint gets wrong</a:t>
+            </a:r>
+          </a:p>
+        </p:txBody>
+      </p:sp>
+      <p:sp>
+        <p:nvSpPr>
+          <p:cNvPr id="3" name="Instructions">
+            <a:extLst>
+              <a:ext uri="{FF2B5EF4-FFF2-40B4-BE49-F238E27FC236}">
+                <a16:creationId xmlns:a16="http://schemas.microsoft.com/office/drawing/2014/main" id="{0CDC5FC8-92DF-50A6-FF62-F7FA5E7C0970}"/>
+              </a:ext>
+            </a:extLst>
+          </p:cNvPr>
+          <p:cNvSpPr txBox="1"/>
+          <p:nvPr/>
+        </p:nvSpPr>
+        <p:spPr>
+          <a:xfrm>
+            <a:off x="508000" y="762000"/>
+            <a:ext cx="11176000" cy="292388"/>
+          </a:xfrm>
+          <a:prstGeom prst="rect">
+            <a:avLst/>
+          </a:prstGeom>
+          <a:noFill/>
+        </p:spPr>
+        <p:txBody>
+          <a:bodyPr vert="horz" rtlCol="0">
+            <a:spAutoFit/>
+          </a:bodyPr>
+          <a:lstStyle/>
+          <a:p>
+            <a:r>
+              <a:rPr lang="en-AU" sz="1300">
+                <a:solidFill>
+                  <a:srgbClr val="7F7F7F"/>
+                </a:solidFill>
+              </a:rPr>
+              <a:t>Select all four. Align &gt; Left with Measure = Shape frame, undo, then again with Measure = Visual bounds.</a:t>
+            </a:r>
+          </a:p>
+        </p:txBody>
+      </p:sp>
+      <p:sp>
+        <p:nvSpPr>
+          <p:cNvPr id="4" name="Plain1">
+            <a:extLst>
+              <a:ext uri="{FF2B5EF4-FFF2-40B4-BE49-F238E27FC236}">
+                <a16:creationId xmlns:a16="http://schemas.microsoft.com/office/drawing/2014/main" id="{4C726824-6EBB-3919-5B8D-2D2641EFE7A8}"/>
+              </a:ext>
+            </a:extLst>
+          </p:cNvPr>
+          <p:cNvSpPr/>
+          <p:nvPr/>
+        </p:nvSpPr>
+        <p:spPr>
+          <a:xfrm>
+            <a:off x="1778000" y="1905000"/>
+            <a:ext cx="1905000" cy="1016000"/>
+          </a:xfrm>
+          <a:prstGeom prst="rect">
+            <a:avLst/>
+          </a:prstGeom>
+          <a:solidFill>
+            <a:srgbClr val="1F77B4"/>
+          </a:solidFill>
+          <a:ln w="19050" cap="flat" cmpd="sng" algn="ctr">
+            <a:noFill/>
+            <a:prstDash val="solid"/>
+            <a:miter lim="800000"/>
+          </a:ln>
+          <a:effectLst/>
+          <a:extLst>
+            <a:ext uri="{91240B29-F687-4F45-9708-019B960494DF}">
+              <a14:hiddenLine xmlns:a14="http://schemas.microsoft.com/office/drawing/2010/main" w="19050" cap="flat" cmpd="sng" algn="ctr">
+                <a:solidFill>
+                  <a:schemeClr val="accent1">
+                    <a:shade val="15000"/>
+                  </a:schemeClr>
+                </a:solidFill>
+                <a:prstDash val="solid"/>
+                <a:miter lim="800000"/>
+              </a14:hiddenLine>
+            </a:ext>
+          </a:extLst>
+        </p:spPr>
+        <p:style>
+          <a:lnRef idx="2">
+            <a:schemeClr val="accent1">
+              <a:shade val="15000"/>
+            </a:schemeClr>
+          </a:lnRef>
+          <a:fillRef idx="1">
+            <a:schemeClr val="accent1"/>
+          </a:fillRef>
+          <a:effectRef idx="0">
+            <a:schemeClr val="accent1"/>
+          </a:effectRef>
+          <a:fontRef idx="minor">
+            <a:schemeClr val="lt1"/>
+          </a:fontRef>
+        </p:style>
+        <p:txBody>
+          <a:bodyPr rtlCol="0" anchor="ctr"/>
+          <a:lstStyle/>
+          <a:p>
+            <a:pPr algn="ctr"/>
+            <a:r>
+              <a:rPr lang="en-AU" sz="1400" b="1">
+                <a:solidFill>
+                  <a:srgbClr val="FFFFFF"/>
+                </a:solidFill>
+              </a:rPr>
+              <a:t>Plain1</a:t>
+            </a:r>
+          </a:p>
+        </p:txBody>
+      </p:sp>
+      <p:sp>
+        <p:nvSpPr>
+          <p:cNvPr id="5" name="Tall">
+            <a:extLst>
+              <a:ext uri="{FF2B5EF4-FFF2-40B4-BE49-F238E27FC236}">
+                <a16:creationId xmlns:a16="http://schemas.microsoft.com/office/drawing/2014/main" id="{9D255819-F2BB-40C7-12C9-7B221C2B2DA8}"/>
+              </a:ext>
+            </a:extLst>
+          </p:cNvPr>
+          <p:cNvSpPr/>
+          <p:nvPr/>
+        </p:nvSpPr>
+        <p:spPr>
+          <a:xfrm>
+            <a:off x="4191000" y="3302000"/>
+            <a:ext cx="1143000" cy="1905000"/>
+          </a:xfrm>
+          <a:prstGeom prst="rect">
+            <a:avLst/>
+          </a:prstGeom>
+          <a:solidFill>
+            <a:srgbClr val="2CA02C"/>
+          </a:solidFill>
+          <a:ln w="19050" cap="flat" cmpd="sng" algn="ctr">
+            <a:noFill/>
+            <a:prstDash val="solid"/>
+            <a:miter lim="800000"/>
+          </a:ln>
+          <a:effectLst/>
+          <a:extLst>
+            <a:ext uri="{91240B29-F687-4F45-9708-019B960494DF}">
+              <a14:hiddenLine xmlns:a14="http://schemas.microsoft.com/office/drawing/2010/main" w="19050" cap="flat" cmpd="sng" algn="ctr">
+                <a:solidFill>
+                  <a:schemeClr val="accent1">
+                    <a:shade val="15000"/>
+                  </a:schemeClr>
+                </a:solidFill>
+                <a:prstDash val="solid"/>
+                <a:miter lim="800000"/>
+              </a14:hiddenLine>
+            </a:ext>
+          </a:extLst>
+        </p:spPr>
+        <p:style>
+          <a:lnRef idx="2">
+            <a:schemeClr val="accent1">
+              <a:shade val="15000"/>
+            </a:schemeClr>
+          </a:lnRef>
+          <a:fillRef idx="1">
+            <a:schemeClr val="accent1"/>
+          </a:fillRef>
+          <a:effectRef idx="0">
+            <a:schemeClr val="accent1"/>
+          </a:effectRef>
+          <a:fontRef idx="minor">
+            <a:schemeClr val="lt1"/>
+          </a:fontRef>
+        </p:style>
+        <p:txBody>
+          <a:bodyPr rtlCol="0" anchor="ctr"/>
+          <a:lstStyle/>
+          <a:p>
+            <a:pPr algn="ctr"/>
+            <a:r>
+              <a:rPr lang="en-AU" sz="1400" b="1">
+                <a:solidFill>
+                  <a:srgbClr val="FFFFFF"/>
+                </a:solidFill>
+              </a:rPr>
+              <a:t>Tall</a:t>
+            </a:r>
+          </a:p>
+        </p:txBody>
+      </p:sp>
+      <p:sp>
+        <p:nvSpPr>
+          <p:cNvPr id="6" name="Rotated">
+            <a:extLst>
+              <a:ext uri="{FF2B5EF4-FFF2-40B4-BE49-F238E27FC236}">
+                <a16:creationId xmlns:a16="http://schemas.microsoft.com/office/drawing/2014/main" id="{645BA143-95DB-F180-0E78-EFC6DEAAF798}"/>
+              </a:ext>
+            </a:extLst>
+          </p:cNvPr>
+          <p:cNvSpPr/>
+          <p:nvPr/>
+        </p:nvSpPr>
+        <p:spPr>
+          <a:xfrm rot="1800000">
+            <a:off x="6604000" y="2032000"/>
+            <a:ext cx="2286000" cy="1143000"/>
+          </a:xfrm>
+          <a:prstGeom prst="rect">
+            <a:avLst/>
+          </a:prstGeom>
+          <a:solidFill>
+            <a:srgbClr val="FF7F0E"/>
+          </a:solidFill>
+          <a:ln w="19050" cap="flat" cmpd="sng" algn="ctr">
+            <a:noFill/>
+            <a:prstDash val="solid"/>
+            <a:miter lim="800000"/>
+          </a:ln>
+          <a:effectLst/>
+          <a:extLst>
+            <a:ext uri="{91240B29-F687-4F45-9708-019B960494DF}">
+              <a14:hiddenLine xmlns:a14="http://schemas.microsoft.com/office/drawing/2010/main" w="19050" cap="flat" cmpd="sng" algn="ctr">
+                <a:solidFill>
+                  <a:schemeClr val="accent1">
+                    <a:shade val="15000"/>
+                  </a:schemeClr>
+                </a:solidFill>
+                <a:prstDash val="solid"/>
+                <a:miter lim="800000"/>
+              </a14:hiddenLine>
+            </a:ext>
+          </a:extLst>
+        </p:spPr>
+        <p:style>
+          <a:lnRef idx="2">
+            <a:schemeClr val="accent1">
+              <a:shade val="15000"/>
+            </a:schemeClr>
+          </a:lnRef>
+          <a:fillRef idx="1">
+            <a:schemeClr val="accent1"/>
+          </a:fillRef>
+          <a:effectRef idx="0">
+            <a:schemeClr val="accent1"/>
+          </a:effectRef>
+          <a:fontRef idx="minor">
+            <a:schemeClr val="lt1"/>
+          </a:fontRef>
+        </p:style>
+        <p:txBody>
+          <a:bodyPr rtlCol="0" anchor="ctr"/>
+          <a:lstStyle/>
+          <a:p>
+            <a:pPr algn="ctr"/>
+            <a:r>
+              <a:rPr lang="en-AU" sz="1400" b="1">
+                <a:solidFill>
+                  <a:srgbClr val="FFFFFF"/>
+                </a:solidFill>
+              </a:rPr>
+              <a:t>Rotated 30</a:t>
+            </a:r>
+          </a:p>
+        </p:txBody>
+      </p:sp>
+      <p:sp>
+        <p:nvSpPr>
+          <p:cNvPr id="7" name="Plain2">
+            <a:extLst>
+              <a:ext uri="{FF2B5EF4-FFF2-40B4-BE49-F238E27FC236}">
+                <a16:creationId xmlns:a16="http://schemas.microsoft.com/office/drawing/2014/main" id="{566857FB-B75A-BE4B-E3C3-9BCEDBF9980E}"/>
+              </a:ext>
+            </a:extLst>
+          </p:cNvPr>
+          <p:cNvSpPr/>
+          <p:nvPr/>
+        </p:nvSpPr>
+        <p:spPr>
+          <a:xfrm>
+            <a:off x="9398000" y="4191000"/>
+            <a:ext cx="1651000" cy="889000"/>
+          </a:xfrm>
+          <a:prstGeom prst="rect">
+            <a:avLst/>
+          </a:prstGeom>
+          <a:solidFill>
+            <a:srgbClr val="9467BD"/>
+          </a:solidFill>
+          <a:ln w="19050" cap="flat" cmpd="sng" algn="ctr">
+            <a:noFill/>
+            <a:prstDash val="solid"/>
+            <a:miter lim="800000"/>
+          </a:ln>
+          <a:effectLst/>
+          <a:extLst>
+            <a:ext uri="{91240B29-F687-4F45-9708-019B960494DF}">
+              <a14:hiddenLine xmlns:a14="http://schemas.microsoft.com/office/drawing/2010/main" w="19050" cap="flat" cmpd="sng" algn="ctr">
+                <a:solidFill>
+                  <a:schemeClr val="accent1">
+                    <a:shade val="15000"/>
+                  </a:schemeClr>
+                </a:solidFill>
+                <a:prstDash val="solid"/>
+                <a:miter lim="800000"/>
+              </a14:hiddenLine>
+            </a:ext>
+          </a:extLst>
+        </p:spPr>
+        <p:style>
+          <a:lnRef idx="2">
+            <a:schemeClr val="accent1">
+              <a:shade val="15000"/>
+            </a:schemeClr>
+          </a:lnRef>
+          <a:fillRef idx="1">
+            <a:schemeClr val="accent1"/>
+          </a:fillRef>
+          <a:effectRef idx="0">
+            <a:schemeClr val="accent1"/>
+          </a:effectRef>
+          <a:fontRef idx="minor">
+            <a:schemeClr val="lt1"/>
+          </a:fontRef>
+        </p:style>
+        <p:txBody>
+          <a:bodyPr rtlCol="0" anchor="ctr"/>
+          <a:lstStyle/>
+          <a:p>
+            <a:pPr algn="ctr"/>
+            <a:r>
+              <a:rPr lang="en-AU" sz="1400" b="1">
+                <a:solidFill>
+                  <a:srgbClr val="FFFFFF"/>
+                </a:solidFill>
+              </a:rPr>
+              <a:t>Plain2</a:t>
+            </a:r>
+          </a:p>
+        </p:txBody>
+      </p:sp>
+      <p:sp>
+        <p:nvSpPr>
+          <p:cNvPr id="8" name="TextBox 7">
+            <a:extLst>
+              <a:ext uri="{FF2B5EF4-FFF2-40B4-BE49-F238E27FC236}">
+                <a16:creationId xmlns:a16="http://schemas.microsoft.com/office/drawing/2014/main" id="{EE94965C-D977-8D10-40BC-C49D95B550BD}"/>
+              </a:ext>
+            </a:extLst>
+          </p:cNvPr>
+          <p:cNvSpPr txBox="1"/>
+          <p:nvPr/>
+        </p:nvSpPr>
+        <p:spPr>
+          <a:xfrm>
+            <a:off x="508000" y="5969000"/>
+            <a:ext cx="11176000" cy="276999"/>
+          </a:xfrm>
+          <a:prstGeom prst="rect">
+            <a:avLst/>
+          </a:prstGeom>
+          <a:noFill/>
+        </p:spPr>
+        <p:txBody>
+          <a:bodyPr vert="horz" rtlCol="0">
+            <a:spAutoFit/>
+          </a:bodyPr>
+          <a:lstStyle/>
+          <a:p>
+            <a:r>
+              <a:rPr lang="en-AU" sz="1200">
+                <a:solidFill>
+                  <a:srgbClr val="7F7F7F"/>
+                </a:solidFill>
+              </a:rPr>
+              <a:t>In frame mode the rotated shape looks wrong, because PowerPoint aligns an unrotated rectangle it never draws. Visual bounds fixes it.</a:t>
+            </a:r>
+          </a:p>
+        </p:txBody>
+      </p:sp>
+    </p:spTree>
+    <p:extLst>
+      <p:ext uri="{BB962C8B-B14F-4D97-AF65-F5344CB8AC3E}">
+        <p14:creationId xmlns:p14="http://schemas.microsoft.com/office/powerpoint/2010/main" val="3318359694"/>
+      </p:ext>
+    </p:extLst>
+  </p:cSld>
+  <p:clrMapOvr>
+    <a:masterClrMapping/>
+  </p:clrMapOvr>
+</p:sld>
+</file>
+
+<file path=ppt/slides/slide3.xml><?xml version="1.0" encoding="utf-8"?>
+<p:sld xmlns:a="http://schemas.openxmlformats.org/drawingml/2006/main" xmlns:r="http://schemas.openxmlformats.org/officeDocument/2006/relationships" xmlns:p="http://schemas.openxmlformats.org/presentationml/2006/main">
+  <p:cSld>
+    <p:spTree>
+      <p:nvGrpSpPr>
+        <p:cNvPr id="1" name=""/>
+        <p:cNvGrpSpPr/>
+        <p:nvPr/>
+      </p:nvGrpSpPr>
+      <p:grpSpPr>
+        <a:xfrm>
+          <a:off x="0" y="0"/>
+          <a:ext cx="0" cy="0"/>
+          <a:chOff x="0" y="0"/>
+          <a:chExt cx="0" cy="0"/>
+        </a:xfrm>
+      </p:grpSpPr>
+      <p:sp>
+        <p:nvSpPr>
+          <p:cNvPr id="2" name="Heading">
+            <a:extLst>
+              <a:ext uri="{FF2B5EF4-FFF2-40B4-BE49-F238E27FC236}">
+                <a16:creationId xmlns:a16="http://schemas.microsoft.com/office/drawing/2014/main" id="{54524FCF-DD5F-366A-CBBF-EFF40785A79B}"/>
+              </a:ext>
+            </a:extLst>
+          </p:cNvPr>
+          <p:cNvSpPr txBox="1"/>
+          <p:nvPr/>
+        </p:nvSpPr>
+        <p:spPr>
+          <a:xfrm>
+            <a:off x="508000" y="304800"/>
+            <a:ext cx="11176000" cy="461665"/>
+          </a:xfrm>
+          <a:prstGeom prst="rect">
+            <a:avLst/>
+          </a:prstGeom>
+          <a:noFill/>
+        </p:spPr>
+        <p:txBody>
+          <a:bodyPr vert="horz" rtlCol="0">
+            <a:spAutoFit/>
+          </a:bodyPr>
+          <a:lstStyle/>
+          <a:p>
+            <a:r>
+              <a:rPr lang="en-AU" sz="2400" b="1">
+                <a:solidFill>
+                  <a:srgbClr val="282828"/>
+                </a:solidFill>
+              </a:rPr>
+              <a:t>Align to an anchor</a:t>
+            </a:r>
+          </a:p>
+        </p:txBody>
+      </p:sp>
+      <p:sp>
+        <p:nvSpPr>
+          <p:cNvPr id="3" name="Instructions">
+            <a:extLst>
+              <a:ext uri="{FF2B5EF4-FFF2-40B4-BE49-F238E27FC236}">
+                <a16:creationId xmlns:a16="http://schemas.microsoft.com/office/drawing/2014/main" id="{756C6ED0-C99E-E867-0F5F-DCF18883DF73}"/>
+              </a:ext>
+            </a:extLst>
+          </p:cNvPr>
+          <p:cNvSpPr txBox="1"/>
+          <p:nvPr/>
+        </p:nvSpPr>
+        <p:spPr>
+          <a:xfrm>
+            <a:off x="508000" y="762000"/>
+            <a:ext cx="11176000" cy="292388"/>
+          </a:xfrm>
+          <a:prstGeom prst="rect">
+            <a:avLst/>
+          </a:prstGeom>
+          <a:noFill/>
+        </p:spPr>
+        <p:txBody>
+          <a:bodyPr vert="horz" rtlCol="0">
+            <a:spAutoFit/>
+          </a:bodyPr>
+          <a:lstStyle/>
+          <a:p>
+            <a:r>
+              <a:rPr lang="en-AU" sz="1300">
+                <a:solidFill>
+                  <a:srgbClr val="7F7F7F"/>
+                </a:solidFill>
+              </a:rPr>
+              <a:t>Set Reference = Anchor. Select the three small shapes, then Ctrl+click BIG ANCHOR last, and Align &gt; Left.</a:t>
+            </a:r>
+          </a:p>
+        </p:txBody>
+      </p:sp>
+      <p:sp>
+        <p:nvSpPr>
+          <p:cNvPr id="4" name="Small1">
+            <a:extLst>
+              <a:ext uri="{FF2B5EF4-FFF2-40B4-BE49-F238E27FC236}">
+                <a16:creationId xmlns:a16="http://schemas.microsoft.com/office/drawing/2014/main" id="{4CE54208-2F43-1C65-AAA6-514D80550F96}"/>
+              </a:ext>
+            </a:extLst>
+          </p:cNvPr>
+          <p:cNvSpPr/>
+          <p:nvPr/>
+        </p:nvSpPr>
+        <p:spPr>
+          <a:xfrm>
+            <a:off x="1524000" y="2159000"/>
+            <a:ext cx="1397000" cy="762000"/>
+          </a:xfrm>
+          <a:prstGeom prst="rect">
+            <a:avLst/>
+          </a:prstGeom>
+          <a:solidFill>
+            <a:srgbClr val="1F77B4"/>
+          </a:solidFill>
+          <a:ln w="19050" cap="flat" cmpd="sng" algn="ctr">
+            <a:noFill/>
+            <a:prstDash val="solid"/>
+            <a:miter lim="800000"/>
+          </a:ln>
+          <a:effectLst/>
+          <a:extLst>
+            <a:ext uri="{91240B29-F687-4F45-9708-019B960494DF}">
+              <a14:hiddenLine xmlns:a14="http://schemas.microsoft.com/office/drawing/2010/main" w="19050" cap="flat" cmpd="sng" algn="ctr">
+                <a:solidFill>
+                  <a:schemeClr val="accent1">
+                    <a:shade val="15000"/>
+                  </a:schemeClr>
+                </a:solidFill>
+                <a:prstDash val="solid"/>
+                <a:miter lim="800000"/>
+              </a14:hiddenLine>
+            </a:ext>
+          </a:extLst>
+        </p:spPr>
+        <p:style>
+          <a:lnRef idx="2">
+            <a:schemeClr val="accent1">
+              <a:shade val="15000"/>
+            </a:schemeClr>
+          </a:lnRef>
+          <a:fillRef idx="1">
+            <a:schemeClr val="accent1"/>
+          </a:fillRef>
+          <a:effectRef idx="0">
+            <a:schemeClr val="accent1"/>
+          </a:effectRef>
+          <a:fontRef idx="minor">
+            <a:schemeClr val="lt1"/>
+          </a:fontRef>
+        </p:style>
+        <p:txBody>
+          <a:bodyPr rtlCol="0" anchor="ctr"/>
+          <a:lstStyle/>
+          <a:p>
+            <a:pPr algn="ctr"/>
+            <a:r>
+              <a:rPr lang="en-AU" sz="1400" b="1">
+                <a:solidFill>
+                  <a:srgbClr val="FFFFFF"/>
+                </a:solidFill>
+              </a:rPr>
+              <a:t>Small1</a:t>
+            </a:r>
+          </a:p>
+        </p:txBody>
+      </p:sp>
+      <p:sp>
+        <p:nvSpPr>
+          <p:cNvPr id="5" name="Small2">
+            <a:extLst>
+              <a:ext uri="{FF2B5EF4-FFF2-40B4-BE49-F238E27FC236}">
+                <a16:creationId xmlns:a16="http://schemas.microsoft.com/office/drawing/2014/main" id="{269F6027-5B03-928C-7806-CB7E5D0C7AC8}"/>
+              </a:ext>
+            </a:extLst>
+          </p:cNvPr>
+          <p:cNvSpPr/>
+          <p:nvPr/>
+        </p:nvSpPr>
+        <p:spPr>
+          <a:xfrm>
+            <a:off x="3175000" y="3302000"/>
+            <a:ext cx="1397000" cy="762000"/>
+          </a:xfrm>
+          <a:prstGeom prst="rect">
+            <a:avLst/>
+          </a:prstGeom>
+          <a:solidFill>
+            <a:srgbClr val="2CA02C"/>
+          </a:solidFill>
+          <a:ln w="19050" cap="flat" cmpd="sng" algn="ctr">
+            <a:noFill/>
+            <a:prstDash val="solid"/>
+            <a:miter lim="800000"/>
+          </a:ln>
+          <a:effectLst/>
+          <a:extLst>
+            <a:ext uri="{91240B29-F687-4F45-9708-019B960494DF}">
+              <a14:hiddenLine xmlns:a14="http://schemas.microsoft.com/office/drawing/2010/main" w="19050" cap="flat" cmpd="sng" algn="ctr">
+                <a:solidFill>
+                  <a:schemeClr val="accent1">
+                    <a:shade val="15000"/>
+                  </a:schemeClr>
+                </a:solidFill>
+                <a:prstDash val="solid"/>
+                <a:miter lim="800000"/>
+              </a14:hiddenLine>
+            </a:ext>
+          </a:extLst>
+        </p:spPr>
+        <p:style>
+          <a:lnRef idx="2">
+            <a:schemeClr val="accent1">
+              <a:shade val="15000"/>
+            </a:schemeClr>
+          </a:lnRef>
+          <a:fillRef idx="1">
+            <a:schemeClr val="accent1"/>
+          </a:fillRef>
+          <a:effectRef idx="0">
+            <a:schemeClr val="accent1"/>
+          </a:effectRef>
+          <a:fontRef idx="minor">
+            <a:schemeClr val="lt1"/>
+          </a:fontRef>
+        </p:style>
+        <p:txBody>
+          <a:bodyPr rtlCol="0" anchor="ctr"/>
+          <a:lstStyle/>
+          <a:p>
+            <a:pPr algn="ctr"/>
+            <a:r>
+              <a:rPr lang="en-AU" sz="1400" b="1">
+                <a:solidFill>
+                  <a:srgbClr val="FFFFFF"/>
+                </a:solidFill>
+              </a:rPr>
+              <a:t>Small2</a:t>
+            </a:r>
+          </a:p>
+        </p:txBody>
+      </p:sp>
+      <p:sp>
+        <p:nvSpPr>
+          <p:cNvPr id="6" name="Small3">
+            <a:extLst>
+              <a:ext uri="{FF2B5EF4-FFF2-40B4-BE49-F238E27FC236}">
+                <a16:creationId xmlns:a16="http://schemas.microsoft.com/office/drawing/2014/main" id="{41917ECA-4EC0-8ECC-E0FE-89D839F84E9A}"/>
+              </a:ext>
+            </a:extLst>
+          </p:cNvPr>
+          <p:cNvSpPr/>
+          <p:nvPr/>
+        </p:nvSpPr>
+        <p:spPr>
+          <a:xfrm>
+            <a:off x="2286000" y="4445000"/>
+            <a:ext cx="1397000" cy="762000"/>
+          </a:xfrm>
+          <a:prstGeom prst="rect">
+            <a:avLst/>
+          </a:prstGeom>
+          <a:solidFill>
+            <a:srgbClr val="9467BD"/>
+          </a:solidFill>
+          <a:ln w="19050" cap="flat" cmpd="sng" algn="ctr">
+            <a:noFill/>
+            <a:prstDash val="solid"/>
+            <a:miter lim="800000"/>
+          </a:ln>
+          <a:effectLst/>
+          <a:extLst>
+            <a:ext uri="{91240B29-F687-4F45-9708-019B960494DF}">
+              <a14:hiddenLine xmlns:a14="http://schemas.microsoft.com/office/drawing/2010/main" w="19050" cap="flat" cmpd="sng" algn="ctr">
+                <a:solidFill>
+                  <a:schemeClr val="accent1">
+                    <a:shade val="15000"/>
+                  </a:schemeClr>
+                </a:solidFill>
+                <a:prstDash val="solid"/>
+                <a:miter lim="800000"/>
+              </a14:hiddenLine>
+            </a:ext>
+          </a:extLst>
+        </p:spPr>
+        <p:style>
+          <a:lnRef idx="2">
+            <a:schemeClr val="accent1">
+              <a:shade val="15000"/>
+            </a:schemeClr>
+          </a:lnRef>
+          <a:fillRef idx="1">
+            <a:schemeClr val="accent1"/>
+          </a:fillRef>
+          <a:effectRef idx="0">
+            <a:schemeClr val="accent1"/>
+          </a:effectRef>
+          <a:fontRef idx="minor">
+            <a:schemeClr val="lt1"/>
+          </a:fontRef>
+        </p:style>
+        <p:txBody>
+          <a:bodyPr rtlCol="0" anchor="ctr"/>
+          <a:lstStyle/>
+          <a:p>
+            <a:pPr algn="ctr"/>
+            <a:r>
+              <a:rPr lang="en-AU" sz="1400" b="1">
+                <a:solidFill>
+                  <a:srgbClr val="FFFFFF"/>
+                </a:solidFill>
+              </a:rPr>
+              <a:t>Small3</a:t>
+            </a:r>
+          </a:p>
+        </p:txBody>
+      </p:sp>
+      <p:sp>
+        <p:nvSpPr>
+          <p:cNvPr id="7" name="Anchor">
+            <a:extLst>
+              <a:ext uri="{FF2B5EF4-FFF2-40B4-BE49-F238E27FC236}">
+                <a16:creationId xmlns:a16="http://schemas.microsoft.com/office/drawing/2014/main" id="{36165149-C334-C920-227E-5F6EBA3872A4}"/>
+              </a:ext>
+            </a:extLst>
+          </p:cNvPr>
+          <p:cNvSpPr/>
+          <p:nvPr/>
+        </p:nvSpPr>
+        <p:spPr>
+          <a:xfrm>
+            <a:off x="7112000" y="2540000"/>
+            <a:ext cx="3556000" cy="2540000"/>
+          </a:xfrm>
+          <a:prstGeom prst="rect">
+            <a:avLst/>
+          </a:prstGeom>
+          <a:solidFill>
+            <a:srgbClr val="D62728"/>
+          </a:solidFill>
+          <a:ln w="19050" cap="flat" cmpd="sng" algn="ctr">
+            <a:noFill/>
+            <a:prstDash val="solid"/>
+            <a:miter lim="800000"/>
+          </a:ln>
+          <a:effectLst/>
+          <a:extLst>
+            <a:ext uri="{91240B29-F687-4F45-9708-019B960494DF}">
+              <a14:hiddenLine xmlns:a14="http://schemas.microsoft.com/office/drawing/2010/main" w="19050" cap="flat" cmpd="sng" algn="ctr">
+                <a:solidFill>
+                  <a:schemeClr val="accent1">
+                    <a:shade val="15000"/>
+                  </a:schemeClr>
+                </a:solidFill>
+                <a:prstDash val="solid"/>
+                <a:miter lim="800000"/>
+              </a14:hiddenLine>
+            </a:ext>
+          </a:extLst>
+        </p:spPr>
+        <p:style>
+          <a:lnRef idx="2">
+            <a:schemeClr val="accent1">
+              <a:shade val="15000"/>
+            </a:schemeClr>
+          </a:lnRef>
+          <a:fillRef idx="1">
+            <a:schemeClr val="accent1"/>
+          </a:fillRef>
+          <a:effectRef idx="0">
+            <a:schemeClr val="accent1"/>
+          </a:effectRef>
+          <a:fontRef idx="minor">
+            <a:schemeClr val="lt1"/>
+          </a:fontRef>
+        </p:style>
+        <p:txBody>
+          <a:bodyPr rtlCol="0" anchor="ctr"/>
+          <a:lstStyle/>
+          <a:p>
+            <a:pPr algn="ctr"/>
+            <a:r>
+              <a:rPr lang="en-AU" sz="1400" b="1">
+                <a:solidFill>
+                  <a:srgbClr val="FFFFFF"/>
+                </a:solidFill>
+              </a:rPr>
+              <a:t>BIG ANCHOR</a:t>
+            </a:r>
+          </a:p>
+        </p:txBody>
+      </p:sp>
+    </p:spTree>
+    <p:extLst>
+      <p:ext uri="{BB962C8B-B14F-4D97-AF65-F5344CB8AC3E}">
+        <p14:creationId xmlns:p14="http://schemas.microsoft.com/office/powerpoint/2010/main" val="3039244009"/>
+      </p:ext>
+    </p:extLst>
+  </p:cSld>
+  <p:clrMapOvr>
+    <a:masterClrMapping/>
+  </p:clrMapOvr>
+</p:sld>
+</file>
+
+<file path=ppt/slides/slide4.xml><?xml version="1.0" encoding="utf-8"?>
+<p:sld xmlns:a="http://schemas.openxmlformats.org/drawingml/2006/main" xmlns:r="http://schemas.openxmlformats.org/officeDocument/2006/relationships" xmlns:p="http://schemas.openxmlformats.org/presentationml/2006/main">
+  <p:cSld>
+    <p:spTree>
+      <p:nvGrpSpPr>
+        <p:cNvPr id="1" name=""/>
+        <p:cNvGrpSpPr/>
+        <p:nvPr/>
+      </p:nvGrpSpPr>
+      <p:grpSpPr>
+        <a:xfrm>
+          <a:off x="0" y="0"/>
+          <a:ext cx="0" cy="0"/>
+          <a:chOff x="0" y="0"/>
+          <a:chExt cx="0" cy="0"/>
+        </a:xfrm>
+      </p:grpSpPr>
+      <p:sp>
+        <p:nvSpPr>
+          <p:cNvPr id="2" name="Heading">
+            <a:extLst>
+              <a:ext uri="{FF2B5EF4-FFF2-40B4-BE49-F238E27FC236}">
+                <a16:creationId xmlns:a16="http://schemas.microsoft.com/office/drawing/2014/main" id="{25DD4E5B-2E1A-8F2F-8696-3F7371C2F868}"/>
+              </a:ext>
+            </a:extLst>
+          </p:cNvPr>
+          <p:cNvSpPr txBox="1"/>
+          <p:nvPr/>
+        </p:nvSpPr>
+        <p:spPr>
+          <a:xfrm>
+            <a:off x="508000" y="304800"/>
+            <a:ext cx="11176000" cy="461665"/>
+          </a:xfrm>
+          <a:prstGeom prst="rect">
+            <a:avLst/>
+          </a:prstGeom>
+          <a:noFill/>
+        </p:spPr>
+        <p:txBody>
+          <a:bodyPr vert="horz" rtlCol="0">
+            <a:spAutoFit/>
+          </a:bodyPr>
+          <a:lstStyle/>
+          <a:p>
+            <a:r>
+              <a:rPr lang="en-AU" sz="2400" b="1">
+                <a:solidFill>
+                  <a:srgbClr val="282828"/>
+                </a:solidFill>
+              </a:rPr>
+              <a:t>Distribute: four modes, four answers</a:t>
+            </a:r>
+          </a:p>
+        </p:txBody>
+      </p:sp>
+      <p:sp>
+        <p:nvSpPr>
+          <p:cNvPr id="3" name="Instructions">
+            <a:extLst>
+              <a:ext uri="{FF2B5EF4-FFF2-40B4-BE49-F238E27FC236}">
+                <a16:creationId xmlns:a16="http://schemas.microsoft.com/office/drawing/2014/main" id="{C80A7FC2-8B7B-A4A6-099A-EBD97296CE4B}"/>
+              </a:ext>
+            </a:extLst>
+          </p:cNvPr>
+          <p:cNvSpPr txBox="1"/>
+          <p:nvPr/>
+        </p:nvSpPr>
+        <p:spPr>
+          <a:xfrm>
+            <a:off x="508000" y="762000"/>
+            <a:ext cx="11176000" cy="292388"/>
+          </a:xfrm>
+          <a:prstGeom prst="rect">
+            <a:avLst/>
+          </a:prstGeom>
+          <a:noFill/>
+        </p:spPr>
+        <p:txBody>
+          <a:bodyPr vert="horz" rtlCol="0">
+            <a:spAutoFit/>
+          </a:bodyPr>
+          <a:lstStyle/>
+          <a:p>
+            <a:r>
+              <a:rPr lang="en-AU" sz="1300">
+                <a:solidFill>
+                  <a:srgbClr val="7F7F7F"/>
+                </a:solidFill>
+              </a:rPr>
+              <a:t>Select all five. Try Distribute &gt; Horizontally with each Space by setting. Widths differ, so all four differ.</a:t>
+            </a:r>
+          </a:p>
+        </p:txBody>
+      </p:sp>
+      <p:sp>
+        <p:nvSpPr>
+          <p:cNvPr id="4" name="W200">
+            <a:extLst>
+              <a:ext uri="{FF2B5EF4-FFF2-40B4-BE49-F238E27FC236}">
+                <a16:creationId xmlns:a16="http://schemas.microsoft.com/office/drawing/2014/main" id="{A1F1DF5C-9B9C-ADAC-0863-D4EA1441C3C9}"/>
+              </a:ext>
+            </a:extLst>
+          </p:cNvPr>
+          <p:cNvSpPr/>
+          <p:nvPr/>
+        </p:nvSpPr>
+        <p:spPr>
+          <a:xfrm>
+            <a:off x="635000" y="3175000"/>
+            <a:ext cx="2540000" cy="1143000"/>
+          </a:xfrm>
+          <a:prstGeom prst="rect">
+            <a:avLst/>
+          </a:prstGeom>
+          <a:solidFill>
+            <a:srgbClr val="1F77B4"/>
+          </a:solidFill>
+          <a:ln w="19050" cap="flat" cmpd="sng" algn="ctr">
+            <a:noFill/>
+            <a:prstDash val="solid"/>
+            <a:miter lim="800000"/>
+          </a:ln>
+          <a:effectLst/>
+          <a:extLst>
+            <a:ext uri="{91240B29-F687-4F45-9708-019B960494DF}">
+              <a14:hiddenLine xmlns:a14="http://schemas.microsoft.com/office/drawing/2010/main" w="19050" cap="flat" cmpd="sng" algn="ctr">
+                <a:solidFill>
+                  <a:schemeClr val="accent1">
+                    <a:shade val="15000"/>
+                  </a:schemeClr>
+                </a:solidFill>
+                <a:prstDash val="solid"/>
+                <a:miter lim="800000"/>
+              </a14:hiddenLine>
+            </a:ext>
+          </a:extLst>
+        </p:spPr>
+        <p:style>
+          <a:lnRef idx="2">
+            <a:schemeClr val="accent1">
+              <a:shade val="15000"/>
+            </a:schemeClr>
+          </a:lnRef>
+          <a:fillRef idx="1">
+            <a:schemeClr val="accent1"/>
+          </a:fillRef>
+          <a:effectRef idx="0">
+            <a:schemeClr val="accent1"/>
+          </a:effectRef>
+          <a:fontRef idx="minor">
+            <a:schemeClr val="lt1"/>
+          </a:fontRef>
+        </p:style>
+        <p:txBody>
+          <a:bodyPr rtlCol="0" anchor="ctr"/>
+          <a:lstStyle/>
+          <a:p>
+            <a:pPr algn="ctr"/>
+            <a:r>
+              <a:rPr lang="en-AU" sz="1400" b="1">
+                <a:solidFill>
+                  <a:srgbClr val="FFFFFF"/>
+                </a:solidFill>
+              </a:rPr>
+              <a:t>200</a:t>
+            </a:r>
+          </a:p>
+        </p:txBody>
+      </p:sp>
+      <p:sp>
+        <p:nvSpPr>
+          <p:cNvPr id="5" name="W60">
+            <a:extLst>
+              <a:ext uri="{FF2B5EF4-FFF2-40B4-BE49-F238E27FC236}">
+                <a16:creationId xmlns:a16="http://schemas.microsoft.com/office/drawing/2014/main" id="{ABC4E4C9-F90B-28B4-C5CC-3C1240A6EDAE}"/>
+              </a:ext>
+            </a:extLst>
+          </p:cNvPr>
+          <p:cNvSpPr/>
+          <p:nvPr/>
+        </p:nvSpPr>
+        <p:spPr>
+          <a:xfrm>
+            <a:off x="3810000" y="3175000"/>
+            <a:ext cx="762000" cy="1143000"/>
+          </a:xfrm>
+          <a:prstGeom prst="rect">
+            <a:avLst/>
+          </a:prstGeom>
+          <a:solidFill>
+            <a:srgbClr val="FF7F0E"/>
+          </a:solidFill>
+          <a:ln w="19050" cap="flat" cmpd="sng" algn="ctr">
+            <a:noFill/>
+            <a:prstDash val="solid"/>
+            <a:miter lim="800000"/>
+          </a:ln>
+          <a:effectLst/>
+          <a:extLst>
+            <a:ext uri="{91240B29-F687-4F45-9708-019B960494DF}">
+              <a14:hiddenLine xmlns:a14="http://schemas.microsoft.com/office/drawing/2010/main" w="19050" cap="flat" cmpd="sng" algn="ctr">
+                <a:solidFill>
+                  <a:schemeClr val="accent1">
+                    <a:shade val="15000"/>
+                  </a:schemeClr>
+                </a:solidFill>
+                <a:prstDash val="solid"/>
+                <a:miter lim="800000"/>
+              </a14:hiddenLine>
+            </a:ext>
+          </a:extLst>
+        </p:spPr>
+        <p:style>
+          <a:lnRef idx="2">
+            <a:schemeClr val="accent1">
+              <a:shade val="15000"/>
+            </a:schemeClr>
+          </a:lnRef>
+          <a:fillRef idx="1">
+            <a:schemeClr val="accent1"/>
+          </a:fillRef>
+          <a:effectRef idx="0">
+            <a:schemeClr val="accent1"/>
+          </a:effectRef>
+          <a:fontRef idx="minor">
+            <a:schemeClr val="lt1"/>
+          </a:fontRef>
+        </p:style>
+        <p:txBody>
+          <a:bodyPr rtlCol="0" anchor="ctr"/>
+          <a:lstStyle/>
+          <a:p>
+            <a:pPr algn="ctr"/>
+            <a:r>
+              <a:rPr lang="en-AU" sz="1400" b="1">
+                <a:solidFill>
+                  <a:srgbClr val="FFFFFF"/>
+                </a:solidFill>
+              </a:rPr>
+              <a:t>60</a:t>
+            </a:r>
+          </a:p>
+        </p:txBody>
+      </p:sp>
+      <p:sp>
+        <p:nvSpPr>
+          <p:cNvPr id="6" name="W120">
+            <a:extLst>
+              <a:ext uri="{FF2B5EF4-FFF2-40B4-BE49-F238E27FC236}">
+                <a16:creationId xmlns:a16="http://schemas.microsoft.com/office/drawing/2014/main" id="{1A659DBB-7D0A-6C9F-DC57-C2168C325679}"/>
+              </a:ext>
+            </a:extLst>
+          </p:cNvPr>
+          <p:cNvSpPr/>
+          <p:nvPr/>
+        </p:nvSpPr>
+        <p:spPr>
+          <a:xfrm>
+            <a:off x="5334000" y="3175000"/>
+            <a:ext cx="1524000" cy="1143000"/>
+          </a:xfrm>
+          <a:prstGeom prst="rect">
+            <a:avLst/>
+          </a:prstGeom>
+          <a:solidFill>
+            <a:srgbClr val="2CA02C"/>
+          </a:solidFill>
+          <a:ln w="19050" cap="flat" cmpd="sng" algn="ctr">
+            <a:noFill/>
+            <a:prstDash val="solid"/>
+            <a:miter lim="800000"/>
+          </a:ln>
+          <a:effectLst/>
+          <a:extLst>
+            <a:ext uri="{91240B29-F687-4F45-9708-019B960494DF}">
+              <a14:hiddenLine xmlns:a14="http://schemas.microsoft.com/office/drawing/2010/main" w="19050" cap="flat" cmpd="sng" algn="ctr">
+                <a:solidFill>
+                  <a:schemeClr val="accent1">
+                    <a:shade val="15000"/>
+                  </a:schemeClr>
+                </a:solidFill>
+                <a:prstDash val="solid"/>
+                <a:miter lim="800000"/>
+              </a14:hiddenLine>
+            </a:ext>
+          </a:extLst>
+        </p:spPr>
+        <p:style>
+          <a:lnRef idx="2">
+            <a:schemeClr val="accent1">
+              <a:shade val="15000"/>
+            </a:schemeClr>
+          </a:lnRef>
+          <a:fillRef idx="1">
+            <a:schemeClr val="accent1"/>
+          </a:fillRef>
+          <a:effectRef idx="0">
+            <a:schemeClr val="accent1"/>
+          </a:effectRef>
+          <a:fontRef idx="minor">
+            <a:schemeClr val="lt1"/>
+          </a:fontRef>
+        </p:style>
+        <p:txBody>
+          <a:bodyPr rtlCol="0" anchor="ctr"/>
+          <a:lstStyle/>
+          <a:p>
+            <a:pPr algn="ctr"/>
+            <a:r>
+              <a:rPr lang="en-AU" sz="1400" b="1">
+                <a:solidFill>
+                  <a:srgbClr val="FFFFFF"/>
+                </a:solidFill>
+              </a:rPr>
+              <a:t>120</a:t>
+            </a:r>
+          </a:p>
+        </p:txBody>
+      </p:sp>
+      <p:sp>
+        <p:nvSpPr>
+          <p:cNvPr id="7" name="W40">
+            <a:extLst>
+              <a:ext uri="{FF2B5EF4-FFF2-40B4-BE49-F238E27FC236}">
+                <a16:creationId xmlns:a16="http://schemas.microsoft.com/office/drawing/2014/main" id="{1A6BBD3E-F95C-75F7-CF9F-94E06FCD7D2F}"/>
+              </a:ext>
+            </a:extLst>
+          </p:cNvPr>
+          <p:cNvSpPr/>
+          <p:nvPr/>
+        </p:nvSpPr>
+        <p:spPr>
+          <a:xfrm>
+            <a:off x="7874000" y="3175000"/>
+            <a:ext cx="508000" cy="1143000"/>
+          </a:xfrm>
+          <a:prstGeom prst="rect">
+            <a:avLst/>
+          </a:prstGeom>
+          <a:solidFill>
+            <a:srgbClr val="D62728"/>
+          </a:solidFill>
+          <a:ln w="19050" cap="flat" cmpd="sng" algn="ctr">
+            <a:noFill/>
+            <a:prstDash val="solid"/>
+            <a:miter lim="800000"/>
+          </a:ln>
+          <a:effectLst/>
+          <a:extLst>
+            <a:ext uri="{91240B29-F687-4F45-9708-019B960494DF}">
+              <a14:hiddenLine xmlns:a14="http://schemas.microsoft.com/office/drawing/2010/main" w="19050" cap="flat" cmpd="sng" algn="ctr">
+                <a:solidFill>
+                  <a:schemeClr val="accent1">
+                    <a:shade val="15000"/>
+                  </a:schemeClr>
+                </a:solidFill>
+                <a:prstDash val="solid"/>
+                <a:miter lim="800000"/>
+              </a14:hiddenLine>
+            </a:ext>
+          </a:extLst>
+        </p:spPr>
+        <p:style>
+          <a:lnRef idx="2">
+            <a:schemeClr val="accent1">
+              <a:shade val="15000"/>
+            </a:schemeClr>
+          </a:lnRef>
+          <a:fillRef idx="1">
+            <a:schemeClr val="accent1"/>
+          </a:fillRef>
+          <a:effectRef idx="0">
+            <a:schemeClr val="accent1"/>
+          </a:effectRef>
+          <a:fontRef idx="minor">
+            <a:schemeClr val="lt1"/>
+          </a:fontRef>
+        </p:style>
+        <p:txBody>
+          <a:bodyPr rtlCol="0" anchor="ctr"/>
+          <a:lstStyle/>
+          <a:p>
+            <a:pPr algn="ctr"/>
+            <a:r>
+              <a:rPr lang="en-AU" sz="1400" b="1">
+                <a:solidFill>
+                  <a:srgbClr val="FFFFFF"/>
+                </a:solidFill>
+              </a:rPr>
+              <a:t>40</a:t>
+            </a:r>
+          </a:p>
+        </p:txBody>
+      </p:sp>
+      <p:sp>
+        <p:nvSpPr>
+          <p:cNvPr id="8" name="W150">
+            <a:extLst>
+              <a:ext uri="{FF2B5EF4-FFF2-40B4-BE49-F238E27FC236}">
+                <a16:creationId xmlns:a16="http://schemas.microsoft.com/office/drawing/2014/main" id="{54DE68D9-B3E9-1E6E-A2FE-BAFD96716B7A}"/>
+              </a:ext>
+            </a:extLst>
+          </p:cNvPr>
+          <p:cNvSpPr/>
+          <p:nvPr/>
+        </p:nvSpPr>
+        <p:spPr>
+          <a:xfrm>
+            <a:off x="9652000" y="3175000"/>
+            <a:ext cx="1905000" cy="1143000"/>
+          </a:xfrm>
+          <a:prstGeom prst="rect">
+            <a:avLst/>
+          </a:prstGeom>
+          <a:solidFill>
+            <a:srgbClr val="9467BD"/>
+          </a:solidFill>
+          <a:ln w="19050" cap="flat" cmpd="sng" algn="ctr">
+            <a:noFill/>
+            <a:prstDash val="solid"/>
+            <a:miter lim="800000"/>
+          </a:ln>
+          <a:effectLst/>
+          <a:extLst>
+            <a:ext uri="{91240B29-F687-4F45-9708-019B960494DF}">
+              <a14:hiddenLine xmlns:a14="http://schemas.microsoft.com/office/drawing/2010/main" w="19050" cap="flat" cmpd="sng" algn="ctr">
+                <a:solidFill>
+                  <a:schemeClr val="accent1">
+                    <a:shade val="15000"/>
+                  </a:schemeClr>
+                </a:solidFill>
+                <a:prstDash val="solid"/>
+                <a:miter lim="800000"/>
+              </a14:hiddenLine>
+            </a:ext>
+          </a:extLst>
+        </p:spPr>
+        <p:style>
+          <a:lnRef idx="2">
+            <a:schemeClr val="accent1">
+              <a:shade val="15000"/>
+            </a:schemeClr>
+          </a:lnRef>
+          <a:fillRef idx="1">
+            <a:schemeClr val="accent1"/>
+          </a:fillRef>
+          <a:effectRef idx="0">
+            <a:schemeClr val="accent1"/>
+          </a:effectRef>
+          <a:fontRef idx="minor">
+            <a:schemeClr val="lt1"/>
+          </a:fontRef>
+        </p:style>
+        <p:txBody>
+          <a:bodyPr rtlCol="0" anchor="ctr"/>
+          <a:lstStyle/>
+          <a:p>
+            <a:pPr algn="ctr"/>
+            <a:r>
+              <a:rPr lang="en-AU" sz="1400" b="1">
+                <a:solidFill>
+                  <a:srgbClr val="FFFFFF"/>
+                </a:solidFill>
+              </a:rPr>
+              <a:t>150</a:t>
+            </a:r>
+          </a:p>
+        </p:txBody>
+      </p:sp>
+      <p:sp>
+        <p:nvSpPr>
+          <p:cNvPr id="9" name="TextBox 8">
+            <a:extLst>
+              <a:ext uri="{FF2B5EF4-FFF2-40B4-BE49-F238E27FC236}">
+                <a16:creationId xmlns:a16="http://schemas.microsoft.com/office/drawing/2014/main" id="{23FF2FED-F4DF-7E59-EB47-5B79F79AEEEB}"/>
+              </a:ext>
+            </a:extLst>
+          </p:cNvPr>
+          <p:cNvSpPr txBox="1"/>
+          <p:nvPr/>
+        </p:nvSpPr>
+        <p:spPr>
+          <a:xfrm>
+            <a:off x="508000" y="4826000"/>
+            <a:ext cx="11176000" cy="461665"/>
+          </a:xfrm>
+          <a:prstGeom prst="rect">
+            <a:avLst/>
+          </a:prstGeom>
+          <a:noFill/>
+        </p:spPr>
+        <p:txBody>
+          <a:bodyPr vert="horz" rtlCol="0">
+            <a:spAutoFit/>
+          </a:bodyPr>
+          <a:lstStyle/>
+          <a:p>
+            <a:r>
+              <a:rPr lang="en-AU" sz="1200">
+                <a:solidFill>
+                  <a:srgbClr val="7F7F7F"/>
+                </a:solidFill>
+              </a:rPr>
+              <a:t>Leading edges lines up the left edges at an even pitch. Centres evens the centres. Trailing edges evens the right edges. Space between evens the visible gaps - the only one of the four that does.</a:t>
+            </a:r>
+          </a:p>
+        </p:txBody>
+      </p:sp>
+    </p:spTree>
+    <p:extLst>
+      <p:ext uri="{BB962C8B-B14F-4D97-AF65-F5344CB8AC3E}">
+        <p14:creationId xmlns:p14="http://schemas.microsoft.com/office/powerpoint/2010/main" val="1922474494"/>
+      </p:ext>
+    </p:extLst>
+  </p:cSld>
+  <p:clrMapOvr>
+    <a:masterClrMapping/>
+  </p:clrMapOvr>
+</p:sld>
+</file>
+
+<file path=ppt/slides/slide5.xml><?xml version="1.0" encoding="utf-8"?>
+<p:sld xmlns:a="http://schemas.openxmlformats.org/drawingml/2006/main" xmlns:r="http://schemas.openxmlformats.org/officeDocument/2006/relationships" xmlns:p="http://schemas.openxmlformats.org/presentationml/2006/main">
+  <p:cSld>
+    <p:spTree>
+      <p:nvGrpSpPr>
+        <p:cNvPr id="1" name=""/>
+        <p:cNvGrpSpPr/>
+        <p:nvPr/>
+      </p:nvGrpSpPr>
+      <p:grpSpPr>
+        <a:xfrm>
+          <a:off x="0" y="0"/>
+          <a:ext cx="0" cy="0"/>
+          <a:chOff x="0" y="0"/>
+          <a:chExt cx="0" cy="0"/>
+        </a:xfrm>
+      </p:grpSpPr>
+      <p:sp>
+        <p:nvSpPr>
+          <p:cNvPr id="2" name="Heading">
+            <a:extLst>
+              <a:ext uri="{FF2B5EF4-FFF2-40B4-BE49-F238E27FC236}">
+                <a16:creationId xmlns:a16="http://schemas.microsoft.com/office/drawing/2014/main" id="{CD169922-A324-02B1-2372-66897523F23E}"/>
+              </a:ext>
+            </a:extLst>
+          </p:cNvPr>
+          <p:cNvSpPr txBox="1"/>
+          <p:nvPr/>
+        </p:nvSpPr>
+        <p:spPr>
+          <a:xfrm>
+            <a:off x="508000" y="304800"/>
+            <a:ext cx="11176000" cy="461665"/>
+          </a:xfrm>
+          <a:prstGeom prst="rect">
+            <a:avLst/>
+          </a:prstGeom>
+          <a:noFill/>
+        </p:spPr>
+        <p:txBody>
+          <a:bodyPr vert="horz" rtlCol="0">
+            <a:spAutoFit/>
+          </a:bodyPr>
+          <a:lstStyle/>
+          <a:p>
+            <a:r>
+              <a:rPr lang="en-AU" sz="2400" b="1">
+                <a:solidFill>
+                  <a:srgbClr val="282828"/>
+                </a:solidFill>
+              </a:rPr>
+              <a:t>Exact spacing</a:t>
+            </a:r>
+          </a:p>
+        </p:txBody>
+      </p:sp>
+      <p:sp>
+        <p:nvSpPr>
+          <p:cNvPr id="3" name="Instructions">
+            <a:extLst>
+              <a:ext uri="{FF2B5EF4-FFF2-40B4-BE49-F238E27FC236}">
+                <a16:creationId xmlns:a16="http://schemas.microsoft.com/office/drawing/2014/main" id="{066AB667-480F-CE31-15FA-94A0977FEB79}"/>
+              </a:ext>
+            </a:extLst>
+          </p:cNvPr>
+          <p:cNvSpPr txBox="1"/>
+          <p:nvPr/>
+        </p:nvSpPr>
+        <p:spPr>
+          <a:xfrm>
+            <a:off x="508000" y="762000"/>
+            <a:ext cx="11176000" cy="292388"/>
+          </a:xfrm>
+          <a:prstGeom prst="rect">
+            <a:avLst/>
+          </a:prstGeom>
+          <a:noFill/>
+        </p:spPr>
+        <p:txBody>
+          <a:bodyPr vert="horz" rtlCol="0">
+            <a:spAutoFit/>
+          </a:bodyPr>
+          <a:lstStyle/>
+          <a:p>
+            <a:r>
+              <a:rPr lang="en-AU" sz="1300">
+                <a:solidFill>
+                  <a:srgbClr val="7F7F7F"/>
+                </a:solidFill>
+              </a:rPr>
+              <a:t>Select all four, put 12 in the Exact (pt) box, Space by = Space between, then Distribute &gt; Horizontally.</a:t>
+            </a:r>
+          </a:p>
+        </p:txBody>
+      </p:sp>
+      <p:sp>
+        <p:nvSpPr>
+          <p:cNvPr id="4" name="Gap0">
+            <a:extLst>
+              <a:ext uri="{FF2B5EF4-FFF2-40B4-BE49-F238E27FC236}">
+                <a16:creationId xmlns:a16="http://schemas.microsoft.com/office/drawing/2014/main" id="{D4071759-D865-EB3D-9790-AF27780AE7DA}"/>
+              </a:ext>
+            </a:extLst>
+          </p:cNvPr>
+          <p:cNvSpPr/>
+          <p:nvPr/>
+        </p:nvSpPr>
+        <p:spPr>
+          <a:xfrm>
+            <a:off x="1016000" y="3048000"/>
+            <a:ext cx="1524000" cy="1270000"/>
+          </a:xfrm>
+          <a:prstGeom prst="rect">
+            <a:avLst/>
+          </a:prstGeom>
+          <a:solidFill>
+            <a:srgbClr val="1F77B4"/>
+          </a:solidFill>
+          <a:ln w="19050" cap="flat" cmpd="sng" algn="ctr">
+            <a:noFill/>
+            <a:prstDash val="solid"/>
+            <a:miter lim="800000"/>
+          </a:ln>
+          <a:effectLst/>
+          <a:extLst>
+            <a:ext uri="{91240B29-F687-4F45-9708-019B960494DF}">
+              <a14:hiddenLine xmlns:a14="http://schemas.microsoft.com/office/drawing/2010/main" w="19050" cap="flat" cmpd="sng" algn="ctr">
+                <a:solidFill>
+                  <a:schemeClr val="accent1">
+                    <a:shade val="15000"/>
+                  </a:schemeClr>
+                </a:solidFill>
+                <a:prstDash val="solid"/>
+                <a:miter lim="800000"/>
+              </a14:hiddenLine>
+            </a:ext>
+          </a:extLst>
+        </p:spPr>
+        <p:style>
+          <a:lnRef idx="2">
+            <a:schemeClr val="accent1">
+              <a:shade val="15000"/>
+            </a:schemeClr>
+          </a:lnRef>
+          <a:fillRef idx="1">
+            <a:schemeClr val="accent1"/>
+          </a:fillRef>
+          <a:effectRef idx="0">
+            <a:schemeClr val="accent1"/>
+          </a:effectRef>
+          <a:fontRef idx="minor">
+            <a:schemeClr val="lt1"/>
+          </a:fontRef>
+        </p:style>
+        <p:txBody>
+          <a:bodyPr rtlCol="0" anchor="ctr"/>
+          <a:lstStyle/>
+          <a:p>
+            <a:pPr algn="ctr"/>
+            <a:r>
+              <a:rPr lang="en-AU" sz="1400" b="1">
+                <a:solidFill>
+                  <a:srgbClr val="FFFFFF"/>
+                </a:solidFill>
+              </a:rPr>
+              <a:t>#1</a:t>
+            </a:r>
+          </a:p>
+        </p:txBody>
+      </p:sp>
+      <p:sp>
+        <p:nvSpPr>
+          <p:cNvPr id="5" name="Gap1">
+            <a:extLst>
+              <a:ext uri="{FF2B5EF4-FFF2-40B4-BE49-F238E27FC236}">
+                <a16:creationId xmlns:a16="http://schemas.microsoft.com/office/drawing/2014/main" id="{E60C7305-FC99-ECDD-11EC-2516C3503808}"/>
+              </a:ext>
+            </a:extLst>
+          </p:cNvPr>
+          <p:cNvSpPr/>
+          <p:nvPr/>
+        </p:nvSpPr>
+        <p:spPr>
+          <a:xfrm>
+            <a:off x="3429000" y="3048000"/>
+            <a:ext cx="1524000" cy="1270000"/>
+          </a:xfrm>
+          <a:prstGeom prst="rect">
+            <a:avLst/>
+          </a:prstGeom>
+          <a:solidFill>
+            <a:srgbClr val="1F77B4"/>
+          </a:solidFill>
+          <a:ln w="19050" cap="flat" cmpd="sng" algn="ctr">
+            <a:noFill/>
+            <a:prstDash val="solid"/>
+            <a:miter lim="800000"/>
+          </a:ln>
+          <a:effectLst/>
+          <a:extLst>
+            <a:ext uri="{91240B29-F687-4F45-9708-019B960494DF}">
+              <a14:hiddenLine xmlns:a14="http://schemas.microsoft.com/office/drawing/2010/main" w="19050" cap="flat" cmpd="sng" algn="ctr">
+                <a:solidFill>
+                  <a:schemeClr val="accent1">
+                    <a:shade val="15000"/>
+                  </a:schemeClr>
+                </a:solidFill>
+                <a:prstDash val="solid"/>
+                <a:miter lim="800000"/>
+              </a14:hiddenLine>
+            </a:ext>
+          </a:extLst>
+        </p:spPr>
+        <p:style>
+          <a:lnRef idx="2">
+            <a:schemeClr val="accent1">
+              <a:shade val="15000"/>
+            </a:schemeClr>
+          </a:lnRef>
+          <a:fillRef idx="1">
+            <a:schemeClr val="accent1"/>
+          </a:fillRef>
+          <a:effectRef idx="0">
+            <a:schemeClr val="accent1"/>
+          </a:effectRef>
+          <a:fontRef idx="minor">
+            <a:schemeClr val="lt1"/>
+          </a:fontRef>
+        </p:style>
+        <p:txBody>
+          <a:bodyPr rtlCol="0" anchor="ctr"/>
+          <a:lstStyle/>
+          <a:p>
+            <a:pPr algn="ctr"/>
+            <a:r>
+              <a:rPr lang="en-AU" sz="1400" b="1">
+                <a:solidFill>
+                  <a:srgbClr val="FFFFFF"/>
+                </a:solidFill>
+              </a:rPr>
+              <a:t>#2</a:t>
+            </a:r>
+          </a:p>
+        </p:txBody>
+      </p:sp>
+      <p:sp>
+        <p:nvSpPr>
+          <p:cNvPr id="6" name="Gap2">
+            <a:extLst>
+              <a:ext uri="{FF2B5EF4-FFF2-40B4-BE49-F238E27FC236}">
+                <a16:creationId xmlns:a16="http://schemas.microsoft.com/office/drawing/2014/main" id="{D9025A85-B03F-AF03-67D9-C4304328D28C}"/>
+              </a:ext>
+            </a:extLst>
+          </p:cNvPr>
+          <p:cNvSpPr/>
+          <p:nvPr/>
+        </p:nvSpPr>
+        <p:spPr>
+          <a:xfrm>
+            <a:off x="5842000" y="3048000"/>
+            <a:ext cx="1524000" cy="1270000"/>
+          </a:xfrm>
+          <a:prstGeom prst="rect">
+            <a:avLst/>
+          </a:prstGeom>
+          <a:solidFill>
+            <a:srgbClr val="1F77B4"/>
+          </a:solidFill>
+          <a:ln w="19050" cap="flat" cmpd="sng" algn="ctr">
+            <a:noFill/>
+            <a:prstDash val="solid"/>
+            <a:miter lim="800000"/>
+          </a:ln>
+          <a:effectLst/>
+          <a:extLst>
+            <a:ext uri="{91240B29-F687-4F45-9708-019B960494DF}">
+              <a14:hiddenLine xmlns:a14="http://schemas.microsoft.com/office/drawing/2010/main" w="19050" cap="flat" cmpd="sng" algn="ctr">
+                <a:solidFill>
+                  <a:schemeClr val="accent1">
+                    <a:shade val="15000"/>
+                  </a:schemeClr>
+                </a:solidFill>
+                <a:prstDash val="solid"/>
+                <a:miter lim="800000"/>
+              </a14:hiddenLine>
+            </a:ext>
+          </a:extLst>
+        </p:spPr>
+        <p:style>
+          <a:lnRef idx="2">
+            <a:schemeClr val="accent1">
+              <a:shade val="15000"/>
+            </a:schemeClr>
+          </a:lnRef>
+          <a:fillRef idx="1">
+            <a:schemeClr val="accent1"/>
+          </a:fillRef>
+          <a:effectRef idx="0">
+            <a:schemeClr val="accent1"/>
+          </a:effectRef>
+          <a:fontRef idx="minor">
+            <a:schemeClr val="lt1"/>
+          </a:fontRef>
+        </p:style>
+        <p:txBody>
+          <a:bodyPr rtlCol="0" anchor="ctr"/>
+          <a:lstStyle/>
+          <a:p>
+            <a:pPr algn="ctr"/>
+            <a:r>
+              <a:rPr lang="en-AU" sz="1400" b="1">
+                <a:solidFill>
+                  <a:srgbClr val="FFFFFF"/>
+                </a:solidFill>
+              </a:rPr>
+              <a:t>#3</a:t>
+            </a:r>
+          </a:p>
+        </p:txBody>
+      </p:sp>
+      <p:sp>
+        <p:nvSpPr>
+          <p:cNvPr id="7" name="Gap3">
+            <a:extLst>
+              <a:ext uri="{FF2B5EF4-FFF2-40B4-BE49-F238E27FC236}">
+                <a16:creationId xmlns:a16="http://schemas.microsoft.com/office/drawing/2014/main" id="{63B460FD-AFA8-E9D2-02EA-F6340BF0F1B3}"/>
+              </a:ext>
+            </a:extLst>
+          </p:cNvPr>
+          <p:cNvSpPr/>
+          <p:nvPr/>
+        </p:nvSpPr>
+        <p:spPr>
+          <a:xfrm>
+            <a:off x="8255000" y="3048000"/>
+            <a:ext cx="1524000" cy="1270000"/>
+          </a:xfrm>
+          <a:prstGeom prst="rect">
+            <a:avLst/>
+          </a:prstGeom>
+          <a:solidFill>
+            <a:srgbClr val="1F77B4"/>
+          </a:solidFill>
+          <a:ln w="19050" cap="flat" cmpd="sng" algn="ctr">
+            <a:noFill/>
+            <a:prstDash val="solid"/>
+            <a:miter lim="800000"/>
+          </a:ln>
+          <a:effectLst/>
+          <a:extLst>
+            <a:ext uri="{91240B29-F687-4F45-9708-019B960494DF}">
+              <a14:hiddenLine xmlns:a14="http://schemas.microsoft.com/office/drawing/2010/main" w="19050" cap="flat" cmpd="sng" algn="ctr">
+                <a:solidFill>
+                  <a:schemeClr val="accent1">
+                    <a:shade val="15000"/>
+                  </a:schemeClr>
+                </a:solidFill>
+                <a:prstDash val="solid"/>
+                <a:miter lim="800000"/>
+              </a14:hiddenLine>
+            </a:ext>
+          </a:extLst>
+        </p:spPr>
+        <p:style>
+          <a:lnRef idx="2">
+            <a:schemeClr val="accent1">
+              <a:shade val="15000"/>
+            </a:schemeClr>
+          </a:lnRef>
+          <a:fillRef idx="1">
+            <a:schemeClr val="accent1"/>
+          </a:fillRef>
+          <a:effectRef idx="0">
+            <a:schemeClr val="accent1"/>
+          </a:effectRef>
+          <a:fontRef idx="minor">
+            <a:schemeClr val="lt1"/>
+          </a:fontRef>
+        </p:style>
+        <p:txBody>
+          <a:bodyPr rtlCol="0" anchor="ctr"/>
+          <a:lstStyle/>
+          <a:p>
+            <a:pPr algn="ctr"/>
+            <a:r>
+              <a:rPr lang="en-AU" sz="1400" b="1">
+                <a:solidFill>
+                  <a:srgbClr val="FFFFFF"/>
+                </a:solidFill>
+              </a:rPr>
+              <a:t>#4</a:t>
+            </a:r>
+          </a:p>
+        </p:txBody>
+      </p:sp>
+      <p:sp>
+        <p:nvSpPr>
+          <p:cNvPr id="8" name="TextBox 7">
+            <a:extLst>
+              <a:ext uri="{FF2B5EF4-FFF2-40B4-BE49-F238E27FC236}">
+                <a16:creationId xmlns:a16="http://schemas.microsoft.com/office/drawing/2014/main" id="{3D00C000-FA1D-1AD6-C223-CDB921B690E7}"/>
+              </a:ext>
+            </a:extLst>
+          </p:cNvPr>
+          <p:cNvSpPr txBox="1"/>
+          <p:nvPr/>
+        </p:nvSpPr>
+        <p:spPr>
+          <a:xfrm>
+            <a:off x="508000" y="4826000"/>
+            <a:ext cx="11176000" cy="276999"/>
+          </a:xfrm>
+          <a:prstGeom prst="rect">
+            <a:avLst/>
+          </a:prstGeom>
+          <a:noFill/>
+        </p:spPr>
+        <p:txBody>
+          <a:bodyPr vert="horz" rtlCol="0">
+            <a:spAutoFit/>
+          </a:bodyPr>
+          <a:lstStyle/>
+          <a:p>
+            <a:r>
+              <a:rPr lang="en-AU" sz="1200">
+                <a:solidFill>
+                  <a:srgbClr val="7F7F7F"/>
+                </a:solidFill>
+              </a:rPr>
+              <a:t>Clear the box again to go back to evening out whatever space is already there. In the edge and centre modes the number is a pitch, not a gap.</a:t>
+            </a:r>
+          </a:p>
+        </p:txBody>
+      </p:sp>
+    </p:spTree>
+    <p:extLst>
+      <p:ext uri="{BB962C8B-B14F-4D97-AF65-F5344CB8AC3E}">
+        <p14:creationId xmlns:p14="http://schemas.microsoft.com/office/powerpoint/2010/main" val="4255487300"/>
+      </p:ext>
+    </p:extLst>
+  </p:cSld>
+  <p:clrMapOvr>
+    <a:masterClrMapping/>
+  </p:clrMapOvr>
+</p:sld>
+</file>
+
+<file path=ppt/slides/slide6.xml><?xml version="1.0" encoding="utf-8"?>
+<p:sld xmlns:a="http://schemas.openxmlformats.org/drawingml/2006/main" xmlns:r="http://schemas.openxmlformats.org/officeDocument/2006/relationships" xmlns:p="http://schemas.openxmlformats.org/presentationml/2006/main">
+  <p:cSld>
+    <p:spTree>
+      <p:nvGrpSpPr>
+        <p:cNvPr id="1" name=""/>
+        <p:cNvGrpSpPr/>
+        <p:nvPr/>
+      </p:nvGrpSpPr>
+      <p:grpSpPr>
+        <a:xfrm>
+          <a:off x="0" y="0"/>
+          <a:ext cx="0" cy="0"/>
+          <a:chOff x="0" y="0"/>
+          <a:chExt cx="0" cy="0"/>
+        </a:xfrm>
+      </p:grpSpPr>
+      <p:sp>
+        <p:nvSpPr>
+          <p:cNvPr id="2" name="Heading">
+            <a:extLst>
+              <a:ext uri="{FF2B5EF4-FFF2-40B4-BE49-F238E27FC236}">
+                <a16:creationId xmlns:a16="http://schemas.microsoft.com/office/drawing/2014/main" id="{2AD1BF41-5E90-9F52-E3DD-7669F6AD1ACF}"/>
+              </a:ext>
+            </a:extLst>
+          </p:cNvPr>
+          <p:cNvSpPr txBox="1"/>
+          <p:nvPr/>
+        </p:nvSpPr>
+        <p:spPr>
+          <a:xfrm>
+            <a:off x="508000" y="304800"/>
+            <a:ext cx="11176000" cy="461665"/>
+          </a:xfrm>
+          <a:prstGeom prst="rect">
+            <a:avLst/>
+          </a:prstGeom>
+          <a:noFill/>
+        </p:spPr>
+        <p:txBody>
+          <a:bodyPr vert="horz" rtlCol="0">
+            <a:spAutoFit/>
+          </a:bodyPr>
+          <a:lstStyle/>
+          <a:p>
+            <a:r>
+              <a:rPr lang="en-AU" sz="2400" b="1">
+                <a:solidFill>
+                  <a:srgbClr val="282828"/>
+                </a:solidFill>
+              </a:rPr>
+              <a:t>Match size to the anchor</a:t>
+            </a:r>
+          </a:p>
+        </p:txBody>
+      </p:sp>
+      <p:sp>
+        <p:nvSpPr>
+          <p:cNvPr id="3" name="Instructions">
+            <a:extLst>
+              <a:ext uri="{FF2B5EF4-FFF2-40B4-BE49-F238E27FC236}">
+                <a16:creationId xmlns:a16="http://schemas.microsoft.com/office/drawing/2014/main" id="{96895378-DF7E-2817-F939-F34273ACA49C}"/>
+              </a:ext>
+            </a:extLst>
+          </p:cNvPr>
+          <p:cNvSpPr txBox="1"/>
+          <p:nvPr/>
+        </p:nvSpPr>
+        <p:spPr>
+          <a:xfrm>
+            <a:off x="508000" y="762000"/>
+            <a:ext cx="11176000" cy="292388"/>
+          </a:xfrm>
+          <a:prstGeom prst="rect">
+            <a:avLst/>
+          </a:prstGeom>
+          <a:noFill/>
+        </p:spPr>
+        <p:txBody>
+          <a:bodyPr vert="horz" rtlCol="0">
+            <a:spAutoFit/>
+          </a:bodyPr>
+          <a:lstStyle/>
+          <a:p>
+            <a:r>
+              <a:rPr lang="en-AU" sz="1300">
+                <a:solidFill>
+                  <a:srgbClr val="7F7F7F"/>
+                </a:solidFill>
+              </a:rPr>
+              <a:t>Select the three odd shapes, then Ctrl+click TARGET last. Match size &gt; Both. Try the From centre toggle too.</a:t>
+            </a:r>
+          </a:p>
+        </p:txBody>
+      </p:sp>
+      <p:sp>
+        <p:nvSpPr>
+          <p:cNvPr id="4" name="Odd1">
+            <a:extLst>
+              <a:ext uri="{FF2B5EF4-FFF2-40B4-BE49-F238E27FC236}">
+                <a16:creationId xmlns:a16="http://schemas.microsoft.com/office/drawing/2014/main" id="{8CD73F17-542F-6941-625A-CEE4428F6621}"/>
+              </a:ext>
+            </a:extLst>
+          </p:cNvPr>
+          <p:cNvSpPr/>
+          <p:nvPr/>
+        </p:nvSpPr>
+        <p:spPr>
+          <a:xfrm>
+            <a:off x="1397000" y="2286000"/>
+            <a:ext cx="1016000" cy="1651000"/>
+          </a:xfrm>
+          <a:prstGeom prst="rect">
+            <a:avLst/>
+          </a:prstGeom>
+          <a:solidFill>
+            <a:srgbClr val="1F77B4"/>
+          </a:solidFill>
+          <a:ln w="19050" cap="flat" cmpd="sng" algn="ctr">
+            <a:noFill/>
+            <a:prstDash val="solid"/>
+            <a:miter lim="800000"/>
+          </a:ln>
+          <a:effectLst/>
+          <a:extLst>
+            <a:ext uri="{91240B29-F687-4F45-9708-019B960494DF}">
+              <a14:hiddenLine xmlns:a14="http://schemas.microsoft.com/office/drawing/2010/main" w="19050" cap="flat" cmpd="sng" algn="ctr">
+                <a:solidFill>
+                  <a:schemeClr val="accent1">
+                    <a:shade val="15000"/>
+                  </a:schemeClr>
+                </a:solidFill>
+                <a:prstDash val="solid"/>
+                <a:miter lim="800000"/>
+              </a14:hiddenLine>
+            </a:ext>
+          </a:extLst>
+        </p:spPr>
+        <p:style>
+          <a:lnRef idx="2">
+            <a:schemeClr val="accent1">
+              <a:shade val="15000"/>
+            </a:schemeClr>
+          </a:lnRef>
+          <a:fillRef idx="1">
+            <a:schemeClr val="accent1"/>
+          </a:fillRef>
+          <a:effectRef idx="0">
+            <a:schemeClr val="accent1"/>
+          </a:effectRef>
+          <a:fontRef idx="minor">
+            <a:schemeClr val="lt1"/>
+          </a:fontRef>
+        </p:style>
+        <p:txBody>
+          <a:bodyPr rtlCol="0" anchor="ctr"/>
+          <a:lstStyle/>
+          <a:p>
+            <a:pPr algn="ctr"/>
+            <a:r>
+              <a:rPr lang="en-AU" sz="1400" b="1">
+                <a:solidFill>
+                  <a:srgbClr val="FFFFFF"/>
+                </a:solidFill>
+              </a:rPr>
+              <a:t>Odd1</a:t>
+            </a:r>
+          </a:p>
+        </p:txBody>
+      </p:sp>
+      <p:sp>
+        <p:nvSpPr>
+          <p:cNvPr id="5" name="Odd2">
+            <a:extLst>
+              <a:ext uri="{FF2B5EF4-FFF2-40B4-BE49-F238E27FC236}">
+                <a16:creationId xmlns:a16="http://schemas.microsoft.com/office/drawing/2014/main" id="{217E60FD-E47F-C1D0-04D7-98E1E499CB5D}"/>
+              </a:ext>
+            </a:extLst>
+          </p:cNvPr>
+          <p:cNvSpPr/>
+          <p:nvPr/>
+        </p:nvSpPr>
+        <p:spPr>
+          <a:xfrm>
+            <a:off x="3048000" y="2794000"/>
+            <a:ext cx="2032000" cy="762000"/>
+          </a:xfrm>
+          <a:prstGeom prst="rect">
+            <a:avLst/>
+          </a:prstGeom>
+          <a:solidFill>
+            <a:srgbClr val="2CA02C"/>
+          </a:solidFill>
+          <a:ln w="19050" cap="flat" cmpd="sng" algn="ctr">
+            <a:noFill/>
+            <a:prstDash val="solid"/>
+            <a:miter lim="800000"/>
+          </a:ln>
+          <a:effectLst/>
+          <a:extLst>
+            <a:ext uri="{91240B29-F687-4F45-9708-019B960494DF}">
+              <a14:hiddenLine xmlns:a14="http://schemas.microsoft.com/office/drawing/2010/main" w="19050" cap="flat" cmpd="sng" algn="ctr">
+                <a:solidFill>
+                  <a:schemeClr val="accent1">
+                    <a:shade val="15000"/>
+                  </a:schemeClr>
+                </a:solidFill>
+                <a:prstDash val="solid"/>
+                <a:miter lim="800000"/>
+              </a14:hiddenLine>
+            </a:ext>
+          </a:extLst>
+        </p:spPr>
+        <p:style>
+          <a:lnRef idx="2">
+            <a:schemeClr val="accent1">
+              <a:shade val="15000"/>
+            </a:schemeClr>
+          </a:lnRef>
+          <a:fillRef idx="1">
+            <a:schemeClr val="accent1"/>
+          </a:fillRef>
+          <a:effectRef idx="0">
+            <a:schemeClr val="accent1"/>
+          </a:effectRef>
+          <a:fontRef idx="minor">
+            <a:schemeClr val="lt1"/>
+          </a:fontRef>
+        </p:style>
+        <p:txBody>
+          <a:bodyPr rtlCol="0" anchor="ctr"/>
+          <a:lstStyle/>
+          <a:p>
+            <a:pPr algn="ctr"/>
+            <a:r>
+              <a:rPr lang="en-AU" sz="1400" b="1">
+                <a:solidFill>
+                  <a:srgbClr val="FFFFFF"/>
+                </a:solidFill>
+              </a:rPr>
+              <a:t>Odd2</a:t>
+            </a:r>
+          </a:p>
+        </p:txBody>
+      </p:sp>
+      <p:sp>
+        <p:nvSpPr>
+          <p:cNvPr id="6" name="Odd3">
+            <a:extLst>
+              <a:ext uri="{FF2B5EF4-FFF2-40B4-BE49-F238E27FC236}">
+                <a16:creationId xmlns:a16="http://schemas.microsoft.com/office/drawing/2014/main" id="{AA11F170-D016-FF11-4DD0-CEFED0D066C6}"/>
+              </a:ext>
+            </a:extLst>
+          </p:cNvPr>
+          <p:cNvSpPr/>
+          <p:nvPr/>
+        </p:nvSpPr>
+        <p:spPr>
+          <a:xfrm>
+            <a:off x="1651000" y="4445000"/>
+            <a:ext cx="1397000" cy="1143000"/>
+          </a:xfrm>
+          <a:prstGeom prst="rect">
+            <a:avLst/>
+          </a:prstGeom>
+          <a:solidFill>
+            <a:srgbClr val="9467BD"/>
+          </a:solidFill>
+          <a:ln w="19050" cap="flat" cmpd="sng" algn="ctr">
+            <a:noFill/>
+            <a:prstDash val="solid"/>
+            <a:miter lim="800000"/>
+          </a:ln>
+          <a:effectLst/>
+          <a:extLst>
+            <a:ext uri="{91240B29-F687-4F45-9708-019B960494DF}">
+              <a14:hiddenLine xmlns:a14="http://schemas.microsoft.com/office/drawing/2010/main" w="19050" cap="flat" cmpd="sng" algn="ctr">
+                <a:solidFill>
+                  <a:schemeClr val="accent1">
+                    <a:shade val="15000"/>
+                  </a:schemeClr>
+                </a:solidFill>
+                <a:prstDash val="solid"/>
+                <a:miter lim="800000"/>
+              </a14:hiddenLine>
+            </a:ext>
+          </a:extLst>
+        </p:spPr>
+        <p:style>
+          <a:lnRef idx="2">
+            <a:schemeClr val="accent1">
+              <a:shade val="15000"/>
+            </a:schemeClr>
+          </a:lnRef>
+          <a:fillRef idx="1">
+            <a:schemeClr val="accent1"/>
+          </a:fillRef>
+          <a:effectRef idx="0">
+            <a:schemeClr val="accent1"/>
+          </a:effectRef>
+          <a:fontRef idx="minor">
+            <a:schemeClr val="lt1"/>
+          </a:fontRef>
+        </p:style>
+        <p:txBody>
+          <a:bodyPr rtlCol="0" anchor="ctr"/>
+          <a:lstStyle/>
+          <a:p>
+            <a:pPr algn="ctr"/>
+            <a:r>
+              <a:rPr lang="en-AU" sz="1400" b="1">
+                <a:solidFill>
+                  <a:srgbClr val="FFFFFF"/>
+                </a:solidFill>
+              </a:rPr>
+              <a:t>Odd3</a:t>
+            </a:r>
+          </a:p>
+        </p:txBody>
+      </p:sp>
+      <p:sp>
+        <p:nvSpPr>
+          <p:cNvPr id="7" name="Target">
+            <a:extLst>
+              <a:ext uri="{FF2B5EF4-FFF2-40B4-BE49-F238E27FC236}">
+                <a16:creationId xmlns:a16="http://schemas.microsoft.com/office/drawing/2014/main" id="{9EA67D49-72FF-6BD8-F04E-4B7EF6981EF4}"/>
+              </a:ext>
+            </a:extLst>
+          </p:cNvPr>
+          <p:cNvSpPr/>
+          <p:nvPr/>
+        </p:nvSpPr>
+        <p:spPr>
+          <a:xfrm>
+            <a:off x="7620000" y="2921000"/>
+            <a:ext cx="2540000" cy="1524000"/>
+          </a:xfrm>
+          <a:prstGeom prst="rect">
+            <a:avLst/>
+          </a:prstGeom>
+          <a:solidFill>
+            <a:srgbClr val="D62728"/>
+          </a:solidFill>
+          <a:ln w="19050" cap="flat" cmpd="sng" algn="ctr">
+            <a:noFill/>
+            <a:prstDash val="solid"/>
+            <a:miter lim="800000"/>
+          </a:ln>
+          <a:effectLst/>
+          <a:extLst>
+            <a:ext uri="{91240B29-F687-4F45-9708-019B960494DF}">
+              <a14:hiddenLine xmlns:a14="http://schemas.microsoft.com/office/drawing/2010/main" w="19050" cap="flat" cmpd="sng" algn="ctr">
+                <a:solidFill>
+                  <a:schemeClr val="accent1">
+                    <a:shade val="15000"/>
+                  </a:schemeClr>
+                </a:solidFill>
+                <a:prstDash val="solid"/>
+                <a:miter lim="800000"/>
+              </a14:hiddenLine>
+            </a:ext>
+          </a:extLst>
+        </p:spPr>
+        <p:style>
+          <a:lnRef idx="2">
+            <a:schemeClr val="accent1">
+              <a:shade val="15000"/>
+            </a:schemeClr>
+          </a:lnRef>
+          <a:fillRef idx="1">
+            <a:schemeClr val="accent1"/>
+          </a:fillRef>
+          <a:effectRef idx="0">
+            <a:schemeClr val="accent1"/>
+          </a:effectRef>
+          <a:fontRef idx="minor">
+            <a:schemeClr val="lt1"/>
+          </a:fontRef>
+        </p:style>
+        <p:txBody>
+          <a:bodyPr rtlCol="0" anchor="ctr"/>
+          <a:lstStyle/>
+          <a:p>
+            <a:pPr algn="ctr"/>
+            <a:r>
+              <a:rPr lang="en-AU" sz="1400" b="1">
+                <a:solidFill>
+                  <a:srgbClr val="FFFFFF"/>
+                </a:solidFill>
+              </a:rPr>
+              <a:t>TARGET</a:t>
+            </a:r>
+          </a:p>
+        </p:txBody>
+      </p:sp>
+    </p:spTree>
+    <p:extLst>
+      <p:ext uri="{BB962C8B-B14F-4D97-AF65-F5344CB8AC3E}">
+        <p14:creationId xmlns:p14="http://schemas.microsoft.com/office/powerpoint/2010/main" val="3990100487"/>
+      </p:ext>
+    </p:extLst>
+  </p:cSld>
+  <p:clrMapOvr>
+    <a:masterClrMapping/>
+  </p:clrMapOvr>
+</p:sld>
+</file>
+
+<file path=ppt/slides/slide7.xml><?xml version="1.0" encoding="utf-8"?>
+<p:sld xmlns:a="http://schemas.openxmlformats.org/drawingml/2006/main" xmlns:r="http://schemas.openxmlformats.org/officeDocument/2006/relationships" xmlns:p="http://schemas.openxmlformats.org/presentationml/2006/main">
+  <p:cSld>
+    <p:spTree>
+      <p:nvGrpSpPr>
+        <p:cNvPr id="1" name=""/>
+        <p:cNvGrpSpPr/>
+        <p:nvPr/>
+      </p:nvGrpSpPr>
+      <p:grpSpPr>
+        <a:xfrm>
+          <a:off x="0" y="0"/>
+          <a:ext cx="0" cy="0"/>
+          <a:chOff x="0" y="0"/>
+          <a:chExt cx="0" cy="0"/>
+        </a:xfrm>
+      </p:grpSpPr>
+      <p:sp>
+        <p:nvSpPr>
+          <p:cNvPr id="2" name="Heading">
+            <a:extLst>
+              <a:ext uri="{FF2B5EF4-FFF2-40B4-BE49-F238E27FC236}">
+                <a16:creationId xmlns:a16="http://schemas.microsoft.com/office/drawing/2014/main" id="{1398D14E-A56D-44E7-5A04-CE95696603DA}"/>
+              </a:ext>
+            </a:extLst>
+          </p:cNvPr>
+          <p:cNvSpPr txBox="1"/>
+          <p:nvPr/>
+        </p:nvSpPr>
+        <p:spPr>
+          <a:xfrm>
+            <a:off x="508000" y="304800"/>
+            <a:ext cx="11176000" cy="461665"/>
+          </a:xfrm>
+          <a:prstGeom prst="rect">
+            <a:avLst/>
+          </a:prstGeom>
+          <a:noFill/>
+        </p:spPr>
+        <p:txBody>
+          <a:bodyPr vert="horz" rtlCol="0">
+            <a:spAutoFit/>
+          </a:bodyPr>
+          <a:lstStyle/>
+          <a:p>
+            <a:r>
+              <a:rPr lang="en-AU" sz="2400" b="1">
+                <a:solidFill>
+                  <a:srgbClr val="282828"/>
+                </a:solidFill>
+              </a:rPr>
+              <a:t>Order: stack in the order you select</a:t>
+            </a:r>
+          </a:p>
+        </p:txBody>
+      </p:sp>
+      <p:sp>
+        <p:nvSpPr>
+          <p:cNvPr id="3" name="Instructions">
+            <a:extLst>
+              <a:ext uri="{FF2B5EF4-FFF2-40B4-BE49-F238E27FC236}">
+                <a16:creationId xmlns:a16="http://schemas.microsoft.com/office/drawing/2014/main" id="{C8EE3608-4CE2-562D-8088-D968301D579A}"/>
+              </a:ext>
+            </a:extLst>
+          </p:cNvPr>
+          <p:cNvSpPr txBox="1"/>
+          <p:nvPr/>
+        </p:nvSpPr>
+        <p:spPr>
+          <a:xfrm>
+            <a:off x="508000" y="762000"/>
+            <a:ext cx="11176000" cy="292388"/>
+          </a:xfrm>
+          <a:prstGeom prst="rect">
+            <a:avLst/>
+          </a:prstGeom>
+          <a:noFill/>
+        </p:spPr>
+        <p:txBody>
+          <a:bodyPr vert="horz" rtlCol="0">
+            <a:spAutoFit/>
+          </a:bodyPr>
+          <a:lstStyle/>
+          <a:p>
+            <a:r>
+              <a:rPr lang="en-AU" sz="1300">
+                <a:solidFill>
+                  <a:srgbClr val="7F7F7F"/>
+                </a:solidFill>
+              </a:rPr>
+              <a:t>Select Card 1, Ctrl+click Card 2 then Card 3 to add them, then click Order &gt; Stack. Card 1 ends on top.</a:t>
+            </a:r>
+          </a:p>
+        </p:txBody>
+      </p:sp>
+      <p:sp>
+        <p:nvSpPr>
+          <p:cNvPr id="4" name="Card1">
+            <a:extLst>
+              <a:ext uri="{FF2B5EF4-FFF2-40B4-BE49-F238E27FC236}">
+                <a16:creationId xmlns:a16="http://schemas.microsoft.com/office/drawing/2014/main" id="{CB7CA363-D6E5-9657-5A83-273401D7AFC6}"/>
+              </a:ext>
+            </a:extLst>
+          </p:cNvPr>
+          <p:cNvSpPr/>
+          <p:nvPr/>
+        </p:nvSpPr>
+        <p:spPr>
+          <a:xfrm>
+            <a:off x="1905000" y="2159000"/>
+            <a:ext cx="2794000" cy="2159000"/>
+          </a:xfrm>
+          <a:prstGeom prst="rect">
+            <a:avLst/>
+          </a:prstGeom>
+          <a:solidFill>
+            <a:srgbClr val="1F77B4"/>
+          </a:solidFill>
+          <a:ln w="19050" cap="flat" cmpd="sng" algn="ctr">
+            <a:noFill/>
+            <a:prstDash val="solid"/>
+            <a:miter lim="800000"/>
+          </a:ln>
+          <a:effectLst/>
+          <a:extLst>
+            <a:ext uri="{91240B29-F687-4F45-9708-019B960494DF}">
+              <a14:hiddenLine xmlns:a14="http://schemas.microsoft.com/office/drawing/2010/main" w="19050" cap="flat" cmpd="sng" algn="ctr">
+                <a:solidFill>
+                  <a:schemeClr val="accent1">
+                    <a:shade val="15000"/>
+                  </a:schemeClr>
+                </a:solidFill>
+                <a:prstDash val="solid"/>
+                <a:miter lim="800000"/>
+              </a14:hiddenLine>
+            </a:ext>
+          </a:extLst>
+        </p:spPr>
+        <p:style>
+          <a:lnRef idx="2">
+            <a:schemeClr val="accent1">
+              <a:shade val="15000"/>
+            </a:schemeClr>
+          </a:lnRef>
+          <a:fillRef idx="1">
+            <a:schemeClr val="accent1"/>
+          </a:fillRef>
+          <a:effectRef idx="0">
+            <a:schemeClr val="accent1"/>
+          </a:effectRef>
+          <a:fontRef idx="minor">
+            <a:schemeClr val="lt1"/>
+          </a:fontRef>
+        </p:style>
+        <p:txBody>
+          <a:bodyPr rtlCol="0" anchor="ctr"/>
+          <a:lstStyle/>
+          <a:p>
+            <a:pPr algn="ctr"/>
+            <a:r>
+              <a:rPr lang="en-AU" sz="1400" b="1">
+                <a:solidFill>
+                  <a:srgbClr val="FFFFFF"/>
+                </a:solidFill>
+              </a:rPr>
+              <a:t>Card 1</a:t>
+            </a:r>
+          </a:p>
+        </p:txBody>
+      </p:sp>
+      <p:sp>
+        <p:nvSpPr>
+          <p:cNvPr id="5" name="BarA">
+            <a:extLst>
+              <a:ext uri="{FF2B5EF4-FFF2-40B4-BE49-F238E27FC236}">
+                <a16:creationId xmlns:a16="http://schemas.microsoft.com/office/drawing/2014/main" id="{F5C760CF-5FD9-1813-0127-B4549E23619B}"/>
+              </a:ext>
+            </a:extLst>
+          </p:cNvPr>
+          <p:cNvSpPr/>
+          <p:nvPr/>
+        </p:nvSpPr>
+        <p:spPr>
+          <a:xfrm>
+            <a:off x="4191000" y="1778000"/>
+            <a:ext cx="508000" cy="3175000"/>
+          </a:xfrm>
+          <a:prstGeom prst="rect">
+            <a:avLst/>
+          </a:prstGeom>
+          <a:solidFill>
+            <a:srgbClr val="7F7F7F"/>
+          </a:solidFill>
+          <a:ln w="19050" cap="flat" cmpd="sng" algn="ctr">
+            <a:noFill/>
+            <a:prstDash val="solid"/>
+            <a:miter lim="800000"/>
+          </a:ln>
+          <a:effectLst/>
+          <a:extLst>
+            <a:ext uri="{91240B29-F687-4F45-9708-019B960494DF}">
+              <a14:hiddenLine xmlns:a14="http://schemas.microsoft.com/office/drawing/2010/main" w="19050" cap="flat" cmpd="sng" algn="ctr">
+                <a:solidFill>
+                  <a:schemeClr val="accent1">
+                    <a:shade val="15000"/>
+                  </a:schemeClr>
+                </a:solidFill>
+                <a:prstDash val="solid"/>
+                <a:miter lim="800000"/>
+              </a14:hiddenLine>
+            </a:ext>
+          </a:extLst>
+        </p:spPr>
+        <p:style>
+          <a:lnRef idx="2">
+            <a:schemeClr val="accent1">
+              <a:shade val="15000"/>
+            </a:schemeClr>
+          </a:lnRef>
+          <a:fillRef idx="1">
+            <a:schemeClr val="accent1"/>
+          </a:fillRef>
+          <a:effectRef idx="0">
+            <a:schemeClr val="accent1"/>
+          </a:effectRef>
+          <a:fontRef idx="minor">
+            <a:schemeClr val="lt1"/>
+          </a:fontRef>
+        </p:style>
+        <p:txBody>
+          <a:bodyPr rtlCol="0" anchor="ctr"/>
+          <a:lstStyle/>
+          <a:p>
+            <a:pPr algn="ctr"/>
+            <a:endParaRPr lang="en-AU" sz="1400" b="1">
+              <a:solidFill>
+                <a:srgbClr val="FFFFFF"/>
+              </a:solidFill>
+            </a:endParaRPr>
+          </a:p>
+        </p:txBody>
+      </p:sp>
+      <p:sp>
+        <p:nvSpPr>
+          <p:cNvPr id="6" name="Card2">
+            <a:extLst>
+              <a:ext uri="{FF2B5EF4-FFF2-40B4-BE49-F238E27FC236}">
+                <a16:creationId xmlns:a16="http://schemas.microsoft.com/office/drawing/2014/main" id="{267FFB33-A492-18CE-ACB9-808BBA01E624}"/>
+              </a:ext>
+            </a:extLst>
+          </p:cNvPr>
+          <p:cNvSpPr/>
+          <p:nvPr/>
+        </p:nvSpPr>
+        <p:spPr>
+          <a:xfrm>
+            <a:off x="4318000" y="2667000"/>
+            <a:ext cx="2794000" cy="2159000"/>
+          </a:xfrm>
+          <a:prstGeom prst="rect">
+            <a:avLst/>
+          </a:prstGeom>
+          <a:solidFill>
+            <a:srgbClr val="FF7F0E"/>
+          </a:solidFill>
+          <a:ln w="19050" cap="flat" cmpd="sng" algn="ctr">
+            <a:noFill/>
+            <a:prstDash val="solid"/>
+            <a:miter lim="800000"/>
+          </a:ln>
+          <a:effectLst/>
+          <a:extLst>
+            <a:ext uri="{91240B29-F687-4F45-9708-019B960494DF}">
+              <a14:hiddenLine xmlns:a14="http://schemas.microsoft.com/office/drawing/2010/main" w="19050" cap="flat" cmpd="sng" algn="ctr">
+                <a:solidFill>
+                  <a:schemeClr val="accent1">
+                    <a:shade val="15000"/>
+                  </a:schemeClr>
+                </a:solidFill>
+                <a:prstDash val="solid"/>
+                <a:miter lim="800000"/>
+              </a14:hiddenLine>
+            </a:ext>
+          </a:extLst>
+        </p:spPr>
+        <p:style>
+          <a:lnRef idx="2">
+            <a:schemeClr val="accent1">
+              <a:shade val="15000"/>
+            </a:schemeClr>
+          </a:lnRef>
+          <a:fillRef idx="1">
+            <a:schemeClr val="accent1"/>
+          </a:fillRef>
+          <a:effectRef idx="0">
+            <a:schemeClr val="accent1"/>
+          </a:effectRef>
+          <a:fontRef idx="minor">
+            <a:schemeClr val="lt1"/>
+          </a:fontRef>
+        </p:style>
+        <p:txBody>
+          <a:bodyPr rtlCol="0" anchor="ctr"/>
+          <a:lstStyle/>
+          <a:p>
+            <a:pPr algn="ctr"/>
+            <a:r>
+              <a:rPr lang="en-AU" sz="1400" b="1">
+                <a:solidFill>
+                  <a:srgbClr val="FFFFFF"/>
+                </a:solidFill>
+              </a:rPr>
+              <a:t>Card 2</a:t>
+            </a:r>
+          </a:p>
+        </p:txBody>
+      </p:sp>
+      <p:sp>
+        <p:nvSpPr>
+          <p:cNvPr id="7" name="BarB">
+            <a:extLst>
+              <a:ext uri="{FF2B5EF4-FFF2-40B4-BE49-F238E27FC236}">
+                <a16:creationId xmlns:a16="http://schemas.microsoft.com/office/drawing/2014/main" id="{E391356F-C6F3-29EE-E143-6A2BD7EED902}"/>
+              </a:ext>
+            </a:extLst>
+          </p:cNvPr>
+          <p:cNvSpPr/>
+          <p:nvPr/>
+        </p:nvSpPr>
+        <p:spPr>
+          <a:xfrm>
+            <a:off x="6604000" y="1778000"/>
+            <a:ext cx="508000" cy="3175000"/>
+          </a:xfrm>
+          <a:prstGeom prst="rect">
+            <a:avLst/>
+          </a:prstGeom>
+          <a:solidFill>
+            <a:srgbClr val="7F7F7F"/>
+          </a:solidFill>
+          <a:ln w="19050" cap="flat" cmpd="sng" algn="ctr">
+            <a:noFill/>
+            <a:prstDash val="solid"/>
+            <a:miter lim="800000"/>
+          </a:ln>
+          <a:effectLst/>
+          <a:extLst>
+            <a:ext uri="{91240B29-F687-4F45-9708-019B960494DF}">
+              <a14:hiddenLine xmlns:a14="http://schemas.microsoft.com/office/drawing/2010/main" w="19050" cap="flat" cmpd="sng" algn="ctr">
+                <a:solidFill>
+                  <a:schemeClr val="accent1">
+                    <a:shade val="15000"/>
+                  </a:schemeClr>
+                </a:solidFill>
+                <a:prstDash val="solid"/>
+                <a:miter lim="800000"/>
+              </a14:hiddenLine>
+            </a:ext>
+          </a:extLst>
+        </p:spPr>
+        <p:style>
+          <a:lnRef idx="2">
+            <a:schemeClr val="accent1">
+              <a:shade val="15000"/>
+            </a:schemeClr>
+          </a:lnRef>
+          <a:fillRef idx="1">
+            <a:schemeClr val="accent1"/>
+          </a:fillRef>
+          <a:effectRef idx="0">
+            <a:schemeClr val="accent1"/>
+          </a:effectRef>
+          <a:fontRef idx="minor">
+            <a:schemeClr val="lt1"/>
+          </a:fontRef>
+        </p:style>
+        <p:txBody>
+          <a:bodyPr rtlCol="0" anchor="ctr"/>
+          <a:lstStyle/>
+          <a:p>
+            <a:pPr algn="ctr"/>
+            <a:endParaRPr lang="en-AU" sz="1400" b="1">
+              <a:solidFill>
+                <a:srgbClr val="FFFFFF"/>
+              </a:solidFill>
+            </a:endParaRPr>
+          </a:p>
+        </p:txBody>
+      </p:sp>
+      <p:sp>
+        <p:nvSpPr>
+          <p:cNvPr id="8" name="Card3">
+            <a:extLst>
+              <a:ext uri="{FF2B5EF4-FFF2-40B4-BE49-F238E27FC236}">
+                <a16:creationId xmlns:a16="http://schemas.microsoft.com/office/drawing/2014/main" id="{CD709D99-51D7-365B-3786-1C3747A64EF5}"/>
+              </a:ext>
+            </a:extLst>
+          </p:cNvPr>
+          <p:cNvSpPr/>
+          <p:nvPr/>
+        </p:nvSpPr>
+        <p:spPr>
+          <a:xfrm>
+            <a:off x="6731000" y="2159000"/>
+            <a:ext cx="2794000" cy="2159000"/>
+          </a:xfrm>
+          <a:prstGeom prst="rect">
+            <a:avLst/>
+          </a:prstGeom>
+          <a:solidFill>
+            <a:srgbClr val="2CA02C"/>
+          </a:solidFill>
+          <a:ln w="19050" cap="flat" cmpd="sng" algn="ctr">
+            <a:noFill/>
+            <a:prstDash val="solid"/>
+            <a:miter lim="800000"/>
+          </a:ln>
+          <a:effectLst/>
+          <a:extLst>
+            <a:ext uri="{91240B29-F687-4F45-9708-019B960494DF}">
+              <a14:hiddenLine xmlns:a14="http://schemas.microsoft.com/office/drawing/2010/main" w="19050" cap="flat" cmpd="sng" algn="ctr">
+                <a:solidFill>
+                  <a:schemeClr val="accent1">
+                    <a:shade val="15000"/>
+                  </a:schemeClr>
+                </a:solidFill>
+                <a:prstDash val="solid"/>
+                <a:miter lim="800000"/>
+              </a14:hiddenLine>
+            </a:ext>
+          </a:extLst>
+        </p:spPr>
+        <p:style>
+          <a:lnRef idx="2">
+            <a:schemeClr val="accent1">
+              <a:shade val="15000"/>
+            </a:schemeClr>
+          </a:lnRef>
+          <a:fillRef idx="1">
+            <a:schemeClr val="accent1"/>
+          </a:fillRef>
+          <a:effectRef idx="0">
+            <a:schemeClr val="accent1"/>
+          </a:effectRef>
+          <a:fontRef idx="minor">
+            <a:schemeClr val="lt1"/>
+          </a:fontRef>
+        </p:style>
+        <p:txBody>
+          <a:bodyPr rtlCol="0" anchor="ctr"/>
+          <a:lstStyle/>
+          <a:p>
+            <a:pPr algn="ctr"/>
+            <a:r>
+              <a:rPr lang="en-AU" sz="1400" b="1">
+                <a:solidFill>
+                  <a:srgbClr val="FFFFFF"/>
+                </a:solidFill>
+              </a:rPr>
+              <a:t>Card 3</a:t>
+            </a:r>
+          </a:p>
+        </p:txBody>
+      </p:sp>
+      <p:sp>
+        <p:nvSpPr>
+          <p:cNvPr id="9" name="TextBox 8">
+            <a:extLst>
+              <a:ext uri="{FF2B5EF4-FFF2-40B4-BE49-F238E27FC236}">
+                <a16:creationId xmlns:a16="http://schemas.microsoft.com/office/drawing/2014/main" id="{2D233EC4-D647-E09F-7F28-EE7258D214C7}"/>
+              </a:ext>
+            </a:extLst>
+          </p:cNvPr>
+          <p:cNvSpPr txBox="1"/>
+          <p:nvPr/>
+        </p:nvSpPr>
+        <p:spPr>
+          <a:xfrm>
+            <a:off x="508000" y="5334000"/>
+            <a:ext cx="11176000" cy="646331"/>
+          </a:xfrm>
+          <a:prstGeom prst="rect">
+            <a:avLst/>
+          </a:prstGeom>
+          <a:noFill/>
+        </p:spPr>
+        <p:txBody>
+          <a:bodyPr vert="horz" rtlCol="0">
+            <a:spAutoFit/>
+          </a:bodyPr>
+          <a:lstStyle/>
+          <a:p>
+            <a:r>
+              <a:rPr lang="en-AU" sz="1200">
+                <a:solidFill>
+                  <a:srgbClr val="7F7F7F"/>
+                </a:solidFill>
+              </a:rPr>
+              <a:t>The two grey bars are not in the selection, and they must come out on exactly the layers they went in on - one behind Card 2, one behind Card 3. That is the difference from Bring to front, which would drag all three cards over the top of them. Now click Order &gt; Reverse to flip the pile, then select the cards in a different order and click Stack again.</a:t>
+            </a:r>
+          </a:p>
+        </p:txBody>
+      </p:sp>
+    </p:spTree>
+    <p:extLst>
+      <p:ext uri="{BB962C8B-B14F-4D97-AF65-F5344CB8AC3E}">
+        <p14:creationId xmlns:p14="http://schemas.microsoft.com/office/powerpoint/2010/main" val="2025905167"/>
       </p:ext>
     </p:extLst>
   </p:cSld>
@@ -6584,7 +8370,7 @@
           <p:cNvPr id="2" name="Heading">
             <a:extLst>
               <a:ext uri="{FF2B5EF4-FFF2-40B4-BE49-F238E27FC236}">
-                <a16:creationId xmlns:a16="http://schemas.microsoft.com/office/drawing/2014/main" id="{57A178A9-93E0-E5AD-8F5C-98455761654E}"/>
+                <a16:creationId xmlns:a16="http://schemas.microsoft.com/office/drawing/2014/main" id="{F7B76C2A-6AC0-C443-536C-CDD8D63DE143}"/>
               </a:ext>
             </a:extLst>
           </p:cNvPr>
@@ -6613,7 +8399,7 @@
                   <a:srgbClr val="282828"/>
                 </a:solidFill>
               </a:rPr>
-              <a:t>Align the text, not the box</a:t>
+              <a:t>Match size with a margin</a:t>
             </a:r>
           </a:p>
         </p:txBody>
@@ -6623,7 +8409,7 @@
           <p:cNvPr id="3" name="Instructions">
             <a:extLst>
               <a:ext uri="{FF2B5EF4-FFF2-40B4-BE49-F238E27FC236}">
-                <a16:creationId xmlns:a16="http://schemas.microsoft.com/office/drawing/2014/main" id="{44393E24-9AE5-C303-AF1F-6DCB09EB526B}"/>
+                <a16:creationId xmlns:a16="http://schemas.microsoft.com/office/drawing/2014/main" id="{BB4F1250-DF89-598B-50F2-6AFB942F947A}"/>
               </a:ext>
             </a:extLst>
           </p:cNvPr>
@@ -6652,17 +8438,17 @@
                   <a:srgbClr val="7F7F7F"/>
                 </a:solidFill>
               </a:rPr>
-              <a:t>All three frames already start at the same x. Select them and Align &gt; Left with Measure = Text bounds.</a:t>
-            </a:r>
-          </a:p>
-        </p:txBody>
-      </p:sp>
-      <p:sp>
-        <p:nvSpPr>
-          <p:cNvPr id="4" name="Text0">
-            <a:extLst>
-              <a:ext uri="{FF2B5EF4-FFF2-40B4-BE49-F238E27FC236}">
-                <a16:creationId xmlns:a16="http://schemas.microsoft.com/office/drawing/2014/main" id="{D1749478-28B0-A850-E396-1F3AFC710665}"/>
+              <a:t>Type 10 in Margin (pt) and set Apply margin = All the same. Select the three shapes, Ctrl+click TARGET last, then click Match size &gt; Both.</a:t>
+            </a:r>
+          </a:p>
+        </p:txBody>
+      </p:sp>
+      <p:sp>
+        <p:nvSpPr>
+          <p:cNvPr id="4" name="Step1">
+            <a:extLst>
+              <a:ext uri="{FF2B5EF4-FFF2-40B4-BE49-F238E27FC236}">
+                <a16:creationId xmlns:a16="http://schemas.microsoft.com/office/drawing/2014/main" id="{37570710-C687-0A46-ACD5-D4C0925D8E6A}"/>
               </a:ext>
             </a:extLst>
           </p:cNvPr>
@@ -6671,20 +8457,34 @@
         </p:nvSpPr>
         <p:spPr>
           <a:xfrm>
-            <a:off x="3175000" y="2159000"/>
-            <a:ext cx="5334000" cy="762000"/>
-          </a:xfrm>
-          <a:prstGeom prst="roundRect">
+            <a:off x="1397000" y="2286000"/>
+            <a:ext cx="1016000" cy="1651000"/>
+          </a:xfrm>
+          <a:prstGeom prst="rect">
             <a:avLst/>
           </a:prstGeom>
           <a:solidFill>
-            <a:srgbClr val="EBEBF0"/>
+            <a:srgbClr val="1F77B4"/>
           </a:solidFill>
-          <a:ln>
-            <a:solidFill>
-              <a:srgbClr val="7F7F7F"/>
-            </a:solidFill>
+          <a:ln w="19050" cap="flat" cmpd="sng" algn="ctr">
+            <a:noFill/>
+            <a:prstDash val="solid"/>
+            <a:miter lim="800000"/>
           </a:ln>
+          <a:effectLst/>
+          <a:extLst>
+            <a:ext uri="{91240B29-F687-4F45-9708-019B960494DF}">
+              <a14:hiddenLine xmlns:a14="http://schemas.microsoft.com/office/drawing/2010/main" w="19050" cap="flat" cmpd="sng" algn="ctr">
+                <a:solidFill>
+                  <a:schemeClr val="accent1">
+                    <a:shade val="15000"/>
+                  </a:schemeClr>
+                </a:solidFill>
+                <a:prstDash val="solid"/>
+                <a:miter lim="800000"/>
+              </a14:hiddenLine>
+            </a:ext>
+          </a:extLst>
         </p:spPr>
         <p:style>
           <a:lnRef idx="2">
@@ -6706,23 +8506,24 @@
           <a:bodyPr rtlCol="0" anchor="ctr"/>
           <a:lstStyle/>
           <a:p>
-            <a:r>
-              <a:rPr lang="en-AU" sz="1600">
-                <a:solidFill>
-                  <a:srgbClr val="282828"/>
+            <a:pPr algn="ctr"/>
+            <a:r>
+              <a:rPr lang="en-AU" sz="1400" b="1">
+                <a:solidFill>
+                  <a:srgbClr val="FFFFFF"/>
                 </a:solidFill>
               </a:rPr>
-              <a:t>left-aligned text</a:t>
-            </a:r>
-          </a:p>
-        </p:txBody>
-      </p:sp>
-      <p:sp>
-        <p:nvSpPr>
-          <p:cNvPr id="5" name="Text1">
-            <a:extLst>
-              <a:ext uri="{FF2B5EF4-FFF2-40B4-BE49-F238E27FC236}">
-                <a16:creationId xmlns:a16="http://schemas.microsoft.com/office/drawing/2014/main" id="{6B9340F3-09C2-854E-CF00-993F4B7C61E2}"/>
+              <a:t>1st</a:t>
+            </a:r>
+          </a:p>
+        </p:txBody>
+      </p:sp>
+      <p:sp>
+        <p:nvSpPr>
+          <p:cNvPr id="5" name="Step2">
+            <a:extLst>
+              <a:ext uri="{FF2B5EF4-FFF2-40B4-BE49-F238E27FC236}">
+                <a16:creationId xmlns:a16="http://schemas.microsoft.com/office/drawing/2014/main" id="{B3348D26-AD66-C66B-2643-3A2E091F42BA}"/>
               </a:ext>
             </a:extLst>
           </p:cNvPr>
@@ -6731,20 +8532,34 @@
         </p:nvSpPr>
         <p:spPr>
           <a:xfrm>
-            <a:off x="3175000" y="3302000"/>
-            <a:ext cx="5334000" cy="762000"/>
-          </a:xfrm>
-          <a:prstGeom prst="roundRect">
+            <a:off x="3048000" y="2794000"/>
+            <a:ext cx="2032000" cy="762000"/>
+          </a:xfrm>
+          <a:prstGeom prst="rect">
             <a:avLst/>
           </a:prstGeom>
           <a:solidFill>
-            <a:srgbClr val="EBEBF0"/>
+            <a:srgbClr val="2CA02C"/>
           </a:solidFill>
-          <a:ln>
-            <a:solidFill>
-              <a:srgbClr val="7F7F7F"/>
-            </a:solidFill>
+          <a:ln w="19050" cap="flat" cmpd="sng" algn="ctr">
+            <a:noFill/>
+            <a:prstDash val="solid"/>
+            <a:miter lim="800000"/>
           </a:ln>
+          <a:effectLst/>
+          <a:extLst>
+            <a:ext uri="{91240B29-F687-4F45-9708-019B960494DF}">
+              <a14:hiddenLine xmlns:a14="http://schemas.microsoft.com/office/drawing/2010/main" w="19050" cap="flat" cmpd="sng" algn="ctr">
+                <a:solidFill>
+                  <a:schemeClr val="accent1">
+                    <a:shade val="15000"/>
+                  </a:schemeClr>
+                </a:solidFill>
+                <a:prstDash val="solid"/>
+                <a:miter lim="800000"/>
+              </a14:hiddenLine>
+            </a:ext>
+          </a:extLst>
         </p:spPr>
         <p:style>
           <a:lnRef idx="2">
@@ -6768,22 +8583,22 @@
           <a:p>
             <a:pPr algn="ctr"/>
             <a:r>
-              <a:rPr lang="en-AU" sz="1600">
-                <a:solidFill>
-                  <a:srgbClr val="282828"/>
+              <a:rPr lang="en-AU" sz="1400" b="1">
+                <a:solidFill>
+                  <a:srgbClr val="FFFFFF"/>
                 </a:solidFill>
               </a:rPr>
-              <a:t>centred text</a:t>
-            </a:r>
-          </a:p>
-        </p:txBody>
-      </p:sp>
-      <p:sp>
-        <p:nvSpPr>
-          <p:cNvPr id="6" name="Text2">
-            <a:extLst>
-              <a:ext uri="{FF2B5EF4-FFF2-40B4-BE49-F238E27FC236}">
-                <a16:creationId xmlns:a16="http://schemas.microsoft.com/office/drawing/2014/main" id="{CF1367B0-581D-4DF3-D663-2F05CB7AD22D}"/>
+              <a:t>2nd</a:t>
+            </a:r>
+          </a:p>
+        </p:txBody>
+      </p:sp>
+      <p:sp>
+        <p:nvSpPr>
+          <p:cNvPr id="6" name="Step3">
+            <a:extLst>
+              <a:ext uri="{FF2B5EF4-FFF2-40B4-BE49-F238E27FC236}">
+                <a16:creationId xmlns:a16="http://schemas.microsoft.com/office/drawing/2014/main" id="{9C51DEC2-56FD-4EC7-BF36-73B4CFB0AFF6}"/>
               </a:ext>
             </a:extLst>
           </p:cNvPr>
@@ -6792,20 +8607,34 @@
         </p:nvSpPr>
         <p:spPr>
           <a:xfrm>
-            <a:off x="3175000" y="4445000"/>
-            <a:ext cx="5334000" cy="762000"/>
-          </a:xfrm>
-          <a:prstGeom prst="roundRect">
+            <a:off x="1651000" y="4445000"/>
+            <a:ext cx="1397000" cy="1143000"/>
+          </a:xfrm>
+          <a:prstGeom prst="rect">
             <a:avLst/>
           </a:prstGeom>
           <a:solidFill>
-            <a:srgbClr val="EBEBF0"/>
+            <a:srgbClr val="9467BD"/>
           </a:solidFill>
-          <a:ln>
-            <a:solidFill>
-              <a:srgbClr val="7F7F7F"/>
-            </a:solidFill>
+          <a:ln w="19050" cap="flat" cmpd="sng" algn="ctr">
+            <a:noFill/>
+            <a:prstDash val="solid"/>
+            <a:miter lim="800000"/>
           </a:ln>
+          <a:effectLst/>
+          <a:extLst>
+            <a:ext uri="{91240B29-F687-4F45-9708-019B960494DF}">
+              <a14:hiddenLine xmlns:a14="http://schemas.microsoft.com/office/drawing/2010/main" w="19050" cap="flat" cmpd="sng" algn="ctr">
+                <a:solidFill>
+                  <a:schemeClr val="accent1">
+                    <a:shade val="15000"/>
+                  </a:schemeClr>
+                </a:solidFill>
+                <a:prstDash val="solid"/>
+                <a:miter lim="800000"/>
+              </a14:hiddenLine>
+            </a:ext>
+          </a:extLst>
         </p:spPr>
         <p:style>
           <a:lnRef idx="2">
@@ -6827,24 +8656,99 @@
           <a:bodyPr rtlCol="0" anchor="ctr"/>
           <a:lstStyle/>
           <a:p>
-            <a:pPr algn="r"/>
-            <a:r>
-              <a:rPr lang="en-AU" sz="1600">
-                <a:solidFill>
-                  <a:srgbClr val="282828"/>
+            <a:pPr algn="ctr"/>
+            <a:r>
+              <a:rPr lang="en-AU" sz="1400" b="1">
+                <a:solidFill>
+                  <a:srgbClr val="FFFFFF"/>
                 </a:solidFill>
               </a:rPr>
-              <a:t>right-aligned text</a:t>
-            </a:r>
-          </a:p>
-        </p:txBody>
-      </p:sp>
-      <p:sp>
-        <p:nvSpPr>
-          <p:cNvPr id="7" name="TextBox 6">
-            <a:extLst>
-              <a:ext uri="{FF2B5EF4-FFF2-40B4-BE49-F238E27FC236}">
-                <a16:creationId xmlns:a16="http://schemas.microsoft.com/office/drawing/2014/main" id="{45A9860F-E010-E907-1E90-114C6BD38C89}"/>
+              <a:t>3rd</a:t>
+            </a:r>
+          </a:p>
+        </p:txBody>
+      </p:sp>
+      <p:sp>
+        <p:nvSpPr>
+          <p:cNvPr id="7" name="MarginTarget">
+            <a:extLst>
+              <a:ext uri="{FF2B5EF4-FFF2-40B4-BE49-F238E27FC236}">
+                <a16:creationId xmlns:a16="http://schemas.microsoft.com/office/drawing/2014/main" id="{007B3F54-FF11-5C61-DDAE-EBAF8977058C}"/>
+              </a:ext>
+            </a:extLst>
+          </p:cNvPr>
+          <p:cNvSpPr/>
+          <p:nvPr/>
+        </p:nvSpPr>
+        <p:spPr>
+          <a:xfrm>
+            <a:off x="7620000" y="2794000"/>
+            <a:ext cx="2794000" cy="1778000"/>
+          </a:xfrm>
+          <a:prstGeom prst="rect">
+            <a:avLst/>
+          </a:prstGeom>
+          <a:solidFill>
+            <a:srgbClr val="D62728"/>
+          </a:solidFill>
+          <a:ln w="19050" cap="flat" cmpd="sng" algn="ctr">
+            <a:noFill/>
+            <a:prstDash val="solid"/>
+            <a:miter lim="800000"/>
+          </a:ln>
+          <a:effectLst/>
+          <a:extLst>
+            <a:ext uri="{91240B29-F687-4F45-9708-019B960494DF}">
+              <a14:hiddenLine xmlns:a14="http://schemas.microsoft.com/office/drawing/2010/main" w="19050" cap="flat" cmpd="sng" algn="ctr">
+                <a:solidFill>
+                  <a:schemeClr val="accent1">
+                    <a:shade val="15000"/>
+                  </a:schemeClr>
+                </a:solidFill>
+                <a:prstDash val="solid"/>
+                <a:miter lim="800000"/>
+              </a14:hiddenLine>
+            </a:ext>
+          </a:extLst>
+        </p:spPr>
+        <p:style>
+          <a:lnRef idx="2">
+            <a:schemeClr val="accent1">
+              <a:shade val="15000"/>
+            </a:schemeClr>
+          </a:lnRef>
+          <a:fillRef idx="1">
+            <a:schemeClr val="accent1"/>
+          </a:fillRef>
+          <a:effectRef idx="0">
+            <a:schemeClr val="accent1"/>
+          </a:effectRef>
+          <a:fontRef idx="minor">
+            <a:schemeClr val="lt1"/>
+          </a:fontRef>
+        </p:style>
+        <p:txBody>
+          <a:bodyPr rtlCol="0" anchor="ctr"/>
+          <a:lstStyle/>
+          <a:p>
+            <a:pPr algn="ctr"/>
+            <a:r>
+              <a:rPr lang="en-AU" sz="1400" b="1">
+                <a:solidFill>
+                  <a:srgbClr val="FFFFFF"/>
+                </a:solidFill>
+              </a:rPr>
+              <a:t>TARGET</a:t>
+            </a:r>
+          </a:p>
+        </p:txBody>
+      </p:sp>
+      <p:sp>
+        <p:nvSpPr>
+          <p:cNvPr id="8" name="TextBox 7">
+            <a:extLst>
+              <a:ext uri="{FF2B5EF4-FFF2-40B4-BE49-F238E27FC236}">
+                <a16:creationId xmlns:a16="http://schemas.microsoft.com/office/drawing/2014/main" id="{8E559FD5-D32F-22DA-1D30-439234FB6071}"/>
               </a:ext>
             </a:extLst>
           </p:cNvPr>
@@ -6854,7 +8758,7 @@
         <p:spPr>
           <a:xfrm>
             <a:off x="508000" y="5715000"/>
-            <a:ext cx="11176000" cy="276999"/>
+            <a:ext cx="11176000" cy="646331"/>
           </a:xfrm>
           <a:prstGeom prst="rect">
             <a:avLst/>
@@ -6873,7 +8777,7 @@
                   <a:srgbClr val="7F7F7F"/>
                 </a:solidFill>
               </a:rPr>
-              <a:t>The frames are identical, so frame mode does nothing. Text bounds moves each box so the text itself lines up.</a:t>
+              <a:t>The margin is measured per side, so a margin of 10 takes 20 off each dimension and leaves a 10pt border showing all round. Now click AlignPro undo, set Apply margin to Cascade, select the shapes again in the same order and click Match size &gt; Both: the shapes tier along the order you selected in, and the one you selected first ends smallest.</a:t>
             </a:r>
           </a:p>
         </p:txBody>
@@ -6881,7 +8785,7 @@
     </p:spTree>
     <p:extLst>
       <p:ext uri="{BB962C8B-B14F-4D97-AF65-F5344CB8AC3E}">
-        <p14:creationId xmlns:p14="http://schemas.microsoft.com/office/powerpoint/2010/main" val="1656065125"/>
+        <p14:creationId xmlns:p14="http://schemas.microsoft.com/office/powerpoint/2010/main" val="2962695768"/>
       </p:ext>
     </p:extLst>
   </p:cSld>
@@ -6913,7 +8817,7 @@
           <p:cNvPr id="2" name="Heading">
             <a:extLst>
               <a:ext uri="{FF2B5EF4-FFF2-40B4-BE49-F238E27FC236}">
-                <a16:creationId xmlns:a16="http://schemas.microsoft.com/office/drawing/2014/main" id="{9E40F54B-D6DB-5428-DF8B-0454CC668BA3}"/>
+                <a16:creationId xmlns:a16="http://schemas.microsoft.com/office/drawing/2014/main" id="{7DD68A99-96E2-663F-417C-8989F25750F3}"/>
               </a:ext>
             </a:extLst>
           </p:cNvPr>
@@ -6942,7 +8846,7 @@
                   <a:srgbClr val="282828"/>
                 </a:solidFill>
               </a:rPr>
-              <a:t>Tidy a scatter into a grid</a:t>
+              <a:t>Concentric rings</a:t>
             </a:r>
           </a:p>
         </p:txBody>
@@ -6952,7 +8856,7 @@
           <p:cNvPr id="3" name="Instructions">
             <a:extLst>
               <a:ext uri="{FF2B5EF4-FFF2-40B4-BE49-F238E27FC236}">
-                <a16:creationId xmlns:a16="http://schemas.microsoft.com/office/drawing/2014/main" id="{44EF995E-ED54-CAA7-0F85-72A5E12778E6}"/>
+                <a16:creationId xmlns:a16="http://schemas.microsoft.com/office/drawing/2014/main" id="{95E44C0A-0C77-F1C0-62BA-CAF07CC5CF7E}"/>
               </a:ext>
             </a:extLst>
           </p:cNvPr>
@@ -6962,7 +8866,7 @@
         <p:spPr>
           <a:xfrm>
             <a:off x="508000" y="762000"/>
-            <a:ext cx="11176000" cy="292388"/>
+            <a:ext cx="11176000" cy="492443"/>
           </a:xfrm>
           <a:prstGeom prst="rect">
             <a:avLst/>
@@ -6981,17 +8885,17 @@
                   <a:srgbClr val="7F7F7F"/>
                 </a:solidFill>
               </a:rPr>
-              <a:t>Select all nine circles. Leave Columns blank for a near-square grid, or type 3. Then Arrange &gt; Grid.</a:t>
-            </a:r>
-          </a:p>
-        </p:txBody>
-      </p:sp>
-      <p:sp>
-        <p:nvSpPr>
-          <p:cNvPr id="4" name="Dot0">
-            <a:extLst>
-              <a:ext uri="{FF2B5EF4-FFF2-40B4-BE49-F238E27FC236}">
-                <a16:creationId xmlns:a16="http://schemas.microsoft.com/office/drawing/2014/main" id="{B7ED2806-E1AB-560D-BED7-3ACA5FED421C}"/>
+              <a:t>Select 1st, then Ctrl+click 2nd, 3rd, 4th and 5th in turn. Click Align &gt; Centre, then Align &gt; Middle. Type 12 in Margin (pt), set Apply margin = Cascade, switch From centre on, then click Match size &gt; Both. Finish by clicking Order &gt; Stack.</a:t>
+            </a:r>
+          </a:p>
+        </p:txBody>
+      </p:sp>
+      <p:sp>
+        <p:nvSpPr>
+          <p:cNvPr id="4" name="Ring1">
+            <a:extLst>
+              <a:ext uri="{FF2B5EF4-FFF2-40B4-BE49-F238E27FC236}">
+                <a16:creationId xmlns:a16="http://schemas.microsoft.com/office/drawing/2014/main" id="{38E6BE97-7491-5ADD-55B3-AAF8F30C265B}"/>
               </a:ext>
             </a:extLst>
           </p:cNvPr>
@@ -7000,10 +8904,10 @@
         </p:nvSpPr>
         <p:spPr>
           <a:xfrm>
-            <a:off x="1524000" y="1905000"/>
-            <a:ext cx="1016000" cy="1016000"/>
-          </a:xfrm>
-          <a:prstGeom prst="ellipse">
+            <a:off x="1143000" y="2286000"/>
+            <a:ext cx="1905000" cy="1397000"/>
+          </a:xfrm>
+          <a:prstGeom prst="rect">
             <a:avLst/>
           </a:prstGeom>
           <a:solidFill>
@@ -7056,17 +8960,17 @@
                   <a:srgbClr val="FFFFFF"/>
                 </a:solidFill>
               </a:rPr>
-              <a:t>1</a:t>
-            </a:r>
-          </a:p>
-        </p:txBody>
-      </p:sp>
-      <p:sp>
-        <p:nvSpPr>
-          <p:cNvPr id="5" name="Dot1">
-            <a:extLst>
-              <a:ext uri="{FF2B5EF4-FFF2-40B4-BE49-F238E27FC236}">
-                <a16:creationId xmlns:a16="http://schemas.microsoft.com/office/drawing/2014/main" id="{D656A9ED-F875-0C01-BBB9-142F33C32EAB}"/>
+              <a:t>1st</a:t>
+            </a:r>
+          </a:p>
+        </p:txBody>
+      </p:sp>
+      <p:sp>
+        <p:nvSpPr>
+          <p:cNvPr id="5" name="Ring2">
+            <a:extLst>
+              <a:ext uri="{FF2B5EF4-FFF2-40B4-BE49-F238E27FC236}">
+                <a16:creationId xmlns:a16="http://schemas.microsoft.com/office/drawing/2014/main" id="{35DFBC33-8D66-C0CF-C5CF-922D59BE974F}"/>
               </a:ext>
             </a:extLst>
           </p:cNvPr>
@@ -7075,14 +8979,14 @@
         </p:nvSpPr>
         <p:spPr>
           <a:xfrm>
-            <a:off x="5461000" y="2413000"/>
-            <a:ext cx="1016000" cy="1016000"/>
-          </a:xfrm>
-          <a:prstGeom prst="ellipse">
+            <a:off x="3683000" y="3810000"/>
+            <a:ext cx="2159000" cy="1524000"/>
+          </a:xfrm>
+          <a:prstGeom prst="rect">
             <a:avLst/>
           </a:prstGeom>
           <a:solidFill>
-            <a:srgbClr val="1F77B4"/>
+            <a:srgbClr val="2CA02C"/>
           </a:solidFill>
           <a:ln w="19050" cap="flat" cmpd="sng" algn="ctr">
             <a:noFill/>
@@ -7131,17 +9035,17 @@
                   <a:srgbClr val="FFFFFF"/>
                 </a:solidFill>
               </a:rPr>
-              <a:t>2</a:t>
-            </a:r>
-          </a:p>
-        </p:txBody>
-      </p:sp>
-      <p:sp>
-        <p:nvSpPr>
-          <p:cNvPr id="6" name="Dot2">
-            <a:extLst>
-              <a:ext uri="{FF2B5EF4-FFF2-40B4-BE49-F238E27FC236}">
-                <a16:creationId xmlns:a16="http://schemas.microsoft.com/office/drawing/2014/main" id="{AD773CA7-0D1A-E891-B3BD-83A3C9C399B5}"/>
+              <a:t>2nd</a:t>
+            </a:r>
+          </a:p>
+        </p:txBody>
+      </p:sp>
+      <p:sp>
+        <p:nvSpPr>
+          <p:cNvPr id="6" name="Ring3">
+            <a:extLst>
+              <a:ext uri="{FF2B5EF4-FFF2-40B4-BE49-F238E27FC236}">
+                <a16:creationId xmlns:a16="http://schemas.microsoft.com/office/drawing/2014/main" id="{FC5AC96C-EE37-57D0-0683-FDD32DD119EB}"/>
               </a:ext>
             </a:extLst>
           </p:cNvPr>
@@ -7150,14 +9054,14 @@
         </p:nvSpPr>
         <p:spPr>
           <a:xfrm>
-            <a:off x="9652000" y="1778000"/>
-            <a:ext cx="1016000" cy="1016000"/>
-          </a:xfrm>
-          <a:prstGeom prst="ellipse">
+            <a:off x="6350000" y="2159000"/>
+            <a:ext cx="2032000" cy="1651000"/>
+          </a:xfrm>
+          <a:prstGeom prst="rect">
             <a:avLst/>
           </a:prstGeom>
           <a:solidFill>
-            <a:srgbClr val="1F77B4"/>
+            <a:srgbClr val="FF7F0E"/>
           </a:solidFill>
           <a:ln w="19050" cap="flat" cmpd="sng" algn="ctr">
             <a:noFill/>
@@ -7206,17 +9110,17 @@
                   <a:srgbClr val="FFFFFF"/>
                 </a:solidFill>
               </a:rPr>
-              <a:t>3</a:t>
-            </a:r>
-          </a:p>
-        </p:txBody>
-      </p:sp>
-      <p:sp>
-        <p:nvSpPr>
-          <p:cNvPr id="7" name="Dot3">
-            <a:extLst>
-              <a:ext uri="{FF2B5EF4-FFF2-40B4-BE49-F238E27FC236}">
-                <a16:creationId xmlns:a16="http://schemas.microsoft.com/office/drawing/2014/main" id="{BA1C48D4-847C-6050-564E-7E90F5D22556}"/>
+              <a:t>3rd</a:t>
+            </a:r>
+          </a:p>
+        </p:txBody>
+      </p:sp>
+      <p:sp>
+        <p:nvSpPr>
+          <p:cNvPr id="7" name="Ring4">
+            <a:extLst>
+              <a:ext uri="{FF2B5EF4-FFF2-40B4-BE49-F238E27FC236}">
+                <a16:creationId xmlns:a16="http://schemas.microsoft.com/office/drawing/2014/main" id="{8CD54E30-E5A3-8442-4EB5-9663BF4DF044}"/>
               </a:ext>
             </a:extLst>
           </p:cNvPr>
@@ -7225,14 +9129,14 @@
         </p:nvSpPr>
         <p:spPr>
           <a:xfrm>
-            <a:off x="2413000" y="3810000"/>
-            <a:ext cx="1016000" cy="1016000"/>
-          </a:xfrm>
-          <a:prstGeom prst="ellipse">
+            <a:off x="8890000" y="4064000"/>
+            <a:ext cx="2286000" cy="1397000"/>
+          </a:xfrm>
+          <a:prstGeom prst="rect">
             <a:avLst/>
           </a:prstGeom>
           <a:solidFill>
-            <a:srgbClr val="1F77B4"/>
+            <a:srgbClr val="9467BD"/>
           </a:solidFill>
           <a:ln w="19050" cap="flat" cmpd="sng" algn="ctr">
             <a:noFill/>
@@ -7281,17 +9185,17 @@
                   <a:srgbClr val="FFFFFF"/>
                 </a:solidFill>
               </a:rPr>
-              <a:t>4</a:t>
-            </a:r>
-          </a:p>
-        </p:txBody>
-      </p:sp>
-      <p:sp>
-        <p:nvSpPr>
-          <p:cNvPr id="8" name="Dot4">
-            <a:extLst>
-              <a:ext uri="{FF2B5EF4-FFF2-40B4-BE49-F238E27FC236}">
-                <a16:creationId xmlns:a16="http://schemas.microsoft.com/office/drawing/2014/main" id="{A8A23775-29C3-95EE-4708-FFDC638851DE}"/>
+              <a:t>4th</a:t>
+            </a:r>
+          </a:p>
+        </p:txBody>
+      </p:sp>
+      <p:sp>
+        <p:nvSpPr>
+          <p:cNvPr id="8" name="Ring5">
+            <a:extLst>
+              <a:ext uri="{FF2B5EF4-FFF2-40B4-BE49-F238E27FC236}">
+                <a16:creationId xmlns:a16="http://schemas.microsoft.com/office/drawing/2014/main" id="{7E3888ED-E506-BA90-EBBB-8138F3605A95}"/>
               </a:ext>
             </a:extLst>
           </p:cNvPr>
@@ -7300,14 +9204,14 @@
         </p:nvSpPr>
         <p:spPr>
           <a:xfrm>
-            <a:off x="6604000" y="3302000"/>
-            <a:ext cx="1016000" cy="1016000"/>
-          </a:xfrm>
-          <a:prstGeom prst="ellipse">
+            <a:off x="4826000" y="1905000"/>
+            <a:ext cx="2540000" cy="1778000"/>
+          </a:xfrm>
+          <a:prstGeom prst="rect">
             <a:avLst/>
           </a:prstGeom>
           <a:solidFill>
-            <a:srgbClr val="1F77B4"/>
+            <a:srgbClr val="D62728"/>
           </a:solidFill>
           <a:ln w="19050" cap="flat" cmpd="sng" algn="ctr">
             <a:noFill/>
@@ -7356,317 +9260,17 @@
                   <a:srgbClr val="FFFFFF"/>
                 </a:solidFill>
               </a:rPr>
-              <a:t>5</a:t>
-            </a:r>
-          </a:p>
-        </p:txBody>
-      </p:sp>
-      <p:sp>
-        <p:nvSpPr>
-          <p:cNvPr id="9" name="Dot5">
-            <a:extLst>
-              <a:ext uri="{FF2B5EF4-FFF2-40B4-BE49-F238E27FC236}">
-                <a16:creationId xmlns:a16="http://schemas.microsoft.com/office/drawing/2014/main" id="{FF5C571E-3CB8-C2A0-A6BA-05EF60BFDDE7}"/>
-              </a:ext>
-            </a:extLst>
-          </p:cNvPr>
-          <p:cNvSpPr/>
-          <p:nvPr/>
-        </p:nvSpPr>
-        <p:spPr>
-          <a:xfrm>
-            <a:off x="8763000" y="4191000"/>
-            <a:ext cx="1016000" cy="1016000"/>
-          </a:xfrm>
-          <a:prstGeom prst="ellipse">
-            <a:avLst/>
-          </a:prstGeom>
-          <a:solidFill>
-            <a:srgbClr val="1F77B4"/>
-          </a:solidFill>
-          <a:ln w="19050" cap="flat" cmpd="sng" algn="ctr">
-            <a:noFill/>
-            <a:prstDash val="solid"/>
-            <a:miter lim="800000"/>
-          </a:ln>
-          <a:effectLst/>
-          <a:extLst>
-            <a:ext uri="{91240B29-F687-4F45-9708-019B960494DF}">
-              <a14:hiddenLine xmlns:a14="http://schemas.microsoft.com/office/drawing/2010/main" w="19050" cap="flat" cmpd="sng" algn="ctr">
-                <a:solidFill>
-                  <a:schemeClr val="accent1">
-                    <a:shade val="15000"/>
-                  </a:schemeClr>
-                </a:solidFill>
-                <a:prstDash val="solid"/>
-                <a:miter lim="800000"/>
-              </a14:hiddenLine>
-            </a:ext>
-          </a:extLst>
-        </p:spPr>
-        <p:style>
-          <a:lnRef idx="2">
-            <a:schemeClr val="accent1">
-              <a:shade val="15000"/>
-            </a:schemeClr>
-          </a:lnRef>
-          <a:fillRef idx="1">
-            <a:schemeClr val="accent1"/>
-          </a:fillRef>
-          <a:effectRef idx="0">
-            <a:schemeClr val="accent1"/>
-          </a:effectRef>
-          <a:fontRef idx="minor">
-            <a:schemeClr val="lt1"/>
-          </a:fontRef>
-        </p:style>
-        <p:txBody>
-          <a:bodyPr rtlCol="0" anchor="ctr"/>
-          <a:lstStyle/>
-          <a:p>
-            <a:pPr algn="ctr"/>
-            <a:r>
-              <a:rPr lang="en-AU" sz="1400" b="1">
-                <a:solidFill>
-                  <a:srgbClr val="FFFFFF"/>
-                </a:solidFill>
-              </a:rPr>
-              <a:t>6</a:t>
-            </a:r>
-          </a:p>
-        </p:txBody>
-      </p:sp>
-      <p:sp>
-        <p:nvSpPr>
-          <p:cNvPr id="10" name="Dot6">
-            <a:extLst>
-              <a:ext uri="{FF2B5EF4-FFF2-40B4-BE49-F238E27FC236}">
-                <a16:creationId xmlns:a16="http://schemas.microsoft.com/office/drawing/2014/main" id="{1FE93385-64E2-B482-2363-0986CF485A13}"/>
-              </a:ext>
-            </a:extLst>
-          </p:cNvPr>
-          <p:cNvSpPr/>
-          <p:nvPr/>
-        </p:nvSpPr>
-        <p:spPr>
-          <a:xfrm>
-            <a:off x="1397000" y="5334000"/>
-            <a:ext cx="1016000" cy="1016000"/>
-          </a:xfrm>
-          <a:prstGeom prst="ellipse">
-            <a:avLst/>
-          </a:prstGeom>
-          <a:solidFill>
-            <a:srgbClr val="1F77B4"/>
-          </a:solidFill>
-          <a:ln w="19050" cap="flat" cmpd="sng" algn="ctr">
-            <a:noFill/>
-            <a:prstDash val="solid"/>
-            <a:miter lim="800000"/>
-          </a:ln>
-          <a:effectLst/>
-          <a:extLst>
-            <a:ext uri="{91240B29-F687-4F45-9708-019B960494DF}">
-              <a14:hiddenLine xmlns:a14="http://schemas.microsoft.com/office/drawing/2010/main" w="19050" cap="flat" cmpd="sng" algn="ctr">
-                <a:solidFill>
-                  <a:schemeClr val="accent1">
-                    <a:shade val="15000"/>
-                  </a:schemeClr>
-                </a:solidFill>
-                <a:prstDash val="solid"/>
-                <a:miter lim="800000"/>
-              </a14:hiddenLine>
-            </a:ext>
-          </a:extLst>
-        </p:spPr>
-        <p:style>
-          <a:lnRef idx="2">
-            <a:schemeClr val="accent1">
-              <a:shade val="15000"/>
-            </a:schemeClr>
-          </a:lnRef>
-          <a:fillRef idx="1">
-            <a:schemeClr val="accent1"/>
-          </a:fillRef>
-          <a:effectRef idx="0">
-            <a:schemeClr val="accent1"/>
-          </a:effectRef>
-          <a:fontRef idx="minor">
-            <a:schemeClr val="lt1"/>
-          </a:fontRef>
-        </p:style>
-        <p:txBody>
-          <a:bodyPr rtlCol="0" anchor="ctr"/>
-          <a:lstStyle/>
-          <a:p>
-            <a:pPr algn="ctr"/>
-            <a:r>
-              <a:rPr lang="en-AU" sz="1400" b="1">
-                <a:solidFill>
-                  <a:srgbClr val="FFFFFF"/>
-                </a:solidFill>
-              </a:rPr>
-              <a:t>7</a:t>
-            </a:r>
-          </a:p>
-        </p:txBody>
-      </p:sp>
-      <p:sp>
-        <p:nvSpPr>
-          <p:cNvPr id="11" name="Dot7">
-            <a:extLst>
-              <a:ext uri="{FF2B5EF4-FFF2-40B4-BE49-F238E27FC236}">
-                <a16:creationId xmlns:a16="http://schemas.microsoft.com/office/drawing/2014/main" id="{4D164454-80A3-0E7B-5A28-0CB3A23292E6}"/>
-              </a:ext>
-            </a:extLst>
-          </p:cNvPr>
-          <p:cNvSpPr/>
-          <p:nvPr/>
-        </p:nvSpPr>
-        <p:spPr>
-          <a:xfrm>
-            <a:off x="5080000" y="5080000"/>
-            <a:ext cx="1016000" cy="1016000"/>
-          </a:xfrm>
-          <a:prstGeom prst="ellipse">
-            <a:avLst/>
-          </a:prstGeom>
-          <a:solidFill>
-            <a:srgbClr val="1F77B4"/>
-          </a:solidFill>
-          <a:ln w="19050" cap="flat" cmpd="sng" algn="ctr">
-            <a:noFill/>
-            <a:prstDash val="solid"/>
-            <a:miter lim="800000"/>
-          </a:ln>
-          <a:effectLst/>
-          <a:extLst>
-            <a:ext uri="{91240B29-F687-4F45-9708-019B960494DF}">
-              <a14:hiddenLine xmlns:a14="http://schemas.microsoft.com/office/drawing/2010/main" w="19050" cap="flat" cmpd="sng" algn="ctr">
-                <a:solidFill>
-                  <a:schemeClr val="accent1">
-                    <a:shade val="15000"/>
-                  </a:schemeClr>
-                </a:solidFill>
-                <a:prstDash val="solid"/>
-                <a:miter lim="800000"/>
-              </a14:hiddenLine>
-            </a:ext>
-          </a:extLst>
-        </p:spPr>
-        <p:style>
-          <a:lnRef idx="2">
-            <a:schemeClr val="accent1">
-              <a:shade val="15000"/>
-            </a:schemeClr>
-          </a:lnRef>
-          <a:fillRef idx="1">
-            <a:schemeClr val="accent1"/>
-          </a:fillRef>
-          <a:effectRef idx="0">
-            <a:schemeClr val="accent1"/>
-          </a:effectRef>
-          <a:fontRef idx="minor">
-            <a:schemeClr val="lt1"/>
-          </a:fontRef>
-        </p:style>
-        <p:txBody>
-          <a:bodyPr rtlCol="0" anchor="ctr"/>
-          <a:lstStyle/>
-          <a:p>
-            <a:pPr algn="ctr"/>
-            <a:r>
-              <a:rPr lang="en-AU" sz="1400" b="1">
-                <a:solidFill>
-                  <a:srgbClr val="FFFFFF"/>
-                </a:solidFill>
-              </a:rPr>
-              <a:t>8</a:t>
-            </a:r>
-          </a:p>
-        </p:txBody>
-      </p:sp>
-      <p:sp>
-        <p:nvSpPr>
-          <p:cNvPr id="12" name="Dot8">
-            <a:extLst>
-              <a:ext uri="{FF2B5EF4-FFF2-40B4-BE49-F238E27FC236}">
-                <a16:creationId xmlns:a16="http://schemas.microsoft.com/office/drawing/2014/main" id="{56ECB557-0FD7-4B24-45D8-5A3976DEF250}"/>
-              </a:ext>
-            </a:extLst>
-          </p:cNvPr>
-          <p:cNvSpPr/>
-          <p:nvPr/>
-        </p:nvSpPr>
-        <p:spPr>
-          <a:xfrm>
-            <a:off x="10160000" y="5461000"/>
-            <a:ext cx="1016000" cy="1016000"/>
-          </a:xfrm>
-          <a:prstGeom prst="ellipse">
-            <a:avLst/>
-          </a:prstGeom>
-          <a:solidFill>
-            <a:srgbClr val="1F77B4"/>
-          </a:solidFill>
-          <a:ln w="19050" cap="flat" cmpd="sng" algn="ctr">
-            <a:noFill/>
-            <a:prstDash val="solid"/>
-            <a:miter lim="800000"/>
-          </a:ln>
-          <a:effectLst/>
-          <a:extLst>
-            <a:ext uri="{91240B29-F687-4F45-9708-019B960494DF}">
-              <a14:hiddenLine xmlns:a14="http://schemas.microsoft.com/office/drawing/2010/main" w="19050" cap="flat" cmpd="sng" algn="ctr">
-                <a:solidFill>
-                  <a:schemeClr val="accent1">
-                    <a:shade val="15000"/>
-                  </a:schemeClr>
-                </a:solidFill>
-                <a:prstDash val="solid"/>
-                <a:miter lim="800000"/>
-              </a14:hiddenLine>
-            </a:ext>
-          </a:extLst>
-        </p:spPr>
-        <p:style>
-          <a:lnRef idx="2">
-            <a:schemeClr val="accent1">
-              <a:shade val="15000"/>
-            </a:schemeClr>
-          </a:lnRef>
-          <a:fillRef idx="1">
-            <a:schemeClr val="accent1"/>
-          </a:fillRef>
-          <a:effectRef idx="0">
-            <a:schemeClr val="accent1"/>
-          </a:effectRef>
-          <a:fontRef idx="minor">
-            <a:schemeClr val="lt1"/>
-          </a:fontRef>
-        </p:style>
-        <p:txBody>
-          <a:bodyPr rtlCol="0" anchor="ctr"/>
-          <a:lstStyle/>
-          <a:p>
-            <a:pPr algn="ctr"/>
-            <a:r>
-              <a:rPr lang="en-AU" sz="1400" b="1">
-                <a:solidFill>
-                  <a:srgbClr val="FFFFFF"/>
-                </a:solidFill>
-              </a:rPr>
-              <a:t>9</a:t>
-            </a:r>
-          </a:p>
-        </p:txBody>
-      </p:sp>
-      <p:sp>
-        <p:nvSpPr>
-          <p:cNvPr id="13" name="TextBox 12">
-            <a:extLst>
-              <a:ext uri="{FF2B5EF4-FFF2-40B4-BE49-F238E27FC236}">
-                <a16:creationId xmlns:a16="http://schemas.microsoft.com/office/drawing/2014/main" id="{190565D4-1799-E730-14BC-90BA59AEA719}"/>
+              <a:t>5th</a:t>
+            </a:r>
+          </a:p>
+        </p:txBody>
+      </p:sp>
+      <p:sp>
+        <p:nvSpPr>
+          <p:cNvPr id="9" name="TextBox 8">
+            <a:extLst>
+              <a:ext uri="{FF2B5EF4-FFF2-40B4-BE49-F238E27FC236}">
+                <a16:creationId xmlns:a16="http://schemas.microsoft.com/office/drawing/2014/main" id="{7607AAE3-93DF-5F44-A5EB-12CD056CE89D}"/>
               </a:ext>
             </a:extLst>
           </p:cNvPr>
@@ -7675,8 +9279,8 @@
         </p:nvSpPr>
         <p:spPr>
           <a:xfrm>
-            <a:off x="508000" y="6350000"/>
-            <a:ext cx="11176000" cy="276999"/>
+            <a:off x="508000" y="5715000"/>
+            <a:ext cx="11176000" cy="646331"/>
           </a:xfrm>
           <a:prstGeom prst="rect">
             <a:avLst/>
@@ -7695,7 +9299,7 @@
                   <a:srgbClr val="7F7F7F"/>
                 </a:solidFill>
               </a:rPr>
-              <a:t>Grid only repositions - sizes are left alone, so it is safe on groups too. Set Reference = Slide to spread across the whole slide.</a:t>
+              <a:t>Aligning centres and middles stacks them on one point; From centre then holds that point while the cascade tiers the sizes, so the borders come out even. The last step matters: the cascade makes the shape you selected first the smallest, and Order &gt; Stack puts that same shape on top - so the rings are visible instead of hidden inside the largest. Keep the selection between steps and the order carries through all three commands.</a:t>
             </a:r>
           </a:p>
         </p:txBody>
@@ -7703,7 +9307,7 @@
     </p:spTree>
     <p:extLst>
       <p:ext uri="{BB962C8B-B14F-4D97-AF65-F5344CB8AC3E}">
-        <p14:creationId xmlns:p14="http://schemas.microsoft.com/office/powerpoint/2010/main" val="3966504401"/>
+        <p14:creationId xmlns:p14="http://schemas.microsoft.com/office/powerpoint/2010/main" val="910029166"/>
       </p:ext>
     </p:extLst>
   </p:cSld>

--- a/sample/AlignPro-Sample.pptx
+++ b/sample/AlignPro-Sample.pptx
@@ -141,7 +141,7 @@
           <p:cNvPr id="2" name="Title 1">
             <a:extLst>
               <a:ext uri="{FF2B5EF4-FFF2-40B4-BE49-F238E27FC236}">
-                <a16:creationId xmlns:a16="http://schemas.microsoft.com/office/drawing/2014/main" id="{D63B2A2A-5350-0C46-869F-497276FBA0BF}"/>
+                <a16:creationId xmlns:a16="http://schemas.microsoft.com/office/drawing/2014/main" id="{74AB4495-D507-0591-B4C9-2073DC216154}"/>
               </a:ext>
             </a:extLst>
           </p:cNvPr>
@@ -179,7 +179,7 @@
           <p:cNvPr id="3" name="Subtitle 2">
             <a:extLst>
               <a:ext uri="{FF2B5EF4-FFF2-40B4-BE49-F238E27FC236}">
-                <a16:creationId xmlns:a16="http://schemas.microsoft.com/office/drawing/2014/main" id="{9332EF90-71B2-C140-1CFC-25F351C01980}"/>
+                <a16:creationId xmlns:a16="http://schemas.microsoft.com/office/drawing/2014/main" id="{21E2AD5C-2676-E556-CAE6-5EA3A893EFCD}"/>
               </a:ext>
             </a:extLst>
           </p:cNvPr>
@@ -250,7 +250,7 @@
           <p:cNvPr id="4" name="Date Placeholder 3">
             <a:extLst>
               <a:ext uri="{FF2B5EF4-FFF2-40B4-BE49-F238E27FC236}">
-                <a16:creationId xmlns:a16="http://schemas.microsoft.com/office/drawing/2014/main" id="{DB29BDA0-5FA9-B1EB-5B79-60C793644F37}"/>
+                <a16:creationId xmlns:a16="http://schemas.microsoft.com/office/drawing/2014/main" id="{F36B022E-A4C8-9BD4-C785-A64B0A62A2F7}"/>
               </a:ext>
             </a:extLst>
           </p:cNvPr>
@@ -266,9 +266,9 @@
           <a:bodyPr/>
           <a:lstStyle/>
           <a:p>
-            <a:fld id="{EF1B7D9C-A3FB-4C4C-AE95-809B57867B86}" type="datetimeFigureOut">
+            <a:fld id="{36420DFD-775E-4087-B95C-59938401E0DE}" type="datetimeFigureOut">
               <a:rPr lang="en-AU" smtClean="0"/>
-              <a:t>19/09/2026</a:t>
+              <a:t>21/09/2026</a:t>
             </a:fld>
             <a:endParaRPr lang="en-AU"/>
           </a:p>
@@ -279,7 +279,7 @@
           <p:cNvPr id="5" name="Footer Placeholder 4">
             <a:extLst>
               <a:ext uri="{FF2B5EF4-FFF2-40B4-BE49-F238E27FC236}">
-                <a16:creationId xmlns:a16="http://schemas.microsoft.com/office/drawing/2014/main" id="{6D8B82A9-3474-B8BC-8EA7-C81023F8EF0F}"/>
+                <a16:creationId xmlns:a16="http://schemas.microsoft.com/office/drawing/2014/main" id="{5992E8E7-7EEC-6B02-AE22-783B335D8B2A}"/>
               </a:ext>
             </a:extLst>
           </p:cNvPr>
@@ -304,7 +304,7 @@
           <p:cNvPr id="6" name="Slide Number Placeholder 5">
             <a:extLst>
               <a:ext uri="{FF2B5EF4-FFF2-40B4-BE49-F238E27FC236}">
-                <a16:creationId xmlns:a16="http://schemas.microsoft.com/office/drawing/2014/main" id="{C4BEAE6E-DB43-ABF5-4DFA-6C18B0FD3E3A}"/>
+                <a16:creationId xmlns:a16="http://schemas.microsoft.com/office/drawing/2014/main" id="{71EEBB54-87E5-821E-8A3F-EF15DCA7ECA8}"/>
               </a:ext>
             </a:extLst>
           </p:cNvPr>
@@ -320,7 +320,7 @@
           <a:bodyPr/>
           <a:lstStyle/>
           <a:p>
-            <a:fld id="{F6C2F819-6852-4071-A1FC-F07BE40F9F0E}" type="slidenum">
+            <a:fld id="{F543EE84-2D39-48D4-B172-A2319F73BD07}" type="slidenum">
               <a:rPr lang="en-AU" smtClean="0"/>
               <a:t>‹#›</a:t>
             </a:fld>
@@ -331,7 +331,7 @@
     </p:spTree>
     <p:extLst>
       <p:ext uri="{BB962C8B-B14F-4D97-AF65-F5344CB8AC3E}">
-        <p14:creationId xmlns:p14="http://schemas.microsoft.com/office/powerpoint/2010/main" val="2078619722"/>
+        <p14:creationId xmlns:p14="http://schemas.microsoft.com/office/powerpoint/2010/main" val="1189479094"/>
       </p:ext>
     </p:extLst>
   </p:cSld>
@@ -363,7 +363,7 @@
           <p:cNvPr id="2" name="Title 1">
             <a:extLst>
               <a:ext uri="{FF2B5EF4-FFF2-40B4-BE49-F238E27FC236}">
-                <a16:creationId xmlns:a16="http://schemas.microsoft.com/office/drawing/2014/main" id="{39C52838-02C6-F94B-D6A1-4571737873EE}"/>
+                <a16:creationId xmlns:a16="http://schemas.microsoft.com/office/drawing/2014/main" id="{38958A4A-42DA-2552-575C-F379E442CD1B}"/>
               </a:ext>
             </a:extLst>
           </p:cNvPr>
@@ -392,7 +392,7 @@
           <p:cNvPr id="3" name="Vertical Text Placeholder 2">
             <a:extLst>
               <a:ext uri="{FF2B5EF4-FFF2-40B4-BE49-F238E27FC236}">
-                <a16:creationId xmlns:a16="http://schemas.microsoft.com/office/drawing/2014/main" id="{D8D52578-789E-29B6-223E-8DFA9ABE766D}"/>
+                <a16:creationId xmlns:a16="http://schemas.microsoft.com/office/drawing/2014/main" id="{50AFB988-09A4-D425-0A10-C6DA0AC317C5}"/>
               </a:ext>
             </a:extLst>
           </p:cNvPr>
@@ -450,7 +450,7 @@
           <p:cNvPr id="4" name="Date Placeholder 3">
             <a:extLst>
               <a:ext uri="{FF2B5EF4-FFF2-40B4-BE49-F238E27FC236}">
-                <a16:creationId xmlns:a16="http://schemas.microsoft.com/office/drawing/2014/main" id="{C2CA8C41-DCD5-D2B2-64E0-FE053D4F4900}"/>
+                <a16:creationId xmlns:a16="http://schemas.microsoft.com/office/drawing/2014/main" id="{02FBB8B2-F88B-7A8E-9A51-EDB709094264}"/>
               </a:ext>
             </a:extLst>
           </p:cNvPr>
@@ -466,9 +466,9 @@
           <a:bodyPr/>
           <a:lstStyle/>
           <a:p>
-            <a:fld id="{EF1B7D9C-A3FB-4C4C-AE95-809B57867B86}" type="datetimeFigureOut">
+            <a:fld id="{36420DFD-775E-4087-B95C-59938401E0DE}" type="datetimeFigureOut">
               <a:rPr lang="en-AU" smtClean="0"/>
-              <a:t>19/09/2026</a:t>
+              <a:t>21/09/2026</a:t>
             </a:fld>
             <a:endParaRPr lang="en-AU"/>
           </a:p>
@@ -479,7 +479,7 @@
           <p:cNvPr id="5" name="Footer Placeholder 4">
             <a:extLst>
               <a:ext uri="{FF2B5EF4-FFF2-40B4-BE49-F238E27FC236}">
-                <a16:creationId xmlns:a16="http://schemas.microsoft.com/office/drawing/2014/main" id="{FC876212-7F42-9EFB-D8F7-B7CC2A3BEF93}"/>
+                <a16:creationId xmlns:a16="http://schemas.microsoft.com/office/drawing/2014/main" id="{FF3148A1-5863-5F39-AA86-FEE7CC674D4F}"/>
               </a:ext>
             </a:extLst>
           </p:cNvPr>
@@ -504,7 +504,7 @@
           <p:cNvPr id="6" name="Slide Number Placeholder 5">
             <a:extLst>
               <a:ext uri="{FF2B5EF4-FFF2-40B4-BE49-F238E27FC236}">
-                <a16:creationId xmlns:a16="http://schemas.microsoft.com/office/drawing/2014/main" id="{65BBDA61-14C0-8843-5689-F64FE210DF1D}"/>
+                <a16:creationId xmlns:a16="http://schemas.microsoft.com/office/drawing/2014/main" id="{84080FAF-39A3-E7B9-22CD-D135BCB1A823}"/>
               </a:ext>
             </a:extLst>
           </p:cNvPr>
@@ -520,7 +520,7 @@
           <a:bodyPr/>
           <a:lstStyle/>
           <a:p>
-            <a:fld id="{F6C2F819-6852-4071-A1FC-F07BE40F9F0E}" type="slidenum">
+            <a:fld id="{F543EE84-2D39-48D4-B172-A2319F73BD07}" type="slidenum">
               <a:rPr lang="en-AU" smtClean="0"/>
               <a:t>‹#›</a:t>
             </a:fld>
@@ -531,7 +531,7 @@
     </p:spTree>
     <p:extLst>
       <p:ext uri="{BB962C8B-B14F-4D97-AF65-F5344CB8AC3E}">
-        <p14:creationId xmlns:p14="http://schemas.microsoft.com/office/powerpoint/2010/main" val="1762031750"/>
+        <p14:creationId xmlns:p14="http://schemas.microsoft.com/office/powerpoint/2010/main" val="1108059973"/>
       </p:ext>
     </p:extLst>
   </p:cSld>
@@ -563,7 +563,7 @@
           <p:cNvPr id="2" name="Vertical Title 1">
             <a:extLst>
               <a:ext uri="{FF2B5EF4-FFF2-40B4-BE49-F238E27FC236}">
-                <a16:creationId xmlns:a16="http://schemas.microsoft.com/office/drawing/2014/main" id="{53BC8213-E688-BB8C-3518-FE790AAE63EE}"/>
+                <a16:creationId xmlns:a16="http://schemas.microsoft.com/office/drawing/2014/main" id="{C2C5C996-87C8-21E0-8C3B-CF0DEA75ACD5}"/>
               </a:ext>
             </a:extLst>
           </p:cNvPr>
@@ -597,7 +597,7 @@
           <p:cNvPr id="3" name="Vertical Text Placeholder 2">
             <a:extLst>
               <a:ext uri="{FF2B5EF4-FFF2-40B4-BE49-F238E27FC236}">
-                <a16:creationId xmlns:a16="http://schemas.microsoft.com/office/drawing/2014/main" id="{79886B73-6DF0-72E9-D624-03CBD11876EC}"/>
+                <a16:creationId xmlns:a16="http://schemas.microsoft.com/office/drawing/2014/main" id="{85581260-9B2C-0AF1-7739-D9B8997EB30B}"/>
               </a:ext>
             </a:extLst>
           </p:cNvPr>
@@ -660,7 +660,7 @@
           <p:cNvPr id="4" name="Date Placeholder 3">
             <a:extLst>
               <a:ext uri="{FF2B5EF4-FFF2-40B4-BE49-F238E27FC236}">
-                <a16:creationId xmlns:a16="http://schemas.microsoft.com/office/drawing/2014/main" id="{FA4138D5-84C6-EB23-D553-29060391B66A}"/>
+                <a16:creationId xmlns:a16="http://schemas.microsoft.com/office/drawing/2014/main" id="{20DF15CE-DB7F-C63D-0F50-66EBB8768066}"/>
               </a:ext>
             </a:extLst>
           </p:cNvPr>
@@ -676,9 +676,9 @@
           <a:bodyPr/>
           <a:lstStyle/>
           <a:p>
-            <a:fld id="{EF1B7D9C-A3FB-4C4C-AE95-809B57867B86}" type="datetimeFigureOut">
+            <a:fld id="{36420DFD-775E-4087-B95C-59938401E0DE}" type="datetimeFigureOut">
               <a:rPr lang="en-AU" smtClean="0"/>
-              <a:t>19/09/2026</a:t>
+              <a:t>21/09/2026</a:t>
             </a:fld>
             <a:endParaRPr lang="en-AU"/>
           </a:p>
@@ -689,7 +689,7 @@
           <p:cNvPr id="5" name="Footer Placeholder 4">
             <a:extLst>
               <a:ext uri="{FF2B5EF4-FFF2-40B4-BE49-F238E27FC236}">
-                <a16:creationId xmlns:a16="http://schemas.microsoft.com/office/drawing/2014/main" id="{5FC8EE78-D678-DB1A-54E1-FB6CE97AED39}"/>
+                <a16:creationId xmlns:a16="http://schemas.microsoft.com/office/drawing/2014/main" id="{318E82FE-253D-ECE2-7FAC-725F957990F5}"/>
               </a:ext>
             </a:extLst>
           </p:cNvPr>
@@ -714,7 +714,7 @@
           <p:cNvPr id="6" name="Slide Number Placeholder 5">
             <a:extLst>
               <a:ext uri="{FF2B5EF4-FFF2-40B4-BE49-F238E27FC236}">
-                <a16:creationId xmlns:a16="http://schemas.microsoft.com/office/drawing/2014/main" id="{D9771760-AD51-8909-66B3-75BEF84C0466}"/>
+                <a16:creationId xmlns:a16="http://schemas.microsoft.com/office/drawing/2014/main" id="{5CC52B8E-09DB-AB81-82BE-568E9273886A}"/>
               </a:ext>
             </a:extLst>
           </p:cNvPr>
@@ -730,7 +730,7 @@
           <a:bodyPr/>
           <a:lstStyle/>
           <a:p>
-            <a:fld id="{F6C2F819-6852-4071-A1FC-F07BE40F9F0E}" type="slidenum">
+            <a:fld id="{F543EE84-2D39-48D4-B172-A2319F73BD07}" type="slidenum">
               <a:rPr lang="en-AU" smtClean="0"/>
               <a:t>‹#›</a:t>
             </a:fld>
@@ -741,7 +741,7 @@
     </p:spTree>
     <p:extLst>
       <p:ext uri="{BB962C8B-B14F-4D97-AF65-F5344CB8AC3E}">
-        <p14:creationId xmlns:p14="http://schemas.microsoft.com/office/powerpoint/2010/main" val="2462073391"/>
+        <p14:creationId xmlns:p14="http://schemas.microsoft.com/office/powerpoint/2010/main" val="1458765222"/>
       </p:ext>
     </p:extLst>
   </p:cSld>
@@ -773,7 +773,7 @@
           <p:cNvPr id="2" name="Title 1">
             <a:extLst>
               <a:ext uri="{FF2B5EF4-FFF2-40B4-BE49-F238E27FC236}">
-                <a16:creationId xmlns:a16="http://schemas.microsoft.com/office/drawing/2014/main" id="{C93DD98A-C929-4AF2-9156-570B6D3F88AB}"/>
+                <a16:creationId xmlns:a16="http://schemas.microsoft.com/office/drawing/2014/main" id="{489E67C1-41CE-33AA-3C7E-DA616255834C}"/>
               </a:ext>
             </a:extLst>
           </p:cNvPr>
@@ -802,7 +802,7 @@
           <p:cNvPr id="3" name="Content Placeholder 2">
             <a:extLst>
               <a:ext uri="{FF2B5EF4-FFF2-40B4-BE49-F238E27FC236}">
-                <a16:creationId xmlns:a16="http://schemas.microsoft.com/office/drawing/2014/main" id="{31405816-D0B1-BB83-95EB-92D956D3A75C}"/>
+                <a16:creationId xmlns:a16="http://schemas.microsoft.com/office/drawing/2014/main" id="{35BCEBDF-6803-9B20-3477-95193A018190}"/>
               </a:ext>
             </a:extLst>
           </p:cNvPr>
@@ -860,7 +860,7 @@
           <p:cNvPr id="4" name="Date Placeholder 3">
             <a:extLst>
               <a:ext uri="{FF2B5EF4-FFF2-40B4-BE49-F238E27FC236}">
-                <a16:creationId xmlns:a16="http://schemas.microsoft.com/office/drawing/2014/main" id="{E8F15FF3-E945-B90A-F819-FCD6BFB756B4}"/>
+                <a16:creationId xmlns:a16="http://schemas.microsoft.com/office/drawing/2014/main" id="{76C06223-11BD-2018-C358-C72A2B00F07B}"/>
               </a:ext>
             </a:extLst>
           </p:cNvPr>
@@ -876,9 +876,9 @@
           <a:bodyPr/>
           <a:lstStyle/>
           <a:p>
-            <a:fld id="{EF1B7D9C-A3FB-4C4C-AE95-809B57867B86}" type="datetimeFigureOut">
+            <a:fld id="{36420DFD-775E-4087-B95C-59938401E0DE}" type="datetimeFigureOut">
               <a:rPr lang="en-AU" smtClean="0"/>
-              <a:t>19/09/2026</a:t>
+              <a:t>21/09/2026</a:t>
             </a:fld>
             <a:endParaRPr lang="en-AU"/>
           </a:p>
@@ -889,7 +889,7 @@
           <p:cNvPr id="5" name="Footer Placeholder 4">
             <a:extLst>
               <a:ext uri="{FF2B5EF4-FFF2-40B4-BE49-F238E27FC236}">
-                <a16:creationId xmlns:a16="http://schemas.microsoft.com/office/drawing/2014/main" id="{23752460-6C11-ED28-6965-8628646C86BA}"/>
+                <a16:creationId xmlns:a16="http://schemas.microsoft.com/office/drawing/2014/main" id="{C03B7F98-7FE5-5CCB-A804-96149D145409}"/>
               </a:ext>
             </a:extLst>
           </p:cNvPr>
@@ -914,7 +914,7 @@
           <p:cNvPr id="6" name="Slide Number Placeholder 5">
             <a:extLst>
               <a:ext uri="{FF2B5EF4-FFF2-40B4-BE49-F238E27FC236}">
-                <a16:creationId xmlns:a16="http://schemas.microsoft.com/office/drawing/2014/main" id="{4F1EDD37-6325-480A-BAB3-6A41D72E240B}"/>
+                <a16:creationId xmlns:a16="http://schemas.microsoft.com/office/drawing/2014/main" id="{5FDC52ED-3EE8-DAA8-28B2-643A1638A138}"/>
               </a:ext>
             </a:extLst>
           </p:cNvPr>
@@ -930,7 +930,7 @@
           <a:bodyPr/>
           <a:lstStyle/>
           <a:p>
-            <a:fld id="{F6C2F819-6852-4071-A1FC-F07BE40F9F0E}" type="slidenum">
+            <a:fld id="{F543EE84-2D39-48D4-B172-A2319F73BD07}" type="slidenum">
               <a:rPr lang="en-AU" smtClean="0"/>
               <a:t>‹#›</a:t>
             </a:fld>
@@ -941,7 +941,7 @@
     </p:spTree>
     <p:extLst>
       <p:ext uri="{BB962C8B-B14F-4D97-AF65-F5344CB8AC3E}">
-        <p14:creationId xmlns:p14="http://schemas.microsoft.com/office/powerpoint/2010/main" val="862175113"/>
+        <p14:creationId xmlns:p14="http://schemas.microsoft.com/office/powerpoint/2010/main" val="1068021846"/>
       </p:ext>
     </p:extLst>
   </p:cSld>
@@ -973,7 +973,7 @@
           <p:cNvPr id="2" name="Title 1">
             <a:extLst>
               <a:ext uri="{FF2B5EF4-FFF2-40B4-BE49-F238E27FC236}">
-                <a16:creationId xmlns:a16="http://schemas.microsoft.com/office/drawing/2014/main" id="{5E680730-DAEB-89B0-A482-2B56B6E0D526}"/>
+                <a16:creationId xmlns:a16="http://schemas.microsoft.com/office/drawing/2014/main" id="{2ADF165B-A8A4-EEBE-AA91-19C82A9A6289}"/>
               </a:ext>
             </a:extLst>
           </p:cNvPr>
@@ -1011,7 +1011,7 @@
           <p:cNvPr id="3" name="Text Placeholder 2">
             <a:extLst>
               <a:ext uri="{FF2B5EF4-FFF2-40B4-BE49-F238E27FC236}">
-                <a16:creationId xmlns:a16="http://schemas.microsoft.com/office/drawing/2014/main" id="{3D55EA3E-4421-98DB-5527-B6472ED7314E}"/>
+                <a16:creationId xmlns:a16="http://schemas.microsoft.com/office/drawing/2014/main" id="{D9EA7774-DDD2-D00C-A403-391C70B871C0}"/>
               </a:ext>
             </a:extLst>
           </p:cNvPr>
@@ -1136,7 +1136,7 @@
           <p:cNvPr id="4" name="Date Placeholder 3">
             <a:extLst>
               <a:ext uri="{FF2B5EF4-FFF2-40B4-BE49-F238E27FC236}">
-                <a16:creationId xmlns:a16="http://schemas.microsoft.com/office/drawing/2014/main" id="{87041EA9-99EF-59CB-B097-CEC211C204F6}"/>
+                <a16:creationId xmlns:a16="http://schemas.microsoft.com/office/drawing/2014/main" id="{9A053C88-3EBE-6A8C-B5B2-11BDDEA275E2}"/>
               </a:ext>
             </a:extLst>
           </p:cNvPr>
@@ -1152,9 +1152,9 @@
           <a:bodyPr/>
           <a:lstStyle/>
           <a:p>
-            <a:fld id="{EF1B7D9C-A3FB-4C4C-AE95-809B57867B86}" type="datetimeFigureOut">
+            <a:fld id="{36420DFD-775E-4087-B95C-59938401E0DE}" type="datetimeFigureOut">
               <a:rPr lang="en-AU" smtClean="0"/>
-              <a:t>19/09/2026</a:t>
+              <a:t>21/09/2026</a:t>
             </a:fld>
             <a:endParaRPr lang="en-AU"/>
           </a:p>
@@ -1165,7 +1165,7 @@
           <p:cNvPr id="5" name="Footer Placeholder 4">
             <a:extLst>
               <a:ext uri="{FF2B5EF4-FFF2-40B4-BE49-F238E27FC236}">
-                <a16:creationId xmlns:a16="http://schemas.microsoft.com/office/drawing/2014/main" id="{6F60653E-0C4E-EDD3-DA94-EE3F3E717A77}"/>
+                <a16:creationId xmlns:a16="http://schemas.microsoft.com/office/drawing/2014/main" id="{AD490C7E-16C9-E3B3-5FA4-D273A90BDCB2}"/>
               </a:ext>
             </a:extLst>
           </p:cNvPr>
@@ -1190,7 +1190,7 @@
           <p:cNvPr id="6" name="Slide Number Placeholder 5">
             <a:extLst>
               <a:ext uri="{FF2B5EF4-FFF2-40B4-BE49-F238E27FC236}">
-                <a16:creationId xmlns:a16="http://schemas.microsoft.com/office/drawing/2014/main" id="{4E2A757C-1E72-8A3D-D1D5-A9C236ACCA1D}"/>
+                <a16:creationId xmlns:a16="http://schemas.microsoft.com/office/drawing/2014/main" id="{5BFDB5A6-AEC9-6F44-5E39-2911A956E024}"/>
               </a:ext>
             </a:extLst>
           </p:cNvPr>
@@ -1206,7 +1206,7 @@
           <a:bodyPr/>
           <a:lstStyle/>
           <a:p>
-            <a:fld id="{F6C2F819-6852-4071-A1FC-F07BE40F9F0E}" type="slidenum">
+            <a:fld id="{F543EE84-2D39-48D4-B172-A2319F73BD07}" type="slidenum">
               <a:rPr lang="en-AU" smtClean="0"/>
               <a:t>‹#›</a:t>
             </a:fld>
@@ -1217,7 +1217,7 @@
     </p:spTree>
     <p:extLst>
       <p:ext uri="{BB962C8B-B14F-4D97-AF65-F5344CB8AC3E}">
-        <p14:creationId xmlns:p14="http://schemas.microsoft.com/office/powerpoint/2010/main" val="3032711792"/>
+        <p14:creationId xmlns:p14="http://schemas.microsoft.com/office/powerpoint/2010/main" val="1854299128"/>
       </p:ext>
     </p:extLst>
   </p:cSld>
@@ -1249,7 +1249,7 @@
           <p:cNvPr id="2" name="Title 1">
             <a:extLst>
               <a:ext uri="{FF2B5EF4-FFF2-40B4-BE49-F238E27FC236}">
-                <a16:creationId xmlns:a16="http://schemas.microsoft.com/office/drawing/2014/main" id="{85423338-8BC0-4E86-92F7-AC5D6A047854}"/>
+                <a16:creationId xmlns:a16="http://schemas.microsoft.com/office/drawing/2014/main" id="{DE06354B-B520-7A97-AF3E-D42A5E904874}"/>
               </a:ext>
             </a:extLst>
           </p:cNvPr>
@@ -1278,7 +1278,7 @@
           <p:cNvPr id="3" name="Content Placeholder 2">
             <a:extLst>
               <a:ext uri="{FF2B5EF4-FFF2-40B4-BE49-F238E27FC236}">
-                <a16:creationId xmlns:a16="http://schemas.microsoft.com/office/drawing/2014/main" id="{38ECBDD8-2741-67E2-FE3F-537CE9E867BA}"/>
+                <a16:creationId xmlns:a16="http://schemas.microsoft.com/office/drawing/2014/main" id="{73186E98-2A3A-D05F-496D-4BD7A7BD71DF}"/>
               </a:ext>
             </a:extLst>
           </p:cNvPr>
@@ -1341,7 +1341,7 @@
           <p:cNvPr id="4" name="Content Placeholder 3">
             <a:extLst>
               <a:ext uri="{FF2B5EF4-FFF2-40B4-BE49-F238E27FC236}">
-                <a16:creationId xmlns:a16="http://schemas.microsoft.com/office/drawing/2014/main" id="{E11B983E-A0F2-7A51-D348-4384E3A7C7D9}"/>
+                <a16:creationId xmlns:a16="http://schemas.microsoft.com/office/drawing/2014/main" id="{2663B52E-CB63-5005-33C6-2341DF5BA1EB}"/>
               </a:ext>
             </a:extLst>
           </p:cNvPr>
@@ -1404,7 +1404,7 @@
           <p:cNvPr id="5" name="Date Placeholder 4">
             <a:extLst>
               <a:ext uri="{FF2B5EF4-FFF2-40B4-BE49-F238E27FC236}">
-                <a16:creationId xmlns:a16="http://schemas.microsoft.com/office/drawing/2014/main" id="{3DE6CFA4-9A05-0161-6914-C752A1F8A687}"/>
+                <a16:creationId xmlns:a16="http://schemas.microsoft.com/office/drawing/2014/main" id="{EE05C6A3-D139-44DF-989A-C728BC38FCA0}"/>
               </a:ext>
             </a:extLst>
           </p:cNvPr>
@@ -1420,9 +1420,9 @@
           <a:bodyPr/>
           <a:lstStyle/>
           <a:p>
-            <a:fld id="{EF1B7D9C-A3FB-4C4C-AE95-809B57867B86}" type="datetimeFigureOut">
+            <a:fld id="{36420DFD-775E-4087-B95C-59938401E0DE}" type="datetimeFigureOut">
               <a:rPr lang="en-AU" smtClean="0"/>
-              <a:t>19/09/2026</a:t>
+              <a:t>21/09/2026</a:t>
             </a:fld>
             <a:endParaRPr lang="en-AU"/>
           </a:p>
@@ -1433,7 +1433,7 @@
           <p:cNvPr id="6" name="Footer Placeholder 5">
             <a:extLst>
               <a:ext uri="{FF2B5EF4-FFF2-40B4-BE49-F238E27FC236}">
-                <a16:creationId xmlns:a16="http://schemas.microsoft.com/office/drawing/2014/main" id="{40E3D68F-D2C4-3D6C-A754-25C9F2B99667}"/>
+                <a16:creationId xmlns:a16="http://schemas.microsoft.com/office/drawing/2014/main" id="{C0CA361D-49B7-177C-3696-014CE264F258}"/>
               </a:ext>
             </a:extLst>
           </p:cNvPr>
@@ -1458,7 +1458,7 @@
           <p:cNvPr id="7" name="Slide Number Placeholder 6">
             <a:extLst>
               <a:ext uri="{FF2B5EF4-FFF2-40B4-BE49-F238E27FC236}">
-                <a16:creationId xmlns:a16="http://schemas.microsoft.com/office/drawing/2014/main" id="{B4AD25EA-E5CC-6D2D-49C8-FFC7B51F1E6C}"/>
+                <a16:creationId xmlns:a16="http://schemas.microsoft.com/office/drawing/2014/main" id="{10C6D721-120D-C4AF-8A6A-3441ABC019B6}"/>
               </a:ext>
             </a:extLst>
           </p:cNvPr>
@@ -1474,7 +1474,7 @@
           <a:bodyPr/>
           <a:lstStyle/>
           <a:p>
-            <a:fld id="{F6C2F819-6852-4071-A1FC-F07BE40F9F0E}" type="slidenum">
+            <a:fld id="{F543EE84-2D39-48D4-B172-A2319F73BD07}" type="slidenum">
               <a:rPr lang="en-AU" smtClean="0"/>
               <a:t>‹#›</a:t>
             </a:fld>
@@ -1485,7 +1485,7 @@
     </p:spTree>
     <p:extLst>
       <p:ext uri="{BB962C8B-B14F-4D97-AF65-F5344CB8AC3E}">
-        <p14:creationId xmlns:p14="http://schemas.microsoft.com/office/powerpoint/2010/main" val="117373612"/>
+        <p14:creationId xmlns:p14="http://schemas.microsoft.com/office/powerpoint/2010/main" val="3505709347"/>
       </p:ext>
     </p:extLst>
   </p:cSld>
@@ -1517,7 +1517,7 @@
           <p:cNvPr id="2" name="Title 1">
             <a:extLst>
               <a:ext uri="{FF2B5EF4-FFF2-40B4-BE49-F238E27FC236}">
-                <a16:creationId xmlns:a16="http://schemas.microsoft.com/office/drawing/2014/main" id="{9AD8A4FA-C626-97BC-982D-839FF32536CD}"/>
+                <a16:creationId xmlns:a16="http://schemas.microsoft.com/office/drawing/2014/main" id="{CE2FCF76-3837-9719-7CC9-AF792D118C14}"/>
               </a:ext>
             </a:extLst>
           </p:cNvPr>
@@ -1551,7 +1551,7 @@
           <p:cNvPr id="3" name="Text Placeholder 2">
             <a:extLst>
               <a:ext uri="{FF2B5EF4-FFF2-40B4-BE49-F238E27FC236}">
-                <a16:creationId xmlns:a16="http://schemas.microsoft.com/office/drawing/2014/main" id="{0D6F6BD2-69AF-785C-1F37-9C1998B9E9B5}"/>
+                <a16:creationId xmlns:a16="http://schemas.microsoft.com/office/drawing/2014/main" id="{D4294D37-B4F1-CEEB-1F4E-2E4ECE0C414C}"/>
               </a:ext>
             </a:extLst>
           </p:cNvPr>
@@ -1622,7 +1622,7 @@
           <p:cNvPr id="4" name="Content Placeholder 3">
             <a:extLst>
               <a:ext uri="{FF2B5EF4-FFF2-40B4-BE49-F238E27FC236}">
-                <a16:creationId xmlns:a16="http://schemas.microsoft.com/office/drawing/2014/main" id="{03317624-2645-A4DE-54CF-7628ED8F6B11}"/>
+                <a16:creationId xmlns:a16="http://schemas.microsoft.com/office/drawing/2014/main" id="{EDB8E8C3-883F-1976-0B41-8C4C87273A5F}"/>
               </a:ext>
             </a:extLst>
           </p:cNvPr>
@@ -1685,7 +1685,7 @@
           <p:cNvPr id="5" name="Text Placeholder 4">
             <a:extLst>
               <a:ext uri="{FF2B5EF4-FFF2-40B4-BE49-F238E27FC236}">
-                <a16:creationId xmlns:a16="http://schemas.microsoft.com/office/drawing/2014/main" id="{D4F43B60-BAFA-C197-CD68-1E527FE659A6}"/>
+                <a16:creationId xmlns:a16="http://schemas.microsoft.com/office/drawing/2014/main" id="{007CAD8B-07E7-C449-37BE-2B1A7D55CB68}"/>
               </a:ext>
             </a:extLst>
           </p:cNvPr>
@@ -1756,7 +1756,7 @@
           <p:cNvPr id="6" name="Content Placeholder 5">
             <a:extLst>
               <a:ext uri="{FF2B5EF4-FFF2-40B4-BE49-F238E27FC236}">
-                <a16:creationId xmlns:a16="http://schemas.microsoft.com/office/drawing/2014/main" id="{4311883F-3C16-5A90-CC5E-E6392430C2C9}"/>
+                <a16:creationId xmlns:a16="http://schemas.microsoft.com/office/drawing/2014/main" id="{3C535663-677C-D2C0-B25E-B1AC94835E73}"/>
               </a:ext>
             </a:extLst>
           </p:cNvPr>
@@ -1819,7 +1819,7 @@
           <p:cNvPr id="7" name="Date Placeholder 6">
             <a:extLst>
               <a:ext uri="{FF2B5EF4-FFF2-40B4-BE49-F238E27FC236}">
-                <a16:creationId xmlns:a16="http://schemas.microsoft.com/office/drawing/2014/main" id="{9B3BE2FC-18FF-55C5-2067-118148BF785F}"/>
+                <a16:creationId xmlns:a16="http://schemas.microsoft.com/office/drawing/2014/main" id="{DC237068-6980-D5F2-C3FC-21207853CFA5}"/>
               </a:ext>
             </a:extLst>
           </p:cNvPr>
@@ -1835,9 +1835,9 @@
           <a:bodyPr/>
           <a:lstStyle/>
           <a:p>
-            <a:fld id="{EF1B7D9C-A3FB-4C4C-AE95-809B57867B86}" type="datetimeFigureOut">
+            <a:fld id="{36420DFD-775E-4087-B95C-59938401E0DE}" type="datetimeFigureOut">
               <a:rPr lang="en-AU" smtClean="0"/>
-              <a:t>19/09/2026</a:t>
+              <a:t>21/09/2026</a:t>
             </a:fld>
             <a:endParaRPr lang="en-AU"/>
           </a:p>
@@ -1848,7 +1848,7 @@
           <p:cNvPr id="8" name="Footer Placeholder 7">
             <a:extLst>
               <a:ext uri="{FF2B5EF4-FFF2-40B4-BE49-F238E27FC236}">
-                <a16:creationId xmlns:a16="http://schemas.microsoft.com/office/drawing/2014/main" id="{A86A4284-0B9B-9EE6-37BB-C7937DE5F195}"/>
+                <a16:creationId xmlns:a16="http://schemas.microsoft.com/office/drawing/2014/main" id="{37274891-9C0A-85B0-6804-97EA23D346E0}"/>
               </a:ext>
             </a:extLst>
           </p:cNvPr>
@@ -1873,7 +1873,7 @@
           <p:cNvPr id="9" name="Slide Number Placeholder 8">
             <a:extLst>
               <a:ext uri="{FF2B5EF4-FFF2-40B4-BE49-F238E27FC236}">
-                <a16:creationId xmlns:a16="http://schemas.microsoft.com/office/drawing/2014/main" id="{E1C0FE6B-E421-E48C-BD21-05BD9C011734}"/>
+                <a16:creationId xmlns:a16="http://schemas.microsoft.com/office/drawing/2014/main" id="{DB1E6BAE-75B7-0FB9-4C4F-B6B656EA55C2}"/>
               </a:ext>
             </a:extLst>
           </p:cNvPr>
@@ -1889,7 +1889,7 @@
           <a:bodyPr/>
           <a:lstStyle/>
           <a:p>
-            <a:fld id="{F6C2F819-6852-4071-A1FC-F07BE40F9F0E}" type="slidenum">
+            <a:fld id="{F543EE84-2D39-48D4-B172-A2319F73BD07}" type="slidenum">
               <a:rPr lang="en-AU" smtClean="0"/>
               <a:t>‹#›</a:t>
             </a:fld>
@@ -1900,7 +1900,7 @@
     </p:spTree>
     <p:extLst>
       <p:ext uri="{BB962C8B-B14F-4D97-AF65-F5344CB8AC3E}">
-        <p14:creationId xmlns:p14="http://schemas.microsoft.com/office/powerpoint/2010/main" val="2299158443"/>
+        <p14:creationId xmlns:p14="http://schemas.microsoft.com/office/powerpoint/2010/main" val="2207290976"/>
       </p:ext>
     </p:extLst>
   </p:cSld>
@@ -1932,7 +1932,7 @@
           <p:cNvPr id="2" name="Title 1">
             <a:extLst>
               <a:ext uri="{FF2B5EF4-FFF2-40B4-BE49-F238E27FC236}">
-                <a16:creationId xmlns:a16="http://schemas.microsoft.com/office/drawing/2014/main" id="{64EC750B-9BFC-AE0F-00A2-9F6DBF15E461}"/>
+                <a16:creationId xmlns:a16="http://schemas.microsoft.com/office/drawing/2014/main" id="{C0FDB0E7-B1E4-6802-4B86-6E133E8ED55D}"/>
               </a:ext>
             </a:extLst>
           </p:cNvPr>
@@ -1961,7 +1961,7 @@
           <p:cNvPr id="3" name="Date Placeholder 2">
             <a:extLst>
               <a:ext uri="{FF2B5EF4-FFF2-40B4-BE49-F238E27FC236}">
-                <a16:creationId xmlns:a16="http://schemas.microsoft.com/office/drawing/2014/main" id="{42E3BECC-A402-63F9-4CF9-8A0C4883608D}"/>
+                <a16:creationId xmlns:a16="http://schemas.microsoft.com/office/drawing/2014/main" id="{6B781F8E-BDFE-4CC5-C9DA-9E166B8FE111}"/>
               </a:ext>
             </a:extLst>
           </p:cNvPr>
@@ -1977,9 +1977,9 @@
           <a:bodyPr/>
           <a:lstStyle/>
           <a:p>
-            <a:fld id="{EF1B7D9C-A3FB-4C4C-AE95-809B57867B86}" type="datetimeFigureOut">
+            <a:fld id="{36420DFD-775E-4087-B95C-59938401E0DE}" type="datetimeFigureOut">
               <a:rPr lang="en-AU" smtClean="0"/>
-              <a:t>19/09/2026</a:t>
+              <a:t>21/09/2026</a:t>
             </a:fld>
             <a:endParaRPr lang="en-AU"/>
           </a:p>
@@ -1990,7 +1990,7 @@
           <p:cNvPr id="4" name="Footer Placeholder 3">
             <a:extLst>
               <a:ext uri="{FF2B5EF4-FFF2-40B4-BE49-F238E27FC236}">
-                <a16:creationId xmlns:a16="http://schemas.microsoft.com/office/drawing/2014/main" id="{D9D34F7F-EE3E-3A74-4331-2EBF7ED781D8}"/>
+                <a16:creationId xmlns:a16="http://schemas.microsoft.com/office/drawing/2014/main" id="{0AFD4892-76FB-889C-AA3B-61F2174A8716}"/>
               </a:ext>
             </a:extLst>
           </p:cNvPr>
@@ -2015,7 +2015,7 @@
           <p:cNvPr id="5" name="Slide Number Placeholder 4">
             <a:extLst>
               <a:ext uri="{FF2B5EF4-FFF2-40B4-BE49-F238E27FC236}">
-                <a16:creationId xmlns:a16="http://schemas.microsoft.com/office/drawing/2014/main" id="{DF1D944F-2475-6D86-A0A3-5E6884470D1D}"/>
+                <a16:creationId xmlns:a16="http://schemas.microsoft.com/office/drawing/2014/main" id="{E11F5D44-D69E-EC41-C07A-EBC96E5AD872}"/>
               </a:ext>
             </a:extLst>
           </p:cNvPr>
@@ -2031,7 +2031,7 @@
           <a:bodyPr/>
           <a:lstStyle/>
           <a:p>
-            <a:fld id="{F6C2F819-6852-4071-A1FC-F07BE40F9F0E}" type="slidenum">
+            <a:fld id="{F543EE84-2D39-48D4-B172-A2319F73BD07}" type="slidenum">
               <a:rPr lang="en-AU" smtClean="0"/>
               <a:t>‹#›</a:t>
             </a:fld>
@@ -2042,7 +2042,7 @@
     </p:spTree>
     <p:extLst>
       <p:ext uri="{BB962C8B-B14F-4D97-AF65-F5344CB8AC3E}">
-        <p14:creationId xmlns:p14="http://schemas.microsoft.com/office/powerpoint/2010/main" val="2369529714"/>
+        <p14:creationId xmlns:p14="http://schemas.microsoft.com/office/powerpoint/2010/main" val="1107660750"/>
       </p:ext>
     </p:extLst>
   </p:cSld>
@@ -2074,7 +2074,7 @@
           <p:cNvPr id="2" name="Date Placeholder 1">
             <a:extLst>
               <a:ext uri="{FF2B5EF4-FFF2-40B4-BE49-F238E27FC236}">
-                <a16:creationId xmlns:a16="http://schemas.microsoft.com/office/drawing/2014/main" id="{96BD019C-AB4D-11B1-4EBA-42B2A632BBE7}"/>
+                <a16:creationId xmlns:a16="http://schemas.microsoft.com/office/drawing/2014/main" id="{8092A980-79CC-08B5-43E0-8B3801BB2C19}"/>
               </a:ext>
             </a:extLst>
           </p:cNvPr>
@@ -2090,9 +2090,9 @@
           <a:bodyPr/>
           <a:lstStyle/>
           <a:p>
-            <a:fld id="{EF1B7D9C-A3FB-4C4C-AE95-809B57867B86}" type="datetimeFigureOut">
+            <a:fld id="{36420DFD-775E-4087-B95C-59938401E0DE}" type="datetimeFigureOut">
               <a:rPr lang="en-AU" smtClean="0"/>
-              <a:t>19/09/2026</a:t>
+              <a:t>21/09/2026</a:t>
             </a:fld>
             <a:endParaRPr lang="en-AU"/>
           </a:p>
@@ -2103,7 +2103,7 @@
           <p:cNvPr id="3" name="Footer Placeholder 2">
             <a:extLst>
               <a:ext uri="{FF2B5EF4-FFF2-40B4-BE49-F238E27FC236}">
-                <a16:creationId xmlns:a16="http://schemas.microsoft.com/office/drawing/2014/main" id="{95269A82-6758-456D-7BBF-58663416B346}"/>
+                <a16:creationId xmlns:a16="http://schemas.microsoft.com/office/drawing/2014/main" id="{DE24EBC0-290F-7719-49D1-1F8FED80453D}"/>
               </a:ext>
             </a:extLst>
           </p:cNvPr>
@@ -2128,7 +2128,7 @@
           <p:cNvPr id="4" name="Slide Number Placeholder 3">
             <a:extLst>
               <a:ext uri="{FF2B5EF4-FFF2-40B4-BE49-F238E27FC236}">
-                <a16:creationId xmlns:a16="http://schemas.microsoft.com/office/drawing/2014/main" id="{66B7CB78-1872-1F94-F01F-F31A9028DCE4}"/>
+                <a16:creationId xmlns:a16="http://schemas.microsoft.com/office/drawing/2014/main" id="{EE2E6F55-9BAB-7B7F-7A39-8FE549CA4D1F}"/>
               </a:ext>
             </a:extLst>
           </p:cNvPr>
@@ -2144,7 +2144,7 @@
           <a:bodyPr/>
           <a:lstStyle/>
           <a:p>
-            <a:fld id="{F6C2F819-6852-4071-A1FC-F07BE40F9F0E}" type="slidenum">
+            <a:fld id="{F543EE84-2D39-48D4-B172-A2319F73BD07}" type="slidenum">
               <a:rPr lang="en-AU" smtClean="0"/>
               <a:t>‹#›</a:t>
             </a:fld>
@@ -2155,7 +2155,7 @@
     </p:spTree>
     <p:extLst>
       <p:ext uri="{BB962C8B-B14F-4D97-AF65-F5344CB8AC3E}">
-        <p14:creationId xmlns:p14="http://schemas.microsoft.com/office/powerpoint/2010/main" val="2561970885"/>
+        <p14:creationId xmlns:p14="http://schemas.microsoft.com/office/powerpoint/2010/main" val="2724658001"/>
       </p:ext>
     </p:extLst>
   </p:cSld>
@@ -2187,7 +2187,7 @@
           <p:cNvPr id="2" name="Title 1">
             <a:extLst>
               <a:ext uri="{FF2B5EF4-FFF2-40B4-BE49-F238E27FC236}">
-                <a16:creationId xmlns:a16="http://schemas.microsoft.com/office/drawing/2014/main" id="{2627BDFB-1DEA-0E10-07B6-F8A477F270D1}"/>
+                <a16:creationId xmlns:a16="http://schemas.microsoft.com/office/drawing/2014/main" id="{FEAA0B89-D5EE-AC54-00A3-88A5155B8AEE}"/>
               </a:ext>
             </a:extLst>
           </p:cNvPr>
@@ -2225,7 +2225,7 @@
           <p:cNvPr id="3" name="Content Placeholder 2">
             <a:extLst>
               <a:ext uri="{FF2B5EF4-FFF2-40B4-BE49-F238E27FC236}">
-                <a16:creationId xmlns:a16="http://schemas.microsoft.com/office/drawing/2014/main" id="{B6D20737-9456-C381-B26A-F084B1D61A11}"/>
+                <a16:creationId xmlns:a16="http://schemas.microsoft.com/office/drawing/2014/main" id="{F5BEA60E-626C-C47B-87EE-1580F8D3D688}"/>
               </a:ext>
             </a:extLst>
           </p:cNvPr>
@@ -2316,7 +2316,7 @@
           <p:cNvPr id="4" name="Text Placeholder 3">
             <a:extLst>
               <a:ext uri="{FF2B5EF4-FFF2-40B4-BE49-F238E27FC236}">
-                <a16:creationId xmlns:a16="http://schemas.microsoft.com/office/drawing/2014/main" id="{66A22ECD-C96F-076C-7A51-B4974709AC41}"/>
+                <a16:creationId xmlns:a16="http://schemas.microsoft.com/office/drawing/2014/main" id="{FE60D2EC-3CC8-66CB-CAFB-D5DC4A008BD9}"/>
               </a:ext>
             </a:extLst>
           </p:cNvPr>
@@ -2387,7 +2387,7 @@
           <p:cNvPr id="5" name="Date Placeholder 4">
             <a:extLst>
               <a:ext uri="{FF2B5EF4-FFF2-40B4-BE49-F238E27FC236}">
-                <a16:creationId xmlns:a16="http://schemas.microsoft.com/office/drawing/2014/main" id="{84F1B4B9-781A-2683-6C1A-420078E25D98}"/>
+                <a16:creationId xmlns:a16="http://schemas.microsoft.com/office/drawing/2014/main" id="{AB614015-7D84-E624-4BA2-C74D697EF049}"/>
               </a:ext>
             </a:extLst>
           </p:cNvPr>
@@ -2403,9 +2403,9 @@
           <a:bodyPr/>
           <a:lstStyle/>
           <a:p>
-            <a:fld id="{EF1B7D9C-A3FB-4C4C-AE95-809B57867B86}" type="datetimeFigureOut">
+            <a:fld id="{36420DFD-775E-4087-B95C-59938401E0DE}" type="datetimeFigureOut">
               <a:rPr lang="en-AU" smtClean="0"/>
-              <a:t>19/09/2026</a:t>
+              <a:t>21/09/2026</a:t>
             </a:fld>
             <a:endParaRPr lang="en-AU"/>
           </a:p>
@@ -2416,7 +2416,7 @@
           <p:cNvPr id="6" name="Footer Placeholder 5">
             <a:extLst>
               <a:ext uri="{FF2B5EF4-FFF2-40B4-BE49-F238E27FC236}">
-                <a16:creationId xmlns:a16="http://schemas.microsoft.com/office/drawing/2014/main" id="{690CE395-19DF-780C-06C8-F44C9D24F72A}"/>
+                <a16:creationId xmlns:a16="http://schemas.microsoft.com/office/drawing/2014/main" id="{EA4D3BA1-AAF2-E75E-E7F8-6081AB7FCD10}"/>
               </a:ext>
             </a:extLst>
           </p:cNvPr>
@@ -2441,7 +2441,7 @@
           <p:cNvPr id="7" name="Slide Number Placeholder 6">
             <a:extLst>
               <a:ext uri="{FF2B5EF4-FFF2-40B4-BE49-F238E27FC236}">
-                <a16:creationId xmlns:a16="http://schemas.microsoft.com/office/drawing/2014/main" id="{525F5275-ED3C-1B0A-679E-924CE85341E9}"/>
+                <a16:creationId xmlns:a16="http://schemas.microsoft.com/office/drawing/2014/main" id="{CD51FB9F-D1FA-C66D-E1BE-97ECF4B2C93C}"/>
               </a:ext>
             </a:extLst>
           </p:cNvPr>
@@ -2457,7 +2457,7 @@
           <a:bodyPr/>
           <a:lstStyle/>
           <a:p>
-            <a:fld id="{F6C2F819-6852-4071-A1FC-F07BE40F9F0E}" type="slidenum">
+            <a:fld id="{F543EE84-2D39-48D4-B172-A2319F73BD07}" type="slidenum">
               <a:rPr lang="en-AU" smtClean="0"/>
               <a:t>‹#›</a:t>
             </a:fld>
@@ -2468,7 +2468,7 @@
     </p:spTree>
     <p:extLst>
       <p:ext uri="{BB962C8B-B14F-4D97-AF65-F5344CB8AC3E}">
-        <p14:creationId xmlns:p14="http://schemas.microsoft.com/office/powerpoint/2010/main" val="2765034860"/>
+        <p14:creationId xmlns:p14="http://schemas.microsoft.com/office/powerpoint/2010/main" val="862394681"/>
       </p:ext>
     </p:extLst>
   </p:cSld>
@@ -2500,7 +2500,7 @@
           <p:cNvPr id="2" name="Title 1">
             <a:extLst>
               <a:ext uri="{FF2B5EF4-FFF2-40B4-BE49-F238E27FC236}">
-                <a16:creationId xmlns:a16="http://schemas.microsoft.com/office/drawing/2014/main" id="{96B7DD1B-63EA-2AD9-997F-218CABF24358}"/>
+                <a16:creationId xmlns:a16="http://schemas.microsoft.com/office/drawing/2014/main" id="{E2611158-0DD2-9620-AEB6-09E32623090E}"/>
               </a:ext>
             </a:extLst>
           </p:cNvPr>
@@ -2538,7 +2538,7 @@
           <p:cNvPr id="3" name="Picture Placeholder 2">
             <a:extLst>
               <a:ext uri="{FF2B5EF4-FFF2-40B4-BE49-F238E27FC236}">
-                <a16:creationId xmlns:a16="http://schemas.microsoft.com/office/drawing/2014/main" id="{B7F3FB2C-7486-1874-2B44-35C63A6AD7B5}"/>
+                <a16:creationId xmlns:a16="http://schemas.microsoft.com/office/drawing/2014/main" id="{5C3FF936-40FA-C2C8-72E3-815D4C3D2A4B}"/>
               </a:ext>
             </a:extLst>
           </p:cNvPr>
@@ -2605,7 +2605,7 @@
           <p:cNvPr id="4" name="Text Placeholder 3">
             <a:extLst>
               <a:ext uri="{FF2B5EF4-FFF2-40B4-BE49-F238E27FC236}">
-                <a16:creationId xmlns:a16="http://schemas.microsoft.com/office/drawing/2014/main" id="{A9E13F48-AD89-2847-3FDC-454A9AF83C59}"/>
+                <a16:creationId xmlns:a16="http://schemas.microsoft.com/office/drawing/2014/main" id="{B8B9CC37-659C-3AE9-23BD-3EA2FE47DBAE}"/>
               </a:ext>
             </a:extLst>
           </p:cNvPr>
@@ -2676,7 +2676,7 @@
           <p:cNvPr id="5" name="Date Placeholder 4">
             <a:extLst>
               <a:ext uri="{FF2B5EF4-FFF2-40B4-BE49-F238E27FC236}">
-                <a16:creationId xmlns:a16="http://schemas.microsoft.com/office/drawing/2014/main" id="{3B080AF9-05E1-F232-2C70-7DEF8580A95A}"/>
+                <a16:creationId xmlns:a16="http://schemas.microsoft.com/office/drawing/2014/main" id="{A72BAA14-2A32-5D77-AE9D-FC7C14F7F11E}"/>
               </a:ext>
             </a:extLst>
           </p:cNvPr>
@@ -2692,9 +2692,9 @@
           <a:bodyPr/>
           <a:lstStyle/>
           <a:p>
-            <a:fld id="{EF1B7D9C-A3FB-4C4C-AE95-809B57867B86}" type="datetimeFigureOut">
+            <a:fld id="{36420DFD-775E-4087-B95C-59938401E0DE}" type="datetimeFigureOut">
               <a:rPr lang="en-AU" smtClean="0"/>
-              <a:t>19/09/2026</a:t>
+              <a:t>21/09/2026</a:t>
             </a:fld>
             <a:endParaRPr lang="en-AU"/>
           </a:p>
@@ -2705,7 +2705,7 @@
           <p:cNvPr id="6" name="Footer Placeholder 5">
             <a:extLst>
               <a:ext uri="{FF2B5EF4-FFF2-40B4-BE49-F238E27FC236}">
-                <a16:creationId xmlns:a16="http://schemas.microsoft.com/office/drawing/2014/main" id="{62D7BE23-ADED-F50E-E99C-43A621DDDF25}"/>
+                <a16:creationId xmlns:a16="http://schemas.microsoft.com/office/drawing/2014/main" id="{3AB2CAC6-FE14-4483-9F89-71556393D784}"/>
               </a:ext>
             </a:extLst>
           </p:cNvPr>
@@ -2730,7 +2730,7 @@
           <p:cNvPr id="7" name="Slide Number Placeholder 6">
             <a:extLst>
               <a:ext uri="{FF2B5EF4-FFF2-40B4-BE49-F238E27FC236}">
-                <a16:creationId xmlns:a16="http://schemas.microsoft.com/office/drawing/2014/main" id="{BE6CB237-2A4D-0C20-BD84-C8FA31031596}"/>
+                <a16:creationId xmlns:a16="http://schemas.microsoft.com/office/drawing/2014/main" id="{D87A338D-8B90-9ECB-D0A3-C2B8558E353C}"/>
               </a:ext>
             </a:extLst>
           </p:cNvPr>
@@ -2746,7 +2746,7 @@
           <a:bodyPr/>
           <a:lstStyle/>
           <a:p>
-            <a:fld id="{F6C2F819-6852-4071-A1FC-F07BE40F9F0E}" type="slidenum">
+            <a:fld id="{F543EE84-2D39-48D4-B172-A2319F73BD07}" type="slidenum">
               <a:rPr lang="en-AU" smtClean="0"/>
               <a:t>‹#›</a:t>
             </a:fld>
@@ -2757,7 +2757,7 @@
     </p:spTree>
     <p:extLst>
       <p:ext uri="{BB962C8B-B14F-4D97-AF65-F5344CB8AC3E}">
-        <p14:creationId xmlns:p14="http://schemas.microsoft.com/office/powerpoint/2010/main" val="2015759037"/>
+        <p14:creationId xmlns:p14="http://schemas.microsoft.com/office/powerpoint/2010/main" val="124929828"/>
       </p:ext>
     </p:extLst>
   </p:cSld>
@@ -2794,7 +2794,7 @@
           <p:cNvPr id="2" name="Title Placeholder 1">
             <a:extLst>
               <a:ext uri="{FF2B5EF4-FFF2-40B4-BE49-F238E27FC236}">
-                <a16:creationId xmlns:a16="http://schemas.microsoft.com/office/drawing/2014/main" id="{726E4FC6-29B4-1C83-4B49-7494C1B04EC7}"/>
+                <a16:creationId xmlns:a16="http://schemas.microsoft.com/office/drawing/2014/main" id="{CFB0CC0E-23EA-30B8-4093-13752E1A4B7C}"/>
               </a:ext>
             </a:extLst>
           </p:cNvPr>
@@ -2833,7 +2833,7 @@
           <p:cNvPr id="3" name="Text Placeholder 2">
             <a:extLst>
               <a:ext uri="{FF2B5EF4-FFF2-40B4-BE49-F238E27FC236}">
-                <a16:creationId xmlns:a16="http://schemas.microsoft.com/office/drawing/2014/main" id="{652391DF-18CB-9F26-844E-1789153AD533}"/>
+                <a16:creationId xmlns:a16="http://schemas.microsoft.com/office/drawing/2014/main" id="{A474C9D1-9A5F-4D83-5D33-1C71074C347F}"/>
               </a:ext>
             </a:extLst>
           </p:cNvPr>
@@ -2901,7 +2901,7 @@
           <p:cNvPr id="4" name="Date Placeholder 3">
             <a:extLst>
               <a:ext uri="{FF2B5EF4-FFF2-40B4-BE49-F238E27FC236}">
-                <a16:creationId xmlns:a16="http://schemas.microsoft.com/office/drawing/2014/main" id="{5495C158-1588-C763-9020-CFC29F4EBCF1}"/>
+                <a16:creationId xmlns:a16="http://schemas.microsoft.com/office/drawing/2014/main" id="{AE29FD47-8F19-9AA5-0E8C-7806FEE63857}"/>
               </a:ext>
             </a:extLst>
           </p:cNvPr>
@@ -2935,9 +2935,9 @@
             </a:lvl1pPr>
           </a:lstStyle>
           <a:p>
-            <a:fld id="{EF1B7D9C-A3FB-4C4C-AE95-809B57867B86}" type="datetimeFigureOut">
+            <a:fld id="{36420DFD-775E-4087-B95C-59938401E0DE}" type="datetimeFigureOut">
               <a:rPr lang="en-AU" smtClean="0"/>
-              <a:t>19/09/2026</a:t>
+              <a:t>21/09/2026</a:t>
             </a:fld>
             <a:endParaRPr lang="en-AU"/>
           </a:p>
@@ -2948,7 +2948,7 @@
           <p:cNvPr id="5" name="Footer Placeholder 4">
             <a:extLst>
               <a:ext uri="{FF2B5EF4-FFF2-40B4-BE49-F238E27FC236}">
-                <a16:creationId xmlns:a16="http://schemas.microsoft.com/office/drawing/2014/main" id="{649320B5-1D62-EC3A-B5C2-BEC3052F3EE2}"/>
+                <a16:creationId xmlns:a16="http://schemas.microsoft.com/office/drawing/2014/main" id="{54573709-F9A9-AF38-46FC-A6177E80E5AB}"/>
               </a:ext>
             </a:extLst>
           </p:cNvPr>
@@ -2991,7 +2991,7 @@
           <p:cNvPr id="6" name="Slide Number Placeholder 5">
             <a:extLst>
               <a:ext uri="{FF2B5EF4-FFF2-40B4-BE49-F238E27FC236}">
-                <a16:creationId xmlns:a16="http://schemas.microsoft.com/office/drawing/2014/main" id="{879B3B8E-E680-1D7E-5050-B5B82FC9B2D0}"/>
+                <a16:creationId xmlns:a16="http://schemas.microsoft.com/office/drawing/2014/main" id="{383C2227-9820-8E78-54BA-3B8BCB47A0F2}"/>
               </a:ext>
             </a:extLst>
           </p:cNvPr>
@@ -3025,7 +3025,7 @@
             </a:lvl1pPr>
           </a:lstStyle>
           <a:p>
-            <a:fld id="{F6C2F819-6852-4071-A1FC-F07BE40F9F0E}" type="slidenum">
+            <a:fld id="{F543EE84-2D39-48D4-B172-A2319F73BD07}" type="slidenum">
               <a:rPr lang="en-AU" smtClean="0"/>
               <a:t>‹#›</a:t>
             </a:fld>
@@ -3036,7 +3036,7 @@
     </p:spTree>
     <p:extLst>
       <p:ext uri="{BB962C8B-B14F-4D97-AF65-F5344CB8AC3E}">
-        <p14:creationId xmlns:p14="http://schemas.microsoft.com/office/powerpoint/2010/main" val="3524654082"/>
+        <p14:creationId xmlns:p14="http://schemas.microsoft.com/office/powerpoint/2010/main" val="3861507673"/>
       </p:ext>
     </p:extLst>
   </p:cSld>
@@ -3359,7 +3359,7 @@
           <p:cNvPr id="2" name="Heading">
             <a:extLst>
               <a:ext uri="{FF2B5EF4-FFF2-40B4-BE49-F238E27FC236}">
-                <a16:creationId xmlns:a16="http://schemas.microsoft.com/office/drawing/2014/main" id="{4CC8EB6C-7517-B7B1-B1FD-85E7625CADDF}"/>
+                <a16:creationId xmlns:a16="http://schemas.microsoft.com/office/drawing/2014/main" id="{1A9964AF-44F4-B3F1-58CE-91D08A33A781}"/>
               </a:ext>
             </a:extLst>
           </p:cNvPr>
@@ -3398,7 +3398,7 @@
           <p:cNvPr id="3" name="Instructions">
             <a:extLst>
               <a:ext uri="{FF2B5EF4-FFF2-40B4-BE49-F238E27FC236}">
-                <a16:creationId xmlns:a16="http://schemas.microsoft.com/office/drawing/2014/main" id="{ACF7F16E-D68B-3E9B-A0CD-6BBCC05A667F}"/>
+                <a16:creationId xmlns:a16="http://schemas.microsoft.com/office/drawing/2014/main" id="{91B93038-DF47-00F3-99F2-31F9AB90B66F}"/>
               </a:ext>
             </a:extLst>
           </p:cNvPr>
@@ -3437,7 +3437,7 @@
           <p:cNvPr id="4" name="TextBox 3">
             <a:extLst>
               <a:ext uri="{FF2B5EF4-FFF2-40B4-BE49-F238E27FC236}">
-                <a16:creationId xmlns:a16="http://schemas.microsoft.com/office/drawing/2014/main" id="{E3E0C603-7B3D-255A-72C4-EA7B21CE26BE}"/>
+                <a16:creationId xmlns:a16="http://schemas.microsoft.com/office/drawing/2014/main" id="{BD380198-27A7-55DE-2AD1-CA726ADB64E1}"/>
               </a:ext>
             </a:extLst>
           </p:cNvPr>
@@ -3599,7 +3599,7 @@
     </p:spTree>
     <p:extLst>
       <p:ext uri="{BB962C8B-B14F-4D97-AF65-F5344CB8AC3E}">
-        <p14:creationId xmlns:p14="http://schemas.microsoft.com/office/powerpoint/2010/main" val="2988810995"/>
+        <p14:creationId xmlns:p14="http://schemas.microsoft.com/office/powerpoint/2010/main" val="1298324244"/>
       </p:ext>
     </p:extLst>
   </p:cSld>
@@ -3631,7 +3631,7 @@
           <p:cNvPr id="2" name="Heading">
             <a:extLst>
               <a:ext uri="{FF2B5EF4-FFF2-40B4-BE49-F238E27FC236}">
-                <a16:creationId xmlns:a16="http://schemas.microsoft.com/office/drawing/2014/main" id="{279AB168-05C6-886E-E499-950E711D536D}"/>
+                <a16:creationId xmlns:a16="http://schemas.microsoft.com/office/drawing/2014/main" id="{E4D24411-CD40-489D-883E-8A6E1EED7C63}"/>
               </a:ext>
             </a:extLst>
           </p:cNvPr>
@@ -3670,7 +3670,7 @@
           <p:cNvPr id="3" name="Instructions">
             <a:extLst>
               <a:ext uri="{FF2B5EF4-FFF2-40B4-BE49-F238E27FC236}">
-                <a16:creationId xmlns:a16="http://schemas.microsoft.com/office/drawing/2014/main" id="{EE959B63-63E5-1B92-1DBC-2721A712DC46}"/>
+                <a16:creationId xmlns:a16="http://schemas.microsoft.com/office/drawing/2014/main" id="{ADC2AF2F-84F4-5F36-8D7B-0C035E2BBA29}"/>
               </a:ext>
             </a:extLst>
           </p:cNvPr>
@@ -3709,7 +3709,7 @@
           <p:cNvPr id="7" name="TheGroup">
             <a:extLst>
               <a:ext uri="{FF2B5EF4-FFF2-40B4-BE49-F238E27FC236}">
-                <a16:creationId xmlns:a16="http://schemas.microsoft.com/office/drawing/2014/main" id="{8640AA1C-838F-784F-637C-41FAF2DC4FD5}"/>
+                <a16:creationId xmlns:a16="http://schemas.microsoft.com/office/drawing/2014/main" id="{3DD373F3-432B-3433-20D1-15BED8B82AF7}"/>
               </a:ext>
             </a:extLst>
           </p:cNvPr>
@@ -3729,7 +3729,7 @@
             <p:cNvPr id="4" name="G1">
               <a:extLst>
                 <a:ext uri="{FF2B5EF4-FFF2-40B4-BE49-F238E27FC236}">
-                  <a16:creationId xmlns:a16="http://schemas.microsoft.com/office/drawing/2014/main" id="{56B4D97C-1216-F4D6-8D43-71A9D9CA76C5}"/>
+                  <a16:creationId xmlns:a16="http://schemas.microsoft.com/office/drawing/2014/main" id="{970F08BA-704A-F369-C7C9-2B268F895491}"/>
                 </a:ext>
               </a:extLst>
             </p:cNvPr>
@@ -3804,7 +3804,7 @@
             <p:cNvPr id="5" name="G2">
               <a:extLst>
                 <a:ext uri="{FF2B5EF4-FFF2-40B4-BE49-F238E27FC236}">
-                  <a16:creationId xmlns:a16="http://schemas.microsoft.com/office/drawing/2014/main" id="{390878C7-9B77-C086-5B25-4F9A640BC455}"/>
+                  <a16:creationId xmlns:a16="http://schemas.microsoft.com/office/drawing/2014/main" id="{9B3D7031-49AB-5194-B6D8-8A06D8C88112}"/>
                 </a:ext>
               </a:extLst>
             </p:cNvPr>
@@ -3879,7 +3879,7 @@
             <p:cNvPr id="6" name="G3">
               <a:extLst>
                 <a:ext uri="{FF2B5EF4-FFF2-40B4-BE49-F238E27FC236}">
-                  <a16:creationId xmlns:a16="http://schemas.microsoft.com/office/drawing/2014/main" id="{5058CCFD-1B9D-5000-63E8-570FF6A1F26B}"/>
+                  <a16:creationId xmlns:a16="http://schemas.microsoft.com/office/drawing/2014/main" id="{132D7469-59CD-912E-9E3E-9F2664DDC590}"/>
                 </a:ext>
               </a:extLst>
             </p:cNvPr>
@@ -3955,7 +3955,7 @@
           <p:cNvPr id="8" name="Loose1">
             <a:extLst>
               <a:ext uri="{FF2B5EF4-FFF2-40B4-BE49-F238E27FC236}">
-                <a16:creationId xmlns:a16="http://schemas.microsoft.com/office/drawing/2014/main" id="{B2ADC08E-8403-9AC2-7C0D-DCFC1FB7C77F}"/>
+                <a16:creationId xmlns:a16="http://schemas.microsoft.com/office/drawing/2014/main" id="{6FC64AE9-9678-39CD-4A41-D72FA3A0A426}"/>
               </a:ext>
             </a:extLst>
           </p:cNvPr>
@@ -4030,7 +4030,7 @@
           <p:cNvPr id="9" name="Loose2">
             <a:extLst>
               <a:ext uri="{FF2B5EF4-FFF2-40B4-BE49-F238E27FC236}">
-                <a16:creationId xmlns:a16="http://schemas.microsoft.com/office/drawing/2014/main" id="{54A2369F-9494-87EF-730B-4B214D97ECA9}"/>
+                <a16:creationId xmlns:a16="http://schemas.microsoft.com/office/drawing/2014/main" id="{F4CACA9C-CC69-BFA9-0F70-161634B818F5}"/>
               </a:ext>
             </a:extLst>
           </p:cNvPr>
@@ -4105,7 +4105,7 @@
           <p:cNvPr id="10" name="TextBox 9">
             <a:extLst>
               <a:ext uri="{FF2B5EF4-FFF2-40B4-BE49-F238E27FC236}">
-                <a16:creationId xmlns:a16="http://schemas.microsoft.com/office/drawing/2014/main" id="{56CD203A-1B27-AEDA-BDE2-9F416038850B}"/>
+                <a16:creationId xmlns:a16="http://schemas.microsoft.com/office/drawing/2014/main" id="{BE1764A1-5F53-7F98-8202-47467F4CCFED}"/>
               </a:ext>
             </a:extLst>
           </p:cNvPr>
@@ -4142,7 +4142,7 @@
     </p:spTree>
     <p:extLst>
       <p:ext uri="{BB962C8B-B14F-4D97-AF65-F5344CB8AC3E}">
-        <p14:creationId xmlns:p14="http://schemas.microsoft.com/office/powerpoint/2010/main" val="421069406"/>
+        <p14:creationId xmlns:p14="http://schemas.microsoft.com/office/powerpoint/2010/main" val="1305727972"/>
       </p:ext>
     </p:extLst>
   </p:cSld>
@@ -4174,7 +4174,7 @@
           <p:cNvPr id="2" name="Heading">
             <a:extLst>
               <a:ext uri="{FF2B5EF4-FFF2-40B4-BE49-F238E27FC236}">
-                <a16:creationId xmlns:a16="http://schemas.microsoft.com/office/drawing/2014/main" id="{2353DFA9-0094-7BF4-D102-E4776874E124}"/>
+                <a16:creationId xmlns:a16="http://schemas.microsoft.com/office/drawing/2014/main" id="{52D94D97-71AF-93B9-093D-20AAC8DB8A14}"/>
               </a:ext>
             </a:extLst>
           </p:cNvPr>
@@ -4213,7 +4213,7 @@
           <p:cNvPr id="3" name="Instructions">
             <a:extLst>
               <a:ext uri="{FF2B5EF4-FFF2-40B4-BE49-F238E27FC236}">
-                <a16:creationId xmlns:a16="http://schemas.microsoft.com/office/drawing/2014/main" id="{FF582D62-58F9-F1CD-52C5-FC3AE3E92046}"/>
+                <a16:creationId xmlns:a16="http://schemas.microsoft.com/office/drawing/2014/main" id="{655293B2-EBB2-548B-BD7D-7249087D945C}"/>
               </a:ext>
             </a:extLst>
           </p:cNvPr>
@@ -4252,7 +4252,7 @@
           <p:cNvPr id="4" name="Text0">
             <a:extLst>
               <a:ext uri="{FF2B5EF4-FFF2-40B4-BE49-F238E27FC236}">
-                <a16:creationId xmlns:a16="http://schemas.microsoft.com/office/drawing/2014/main" id="{6C764BB3-18C0-41D5-48FE-B1A63B5487C1}"/>
+                <a16:creationId xmlns:a16="http://schemas.microsoft.com/office/drawing/2014/main" id="{52BAFF94-AE47-8141-263C-9FED06F3E411}"/>
               </a:ext>
             </a:extLst>
           </p:cNvPr>
@@ -4312,7 +4312,7 @@
           <p:cNvPr id="5" name="Text1">
             <a:extLst>
               <a:ext uri="{FF2B5EF4-FFF2-40B4-BE49-F238E27FC236}">
-                <a16:creationId xmlns:a16="http://schemas.microsoft.com/office/drawing/2014/main" id="{1F0CD042-947F-06DB-7AE2-F8F193AC58F7}"/>
+                <a16:creationId xmlns:a16="http://schemas.microsoft.com/office/drawing/2014/main" id="{9E1042FF-9E8D-7CD1-959D-828173CAD3B7}"/>
               </a:ext>
             </a:extLst>
           </p:cNvPr>
@@ -4373,7 +4373,7 @@
           <p:cNvPr id="6" name="Text2">
             <a:extLst>
               <a:ext uri="{FF2B5EF4-FFF2-40B4-BE49-F238E27FC236}">
-                <a16:creationId xmlns:a16="http://schemas.microsoft.com/office/drawing/2014/main" id="{63AB5179-6C5E-A471-ECF1-5AE9A096127F}"/>
+                <a16:creationId xmlns:a16="http://schemas.microsoft.com/office/drawing/2014/main" id="{A7CD9A23-A12B-A333-2F5B-F94B41FFC4FC}"/>
               </a:ext>
             </a:extLst>
           </p:cNvPr>
@@ -4434,7 +4434,7 @@
           <p:cNvPr id="7" name="TextBox 6">
             <a:extLst>
               <a:ext uri="{FF2B5EF4-FFF2-40B4-BE49-F238E27FC236}">
-                <a16:creationId xmlns:a16="http://schemas.microsoft.com/office/drawing/2014/main" id="{33305549-5AFA-90D9-6795-2C8C915DD4C7}"/>
+                <a16:creationId xmlns:a16="http://schemas.microsoft.com/office/drawing/2014/main" id="{230EE844-418C-6436-C97E-DEDC04E865BA}"/>
               </a:ext>
             </a:extLst>
           </p:cNvPr>
@@ -4471,7 +4471,7 @@
     </p:spTree>
     <p:extLst>
       <p:ext uri="{BB962C8B-B14F-4D97-AF65-F5344CB8AC3E}">
-        <p14:creationId xmlns:p14="http://schemas.microsoft.com/office/powerpoint/2010/main" val="1521433332"/>
+        <p14:creationId xmlns:p14="http://schemas.microsoft.com/office/powerpoint/2010/main" val="2278640900"/>
       </p:ext>
     </p:extLst>
   </p:cSld>
@@ -4503,7 +4503,7 @@
           <p:cNvPr id="2" name="Heading">
             <a:extLst>
               <a:ext uri="{FF2B5EF4-FFF2-40B4-BE49-F238E27FC236}">
-                <a16:creationId xmlns:a16="http://schemas.microsoft.com/office/drawing/2014/main" id="{6C228787-3C14-F8C4-6FFB-FF88D2DEE0D1}"/>
+                <a16:creationId xmlns:a16="http://schemas.microsoft.com/office/drawing/2014/main" id="{88C13F76-F707-D7B8-B83B-4787ACFCC5F0}"/>
               </a:ext>
             </a:extLst>
           </p:cNvPr>
@@ -4542,7 +4542,7 @@
           <p:cNvPr id="3" name="Instructions">
             <a:extLst>
               <a:ext uri="{FF2B5EF4-FFF2-40B4-BE49-F238E27FC236}">
-                <a16:creationId xmlns:a16="http://schemas.microsoft.com/office/drawing/2014/main" id="{EC727660-1527-5D69-D5D4-60B4A7BBC6B9}"/>
+                <a16:creationId xmlns:a16="http://schemas.microsoft.com/office/drawing/2014/main" id="{D85CCDE5-208D-8AB3-4F48-85BE8FEF143A}"/>
               </a:ext>
             </a:extLst>
           </p:cNvPr>
@@ -4581,7 +4581,7 @@
           <p:cNvPr id="4" name="Dot0">
             <a:extLst>
               <a:ext uri="{FF2B5EF4-FFF2-40B4-BE49-F238E27FC236}">
-                <a16:creationId xmlns:a16="http://schemas.microsoft.com/office/drawing/2014/main" id="{A501D444-817E-813D-7A29-7E74E5AA4495}"/>
+                <a16:creationId xmlns:a16="http://schemas.microsoft.com/office/drawing/2014/main" id="{174BEC0D-08C1-5C1A-1360-F74C806C458C}"/>
               </a:ext>
             </a:extLst>
           </p:cNvPr>
@@ -4656,7 +4656,7 @@
           <p:cNvPr id="5" name="Dot1">
             <a:extLst>
               <a:ext uri="{FF2B5EF4-FFF2-40B4-BE49-F238E27FC236}">
-                <a16:creationId xmlns:a16="http://schemas.microsoft.com/office/drawing/2014/main" id="{F8A15C59-81E5-D6E6-4A90-33EC6CC76C6A}"/>
+                <a16:creationId xmlns:a16="http://schemas.microsoft.com/office/drawing/2014/main" id="{12B55FA0-F098-A41F-13C1-FBDFC1278DAF}"/>
               </a:ext>
             </a:extLst>
           </p:cNvPr>
@@ -4731,7 +4731,7 @@
           <p:cNvPr id="6" name="Dot2">
             <a:extLst>
               <a:ext uri="{FF2B5EF4-FFF2-40B4-BE49-F238E27FC236}">
-                <a16:creationId xmlns:a16="http://schemas.microsoft.com/office/drawing/2014/main" id="{1A52271A-758E-6EA0-3C9D-CF391F6B4F3E}"/>
+                <a16:creationId xmlns:a16="http://schemas.microsoft.com/office/drawing/2014/main" id="{19C24199-18A4-E922-654F-8A883EC765A2}"/>
               </a:ext>
             </a:extLst>
           </p:cNvPr>
@@ -4806,7 +4806,7 @@
           <p:cNvPr id="7" name="Dot3">
             <a:extLst>
               <a:ext uri="{FF2B5EF4-FFF2-40B4-BE49-F238E27FC236}">
-                <a16:creationId xmlns:a16="http://schemas.microsoft.com/office/drawing/2014/main" id="{FB8A0257-AE54-A90D-02A4-494B59971A09}"/>
+                <a16:creationId xmlns:a16="http://schemas.microsoft.com/office/drawing/2014/main" id="{17A94F19-57E7-DBE7-9156-A4FFCED682B6}"/>
               </a:ext>
             </a:extLst>
           </p:cNvPr>
@@ -4881,7 +4881,7 @@
           <p:cNvPr id="8" name="Dot4">
             <a:extLst>
               <a:ext uri="{FF2B5EF4-FFF2-40B4-BE49-F238E27FC236}">
-                <a16:creationId xmlns:a16="http://schemas.microsoft.com/office/drawing/2014/main" id="{5B7D2F8C-161C-1157-9EE6-D2727229C073}"/>
+                <a16:creationId xmlns:a16="http://schemas.microsoft.com/office/drawing/2014/main" id="{4ADED152-21BD-C821-93E0-E6FDF41F6AE6}"/>
               </a:ext>
             </a:extLst>
           </p:cNvPr>
@@ -4956,7 +4956,7 @@
           <p:cNvPr id="9" name="Dot5">
             <a:extLst>
               <a:ext uri="{FF2B5EF4-FFF2-40B4-BE49-F238E27FC236}">
-                <a16:creationId xmlns:a16="http://schemas.microsoft.com/office/drawing/2014/main" id="{5B84C30B-957A-2EE4-B111-A904296D6FA4}"/>
+                <a16:creationId xmlns:a16="http://schemas.microsoft.com/office/drawing/2014/main" id="{72055B92-4FFF-E9AC-D4D4-FCDE83012E47}"/>
               </a:ext>
             </a:extLst>
           </p:cNvPr>
@@ -5031,7 +5031,7 @@
           <p:cNvPr id="10" name="Dot6">
             <a:extLst>
               <a:ext uri="{FF2B5EF4-FFF2-40B4-BE49-F238E27FC236}">
-                <a16:creationId xmlns:a16="http://schemas.microsoft.com/office/drawing/2014/main" id="{77A0E91B-8BE8-3712-0799-8595A7366F8B}"/>
+                <a16:creationId xmlns:a16="http://schemas.microsoft.com/office/drawing/2014/main" id="{3E6849E4-D0A7-D7FE-5FE7-DB5A8910C5DD}"/>
               </a:ext>
             </a:extLst>
           </p:cNvPr>
@@ -5106,7 +5106,7 @@
           <p:cNvPr id="11" name="Dot7">
             <a:extLst>
               <a:ext uri="{FF2B5EF4-FFF2-40B4-BE49-F238E27FC236}">
-                <a16:creationId xmlns:a16="http://schemas.microsoft.com/office/drawing/2014/main" id="{9AE010EC-AEBE-264E-A450-B42B86591568}"/>
+                <a16:creationId xmlns:a16="http://schemas.microsoft.com/office/drawing/2014/main" id="{4F4643C7-FE3F-2FBF-3113-1AA54644CB01}"/>
               </a:ext>
             </a:extLst>
           </p:cNvPr>
@@ -5181,7 +5181,7 @@
           <p:cNvPr id="12" name="Dot8">
             <a:extLst>
               <a:ext uri="{FF2B5EF4-FFF2-40B4-BE49-F238E27FC236}">
-                <a16:creationId xmlns:a16="http://schemas.microsoft.com/office/drawing/2014/main" id="{7DA655BC-C6C5-55F4-CEDF-0CEE559A4B90}"/>
+                <a16:creationId xmlns:a16="http://schemas.microsoft.com/office/drawing/2014/main" id="{3FC73397-8A90-D398-D354-59D6361C9F9A}"/>
               </a:ext>
             </a:extLst>
           </p:cNvPr>
@@ -5256,7 +5256,7 @@
           <p:cNvPr id="13" name="TextBox 12">
             <a:extLst>
               <a:ext uri="{FF2B5EF4-FFF2-40B4-BE49-F238E27FC236}">
-                <a16:creationId xmlns:a16="http://schemas.microsoft.com/office/drawing/2014/main" id="{EC5C1231-9E17-0D24-BDE5-098C5D7FF3C8}"/>
+                <a16:creationId xmlns:a16="http://schemas.microsoft.com/office/drawing/2014/main" id="{7BDE338A-D967-12D0-0930-FF1195963D15}"/>
               </a:ext>
             </a:extLst>
           </p:cNvPr>
@@ -5293,7 +5293,7 @@
     </p:spTree>
     <p:extLst>
       <p:ext uri="{BB962C8B-B14F-4D97-AF65-F5344CB8AC3E}">
-        <p14:creationId xmlns:p14="http://schemas.microsoft.com/office/powerpoint/2010/main" val="3963424599"/>
+        <p14:creationId xmlns:p14="http://schemas.microsoft.com/office/powerpoint/2010/main" val="3494223012"/>
       </p:ext>
     </p:extLst>
   </p:cSld>
@@ -5325,7 +5325,7 @@
           <p:cNvPr id="2" name="Heading">
             <a:extLst>
               <a:ext uri="{FF2B5EF4-FFF2-40B4-BE49-F238E27FC236}">
-                <a16:creationId xmlns:a16="http://schemas.microsoft.com/office/drawing/2014/main" id="{BBBA7EFF-B211-2A26-F6BF-ED5256B3DD0B}"/>
+                <a16:creationId xmlns:a16="http://schemas.microsoft.com/office/drawing/2014/main" id="{78B255D9-AA66-60AB-1241-678642AEB620}"/>
               </a:ext>
             </a:extLst>
           </p:cNvPr>
@@ -5364,7 +5364,7 @@
           <p:cNvPr id="3" name="Instructions">
             <a:extLst>
               <a:ext uri="{FF2B5EF4-FFF2-40B4-BE49-F238E27FC236}">
-                <a16:creationId xmlns:a16="http://schemas.microsoft.com/office/drawing/2014/main" id="{703D8E30-8FEA-39CE-9822-BFBFD5485F7F}"/>
+                <a16:creationId xmlns:a16="http://schemas.microsoft.com/office/drawing/2014/main" id="{A0EF3B0D-61F2-4B66-88A1-EDE7A491E611}"/>
               </a:ext>
             </a:extLst>
           </p:cNvPr>
@@ -5403,7 +5403,7 @@
           <p:cNvPr id="4" name="Wanderer">
             <a:extLst>
               <a:ext uri="{FF2B5EF4-FFF2-40B4-BE49-F238E27FC236}">
-                <a16:creationId xmlns:a16="http://schemas.microsoft.com/office/drawing/2014/main" id="{84E59930-CE30-B3A4-A6D6-ABFE12E96674}"/>
+                <a16:creationId xmlns:a16="http://schemas.microsoft.com/office/drawing/2014/main" id="{1C5FE0D7-B3CD-6D02-D529-35DF8DB588B3}"/>
               </a:ext>
             </a:extLst>
           </p:cNvPr>
@@ -5478,7 +5478,7 @@
           <p:cNvPr id="5" name="Friend">
             <a:extLst>
               <a:ext uri="{FF2B5EF4-FFF2-40B4-BE49-F238E27FC236}">
-                <a16:creationId xmlns:a16="http://schemas.microsoft.com/office/drawing/2014/main" id="{86240B2C-4773-9E59-41CD-F8F03C0F9B1C}"/>
+                <a16:creationId xmlns:a16="http://schemas.microsoft.com/office/drawing/2014/main" id="{C1D715E6-1FF9-22C1-E265-3C564FD7FAC8}"/>
               </a:ext>
             </a:extLst>
           </p:cNvPr>
@@ -5553,7 +5553,7 @@
           <p:cNvPr id="6" name="TextBox 5">
             <a:extLst>
               <a:ext uri="{FF2B5EF4-FFF2-40B4-BE49-F238E27FC236}">
-                <a16:creationId xmlns:a16="http://schemas.microsoft.com/office/drawing/2014/main" id="{8C8118B5-704A-89E0-8193-BB7DCFC18EEC}"/>
+                <a16:creationId xmlns:a16="http://schemas.microsoft.com/office/drawing/2014/main" id="{FB8ED06A-1A88-5B5C-F386-08B90ADC5B1F}"/>
               </a:ext>
             </a:extLst>
           </p:cNvPr>
@@ -5590,7 +5590,7 @@
     </p:spTree>
     <p:extLst>
       <p:ext uri="{BB962C8B-B14F-4D97-AF65-F5344CB8AC3E}">
-        <p14:creationId xmlns:p14="http://schemas.microsoft.com/office/powerpoint/2010/main" val="1041924860"/>
+        <p14:creationId xmlns:p14="http://schemas.microsoft.com/office/powerpoint/2010/main" val="2623134517"/>
       </p:ext>
     </p:extLst>
   </p:cSld>
@@ -5622,7 +5622,7 @@
           <p:cNvPr id="2" name="Heading">
             <a:extLst>
               <a:ext uri="{FF2B5EF4-FFF2-40B4-BE49-F238E27FC236}">
-                <a16:creationId xmlns:a16="http://schemas.microsoft.com/office/drawing/2014/main" id="{6348EAE4-B3A0-B055-4890-2C2F40D64218}"/>
+                <a16:creationId xmlns:a16="http://schemas.microsoft.com/office/drawing/2014/main" id="{09FE611A-4C17-D32F-B856-FB32A8B1E9ED}"/>
               </a:ext>
             </a:extLst>
           </p:cNvPr>
@@ -5661,7 +5661,7 @@
           <p:cNvPr id="3" name="Instructions">
             <a:extLst>
               <a:ext uri="{FF2B5EF4-FFF2-40B4-BE49-F238E27FC236}">
-                <a16:creationId xmlns:a16="http://schemas.microsoft.com/office/drawing/2014/main" id="{0CDC5FC8-92DF-50A6-FF62-F7FA5E7C0970}"/>
+                <a16:creationId xmlns:a16="http://schemas.microsoft.com/office/drawing/2014/main" id="{14423CF9-3AED-329B-9035-AEE6F7EE14C1}"/>
               </a:ext>
             </a:extLst>
           </p:cNvPr>
@@ -5700,7 +5700,7 @@
           <p:cNvPr id="4" name="Plain1">
             <a:extLst>
               <a:ext uri="{FF2B5EF4-FFF2-40B4-BE49-F238E27FC236}">
-                <a16:creationId xmlns:a16="http://schemas.microsoft.com/office/drawing/2014/main" id="{4C726824-6EBB-3919-5B8D-2D2641EFE7A8}"/>
+                <a16:creationId xmlns:a16="http://schemas.microsoft.com/office/drawing/2014/main" id="{D31B0E77-49D4-E61A-DDEB-1F18F66F5E04}"/>
               </a:ext>
             </a:extLst>
           </p:cNvPr>
@@ -5775,7 +5775,7 @@
           <p:cNvPr id="5" name="Tall">
             <a:extLst>
               <a:ext uri="{FF2B5EF4-FFF2-40B4-BE49-F238E27FC236}">
-                <a16:creationId xmlns:a16="http://schemas.microsoft.com/office/drawing/2014/main" id="{9D255819-F2BB-40C7-12C9-7B221C2B2DA8}"/>
+                <a16:creationId xmlns:a16="http://schemas.microsoft.com/office/drawing/2014/main" id="{232E0C09-2325-AE1D-AC64-0A0213953A8E}"/>
               </a:ext>
             </a:extLst>
           </p:cNvPr>
@@ -5850,7 +5850,7 @@
           <p:cNvPr id="6" name="Rotated">
             <a:extLst>
               <a:ext uri="{FF2B5EF4-FFF2-40B4-BE49-F238E27FC236}">
-                <a16:creationId xmlns:a16="http://schemas.microsoft.com/office/drawing/2014/main" id="{645BA143-95DB-F180-0E78-EFC6DEAAF798}"/>
+                <a16:creationId xmlns:a16="http://schemas.microsoft.com/office/drawing/2014/main" id="{79000132-A80A-2ECA-8CEC-B59D6A66F410}"/>
               </a:ext>
             </a:extLst>
           </p:cNvPr>
@@ -5925,7 +5925,7 @@
           <p:cNvPr id="7" name="Plain2">
             <a:extLst>
               <a:ext uri="{FF2B5EF4-FFF2-40B4-BE49-F238E27FC236}">
-                <a16:creationId xmlns:a16="http://schemas.microsoft.com/office/drawing/2014/main" id="{566857FB-B75A-BE4B-E3C3-9BCEDBF9980E}"/>
+                <a16:creationId xmlns:a16="http://schemas.microsoft.com/office/drawing/2014/main" id="{81F2BB79-FBA9-8B9D-C9E6-68FA039D43FD}"/>
               </a:ext>
             </a:extLst>
           </p:cNvPr>
@@ -6000,7 +6000,7 @@
           <p:cNvPr id="8" name="TextBox 7">
             <a:extLst>
               <a:ext uri="{FF2B5EF4-FFF2-40B4-BE49-F238E27FC236}">
-                <a16:creationId xmlns:a16="http://schemas.microsoft.com/office/drawing/2014/main" id="{EE94965C-D977-8D10-40BC-C49D95B550BD}"/>
+                <a16:creationId xmlns:a16="http://schemas.microsoft.com/office/drawing/2014/main" id="{07FCFCE0-3F47-1ACD-C79B-05DC2A788394}"/>
               </a:ext>
             </a:extLst>
           </p:cNvPr>
@@ -6037,7 +6037,7 @@
     </p:spTree>
     <p:extLst>
       <p:ext uri="{BB962C8B-B14F-4D97-AF65-F5344CB8AC3E}">
-        <p14:creationId xmlns:p14="http://schemas.microsoft.com/office/powerpoint/2010/main" val="3318359694"/>
+        <p14:creationId xmlns:p14="http://schemas.microsoft.com/office/powerpoint/2010/main" val="4283363063"/>
       </p:ext>
     </p:extLst>
   </p:cSld>
@@ -6069,7 +6069,7 @@
           <p:cNvPr id="2" name="Heading">
             <a:extLst>
               <a:ext uri="{FF2B5EF4-FFF2-40B4-BE49-F238E27FC236}">
-                <a16:creationId xmlns:a16="http://schemas.microsoft.com/office/drawing/2014/main" id="{54524FCF-DD5F-366A-CBBF-EFF40785A79B}"/>
+                <a16:creationId xmlns:a16="http://schemas.microsoft.com/office/drawing/2014/main" id="{7C0228FC-87C4-DAA1-421B-6A16BDC46F60}"/>
               </a:ext>
             </a:extLst>
           </p:cNvPr>
@@ -6108,7 +6108,7 @@
           <p:cNvPr id="3" name="Instructions">
             <a:extLst>
               <a:ext uri="{FF2B5EF4-FFF2-40B4-BE49-F238E27FC236}">
-                <a16:creationId xmlns:a16="http://schemas.microsoft.com/office/drawing/2014/main" id="{756C6ED0-C99E-E867-0F5F-DCF18883DF73}"/>
+                <a16:creationId xmlns:a16="http://schemas.microsoft.com/office/drawing/2014/main" id="{ABEF2C34-ADE8-641A-5E9F-EAF15B06681D}"/>
               </a:ext>
             </a:extLst>
           </p:cNvPr>
@@ -6147,7 +6147,7 @@
           <p:cNvPr id="4" name="Small1">
             <a:extLst>
               <a:ext uri="{FF2B5EF4-FFF2-40B4-BE49-F238E27FC236}">
-                <a16:creationId xmlns:a16="http://schemas.microsoft.com/office/drawing/2014/main" id="{4CE54208-2F43-1C65-AAA6-514D80550F96}"/>
+                <a16:creationId xmlns:a16="http://schemas.microsoft.com/office/drawing/2014/main" id="{FA270DD6-EB63-5AE4-2D9D-C37B1D604FCC}"/>
               </a:ext>
             </a:extLst>
           </p:cNvPr>
@@ -6222,7 +6222,7 @@
           <p:cNvPr id="5" name="Small2">
             <a:extLst>
               <a:ext uri="{FF2B5EF4-FFF2-40B4-BE49-F238E27FC236}">
-                <a16:creationId xmlns:a16="http://schemas.microsoft.com/office/drawing/2014/main" id="{269F6027-5B03-928C-7806-CB7E5D0C7AC8}"/>
+                <a16:creationId xmlns:a16="http://schemas.microsoft.com/office/drawing/2014/main" id="{87ACFC0F-5C3B-AF1F-13C9-6296AC9C5C42}"/>
               </a:ext>
             </a:extLst>
           </p:cNvPr>
@@ -6297,7 +6297,7 @@
           <p:cNvPr id="6" name="Small3">
             <a:extLst>
               <a:ext uri="{FF2B5EF4-FFF2-40B4-BE49-F238E27FC236}">
-                <a16:creationId xmlns:a16="http://schemas.microsoft.com/office/drawing/2014/main" id="{41917ECA-4EC0-8ECC-E0FE-89D839F84E9A}"/>
+                <a16:creationId xmlns:a16="http://schemas.microsoft.com/office/drawing/2014/main" id="{23A17AC3-4885-F85A-3ED2-7D270E60C262}"/>
               </a:ext>
             </a:extLst>
           </p:cNvPr>
@@ -6372,7 +6372,7 @@
           <p:cNvPr id="7" name="Anchor">
             <a:extLst>
               <a:ext uri="{FF2B5EF4-FFF2-40B4-BE49-F238E27FC236}">
-                <a16:creationId xmlns:a16="http://schemas.microsoft.com/office/drawing/2014/main" id="{36165149-C334-C920-227E-5F6EBA3872A4}"/>
+                <a16:creationId xmlns:a16="http://schemas.microsoft.com/office/drawing/2014/main" id="{F53BFC30-1417-D475-32E1-5F832EB626F5}"/>
               </a:ext>
             </a:extLst>
           </p:cNvPr>
@@ -6445,7 +6445,7 @@
     </p:spTree>
     <p:extLst>
       <p:ext uri="{BB962C8B-B14F-4D97-AF65-F5344CB8AC3E}">
-        <p14:creationId xmlns:p14="http://schemas.microsoft.com/office/powerpoint/2010/main" val="3039244009"/>
+        <p14:creationId xmlns:p14="http://schemas.microsoft.com/office/powerpoint/2010/main" val="3476995574"/>
       </p:ext>
     </p:extLst>
   </p:cSld>
@@ -6477,7 +6477,7 @@
           <p:cNvPr id="2" name="Heading">
             <a:extLst>
               <a:ext uri="{FF2B5EF4-FFF2-40B4-BE49-F238E27FC236}">
-                <a16:creationId xmlns:a16="http://schemas.microsoft.com/office/drawing/2014/main" id="{25DD4E5B-2E1A-8F2F-8696-3F7371C2F868}"/>
+                <a16:creationId xmlns:a16="http://schemas.microsoft.com/office/drawing/2014/main" id="{6332B971-BE64-9C7C-A624-03F22469E4E3}"/>
               </a:ext>
             </a:extLst>
           </p:cNvPr>
@@ -6516,7 +6516,7 @@
           <p:cNvPr id="3" name="Instructions">
             <a:extLst>
               <a:ext uri="{FF2B5EF4-FFF2-40B4-BE49-F238E27FC236}">
-                <a16:creationId xmlns:a16="http://schemas.microsoft.com/office/drawing/2014/main" id="{C80A7FC2-8B7B-A4A6-099A-EBD97296CE4B}"/>
+                <a16:creationId xmlns:a16="http://schemas.microsoft.com/office/drawing/2014/main" id="{EDC06EBE-633D-D9C5-CA7E-06F77C9F41F8}"/>
               </a:ext>
             </a:extLst>
           </p:cNvPr>
@@ -6555,7 +6555,7 @@
           <p:cNvPr id="4" name="W200">
             <a:extLst>
               <a:ext uri="{FF2B5EF4-FFF2-40B4-BE49-F238E27FC236}">
-                <a16:creationId xmlns:a16="http://schemas.microsoft.com/office/drawing/2014/main" id="{A1F1DF5C-9B9C-ADAC-0863-D4EA1441C3C9}"/>
+                <a16:creationId xmlns:a16="http://schemas.microsoft.com/office/drawing/2014/main" id="{E5FCC0DC-5A6D-8598-E1A3-C531913B1E8A}"/>
               </a:ext>
             </a:extLst>
           </p:cNvPr>
@@ -6630,7 +6630,7 @@
           <p:cNvPr id="5" name="W60">
             <a:extLst>
               <a:ext uri="{FF2B5EF4-FFF2-40B4-BE49-F238E27FC236}">
-                <a16:creationId xmlns:a16="http://schemas.microsoft.com/office/drawing/2014/main" id="{ABC4E4C9-F90B-28B4-C5CC-3C1240A6EDAE}"/>
+                <a16:creationId xmlns:a16="http://schemas.microsoft.com/office/drawing/2014/main" id="{465D2FB7-40A2-76F1-4229-1A0B42BADDF7}"/>
               </a:ext>
             </a:extLst>
           </p:cNvPr>
@@ -6705,7 +6705,7 @@
           <p:cNvPr id="6" name="W120">
             <a:extLst>
               <a:ext uri="{FF2B5EF4-FFF2-40B4-BE49-F238E27FC236}">
-                <a16:creationId xmlns:a16="http://schemas.microsoft.com/office/drawing/2014/main" id="{1A659DBB-7D0A-6C9F-DC57-C2168C325679}"/>
+                <a16:creationId xmlns:a16="http://schemas.microsoft.com/office/drawing/2014/main" id="{AB952DE2-F194-37E5-6E70-1D420838C6B5}"/>
               </a:ext>
             </a:extLst>
           </p:cNvPr>
@@ -6780,7 +6780,7 @@
           <p:cNvPr id="7" name="W40">
             <a:extLst>
               <a:ext uri="{FF2B5EF4-FFF2-40B4-BE49-F238E27FC236}">
-                <a16:creationId xmlns:a16="http://schemas.microsoft.com/office/drawing/2014/main" id="{1A6BBD3E-F95C-75F7-CF9F-94E06FCD7D2F}"/>
+                <a16:creationId xmlns:a16="http://schemas.microsoft.com/office/drawing/2014/main" id="{6F76C219-1D0A-225A-BB06-0E805AE15262}"/>
               </a:ext>
             </a:extLst>
           </p:cNvPr>
@@ -6855,7 +6855,7 @@
           <p:cNvPr id="8" name="W150">
             <a:extLst>
               <a:ext uri="{FF2B5EF4-FFF2-40B4-BE49-F238E27FC236}">
-                <a16:creationId xmlns:a16="http://schemas.microsoft.com/office/drawing/2014/main" id="{54DE68D9-B3E9-1E6E-A2FE-BAFD96716B7A}"/>
+                <a16:creationId xmlns:a16="http://schemas.microsoft.com/office/drawing/2014/main" id="{13886150-C337-7387-F290-8A9AF692B510}"/>
               </a:ext>
             </a:extLst>
           </p:cNvPr>
@@ -6930,7 +6930,7 @@
           <p:cNvPr id="9" name="TextBox 8">
             <a:extLst>
               <a:ext uri="{FF2B5EF4-FFF2-40B4-BE49-F238E27FC236}">
-                <a16:creationId xmlns:a16="http://schemas.microsoft.com/office/drawing/2014/main" id="{23FF2FED-F4DF-7E59-EB47-5B79F79AEEEB}"/>
+                <a16:creationId xmlns:a16="http://schemas.microsoft.com/office/drawing/2014/main" id="{8B8B6FA1-63AE-BBBD-99EF-6484832DE5EB}"/>
               </a:ext>
             </a:extLst>
           </p:cNvPr>
@@ -6967,7 +6967,7 @@
     </p:spTree>
     <p:extLst>
       <p:ext uri="{BB962C8B-B14F-4D97-AF65-F5344CB8AC3E}">
-        <p14:creationId xmlns:p14="http://schemas.microsoft.com/office/powerpoint/2010/main" val="1922474494"/>
+        <p14:creationId xmlns:p14="http://schemas.microsoft.com/office/powerpoint/2010/main" val="992412744"/>
       </p:ext>
     </p:extLst>
   </p:cSld>
@@ -6999,7 +6999,7 @@
           <p:cNvPr id="2" name="Heading">
             <a:extLst>
               <a:ext uri="{FF2B5EF4-FFF2-40B4-BE49-F238E27FC236}">
-                <a16:creationId xmlns:a16="http://schemas.microsoft.com/office/drawing/2014/main" id="{CD169922-A324-02B1-2372-66897523F23E}"/>
+                <a16:creationId xmlns:a16="http://schemas.microsoft.com/office/drawing/2014/main" id="{C86FCAAE-86DC-AC34-5DAF-97B44E4F1944}"/>
               </a:ext>
             </a:extLst>
           </p:cNvPr>
@@ -7038,7 +7038,7 @@
           <p:cNvPr id="3" name="Instructions">
             <a:extLst>
               <a:ext uri="{FF2B5EF4-FFF2-40B4-BE49-F238E27FC236}">
-                <a16:creationId xmlns:a16="http://schemas.microsoft.com/office/drawing/2014/main" id="{066AB667-480F-CE31-15FA-94A0977FEB79}"/>
+                <a16:creationId xmlns:a16="http://schemas.microsoft.com/office/drawing/2014/main" id="{42A6A4B4-5F77-D6A0-80BE-D8E8D599162B}"/>
               </a:ext>
             </a:extLst>
           </p:cNvPr>
@@ -7077,7 +7077,7 @@
           <p:cNvPr id="4" name="Gap0">
             <a:extLst>
               <a:ext uri="{FF2B5EF4-FFF2-40B4-BE49-F238E27FC236}">
-                <a16:creationId xmlns:a16="http://schemas.microsoft.com/office/drawing/2014/main" id="{D4071759-D865-EB3D-9790-AF27780AE7DA}"/>
+                <a16:creationId xmlns:a16="http://schemas.microsoft.com/office/drawing/2014/main" id="{A71E0DEB-6C08-D6C2-7F23-8FF7AA2CA5FC}"/>
               </a:ext>
             </a:extLst>
           </p:cNvPr>
@@ -7152,7 +7152,7 @@
           <p:cNvPr id="5" name="Gap1">
             <a:extLst>
               <a:ext uri="{FF2B5EF4-FFF2-40B4-BE49-F238E27FC236}">
-                <a16:creationId xmlns:a16="http://schemas.microsoft.com/office/drawing/2014/main" id="{E60C7305-FC99-ECDD-11EC-2516C3503808}"/>
+                <a16:creationId xmlns:a16="http://schemas.microsoft.com/office/drawing/2014/main" id="{E298BCF6-8885-D187-7C8A-027EBDF7D393}"/>
               </a:ext>
             </a:extLst>
           </p:cNvPr>
@@ -7227,7 +7227,7 @@
           <p:cNvPr id="6" name="Gap2">
             <a:extLst>
               <a:ext uri="{FF2B5EF4-FFF2-40B4-BE49-F238E27FC236}">
-                <a16:creationId xmlns:a16="http://schemas.microsoft.com/office/drawing/2014/main" id="{D9025A85-B03F-AF03-67D9-C4304328D28C}"/>
+                <a16:creationId xmlns:a16="http://schemas.microsoft.com/office/drawing/2014/main" id="{011A2B62-E99E-19EA-3929-41E25E4DB1F0}"/>
               </a:ext>
             </a:extLst>
           </p:cNvPr>
@@ -7302,7 +7302,7 @@
           <p:cNvPr id="7" name="Gap3">
             <a:extLst>
               <a:ext uri="{FF2B5EF4-FFF2-40B4-BE49-F238E27FC236}">
-                <a16:creationId xmlns:a16="http://schemas.microsoft.com/office/drawing/2014/main" id="{63B460FD-AFA8-E9D2-02EA-F6340BF0F1B3}"/>
+                <a16:creationId xmlns:a16="http://schemas.microsoft.com/office/drawing/2014/main" id="{6BDF2543-4370-0A60-E71C-BD2AB500178D}"/>
               </a:ext>
             </a:extLst>
           </p:cNvPr>
@@ -7377,7 +7377,7 @@
           <p:cNvPr id="8" name="TextBox 7">
             <a:extLst>
               <a:ext uri="{FF2B5EF4-FFF2-40B4-BE49-F238E27FC236}">
-                <a16:creationId xmlns:a16="http://schemas.microsoft.com/office/drawing/2014/main" id="{3D00C000-FA1D-1AD6-C223-CDB921B690E7}"/>
+                <a16:creationId xmlns:a16="http://schemas.microsoft.com/office/drawing/2014/main" id="{A1011856-A0B3-204E-44C3-A45E4CB0C4C6}"/>
               </a:ext>
             </a:extLst>
           </p:cNvPr>
@@ -7414,7 +7414,7 @@
     </p:spTree>
     <p:extLst>
       <p:ext uri="{BB962C8B-B14F-4D97-AF65-F5344CB8AC3E}">
-        <p14:creationId xmlns:p14="http://schemas.microsoft.com/office/powerpoint/2010/main" val="4255487300"/>
+        <p14:creationId xmlns:p14="http://schemas.microsoft.com/office/powerpoint/2010/main" val="180292885"/>
       </p:ext>
     </p:extLst>
   </p:cSld>
@@ -7446,7 +7446,7 @@
           <p:cNvPr id="2" name="Heading">
             <a:extLst>
               <a:ext uri="{FF2B5EF4-FFF2-40B4-BE49-F238E27FC236}">
-                <a16:creationId xmlns:a16="http://schemas.microsoft.com/office/drawing/2014/main" id="{2AD1BF41-5E90-9F52-E3DD-7669F6AD1ACF}"/>
+                <a16:creationId xmlns:a16="http://schemas.microsoft.com/office/drawing/2014/main" id="{5E095B06-FD02-D11F-11F8-A46076014E8C}"/>
               </a:ext>
             </a:extLst>
           </p:cNvPr>
@@ -7485,7 +7485,7 @@
           <p:cNvPr id="3" name="Instructions">
             <a:extLst>
               <a:ext uri="{FF2B5EF4-FFF2-40B4-BE49-F238E27FC236}">
-                <a16:creationId xmlns:a16="http://schemas.microsoft.com/office/drawing/2014/main" id="{96895378-DF7E-2817-F939-F34273ACA49C}"/>
+                <a16:creationId xmlns:a16="http://schemas.microsoft.com/office/drawing/2014/main" id="{A9E16B01-F793-D325-67D3-DDEFB278DFC5}"/>
               </a:ext>
             </a:extLst>
           </p:cNvPr>
@@ -7524,7 +7524,7 @@
           <p:cNvPr id="4" name="Odd1">
             <a:extLst>
               <a:ext uri="{FF2B5EF4-FFF2-40B4-BE49-F238E27FC236}">
-                <a16:creationId xmlns:a16="http://schemas.microsoft.com/office/drawing/2014/main" id="{8CD73F17-542F-6941-625A-CEE4428F6621}"/>
+                <a16:creationId xmlns:a16="http://schemas.microsoft.com/office/drawing/2014/main" id="{28DDE9B6-7F84-A3A3-6FF8-E90812FF2C36}"/>
               </a:ext>
             </a:extLst>
           </p:cNvPr>
@@ -7599,7 +7599,7 @@
           <p:cNvPr id="5" name="Odd2">
             <a:extLst>
               <a:ext uri="{FF2B5EF4-FFF2-40B4-BE49-F238E27FC236}">
-                <a16:creationId xmlns:a16="http://schemas.microsoft.com/office/drawing/2014/main" id="{217E60FD-E47F-C1D0-04D7-98E1E499CB5D}"/>
+                <a16:creationId xmlns:a16="http://schemas.microsoft.com/office/drawing/2014/main" id="{51ED0AA8-3C2A-AABB-7A9B-C7988494878B}"/>
               </a:ext>
             </a:extLst>
           </p:cNvPr>
@@ -7674,7 +7674,7 @@
           <p:cNvPr id="6" name="Odd3">
             <a:extLst>
               <a:ext uri="{FF2B5EF4-FFF2-40B4-BE49-F238E27FC236}">
-                <a16:creationId xmlns:a16="http://schemas.microsoft.com/office/drawing/2014/main" id="{AA11F170-D016-FF11-4DD0-CEFED0D066C6}"/>
+                <a16:creationId xmlns:a16="http://schemas.microsoft.com/office/drawing/2014/main" id="{9B220CDC-D6FA-D993-091B-A9170EA7CF08}"/>
               </a:ext>
             </a:extLst>
           </p:cNvPr>
@@ -7749,7 +7749,7 @@
           <p:cNvPr id="7" name="Target">
             <a:extLst>
               <a:ext uri="{FF2B5EF4-FFF2-40B4-BE49-F238E27FC236}">
-                <a16:creationId xmlns:a16="http://schemas.microsoft.com/office/drawing/2014/main" id="{9EA67D49-72FF-6BD8-F04E-4B7EF6981EF4}"/>
+                <a16:creationId xmlns:a16="http://schemas.microsoft.com/office/drawing/2014/main" id="{8DF0D298-825F-7C22-FFFE-DAE275244FD5}"/>
               </a:ext>
             </a:extLst>
           </p:cNvPr>
@@ -7822,7 +7822,7 @@
     </p:spTree>
     <p:extLst>
       <p:ext uri="{BB962C8B-B14F-4D97-AF65-F5344CB8AC3E}">
-        <p14:creationId xmlns:p14="http://schemas.microsoft.com/office/powerpoint/2010/main" val="3990100487"/>
+        <p14:creationId xmlns:p14="http://schemas.microsoft.com/office/powerpoint/2010/main" val="2752170731"/>
       </p:ext>
     </p:extLst>
   </p:cSld>
@@ -7854,7 +7854,7 @@
           <p:cNvPr id="2" name="Heading">
             <a:extLst>
               <a:ext uri="{FF2B5EF4-FFF2-40B4-BE49-F238E27FC236}">
-                <a16:creationId xmlns:a16="http://schemas.microsoft.com/office/drawing/2014/main" id="{1398D14E-A56D-44E7-5A04-CE95696603DA}"/>
+                <a16:creationId xmlns:a16="http://schemas.microsoft.com/office/drawing/2014/main" id="{B2741571-2972-38FE-1C27-DF8926597877}"/>
               </a:ext>
             </a:extLst>
           </p:cNvPr>
@@ -7893,7 +7893,7 @@
           <p:cNvPr id="3" name="Instructions">
             <a:extLst>
               <a:ext uri="{FF2B5EF4-FFF2-40B4-BE49-F238E27FC236}">
-                <a16:creationId xmlns:a16="http://schemas.microsoft.com/office/drawing/2014/main" id="{C8EE3608-4CE2-562D-8088-D968301D579A}"/>
+                <a16:creationId xmlns:a16="http://schemas.microsoft.com/office/drawing/2014/main" id="{9F71BDD3-13FD-BEEF-99F4-E0CE8DEB41B6}"/>
               </a:ext>
             </a:extLst>
           </p:cNvPr>
@@ -7932,7 +7932,7 @@
           <p:cNvPr id="4" name="Card1">
             <a:extLst>
               <a:ext uri="{FF2B5EF4-FFF2-40B4-BE49-F238E27FC236}">
-                <a16:creationId xmlns:a16="http://schemas.microsoft.com/office/drawing/2014/main" id="{CB7CA363-D6E5-9657-5A83-273401D7AFC6}"/>
+                <a16:creationId xmlns:a16="http://schemas.microsoft.com/office/drawing/2014/main" id="{A01D2971-285D-1ECA-6395-1E375015EADE}"/>
               </a:ext>
             </a:extLst>
           </p:cNvPr>
@@ -8007,7 +8007,7 @@
           <p:cNvPr id="5" name="BarA">
             <a:extLst>
               <a:ext uri="{FF2B5EF4-FFF2-40B4-BE49-F238E27FC236}">
-                <a16:creationId xmlns:a16="http://schemas.microsoft.com/office/drawing/2014/main" id="{F5C760CF-5FD9-1813-0127-B4549E23619B}"/>
+                <a16:creationId xmlns:a16="http://schemas.microsoft.com/office/drawing/2014/main" id="{5DC0411F-E130-D430-D45A-A75F93EAC7B3}"/>
               </a:ext>
             </a:extLst>
           </p:cNvPr>
@@ -8079,7 +8079,7 @@
           <p:cNvPr id="6" name="Card2">
             <a:extLst>
               <a:ext uri="{FF2B5EF4-FFF2-40B4-BE49-F238E27FC236}">
-                <a16:creationId xmlns:a16="http://schemas.microsoft.com/office/drawing/2014/main" id="{267FFB33-A492-18CE-ACB9-808BBA01E624}"/>
+                <a16:creationId xmlns:a16="http://schemas.microsoft.com/office/drawing/2014/main" id="{FBDC7E69-8783-587C-A1B9-F528FF8F39C9}"/>
               </a:ext>
             </a:extLst>
           </p:cNvPr>
@@ -8154,7 +8154,7 @@
           <p:cNvPr id="7" name="BarB">
             <a:extLst>
               <a:ext uri="{FF2B5EF4-FFF2-40B4-BE49-F238E27FC236}">
-                <a16:creationId xmlns:a16="http://schemas.microsoft.com/office/drawing/2014/main" id="{E391356F-C6F3-29EE-E143-6A2BD7EED902}"/>
+                <a16:creationId xmlns:a16="http://schemas.microsoft.com/office/drawing/2014/main" id="{05954A50-81A3-B14A-ED12-070E3EAF308C}"/>
               </a:ext>
             </a:extLst>
           </p:cNvPr>
@@ -8226,7 +8226,7 @@
           <p:cNvPr id="8" name="Card3">
             <a:extLst>
               <a:ext uri="{FF2B5EF4-FFF2-40B4-BE49-F238E27FC236}">
-                <a16:creationId xmlns:a16="http://schemas.microsoft.com/office/drawing/2014/main" id="{CD709D99-51D7-365B-3786-1C3747A64EF5}"/>
+                <a16:creationId xmlns:a16="http://schemas.microsoft.com/office/drawing/2014/main" id="{746F86AB-B91B-F1FE-F05C-881A8721A4DE}"/>
               </a:ext>
             </a:extLst>
           </p:cNvPr>
@@ -8301,7 +8301,7 @@
           <p:cNvPr id="9" name="TextBox 8">
             <a:extLst>
               <a:ext uri="{FF2B5EF4-FFF2-40B4-BE49-F238E27FC236}">
-                <a16:creationId xmlns:a16="http://schemas.microsoft.com/office/drawing/2014/main" id="{2D233EC4-D647-E09F-7F28-EE7258D214C7}"/>
+                <a16:creationId xmlns:a16="http://schemas.microsoft.com/office/drawing/2014/main" id="{208491E1-8DA1-7488-298E-5139D1F06AC1}"/>
               </a:ext>
             </a:extLst>
           </p:cNvPr>
@@ -8338,7 +8338,7 @@
     </p:spTree>
     <p:extLst>
       <p:ext uri="{BB962C8B-B14F-4D97-AF65-F5344CB8AC3E}">
-        <p14:creationId xmlns:p14="http://schemas.microsoft.com/office/powerpoint/2010/main" val="2025905167"/>
+        <p14:creationId xmlns:p14="http://schemas.microsoft.com/office/powerpoint/2010/main" val="1825567852"/>
       </p:ext>
     </p:extLst>
   </p:cSld>
@@ -8370,7 +8370,7 @@
           <p:cNvPr id="2" name="Heading">
             <a:extLst>
               <a:ext uri="{FF2B5EF4-FFF2-40B4-BE49-F238E27FC236}">
-                <a16:creationId xmlns:a16="http://schemas.microsoft.com/office/drawing/2014/main" id="{F7B76C2A-6AC0-C443-536C-CDD8D63DE143}"/>
+                <a16:creationId xmlns:a16="http://schemas.microsoft.com/office/drawing/2014/main" id="{3C5CFA6C-F51D-FAA9-8FAC-6B9C78B8D097}"/>
               </a:ext>
             </a:extLst>
           </p:cNvPr>
@@ -8409,7 +8409,7 @@
           <p:cNvPr id="3" name="Instructions">
             <a:extLst>
               <a:ext uri="{FF2B5EF4-FFF2-40B4-BE49-F238E27FC236}">
-                <a16:creationId xmlns:a16="http://schemas.microsoft.com/office/drawing/2014/main" id="{BB4F1250-DF89-598B-50F2-6AFB942F947A}"/>
+                <a16:creationId xmlns:a16="http://schemas.microsoft.com/office/drawing/2014/main" id="{A14E2947-AE52-933A-E2A4-6B539F59A58E}"/>
               </a:ext>
             </a:extLst>
           </p:cNvPr>
@@ -8448,7 +8448,7 @@
           <p:cNvPr id="4" name="Step1">
             <a:extLst>
               <a:ext uri="{FF2B5EF4-FFF2-40B4-BE49-F238E27FC236}">
-                <a16:creationId xmlns:a16="http://schemas.microsoft.com/office/drawing/2014/main" id="{37570710-C687-0A46-ACD5-D4C0925D8E6A}"/>
+                <a16:creationId xmlns:a16="http://schemas.microsoft.com/office/drawing/2014/main" id="{E27AEB45-01B5-6961-6727-FB9F89D408B3}"/>
               </a:ext>
             </a:extLst>
           </p:cNvPr>
@@ -8523,7 +8523,7 @@
           <p:cNvPr id="5" name="Step2">
             <a:extLst>
               <a:ext uri="{FF2B5EF4-FFF2-40B4-BE49-F238E27FC236}">
-                <a16:creationId xmlns:a16="http://schemas.microsoft.com/office/drawing/2014/main" id="{B3348D26-AD66-C66B-2643-3A2E091F42BA}"/>
+                <a16:creationId xmlns:a16="http://schemas.microsoft.com/office/drawing/2014/main" id="{5667E7C2-FE78-916F-F3CD-38DE4211BDEE}"/>
               </a:ext>
             </a:extLst>
           </p:cNvPr>
@@ -8598,7 +8598,7 @@
           <p:cNvPr id="6" name="Step3">
             <a:extLst>
               <a:ext uri="{FF2B5EF4-FFF2-40B4-BE49-F238E27FC236}">
-                <a16:creationId xmlns:a16="http://schemas.microsoft.com/office/drawing/2014/main" id="{9C51DEC2-56FD-4EC7-BF36-73B4CFB0AFF6}"/>
+                <a16:creationId xmlns:a16="http://schemas.microsoft.com/office/drawing/2014/main" id="{7CE9BAF0-3DA0-AED4-3C31-E688E439764B}"/>
               </a:ext>
             </a:extLst>
           </p:cNvPr>
@@ -8673,7 +8673,7 @@
           <p:cNvPr id="7" name="MarginTarget">
             <a:extLst>
               <a:ext uri="{FF2B5EF4-FFF2-40B4-BE49-F238E27FC236}">
-                <a16:creationId xmlns:a16="http://schemas.microsoft.com/office/drawing/2014/main" id="{007B3F54-FF11-5C61-DDAE-EBAF8977058C}"/>
+                <a16:creationId xmlns:a16="http://schemas.microsoft.com/office/drawing/2014/main" id="{CDD79E97-6137-E6D0-69BC-76DED540DBE1}"/>
               </a:ext>
             </a:extLst>
           </p:cNvPr>
@@ -8748,7 +8748,7 @@
           <p:cNvPr id="8" name="TextBox 7">
             <a:extLst>
               <a:ext uri="{FF2B5EF4-FFF2-40B4-BE49-F238E27FC236}">
-                <a16:creationId xmlns:a16="http://schemas.microsoft.com/office/drawing/2014/main" id="{8E559FD5-D32F-22DA-1D30-439234FB6071}"/>
+                <a16:creationId xmlns:a16="http://schemas.microsoft.com/office/drawing/2014/main" id="{B215EA4E-32A1-BB83-7721-F180356552EF}"/>
               </a:ext>
             </a:extLst>
           </p:cNvPr>
@@ -8785,7 +8785,7 @@
     </p:spTree>
     <p:extLst>
       <p:ext uri="{BB962C8B-B14F-4D97-AF65-F5344CB8AC3E}">
-        <p14:creationId xmlns:p14="http://schemas.microsoft.com/office/powerpoint/2010/main" val="2962695768"/>
+        <p14:creationId xmlns:p14="http://schemas.microsoft.com/office/powerpoint/2010/main" val="4172140221"/>
       </p:ext>
     </p:extLst>
   </p:cSld>
@@ -8817,7 +8817,7 @@
           <p:cNvPr id="2" name="Heading">
             <a:extLst>
               <a:ext uri="{FF2B5EF4-FFF2-40B4-BE49-F238E27FC236}">
-                <a16:creationId xmlns:a16="http://schemas.microsoft.com/office/drawing/2014/main" id="{7DD68A99-96E2-663F-417C-8989F25750F3}"/>
+                <a16:creationId xmlns:a16="http://schemas.microsoft.com/office/drawing/2014/main" id="{58BD0420-ED3B-A25A-DA90-3B45048A7D67}"/>
               </a:ext>
             </a:extLst>
           </p:cNvPr>
@@ -8856,7 +8856,7 @@
           <p:cNvPr id="3" name="Instructions">
             <a:extLst>
               <a:ext uri="{FF2B5EF4-FFF2-40B4-BE49-F238E27FC236}">
-                <a16:creationId xmlns:a16="http://schemas.microsoft.com/office/drawing/2014/main" id="{95E44C0A-0C77-F1C0-62BA-CAF07CC5CF7E}"/>
+                <a16:creationId xmlns:a16="http://schemas.microsoft.com/office/drawing/2014/main" id="{74F36F11-954C-2DFE-DF95-02DD86751D6F}"/>
               </a:ext>
             </a:extLst>
           </p:cNvPr>
@@ -8895,7 +8895,7 @@
           <p:cNvPr id="4" name="Ring1">
             <a:extLst>
               <a:ext uri="{FF2B5EF4-FFF2-40B4-BE49-F238E27FC236}">
-                <a16:creationId xmlns:a16="http://schemas.microsoft.com/office/drawing/2014/main" id="{38E6BE97-7491-5ADD-55B3-AAF8F30C265B}"/>
+                <a16:creationId xmlns:a16="http://schemas.microsoft.com/office/drawing/2014/main" id="{AA476AB9-1A68-EDB9-C84F-4296D577D4A7}"/>
               </a:ext>
             </a:extLst>
           </p:cNvPr>
@@ -8970,7 +8970,7 @@
           <p:cNvPr id="5" name="Ring2">
             <a:extLst>
               <a:ext uri="{FF2B5EF4-FFF2-40B4-BE49-F238E27FC236}">
-                <a16:creationId xmlns:a16="http://schemas.microsoft.com/office/drawing/2014/main" id="{35DFBC33-8D66-C0CF-C5CF-922D59BE974F}"/>
+                <a16:creationId xmlns:a16="http://schemas.microsoft.com/office/drawing/2014/main" id="{52B21450-2310-5178-7907-26F425F98836}"/>
               </a:ext>
             </a:extLst>
           </p:cNvPr>
@@ -9045,7 +9045,7 @@
           <p:cNvPr id="6" name="Ring3">
             <a:extLst>
               <a:ext uri="{FF2B5EF4-FFF2-40B4-BE49-F238E27FC236}">
-                <a16:creationId xmlns:a16="http://schemas.microsoft.com/office/drawing/2014/main" id="{FC5AC96C-EE37-57D0-0683-FDD32DD119EB}"/>
+                <a16:creationId xmlns:a16="http://schemas.microsoft.com/office/drawing/2014/main" id="{BF552B0C-6431-4B1E-4FE6-5345CCF9A4A0}"/>
               </a:ext>
             </a:extLst>
           </p:cNvPr>
@@ -9120,7 +9120,7 @@
           <p:cNvPr id="7" name="Ring4">
             <a:extLst>
               <a:ext uri="{FF2B5EF4-FFF2-40B4-BE49-F238E27FC236}">
-                <a16:creationId xmlns:a16="http://schemas.microsoft.com/office/drawing/2014/main" id="{8CD54E30-E5A3-8442-4EB5-9663BF4DF044}"/>
+                <a16:creationId xmlns:a16="http://schemas.microsoft.com/office/drawing/2014/main" id="{4EFBCC00-4C80-0217-FC0B-4F7FD48C74AF}"/>
               </a:ext>
             </a:extLst>
           </p:cNvPr>
@@ -9195,7 +9195,7 @@
           <p:cNvPr id="8" name="Ring5">
             <a:extLst>
               <a:ext uri="{FF2B5EF4-FFF2-40B4-BE49-F238E27FC236}">
-                <a16:creationId xmlns:a16="http://schemas.microsoft.com/office/drawing/2014/main" id="{7E3888ED-E506-BA90-EBBB-8138F3605A95}"/>
+                <a16:creationId xmlns:a16="http://schemas.microsoft.com/office/drawing/2014/main" id="{1352A869-4CB5-BDA5-9136-7D6F72198348}"/>
               </a:ext>
             </a:extLst>
           </p:cNvPr>
@@ -9270,7 +9270,7 @@
           <p:cNvPr id="9" name="TextBox 8">
             <a:extLst>
               <a:ext uri="{FF2B5EF4-FFF2-40B4-BE49-F238E27FC236}">
-                <a16:creationId xmlns:a16="http://schemas.microsoft.com/office/drawing/2014/main" id="{7607AAE3-93DF-5F44-A5EB-12CD056CE89D}"/>
+                <a16:creationId xmlns:a16="http://schemas.microsoft.com/office/drawing/2014/main" id="{65D40878-1D38-37E5-B6C1-FEB22C99C5B7}"/>
               </a:ext>
             </a:extLst>
           </p:cNvPr>
@@ -9307,7 +9307,7 @@
     </p:spTree>
     <p:extLst>
       <p:ext uri="{BB962C8B-B14F-4D97-AF65-F5344CB8AC3E}">
-        <p14:creationId xmlns:p14="http://schemas.microsoft.com/office/powerpoint/2010/main" val="910029166"/>
+        <p14:creationId xmlns:p14="http://schemas.microsoft.com/office/powerpoint/2010/main" val="3236276425"/>
       </p:ext>
     </p:extLst>
   </p:cSld>

--- a/sample/AlignPro-Sample.pptx
+++ b/sample/AlignPro-Sample.pptx
@@ -18,6 +18,10 @@
     <p:sldId id="266" r:id="rId12"/>
     <p:sldId id="267" r:id="rId13"/>
     <p:sldId id="268" r:id="rId14"/>
+    <p:sldId id="269" r:id="rId15"/>
+    <p:sldId id="270" r:id="rId16"/>
+    <p:sldId id="271" r:id="rId17"/>
+    <p:sldId id="272" r:id="rId18"/>
   </p:sldIdLst>
   <p:sldSz cx="12192000" cy="6858000"/>
   <p:notesSz cx="6858000" cy="9144000"/>
@@ -141,7 +145,7 @@
           <p:cNvPr id="2" name="Title 1">
             <a:extLst>
               <a:ext uri="{FF2B5EF4-FFF2-40B4-BE49-F238E27FC236}">
-                <a16:creationId xmlns:a16="http://schemas.microsoft.com/office/drawing/2014/main" id="{74AB4495-D507-0591-B4C9-2073DC216154}"/>
+                <a16:creationId xmlns:a16="http://schemas.microsoft.com/office/drawing/2014/main" id="{B8BEC77E-BFAA-2875-1E2D-6B028BD1D209}"/>
               </a:ext>
             </a:extLst>
           </p:cNvPr>
@@ -179,7 +183,7 @@
           <p:cNvPr id="3" name="Subtitle 2">
             <a:extLst>
               <a:ext uri="{FF2B5EF4-FFF2-40B4-BE49-F238E27FC236}">
-                <a16:creationId xmlns:a16="http://schemas.microsoft.com/office/drawing/2014/main" id="{21E2AD5C-2676-E556-CAE6-5EA3A893EFCD}"/>
+                <a16:creationId xmlns:a16="http://schemas.microsoft.com/office/drawing/2014/main" id="{E9F9C06B-8050-675E-6167-837D8D1303E7}"/>
               </a:ext>
             </a:extLst>
           </p:cNvPr>
@@ -250,7 +254,7 @@
           <p:cNvPr id="4" name="Date Placeholder 3">
             <a:extLst>
               <a:ext uri="{FF2B5EF4-FFF2-40B4-BE49-F238E27FC236}">
-                <a16:creationId xmlns:a16="http://schemas.microsoft.com/office/drawing/2014/main" id="{F36B022E-A4C8-9BD4-C785-A64B0A62A2F7}"/>
+                <a16:creationId xmlns:a16="http://schemas.microsoft.com/office/drawing/2014/main" id="{ED7B3654-A0E3-6699-1096-E7642126CDAC}"/>
               </a:ext>
             </a:extLst>
           </p:cNvPr>
@@ -266,9 +270,9 @@
           <a:bodyPr/>
           <a:lstStyle/>
           <a:p>
-            <a:fld id="{36420DFD-775E-4087-B95C-59938401E0DE}" type="datetimeFigureOut">
+            <a:fld id="{31DDE284-78A4-49CA-804C-6A9295C02157}" type="datetimeFigureOut">
               <a:rPr lang="en-AU" smtClean="0"/>
-              <a:t>21/09/2026</a:t>
+              <a:t>23/09/2026</a:t>
             </a:fld>
             <a:endParaRPr lang="en-AU"/>
           </a:p>
@@ -279,7 +283,7 @@
           <p:cNvPr id="5" name="Footer Placeholder 4">
             <a:extLst>
               <a:ext uri="{FF2B5EF4-FFF2-40B4-BE49-F238E27FC236}">
-                <a16:creationId xmlns:a16="http://schemas.microsoft.com/office/drawing/2014/main" id="{5992E8E7-7EEC-6B02-AE22-783B335D8B2A}"/>
+                <a16:creationId xmlns:a16="http://schemas.microsoft.com/office/drawing/2014/main" id="{4764BB86-6D73-57C6-B745-0DCFCBD92BA9}"/>
               </a:ext>
             </a:extLst>
           </p:cNvPr>
@@ -304,7 +308,7 @@
           <p:cNvPr id="6" name="Slide Number Placeholder 5">
             <a:extLst>
               <a:ext uri="{FF2B5EF4-FFF2-40B4-BE49-F238E27FC236}">
-                <a16:creationId xmlns:a16="http://schemas.microsoft.com/office/drawing/2014/main" id="{71EEBB54-87E5-821E-8A3F-EF15DCA7ECA8}"/>
+                <a16:creationId xmlns:a16="http://schemas.microsoft.com/office/drawing/2014/main" id="{8F9446A1-2E1A-FD7D-EE64-37E156839C3D}"/>
               </a:ext>
             </a:extLst>
           </p:cNvPr>
@@ -320,7 +324,7 @@
           <a:bodyPr/>
           <a:lstStyle/>
           <a:p>
-            <a:fld id="{F543EE84-2D39-48D4-B172-A2319F73BD07}" type="slidenum">
+            <a:fld id="{0A635631-434B-460F-812D-B1531B39C8B0}" type="slidenum">
               <a:rPr lang="en-AU" smtClean="0"/>
               <a:t>‹#›</a:t>
             </a:fld>
@@ -331,7 +335,7 @@
     </p:spTree>
     <p:extLst>
       <p:ext uri="{BB962C8B-B14F-4D97-AF65-F5344CB8AC3E}">
-        <p14:creationId xmlns:p14="http://schemas.microsoft.com/office/powerpoint/2010/main" val="1189479094"/>
+        <p14:creationId xmlns:p14="http://schemas.microsoft.com/office/powerpoint/2010/main" val="1434544206"/>
       </p:ext>
     </p:extLst>
   </p:cSld>
@@ -363,7 +367,7 @@
           <p:cNvPr id="2" name="Title 1">
             <a:extLst>
               <a:ext uri="{FF2B5EF4-FFF2-40B4-BE49-F238E27FC236}">
-                <a16:creationId xmlns:a16="http://schemas.microsoft.com/office/drawing/2014/main" id="{38958A4A-42DA-2552-575C-F379E442CD1B}"/>
+                <a16:creationId xmlns:a16="http://schemas.microsoft.com/office/drawing/2014/main" id="{D4212DC4-89EF-D668-B438-5E0C8119ED43}"/>
               </a:ext>
             </a:extLst>
           </p:cNvPr>
@@ -392,7 +396,7 @@
           <p:cNvPr id="3" name="Vertical Text Placeholder 2">
             <a:extLst>
               <a:ext uri="{FF2B5EF4-FFF2-40B4-BE49-F238E27FC236}">
-                <a16:creationId xmlns:a16="http://schemas.microsoft.com/office/drawing/2014/main" id="{50AFB988-09A4-D425-0A10-C6DA0AC317C5}"/>
+                <a16:creationId xmlns:a16="http://schemas.microsoft.com/office/drawing/2014/main" id="{461F6FE7-941E-AF02-8E0E-0337CAC23CA4}"/>
               </a:ext>
             </a:extLst>
           </p:cNvPr>
@@ -450,7 +454,7 @@
           <p:cNvPr id="4" name="Date Placeholder 3">
             <a:extLst>
               <a:ext uri="{FF2B5EF4-FFF2-40B4-BE49-F238E27FC236}">
-                <a16:creationId xmlns:a16="http://schemas.microsoft.com/office/drawing/2014/main" id="{02FBB8B2-F88B-7A8E-9A51-EDB709094264}"/>
+                <a16:creationId xmlns:a16="http://schemas.microsoft.com/office/drawing/2014/main" id="{11188BD6-85F4-2805-DE31-5FB34220AEA5}"/>
               </a:ext>
             </a:extLst>
           </p:cNvPr>
@@ -466,9 +470,9 @@
           <a:bodyPr/>
           <a:lstStyle/>
           <a:p>
-            <a:fld id="{36420DFD-775E-4087-B95C-59938401E0DE}" type="datetimeFigureOut">
+            <a:fld id="{31DDE284-78A4-49CA-804C-6A9295C02157}" type="datetimeFigureOut">
               <a:rPr lang="en-AU" smtClean="0"/>
-              <a:t>21/09/2026</a:t>
+              <a:t>23/09/2026</a:t>
             </a:fld>
             <a:endParaRPr lang="en-AU"/>
           </a:p>
@@ -479,7 +483,7 @@
           <p:cNvPr id="5" name="Footer Placeholder 4">
             <a:extLst>
               <a:ext uri="{FF2B5EF4-FFF2-40B4-BE49-F238E27FC236}">
-                <a16:creationId xmlns:a16="http://schemas.microsoft.com/office/drawing/2014/main" id="{FF3148A1-5863-5F39-AA86-FEE7CC674D4F}"/>
+                <a16:creationId xmlns:a16="http://schemas.microsoft.com/office/drawing/2014/main" id="{85AB4041-B03F-4AA2-D288-3B0208A67852}"/>
               </a:ext>
             </a:extLst>
           </p:cNvPr>
@@ -504,7 +508,7 @@
           <p:cNvPr id="6" name="Slide Number Placeholder 5">
             <a:extLst>
               <a:ext uri="{FF2B5EF4-FFF2-40B4-BE49-F238E27FC236}">
-                <a16:creationId xmlns:a16="http://schemas.microsoft.com/office/drawing/2014/main" id="{84080FAF-39A3-E7B9-22CD-D135BCB1A823}"/>
+                <a16:creationId xmlns:a16="http://schemas.microsoft.com/office/drawing/2014/main" id="{B614F442-8E17-DEB7-3AC3-DD1E408D55FF}"/>
               </a:ext>
             </a:extLst>
           </p:cNvPr>
@@ -520,7 +524,7 @@
           <a:bodyPr/>
           <a:lstStyle/>
           <a:p>
-            <a:fld id="{F543EE84-2D39-48D4-B172-A2319F73BD07}" type="slidenum">
+            <a:fld id="{0A635631-434B-460F-812D-B1531B39C8B0}" type="slidenum">
               <a:rPr lang="en-AU" smtClean="0"/>
               <a:t>‹#›</a:t>
             </a:fld>
@@ -531,7 +535,7 @@
     </p:spTree>
     <p:extLst>
       <p:ext uri="{BB962C8B-B14F-4D97-AF65-F5344CB8AC3E}">
-        <p14:creationId xmlns:p14="http://schemas.microsoft.com/office/powerpoint/2010/main" val="1108059973"/>
+        <p14:creationId xmlns:p14="http://schemas.microsoft.com/office/powerpoint/2010/main" val="3887727080"/>
       </p:ext>
     </p:extLst>
   </p:cSld>
@@ -563,7 +567,7 @@
           <p:cNvPr id="2" name="Vertical Title 1">
             <a:extLst>
               <a:ext uri="{FF2B5EF4-FFF2-40B4-BE49-F238E27FC236}">
-                <a16:creationId xmlns:a16="http://schemas.microsoft.com/office/drawing/2014/main" id="{C2C5C996-87C8-21E0-8C3B-CF0DEA75ACD5}"/>
+                <a16:creationId xmlns:a16="http://schemas.microsoft.com/office/drawing/2014/main" id="{13437BFE-B3CA-BE87-FF0E-518833C00A06}"/>
               </a:ext>
             </a:extLst>
           </p:cNvPr>
@@ -597,7 +601,7 @@
           <p:cNvPr id="3" name="Vertical Text Placeholder 2">
             <a:extLst>
               <a:ext uri="{FF2B5EF4-FFF2-40B4-BE49-F238E27FC236}">
-                <a16:creationId xmlns:a16="http://schemas.microsoft.com/office/drawing/2014/main" id="{85581260-9B2C-0AF1-7739-D9B8997EB30B}"/>
+                <a16:creationId xmlns:a16="http://schemas.microsoft.com/office/drawing/2014/main" id="{63E9EA55-4CD3-FFB6-8645-AD19C9FB1C05}"/>
               </a:ext>
             </a:extLst>
           </p:cNvPr>
@@ -660,7 +664,7 @@
           <p:cNvPr id="4" name="Date Placeholder 3">
             <a:extLst>
               <a:ext uri="{FF2B5EF4-FFF2-40B4-BE49-F238E27FC236}">
-                <a16:creationId xmlns:a16="http://schemas.microsoft.com/office/drawing/2014/main" id="{20DF15CE-DB7F-C63D-0F50-66EBB8768066}"/>
+                <a16:creationId xmlns:a16="http://schemas.microsoft.com/office/drawing/2014/main" id="{F22D879F-51F2-EF4E-C0D8-3099A1B363F5}"/>
               </a:ext>
             </a:extLst>
           </p:cNvPr>
@@ -676,9 +680,9 @@
           <a:bodyPr/>
           <a:lstStyle/>
           <a:p>
-            <a:fld id="{36420DFD-775E-4087-B95C-59938401E0DE}" type="datetimeFigureOut">
+            <a:fld id="{31DDE284-78A4-49CA-804C-6A9295C02157}" type="datetimeFigureOut">
               <a:rPr lang="en-AU" smtClean="0"/>
-              <a:t>21/09/2026</a:t>
+              <a:t>23/09/2026</a:t>
             </a:fld>
             <a:endParaRPr lang="en-AU"/>
           </a:p>
@@ -689,7 +693,7 @@
           <p:cNvPr id="5" name="Footer Placeholder 4">
             <a:extLst>
               <a:ext uri="{FF2B5EF4-FFF2-40B4-BE49-F238E27FC236}">
-                <a16:creationId xmlns:a16="http://schemas.microsoft.com/office/drawing/2014/main" id="{318E82FE-253D-ECE2-7FAC-725F957990F5}"/>
+                <a16:creationId xmlns:a16="http://schemas.microsoft.com/office/drawing/2014/main" id="{A40BEFCB-F23E-0D87-44C3-3AD7DDFB0C61}"/>
               </a:ext>
             </a:extLst>
           </p:cNvPr>
@@ -714,7 +718,7 @@
           <p:cNvPr id="6" name="Slide Number Placeholder 5">
             <a:extLst>
               <a:ext uri="{FF2B5EF4-FFF2-40B4-BE49-F238E27FC236}">
-                <a16:creationId xmlns:a16="http://schemas.microsoft.com/office/drawing/2014/main" id="{5CC52B8E-09DB-AB81-82BE-568E9273886A}"/>
+                <a16:creationId xmlns:a16="http://schemas.microsoft.com/office/drawing/2014/main" id="{64E5508E-252A-7F45-3645-6A392409AB94}"/>
               </a:ext>
             </a:extLst>
           </p:cNvPr>
@@ -730,7 +734,7 @@
           <a:bodyPr/>
           <a:lstStyle/>
           <a:p>
-            <a:fld id="{F543EE84-2D39-48D4-B172-A2319F73BD07}" type="slidenum">
+            <a:fld id="{0A635631-434B-460F-812D-B1531B39C8B0}" type="slidenum">
               <a:rPr lang="en-AU" smtClean="0"/>
               <a:t>‹#›</a:t>
             </a:fld>
@@ -741,7 +745,7 @@
     </p:spTree>
     <p:extLst>
       <p:ext uri="{BB962C8B-B14F-4D97-AF65-F5344CB8AC3E}">
-        <p14:creationId xmlns:p14="http://schemas.microsoft.com/office/powerpoint/2010/main" val="1458765222"/>
+        <p14:creationId xmlns:p14="http://schemas.microsoft.com/office/powerpoint/2010/main" val="1034542168"/>
       </p:ext>
     </p:extLst>
   </p:cSld>
@@ -773,7 +777,7 @@
           <p:cNvPr id="2" name="Title 1">
             <a:extLst>
               <a:ext uri="{FF2B5EF4-FFF2-40B4-BE49-F238E27FC236}">
-                <a16:creationId xmlns:a16="http://schemas.microsoft.com/office/drawing/2014/main" id="{489E67C1-41CE-33AA-3C7E-DA616255834C}"/>
+                <a16:creationId xmlns:a16="http://schemas.microsoft.com/office/drawing/2014/main" id="{2F6FFFBE-95F0-2057-131A-6BC52524D15F}"/>
               </a:ext>
             </a:extLst>
           </p:cNvPr>
@@ -802,7 +806,7 @@
           <p:cNvPr id="3" name="Content Placeholder 2">
             <a:extLst>
               <a:ext uri="{FF2B5EF4-FFF2-40B4-BE49-F238E27FC236}">
-                <a16:creationId xmlns:a16="http://schemas.microsoft.com/office/drawing/2014/main" id="{35BCEBDF-6803-9B20-3477-95193A018190}"/>
+                <a16:creationId xmlns:a16="http://schemas.microsoft.com/office/drawing/2014/main" id="{CA53B2D5-F376-E6A4-7D7E-67A1DB6D3252}"/>
               </a:ext>
             </a:extLst>
           </p:cNvPr>
@@ -860,7 +864,7 @@
           <p:cNvPr id="4" name="Date Placeholder 3">
             <a:extLst>
               <a:ext uri="{FF2B5EF4-FFF2-40B4-BE49-F238E27FC236}">
-                <a16:creationId xmlns:a16="http://schemas.microsoft.com/office/drawing/2014/main" id="{76C06223-11BD-2018-C358-C72A2B00F07B}"/>
+                <a16:creationId xmlns:a16="http://schemas.microsoft.com/office/drawing/2014/main" id="{7C990810-B2BE-4C72-D3D9-A4252ED085CD}"/>
               </a:ext>
             </a:extLst>
           </p:cNvPr>
@@ -876,9 +880,9 @@
           <a:bodyPr/>
           <a:lstStyle/>
           <a:p>
-            <a:fld id="{36420DFD-775E-4087-B95C-59938401E0DE}" type="datetimeFigureOut">
+            <a:fld id="{31DDE284-78A4-49CA-804C-6A9295C02157}" type="datetimeFigureOut">
               <a:rPr lang="en-AU" smtClean="0"/>
-              <a:t>21/09/2026</a:t>
+              <a:t>23/09/2026</a:t>
             </a:fld>
             <a:endParaRPr lang="en-AU"/>
           </a:p>
@@ -889,7 +893,7 @@
           <p:cNvPr id="5" name="Footer Placeholder 4">
             <a:extLst>
               <a:ext uri="{FF2B5EF4-FFF2-40B4-BE49-F238E27FC236}">
-                <a16:creationId xmlns:a16="http://schemas.microsoft.com/office/drawing/2014/main" id="{C03B7F98-7FE5-5CCB-A804-96149D145409}"/>
+                <a16:creationId xmlns:a16="http://schemas.microsoft.com/office/drawing/2014/main" id="{2BC1083B-E91C-8EC6-DBC5-E5A64786742A}"/>
               </a:ext>
             </a:extLst>
           </p:cNvPr>
@@ -914,7 +918,7 @@
           <p:cNvPr id="6" name="Slide Number Placeholder 5">
             <a:extLst>
               <a:ext uri="{FF2B5EF4-FFF2-40B4-BE49-F238E27FC236}">
-                <a16:creationId xmlns:a16="http://schemas.microsoft.com/office/drawing/2014/main" id="{5FDC52ED-3EE8-DAA8-28B2-643A1638A138}"/>
+                <a16:creationId xmlns:a16="http://schemas.microsoft.com/office/drawing/2014/main" id="{26003562-32F7-3E4B-FB1E-99F1F0A15532}"/>
               </a:ext>
             </a:extLst>
           </p:cNvPr>
@@ -930,7 +934,7 @@
           <a:bodyPr/>
           <a:lstStyle/>
           <a:p>
-            <a:fld id="{F543EE84-2D39-48D4-B172-A2319F73BD07}" type="slidenum">
+            <a:fld id="{0A635631-434B-460F-812D-B1531B39C8B0}" type="slidenum">
               <a:rPr lang="en-AU" smtClean="0"/>
               <a:t>‹#›</a:t>
             </a:fld>
@@ -941,7 +945,7 @@
     </p:spTree>
     <p:extLst>
       <p:ext uri="{BB962C8B-B14F-4D97-AF65-F5344CB8AC3E}">
-        <p14:creationId xmlns:p14="http://schemas.microsoft.com/office/powerpoint/2010/main" val="1068021846"/>
+        <p14:creationId xmlns:p14="http://schemas.microsoft.com/office/powerpoint/2010/main" val="1310371225"/>
       </p:ext>
     </p:extLst>
   </p:cSld>
@@ -973,7 +977,7 @@
           <p:cNvPr id="2" name="Title 1">
             <a:extLst>
               <a:ext uri="{FF2B5EF4-FFF2-40B4-BE49-F238E27FC236}">
-                <a16:creationId xmlns:a16="http://schemas.microsoft.com/office/drawing/2014/main" id="{2ADF165B-A8A4-EEBE-AA91-19C82A9A6289}"/>
+                <a16:creationId xmlns:a16="http://schemas.microsoft.com/office/drawing/2014/main" id="{A919B0AE-57DA-33CE-ABC4-E2C8BE7F1DC8}"/>
               </a:ext>
             </a:extLst>
           </p:cNvPr>
@@ -1011,7 +1015,7 @@
           <p:cNvPr id="3" name="Text Placeholder 2">
             <a:extLst>
               <a:ext uri="{FF2B5EF4-FFF2-40B4-BE49-F238E27FC236}">
-                <a16:creationId xmlns:a16="http://schemas.microsoft.com/office/drawing/2014/main" id="{D9EA7774-DDD2-D00C-A403-391C70B871C0}"/>
+                <a16:creationId xmlns:a16="http://schemas.microsoft.com/office/drawing/2014/main" id="{70E0D8C2-FDFE-F29F-334C-DD603F66C970}"/>
               </a:ext>
             </a:extLst>
           </p:cNvPr>
@@ -1136,7 +1140,7 @@
           <p:cNvPr id="4" name="Date Placeholder 3">
             <a:extLst>
               <a:ext uri="{FF2B5EF4-FFF2-40B4-BE49-F238E27FC236}">
-                <a16:creationId xmlns:a16="http://schemas.microsoft.com/office/drawing/2014/main" id="{9A053C88-3EBE-6A8C-B5B2-11BDDEA275E2}"/>
+                <a16:creationId xmlns:a16="http://schemas.microsoft.com/office/drawing/2014/main" id="{9783EAA0-23B4-AEEC-0279-2327BD1A6FED}"/>
               </a:ext>
             </a:extLst>
           </p:cNvPr>
@@ -1152,9 +1156,9 @@
           <a:bodyPr/>
           <a:lstStyle/>
           <a:p>
-            <a:fld id="{36420DFD-775E-4087-B95C-59938401E0DE}" type="datetimeFigureOut">
+            <a:fld id="{31DDE284-78A4-49CA-804C-6A9295C02157}" type="datetimeFigureOut">
               <a:rPr lang="en-AU" smtClean="0"/>
-              <a:t>21/09/2026</a:t>
+              <a:t>23/09/2026</a:t>
             </a:fld>
             <a:endParaRPr lang="en-AU"/>
           </a:p>
@@ -1165,7 +1169,7 @@
           <p:cNvPr id="5" name="Footer Placeholder 4">
             <a:extLst>
               <a:ext uri="{FF2B5EF4-FFF2-40B4-BE49-F238E27FC236}">
-                <a16:creationId xmlns:a16="http://schemas.microsoft.com/office/drawing/2014/main" id="{AD490C7E-16C9-E3B3-5FA4-D273A90BDCB2}"/>
+                <a16:creationId xmlns:a16="http://schemas.microsoft.com/office/drawing/2014/main" id="{B10E1FA2-09C2-6E2F-2703-87545E6B693F}"/>
               </a:ext>
             </a:extLst>
           </p:cNvPr>
@@ -1190,7 +1194,7 @@
           <p:cNvPr id="6" name="Slide Number Placeholder 5">
             <a:extLst>
               <a:ext uri="{FF2B5EF4-FFF2-40B4-BE49-F238E27FC236}">
-                <a16:creationId xmlns:a16="http://schemas.microsoft.com/office/drawing/2014/main" id="{5BFDB5A6-AEC9-6F44-5E39-2911A956E024}"/>
+                <a16:creationId xmlns:a16="http://schemas.microsoft.com/office/drawing/2014/main" id="{3D516AF0-6433-1599-8A9F-925D5CFBFB5C}"/>
               </a:ext>
             </a:extLst>
           </p:cNvPr>
@@ -1206,7 +1210,7 @@
           <a:bodyPr/>
           <a:lstStyle/>
           <a:p>
-            <a:fld id="{F543EE84-2D39-48D4-B172-A2319F73BD07}" type="slidenum">
+            <a:fld id="{0A635631-434B-460F-812D-B1531B39C8B0}" type="slidenum">
               <a:rPr lang="en-AU" smtClean="0"/>
               <a:t>‹#›</a:t>
             </a:fld>
@@ -1217,7 +1221,7 @@
     </p:spTree>
     <p:extLst>
       <p:ext uri="{BB962C8B-B14F-4D97-AF65-F5344CB8AC3E}">
-        <p14:creationId xmlns:p14="http://schemas.microsoft.com/office/powerpoint/2010/main" val="1854299128"/>
+        <p14:creationId xmlns:p14="http://schemas.microsoft.com/office/powerpoint/2010/main" val="1681288487"/>
       </p:ext>
     </p:extLst>
   </p:cSld>
@@ -1249,7 +1253,7 @@
           <p:cNvPr id="2" name="Title 1">
             <a:extLst>
               <a:ext uri="{FF2B5EF4-FFF2-40B4-BE49-F238E27FC236}">
-                <a16:creationId xmlns:a16="http://schemas.microsoft.com/office/drawing/2014/main" id="{DE06354B-B520-7A97-AF3E-D42A5E904874}"/>
+                <a16:creationId xmlns:a16="http://schemas.microsoft.com/office/drawing/2014/main" id="{C40CC3A0-1ECE-2CB3-3CD1-93C2B3A88508}"/>
               </a:ext>
             </a:extLst>
           </p:cNvPr>
@@ -1278,7 +1282,7 @@
           <p:cNvPr id="3" name="Content Placeholder 2">
             <a:extLst>
               <a:ext uri="{FF2B5EF4-FFF2-40B4-BE49-F238E27FC236}">
-                <a16:creationId xmlns:a16="http://schemas.microsoft.com/office/drawing/2014/main" id="{73186E98-2A3A-D05F-496D-4BD7A7BD71DF}"/>
+                <a16:creationId xmlns:a16="http://schemas.microsoft.com/office/drawing/2014/main" id="{BDB5D113-2DEA-4B04-01FF-855502852565}"/>
               </a:ext>
             </a:extLst>
           </p:cNvPr>
@@ -1341,7 +1345,7 @@
           <p:cNvPr id="4" name="Content Placeholder 3">
             <a:extLst>
               <a:ext uri="{FF2B5EF4-FFF2-40B4-BE49-F238E27FC236}">
-                <a16:creationId xmlns:a16="http://schemas.microsoft.com/office/drawing/2014/main" id="{2663B52E-CB63-5005-33C6-2341DF5BA1EB}"/>
+                <a16:creationId xmlns:a16="http://schemas.microsoft.com/office/drawing/2014/main" id="{D074BD10-EAB4-E4BB-7661-523A2DE6FCDD}"/>
               </a:ext>
             </a:extLst>
           </p:cNvPr>
@@ -1404,7 +1408,7 @@
           <p:cNvPr id="5" name="Date Placeholder 4">
             <a:extLst>
               <a:ext uri="{FF2B5EF4-FFF2-40B4-BE49-F238E27FC236}">
-                <a16:creationId xmlns:a16="http://schemas.microsoft.com/office/drawing/2014/main" id="{EE05C6A3-D139-44DF-989A-C728BC38FCA0}"/>
+                <a16:creationId xmlns:a16="http://schemas.microsoft.com/office/drawing/2014/main" id="{5B31C7A0-B7F1-F2DF-45F7-EDCB80DA04B0}"/>
               </a:ext>
             </a:extLst>
           </p:cNvPr>
@@ -1420,9 +1424,9 @@
           <a:bodyPr/>
           <a:lstStyle/>
           <a:p>
-            <a:fld id="{36420DFD-775E-4087-B95C-59938401E0DE}" type="datetimeFigureOut">
+            <a:fld id="{31DDE284-78A4-49CA-804C-6A9295C02157}" type="datetimeFigureOut">
               <a:rPr lang="en-AU" smtClean="0"/>
-              <a:t>21/09/2026</a:t>
+              <a:t>23/09/2026</a:t>
             </a:fld>
             <a:endParaRPr lang="en-AU"/>
           </a:p>
@@ -1433,7 +1437,7 @@
           <p:cNvPr id="6" name="Footer Placeholder 5">
             <a:extLst>
               <a:ext uri="{FF2B5EF4-FFF2-40B4-BE49-F238E27FC236}">
-                <a16:creationId xmlns:a16="http://schemas.microsoft.com/office/drawing/2014/main" id="{C0CA361D-49B7-177C-3696-014CE264F258}"/>
+                <a16:creationId xmlns:a16="http://schemas.microsoft.com/office/drawing/2014/main" id="{CC2A33A1-C17A-BE38-8CD9-073BBDA4A65D}"/>
               </a:ext>
             </a:extLst>
           </p:cNvPr>
@@ -1458,7 +1462,7 @@
           <p:cNvPr id="7" name="Slide Number Placeholder 6">
             <a:extLst>
               <a:ext uri="{FF2B5EF4-FFF2-40B4-BE49-F238E27FC236}">
-                <a16:creationId xmlns:a16="http://schemas.microsoft.com/office/drawing/2014/main" id="{10C6D721-120D-C4AF-8A6A-3441ABC019B6}"/>
+                <a16:creationId xmlns:a16="http://schemas.microsoft.com/office/drawing/2014/main" id="{862919DC-2D11-3EAF-AC3D-30955D92C6DF}"/>
               </a:ext>
             </a:extLst>
           </p:cNvPr>
@@ -1474,7 +1478,7 @@
           <a:bodyPr/>
           <a:lstStyle/>
           <a:p>
-            <a:fld id="{F543EE84-2D39-48D4-B172-A2319F73BD07}" type="slidenum">
+            <a:fld id="{0A635631-434B-460F-812D-B1531B39C8B0}" type="slidenum">
               <a:rPr lang="en-AU" smtClean="0"/>
               <a:t>‹#›</a:t>
             </a:fld>
@@ -1485,7 +1489,7 @@
     </p:spTree>
     <p:extLst>
       <p:ext uri="{BB962C8B-B14F-4D97-AF65-F5344CB8AC3E}">
-        <p14:creationId xmlns:p14="http://schemas.microsoft.com/office/powerpoint/2010/main" val="3505709347"/>
+        <p14:creationId xmlns:p14="http://schemas.microsoft.com/office/powerpoint/2010/main" val="1872761903"/>
       </p:ext>
     </p:extLst>
   </p:cSld>
@@ -1517,7 +1521,7 @@
           <p:cNvPr id="2" name="Title 1">
             <a:extLst>
               <a:ext uri="{FF2B5EF4-FFF2-40B4-BE49-F238E27FC236}">
-                <a16:creationId xmlns:a16="http://schemas.microsoft.com/office/drawing/2014/main" id="{CE2FCF76-3837-9719-7CC9-AF792D118C14}"/>
+                <a16:creationId xmlns:a16="http://schemas.microsoft.com/office/drawing/2014/main" id="{5FC4346B-8520-7805-F583-47876AAA0103}"/>
               </a:ext>
             </a:extLst>
           </p:cNvPr>
@@ -1551,7 +1555,7 @@
           <p:cNvPr id="3" name="Text Placeholder 2">
             <a:extLst>
               <a:ext uri="{FF2B5EF4-FFF2-40B4-BE49-F238E27FC236}">
-                <a16:creationId xmlns:a16="http://schemas.microsoft.com/office/drawing/2014/main" id="{D4294D37-B4F1-CEEB-1F4E-2E4ECE0C414C}"/>
+                <a16:creationId xmlns:a16="http://schemas.microsoft.com/office/drawing/2014/main" id="{9FAE6B56-C0C7-F9E3-6456-E3B118938778}"/>
               </a:ext>
             </a:extLst>
           </p:cNvPr>
@@ -1622,7 +1626,7 @@
           <p:cNvPr id="4" name="Content Placeholder 3">
             <a:extLst>
               <a:ext uri="{FF2B5EF4-FFF2-40B4-BE49-F238E27FC236}">
-                <a16:creationId xmlns:a16="http://schemas.microsoft.com/office/drawing/2014/main" id="{EDB8E8C3-883F-1976-0B41-8C4C87273A5F}"/>
+                <a16:creationId xmlns:a16="http://schemas.microsoft.com/office/drawing/2014/main" id="{CD3F6028-5ECD-3A67-F304-3DCBB08E6424}"/>
               </a:ext>
             </a:extLst>
           </p:cNvPr>
@@ -1685,7 +1689,7 @@
           <p:cNvPr id="5" name="Text Placeholder 4">
             <a:extLst>
               <a:ext uri="{FF2B5EF4-FFF2-40B4-BE49-F238E27FC236}">
-                <a16:creationId xmlns:a16="http://schemas.microsoft.com/office/drawing/2014/main" id="{007CAD8B-07E7-C449-37BE-2B1A7D55CB68}"/>
+                <a16:creationId xmlns:a16="http://schemas.microsoft.com/office/drawing/2014/main" id="{5BBB2C2F-620B-85A2-5F30-E11B9307BD11}"/>
               </a:ext>
             </a:extLst>
           </p:cNvPr>
@@ -1756,7 +1760,7 @@
           <p:cNvPr id="6" name="Content Placeholder 5">
             <a:extLst>
               <a:ext uri="{FF2B5EF4-FFF2-40B4-BE49-F238E27FC236}">
-                <a16:creationId xmlns:a16="http://schemas.microsoft.com/office/drawing/2014/main" id="{3C535663-677C-D2C0-B25E-B1AC94835E73}"/>
+                <a16:creationId xmlns:a16="http://schemas.microsoft.com/office/drawing/2014/main" id="{6C29B7FF-C284-F510-A7A8-5CD29D7DAADB}"/>
               </a:ext>
             </a:extLst>
           </p:cNvPr>
@@ -1819,7 +1823,7 @@
           <p:cNvPr id="7" name="Date Placeholder 6">
             <a:extLst>
               <a:ext uri="{FF2B5EF4-FFF2-40B4-BE49-F238E27FC236}">
-                <a16:creationId xmlns:a16="http://schemas.microsoft.com/office/drawing/2014/main" id="{DC237068-6980-D5F2-C3FC-21207853CFA5}"/>
+                <a16:creationId xmlns:a16="http://schemas.microsoft.com/office/drawing/2014/main" id="{D8F6C9AF-3C5D-7CCE-A116-3C119CDFFC1A}"/>
               </a:ext>
             </a:extLst>
           </p:cNvPr>
@@ -1835,9 +1839,9 @@
           <a:bodyPr/>
           <a:lstStyle/>
           <a:p>
-            <a:fld id="{36420DFD-775E-4087-B95C-59938401E0DE}" type="datetimeFigureOut">
+            <a:fld id="{31DDE284-78A4-49CA-804C-6A9295C02157}" type="datetimeFigureOut">
               <a:rPr lang="en-AU" smtClean="0"/>
-              <a:t>21/09/2026</a:t>
+              <a:t>23/09/2026</a:t>
             </a:fld>
             <a:endParaRPr lang="en-AU"/>
           </a:p>
@@ -1848,7 +1852,7 @@
           <p:cNvPr id="8" name="Footer Placeholder 7">
             <a:extLst>
               <a:ext uri="{FF2B5EF4-FFF2-40B4-BE49-F238E27FC236}">
-                <a16:creationId xmlns:a16="http://schemas.microsoft.com/office/drawing/2014/main" id="{37274891-9C0A-85B0-6804-97EA23D346E0}"/>
+                <a16:creationId xmlns:a16="http://schemas.microsoft.com/office/drawing/2014/main" id="{7A7B9484-2F42-E356-8025-9E4C6094CFEA}"/>
               </a:ext>
             </a:extLst>
           </p:cNvPr>
@@ -1873,7 +1877,7 @@
           <p:cNvPr id="9" name="Slide Number Placeholder 8">
             <a:extLst>
               <a:ext uri="{FF2B5EF4-FFF2-40B4-BE49-F238E27FC236}">
-                <a16:creationId xmlns:a16="http://schemas.microsoft.com/office/drawing/2014/main" id="{DB1E6BAE-75B7-0FB9-4C4F-B6B656EA55C2}"/>
+                <a16:creationId xmlns:a16="http://schemas.microsoft.com/office/drawing/2014/main" id="{F55E31AA-5BE3-3152-79B4-FC9BEFAE6E09}"/>
               </a:ext>
             </a:extLst>
           </p:cNvPr>
@@ -1889,7 +1893,7 @@
           <a:bodyPr/>
           <a:lstStyle/>
           <a:p>
-            <a:fld id="{F543EE84-2D39-48D4-B172-A2319F73BD07}" type="slidenum">
+            <a:fld id="{0A635631-434B-460F-812D-B1531B39C8B0}" type="slidenum">
               <a:rPr lang="en-AU" smtClean="0"/>
               <a:t>‹#›</a:t>
             </a:fld>
@@ -1900,7 +1904,7 @@
     </p:spTree>
     <p:extLst>
       <p:ext uri="{BB962C8B-B14F-4D97-AF65-F5344CB8AC3E}">
-        <p14:creationId xmlns:p14="http://schemas.microsoft.com/office/powerpoint/2010/main" val="2207290976"/>
+        <p14:creationId xmlns:p14="http://schemas.microsoft.com/office/powerpoint/2010/main" val="2187493322"/>
       </p:ext>
     </p:extLst>
   </p:cSld>
@@ -1932,7 +1936,7 @@
           <p:cNvPr id="2" name="Title 1">
             <a:extLst>
               <a:ext uri="{FF2B5EF4-FFF2-40B4-BE49-F238E27FC236}">
-                <a16:creationId xmlns:a16="http://schemas.microsoft.com/office/drawing/2014/main" id="{C0FDB0E7-B1E4-6802-4B86-6E133E8ED55D}"/>
+                <a16:creationId xmlns:a16="http://schemas.microsoft.com/office/drawing/2014/main" id="{DEF61E75-D9CF-FF3B-65A2-074E422DE914}"/>
               </a:ext>
             </a:extLst>
           </p:cNvPr>
@@ -1961,7 +1965,7 @@
           <p:cNvPr id="3" name="Date Placeholder 2">
             <a:extLst>
               <a:ext uri="{FF2B5EF4-FFF2-40B4-BE49-F238E27FC236}">
-                <a16:creationId xmlns:a16="http://schemas.microsoft.com/office/drawing/2014/main" id="{6B781F8E-BDFE-4CC5-C9DA-9E166B8FE111}"/>
+                <a16:creationId xmlns:a16="http://schemas.microsoft.com/office/drawing/2014/main" id="{7302ED5C-AB93-C4A3-3260-A7A7B1ABF973}"/>
               </a:ext>
             </a:extLst>
           </p:cNvPr>
@@ -1977,9 +1981,9 @@
           <a:bodyPr/>
           <a:lstStyle/>
           <a:p>
-            <a:fld id="{36420DFD-775E-4087-B95C-59938401E0DE}" type="datetimeFigureOut">
+            <a:fld id="{31DDE284-78A4-49CA-804C-6A9295C02157}" type="datetimeFigureOut">
               <a:rPr lang="en-AU" smtClean="0"/>
-              <a:t>21/09/2026</a:t>
+              <a:t>23/09/2026</a:t>
             </a:fld>
             <a:endParaRPr lang="en-AU"/>
           </a:p>
@@ -1990,7 +1994,7 @@
           <p:cNvPr id="4" name="Footer Placeholder 3">
             <a:extLst>
               <a:ext uri="{FF2B5EF4-FFF2-40B4-BE49-F238E27FC236}">
-                <a16:creationId xmlns:a16="http://schemas.microsoft.com/office/drawing/2014/main" id="{0AFD4892-76FB-889C-AA3B-61F2174A8716}"/>
+                <a16:creationId xmlns:a16="http://schemas.microsoft.com/office/drawing/2014/main" id="{4751B8F7-7BB5-3BF3-2BB8-659AC232648A}"/>
               </a:ext>
             </a:extLst>
           </p:cNvPr>
@@ -2015,7 +2019,7 @@
           <p:cNvPr id="5" name="Slide Number Placeholder 4">
             <a:extLst>
               <a:ext uri="{FF2B5EF4-FFF2-40B4-BE49-F238E27FC236}">
-                <a16:creationId xmlns:a16="http://schemas.microsoft.com/office/drawing/2014/main" id="{E11F5D44-D69E-EC41-C07A-EBC96E5AD872}"/>
+                <a16:creationId xmlns:a16="http://schemas.microsoft.com/office/drawing/2014/main" id="{A5C07EB8-ECF2-5914-500A-A6CEE80DFA8E}"/>
               </a:ext>
             </a:extLst>
           </p:cNvPr>
@@ -2031,7 +2035,7 @@
           <a:bodyPr/>
           <a:lstStyle/>
           <a:p>
-            <a:fld id="{F543EE84-2D39-48D4-B172-A2319F73BD07}" type="slidenum">
+            <a:fld id="{0A635631-434B-460F-812D-B1531B39C8B0}" type="slidenum">
               <a:rPr lang="en-AU" smtClean="0"/>
               <a:t>‹#›</a:t>
             </a:fld>
@@ -2042,7 +2046,7 @@
     </p:spTree>
     <p:extLst>
       <p:ext uri="{BB962C8B-B14F-4D97-AF65-F5344CB8AC3E}">
-        <p14:creationId xmlns:p14="http://schemas.microsoft.com/office/powerpoint/2010/main" val="1107660750"/>
+        <p14:creationId xmlns:p14="http://schemas.microsoft.com/office/powerpoint/2010/main" val="3890874400"/>
       </p:ext>
     </p:extLst>
   </p:cSld>
@@ -2074,7 +2078,7 @@
           <p:cNvPr id="2" name="Date Placeholder 1">
             <a:extLst>
               <a:ext uri="{FF2B5EF4-FFF2-40B4-BE49-F238E27FC236}">
-                <a16:creationId xmlns:a16="http://schemas.microsoft.com/office/drawing/2014/main" id="{8092A980-79CC-08B5-43E0-8B3801BB2C19}"/>
+                <a16:creationId xmlns:a16="http://schemas.microsoft.com/office/drawing/2014/main" id="{8B8EA94C-D041-13EF-0666-F5FB5A7BF4C4}"/>
               </a:ext>
             </a:extLst>
           </p:cNvPr>
@@ -2090,9 +2094,9 @@
           <a:bodyPr/>
           <a:lstStyle/>
           <a:p>
-            <a:fld id="{36420DFD-775E-4087-B95C-59938401E0DE}" type="datetimeFigureOut">
+            <a:fld id="{31DDE284-78A4-49CA-804C-6A9295C02157}" type="datetimeFigureOut">
               <a:rPr lang="en-AU" smtClean="0"/>
-              <a:t>21/09/2026</a:t>
+              <a:t>23/09/2026</a:t>
             </a:fld>
             <a:endParaRPr lang="en-AU"/>
           </a:p>
@@ -2103,7 +2107,7 @@
           <p:cNvPr id="3" name="Footer Placeholder 2">
             <a:extLst>
               <a:ext uri="{FF2B5EF4-FFF2-40B4-BE49-F238E27FC236}">
-                <a16:creationId xmlns:a16="http://schemas.microsoft.com/office/drawing/2014/main" id="{DE24EBC0-290F-7719-49D1-1F8FED80453D}"/>
+                <a16:creationId xmlns:a16="http://schemas.microsoft.com/office/drawing/2014/main" id="{02C79C94-40F6-7815-1F86-41F3BF03D371}"/>
               </a:ext>
             </a:extLst>
           </p:cNvPr>
@@ -2128,7 +2132,7 @@
           <p:cNvPr id="4" name="Slide Number Placeholder 3">
             <a:extLst>
               <a:ext uri="{FF2B5EF4-FFF2-40B4-BE49-F238E27FC236}">
-                <a16:creationId xmlns:a16="http://schemas.microsoft.com/office/drawing/2014/main" id="{EE2E6F55-9BAB-7B7F-7A39-8FE549CA4D1F}"/>
+                <a16:creationId xmlns:a16="http://schemas.microsoft.com/office/drawing/2014/main" id="{91079046-BAB4-FEE7-1891-63EE04F3B71A}"/>
               </a:ext>
             </a:extLst>
           </p:cNvPr>
@@ -2144,7 +2148,7 @@
           <a:bodyPr/>
           <a:lstStyle/>
           <a:p>
-            <a:fld id="{F543EE84-2D39-48D4-B172-A2319F73BD07}" type="slidenum">
+            <a:fld id="{0A635631-434B-460F-812D-B1531B39C8B0}" type="slidenum">
               <a:rPr lang="en-AU" smtClean="0"/>
               <a:t>‹#›</a:t>
             </a:fld>
@@ -2155,7 +2159,7 @@
     </p:spTree>
     <p:extLst>
       <p:ext uri="{BB962C8B-B14F-4D97-AF65-F5344CB8AC3E}">
-        <p14:creationId xmlns:p14="http://schemas.microsoft.com/office/powerpoint/2010/main" val="2724658001"/>
+        <p14:creationId xmlns:p14="http://schemas.microsoft.com/office/powerpoint/2010/main" val="354210299"/>
       </p:ext>
     </p:extLst>
   </p:cSld>
@@ -2187,7 +2191,7 @@
           <p:cNvPr id="2" name="Title 1">
             <a:extLst>
               <a:ext uri="{FF2B5EF4-FFF2-40B4-BE49-F238E27FC236}">
-                <a16:creationId xmlns:a16="http://schemas.microsoft.com/office/drawing/2014/main" id="{FEAA0B89-D5EE-AC54-00A3-88A5155B8AEE}"/>
+                <a16:creationId xmlns:a16="http://schemas.microsoft.com/office/drawing/2014/main" id="{4A68D8F1-8858-E827-2459-E57D1F1AB347}"/>
               </a:ext>
             </a:extLst>
           </p:cNvPr>
@@ -2225,7 +2229,7 @@
           <p:cNvPr id="3" name="Content Placeholder 2">
             <a:extLst>
               <a:ext uri="{FF2B5EF4-FFF2-40B4-BE49-F238E27FC236}">
-                <a16:creationId xmlns:a16="http://schemas.microsoft.com/office/drawing/2014/main" id="{F5BEA60E-626C-C47B-87EE-1580F8D3D688}"/>
+                <a16:creationId xmlns:a16="http://schemas.microsoft.com/office/drawing/2014/main" id="{88A43DD9-96C0-FD37-BF77-5D56B27DCD97}"/>
               </a:ext>
             </a:extLst>
           </p:cNvPr>
@@ -2316,7 +2320,7 @@
           <p:cNvPr id="4" name="Text Placeholder 3">
             <a:extLst>
               <a:ext uri="{FF2B5EF4-FFF2-40B4-BE49-F238E27FC236}">
-                <a16:creationId xmlns:a16="http://schemas.microsoft.com/office/drawing/2014/main" id="{FE60D2EC-3CC8-66CB-CAFB-D5DC4A008BD9}"/>
+                <a16:creationId xmlns:a16="http://schemas.microsoft.com/office/drawing/2014/main" id="{3A352D90-96F9-D45D-B47C-33943045823E}"/>
               </a:ext>
             </a:extLst>
           </p:cNvPr>
@@ -2387,7 +2391,7 @@
           <p:cNvPr id="5" name="Date Placeholder 4">
             <a:extLst>
               <a:ext uri="{FF2B5EF4-FFF2-40B4-BE49-F238E27FC236}">
-                <a16:creationId xmlns:a16="http://schemas.microsoft.com/office/drawing/2014/main" id="{AB614015-7D84-E624-4BA2-C74D697EF049}"/>
+                <a16:creationId xmlns:a16="http://schemas.microsoft.com/office/drawing/2014/main" id="{ADE5E768-8C87-C8DB-83DC-9EEFCFF0DAE6}"/>
               </a:ext>
             </a:extLst>
           </p:cNvPr>
@@ -2403,9 +2407,9 @@
           <a:bodyPr/>
           <a:lstStyle/>
           <a:p>
-            <a:fld id="{36420DFD-775E-4087-B95C-59938401E0DE}" type="datetimeFigureOut">
+            <a:fld id="{31DDE284-78A4-49CA-804C-6A9295C02157}" type="datetimeFigureOut">
               <a:rPr lang="en-AU" smtClean="0"/>
-              <a:t>21/09/2026</a:t>
+              <a:t>23/09/2026</a:t>
             </a:fld>
             <a:endParaRPr lang="en-AU"/>
           </a:p>
@@ -2416,7 +2420,7 @@
           <p:cNvPr id="6" name="Footer Placeholder 5">
             <a:extLst>
               <a:ext uri="{FF2B5EF4-FFF2-40B4-BE49-F238E27FC236}">
-                <a16:creationId xmlns:a16="http://schemas.microsoft.com/office/drawing/2014/main" id="{EA4D3BA1-AAF2-E75E-E7F8-6081AB7FCD10}"/>
+                <a16:creationId xmlns:a16="http://schemas.microsoft.com/office/drawing/2014/main" id="{3B15AB34-15C0-FD51-C9B5-DDAADF14CB15}"/>
               </a:ext>
             </a:extLst>
           </p:cNvPr>
@@ -2441,7 +2445,7 @@
           <p:cNvPr id="7" name="Slide Number Placeholder 6">
             <a:extLst>
               <a:ext uri="{FF2B5EF4-FFF2-40B4-BE49-F238E27FC236}">
-                <a16:creationId xmlns:a16="http://schemas.microsoft.com/office/drawing/2014/main" id="{CD51FB9F-D1FA-C66D-E1BE-97ECF4B2C93C}"/>
+                <a16:creationId xmlns:a16="http://schemas.microsoft.com/office/drawing/2014/main" id="{19136DA1-8D3C-9773-CB9A-80279814C437}"/>
               </a:ext>
             </a:extLst>
           </p:cNvPr>
@@ -2457,7 +2461,7 @@
           <a:bodyPr/>
           <a:lstStyle/>
           <a:p>
-            <a:fld id="{F543EE84-2D39-48D4-B172-A2319F73BD07}" type="slidenum">
+            <a:fld id="{0A635631-434B-460F-812D-B1531B39C8B0}" type="slidenum">
               <a:rPr lang="en-AU" smtClean="0"/>
               <a:t>‹#›</a:t>
             </a:fld>
@@ -2468,7 +2472,7 @@
     </p:spTree>
     <p:extLst>
       <p:ext uri="{BB962C8B-B14F-4D97-AF65-F5344CB8AC3E}">
-        <p14:creationId xmlns:p14="http://schemas.microsoft.com/office/powerpoint/2010/main" val="862394681"/>
+        <p14:creationId xmlns:p14="http://schemas.microsoft.com/office/powerpoint/2010/main" val="2235984444"/>
       </p:ext>
     </p:extLst>
   </p:cSld>
@@ -2500,7 +2504,7 @@
           <p:cNvPr id="2" name="Title 1">
             <a:extLst>
               <a:ext uri="{FF2B5EF4-FFF2-40B4-BE49-F238E27FC236}">
-                <a16:creationId xmlns:a16="http://schemas.microsoft.com/office/drawing/2014/main" id="{E2611158-0DD2-9620-AEB6-09E32623090E}"/>
+                <a16:creationId xmlns:a16="http://schemas.microsoft.com/office/drawing/2014/main" id="{5708E02F-8825-959E-63FB-EDAC917FB000}"/>
               </a:ext>
             </a:extLst>
           </p:cNvPr>
@@ -2538,7 +2542,7 @@
           <p:cNvPr id="3" name="Picture Placeholder 2">
             <a:extLst>
               <a:ext uri="{FF2B5EF4-FFF2-40B4-BE49-F238E27FC236}">
-                <a16:creationId xmlns:a16="http://schemas.microsoft.com/office/drawing/2014/main" id="{5C3FF936-40FA-C2C8-72E3-815D4C3D2A4B}"/>
+                <a16:creationId xmlns:a16="http://schemas.microsoft.com/office/drawing/2014/main" id="{498E6474-FD4B-B26C-5508-02561E938A4B}"/>
               </a:ext>
             </a:extLst>
           </p:cNvPr>
@@ -2605,7 +2609,7 @@
           <p:cNvPr id="4" name="Text Placeholder 3">
             <a:extLst>
               <a:ext uri="{FF2B5EF4-FFF2-40B4-BE49-F238E27FC236}">
-                <a16:creationId xmlns:a16="http://schemas.microsoft.com/office/drawing/2014/main" id="{B8B9CC37-659C-3AE9-23BD-3EA2FE47DBAE}"/>
+                <a16:creationId xmlns:a16="http://schemas.microsoft.com/office/drawing/2014/main" id="{321DA39B-0CD0-7586-78E1-7D6E345E5705}"/>
               </a:ext>
             </a:extLst>
           </p:cNvPr>
@@ -2676,7 +2680,7 @@
           <p:cNvPr id="5" name="Date Placeholder 4">
             <a:extLst>
               <a:ext uri="{FF2B5EF4-FFF2-40B4-BE49-F238E27FC236}">
-                <a16:creationId xmlns:a16="http://schemas.microsoft.com/office/drawing/2014/main" id="{A72BAA14-2A32-5D77-AE9D-FC7C14F7F11E}"/>
+                <a16:creationId xmlns:a16="http://schemas.microsoft.com/office/drawing/2014/main" id="{401A7480-7C6B-26F4-5F32-AF49385681F9}"/>
               </a:ext>
             </a:extLst>
           </p:cNvPr>
@@ -2692,9 +2696,9 @@
           <a:bodyPr/>
           <a:lstStyle/>
           <a:p>
-            <a:fld id="{36420DFD-775E-4087-B95C-59938401E0DE}" type="datetimeFigureOut">
+            <a:fld id="{31DDE284-78A4-49CA-804C-6A9295C02157}" type="datetimeFigureOut">
               <a:rPr lang="en-AU" smtClean="0"/>
-              <a:t>21/09/2026</a:t>
+              <a:t>23/09/2026</a:t>
             </a:fld>
             <a:endParaRPr lang="en-AU"/>
           </a:p>
@@ -2705,7 +2709,7 @@
           <p:cNvPr id="6" name="Footer Placeholder 5">
             <a:extLst>
               <a:ext uri="{FF2B5EF4-FFF2-40B4-BE49-F238E27FC236}">
-                <a16:creationId xmlns:a16="http://schemas.microsoft.com/office/drawing/2014/main" id="{3AB2CAC6-FE14-4483-9F89-71556393D784}"/>
+                <a16:creationId xmlns:a16="http://schemas.microsoft.com/office/drawing/2014/main" id="{EA8CD120-B71A-D58F-AD4F-55E69EE1BFD7}"/>
               </a:ext>
             </a:extLst>
           </p:cNvPr>
@@ -2730,7 +2734,7 @@
           <p:cNvPr id="7" name="Slide Number Placeholder 6">
             <a:extLst>
               <a:ext uri="{FF2B5EF4-FFF2-40B4-BE49-F238E27FC236}">
-                <a16:creationId xmlns:a16="http://schemas.microsoft.com/office/drawing/2014/main" id="{D87A338D-8B90-9ECB-D0A3-C2B8558E353C}"/>
+                <a16:creationId xmlns:a16="http://schemas.microsoft.com/office/drawing/2014/main" id="{70F6C459-8EBD-2094-B9D0-5DCDEBCB59FD}"/>
               </a:ext>
             </a:extLst>
           </p:cNvPr>
@@ -2746,7 +2750,7 @@
           <a:bodyPr/>
           <a:lstStyle/>
           <a:p>
-            <a:fld id="{F543EE84-2D39-48D4-B172-A2319F73BD07}" type="slidenum">
+            <a:fld id="{0A635631-434B-460F-812D-B1531B39C8B0}" type="slidenum">
               <a:rPr lang="en-AU" smtClean="0"/>
               <a:t>‹#›</a:t>
             </a:fld>
@@ -2757,7 +2761,7 @@
     </p:spTree>
     <p:extLst>
       <p:ext uri="{BB962C8B-B14F-4D97-AF65-F5344CB8AC3E}">
-        <p14:creationId xmlns:p14="http://schemas.microsoft.com/office/powerpoint/2010/main" val="124929828"/>
+        <p14:creationId xmlns:p14="http://schemas.microsoft.com/office/powerpoint/2010/main" val="561303914"/>
       </p:ext>
     </p:extLst>
   </p:cSld>
@@ -2794,7 +2798,7 @@
           <p:cNvPr id="2" name="Title Placeholder 1">
             <a:extLst>
               <a:ext uri="{FF2B5EF4-FFF2-40B4-BE49-F238E27FC236}">
-                <a16:creationId xmlns:a16="http://schemas.microsoft.com/office/drawing/2014/main" id="{CFB0CC0E-23EA-30B8-4093-13752E1A4B7C}"/>
+                <a16:creationId xmlns:a16="http://schemas.microsoft.com/office/drawing/2014/main" id="{D972C24E-4E07-5AEC-1BAA-1AF0208EFEE5}"/>
               </a:ext>
             </a:extLst>
           </p:cNvPr>
@@ -2833,7 +2837,7 @@
           <p:cNvPr id="3" name="Text Placeholder 2">
             <a:extLst>
               <a:ext uri="{FF2B5EF4-FFF2-40B4-BE49-F238E27FC236}">
-                <a16:creationId xmlns:a16="http://schemas.microsoft.com/office/drawing/2014/main" id="{A474C9D1-9A5F-4D83-5D33-1C71074C347F}"/>
+                <a16:creationId xmlns:a16="http://schemas.microsoft.com/office/drawing/2014/main" id="{DCA7F556-2718-677A-C8B8-A3869569945A}"/>
               </a:ext>
             </a:extLst>
           </p:cNvPr>
@@ -2901,7 +2905,7 @@
           <p:cNvPr id="4" name="Date Placeholder 3">
             <a:extLst>
               <a:ext uri="{FF2B5EF4-FFF2-40B4-BE49-F238E27FC236}">
-                <a16:creationId xmlns:a16="http://schemas.microsoft.com/office/drawing/2014/main" id="{AE29FD47-8F19-9AA5-0E8C-7806FEE63857}"/>
+                <a16:creationId xmlns:a16="http://schemas.microsoft.com/office/drawing/2014/main" id="{489C3F45-84D9-B81D-24A3-DB6A5AE55169}"/>
               </a:ext>
             </a:extLst>
           </p:cNvPr>
@@ -2935,9 +2939,9 @@
             </a:lvl1pPr>
           </a:lstStyle>
           <a:p>
-            <a:fld id="{36420DFD-775E-4087-B95C-59938401E0DE}" type="datetimeFigureOut">
+            <a:fld id="{31DDE284-78A4-49CA-804C-6A9295C02157}" type="datetimeFigureOut">
               <a:rPr lang="en-AU" smtClean="0"/>
-              <a:t>21/09/2026</a:t>
+              <a:t>23/09/2026</a:t>
             </a:fld>
             <a:endParaRPr lang="en-AU"/>
           </a:p>
@@ -2948,7 +2952,7 @@
           <p:cNvPr id="5" name="Footer Placeholder 4">
             <a:extLst>
               <a:ext uri="{FF2B5EF4-FFF2-40B4-BE49-F238E27FC236}">
-                <a16:creationId xmlns:a16="http://schemas.microsoft.com/office/drawing/2014/main" id="{54573709-F9A9-AF38-46FC-A6177E80E5AB}"/>
+                <a16:creationId xmlns:a16="http://schemas.microsoft.com/office/drawing/2014/main" id="{248A2E20-E2AE-46DA-50EE-2205A3C32009}"/>
               </a:ext>
             </a:extLst>
           </p:cNvPr>
@@ -2991,7 +2995,7 @@
           <p:cNvPr id="6" name="Slide Number Placeholder 5">
             <a:extLst>
               <a:ext uri="{FF2B5EF4-FFF2-40B4-BE49-F238E27FC236}">
-                <a16:creationId xmlns:a16="http://schemas.microsoft.com/office/drawing/2014/main" id="{383C2227-9820-8E78-54BA-3B8BCB47A0F2}"/>
+                <a16:creationId xmlns:a16="http://schemas.microsoft.com/office/drawing/2014/main" id="{441D0795-2B7D-1971-B894-C0E24F42F8CA}"/>
               </a:ext>
             </a:extLst>
           </p:cNvPr>
@@ -3025,7 +3029,7 @@
             </a:lvl1pPr>
           </a:lstStyle>
           <a:p>
-            <a:fld id="{F543EE84-2D39-48D4-B172-A2319F73BD07}" type="slidenum">
+            <a:fld id="{0A635631-434B-460F-812D-B1531B39C8B0}" type="slidenum">
               <a:rPr lang="en-AU" smtClean="0"/>
               <a:t>‹#›</a:t>
             </a:fld>
@@ -3036,7 +3040,7 @@
     </p:spTree>
     <p:extLst>
       <p:ext uri="{BB962C8B-B14F-4D97-AF65-F5344CB8AC3E}">
-        <p14:creationId xmlns:p14="http://schemas.microsoft.com/office/powerpoint/2010/main" val="3861507673"/>
+        <p14:creationId xmlns:p14="http://schemas.microsoft.com/office/powerpoint/2010/main" val="3099906517"/>
       </p:ext>
     </p:extLst>
   </p:cSld>
@@ -3359,7 +3363,7 @@
           <p:cNvPr id="2" name="Heading">
             <a:extLst>
               <a:ext uri="{FF2B5EF4-FFF2-40B4-BE49-F238E27FC236}">
-                <a16:creationId xmlns:a16="http://schemas.microsoft.com/office/drawing/2014/main" id="{1A9964AF-44F4-B3F1-58CE-91D08A33A781}"/>
+                <a16:creationId xmlns:a16="http://schemas.microsoft.com/office/drawing/2014/main" id="{F7A1C717-B700-BC40-8403-100BA89053D2}"/>
               </a:ext>
             </a:extLst>
           </p:cNvPr>
@@ -3398,7 +3402,7 @@
           <p:cNvPr id="3" name="Instructions">
             <a:extLst>
               <a:ext uri="{FF2B5EF4-FFF2-40B4-BE49-F238E27FC236}">
-                <a16:creationId xmlns:a16="http://schemas.microsoft.com/office/drawing/2014/main" id="{91B93038-DF47-00F3-99F2-31F9AB90B66F}"/>
+                <a16:creationId xmlns:a16="http://schemas.microsoft.com/office/drawing/2014/main" id="{18E8C144-20C3-36AC-73B1-51B5DB299C19}"/>
               </a:ext>
             </a:extLst>
           </p:cNvPr>
@@ -3437,7 +3441,7 @@
           <p:cNvPr id="4" name="TextBox 3">
             <a:extLst>
               <a:ext uri="{FF2B5EF4-FFF2-40B4-BE49-F238E27FC236}">
-                <a16:creationId xmlns:a16="http://schemas.microsoft.com/office/drawing/2014/main" id="{BD380198-27A7-55DE-2AD1-CA726ADB64E1}"/>
+                <a16:creationId xmlns:a16="http://schemas.microsoft.com/office/drawing/2014/main" id="{C914EE38-21A5-FDE2-B7AC-C66CE5FFA9B0}"/>
               </a:ext>
             </a:extLst>
           </p:cNvPr>
@@ -3466,132 +3470,16 @@
                   <a:srgbClr val="282828"/>
                 </a:solidFill>
               </a:rPr>
-              <a:t>The AlignPro tab is on the ribbon.</a:t>
-            </a:r>
-          </a:p>
-          <a:p>
-            <a:endParaRPr lang="en-AU" sz="1500">
-              <a:solidFill>
-                <a:srgbClr val="282828"/>
-              </a:solidFill>
-            </a:endParaRPr>
-          </a:p>
-          <a:p>
-            <a:r>
-              <a:rPr lang="en-AU" sz="1500">
-                <a:solidFill>
-                  <a:srgbClr val="282828"/>
-                </a:solidFill>
-              </a:rPr>
-              <a:t>Two dropdowns carry the state the six align buttons are crossed with:</a:t>
-            </a:r>
-          </a:p>
-          <a:p>
-            <a:endParaRPr lang="en-AU" sz="1500">
-              <a:solidFill>
-                <a:srgbClr val="282828"/>
-              </a:solidFill>
-            </a:endParaRPr>
-          </a:p>
-          <a:p>
-            <a:r>
-              <a:rPr lang="en-AU" sz="1500">
-                <a:solidFill>
-                  <a:srgbClr val="282828"/>
-                </a:solidFill>
-              </a:rPr>
-              <a:t>    Reference  -  what to align against: the anchor shape, the selection, the slide, the</a:t>
-            </a:r>
-          </a:p>
-          <a:p>
-            <a:r>
-              <a:rPr lang="en-AU" sz="1500">
-                <a:solidFill>
-                  <a:srgbClr val="282828"/>
-                </a:solidFill>
-              </a:rPr>
-              <a:t>                  slide margins, or the layout's content placeholder.</a:t>
-            </a:r>
-          </a:p>
-          <a:p>
-            <a:endParaRPr lang="en-AU" sz="1500">
-              <a:solidFill>
-                <a:srgbClr val="282828"/>
-              </a:solidFill>
-            </a:endParaRPr>
-          </a:p>
-          <a:p>
-            <a:r>
-              <a:rPr lang="en-AU" sz="1500">
-                <a:solidFill>
-                  <a:srgbClr val="282828"/>
-                </a:solidFill>
-              </a:rPr>
-              <a:t>    Measure    -  which rectangle to align: the shape frame (what PowerPoint itself uses,</a:t>
-            </a:r>
-          </a:p>
-          <a:p>
-            <a:r>
-              <a:rPr lang="en-AU" sz="1500">
-                <a:solidFill>
-                  <a:srgbClr val="282828"/>
-                </a:solidFill>
-              </a:rPr>
-              <a:t>                  which ignores rotation), the visual bounds (what you actually see), or</a:t>
-            </a:r>
-          </a:p>
-          <a:p>
-            <a:r>
-              <a:rPr lang="en-AU" sz="1500">
-                <a:solidFill>
-                  <a:srgbClr val="282828"/>
-                </a:solidFill>
-              </a:rPr>
-              <a:t>                  the text inside.</a:t>
-            </a:r>
-          </a:p>
-          <a:p>
-            <a:endParaRPr lang="en-AU" sz="1500">
-              <a:solidFill>
-                <a:srgbClr val="282828"/>
-              </a:solidFill>
-            </a:endParaRPr>
-          </a:p>
-          <a:p>
-            <a:r>
-              <a:rPr lang="en-AU" sz="1500">
-                <a:solidFill>
-                  <a:srgbClr val="282828"/>
-                </a:solidFill>
-              </a:rPr>
-              <a:t>Undo is PowerPoint's own - Ctrl+Z, the ribbon button and the Quick Access Toolbar all</a:t>
-            </a:r>
-          </a:p>
-          <a:p>
-            <a:r>
-              <a:rPr lang="en-AU" sz="1500">
-                <a:solidFill>
-                  <a:srgbClr val="282828"/>
-                </a:solidFill>
-              </a:rPr>
-              <a:t>reverse exactly one AlignPro command.</a:t>
-            </a:r>
-          </a:p>
-          <a:p>
-            <a:endParaRPr lang="en-AU" sz="1500">
-              <a:solidFill>
-                <a:srgbClr val="282828"/>
-              </a:solidFill>
-            </a:endParaRPr>
-          </a:p>
-          <a:p>
-            <a:r>
-              <a:rPr lang="en-AU" sz="1500">
-                <a:solidFill>
-                  <a:srgbClr val="282828"/>
-                </a:solidFill>
-              </a:rPr>
-              <a:t>Slide 2 is the one to try first. It is the reason this add-in exists.</a:t>
+              <a:t>The AlignPro tab is on the ribbon.
+Two dropdowns carry the state the six align buttons are crossed with:
+    Reference  -  what to align against: the anchor shape, the selection, the slide, the
+                  slide margins, or the layout's content placeholder.
+    Measure    -  which rectangle to align: the shape frame (what PowerPoint itself uses,
+                  which ignores rotation), the visual bounds (what you actually see), or
+                  the text inside.
+Undo is PowerPoint's own - Ctrl+Z, the ribbon button and the Quick Access Toolbar all
+reverse exactly one AlignPro command.
+Slide 2 is the one to try first. It is the reason this add-in exists.</a:t>
             </a:r>
           </a:p>
         </p:txBody>
@@ -3599,7 +3487,7 @@
     </p:spTree>
     <p:extLst>
       <p:ext uri="{BB962C8B-B14F-4D97-AF65-F5344CB8AC3E}">
-        <p14:creationId xmlns:p14="http://schemas.microsoft.com/office/powerpoint/2010/main" val="1298324244"/>
+        <p14:creationId xmlns:p14="http://schemas.microsoft.com/office/powerpoint/2010/main" val="3546679244"/>
       </p:ext>
     </p:extLst>
   </p:cSld>
@@ -3631,7 +3519,7 @@
           <p:cNvPr id="2" name="Heading">
             <a:extLst>
               <a:ext uri="{FF2B5EF4-FFF2-40B4-BE49-F238E27FC236}">
-                <a16:creationId xmlns:a16="http://schemas.microsoft.com/office/drawing/2014/main" id="{E4D24411-CD40-489D-883E-8A6E1EED7C63}"/>
+                <a16:creationId xmlns:a16="http://schemas.microsoft.com/office/drawing/2014/main" id="{4B046990-6147-F86D-DCC4-FDDB1FC6E154}"/>
               </a:ext>
             </a:extLst>
           </p:cNvPr>
@@ -3660,7 +3548,7 @@
                   <a:srgbClr val="282828"/>
                 </a:solidFill>
               </a:rPr>
-              <a:t>Groups are one object</a:t>
+              <a:t>Grow past the anchor</a:t>
             </a:r>
           </a:p>
         </p:txBody>
@@ -3670,7 +3558,7 @@
           <p:cNvPr id="3" name="Instructions">
             <a:extLst>
               <a:ext uri="{FF2B5EF4-FFF2-40B4-BE49-F238E27FC236}">
-                <a16:creationId xmlns:a16="http://schemas.microsoft.com/office/drawing/2014/main" id="{ADC2AF2F-84F4-5F36-8D7B-0C035E2BBA29}"/>
+                <a16:creationId xmlns:a16="http://schemas.microsoft.com/office/drawing/2014/main" id="{A2ECAFD9-9521-BABE-D926-0B1AC09BBB12}"/>
               </a:ext>
             </a:extLst>
           </p:cNvPr>
@@ -3680,7 +3568,7 @@
         <p:spPr>
           <a:xfrm>
             <a:off x="508000" y="762000"/>
-            <a:ext cx="11176000" cy="292388"/>
+            <a:ext cx="11176000" cy="492443"/>
           </a:xfrm>
           <a:prstGeom prst="rect">
             <a:avLst/>
@@ -3699,6 +3587,453 @@
                   <a:srgbClr val="7F7F7F"/>
                 </a:solidFill>
               </a:rPr>
+              <a:t>Type 12 in Margin (pt), set Apply margin = Cascade and Direction = Grow, switch From centre on. Select 1st, Ctrl+click 2nd, 3rd, then CORE last. Click Match &gt; Both.</a:t>
+            </a:r>
+          </a:p>
+        </p:txBody>
+      </p:sp>
+      <p:sp>
+        <p:nvSpPr>
+          <p:cNvPr id="4" name="Grow1">
+            <a:extLst>
+              <a:ext uri="{FF2B5EF4-FFF2-40B4-BE49-F238E27FC236}">
+                <a16:creationId xmlns:a16="http://schemas.microsoft.com/office/drawing/2014/main" id="{CC95CC7B-8BD7-82E7-3153-26B37302E7F2}"/>
+              </a:ext>
+            </a:extLst>
+          </p:cNvPr>
+          <p:cNvSpPr/>
+          <p:nvPr/>
+        </p:nvSpPr>
+        <p:spPr>
+          <a:xfrm>
+            <a:off x="1397000" y="2286000"/>
+            <a:ext cx="1016000" cy="762000"/>
+          </a:xfrm>
+          <a:prstGeom prst="rect">
+            <a:avLst/>
+          </a:prstGeom>
+          <a:solidFill>
+            <a:srgbClr val="1F77B4"/>
+          </a:solidFill>
+          <a:ln w="19050" cap="flat" cmpd="sng" algn="ctr">
+            <a:noFill/>
+            <a:prstDash val="solid"/>
+            <a:miter lim="800000"/>
+          </a:ln>
+          <a:effectLst/>
+          <a:extLst>
+            <a:ext uri="{91240B29-F687-4F45-9708-019B960494DF}">
+              <a14:hiddenLine xmlns:a14="http://schemas.microsoft.com/office/drawing/2010/main" w="19050" cap="flat" cmpd="sng" algn="ctr">
+                <a:solidFill>
+                  <a:schemeClr val="accent1">
+                    <a:shade val="15000"/>
+                  </a:schemeClr>
+                </a:solidFill>
+                <a:prstDash val="solid"/>
+                <a:miter lim="800000"/>
+              </a14:hiddenLine>
+            </a:ext>
+          </a:extLst>
+        </p:spPr>
+        <p:style>
+          <a:lnRef idx="2">
+            <a:schemeClr val="accent1">
+              <a:shade val="15000"/>
+            </a:schemeClr>
+          </a:lnRef>
+          <a:fillRef idx="1">
+            <a:schemeClr val="accent1"/>
+          </a:fillRef>
+          <a:effectRef idx="0">
+            <a:schemeClr val="accent1"/>
+          </a:effectRef>
+          <a:fontRef idx="minor">
+            <a:schemeClr val="lt1"/>
+          </a:fontRef>
+        </p:style>
+        <p:txBody>
+          <a:bodyPr rtlCol="0" anchor="ctr"/>
+          <a:lstStyle/>
+          <a:p>
+            <a:pPr algn="ctr"/>
+            <a:r>
+              <a:rPr lang="en-AU" sz="1400" b="1">
+                <a:solidFill>
+                  <a:srgbClr val="FFFFFF"/>
+                </a:solidFill>
+              </a:rPr>
+              <a:t>1st</a:t>
+            </a:r>
+          </a:p>
+        </p:txBody>
+      </p:sp>
+      <p:sp>
+        <p:nvSpPr>
+          <p:cNvPr id="5" name="Grow2">
+            <a:extLst>
+              <a:ext uri="{FF2B5EF4-FFF2-40B4-BE49-F238E27FC236}">
+                <a16:creationId xmlns:a16="http://schemas.microsoft.com/office/drawing/2014/main" id="{6A0C8852-48A4-F234-7975-B8A05722C42D}"/>
+              </a:ext>
+            </a:extLst>
+          </p:cNvPr>
+          <p:cNvSpPr/>
+          <p:nvPr/>
+        </p:nvSpPr>
+        <p:spPr>
+          <a:xfrm>
+            <a:off x="3175000" y="3810000"/>
+            <a:ext cx="889000" cy="1143000"/>
+          </a:xfrm>
+          <a:prstGeom prst="rect">
+            <a:avLst/>
+          </a:prstGeom>
+          <a:solidFill>
+            <a:srgbClr val="2CA02C"/>
+          </a:solidFill>
+          <a:ln w="19050" cap="flat" cmpd="sng" algn="ctr">
+            <a:noFill/>
+            <a:prstDash val="solid"/>
+            <a:miter lim="800000"/>
+          </a:ln>
+          <a:effectLst/>
+          <a:extLst>
+            <a:ext uri="{91240B29-F687-4F45-9708-019B960494DF}">
+              <a14:hiddenLine xmlns:a14="http://schemas.microsoft.com/office/drawing/2010/main" w="19050" cap="flat" cmpd="sng" algn="ctr">
+                <a:solidFill>
+                  <a:schemeClr val="accent1">
+                    <a:shade val="15000"/>
+                  </a:schemeClr>
+                </a:solidFill>
+                <a:prstDash val="solid"/>
+                <a:miter lim="800000"/>
+              </a14:hiddenLine>
+            </a:ext>
+          </a:extLst>
+        </p:spPr>
+        <p:style>
+          <a:lnRef idx="2">
+            <a:schemeClr val="accent1">
+              <a:shade val="15000"/>
+            </a:schemeClr>
+          </a:lnRef>
+          <a:fillRef idx="1">
+            <a:schemeClr val="accent1"/>
+          </a:fillRef>
+          <a:effectRef idx="0">
+            <a:schemeClr val="accent1"/>
+          </a:effectRef>
+          <a:fontRef idx="minor">
+            <a:schemeClr val="lt1"/>
+          </a:fontRef>
+        </p:style>
+        <p:txBody>
+          <a:bodyPr rtlCol="0" anchor="ctr"/>
+          <a:lstStyle/>
+          <a:p>
+            <a:pPr algn="ctr"/>
+            <a:r>
+              <a:rPr lang="en-AU" sz="1400" b="1">
+                <a:solidFill>
+                  <a:srgbClr val="FFFFFF"/>
+                </a:solidFill>
+              </a:rPr>
+              <a:t>2nd</a:t>
+            </a:r>
+          </a:p>
+        </p:txBody>
+      </p:sp>
+      <p:sp>
+        <p:nvSpPr>
+          <p:cNvPr id="6" name="Grow3">
+            <a:extLst>
+              <a:ext uri="{FF2B5EF4-FFF2-40B4-BE49-F238E27FC236}">
+                <a16:creationId xmlns:a16="http://schemas.microsoft.com/office/drawing/2014/main" id="{84FBA0C3-48B8-662D-A847-F3B7AEAD9ABD}"/>
+              </a:ext>
+            </a:extLst>
+          </p:cNvPr>
+          <p:cNvSpPr/>
+          <p:nvPr/>
+        </p:nvSpPr>
+        <p:spPr>
+          <a:xfrm>
+            <a:off x="1524000" y="4826000"/>
+            <a:ext cx="1270000" cy="635000"/>
+          </a:xfrm>
+          <a:prstGeom prst="rect">
+            <a:avLst/>
+          </a:prstGeom>
+          <a:solidFill>
+            <a:srgbClr val="9467BD"/>
+          </a:solidFill>
+          <a:ln w="19050" cap="flat" cmpd="sng" algn="ctr">
+            <a:noFill/>
+            <a:prstDash val="solid"/>
+            <a:miter lim="800000"/>
+          </a:ln>
+          <a:effectLst/>
+          <a:extLst>
+            <a:ext uri="{91240B29-F687-4F45-9708-019B960494DF}">
+              <a14:hiddenLine xmlns:a14="http://schemas.microsoft.com/office/drawing/2010/main" w="19050" cap="flat" cmpd="sng" algn="ctr">
+                <a:solidFill>
+                  <a:schemeClr val="accent1">
+                    <a:shade val="15000"/>
+                  </a:schemeClr>
+                </a:solidFill>
+                <a:prstDash val="solid"/>
+                <a:miter lim="800000"/>
+              </a14:hiddenLine>
+            </a:ext>
+          </a:extLst>
+        </p:spPr>
+        <p:style>
+          <a:lnRef idx="2">
+            <a:schemeClr val="accent1">
+              <a:shade val="15000"/>
+            </a:schemeClr>
+          </a:lnRef>
+          <a:fillRef idx="1">
+            <a:schemeClr val="accent1"/>
+          </a:fillRef>
+          <a:effectRef idx="0">
+            <a:schemeClr val="accent1"/>
+          </a:effectRef>
+          <a:fontRef idx="minor">
+            <a:schemeClr val="lt1"/>
+          </a:fontRef>
+        </p:style>
+        <p:txBody>
+          <a:bodyPr rtlCol="0" anchor="ctr"/>
+          <a:lstStyle/>
+          <a:p>
+            <a:pPr algn="ctr"/>
+            <a:r>
+              <a:rPr lang="en-AU" sz="1400" b="1">
+                <a:solidFill>
+                  <a:srgbClr val="FFFFFF"/>
+                </a:solidFill>
+              </a:rPr>
+              <a:t>3rd</a:t>
+            </a:r>
+          </a:p>
+        </p:txBody>
+      </p:sp>
+      <p:sp>
+        <p:nvSpPr>
+          <p:cNvPr id="7" name="Core">
+            <a:extLst>
+              <a:ext uri="{FF2B5EF4-FFF2-40B4-BE49-F238E27FC236}">
+                <a16:creationId xmlns:a16="http://schemas.microsoft.com/office/drawing/2014/main" id="{F08B86A5-916B-74D7-063A-5F2DD401D2F3}"/>
+              </a:ext>
+            </a:extLst>
+          </p:cNvPr>
+          <p:cNvSpPr/>
+          <p:nvPr/>
+        </p:nvSpPr>
+        <p:spPr>
+          <a:xfrm>
+            <a:off x="7620000" y="3175000"/>
+            <a:ext cx="1524000" cy="1016000"/>
+          </a:xfrm>
+          <a:prstGeom prst="rect">
+            <a:avLst/>
+          </a:prstGeom>
+          <a:solidFill>
+            <a:srgbClr val="D62728"/>
+          </a:solidFill>
+          <a:ln w="19050" cap="flat" cmpd="sng" algn="ctr">
+            <a:noFill/>
+            <a:prstDash val="solid"/>
+            <a:miter lim="800000"/>
+          </a:ln>
+          <a:effectLst/>
+          <a:extLst>
+            <a:ext uri="{91240B29-F687-4F45-9708-019B960494DF}">
+              <a14:hiddenLine xmlns:a14="http://schemas.microsoft.com/office/drawing/2010/main" w="19050" cap="flat" cmpd="sng" algn="ctr">
+                <a:solidFill>
+                  <a:schemeClr val="accent1">
+                    <a:shade val="15000"/>
+                  </a:schemeClr>
+                </a:solidFill>
+                <a:prstDash val="solid"/>
+                <a:miter lim="800000"/>
+              </a14:hiddenLine>
+            </a:ext>
+          </a:extLst>
+        </p:spPr>
+        <p:style>
+          <a:lnRef idx="2">
+            <a:schemeClr val="accent1">
+              <a:shade val="15000"/>
+            </a:schemeClr>
+          </a:lnRef>
+          <a:fillRef idx="1">
+            <a:schemeClr val="accent1"/>
+          </a:fillRef>
+          <a:effectRef idx="0">
+            <a:schemeClr val="accent1"/>
+          </a:effectRef>
+          <a:fontRef idx="minor">
+            <a:schemeClr val="lt1"/>
+          </a:fontRef>
+        </p:style>
+        <p:txBody>
+          <a:bodyPr rtlCol="0" anchor="ctr"/>
+          <a:lstStyle/>
+          <a:p>
+            <a:pPr algn="ctr"/>
+            <a:r>
+              <a:rPr lang="en-AU" sz="1400" b="1">
+                <a:solidFill>
+                  <a:srgbClr val="FFFFFF"/>
+                </a:solidFill>
+              </a:rPr>
+              <a:t>CORE</a:t>
+            </a:r>
+          </a:p>
+        </p:txBody>
+      </p:sp>
+      <p:sp>
+        <p:nvSpPr>
+          <p:cNvPr id="8" name="TextBox 7">
+            <a:extLst>
+              <a:ext uri="{FF2B5EF4-FFF2-40B4-BE49-F238E27FC236}">
+                <a16:creationId xmlns:a16="http://schemas.microsoft.com/office/drawing/2014/main" id="{718D8530-6EA1-7814-37F6-E99389FF87E5}"/>
+              </a:ext>
+            </a:extLst>
+          </p:cNvPr>
+          <p:cNvSpPr txBox="1"/>
+          <p:nvPr/>
+        </p:nvSpPr>
+        <p:spPr>
+          <a:xfrm>
+            <a:off x="508000" y="5715000"/>
+            <a:ext cx="11176000" cy="461665"/>
+          </a:xfrm>
+          <a:prstGeom prst="rect">
+            <a:avLst/>
+          </a:prstGeom>
+          <a:noFill/>
+        </p:spPr>
+        <p:txBody>
+          <a:bodyPr vert="horz" rtlCol="0">
+            <a:spAutoFit/>
+          </a:bodyPr>
+          <a:lstStyle/>
+          <a:p>
+            <a:r>
+              <a:rPr lang="en-AU" sz="1200">
+                <a:solidFill>
+                  <a:srgbClr val="7F7F7F"/>
+                </a:solidFill>
+              </a:rPr>
+              <a:t>Grow is the mirror of Shrink: the margin is still a positive number, and the shapes end outside the anchor instead of inside it. With Cascade the shape you selected first ends largest. Align them all to CORE (Reference = Anchor, Align &gt; Centre then Middle) and Order &gt; Reverse to see the rings.</a:t>
+            </a:r>
+          </a:p>
+        </p:txBody>
+      </p:sp>
+    </p:spTree>
+    <p:extLst>
+      <p:ext uri="{BB962C8B-B14F-4D97-AF65-F5344CB8AC3E}">
+        <p14:creationId xmlns:p14="http://schemas.microsoft.com/office/powerpoint/2010/main" val="2756119967"/>
+      </p:ext>
+    </p:extLst>
+  </p:cSld>
+  <p:clrMapOvr>
+    <a:masterClrMapping/>
+  </p:clrMapOvr>
+</p:sld>
+</file>
+
+<file path=ppt/slides/slide11.xml><?xml version="1.0" encoding="utf-8"?>
+<p:sld xmlns:a="http://schemas.openxmlformats.org/drawingml/2006/main" xmlns:r="http://schemas.openxmlformats.org/officeDocument/2006/relationships" xmlns:p="http://schemas.openxmlformats.org/presentationml/2006/main">
+  <p:cSld>
+    <p:spTree>
+      <p:nvGrpSpPr>
+        <p:cNvPr id="1" name=""/>
+        <p:cNvGrpSpPr/>
+        <p:nvPr/>
+      </p:nvGrpSpPr>
+      <p:grpSpPr>
+        <a:xfrm>
+          <a:off x="0" y="0"/>
+          <a:ext cx="0" cy="0"/>
+          <a:chOff x="0" y="0"/>
+          <a:chExt cx="0" cy="0"/>
+        </a:xfrm>
+      </p:grpSpPr>
+      <p:sp>
+        <p:nvSpPr>
+          <p:cNvPr id="2" name="Heading">
+            <a:extLst>
+              <a:ext uri="{FF2B5EF4-FFF2-40B4-BE49-F238E27FC236}">
+                <a16:creationId xmlns:a16="http://schemas.microsoft.com/office/drawing/2014/main" id="{8D5A9923-9525-28B2-F4A6-6C0208682769}"/>
+              </a:ext>
+            </a:extLst>
+          </p:cNvPr>
+          <p:cNvSpPr txBox="1"/>
+          <p:nvPr/>
+        </p:nvSpPr>
+        <p:spPr>
+          <a:xfrm>
+            <a:off x="508000" y="304800"/>
+            <a:ext cx="11176000" cy="461665"/>
+          </a:xfrm>
+          <a:prstGeom prst="rect">
+            <a:avLst/>
+          </a:prstGeom>
+          <a:noFill/>
+        </p:spPr>
+        <p:txBody>
+          <a:bodyPr vert="horz" rtlCol="0">
+            <a:spAutoFit/>
+          </a:bodyPr>
+          <a:lstStyle/>
+          <a:p>
+            <a:r>
+              <a:rPr lang="en-AU" sz="2400" b="1">
+                <a:solidFill>
+                  <a:srgbClr val="282828"/>
+                </a:solidFill>
+              </a:rPr>
+              <a:t>Groups are one object</a:t>
+            </a:r>
+          </a:p>
+        </p:txBody>
+      </p:sp>
+      <p:sp>
+        <p:nvSpPr>
+          <p:cNvPr id="3" name="Instructions">
+            <a:extLst>
+              <a:ext uri="{FF2B5EF4-FFF2-40B4-BE49-F238E27FC236}">
+                <a16:creationId xmlns:a16="http://schemas.microsoft.com/office/drawing/2014/main" id="{B600DD0F-4D79-8356-74C3-67309DBBDB11}"/>
+              </a:ext>
+            </a:extLst>
+          </p:cNvPr>
+          <p:cNvSpPr txBox="1"/>
+          <p:nvPr/>
+        </p:nvSpPr>
+        <p:spPr>
+          <a:xfrm>
+            <a:off x="508000" y="762000"/>
+            <a:ext cx="11176000" cy="292388"/>
+          </a:xfrm>
+          <a:prstGeom prst="rect">
+            <a:avLst/>
+          </a:prstGeom>
+          <a:noFill/>
+        </p:spPr>
+        <p:txBody>
+          <a:bodyPr vert="horz" rtlCol="0">
+            <a:spAutoFit/>
+          </a:bodyPr>
+          <a:lstStyle/>
+          <a:p>
+            <a:r>
+              <a:rPr lang="en-AU" sz="1300">
+                <a:solidFill>
+                  <a:srgbClr val="7F7F7F"/>
+                </a:solidFill>
+              </a:rPr>
               <a:t>Align the group with the loose shapes - its internal spacing must not change. Then try Match size on it.</a:t>
             </a:r>
           </a:p>
@@ -3709,7 +4044,7 @@
           <p:cNvPr id="7" name="TheGroup">
             <a:extLst>
               <a:ext uri="{FF2B5EF4-FFF2-40B4-BE49-F238E27FC236}">
-                <a16:creationId xmlns:a16="http://schemas.microsoft.com/office/drawing/2014/main" id="{3DD373F3-432B-3433-20D1-15BED8B82AF7}"/>
+                <a16:creationId xmlns:a16="http://schemas.microsoft.com/office/drawing/2014/main" id="{BACD3F8F-0F46-167A-B8ED-57F296CA5F62}"/>
               </a:ext>
             </a:extLst>
           </p:cNvPr>
@@ -3729,7 +4064,7 @@
             <p:cNvPr id="4" name="G1">
               <a:extLst>
                 <a:ext uri="{FF2B5EF4-FFF2-40B4-BE49-F238E27FC236}">
-                  <a16:creationId xmlns:a16="http://schemas.microsoft.com/office/drawing/2014/main" id="{970F08BA-704A-F369-C7C9-2B268F895491}"/>
+                  <a16:creationId xmlns:a16="http://schemas.microsoft.com/office/drawing/2014/main" id="{A4260E1E-B439-4679-DC74-E8FAF75953FE}"/>
                 </a:ext>
               </a:extLst>
             </p:cNvPr>
@@ -3804,7 +4139,7 @@
             <p:cNvPr id="5" name="G2">
               <a:extLst>
                 <a:ext uri="{FF2B5EF4-FFF2-40B4-BE49-F238E27FC236}">
-                  <a16:creationId xmlns:a16="http://schemas.microsoft.com/office/drawing/2014/main" id="{9B3D7031-49AB-5194-B6D8-8A06D8C88112}"/>
+                  <a16:creationId xmlns:a16="http://schemas.microsoft.com/office/drawing/2014/main" id="{091087E4-1986-3C28-F97D-F8A2C8C4380B}"/>
                 </a:ext>
               </a:extLst>
             </p:cNvPr>
@@ -3879,7 +4214,7 @@
             <p:cNvPr id="6" name="G3">
               <a:extLst>
                 <a:ext uri="{FF2B5EF4-FFF2-40B4-BE49-F238E27FC236}">
-                  <a16:creationId xmlns:a16="http://schemas.microsoft.com/office/drawing/2014/main" id="{132D7469-59CD-912E-9E3E-9F2664DDC590}"/>
+                  <a16:creationId xmlns:a16="http://schemas.microsoft.com/office/drawing/2014/main" id="{CAD32015-8A63-0943-84EC-07AA50581029}"/>
                 </a:ext>
               </a:extLst>
             </p:cNvPr>
@@ -3955,7 +4290,7 @@
           <p:cNvPr id="8" name="Loose1">
             <a:extLst>
               <a:ext uri="{FF2B5EF4-FFF2-40B4-BE49-F238E27FC236}">
-                <a16:creationId xmlns:a16="http://schemas.microsoft.com/office/drawing/2014/main" id="{6FC64AE9-9678-39CD-4A41-D72FA3A0A426}"/>
+                <a16:creationId xmlns:a16="http://schemas.microsoft.com/office/drawing/2014/main" id="{8F1647AE-596E-7226-7B32-7A4031D30C34}"/>
               </a:ext>
             </a:extLst>
           </p:cNvPr>
@@ -4030,7 +4365,7 @@
           <p:cNvPr id="9" name="Loose2">
             <a:extLst>
               <a:ext uri="{FF2B5EF4-FFF2-40B4-BE49-F238E27FC236}">
-                <a16:creationId xmlns:a16="http://schemas.microsoft.com/office/drawing/2014/main" id="{F4CACA9C-CC69-BFA9-0F70-161634B818F5}"/>
+                <a16:creationId xmlns:a16="http://schemas.microsoft.com/office/drawing/2014/main" id="{71A195A6-0764-EA95-6CFD-A4315B9C738A}"/>
               </a:ext>
             </a:extLst>
           </p:cNvPr>
@@ -4105,7 +4440,7 @@
           <p:cNvPr id="10" name="TextBox 9">
             <a:extLst>
               <a:ext uri="{FF2B5EF4-FFF2-40B4-BE49-F238E27FC236}">
-                <a16:creationId xmlns:a16="http://schemas.microsoft.com/office/drawing/2014/main" id="{BE1764A1-5F53-7F98-8202-47467F4CCFED}"/>
+                <a16:creationId xmlns:a16="http://schemas.microsoft.com/office/drawing/2014/main" id="{482FFCD1-E64C-079D-D3AC-EF34AF401D48}"/>
               </a:ext>
             </a:extLst>
           </p:cNvPr>
@@ -4142,336 +4477,7 @@
     </p:spTree>
     <p:extLst>
       <p:ext uri="{BB962C8B-B14F-4D97-AF65-F5344CB8AC3E}">
-        <p14:creationId xmlns:p14="http://schemas.microsoft.com/office/powerpoint/2010/main" val="1305727972"/>
-      </p:ext>
-    </p:extLst>
-  </p:cSld>
-  <p:clrMapOvr>
-    <a:masterClrMapping/>
-  </p:clrMapOvr>
-</p:sld>
-</file>
-
-<file path=ppt/slides/slide11.xml><?xml version="1.0" encoding="utf-8"?>
-<p:sld xmlns:a="http://schemas.openxmlformats.org/drawingml/2006/main" xmlns:r="http://schemas.openxmlformats.org/officeDocument/2006/relationships" xmlns:p="http://schemas.openxmlformats.org/presentationml/2006/main">
-  <p:cSld>
-    <p:spTree>
-      <p:nvGrpSpPr>
-        <p:cNvPr id="1" name=""/>
-        <p:cNvGrpSpPr/>
-        <p:nvPr/>
-      </p:nvGrpSpPr>
-      <p:grpSpPr>
-        <a:xfrm>
-          <a:off x="0" y="0"/>
-          <a:ext cx="0" cy="0"/>
-          <a:chOff x="0" y="0"/>
-          <a:chExt cx="0" cy="0"/>
-        </a:xfrm>
-      </p:grpSpPr>
-      <p:sp>
-        <p:nvSpPr>
-          <p:cNvPr id="2" name="Heading">
-            <a:extLst>
-              <a:ext uri="{FF2B5EF4-FFF2-40B4-BE49-F238E27FC236}">
-                <a16:creationId xmlns:a16="http://schemas.microsoft.com/office/drawing/2014/main" id="{52D94D97-71AF-93B9-093D-20AAC8DB8A14}"/>
-              </a:ext>
-            </a:extLst>
-          </p:cNvPr>
-          <p:cNvSpPr txBox="1"/>
-          <p:nvPr/>
-        </p:nvSpPr>
-        <p:spPr>
-          <a:xfrm>
-            <a:off x="508000" y="304800"/>
-            <a:ext cx="11176000" cy="461665"/>
-          </a:xfrm>
-          <a:prstGeom prst="rect">
-            <a:avLst/>
-          </a:prstGeom>
-          <a:noFill/>
-        </p:spPr>
-        <p:txBody>
-          <a:bodyPr vert="horz" rtlCol="0">
-            <a:spAutoFit/>
-          </a:bodyPr>
-          <a:lstStyle/>
-          <a:p>
-            <a:r>
-              <a:rPr lang="en-AU" sz="2400" b="1">
-                <a:solidFill>
-                  <a:srgbClr val="282828"/>
-                </a:solidFill>
-              </a:rPr>
-              <a:t>Align the text, not the box</a:t>
-            </a:r>
-          </a:p>
-        </p:txBody>
-      </p:sp>
-      <p:sp>
-        <p:nvSpPr>
-          <p:cNvPr id="3" name="Instructions">
-            <a:extLst>
-              <a:ext uri="{FF2B5EF4-FFF2-40B4-BE49-F238E27FC236}">
-                <a16:creationId xmlns:a16="http://schemas.microsoft.com/office/drawing/2014/main" id="{655293B2-EBB2-548B-BD7D-7249087D945C}"/>
-              </a:ext>
-            </a:extLst>
-          </p:cNvPr>
-          <p:cNvSpPr txBox="1"/>
-          <p:nvPr/>
-        </p:nvSpPr>
-        <p:spPr>
-          <a:xfrm>
-            <a:off x="508000" y="762000"/>
-            <a:ext cx="11176000" cy="292388"/>
-          </a:xfrm>
-          <a:prstGeom prst="rect">
-            <a:avLst/>
-          </a:prstGeom>
-          <a:noFill/>
-        </p:spPr>
-        <p:txBody>
-          <a:bodyPr vert="horz" rtlCol="0">
-            <a:spAutoFit/>
-          </a:bodyPr>
-          <a:lstStyle/>
-          <a:p>
-            <a:r>
-              <a:rPr lang="en-AU" sz="1300">
-                <a:solidFill>
-                  <a:srgbClr val="7F7F7F"/>
-                </a:solidFill>
-              </a:rPr>
-              <a:t>All three frames already start at the same x. Select them and Align &gt; Left with Measure = Text bounds.</a:t>
-            </a:r>
-          </a:p>
-        </p:txBody>
-      </p:sp>
-      <p:sp>
-        <p:nvSpPr>
-          <p:cNvPr id="4" name="Text0">
-            <a:extLst>
-              <a:ext uri="{FF2B5EF4-FFF2-40B4-BE49-F238E27FC236}">
-                <a16:creationId xmlns:a16="http://schemas.microsoft.com/office/drawing/2014/main" id="{52BAFF94-AE47-8141-263C-9FED06F3E411}"/>
-              </a:ext>
-            </a:extLst>
-          </p:cNvPr>
-          <p:cNvSpPr/>
-          <p:nvPr/>
-        </p:nvSpPr>
-        <p:spPr>
-          <a:xfrm>
-            <a:off x="3175000" y="2159000"/>
-            <a:ext cx="5334000" cy="762000"/>
-          </a:xfrm>
-          <a:prstGeom prst="roundRect">
-            <a:avLst/>
-          </a:prstGeom>
-          <a:solidFill>
-            <a:srgbClr val="EBEBF0"/>
-          </a:solidFill>
-          <a:ln>
-            <a:solidFill>
-              <a:srgbClr val="7F7F7F"/>
-            </a:solidFill>
-          </a:ln>
-        </p:spPr>
-        <p:style>
-          <a:lnRef idx="2">
-            <a:schemeClr val="accent1">
-              <a:shade val="15000"/>
-            </a:schemeClr>
-          </a:lnRef>
-          <a:fillRef idx="1">
-            <a:schemeClr val="accent1"/>
-          </a:fillRef>
-          <a:effectRef idx="0">
-            <a:schemeClr val="accent1"/>
-          </a:effectRef>
-          <a:fontRef idx="minor">
-            <a:schemeClr val="lt1"/>
-          </a:fontRef>
-        </p:style>
-        <p:txBody>
-          <a:bodyPr rtlCol="0" anchor="ctr"/>
-          <a:lstStyle/>
-          <a:p>
-            <a:r>
-              <a:rPr lang="en-AU" sz="1600">
-                <a:solidFill>
-                  <a:srgbClr val="282828"/>
-                </a:solidFill>
-              </a:rPr>
-              <a:t>left-aligned text</a:t>
-            </a:r>
-          </a:p>
-        </p:txBody>
-      </p:sp>
-      <p:sp>
-        <p:nvSpPr>
-          <p:cNvPr id="5" name="Text1">
-            <a:extLst>
-              <a:ext uri="{FF2B5EF4-FFF2-40B4-BE49-F238E27FC236}">
-                <a16:creationId xmlns:a16="http://schemas.microsoft.com/office/drawing/2014/main" id="{9E1042FF-9E8D-7CD1-959D-828173CAD3B7}"/>
-              </a:ext>
-            </a:extLst>
-          </p:cNvPr>
-          <p:cNvSpPr/>
-          <p:nvPr/>
-        </p:nvSpPr>
-        <p:spPr>
-          <a:xfrm>
-            <a:off x="3175000" y="3302000"/>
-            <a:ext cx="5334000" cy="762000"/>
-          </a:xfrm>
-          <a:prstGeom prst="roundRect">
-            <a:avLst/>
-          </a:prstGeom>
-          <a:solidFill>
-            <a:srgbClr val="EBEBF0"/>
-          </a:solidFill>
-          <a:ln>
-            <a:solidFill>
-              <a:srgbClr val="7F7F7F"/>
-            </a:solidFill>
-          </a:ln>
-        </p:spPr>
-        <p:style>
-          <a:lnRef idx="2">
-            <a:schemeClr val="accent1">
-              <a:shade val="15000"/>
-            </a:schemeClr>
-          </a:lnRef>
-          <a:fillRef idx="1">
-            <a:schemeClr val="accent1"/>
-          </a:fillRef>
-          <a:effectRef idx="0">
-            <a:schemeClr val="accent1"/>
-          </a:effectRef>
-          <a:fontRef idx="minor">
-            <a:schemeClr val="lt1"/>
-          </a:fontRef>
-        </p:style>
-        <p:txBody>
-          <a:bodyPr rtlCol="0" anchor="ctr"/>
-          <a:lstStyle/>
-          <a:p>
-            <a:pPr algn="ctr"/>
-            <a:r>
-              <a:rPr lang="en-AU" sz="1600">
-                <a:solidFill>
-                  <a:srgbClr val="282828"/>
-                </a:solidFill>
-              </a:rPr>
-              <a:t>centred text</a:t>
-            </a:r>
-          </a:p>
-        </p:txBody>
-      </p:sp>
-      <p:sp>
-        <p:nvSpPr>
-          <p:cNvPr id="6" name="Text2">
-            <a:extLst>
-              <a:ext uri="{FF2B5EF4-FFF2-40B4-BE49-F238E27FC236}">
-                <a16:creationId xmlns:a16="http://schemas.microsoft.com/office/drawing/2014/main" id="{A7CD9A23-A12B-A333-2F5B-F94B41FFC4FC}"/>
-              </a:ext>
-            </a:extLst>
-          </p:cNvPr>
-          <p:cNvSpPr/>
-          <p:nvPr/>
-        </p:nvSpPr>
-        <p:spPr>
-          <a:xfrm>
-            <a:off x="3175000" y="4445000"/>
-            <a:ext cx="5334000" cy="762000"/>
-          </a:xfrm>
-          <a:prstGeom prst="roundRect">
-            <a:avLst/>
-          </a:prstGeom>
-          <a:solidFill>
-            <a:srgbClr val="EBEBF0"/>
-          </a:solidFill>
-          <a:ln>
-            <a:solidFill>
-              <a:srgbClr val="7F7F7F"/>
-            </a:solidFill>
-          </a:ln>
-        </p:spPr>
-        <p:style>
-          <a:lnRef idx="2">
-            <a:schemeClr val="accent1">
-              <a:shade val="15000"/>
-            </a:schemeClr>
-          </a:lnRef>
-          <a:fillRef idx="1">
-            <a:schemeClr val="accent1"/>
-          </a:fillRef>
-          <a:effectRef idx="0">
-            <a:schemeClr val="accent1"/>
-          </a:effectRef>
-          <a:fontRef idx="minor">
-            <a:schemeClr val="lt1"/>
-          </a:fontRef>
-        </p:style>
-        <p:txBody>
-          <a:bodyPr rtlCol="0" anchor="ctr"/>
-          <a:lstStyle/>
-          <a:p>
-            <a:pPr algn="r"/>
-            <a:r>
-              <a:rPr lang="en-AU" sz="1600">
-                <a:solidFill>
-                  <a:srgbClr val="282828"/>
-                </a:solidFill>
-              </a:rPr>
-              <a:t>right-aligned text</a:t>
-            </a:r>
-          </a:p>
-        </p:txBody>
-      </p:sp>
-      <p:sp>
-        <p:nvSpPr>
-          <p:cNvPr id="7" name="TextBox 6">
-            <a:extLst>
-              <a:ext uri="{FF2B5EF4-FFF2-40B4-BE49-F238E27FC236}">
-                <a16:creationId xmlns:a16="http://schemas.microsoft.com/office/drawing/2014/main" id="{230EE844-418C-6436-C97E-DEDC04E865BA}"/>
-              </a:ext>
-            </a:extLst>
-          </p:cNvPr>
-          <p:cNvSpPr txBox="1"/>
-          <p:nvPr/>
-        </p:nvSpPr>
-        <p:spPr>
-          <a:xfrm>
-            <a:off x="508000" y="5715000"/>
-            <a:ext cx="11176000" cy="276999"/>
-          </a:xfrm>
-          <a:prstGeom prst="rect">
-            <a:avLst/>
-          </a:prstGeom>
-          <a:noFill/>
-        </p:spPr>
-        <p:txBody>
-          <a:bodyPr vert="horz" rtlCol="0">
-            <a:spAutoFit/>
-          </a:bodyPr>
-          <a:lstStyle/>
-          <a:p>
-            <a:r>
-              <a:rPr lang="en-AU" sz="1200">
-                <a:solidFill>
-                  <a:srgbClr val="7F7F7F"/>
-                </a:solidFill>
-              </a:rPr>
-              <a:t>The frames are identical, so frame mode does nothing. Text bounds moves each box so the text itself lines up.</a:t>
-            </a:r>
-          </a:p>
-        </p:txBody>
-      </p:sp>
-    </p:spTree>
-    <p:extLst>
-      <p:ext uri="{BB962C8B-B14F-4D97-AF65-F5344CB8AC3E}">
-        <p14:creationId xmlns:p14="http://schemas.microsoft.com/office/powerpoint/2010/main" val="2278640900"/>
+        <p14:creationId xmlns:p14="http://schemas.microsoft.com/office/powerpoint/2010/main" val="2670020389"/>
       </p:ext>
     </p:extLst>
   </p:cSld>
@@ -4503,7 +4509,7 @@
           <p:cNvPr id="2" name="Heading">
             <a:extLst>
               <a:ext uri="{FF2B5EF4-FFF2-40B4-BE49-F238E27FC236}">
-                <a16:creationId xmlns:a16="http://schemas.microsoft.com/office/drawing/2014/main" id="{88C13F76-F707-D7B8-B83B-4787ACFCC5F0}"/>
+                <a16:creationId xmlns:a16="http://schemas.microsoft.com/office/drawing/2014/main" id="{C94C02B1-449D-BF29-8C75-80B7C113E448}"/>
               </a:ext>
             </a:extLst>
           </p:cNvPr>
@@ -4532,7 +4538,7 @@
                   <a:srgbClr val="282828"/>
                 </a:solidFill>
               </a:rPr>
-              <a:t>Tidy a scatter into a grid</a:t>
+              <a:t>Align the text, not the box</a:t>
             </a:r>
           </a:p>
         </p:txBody>
@@ -4542,7 +4548,7 @@
           <p:cNvPr id="3" name="Instructions">
             <a:extLst>
               <a:ext uri="{FF2B5EF4-FFF2-40B4-BE49-F238E27FC236}">
-                <a16:creationId xmlns:a16="http://schemas.microsoft.com/office/drawing/2014/main" id="{D85CCDE5-208D-8AB3-4F48-85BE8FEF143A}"/>
+                <a16:creationId xmlns:a16="http://schemas.microsoft.com/office/drawing/2014/main" id="{19CA6D15-D870-24FC-A552-70FA9B08FF8E}"/>
               </a:ext>
             </a:extLst>
           </p:cNvPr>
@@ -4571,17 +4577,17 @@
                   <a:srgbClr val="7F7F7F"/>
                 </a:solidFill>
               </a:rPr>
-              <a:t>Select all nine circles. Leave Columns blank for a near-square grid, or type 3. Then Arrange &gt; Grid.</a:t>
-            </a:r>
-          </a:p>
-        </p:txBody>
-      </p:sp>
-      <p:sp>
-        <p:nvSpPr>
-          <p:cNvPr id="4" name="Dot0">
-            <a:extLst>
-              <a:ext uri="{FF2B5EF4-FFF2-40B4-BE49-F238E27FC236}">
-                <a16:creationId xmlns:a16="http://schemas.microsoft.com/office/drawing/2014/main" id="{174BEC0D-08C1-5C1A-1360-F74C806C458C}"/>
+              <a:t>All three frames already start at the same x. Select them and Align &gt; Left with Measure = Text bounds.</a:t>
+            </a:r>
+          </a:p>
+        </p:txBody>
+      </p:sp>
+      <p:sp>
+        <p:nvSpPr>
+          <p:cNvPr id="4" name="Text0">
+            <a:extLst>
+              <a:ext uri="{FF2B5EF4-FFF2-40B4-BE49-F238E27FC236}">
+                <a16:creationId xmlns:a16="http://schemas.microsoft.com/office/drawing/2014/main" id="{154B5121-4C30-5AFB-9739-379CC828D74D}"/>
               </a:ext>
             </a:extLst>
           </p:cNvPr>
@@ -4590,34 +4596,20 @@
         </p:nvSpPr>
         <p:spPr>
           <a:xfrm>
-            <a:off x="1524000" y="1905000"/>
-            <a:ext cx="1016000" cy="1016000"/>
-          </a:xfrm>
-          <a:prstGeom prst="ellipse">
+            <a:off x="3175000" y="2159000"/>
+            <a:ext cx="5334000" cy="762000"/>
+          </a:xfrm>
+          <a:prstGeom prst="roundRect">
             <a:avLst/>
           </a:prstGeom>
           <a:solidFill>
-            <a:srgbClr val="1F77B4"/>
+            <a:srgbClr val="EBEBF0"/>
           </a:solidFill>
-          <a:ln w="19050" cap="flat" cmpd="sng" algn="ctr">
-            <a:noFill/>
-            <a:prstDash val="solid"/>
-            <a:miter lim="800000"/>
+          <a:ln>
+            <a:solidFill>
+              <a:srgbClr val="7F7F7F"/>
+            </a:solidFill>
           </a:ln>
-          <a:effectLst/>
-          <a:extLst>
-            <a:ext uri="{91240B29-F687-4F45-9708-019B960494DF}">
-              <a14:hiddenLine xmlns:a14="http://schemas.microsoft.com/office/drawing/2010/main" w="19050" cap="flat" cmpd="sng" algn="ctr">
-                <a:solidFill>
-                  <a:schemeClr val="accent1">
-                    <a:shade val="15000"/>
-                  </a:schemeClr>
-                </a:solidFill>
-                <a:prstDash val="solid"/>
-                <a:miter lim="800000"/>
-              </a14:hiddenLine>
-            </a:ext>
-          </a:extLst>
         </p:spPr>
         <p:style>
           <a:lnRef idx="2">
@@ -4639,24 +4631,23 @@
           <a:bodyPr rtlCol="0" anchor="ctr"/>
           <a:lstStyle/>
           <a:p>
-            <a:pPr algn="ctr"/>
-            <a:r>
-              <a:rPr lang="en-AU" sz="1400" b="1">
-                <a:solidFill>
-                  <a:srgbClr val="FFFFFF"/>
+            <a:r>
+              <a:rPr lang="en-AU" sz="1600">
+                <a:solidFill>
+                  <a:srgbClr val="282828"/>
                 </a:solidFill>
               </a:rPr>
-              <a:t>1</a:t>
-            </a:r>
-          </a:p>
-        </p:txBody>
-      </p:sp>
-      <p:sp>
-        <p:nvSpPr>
-          <p:cNvPr id="5" name="Dot1">
-            <a:extLst>
-              <a:ext uri="{FF2B5EF4-FFF2-40B4-BE49-F238E27FC236}">
-                <a16:creationId xmlns:a16="http://schemas.microsoft.com/office/drawing/2014/main" id="{12B55FA0-F098-A41F-13C1-FBDFC1278DAF}"/>
+              <a:t>left-aligned text</a:t>
+            </a:r>
+          </a:p>
+        </p:txBody>
+      </p:sp>
+      <p:sp>
+        <p:nvSpPr>
+          <p:cNvPr id="5" name="Text1">
+            <a:extLst>
+              <a:ext uri="{FF2B5EF4-FFF2-40B4-BE49-F238E27FC236}">
+                <a16:creationId xmlns:a16="http://schemas.microsoft.com/office/drawing/2014/main" id="{F5C07AAA-B3E1-6FF5-5099-1F774C4EA241}"/>
               </a:ext>
             </a:extLst>
           </p:cNvPr>
@@ -4665,34 +4656,20 @@
         </p:nvSpPr>
         <p:spPr>
           <a:xfrm>
-            <a:off x="5461000" y="2413000"/>
-            <a:ext cx="1016000" cy="1016000"/>
-          </a:xfrm>
-          <a:prstGeom prst="ellipse">
+            <a:off x="3175000" y="3302000"/>
+            <a:ext cx="5334000" cy="762000"/>
+          </a:xfrm>
+          <a:prstGeom prst="roundRect">
             <a:avLst/>
           </a:prstGeom>
           <a:solidFill>
-            <a:srgbClr val="1F77B4"/>
+            <a:srgbClr val="EBEBF0"/>
           </a:solidFill>
-          <a:ln w="19050" cap="flat" cmpd="sng" algn="ctr">
-            <a:noFill/>
-            <a:prstDash val="solid"/>
-            <a:miter lim="800000"/>
+          <a:ln>
+            <a:solidFill>
+              <a:srgbClr val="7F7F7F"/>
+            </a:solidFill>
           </a:ln>
-          <a:effectLst/>
-          <a:extLst>
-            <a:ext uri="{91240B29-F687-4F45-9708-019B960494DF}">
-              <a14:hiddenLine xmlns:a14="http://schemas.microsoft.com/office/drawing/2010/main" w="19050" cap="flat" cmpd="sng" algn="ctr">
-                <a:solidFill>
-                  <a:schemeClr val="accent1">
-                    <a:shade val="15000"/>
-                  </a:schemeClr>
-                </a:solidFill>
-                <a:prstDash val="solid"/>
-                <a:miter lim="800000"/>
-              </a14:hiddenLine>
-            </a:ext>
-          </a:extLst>
         </p:spPr>
         <p:style>
           <a:lnRef idx="2">
@@ -4716,22 +4693,22 @@
           <a:p>
             <a:pPr algn="ctr"/>
             <a:r>
-              <a:rPr lang="en-AU" sz="1400" b="1">
-                <a:solidFill>
-                  <a:srgbClr val="FFFFFF"/>
+              <a:rPr lang="en-AU" sz="1600">
+                <a:solidFill>
+                  <a:srgbClr val="282828"/>
                 </a:solidFill>
               </a:rPr>
-              <a:t>2</a:t>
-            </a:r>
-          </a:p>
-        </p:txBody>
-      </p:sp>
-      <p:sp>
-        <p:nvSpPr>
-          <p:cNvPr id="6" name="Dot2">
-            <a:extLst>
-              <a:ext uri="{FF2B5EF4-FFF2-40B4-BE49-F238E27FC236}">
-                <a16:creationId xmlns:a16="http://schemas.microsoft.com/office/drawing/2014/main" id="{19C24199-18A4-E922-654F-8A883EC765A2}"/>
+              <a:t>centred text</a:t>
+            </a:r>
+          </a:p>
+        </p:txBody>
+      </p:sp>
+      <p:sp>
+        <p:nvSpPr>
+          <p:cNvPr id="6" name="Text2">
+            <a:extLst>
+              <a:ext uri="{FF2B5EF4-FFF2-40B4-BE49-F238E27FC236}">
+                <a16:creationId xmlns:a16="http://schemas.microsoft.com/office/drawing/2014/main" id="{574F9553-9131-B30C-6A02-6173203BB5F8}"/>
               </a:ext>
             </a:extLst>
           </p:cNvPr>
@@ -4740,34 +4717,20 @@
         </p:nvSpPr>
         <p:spPr>
           <a:xfrm>
-            <a:off x="9652000" y="1778000"/>
-            <a:ext cx="1016000" cy="1016000"/>
-          </a:xfrm>
-          <a:prstGeom prst="ellipse">
+            <a:off x="3175000" y="4445000"/>
+            <a:ext cx="5334000" cy="762000"/>
+          </a:xfrm>
+          <a:prstGeom prst="roundRect">
             <a:avLst/>
           </a:prstGeom>
           <a:solidFill>
-            <a:srgbClr val="1F77B4"/>
+            <a:srgbClr val="EBEBF0"/>
           </a:solidFill>
-          <a:ln w="19050" cap="flat" cmpd="sng" algn="ctr">
-            <a:noFill/>
-            <a:prstDash val="solid"/>
-            <a:miter lim="800000"/>
+          <a:ln>
+            <a:solidFill>
+              <a:srgbClr val="7F7F7F"/>
+            </a:solidFill>
           </a:ln>
-          <a:effectLst/>
-          <a:extLst>
-            <a:ext uri="{91240B29-F687-4F45-9708-019B960494DF}">
-              <a14:hiddenLine xmlns:a14="http://schemas.microsoft.com/office/drawing/2010/main" w="19050" cap="flat" cmpd="sng" algn="ctr">
-                <a:solidFill>
-                  <a:schemeClr val="accent1">
-                    <a:shade val="15000"/>
-                  </a:schemeClr>
-                </a:solidFill>
-                <a:prstDash val="solid"/>
-                <a:miter lim="800000"/>
-              </a14:hiddenLine>
-            </a:ext>
-          </a:extLst>
         </p:spPr>
         <p:style>
           <a:lnRef idx="2">
@@ -4789,474 +4752,24 @@
           <a:bodyPr rtlCol="0" anchor="ctr"/>
           <a:lstStyle/>
           <a:p>
-            <a:pPr algn="ctr"/>
-            <a:r>
-              <a:rPr lang="en-AU" sz="1400" b="1">
-                <a:solidFill>
-                  <a:srgbClr val="FFFFFF"/>
+            <a:pPr algn="r"/>
+            <a:r>
+              <a:rPr lang="en-AU" sz="1600">
+                <a:solidFill>
+                  <a:srgbClr val="282828"/>
                 </a:solidFill>
               </a:rPr>
-              <a:t>3</a:t>
-            </a:r>
-          </a:p>
-        </p:txBody>
-      </p:sp>
-      <p:sp>
-        <p:nvSpPr>
-          <p:cNvPr id="7" name="Dot3">
-            <a:extLst>
-              <a:ext uri="{FF2B5EF4-FFF2-40B4-BE49-F238E27FC236}">
-                <a16:creationId xmlns:a16="http://schemas.microsoft.com/office/drawing/2014/main" id="{17A94F19-57E7-DBE7-9156-A4FFCED682B6}"/>
-              </a:ext>
-            </a:extLst>
-          </p:cNvPr>
-          <p:cNvSpPr/>
-          <p:nvPr/>
-        </p:nvSpPr>
-        <p:spPr>
-          <a:xfrm>
-            <a:off x="2413000" y="3810000"/>
-            <a:ext cx="1016000" cy="1016000"/>
-          </a:xfrm>
-          <a:prstGeom prst="ellipse">
-            <a:avLst/>
-          </a:prstGeom>
-          <a:solidFill>
-            <a:srgbClr val="1F77B4"/>
-          </a:solidFill>
-          <a:ln w="19050" cap="flat" cmpd="sng" algn="ctr">
-            <a:noFill/>
-            <a:prstDash val="solid"/>
-            <a:miter lim="800000"/>
-          </a:ln>
-          <a:effectLst/>
-          <a:extLst>
-            <a:ext uri="{91240B29-F687-4F45-9708-019B960494DF}">
-              <a14:hiddenLine xmlns:a14="http://schemas.microsoft.com/office/drawing/2010/main" w="19050" cap="flat" cmpd="sng" algn="ctr">
-                <a:solidFill>
-                  <a:schemeClr val="accent1">
-                    <a:shade val="15000"/>
-                  </a:schemeClr>
-                </a:solidFill>
-                <a:prstDash val="solid"/>
-                <a:miter lim="800000"/>
-              </a14:hiddenLine>
-            </a:ext>
-          </a:extLst>
-        </p:spPr>
-        <p:style>
-          <a:lnRef idx="2">
-            <a:schemeClr val="accent1">
-              <a:shade val="15000"/>
-            </a:schemeClr>
-          </a:lnRef>
-          <a:fillRef idx="1">
-            <a:schemeClr val="accent1"/>
-          </a:fillRef>
-          <a:effectRef idx="0">
-            <a:schemeClr val="accent1"/>
-          </a:effectRef>
-          <a:fontRef idx="minor">
-            <a:schemeClr val="lt1"/>
-          </a:fontRef>
-        </p:style>
-        <p:txBody>
-          <a:bodyPr rtlCol="0" anchor="ctr"/>
-          <a:lstStyle/>
-          <a:p>
-            <a:pPr algn="ctr"/>
-            <a:r>
-              <a:rPr lang="en-AU" sz="1400" b="1">
-                <a:solidFill>
-                  <a:srgbClr val="FFFFFF"/>
-                </a:solidFill>
-              </a:rPr>
-              <a:t>4</a:t>
-            </a:r>
-          </a:p>
-        </p:txBody>
-      </p:sp>
-      <p:sp>
-        <p:nvSpPr>
-          <p:cNvPr id="8" name="Dot4">
-            <a:extLst>
-              <a:ext uri="{FF2B5EF4-FFF2-40B4-BE49-F238E27FC236}">
-                <a16:creationId xmlns:a16="http://schemas.microsoft.com/office/drawing/2014/main" id="{4ADED152-21BD-C821-93E0-E6FDF41F6AE6}"/>
-              </a:ext>
-            </a:extLst>
-          </p:cNvPr>
-          <p:cNvSpPr/>
-          <p:nvPr/>
-        </p:nvSpPr>
-        <p:spPr>
-          <a:xfrm>
-            <a:off x="6604000" y="3302000"/>
-            <a:ext cx="1016000" cy="1016000"/>
-          </a:xfrm>
-          <a:prstGeom prst="ellipse">
-            <a:avLst/>
-          </a:prstGeom>
-          <a:solidFill>
-            <a:srgbClr val="1F77B4"/>
-          </a:solidFill>
-          <a:ln w="19050" cap="flat" cmpd="sng" algn="ctr">
-            <a:noFill/>
-            <a:prstDash val="solid"/>
-            <a:miter lim="800000"/>
-          </a:ln>
-          <a:effectLst/>
-          <a:extLst>
-            <a:ext uri="{91240B29-F687-4F45-9708-019B960494DF}">
-              <a14:hiddenLine xmlns:a14="http://schemas.microsoft.com/office/drawing/2010/main" w="19050" cap="flat" cmpd="sng" algn="ctr">
-                <a:solidFill>
-                  <a:schemeClr val="accent1">
-                    <a:shade val="15000"/>
-                  </a:schemeClr>
-                </a:solidFill>
-                <a:prstDash val="solid"/>
-                <a:miter lim="800000"/>
-              </a14:hiddenLine>
-            </a:ext>
-          </a:extLst>
-        </p:spPr>
-        <p:style>
-          <a:lnRef idx="2">
-            <a:schemeClr val="accent1">
-              <a:shade val="15000"/>
-            </a:schemeClr>
-          </a:lnRef>
-          <a:fillRef idx="1">
-            <a:schemeClr val="accent1"/>
-          </a:fillRef>
-          <a:effectRef idx="0">
-            <a:schemeClr val="accent1"/>
-          </a:effectRef>
-          <a:fontRef idx="minor">
-            <a:schemeClr val="lt1"/>
-          </a:fontRef>
-        </p:style>
-        <p:txBody>
-          <a:bodyPr rtlCol="0" anchor="ctr"/>
-          <a:lstStyle/>
-          <a:p>
-            <a:pPr algn="ctr"/>
-            <a:r>
-              <a:rPr lang="en-AU" sz="1400" b="1">
-                <a:solidFill>
-                  <a:srgbClr val="FFFFFF"/>
-                </a:solidFill>
-              </a:rPr>
-              <a:t>5</a:t>
-            </a:r>
-          </a:p>
-        </p:txBody>
-      </p:sp>
-      <p:sp>
-        <p:nvSpPr>
-          <p:cNvPr id="9" name="Dot5">
-            <a:extLst>
-              <a:ext uri="{FF2B5EF4-FFF2-40B4-BE49-F238E27FC236}">
-                <a16:creationId xmlns:a16="http://schemas.microsoft.com/office/drawing/2014/main" id="{72055B92-4FFF-E9AC-D4D4-FCDE83012E47}"/>
-              </a:ext>
-            </a:extLst>
-          </p:cNvPr>
-          <p:cNvSpPr/>
-          <p:nvPr/>
-        </p:nvSpPr>
-        <p:spPr>
-          <a:xfrm>
-            <a:off x="8763000" y="4191000"/>
-            <a:ext cx="1016000" cy="1016000"/>
-          </a:xfrm>
-          <a:prstGeom prst="ellipse">
-            <a:avLst/>
-          </a:prstGeom>
-          <a:solidFill>
-            <a:srgbClr val="1F77B4"/>
-          </a:solidFill>
-          <a:ln w="19050" cap="flat" cmpd="sng" algn="ctr">
-            <a:noFill/>
-            <a:prstDash val="solid"/>
-            <a:miter lim="800000"/>
-          </a:ln>
-          <a:effectLst/>
-          <a:extLst>
-            <a:ext uri="{91240B29-F687-4F45-9708-019B960494DF}">
-              <a14:hiddenLine xmlns:a14="http://schemas.microsoft.com/office/drawing/2010/main" w="19050" cap="flat" cmpd="sng" algn="ctr">
-                <a:solidFill>
-                  <a:schemeClr val="accent1">
-                    <a:shade val="15000"/>
-                  </a:schemeClr>
-                </a:solidFill>
-                <a:prstDash val="solid"/>
-                <a:miter lim="800000"/>
-              </a14:hiddenLine>
-            </a:ext>
-          </a:extLst>
-        </p:spPr>
-        <p:style>
-          <a:lnRef idx="2">
-            <a:schemeClr val="accent1">
-              <a:shade val="15000"/>
-            </a:schemeClr>
-          </a:lnRef>
-          <a:fillRef idx="1">
-            <a:schemeClr val="accent1"/>
-          </a:fillRef>
-          <a:effectRef idx="0">
-            <a:schemeClr val="accent1"/>
-          </a:effectRef>
-          <a:fontRef idx="minor">
-            <a:schemeClr val="lt1"/>
-          </a:fontRef>
-        </p:style>
-        <p:txBody>
-          <a:bodyPr rtlCol="0" anchor="ctr"/>
-          <a:lstStyle/>
-          <a:p>
-            <a:pPr algn="ctr"/>
-            <a:r>
-              <a:rPr lang="en-AU" sz="1400" b="1">
-                <a:solidFill>
-                  <a:srgbClr val="FFFFFF"/>
-                </a:solidFill>
-              </a:rPr>
-              <a:t>6</a:t>
-            </a:r>
-          </a:p>
-        </p:txBody>
-      </p:sp>
-      <p:sp>
-        <p:nvSpPr>
-          <p:cNvPr id="10" name="Dot6">
-            <a:extLst>
-              <a:ext uri="{FF2B5EF4-FFF2-40B4-BE49-F238E27FC236}">
-                <a16:creationId xmlns:a16="http://schemas.microsoft.com/office/drawing/2014/main" id="{3E6849E4-D0A7-D7FE-5FE7-DB5A8910C5DD}"/>
-              </a:ext>
-            </a:extLst>
-          </p:cNvPr>
-          <p:cNvSpPr/>
-          <p:nvPr/>
-        </p:nvSpPr>
-        <p:spPr>
-          <a:xfrm>
-            <a:off x="1397000" y="5334000"/>
-            <a:ext cx="1016000" cy="1016000"/>
-          </a:xfrm>
-          <a:prstGeom prst="ellipse">
-            <a:avLst/>
-          </a:prstGeom>
-          <a:solidFill>
-            <a:srgbClr val="1F77B4"/>
-          </a:solidFill>
-          <a:ln w="19050" cap="flat" cmpd="sng" algn="ctr">
-            <a:noFill/>
-            <a:prstDash val="solid"/>
-            <a:miter lim="800000"/>
-          </a:ln>
-          <a:effectLst/>
-          <a:extLst>
-            <a:ext uri="{91240B29-F687-4F45-9708-019B960494DF}">
-              <a14:hiddenLine xmlns:a14="http://schemas.microsoft.com/office/drawing/2010/main" w="19050" cap="flat" cmpd="sng" algn="ctr">
-                <a:solidFill>
-                  <a:schemeClr val="accent1">
-                    <a:shade val="15000"/>
-                  </a:schemeClr>
-                </a:solidFill>
-                <a:prstDash val="solid"/>
-                <a:miter lim="800000"/>
-              </a14:hiddenLine>
-            </a:ext>
-          </a:extLst>
-        </p:spPr>
-        <p:style>
-          <a:lnRef idx="2">
-            <a:schemeClr val="accent1">
-              <a:shade val="15000"/>
-            </a:schemeClr>
-          </a:lnRef>
-          <a:fillRef idx="1">
-            <a:schemeClr val="accent1"/>
-          </a:fillRef>
-          <a:effectRef idx="0">
-            <a:schemeClr val="accent1"/>
-          </a:effectRef>
-          <a:fontRef idx="minor">
-            <a:schemeClr val="lt1"/>
-          </a:fontRef>
-        </p:style>
-        <p:txBody>
-          <a:bodyPr rtlCol="0" anchor="ctr"/>
-          <a:lstStyle/>
-          <a:p>
-            <a:pPr algn="ctr"/>
-            <a:r>
-              <a:rPr lang="en-AU" sz="1400" b="1">
-                <a:solidFill>
-                  <a:srgbClr val="FFFFFF"/>
-                </a:solidFill>
-              </a:rPr>
-              <a:t>7</a:t>
-            </a:r>
-          </a:p>
-        </p:txBody>
-      </p:sp>
-      <p:sp>
-        <p:nvSpPr>
-          <p:cNvPr id="11" name="Dot7">
-            <a:extLst>
-              <a:ext uri="{FF2B5EF4-FFF2-40B4-BE49-F238E27FC236}">
-                <a16:creationId xmlns:a16="http://schemas.microsoft.com/office/drawing/2014/main" id="{4F4643C7-FE3F-2FBF-3113-1AA54644CB01}"/>
-              </a:ext>
-            </a:extLst>
-          </p:cNvPr>
-          <p:cNvSpPr/>
-          <p:nvPr/>
-        </p:nvSpPr>
-        <p:spPr>
-          <a:xfrm>
-            <a:off x="5080000" y="5080000"/>
-            <a:ext cx="1016000" cy="1016000"/>
-          </a:xfrm>
-          <a:prstGeom prst="ellipse">
-            <a:avLst/>
-          </a:prstGeom>
-          <a:solidFill>
-            <a:srgbClr val="1F77B4"/>
-          </a:solidFill>
-          <a:ln w="19050" cap="flat" cmpd="sng" algn="ctr">
-            <a:noFill/>
-            <a:prstDash val="solid"/>
-            <a:miter lim="800000"/>
-          </a:ln>
-          <a:effectLst/>
-          <a:extLst>
-            <a:ext uri="{91240B29-F687-4F45-9708-019B960494DF}">
-              <a14:hiddenLine xmlns:a14="http://schemas.microsoft.com/office/drawing/2010/main" w="19050" cap="flat" cmpd="sng" algn="ctr">
-                <a:solidFill>
-                  <a:schemeClr val="accent1">
-                    <a:shade val="15000"/>
-                  </a:schemeClr>
-                </a:solidFill>
-                <a:prstDash val="solid"/>
-                <a:miter lim="800000"/>
-              </a14:hiddenLine>
-            </a:ext>
-          </a:extLst>
-        </p:spPr>
-        <p:style>
-          <a:lnRef idx="2">
-            <a:schemeClr val="accent1">
-              <a:shade val="15000"/>
-            </a:schemeClr>
-          </a:lnRef>
-          <a:fillRef idx="1">
-            <a:schemeClr val="accent1"/>
-          </a:fillRef>
-          <a:effectRef idx="0">
-            <a:schemeClr val="accent1"/>
-          </a:effectRef>
-          <a:fontRef idx="minor">
-            <a:schemeClr val="lt1"/>
-          </a:fontRef>
-        </p:style>
-        <p:txBody>
-          <a:bodyPr rtlCol="0" anchor="ctr"/>
-          <a:lstStyle/>
-          <a:p>
-            <a:pPr algn="ctr"/>
-            <a:r>
-              <a:rPr lang="en-AU" sz="1400" b="1">
-                <a:solidFill>
-                  <a:srgbClr val="FFFFFF"/>
-                </a:solidFill>
-              </a:rPr>
-              <a:t>8</a:t>
-            </a:r>
-          </a:p>
-        </p:txBody>
-      </p:sp>
-      <p:sp>
-        <p:nvSpPr>
-          <p:cNvPr id="12" name="Dot8">
-            <a:extLst>
-              <a:ext uri="{FF2B5EF4-FFF2-40B4-BE49-F238E27FC236}">
-                <a16:creationId xmlns:a16="http://schemas.microsoft.com/office/drawing/2014/main" id="{3FC73397-8A90-D398-D354-59D6361C9F9A}"/>
-              </a:ext>
-            </a:extLst>
-          </p:cNvPr>
-          <p:cNvSpPr/>
-          <p:nvPr/>
-        </p:nvSpPr>
-        <p:spPr>
-          <a:xfrm>
-            <a:off x="10160000" y="5461000"/>
-            <a:ext cx="1016000" cy="1016000"/>
-          </a:xfrm>
-          <a:prstGeom prst="ellipse">
-            <a:avLst/>
-          </a:prstGeom>
-          <a:solidFill>
-            <a:srgbClr val="1F77B4"/>
-          </a:solidFill>
-          <a:ln w="19050" cap="flat" cmpd="sng" algn="ctr">
-            <a:noFill/>
-            <a:prstDash val="solid"/>
-            <a:miter lim="800000"/>
-          </a:ln>
-          <a:effectLst/>
-          <a:extLst>
-            <a:ext uri="{91240B29-F687-4F45-9708-019B960494DF}">
-              <a14:hiddenLine xmlns:a14="http://schemas.microsoft.com/office/drawing/2010/main" w="19050" cap="flat" cmpd="sng" algn="ctr">
-                <a:solidFill>
-                  <a:schemeClr val="accent1">
-                    <a:shade val="15000"/>
-                  </a:schemeClr>
-                </a:solidFill>
-                <a:prstDash val="solid"/>
-                <a:miter lim="800000"/>
-              </a14:hiddenLine>
-            </a:ext>
-          </a:extLst>
-        </p:spPr>
-        <p:style>
-          <a:lnRef idx="2">
-            <a:schemeClr val="accent1">
-              <a:shade val="15000"/>
-            </a:schemeClr>
-          </a:lnRef>
-          <a:fillRef idx="1">
-            <a:schemeClr val="accent1"/>
-          </a:fillRef>
-          <a:effectRef idx="0">
-            <a:schemeClr val="accent1"/>
-          </a:effectRef>
-          <a:fontRef idx="minor">
-            <a:schemeClr val="lt1"/>
-          </a:fontRef>
-        </p:style>
-        <p:txBody>
-          <a:bodyPr rtlCol="0" anchor="ctr"/>
-          <a:lstStyle/>
-          <a:p>
-            <a:pPr algn="ctr"/>
-            <a:r>
-              <a:rPr lang="en-AU" sz="1400" b="1">
-                <a:solidFill>
-                  <a:srgbClr val="FFFFFF"/>
-                </a:solidFill>
-              </a:rPr>
-              <a:t>9</a:t>
-            </a:r>
-          </a:p>
-        </p:txBody>
-      </p:sp>
-      <p:sp>
-        <p:nvSpPr>
-          <p:cNvPr id="13" name="TextBox 12">
-            <a:extLst>
-              <a:ext uri="{FF2B5EF4-FFF2-40B4-BE49-F238E27FC236}">
-                <a16:creationId xmlns:a16="http://schemas.microsoft.com/office/drawing/2014/main" id="{7BDE338A-D967-12D0-0930-FF1195963D15}"/>
+              <a:t>right-aligned text</a:t>
+            </a:r>
+          </a:p>
+        </p:txBody>
+      </p:sp>
+      <p:sp>
+        <p:nvSpPr>
+          <p:cNvPr id="7" name="TextBox 6">
+            <a:extLst>
+              <a:ext uri="{FF2B5EF4-FFF2-40B4-BE49-F238E27FC236}">
+                <a16:creationId xmlns:a16="http://schemas.microsoft.com/office/drawing/2014/main" id="{28CC26DA-1DD3-4A63-1C80-E540A6325116}"/>
               </a:ext>
             </a:extLst>
           </p:cNvPr>
@@ -5265,7 +4778,7 @@
         </p:nvSpPr>
         <p:spPr>
           <a:xfrm>
-            <a:off x="508000" y="6350000"/>
+            <a:off x="508000" y="5715000"/>
             <a:ext cx="11176000" cy="276999"/>
           </a:xfrm>
           <a:prstGeom prst="rect">
@@ -5285,7 +4798,7 @@
                   <a:srgbClr val="7F7F7F"/>
                 </a:solidFill>
               </a:rPr>
-              <a:t>Grid only repositions - sizes are left alone, so it is safe on groups too. Set Reference = Slide to spread across the whole slide.</a:t>
+              <a:t>The frames are identical, so frame mode does nothing. Text bounds moves each box so the text itself lines up.</a:t>
             </a:r>
           </a:p>
         </p:txBody>
@@ -5293,7 +4806,7 @@
     </p:spTree>
     <p:extLst>
       <p:ext uri="{BB962C8B-B14F-4D97-AF65-F5344CB8AC3E}">
-        <p14:creationId xmlns:p14="http://schemas.microsoft.com/office/powerpoint/2010/main" val="3494223012"/>
+        <p14:creationId xmlns:p14="http://schemas.microsoft.com/office/powerpoint/2010/main" val="2313899332"/>
       </p:ext>
     </p:extLst>
   </p:cSld>
@@ -5325,7 +4838,7 @@
           <p:cNvPr id="2" name="Heading">
             <a:extLst>
               <a:ext uri="{FF2B5EF4-FFF2-40B4-BE49-F238E27FC236}">
-                <a16:creationId xmlns:a16="http://schemas.microsoft.com/office/drawing/2014/main" id="{78B255D9-AA66-60AB-1241-678642AEB620}"/>
+                <a16:creationId xmlns:a16="http://schemas.microsoft.com/office/drawing/2014/main" id="{E0063245-517F-5D8D-7D4D-5D57BBEA4F7D}"/>
               </a:ext>
             </a:extLst>
           </p:cNvPr>
@@ -5354,7 +4867,7 @@
                   <a:srgbClr val="282828"/>
                 </a:solidFill>
               </a:rPr>
-              <a:t>Align to the slide, or to its margins</a:t>
+              <a:t>Tidy a scatter into a grid</a:t>
             </a:r>
           </a:p>
         </p:txBody>
@@ -5364,7 +4877,7 @@
           <p:cNvPr id="3" name="Instructions">
             <a:extLst>
               <a:ext uri="{FF2B5EF4-FFF2-40B4-BE49-F238E27FC236}">
-                <a16:creationId xmlns:a16="http://schemas.microsoft.com/office/drawing/2014/main" id="{A0EF3B0D-61F2-4B66-88A1-EDE7A491E611}"/>
+                <a16:creationId xmlns:a16="http://schemas.microsoft.com/office/drawing/2014/main" id="{BA8ADA75-458E-0C5F-6F6F-3B6BB7B6F249}"/>
               </a:ext>
             </a:extLst>
           </p:cNvPr>
@@ -5393,6 +4906,828 @@
                   <a:srgbClr val="7F7F7F"/>
                 </a:solidFill>
               </a:rPr>
+              <a:t>Select all nine circles. Leave Columns blank for a near-square grid, or type 3. Then Arrange &gt; Grid.</a:t>
+            </a:r>
+          </a:p>
+        </p:txBody>
+      </p:sp>
+      <p:sp>
+        <p:nvSpPr>
+          <p:cNvPr id="4" name="Dot0">
+            <a:extLst>
+              <a:ext uri="{FF2B5EF4-FFF2-40B4-BE49-F238E27FC236}">
+                <a16:creationId xmlns:a16="http://schemas.microsoft.com/office/drawing/2014/main" id="{57C56979-E104-7324-2BBA-12A8EE4F206B}"/>
+              </a:ext>
+            </a:extLst>
+          </p:cNvPr>
+          <p:cNvSpPr/>
+          <p:nvPr/>
+        </p:nvSpPr>
+        <p:spPr>
+          <a:xfrm>
+            <a:off x="1524000" y="1905000"/>
+            <a:ext cx="1016000" cy="1016000"/>
+          </a:xfrm>
+          <a:prstGeom prst="ellipse">
+            <a:avLst/>
+          </a:prstGeom>
+          <a:solidFill>
+            <a:srgbClr val="1F77B4"/>
+          </a:solidFill>
+          <a:ln w="19050" cap="flat" cmpd="sng" algn="ctr">
+            <a:noFill/>
+            <a:prstDash val="solid"/>
+            <a:miter lim="800000"/>
+          </a:ln>
+          <a:effectLst/>
+          <a:extLst>
+            <a:ext uri="{91240B29-F687-4F45-9708-019B960494DF}">
+              <a14:hiddenLine xmlns:a14="http://schemas.microsoft.com/office/drawing/2010/main" w="19050" cap="flat" cmpd="sng" algn="ctr">
+                <a:solidFill>
+                  <a:schemeClr val="accent1">
+                    <a:shade val="15000"/>
+                  </a:schemeClr>
+                </a:solidFill>
+                <a:prstDash val="solid"/>
+                <a:miter lim="800000"/>
+              </a14:hiddenLine>
+            </a:ext>
+          </a:extLst>
+        </p:spPr>
+        <p:style>
+          <a:lnRef idx="2">
+            <a:schemeClr val="accent1">
+              <a:shade val="15000"/>
+            </a:schemeClr>
+          </a:lnRef>
+          <a:fillRef idx="1">
+            <a:schemeClr val="accent1"/>
+          </a:fillRef>
+          <a:effectRef idx="0">
+            <a:schemeClr val="accent1"/>
+          </a:effectRef>
+          <a:fontRef idx="minor">
+            <a:schemeClr val="lt1"/>
+          </a:fontRef>
+        </p:style>
+        <p:txBody>
+          <a:bodyPr rtlCol="0" anchor="ctr"/>
+          <a:lstStyle/>
+          <a:p>
+            <a:pPr algn="ctr"/>
+            <a:r>
+              <a:rPr lang="en-AU" sz="1400" b="1">
+                <a:solidFill>
+                  <a:srgbClr val="FFFFFF"/>
+                </a:solidFill>
+              </a:rPr>
+              <a:t>1</a:t>
+            </a:r>
+          </a:p>
+        </p:txBody>
+      </p:sp>
+      <p:sp>
+        <p:nvSpPr>
+          <p:cNvPr id="5" name="Dot1">
+            <a:extLst>
+              <a:ext uri="{FF2B5EF4-FFF2-40B4-BE49-F238E27FC236}">
+                <a16:creationId xmlns:a16="http://schemas.microsoft.com/office/drawing/2014/main" id="{67AB020F-983B-E7AB-A1B1-22818B35CC6C}"/>
+              </a:ext>
+            </a:extLst>
+          </p:cNvPr>
+          <p:cNvSpPr/>
+          <p:nvPr/>
+        </p:nvSpPr>
+        <p:spPr>
+          <a:xfrm>
+            <a:off x="5461000" y="2413000"/>
+            <a:ext cx="1016000" cy="1016000"/>
+          </a:xfrm>
+          <a:prstGeom prst="ellipse">
+            <a:avLst/>
+          </a:prstGeom>
+          <a:solidFill>
+            <a:srgbClr val="1F77B4"/>
+          </a:solidFill>
+          <a:ln w="19050" cap="flat" cmpd="sng" algn="ctr">
+            <a:noFill/>
+            <a:prstDash val="solid"/>
+            <a:miter lim="800000"/>
+          </a:ln>
+          <a:effectLst/>
+          <a:extLst>
+            <a:ext uri="{91240B29-F687-4F45-9708-019B960494DF}">
+              <a14:hiddenLine xmlns:a14="http://schemas.microsoft.com/office/drawing/2010/main" w="19050" cap="flat" cmpd="sng" algn="ctr">
+                <a:solidFill>
+                  <a:schemeClr val="accent1">
+                    <a:shade val="15000"/>
+                  </a:schemeClr>
+                </a:solidFill>
+                <a:prstDash val="solid"/>
+                <a:miter lim="800000"/>
+              </a14:hiddenLine>
+            </a:ext>
+          </a:extLst>
+        </p:spPr>
+        <p:style>
+          <a:lnRef idx="2">
+            <a:schemeClr val="accent1">
+              <a:shade val="15000"/>
+            </a:schemeClr>
+          </a:lnRef>
+          <a:fillRef idx="1">
+            <a:schemeClr val="accent1"/>
+          </a:fillRef>
+          <a:effectRef idx="0">
+            <a:schemeClr val="accent1"/>
+          </a:effectRef>
+          <a:fontRef idx="minor">
+            <a:schemeClr val="lt1"/>
+          </a:fontRef>
+        </p:style>
+        <p:txBody>
+          <a:bodyPr rtlCol="0" anchor="ctr"/>
+          <a:lstStyle/>
+          <a:p>
+            <a:pPr algn="ctr"/>
+            <a:r>
+              <a:rPr lang="en-AU" sz="1400" b="1">
+                <a:solidFill>
+                  <a:srgbClr val="FFFFFF"/>
+                </a:solidFill>
+              </a:rPr>
+              <a:t>2</a:t>
+            </a:r>
+          </a:p>
+        </p:txBody>
+      </p:sp>
+      <p:sp>
+        <p:nvSpPr>
+          <p:cNvPr id="6" name="Dot2">
+            <a:extLst>
+              <a:ext uri="{FF2B5EF4-FFF2-40B4-BE49-F238E27FC236}">
+                <a16:creationId xmlns:a16="http://schemas.microsoft.com/office/drawing/2014/main" id="{983CE5CC-C9C4-CA9A-19BE-C5269B60E689}"/>
+              </a:ext>
+            </a:extLst>
+          </p:cNvPr>
+          <p:cNvSpPr/>
+          <p:nvPr/>
+        </p:nvSpPr>
+        <p:spPr>
+          <a:xfrm>
+            <a:off x="9652000" y="1778000"/>
+            <a:ext cx="1016000" cy="1016000"/>
+          </a:xfrm>
+          <a:prstGeom prst="ellipse">
+            <a:avLst/>
+          </a:prstGeom>
+          <a:solidFill>
+            <a:srgbClr val="1F77B4"/>
+          </a:solidFill>
+          <a:ln w="19050" cap="flat" cmpd="sng" algn="ctr">
+            <a:noFill/>
+            <a:prstDash val="solid"/>
+            <a:miter lim="800000"/>
+          </a:ln>
+          <a:effectLst/>
+          <a:extLst>
+            <a:ext uri="{91240B29-F687-4F45-9708-019B960494DF}">
+              <a14:hiddenLine xmlns:a14="http://schemas.microsoft.com/office/drawing/2010/main" w="19050" cap="flat" cmpd="sng" algn="ctr">
+                <a:solidFill>
+                  <a:schemeClr val="accent1">
+                    <a:shade val="15000"/>
+                  </a:schemeClr>
+                </a:solidFill>
+                <a:prstDash val="solid"/>
+                <a:miter lim="800000"/>
+              </a14:hiddenLine>
+            </a:ext>
+          </a:extLst>
+        </p:spPr>
+        <p:style>
+          <a:lnRef idx="2">
+            <a:schemeClr val="accent1">
+              <a:shade val="15000"/>
+            </a:schemeClr>
+          </a:lnRef>
+          <a:fillRef idx="1">
+            <a:schemeClr val="accent1"/>
+          </a:fillRef>
+          <a:effectRef idx="0">
+            <a:schemeClr val="accent1"/>
+          </a:effectRef>
+          <a:fontRef idx="minor">
+            <a:schemeClr val="lt1"/>
+          </a:fontRef>
+        </p:style>
+        <p:txBody>
+          <a:bodyPr rtlCol="0" anchor="ctr"/>
+          <a:lstStyle/>
+          <a:p>
+            <a:pPr algn="ctr"/>
+            <a:r>
+              <a:rPr lang="en-AU" sz="1400" b="1">
+                <a:solidFill>
+                  <a:srgbClr val="FFFFFF"/>
+                </a:solidFill>
+              </a:rPr>
+              <a:t>3</a:t>
+            </a:r>
+          </a:p>
+        </p:txBody>
+      </p:sp>
+      <p:sp>
+        <p:nvSpPr>
+          <p:cNvPr id="7" name="Dot3">
+            <a:extLst>
+              <a:ext uri="{FF2B5EF4-FFF2-40B4-BE49-F238E27FC236}">
+                <a16:creationId xmlns:a16="http://schemas.microsoft.com/office/drawing/2014/main" id="{D94C1D4D-32B0-6872-DE96-CE8F3C56DEF6}"/>
+              </a:ext>
+            </a:extLst>
+          </p:cNvPr>
+          <p:cNvSpPr/>
+          <p:nvPr/>
+        </p:nvSpPr>
+        <p:spPr>
+          <a:xfrm>
+            <a:off x="2413000" y="3810000"/>
+            <a:ext cx="1016000" cy="1016000"/>
+          </a:xfrm>
+          <a:prstGeom prst="ellipse">
+            <a:avLst/>
+          </a:prstGeom>
+          <a:solidFill>
+            <a:srgbClr val="1F77B4"/>
+          </a:solidFill>
+          <a:ln w="19050" cap="flat" cmpd="sng" algn="ctr">
+            <a:noFill/>
+            <a:prstDash val="solid"/>
+            <a:miter lim="800000"/>
+          </a:ln>
+          <a:effectLst/>
+          <a:extLst>
+            <a:ext uri="{91240B29-F687-4F45-9708-019B960494DF}">
+              <a14:hiddenLine xmlns:a14="http://schemas.microsoft.com/office/drawing/2010/main" w="19050" cap="flat" cmpd="sng" algn="ctr">
+                <a:solidFill>
+                  <a:schemeClr val="accent1">
+                    <a:shade val="15000"/>
+                  </a:schemeClr>
+                </a:solidFill>
+                <a:prstDash val="solid"/>
+                <a:miter lim="800000"/>
+              </a14:hiddenLine>
+            </a:ext>
+          </a:extLst>
+        </p:spPr>
+        <p:style>
+          <a:lnRef idx="2">
+            <a:schemeClr val="accent1">
+              <a:shade val="15000"/>
+            </a:schemeClr>
+          </a:lnRef>
+          <a:fillRef idx="1">
+            <a:schemeClr val="accent1"/>
+          </a:fillRef>
+          <a:effectRef idx="0">
+            <a:schemeClr val="accent1"/>
+          </a:effectRef>
+          <a:fontRef idx="minor">
+            <a:schemeClr val="lt1"/>
+          </a:fontRef>
+        </p:style>
+        <p:txBody>
+          <a:bodyPr rtlCol="0" anchor="ctr"/>
+          <a:lstStyle/>
+          <a:p>
+            <a:pPr algn="ctr"/>
+            <a:r>
+              <a:rPr lang="en-AU" sz="1400" b="1">
+                <a:solidFill>
+                  <a:srgbClr val="FFFFFF"/>
+                </a:solidFill>
+              </a:rPr>
+              <a:t>4</a:t>
+            </a:r>
+          </a:p>
+        </p:txBody>
+      </p:sp>
+      <p:sp>
+        <p:nvSpPr>
+          <p:cNvPr id="8" name="Dot4">
+            <a:extLst>
+              <a:ext uri="{FF2B5EF4-FFF2-40B4-BE49-F238E27FC236}">
+                <a16:creationId xmlns:a16="http://schemas.microsoft.com/office/drawing/2014/main" id="{E2F905AD-D958-7BDF-067B-24C02C256495}"/>
+              </a:ext>
+            </a:extLst>
+          </p:cNvPr>
+          <p:cNvSpPr/>
+          <p:nvPr/>
+        </p:nvSpPr>
+        <p:spPr>
+          <a:xfrm>
+            <a:off x="6604000" y="3302000"/>
+            <a:ext cx="1016000" cy="1016000"/>
+          </a:xfrm>
+          <a:prstGeom prst="ellipse">
+            <a:avLst/>
+          </a:prstGeom>
+          <a:solidFill>
+            <a:srgbClr val="1F77B4"/>
+          </a:solidFill>
+          <a:ln w="19050" cap="flat" cmpd="sng" algn="ctr">
+            <a:noFill/>
+            <a:prstDash val="solid"/>
+            <a:miter lim="800000"/>
+          </a:ln>
+          <a:effectLst/>
+          <a:extLst>
+            <a:ext uri="{91240B29-F687-4F45-9708-019B960494DF}">
+              <a14:hiddenLine xmlns:a14="http://schemas.microsoft.com/office/drawing/2010/main" w="19050" cap="flat" cmpd="sng" algn="ctr">
+                <a:solidFill>
+                  <a:schemeClr val="accent1">
+                    <a:shade val="15000"/>
+                  </a:schemeClr>
+                </a:solidFill>
+                <a:prstDash val="solid"/>
+                <a:miter lim="800000"/>
+              </a14:hiddenLine>
+            </a:ext>
+          </a:extLst>
+        </p:spPr>
+        <p:style>
+          <a:lnRef idx="2">
+            <a:schemeClr val="accent1">
+              <a:shade val="15000"/>
+            </a:schemeClr>
+          </a:lnRef>
+          <a:fillRef idx="1">
+            <a:schemeClr val="accent1"/>
+          </a:fillRef>
+          <a:effectRef idx="0">
+            <a:schemeClr val="accent1"/>
+          </a:effectRef>
+          <a:fontRef idx="minor">
+            <a:schemeClr val="lt1"/>
+          </a:fontRef>
+        </p:style>
+        <p:txBody>
+          <a:bodyPr rtlCol="0" anchor="ctr"/>
+          <a:lstStyle/>
+          <a:p>
+            <a:pPr algn="ctr"/>
+            <a:r>
+              <a:rPr lang="en-AU" sz="1400" b="1">
+                <a:solidFill>
+                  <a:srgbClr val="FFFFFF"/>
+                </a:solidFill>
+              </a:rPr>
+              <a:t>5</a:t>
+            </a:r>
+          </a:p>
+        </p:txBody>
+      </p:sp>
+      <p:sp>
+        <p:nvSpPr>
+          <p:cNvPr id="9" name="Dot5">
+            <a:extLst>
+              <a:ext uri="{FF2B5EF4-FFF2-40B4-BE49-F238E27FC236}">
+                <a16:creationId xmlns:a16="http://schemas.microsoft.com/office/drawing/2014/main" id="{62B799E8-8677-D837-A02F-5AEAC2418969}"/>
+              </a:ext>
+            </a:extLst>
+          </p:cNvPr>
+          <p:cNvSpPr/>
+          <p:nvPr/>
+        </p:nvSpPr>
+        <p:spPr>
+          <a:xfrm>
+            <a:off x="8763000" y="4191000"/>
+            <a:ext cx="1016000" cy="1016000"/>
+          </a:xfrm>
+          <a:prstGeom prst="ellipse">
+            <a:avLst/>
+          </a:prstGeom>
+          <a:solidFill>
+            <a:srgbClr val="1F77B4"/>
+          </a:solidFill>
+          <a:ln w="19050" cap="flat" cmpd="sng" algn="ctr">
+            <a:noFill/>
+            <a:prstDash val="solid"/>
+            <a:miter lim="800000"/>
+          </a:ln>
+          <a:effectLst/>
+          <a:extLst>
+            <a:ext uri="{91240B29-F687-4F45-9708-019B960494DF}">
+              <a14:hiddenLine xmlns:a14="http://schemas.microsoft.com/office/drawing/2010/main" w="19050" cap="flat" cmpd="sng" algn="ctr">
+                <a:solidFill>
+                  <a:schemeClr val="accent1">
+                    <a:shade val="15000"/>
+                  </a:schemeClr>
+                </a:solidFill>
+                <a:prstDash val="solid"/>
+                <a:miter lim="800000"/>
+              </a14:hiddenLine>
+            </a:ext>
+          </a:extLst>
+        </p:spPr>
+        <p:style>
+          <a:lnRef idx="2">
+            <a:schemeClr val="accent1">
+              <a:shade val="15000"/>
+            </a:schemeClr>
+          </a:lnRef>
+          <a:fillRef idx="1">
+            <a:schemeClr val="accent1"/>
+          </a:fillRef>
+          <a:effectRef idx="0">
+            <a:schemeClr val="accent1"/>
+          </a:effectRef>
+          <a:fontRef idx="minor">
+            <a:schemeClr val="lt1"/>
+          </a:fontRef>
+        </p:style>
+        <p:txBody>
+          <a:bodyPr rtlCol="0" anchor="ctr"/>
+          <a:lstStyle/>
+          <a:p>
+            <a:pPr algn="ctr"/>
+            <a:r>
+              <a:rPr lang="en-AU" sz="1400" b="1">
+                <a:solidFill>
+                  <a:srgbClr val="FFFFFF"/>
+                </a:solidFill>
+              </a:rPr>
+              <a:t>6</a:t>
+            </a:r>
+          </a:p>
+        </p:txBody>
+      </p:sp>
+      <p:sp>
+        <p:nvSpPr>
+          <p:cNvPr id="10" name="Dot6">
+            <a:extLst>
+              <a:ext uri="{FF2B5EF4-FFF2-40B4-BE49-F238E27FC236}">
+                <a16:creationId xmlns:a16="http://schemas.microsoft.com/office/drawing/2014/main" id="{479FB203-E04E-9048-81B8-BA305A3E0987}"/>
+              </a:ext>
+            </a:extLst>
+          </p:cNvPr>
+          <p:cNvSpPr/>
+          <p:nvPr/>
+        </p:nvSpPr>
+        <p:spPr>
+          <a:xfrm>
+            <a:off x="1397000" y="5334000"/>
+            <a:ext cx="1016000" cy="1016000"/>
+          </a:xfrm>
+          <a:prstGeom prst="ellipse">
+            <a:avLst/>
+          </a:prstGeom>
+          <a:solidFill>
+            <a:srgbClr val="1F77B4"/>
+          </a:solidFill>
+          <a:ln w="19050" cap="flat" cmpd="sng" algn="ctr">
+            <a:noFill/>
+            <a:prstDash val="solid"/>
+            <a:miter lim="800000"/>
+          </a:ln>
+          <a:effectLst/>
+          <a:extLst>
+            <a:ext uri="{91240B29-F687-4F45-9708-019B960494DF}">
+              <a14:hiddenLine xmlns:a14="http://schemas.microsoft.com/office/drawing/2010/main" w="19050" cap="flat" cmpd="sng" algn="ctr">
+                <a:solidFill>
+                  <a:schemeClr val="accent1">
+                    <a:shade val="15000"/>
+                  </a:schemeClr>
+                </a:solidFill>
+                <a:prstDash val="solid"/>
+                <a:miter lim="800000"/>
+              </a14:hiddenLine>
+            </a:ext>
+          </a:extLst>
+        </p:spPr>
+        <p:style>
+          <a:lnRef idx="2">
+            <a:schemeClr val="accent1">
+              <a:shade val="15000"/>
+            </a:schemeClr>
+          </a:lnRef>
+          <a:fillRef idx="1">
+            <a:schemeClr val="accent1"/>
+          </a:fillRef>
+          <a:effectRef idx="0">
+            <a:schemeClr val="accent1"/>
+          </a:effectRef>
+          <a:fontRef idx="minor">
+            <a:schemeClr val="lt1"/>
+          </a:fontRef>
+        </p:style>
+        <p:txBody>
+          <a:bodyPr rtlCol="0" anchor="ctr"/>
+          <a:lstStyle/>
+          <a:p>
+            <a:pPr algn="ctr"/>
+            <a:r>
+              <a:rPr lang="en-AU" sz="1400" b="1">
+                <a:solidFill>
+                  <a:srgbClr val="FFFFFF"/>
+                </a:solidFill>
+              </a:rPr>
+              <a:t>7</a:t>
+            </a:r>
+          </a:p>
+        </p:txBody>
+      </p:sp>
+      <p:sp>
+        <p:nvSpPr>
+          <p:cNvPr id="11" name="Dot7">
+            <a:extLst>
+              <a:ext uri="{FF2B5EF4-FFF2-40B4-BE49-F238E27FC236}">
+                <a16:creationId xmlns:a16="http://schemas.microsoft.com/office/drawing/2014/main" id="{A2351D57-BCA7-1F7D-8300-E81362D42EB1}"/>
+              </a:ext>
+            </a:extLst>
+          </p:cNvPr>
+          <p:cNvSpPr/>
+          <p:nvPr/>
+        </p:nvSpPr>
+        <p:spPr>
+          <a:xfrm>
+            <a:off x="5080000" y="5080000"/>
+            <a:ext cx="1016000" cy="1016000"/>
+          </a:xfrm>
+          <a:prstGeom prst="ellipse">
+            <a:avLst/>
+          </a:prstGeom>
+          <a:solidFill>
+            <a:srgbClr val="1F77B4"/>
+          </a:solidFill>
+          <a:ln w="19050" cap="flat" cmpd="sng" algn="ctr">
+            <a:noFill/>
+            <a:prstDash val="solid"/>
+            <a:miter lim="800000"/>
+          </a:ln>
+          <a:effectLst/>
+          <a:extLst>
+            <a:ext uri="{91240B29-F687-4F45-9708-019B960494DF}">
+              <a14:hiddenLine xmlns:a14="http://schemas.microsoft.com/office/drawing/2010/main" w="19050" cap="flat" cmpd="sng" algn="ctr">
+                <a:solidFill>
+                  <a:schemeClr val="accent1">
+                    <a:shade val="15000"/>
+                  </a:schemeClr>
+                </a:solidFill>
+                <a:prstDash val="solid"/>
+                <a:miter lim="800000"/>
+              </a14:hiddenLine>
+            </a:ext>
+          </a:extLst>
+        </p:spPr>
+        <p:style>
+          <a:lnRef idx="2">
+            <a:schemeClr val="accent1">
+              <a:shade val="15000"/>
+            </a:schemeClr>
+          </a:lnRef>
+          <a:fillRef idx="1">
+            <a:schemeClr val="accent1"/>
+          </a:fillRef>
+          <a:effectRef idx="0">
+            <a:schemeClr val="accent1"/>
+          </a:effectRef>
+          <a:fontRef idx="minor">
+            <a:schemeClr val="lt1"/>
+          </a:fontRef>
+        </p:style>
+        <p:txBody>
+          <a:bodyPr rtlCol="0" anchor="ctr"/>
+          <a:lstStyle/>
+          <a:p>
+            <a:pPr algn="ctr"/>
+            <a:r>
+              <a:rPr lang="en-AU" sz="1400" b="1">
+                <a:solidFill>
+                  <a:srgbClr val="FFFFFF"/>
+                </a:solidFill>
+              </a:rPr>
+              <a:t>8</a:t>
+            </a:r>
+          </a:p>
+        </p:txBody>
+      </p:sp>
+      <p:sp>
+        <p:nvSpPr>
+          <p:cNvPr id="12" name="Dot8">
+            <a:extLst>
+              <a:ext uri="{FF2B5EF4-FFF2-40B4-BE49-F238E27FC236}">
+                <a16:creationId xmlns:a16="http://schemas.microsoft.com/office/drawing/2014/main" id="{B07E038A-BA95-524E-F36E-A9E3511620E8}"/>
+              </a:ext>
+            </a:extLst>
+          </p:cNvPr>
+          <p:cNvSpPr/>
+          <p:nvPr/>
+        </p:nvSpPr>
+        <p:spPr>
+          <a:xfrm>
+            <a:off x="10160000" y="5461000"/>
+            <a:ext cx="1016000" cy="1016000"/>
+          </a:xfrm>
+          <a:prstGeom prst="ellipse">
+            <a:avLst/>
+          </a:prstGeom>
+          <a:solidFill>
+            <a:srgbClr val="1F77B4"/>
+          </a:solidFill>
+          <a:ln w="19050" cap="flat" cmpd="sng" algn="ctr">
+            <a:noFill/>
+            <a:prstDash val="solid"/>
+            <a:miter lim="800000"/>
+          </a:ln>
+          <a:effectLst/>
+          <a:extLst>
+            <a:ext uri="{91240B29-F687-4F45-9708-019B960494DF}">
+              <a14:hiddenLine xmlns:a14="http://schemas.microsoft.com/office/drawing/2010/main" w="19050" cap="flat" cmpd="sng" algn="ctr">
+                <a:solidFill>
+                  <a:schemeClr val="accent1">
+                    <a:shade val="15000"/>
+                  </a:schemeClr>
+                </a:solidFill>
+                <a:prstDash val="solid"/>
+                <a:miter lim="800000"/>
+              </a14:hiddenLine>
+            </a:ext>
+          </a:extLst>
+        </p:spPr>
+        <p:style>
+          <a:lnRef idx="2">
+            <a:schemeClr val="accent1">
+              <a:shade val="15000"/>
+            </a:schemeClr>
+          </a:lnRef>
+          <a:fillRef idx="1">
+            <a:schemeClr val="accent1"/>
+          </a:fillRef>
+          <a:effectRef idx="0">
+            <a:schemeClr val="accent1"/>
+          </a:effectRef>
+          <a:fontRef idx="minor">
+            <a:schemeClr val="lt1"/>
+          </a:fontRef>
+        </p:style>
+        <p:txBody>
+          <a:bodyPr rtlCol="0" anchor="ctr"/>
+          <a:lstStyle/>
+          <a:p>
+            <a:pPr algn="ctr"/>
+            <a:r>
+              <a:rPr lang="en-AU" sz="1400" b="1">
+                <a:solidFill>
+                  <a:srgbClr val="FFFFFF"/>
+                </a:solidFill>
+              </a:rPr>
+              <a:t>9</a:t>
+            </a:r>
+          </a:p>
+        </p:txBody>
+      </p:sp>
+      <p:sp>
+        <p:nvSpPr>
+          <p:cNvPr id="13" name="TextBox 12">
+            <a:extLst>
+              <a:ext uri="{FF2B5EF4-FFF2-40B4-BE49-F238E27FC236}">
+                <a16:creationId xmlns:a16="http://schemas.microsoft.com/office/drawing/2014/main" id="{1D28EF18-C1F3-2181-E6C3-9FF1AC62560E}"/>
+              </a:ext>
+            </a:extLst>
+          </p:cNvPr>
+          <p:cNvSpPr txBox="1"/>
+          <p:nvPr/>
+        </p:nvSpPr>
+        <p:spPr>
+          <a:xfrm>
+            <a:off x="508000" y="6350000"/>
+            <a:ext cx="11176000" cy="276999"/>
+          </a:xfrm>
+          <a:prstGeom prst="rect">
+            <a:avLst/>
+          </a:prstGeom>
+          <a:noFill/>
+        </p:spPr>
+        <p:txBody>
+          <a:bodyPr vert="horz" rtlCol="0">
+            <a:spAutoFit/>
+          </a:bodyPr>
+          <a:lstStyle/>
+          <a:p>
+            <a:r>
+              <a:rPr lang="en-AU" sz="1200">
+                <a:solidFill>
+                  <a:srgbClr val="7F7F7F"/>
+                </a:solidFill>
+              </a:rPr>
+              <a:t>Grid only repositions - sizes are left alone, so it is safe on groups too. Set Reference = Slide to spread across the whole slide.</a:t>
+            </a:r>
+          </a:p>
+        </p:txBody>
+      </p:sp>
+    </p:spTree>
+    <p:extLst>
+      <p:ext uri="{BB962C8B-B14F-4D97-AF65-F5344CB8AC3E}">
+        <p14:creationId xmlns:p14="http://schemas.microsoft.com/office/powerpoint/2010/main" val="3655201640"/>
+      </p:ext>
+    </p:extLst>
+  </p:cSld>
+  <p:clrMapOvr>
+    <a:masterClrMapping/>
+  </p:clrMapOvr>
+</p:sld>
+</file>
+
+<file path=ppt/slides/slide14.xml><?xml version="1.0" encoding="utf-8"?>
+<p:sld xmlns:a="http://schemas.openxmlformats.org/drawingml/2006/main" xmlns:r="http://schemas.openxmlformats.org/officeDocument/2006/relationships" xmlns:p="http://schemas.openxmlformats.org/presentationml/2006/main">
+  <p:cSld>
+    <p:spTree>
+      <p:nvGrpSpPr>
+        <p:cNvPr id="1" name=""/>
+        <p:cNvGrpSpPr/>
+        <p:nvPr/>
+      </p:nvGrpSpPr>
+      <p:grpSpPr>
+        <a:xfrm>
+          <a:off x="0" y="0"/>
+          <a:ext cx="0" cy="0"/>
+          <a:chOff x="0" y="0"/>
+          <a:chExt cx="0" cy="0"/>
+        </a:xfrm>
+      </p:grpSpPr>
+      <p:sp>
+        <p:nvSpPr>
+          <p:cNvPr id="2" name="Heading">
+            <a:extLst>
+              <a:ext uri="{FF2B5EF4-FFF2-40B4-BE49-F238E27FC236}">
+                <a16:creationId xmlns:a16="http://schemas.microsoft.com/office/drawing/2014/main" id="{8D6FDC8A-4263-7AA3-965E-0AF21B72852B}"/>
+              </a:ext>
+            </a:extLst>
+          </p:cNvPr>
+          <p:cNvSpPr txBox="1"/>
+          <p:nvPr/>
+        </p:nvSpPr>
+        <p:spPr>
+          <a:xfrm>
+            <a:off x="508000" y="304800"/>
+            <a:ext cx="11176000" cy="461665"/>
+          </a:xfrm>
+          <a:prstGeom prst="rect">
+            <a:avLst/>
+          </a:prstGeom>
+          <a:noFill/>
+        </p:spPr>
+        <p:txBody>
+          <a:bodyPr vert="horz" rtlCol="0">
+            <a:spAutoFit/>
+          </a:bodyPr>
+          <a:lstStyle/>
+          <a:p>
+            <a:r>
+              <a:rPr lang="en-AU" sz="2400" b="1">
+                <a:solidFill>
+                  <a:srgbClr val="282828"/>
+                </a:solidFill>
+              </a:rPr>
+              <a:t>Align to the slide, or to its margins</a:t>
+            </a:r>
+          </a:p>
+        </p:txBody>
+      </p:sp>
+      <p:sp>
+        <p:nvSpPr>
+          <p:cNvPr id="3" name="Instructions">
+            <a:extLst>
+              <a:ext uri="{FF2B5EF4-FFF2-40B4-BE49-F238E27FC236}">
+                <a16:creationId xmlns:a16="http://schemas.microsoft.com/office/drawing/2014/main" id="{1368349C-E372-A8FB-2130-049E8F5CBCC1}"/>
+              </a:ext>
+            </a:extLst>
+          </p:cNvPr>
+          <p:cNvSpPr txBox="1"/>
+          <p:nvPr/>
+        </p:nvSpPr>
+        <p:spPr>
+          <a:xfrm>
+            <a:off x="508000" y="762000"/>
+            <a:ext cx="11176000" cy="292388"/>
+          </a:xfrm>
+          <a:prstGeom prst="rect">
+            <a:avLst/>
+          </a:prstGeom>
+          <a:noFill/>
+        </p:spPr>
+        <p:txBody>
+          <a:bodyPr vert="horz" rtlCol="0">
+            <a:spAutoFit/>
+          </a:bodyPr>
+          <a:lstStyle/>
+          <a:p>
+            <a:r>
+              <a:rPr lang="en-AU" sz="1300">
+                <a:solidFill>
+                  <a:srgbClr val="7F7F7F"/>
+                </a:solidFill>
+              </a:rPr>
               <a:t>Select one shape. Reference = Slide then Align &gt; Centre. Then Reference = Slide margins with Margin = 36.</a:t>
             </a:r>
           </a:p>
@@ -5403,7 +5738,7 @@
           <p:cNvPr id="4" name="Wanderer">
             <a:extLst>
               <a:ext uri="{FF2B5EF4-FFF2-40B4-BE49-F238E27FC236}">
-                <a16:creationId xmlns:a16="http://schemas.microsoft.com/office/drawing/2014/main" id="{1C5FE0D7-B3CD-6D02-D529-35DF8DB588B3}"/>
+                <a16:creationId xmlns:a16="http://schemas.microsoft.com/office/drawing/2014/main" id="{69815706-9F19-5655-FDC5-6824BFF77547}"/>
               </a:ext>
             </a:extLst>
           </p:cNvPr>
@@ -5478,7 +5813,7 @@
           <p:cNvPr id="5" name="Friend">
             <a:extLst>
               <a:ext uri="{FF2B5EF4-FFF2-40B4-BE49-F238E27FC236}">
-                <a16:creationId xmlns:a16="http://schemas.microsoft.com/office/drawing/2014/main" id="{C1D715E6-1FF9-22C1-E265-3C564FD7FAC8}"/>
+                <a16:creationId xmlns:a16="http://schemas.microsoft.com/office/drawing/2014/main" id="{E2087A3A-44FF-14FE-F1B0-81EC3EF2D04C}"/>
               </a:ext>
             </a:extLst>
           </p:cNvPr>
@@ -5553,7 +5888,7 @@
           <p:cNvPr id="6" name="TextBox 5">
             <a:extLst>
               <a:ext uri="{FF2B5EF4-FFF2-40B4-BE49-F238E27FC236}">
-                <a16:creationId xmlns:a16="http://schemas.microsoft.com/office/drawing/2014/main" id="{FB8ED06A-1A88-5B5C-F386-08B90ADC5B1F}"/>
+                <a16:creationId xmlns:a16="http://schemas.microsoft.com/office/drawing/2014/main" id="{ABAA05EC-0701-8BC6-9BCC-40B596F8BD01}"/>
               </a:ext>
             </a:extLst>
           </p:cNvPr>
@@ -5590,7 +5925,1459 @@
     </p:spTree>
     <p:extLst>
       <p:ext uri="{BB962C8B-B14F-4D97-AF65-F5344CB8AC3E}">
-        <p14:creationId xmlns:p14="http://schemas.microsoft.com/office/powerpoint/2010/main" val="2623134517"/>
+        <p14:creationId xmlns:p14="http://schemas.microsoft.com/office/powerpoint/2010/main" val="327056292"/>
+      </p:ext>
+    </p:extLst>
+  </p:cSld>
+  <p:clrMapOvr>
+    <a:masterClrMapping/>
+  </p:clrMapOvr>
+</p:sld>
+</file>
+
+<file path=ppt/slides/slide15.xml><?xml version="1.0" encoding="utf-8"?>
+<p:sld xmlns:a="http://schemas.openxmlformats.org/drawingml/2006/main" xmlns:r="http://schemas.openxmlformats.org/officeDocument/2006/relationships" xmlns:p="http://schemas.openxmlformats.org/presentationml/2006/main">
+  <p:cSld>
+    <p:spTree>
+      <p:nvGrpSpPr>
+        <p:cNvPr id="1" name=""/>
+        <p:cNvGrpSpPr/>
+        <p:nvPr/>
+      </p:nvGrpSpPr>
+      <p:grpSpPr>
+        <a:xfrm>
+          <a:off x="0" y="0"/>
+          <a:ext cx="0" cy="0"/>
+          <a:chOff x="0" y="0"/>
+          <a:chExt cx="0" cy="0"/>
+        </a:xfrm>
+      </p:grpSpPr>
+      <p:sp>
+        <p:nvSpPr>
+          <p:cNvPr id="2" name="Heading">
+            <a:extLst>
+              <a:ext uri="{FF2B5EF4-FFF2-40B4-BE49-F238E27FC236}">
+                <a16:creationId xmlns:a16="http://schemas.microsoft.com/office/drawing/2014/main" id="{3B36B4B4-33EB-2E68-5ED2-9DBC8E76184C}"/>
+              </a:ext>
+            </a:extLst>
+          </p:cNvPr>
+          <p:cNvSpPr txBox="1"/>
+          <p:nvPr/>
+        </p:nvSpPr>
+        <p:spPr>
+          <a:xfrm>
+            <a:off x="508000" y="304800"/>
+            <a:ext cx="11176000" cy="461665"/>
+          </a:xfrm>
+          <a:prstGeom prst="rect">
+            <a:avLst/>
+          </a:prstGeom>
+          <a:noFill/>
+        </p:spPr>
+        <p:txBody>
+          <a:bodyPr vert="horz" rtlCol="0">
+            <a:spAutoFit/>
+          </a:bodyPr>
+          <a:lstStyle/>
+          <a:p>
+            <a:r>
+              <a:rPr lang="en-AU" sz="2400" b="1">
+                <a:solidFill>
+                  <a:srgbClr val="282828"/>
+                </a:solidFill>
+              </a:rPr>
+              <a:t>Match rotation</a:t>
+            </a:r>
+          </a:p>
+        </p:txBody>
+      </p:sp>
+      <p:sp>
+        <p:nvSpPr>
+          <p:cNvPr id="3" name="Instructions">
+            <a:extLst>
+              <a:ext uri="{FF2B5EF4-FFF2-40B4-BE49-F238E27FC236}">
+                <a16:creationId xmlns:a16="http://schemas.microsoft.com/office/drawing/2014/main" id="{93476BF3-2422-ABAB-5561-11BFA633F5D6}"/>
+              </a:ext>
+            </a:extLst>
+          </p:cNvPr>
+          <p:cNvSpPr txBox="1"/>
+          <p:nvPr/>
+        </p:nvSpPr>
+        <p:spPr>
+          <a:xfrm>
+            <a:off x="508000" y="762000"/>
+            <a:ext cx="11176000" cy="292388"/>
+          </a:xfrm>
+          <a:prstGeom prst="rect">
+            <a:avLst/>
+          </a:prstGeom>
+          <a:noFill/>
+        </p:spPr>
+        <p:txBody>
+          <a:bodyPr vert="horz" rtlCol="0">
+            <a:spAutoFit/>
+          </a:bodyPr>
+          <a:lstStyle/>
+          <a:p>
+            <a:r>
+              <a:rPr lang="en-AU" sz="1300">
+                <a:solidFill>
+                  <a:srgbClr val="7F7F7F"/>
+                </a:solidFill>
+              </a:rPr>
+              <a:t>Select the three tilted shapes, then Ctrl+click LEVEL last. Click Match &gt; Rotation.</a:t>
+            </a:r>
+          </a:p>
+        </p:txBody>
+      </p:sp>
+      <p:sp>
+        <p:nvSpPr>
+          <p:cNvPr id="4" name="Tilt1">
+            <a:extLst>
+              <a:ext uri="{FF2B5EF4-FFF2-40B4-BE49-F238E27FC236}">
+                <a16:creationId xmlns:a16="http://schemas.microsoft.com/office/drawing/2014/main" id="{774E37F3-B045-D4CB-8F8E-1AD155D18214}"/>
+              </a:ext>
+            </a:extLst>
+          </p:cNvPr>
+          <p:cNvSpPr/>
+          <p:nvPr/>
+        </p:nvSpPr>
+        <p:spPr>
+          <a:xfrm rot="720000">
+            <a:off x="1524000" y="2286000"/>
+            <a:ext cx="1778000" cy="762000"/>
+          </a:xfrm>
+          <a:prstGeom prst="rect">
+            <a:avLst/>
+          </a:prstGeom>
+          <a:solidFill>
+            <a:srgbClr val="1F77B4"/>
+          </a:solidFill>
+          <a:ln w="19050" cap="flat" cmpd="sng" algn="ctr">
+            <a:noFill/>
+            <a:prstDash val="solid"/>
+            <a:miter lim="800000"/>
+          </a:ln>
+          <a:effectLst/>
+          <a:extLst>
+            <a:ext uri="{91240B29-F687-4F45-9708-019B960494DF}">
+              <a14:hiddenLine xmlns:a14="http://schemas.microsoft.com/office/drawing/2010/main" w="19050" cap="flat" cmpd="sng" algn="ctr">
+                <a:solidFill>
+                  <a:schemeClr val="accent1">
+                    <a:shade val="15000"/>
+                  </a:schemeClr>
+                </a:solidFill>
+                <a:prstDash val="solid"/>
+                <a:miter lim="800000"/>
+              </a14:hiddenLine>
+            </a:ext>
+          </a:extLst>
+        </p:spPr>
+        <p:style>
+          <a:lnRef idx="2">
+            <a:schemeClr val="accent1">
+              <a:shade val="15000"/>
+            </a:schemeClr>
+          </a:lnRef>
+          <a:fillRef idx="1">
+            <a:schemeClr val="accent1"/>
+          </a:fillRef>
+          <a:effectRef idx="0">
+            <a:schemeClr val="accent1"/>
+          </a:effectRef>
+          <a:fontRef idx="minor">
+            <a:schemeClr val="lt1"/>
+          </a:fontRef>
+        </p:style>
+        <p:txBody>
+          <a:bodyPr rtlCol="0" anchor="ctr"/>
+          <a:lstStyle/>
+          <a:p>
+            <a:pPr algn="ctr"/>
+            <a:r>
+              <a:rPr lang="en-AU" sz="1400" b="1">
+                <a:solidFill>
+                  <a:srgbClr val="FFFFFF"/>
+                </a:solidFill>
+              </a:rPr>
+              <a:t>12</a:t>
+            </a:r>
+          </a:p>
+        </p:txBody>
+      </p:sp>
+      <p:sp>
+        <p:nvSpPr>
+          <p:cNvPr id="5" name="Tilt2">
+            <a:extLst>
+              <a:ext uri="{FF2B5EF4-FFF2-40B4-BE49-F238E27FC236}">
+                <a16:creationId xmlns:a16="http://schemas.microsoft.com/office/drawing/2014/main" id="{C9BE322E-08E4-EF67-F672-C0B25FA81DB7}"/>
+              </a:ext>
+            </a:extLst>
+          </p:cNvPr>
+          <p:cNvSpPr/>
+          <p:nvPr/>
+        </p:nvSpPr>
+        <p:spPr>
+          <a:xfrm rot="21060000">
+            <a:off x="4191000" y="3810000"/>
+            <a:ext cx="1524000" cy="889000"/>
+          </a:xfrm>
+          <a:prstGeom prst="rect">
+            <a:avLst/>
+          </a:prstGeom>
+          <a:solidFill>
+            <a:srgbClr val="2CA02C"/>
+          </a:solidFill>
+          <a:ln w="19050" cap="flat" cmpd="sng" algn="ctr">
+            <a:noFill/>
+            <a:prstDash val="solid"/>
+            <a:miter lim="800000"/>
+          </a:ln>
+          <a:effectLst/>
+          <a:extLst>
+            <a:ext uri="{91240B29-F687-4F45-9708-019B960494DF}">
+              <a14:hiddenLine xmlns:a14="http://schemas.microsoft.com/office/drawing/2010/main" w="19050" cap="flat" cmpd="sng" algn="ctr">
+                <a:solidFill>
+                  <a:schemeClr val="accent1">
+                    <a:shade val="15000"/>
+                  </a:schemeClr>
+                </a:solidFill>
+                <a:prstDash val="solid"/>
+                <a:miter lim="800000"/>
+              </a14:hiddenLine>
+            </a:ext>
+          </a:extLst>
+        </p:spPr>
+        <p:style>
+          <a:lnRef idx="2">
+            <a:schemeClr val="accent1">
+              <a:shade val="15000"/>
+            </a:schemeClr>
+          </a:lnRef>
+          <a:fillRef idx="1">
+            <a:schemeClr val="accent1"/>
+          </a:fillRef>
+          <a:effectRef idx="0">
+            <a:schemeClr val="accent1"/>
+          </a:effectRef>
+          <a:fontRef idx="minor">
+            <a:schemeClr val="lt1"/>
+          </a:fontRef>
+        </p:style>
+        <p:txBody>
+          <a:bodyPr rtlCol="0" anchor="ctr"/>
+          <a:lstStyle/>
+          <a:p>
+            <a:pPr algn="ctr"/>
+            <a:r>
+              <a:rPr lang="en-AU" sz="1400" b="1">
+                <a:solidFill>
+                  <a:srgbClr val="FFFFFF"/>
+                </a:solidFill>
+              </a:rPr>
+              <a:t>-9</a:t>
+            </a:r>
+          </a:p>
+        </p:txBody>
+      </p:sp>
+      <p:sp>
+        <p:nvSpPr>
+          <p:cNvPr id="6" name="Tilt3">
+            <a:extLst>
+              <a:ext uri="{FF2B5EF4-FFF2-40B4-BE49-F238E27FC236}">
+                <a16:creationId xmlns:a16="http://schemas.microsoft.com/office/drawing/2014/main" id="{0E018A60-3325-9384-9348-29C46291028E}"/>
+              </a:ext>
+            </a:extLst>
+          </p:cNvPr>
+          <p:cNvSpPr/>
+          <p:nvPr/>
+        </p:nvSpPr>
+        <p:spPr>
+          <a:xfrm rot="1500000">
+            <a:off x="1905000" y="4699000"/>
+            <a:ext cx="2032000" cy="635000"/>
+          </a:xfrm>
+          <a:prstGeom prst="rect">
+            <a:avLst/>
+          </a:prstGeom>
+          <a:solidFill>
+            <a:srgbClr val="9467BD"/>
+          </a:solidFill>
+          <a:ln w="19050" cap="flat" cmpd="sng" algn="ctr">
+            <a:noFill/>
+            <a:prstDash val="solid"/>
+            <a:miter lim="800000"/>
+          </a:ln>
+          <a:effectLst/>
+          <a:extLst>
+            <a:ext uri="{91240B29-F687-4F45-9708-019B960494DF}">
+              <a14:hiddenLine xmlns:a14="http://schemas.microsoft.com/office/drawing/2010/main" w="19050" cap="flat" cmpd="sng" algn="ctr">
+                <a:solidFill>
+                  <a:schemeClr val="accent1">
+                    <a:shade val="15000"/>
+                  </a:schemeClr>
+                </a:solidFill>
+                <a:prstDash val="solid"/>
+                <a:miter lim="800000"/>
+              </a14:hiddenLine>
+            </a:ext>
+          </a:extLst>
+        </p:spPr>
+        <p:style>
+          <a:lnRef idx="2">
+            <a:schemeClr val="accent1">
+              <a:shade val="15000"/>
+            </a:schemeClr>
+          </a:lnRef>
+          <a:fillRef idx="1">
+            <a:schemeClr val="accent1"/>
+          </a:fillRef>
+          <a:effectRef idx="0">
+            <a:schemeClr val="accent1"/>
+          </a:effectRef>
+          <a:fontRef idx="minor">
+            <a:schemeClr val="lt1"/>
+          </a:fontRef>
+        </p:style>
+        <p:txBody>
+          <a:bodyPr rtlCol="0" anchor="ctr"/>
+          <a:lstStyle/>
+          <a:p>
+            <a:pPr algn="ctr"/>
+            <a:r>
+              <a:rPr lang="en-AU" sz="1400" b="1">
+                <a:solidFill>
+                  <a:srgbClr val="FFFFFF"/>
+                </a:solidFill>
+              </a:rPr>
+              <a:t>25</a:t>
+            </a:r>
+          </a:p>
+        </p:txBody>
+      </p:sp>
+      <p:sp>
+        <p:nvSpPr>
+          <p:cNvPr id="7" name="Level">
+            <a:extLst>
+              <a:ext uri="{FF2B5EF4-FFF2-40B4-BE49-F238E27FC236}">
+                <a16:creationId xmlns:a16="http://schemas.microsoft.com/office/drawing/2014/main" id="{F69E8CBD-AF96-ADD4-6447-B6B17BA53BF6}"/>
+              </a:ext>
+            </a:extLst>
+          </p:cNvPr>
+          <p:cNvSpPr/>
+          <p:nvPr/>
+        </p:nvSpPr>
+        <p:spPr>
+          <a:xfrm rot="1200000">
+            <a:off x="7874000" y="3048000"/>
+            <a:ext cx="2286000" cy="1143000"/>
+          </a:xfrm>
+          <a:prstGeom prst="rect">
+            <a:avLst/>
+          </a:prstGeom>
+          <a:solidFill>
+            <a:srgbClr val="D62728"/>
+          </a:solidFill>
+          <a:ln w="19050" cap="flat" cmpd="sng" algn="ctr">
+            <a:noFill/>
+            <a:prstDash val="solid"/>
+            <a:miter lim="800000"/>
+          </a:ln>
+          <a:effectLst/>
+          <a:extLst>
+            <a:ext uri="{91240B29-F687-4F45-9708-019B960494DF}">
+              <a14:hiddenLine xmlns:a14="http://schemas.microsoft.com/office/drawing/2010/main" w="19050" cap="flat" cmpd="sng" algn="ctr">
+                <a:solidFill>
+                  <a:schemeClr val="accent1">
+                    <a:shade val="15000"/>
+                  </a:schemeClr>
+                </a:solidFill>
+                <a:prstDash val="solid"/>
+                <a:miter lim="800000"/>
+              </a14:hiddenLine>
+            </a:ext>
+          </a:extLst>
+        </p:spPr>
+        <p:style>
+          <a:lnRef idx="2">
+            <a:schemeClr val="accent1">
+              <a:shade val="15000"/>
+            </a:schemeClr>
+          </a:lnRef>
+          <a:fillRef idx="1">
+            <a:schemeClr val="accent1"/>
+          </a:fillRef>
+          <a:effectRef idx="0">
+            <a:schemeClr val="accent1"/>
+          </a:effectRef>
+          <a:fontRef idx="minor">
+            <a:schemeClr val="lt1"/>
+          </a:fontRef>
+        </p:style>
+        <p:txBody>
+          <a:bodyPr rtlCol="0" anchor="ctr"/>
+          <a:lstStyle/>
+          <a:p>
+            <a:pPr algn="ctr"/>
+            <a:r>
+              <a:rPr lang="en-AU" sz="1400" b="1">
+                <a:solidFill>
+                  <a:srgbClr val="FFFFFF"/>
+                </a:solidFill>
+              </a:rPr>
+              <a:t>LEVEL (20)</a:t>
+            </a:r>
+          </a:p>
+        </p:txBody>
+      </p:sp>
+      <p:sp>
+        <p:nvSpPr>
+          <p:cNvPr id="8" name="TextBox 7">
+            <a:extLst>
+              <a:ext uri="{FF2B5EF4-FFF2-40B4-BE49-F238E27FC236}">
+                <a16:creationId xmlns:a16="http://schemas.microsoft.com/office/drawing/2014/main" id="{667E12A8-34E7-A4C8-6CF6-D886C4E65C09}"/>
+              </a:ext>
+            </a:extLst>
+          </p:cNvPr>
+          <p:cNvSpPr txBox="1"/>
+          <p:nvPr/>
+        </p:nvSpPr>
+        <p:spPr>
+          <a:xfrm>
+            <a:off x="508000" y="5715000"/>
+            <a:ext cx="11176000" cy="461665"/>
+          </a:xfrm>
+          <a:prstGeom prst="rect">
+            <a:avLst/>
+          </a:prstGeom>
+          <a:noFill/>
+        </p:spPr>
+        <p:txBody>
+          <a:bodyPr vert="horz" rtlCol="0">
+            <a:spAutoFit/>
+          </a:bodyPr>
+          <a:lstStyle/>
+          <a:p>
+            <a:r>
+              <a:rPr lang="en-AU" sz="1200">
+                <a:solidFill>
+                  <a:srgbClr val="7F7F7F"/>
+                </a:solidFill>
+              </a:rPr>
+              <a:t>Each shape turns about its own centre to the anchor's angle, and nothing else changes - not its position, not its size, not a flip. Groups are fine here: turning a group does not change the spacing inside it.</a:t>
+            </a:r>
+          </a:p>
+        </p:txBody>
+      </p:sp>
+    </p:spTree>
+    <p:extLst>
+      <p:ext uri="{BB962C8B-B14F-4D97-AF65-F5344CB8AC3E}">
+        <p14:creationId xmlns:p14="http://schemas.microsoft.com/office/powerpoint/2010/main" val="3471108026"/>
+      </p:ext>
+    </p:extLst>
+  </p:cSld>
+  <p:clrMapOvr>
+    <a:masterClrMapping/>
+  </p:clrMapOvr>
+</p:sld>
+</file>
+
+<file path=ppt/slides/slide16.xml><?xml version="1.0" encoding="utf-8"?>
+<p:sld xmlns:a="http://schemas.openxmlformats.org/drawingml/2006/main" xmlns:r="http://schemas.openxmlformats.org/officeDocument/2006/relationships" xmlns:p="http://schemas.openxmlformats.org/presentationml/2006/main">
+  <p:cSld>
+    <p:spTree>
+      <p:nvGrpSpPr>
+        <p:cNvPr id="1" name=""/>
+        <p:cNvGrpSpPr/>
+        <p:nvPr/>
+      </p:nvGrpSpPr>
+      <p:grpSpPr>
+        <a:xfrm>
+          <a:off x="0" y="0"/>
+          <a:ext cx="0" cy="0"/>
+          <a:chOff x="0" y="0"/>
+          <a:chExt cx="0" cy="0"/>
+        </a:xfrm>
+      </p:grpSpPr>
+      <p:sp>
+        <p:nvSpPr>
+          <p:cNvPr id="2" name="Heading">
+            <a:extLst>
+              <a:ext uri="{FF2B5EF4-FFF2-40B4-BE49-F238E27FC236}">
+                <a16:creationId xmlns:a16="http://schemas.microsoft.com/office/drawing/2014/main" id="{85B9912A-0CE1-8BB1-68BE-C3E12248C431}"/>
+              </a:ext>
+            </a:extLst>
+          </p:cNvPr>
+          <p:cNvSpPr txBox="1"/>
+          <p:nvPr/>
+        </p:nvSpPr>
+        <p:spPr>
+          <a:xfrm>
+            <a:off x="508000" y="304800"/>
+            <a:ext cx="11176000" cy="461665"/>
+          </a:xfrm>
+          <a:prstGeom prst="rect">
+            <a:avLst/>
+          </a:prstGeom>
+          <a:noFill/>
+        </p:spPr>
+        <p:txBody>
+          <a:bodyPr vert="horz" rtlCol="0">
+            <a:spAutoFit/>
+          </a:bodyPr>
+          <a:lstStyle/>
+          <a:p>
+            <a:r>
+              <a:rPr lang="en-AU" sz="2400" b="1">
+                <a:solidFill>
+                  <a:srgbClr val="282828"/>
+                </a:solidFill>
+              </a:rPr>
+              <a:t>Duplicate: rows, rings and spirals</a:t>
+            </a:r>
+          </a:p>
+        </p:txBody>
+      </p:sp>
+      <p:sp>
+        <p:nvSpPr>
+          <p:cNvPr id="3" name="Instructions">
+            <a:extLst>
+              <a:ext uri="{FF2B5EF4-FFF2-40B4-BE49-F238E27FC236}">
+                <a16:creationId xmlns:a16="http://schemas.microsoft.com/office/drawing/2014/main" id="{A02FF7DA-FF08-2307-9C82-8A82DA6B26B1}"/>
+              </a:ext>
+            </a:extLst>
+          </p:cNvPr>
+          <p:cNvSpPr txBox="1"/>
+          <p:nvPr/>
+        </p:nvSpPr>
+        <p:spPr>
+          <a:xfrm>
+            <a:off x="508000" y="762000"/>
+            <a:ext cx="11176000" cy="292388"/>
+          </a:xfrm>
+          <a:prstGeom prst="rect">
+            <a:avLst/>
+          </a:prstGeom>
+          <a:noFill/>
+        </p:spPr>
+        <p:txBody>
+          <a:bodyPr vert="horz" rtlCol="0">
+            <a:spAutoFit/>
+          </a:bodyPr>
+          <a:lstStyle/>
+          <a:p>
+            <a:r>
+              <a:rPr lang="en-AU" sz="1300">
+                <a:solidFill>
+                  <a:srgbClr val="7F7F7F"/>
+                </a:solidFill>
+              </a:rPr>
+              <a:t>Select SEED. X = 70, Y = 0, Angle = 0, Copies = 5, then Duplicate. Undo, then X = 0, Y = 0, Angle = 30, Copies = 11, Pivot = Slide centre.</a:t>
+            </a:r>
+          </a:p>
+        </p:txBody>
+      </p:sp>
+      <p:sp>
+        <p:nvSpPr>
+          <p:cNvPr id="4" name="Seed">
+            <a:extLst>
+              <a:ext uri="{FF2B5EF4-FFF2-40B4-BE49-F238E27FC236}">
+                <a16:creationId xmlns:a16="http://schemas.microsoft.com/office/drawing/2014/main" id="{EC133921-A3CF-28ED-0C80-9951B1F33897}"/>
+              </a:ext>
+            </a:extLst>
+          </p:cNvPr>
+          <p:cNvSpPr/>
+          <p:nvPr/>
+        </p:nvSpPr>
+        <p:spPr>
+          <a:xfrm>
+            <a:off x="5778500" y="1397000"/>
+            <a:ext cx="635000" cy="635000"/>
+          </a:xfrm>
+          <a:prstGeom prst="rect">
+            <a:avLst/>
+          </a:prstGeom>
+          <a:solidFill>
+            <a:srgbClr val="FF7F0E"/>
+          </a:solidFill>
+          <a:ln w="19050" cap="flat" cmpd="sng" algn="ctr">
+            <a:noFill/>
+            <a:prstDash val="solid"/>
+            <a:miter lim="800000"/>
+          </a:ln>
+          <a:effectLst/>
+          <a:extLst>
+            <a:ext uri="{91240B29-F687-4F45-9708-019B960494DF}">
+              <a14:hiddenLine xmlns:a14="http://schemas.microsoft.com/office/drawing/2010/main" w="19050" cap="flat" cmpd="sng" algn="ctr">
+                <a:solidFill>
+                  <a:schemeClr val="accent1">
+                    <a:shade val="15000"/>
+                  </a:schemeClr>
+                </a:solidFill>
+                <a:prstDash val="solid"/>
+                <a:miter lim="800000"/>
+              </a14:hiddenLine>
+            </a:ext>
+          </a:extLst>
+        </p:spPr>
+        <p:style>
+          <a:lnRef idx="2">
+            <a:schemeClr val="accent1">
+              <a:shade val="15000"/>
+            </a:schemeClr>
+          </a:lnRef>
+          <a:fillRef idx="1">
+            <a:schemeClr val="accent1"/>
+          </a:fillRef>
+          <a:effectRef idx="0">
+            <a:schemeClr val="accent1"/>
+          </a:effectRef>
+          <a:fontRef idx="minor">
+            <a:schemeClr val="lt1"/>
+          </a:fontRef>
+        </p:style>
+        <p:txBody>
+          <a:bodyPr rtlCol="0" anchor="ctr"/>
+          <a:lstStyle/>
+          <a:p>
+            <a:pPr algn="ctr"/>
+            <a:r>
+              <a:rPr lang="en-AU" sz="1400" b="1">
+                <a:solidFill>
+                  <a:srgbClr val="FFFFFF"/>
+                </a:solidFill>
+              </a:rPr>
+              <a:t>SEED</a:t>
+            </a:r>
+          </a:p>
+        </p:txBody>
+      </p:sp>
+      <p:sp>
+        <p:nvSpPr>
+          <p:cNvPr id="5" name="TextBox 4">
+            <a:extLst>
+              <a:ext uri="{FF2B5EF4-FFF2-40B4-BE49-F238E27FC236}">
+                <a16:creationId xmlns:a16="http://schemas.microsoft.com/office/drawing/2014/main" id="{39D6E102-6404-4299-BB98-2F22E2705B78}"/>
+              </a:ext>
+            </a:extLst>
+          </p:cNvPr>
+          <p:cNvSpPr txBox="1"/>
+          <p:nvPr/>
+        </p:nvSpPr>
+        <p:spPr>
+          <a:xfrm>
+            <a:off x="508000" y="5842000"/>
+            <a:ext cx="11176000" cy="646331"/>
+          </a:xfrm>
+          <a:prstGeom prst="rect">
+            <a:avLst/>
+          </a:prstGeom>
+          <a:noFill/>
+        </p:spPr>
+        <p:txBody>
+          <a:bodyPr vert="horz" rtlCol="0">
+            <a:spAutoFit/>
+          </a:bodyPr>
+          <a:lstStyle/>
+          <a:p>
+            <a:r>
+              <a:rPr lang="en-AU" sz="1200">
+                <a:solidFill>
+                  <a:srgbClr val="7F7F7F"/>
+                </a:solidFill>
+              </a:rPr>
+              <a:t>One step is: turn by Angle about the Pivot, then move by X and Y. Each copy gets one more step than the one before, so X alone makes a row, Angle round a far pivot makes a ring, and both together make a spiral - try X = 12 with the ring settings. Turn Rotate shapes off and the copies stay upright as they go round. Undo removes every copy at once.</a:t>
+            </a:r>
+          </a:p>
+        </p:txBody>
+      </p:sp>
+    </p:spTree>
+    <p:extLst>
+      <p:ext uri="{BB962C8B-B14F-4D97-AF65-F5344CB8AC3E}">
+        <p14:creationId xmlns:p14="http://schemas.microsoft.com/office/powerpoint/2010/main" val="2606218522"/>
+      </p:ext>
+    </p:extLst>
+  </p:cSld>
+  <p:clrMapOvr>
+    <a:masterClrMapping/>
+  </p:clrMapOvr>
+</p:sld>
+</file>
+
+<file path=ppt/slides/slide17.xml><?xml version="1.0" encoding="utf-8"?>
+<p:sld xmlns:a="http://schemas.openxmlformats.org/drawingml/2006/main" xmlns:r="http://schemas.openxmlformats.org/officeDocument/2006/relationships" xmlns:p="http://schemas.openxmlformats.org/presentationml/2006/main">
+  <p:cSld>
+    <p:spTree>
+      <p:nvGrpSpPr>
+        <p:cNvPr id="1" name=""/>
+        <p:cNvGrpSpPr/>
+        <p:nvPr/>
+      </p:nvGrpSpPr>
+      <p:grpSpPr>
+        <a:xfrm>
+          <a:off x="0" y="0"/>
+          <a:ext cx="0" cy="0"/>
+          <a:chOff x="0" y="0"/>
+          <a:chExt cx="0" cy="0"/>
+        </a:xfrm>
+      </p:grpSpPr>
+      <p:sp>
+        <p:nvSpPr>
+          <p:cNvPr id="2" name="Heading">
+            <a:extLst>
+              <a:ext uri="{FF2B5EF4-FFF2-40B4-BE49-F238E27FC236}">
+                <a16:creationId xmlns:a16="http://schemas.microsoft.com/office/drawing/2014/main" id="{828F9D36-3CAC-3A9E-A6D5-65A23C314C2C}"/>
+              </a:ext>
+            </a:extLst>
+          </p:cNvPr>
+          <p:cNvSpPr txBox="1"/>
+          <p:nvPr/>
+        </p:nvSpPr>
+        <p:spPr>
+          <a:xfrm>
+            <a:off x="508000" y="304800"/>
+            <a:ext cx="11176000" cy="461665"/>
+          </a:xfrm>
+          <a:prstGeom prst="rect">
+            <a:avLst/>
+          </a:prstGeom>
+          <a:noFill/>
+        </p:spPr>
+        <p:txBody>
+          <a:bodyPr vert="horz" rtlCol="0">
+            <a:spAutoFit/>
+          </a:bodyPr>
+          <a:lstStyle/>
+          <a:p>
+            <a:r>
+              <a:rPr lang="en-AU" sz="2400" b="1">
+                <a:solidFill>
+                  <a:srgbClr val="282828"/>
+                </a:solidFill>
+              </a:rPr>
+              <a:t>Distribute along a curve</a:t>
+            </a:r>
+          </a:p>
+        </p:txBody>
+      </p:sp>
+      <p:sp>
+        <p:nvSpPr>
+          <p:cNvPr id="3" name="Instructions">
+            <a:extLst>
+              <a:ext uri="{FF2B5EF4-FFF2-40B4-BE49-F238E27FC236}">
+                <a16:creationId xmlns:a16="http://schemas.microsoft.com/office/drawing/2014/main" id="{E6C6D120-0FA8-1149-09A0-D92E356005DD}"/>
+              </a:ext>
+            </a:extLst>
+          </p:cNvPr>
+          <p:cNvSpPr txBox="1"/>
+          <p:nvPr/>
+        </p:nvSpPr>
+        <p:spPr>
+          <a:xfrm>
+            <a:off x="508000" y="762000"/>
+            <a:ext cx="11176000" cy="292388"/>
+          </a:xfrm>
+          <a:prstGeom prst="rect">
+            <a:avLst/>
+          </a:prstGeom>
+          <a:noFill/>
+        </p:spPr>
+        <p:txBody>
+          <a:bodyPr vert="horz" rtlCol="0">
+            <a:spAutoFit/>
+          </a:bodyPr>
+          <a:lstStyle/>
+          <a:p>
+            <a:r>
+              <a:rPr lang="en-AU" sz="1300">
+                <a:solidFill>
+                  <a:srgbClr val="7F7F7F"/>
+                </a:solidFill>
+              </a:rPr>
+              <a:t>Select the six beads, then Ctrl+click RING last, and Distribute &gt; Along curve. Undo, then try the arc, then the wave.</a:t>
+            </a:r>
+          </a:p>
+        </p:txBody>
+      </p:sp>
+      <p:sp>
+        <p:nvSpPr>
+          <p:cNvPr id="4" name="Ring">
+            <a:extLst>
+              <a:ext uri="{FF2B5EF4-FFF2-40B4-BE49-F238E27FC236}">
+                <a16:creationId xmlns:a16="http://schemas.microsoft.com/office/drawing/2014/main" id="{9028C3D4-9662-6419-7DC1-FD5B4FB75B79}"/>
+              </a:ext>
+            </a:extLst>
+          </p:cNvPr>
+          <p:cNvSpPr/>
+          <p:nvPr/>
+        </p:nvSpPr>
+        <p:spPr>
+          <a:xfrm>
+            <a:off x="889000" y="1524000"/>
+            <a:ext cx="3048000" cy="3048000"/>
+          </a:xfrm>
+          <a:prstGeom prst="ellipse">
+            <a:avLst/>
+          </a:prstGeom>
+          <a:noFill/>
+          <a:ln w="25400" cap="flat" cmpd="sng" algn="ctr">
+            <a:solidFill>
+              <a:srgbClr val="7F7F7F"/>
+            </a:solidFill>
+            <a:prstDash val="solid"/>
+            <a:miter lim="800000"/>
+          </a:ln>
+          <a:effectLst/>
+          <a:extLst>
+            <a:ext uri="{909E8E84-426E-40DD-AFC4-6F175D3DCCD1}">
+              <a14:hiddenFill xmlns:a14="http://schemas.microsoft.com/office/drawing/2010/main">
+                <a:solidFill>
+                  <a:schemeClr val="accent1"/>
+                </a:solidFill>
+              </a14:hiddenFill>
+            </a:ext>
+          </a:extLst>
+        </p:spPr>
+        <p:style>
+          <a:lnRef idx="2">
+            <a:schemeClr val="accent1">
+              <a:shade val="15000"/>
+            </a:schemeClr>
+          </a:lnRef>
+          <a:fillRef idx="1">
+            <a:schemeClr val="accent1"/>
+          </a:fillRef>
+          <a:effectRef idx="0">
+            <a:schemeClr val="accent1"/>
+          </a:effectRef>
+          <a:fontRef idx="minor">
+            <a:schemeClr val="lt1"/>
+          </a:fontRef>
+        </p:style>
+        <p:txBody>
+          <a:bodyPr rtlCol="0" anchor="ctr"/>
+          <a:lstStyle/>
+          <a:p>
+            <a:pPr algn="ctr"/>
+            <a:endParaRPr lang="en-AU"/>
+          </a:p>
+        </p:txBody>
+      </p:sp>
+      <p:sp>
+        <p:nvSpPr>
+          <p:cNvPr id="5" name="Arc">
+            <a:extLst>
+              <a:ext uri="{FF2B5EF4-FFF2-40B4-BE49-F238E27FC236}">
+                <a16:creationId xmlns:a16="http://schemas.microsoft.com/office/drawing/2014/main" id="{59BC9C81-2515-9528-5BAB-F0F773990B3D}"/>
+              </a:ext>
+            </a:extLst>
+          </p:cNvPr>
+          <p:cNvSpPr/>
+          <p:nvPr/>
+        </p:nvSpPr>
+        <p:spPr>
+          <a:xfrm>
+            <a:off x="4699000" y="1905001"/>
+            <a:ext cx="3048000" cy="3047999"/>
+          </a:xfrm>
+          <a:prstGeom prst="arc">
+            <a:avLst>
+              <a:gd name="adj1" fmla="val 10800000"/>
+              <a:gd name="adj2" fmla="val 0"/>
+            </a:avLst>
+          </a:prstGeom>
+          <a:ln w="25400">
+            <a:solidFill>
+              <a:srgbClr val="7F7F7F"/>
+            </a:solidFill>
+          </a:ln>
+        </p:spPr>
+        <p:style>
+          <a:lnRef idx="2">
+            <a:schemeClr val="accent1"/>
+          </a:lnRef>
+          <a:fillRef idx="0">
+            <a:schemeClr val="accent1"/>
+          </a:fillRef>
+          <a:effectRef idx="1">
+            <a:schemeClr val="accent1"/>
+          </a:effectRef>
+          <a:fontRef idx="minor">
+            <a:schemeClr val="tx1"/>
+          </a:fontRef>
+        </p:style>
+        <p:txBody>
+          <a:bodyPr rtlCol="0" anchor="ctr"/>
+          <a:lstStyle/>
+          <a:p>
+            <a:pPr algn="ctr"/>
+            <a:endParaRPr lang="en-AU"/>
+          </a:p>
+        </p:txBody>
+      </p:sp>
+      <p:sp>
+        <p:nvSpPr>
+          <p:cNvPr id="6" name="Wave">
+            <a:extLst>
+              <a:ext uri="{FF2B5EF4-FFF2-40B4-BE49-F238E27FC236}">
+                <a16:creationId xmlns:a16="http://schemas.microsoft.com/office/drawing/2014/main" id="{CAB49992-A031-7EE5-55B7-65CE6FCAC7AB}"/>
+              </a:ext>
+            </a:extLst>
+          </p:cNvPr>
+          <p:cNvSpPr/>
+          <p:nvPr/>
+        </p:nvSpPr>
+        <p:spPr>
+          <a:xfrm>
+            <a:off x="8509000" y="1778000"/>
+            <a:ext cx="3175001" cy="2540001"/>
+          </a:xfrm>
+          <a:custGeom>
+            <a:avLst/>
+            <a:gdLst/>
+            <a:ahLst/>
+            <a:cxnLst/>
+            <a:rect l="0" t="0" r="0" b="0"/>
+            <a:pathLst>
+              <a:path w="3175001" h="2540001">
+                <a:moveTo>
+                  <a:pt x="0" y="2032000"/>
+                </a:moveTo>
+                <a:cubicBezTo>
+                  <a:pt x="635000" y="0"/>
+                  <a:pt x="1651000" y="0"/>
+                  <a:pt x="1905000" y="1270000"/>
+                </a:cubicBezTo>
+                <a:cubicBezTo>
+                  <a:pt x="2159000" y="2540000"/>
+                  <a:pt x="2921000" y="2540000"/>
+                  <a:pt x="3175000" y="508000"/>
+                </a:cubicBezTo>
+              </a:path>
+            </a:pathLst>
+          </a:custGeom>
+          <a:ln w="25400">
+            <a:solidFill>
+              <a:srgbClr val="7F7F7F"/>
+            </a:solidFill>
+          </a:ln>
+        </p:spPr>
+        <p:style>
+          <a:lnRef idx="2">
+            <a:schemeClr val="accent1"/>
+          </a:lnRef>
+          <a:fillRef idx="0">
+            <a:schemeClr val="accent1"/>
+          </a:fillRef>
+          <a:effectRef idx="1">
+            <a:schemeClr val="accent1"/>
+          </a:effectRef>
+          <a:fontRef idx="minor">
+            <a:schemeClr val="tx1"/>
+          </a:fontRef>
+        </p:style>
+        <p:txBody>
+          <a:bodyPr rtlCol="0" anchor="ctr"/>
+          <a:lstStyle/>
+          <a:p>
+            <a:pPr algn="ctr"/>
+            <a:endParaRPr lang="en-AU"/>
+          </a:p>
+        </p:txBody>
+      </p:sp>
+      <p:sp>
+        <p:nvSpPr>
+          <p:cNvPr id="7" name="Bead1">
+            <a:extLst>
+              <a:ext uri="{FF2B5EF4-FFF2-40B4-BE49-F238E27FC236}">
+                <a16:creationId xmlns:a16="http://schemas.microsoft.com/office/drawing/2014/main" id="{34960C85-239D-0C92-D414-53FBE1AEA1E7}"/>
+              </a:ext>
+            </a:extLst>
+          </p:cNvPr>
+          <p:cNvSpPr/>
+          <p:nvPr/>
+        </p:nvSpPr>
+        <p:spPr>
+          <a:xfrm>
+            <a:off x="1397000" y="5080000"/>
+            <a:ext cx="381000" cy="381000"/>
+          </a:xfrm>
+          <a:prstGeom prst="roundRect">
+            <a:avLst/>
+          </a:prstGeom>
+          <a:solidFill>
+            <a:srgbClr val="1F77B4"/>
+          </a:solidFill>
+          <a:ln w="19050" cap="flat" cmpd="sng" algn="ctr">
+            <a:noFill/>
+            <a:prstDash val="solid"/>
+            <a:miter lim="800000"/>
+          </a:ln>
+          <a:effectLst/>
+          <a:extLst>
+            <a:ext uri="{91240B29-F687-4F45-9708-019B960494DF}">
+              <a14:hiddenLine xmlns:a14="http://schemas.microsoft.com/office/drawing/2010/main" w="19050" cap="flat" cmpd="sng" algn="ctr">
+                <a:solidFill>
+                  <a:schemeClr val="accent1">
+                    <a:shade val="15000"/>
+                  </a:schemeClr>
+                </a:solidFill>
+                <a:prstDash val="solid"/>
+                <a:miter lim="800000"/>
+              </a14:hiddenLine>
+            </a:ext>
+          </a:extLst>
+        </p:spPr>
+        <p:style>
+          <a:lnRef idx="2">
+            <a:schemeClr val="accent1">
+              <a:shade val="15000"/>
+            </a:schemeClr>
+          </a:lnRef>
+          <a:fillRef idx="1">
+            <a:schemeClr val="accent1"/>
+          </a:fillRef>
+          <a:effectRef idx="0">
+            <a:schemeClr val="accent1"/>
+          </a:effectRef>
+          <a:fontRef idx="minor">
+            <a:schemeClr val="lt1"/>
+          </a:fontRef>
+        </p:style>
+        <p:txBody>
+          <a:bodyPr rtlCol="0" anchor="ctr"/>
+          <a:lstStyle/>
+          <a:p>
+            <a:pPr algn="ctr"/>
+            <a:r>
+              <a:rPr lang="en-AU" sz="1400" b="1">
+                <a:solidFill>
+                  <a:srgbClr val="FFFFFF"/>
+                </a:solidFill>
+              </a:rPr>
+              <a:t>1</a:t>
+            </a:r>
+          </a:p>
+        </p:txBody>
+      </p:sp>
+      <p:sp>
+        <p:nvSpPr>
+          <p:cNvPr id="8" name="Bead2">
+            <a:extLst>
+              <a:ext uri="{FF2B5EF4-FFF2-40B4-BE49-F238E27FC236}">
+                <a16:creationId xmlns:a16="http://schemas.microsoft.com/office/drawing/2014/main" id="{4A547E43-BA89-A40D-4CA4-31FB2523C49F}"/>
+              </a:ext>
+            </a:extLst>
+          </p:cNvPr>
+          <p:cNvSpPr/>
+          <p:nvPr/>
+        </p:nvSpPr>
+        <p:spPr>
+          <a:xfrm>
+            <a:off x="2032000" y="5080000"/>
+            <a:ext cx="381000" cy="381000"/>
+          </a:xfrm>
+          <a:prstGeom prst="roundRect">
+            <a:avLst/>
+          </a:prstGeom>
+          <a:solidFill>
+            <a:srgbClr val="1F77B4"/>
+          </a:solidFill>
+          <a:ln w="19050" cap="flat" cmpd="sng" algn="ctr">
+            <a:noFill/>
+            <a:prstDash val="solid"/>
+            <a:miter lim="800000"/>
+          </a:ln>
+          <a:effectLst/>
+          <a:extLst>
+            <a:ext uri="{91240B29-F687-4F45-9708-019B960494DF}">
+              <a14:hiddenLine xmlns:a14="http://schemas.microsoft.com/office/drawing/2010/main" w="19050" cap="flat" cmpd="sng" algn="ctr">
+                <a:solidFill>
+                  <a:schemeClr val="accent1">
+                    <a:shade val="15000"/>
+                  </a:schemeClr>
+                </a:solidFill>
+                <a:prstDash val="solid"/>
+                <a:miter lim="800000"/>
+              </a14:hiddenLine>
+            </a:ext>
+          </a:extLst>
+        </p:spPr>
+        <p:style>
+          <a:lnRef idx="2">
+            <a:schemeClr val="accent1">
+              <a:shade val="15000"/>
+            </a:schemeClr>
+          </a:lnRef>
+          <a:fillRef idx="1">
+            <a:schemeClr val="accent1"/>
+          </a:fillRef>
+          <a:effectRef idx="0">
+            <a:schemeClr val="accent1"/>
+          </a:effectRef>
+          <a:fontRef idx="minor">
+            <a:schemeClr val="lt1"/>
+          </a:fontRef>
+        </p:style>
+        <p:txBody>
+          <a:bodyPr rtlCol="0" anchor="ctr"/>
+          <a:lstStyle/>
+          <a:p>
+            <a:pPr algn="ctr"/>
+            <a:r>
+              <a:rPr lang="en-AU" sz="1400" b="1">
+                <a:solidFill>
+                  <a:srgbClr val="FFFFFF"/>
+                </a:solidFill>
+              </a:rPr>
+              <a:t>2</a:t>
+            </a:r>
+          </a:p>
+        </p:txBody>
+      </p:sp>
+      <p:sp>
+        <p:nvSpPr>
+          <p:cNvPr id="9" name="Bead3">
+            <a:extLst>
+              <a:ext uri="{FF2B5EF4-FFF2-40B4-BE49-F238E27FC236}">
+                <a16:creationId xmlns:a16="http://schemas.microsoft.com/office/drawing/2014/main" id="{DDE55D5C-719F-52DD-DA1A-6BB10858C653}"/>
+              </a:ext>
+            </a:extLst>
+          </p:cNvPr>
+          <p:cNvSpPr/>
+          <p:nvPr/>
+        </p:nvSpPr>
+        <p:spPr>
+          <a:xfrm>
+            <a:off x="2667000" y="5080000"/>
+            <a:ext cx="381000" cy="381000"/>
+          </a:xfrm>
+          <a:prstGeom prst="roundRect">
+            <a:avLst/>
+          </a:prstGeom>
+          <a:solidFill>
+            <a:srgbClr val="1F77B4"/>
+          </a:solidFill>
+          <a:ln w="19050" cap="flat" cmpd="sng" algn="ctr">
+            <a:noFill/>
+            <a:prstDash val="solid"/>
+            <a:miter lim="800000"/>
+          </a:ln>
+          <a:effectLst/>
+          <a:extLst>
+            <a:ext uri="{91240B29-F687-4F45-9708-019B960494DF}">
+              <a14:hiddenLine xmlns:a14="http://schemas.microsoft.com/office/drawing/2010/main" w="19050" cap="flat" cmpd="sng" algn="ctr">
+                <a:solidFill>
+                  <a:schemeClr val="accent1">
+                    <a:shade val="15000"/>
+                  </a:schemeClr>
+                </a:solidFill>
+                <a:prstDash val="solid"/>
+                <a:miter lim="800000"/>
+              </a14:hiddenLine>
+            </a:ext>
+          </a:extLst>
+        </p:spPr>
+        <p:style>
+          <a:lnRef idx="2">
+            <a:schemeClr val="accent1">
+              <a:shade val="15000"/>
+            </a:schemeClr>
+          </a:lnRef>
+          <a:fillRef idx="1">
+            <a:schemeClr val="accent1"/>
+          </a:fillRef>
+          <a:effectRef idx="0">
+            <a:schemeClr val="accent1"/>
+          </a:effectRef>
+          <a:fontRef idx="minor">
+            <a:schemeClr val="lt1"/>
+          </a:fontRef>
+        </p:style>
+        <p:txBody>
+          <a:bodyPr rtlCol="0" anchor="ctr"/>
+          <a:lstStyle/>
+          <a:p>
+            <a:pPr algn="ctr"/>
+            <a:r>
+              <a:rPr lang="en-AU" sz="1400" b="1">
+                <a:solidFill>
+                  <a:srgbClr val="FFFFFF"/>
+                </a:solidFill>
+              </a:rPr>
+              <a:t>3</a:t>
+            </a:r>
+          </a:p>
+        </p:txBody>
+      </p:sp>
+      <p:sp>
+        <p:nvSpPr>
+          <p:cNvPr id="10" name="Bead4">
+            <a:extLst>
+              <a:ext uri="{FF2B5EF4-FFF2-40B4-BE49-F238E27FC236}">
+                <a16:creationId xmlns:a16="http://schemas.microsoft.com/office/drawing/2014/main" id="{9B2CFB7C-E665-293E-81E0-874DD30EC7DA}"/>
+              </a:ext>
+            </a:extLst>
+          </p:cNvPr>
+          <p:cNvSpPr/>
+          <p:nvPr/>
+        </p:nvSpPr>
+        <p:spPr>
+          <a:xfrm>
+            <a:off x="3302000" y="5080000"/>
+            <a:ext cx="381000" cy="381000"/>
+          </a:xfrm>
+          <a:prstGeom prst="roundRect">
+            <a:avLst/>
+          </a:prstGeom>
+          <a:solidFill>
+            <a:srgbClr val="1F77B4"/>
+          </a:solidFill>
+          <a:ln w="19050" cap="flat" cmpd="sng" algn="ctr">
+            <a:noFill/>
+            <a:prstDash val="solid"/>
+            <a:miter lim="800000"/>
+          </a:ln>
+          <a:effectLst/>
+          <a:extLst>
+            <a:ext uri="{91240B29-F687-4F45-9708-019B960494DF}">
+              <a14:hiddenLine xmlns:a14="http://schemas.microsoft.com/office/drawing/2010/main" w="19050" cap="flat" cmpd="sng" algn="ctr">
+                <a:solidFill>
+                  <a:schemeClr val="accent1">
+                    <a:shade val="15000"/>
+                  </a:schemeClr>
+                </a:solidFill>
+                <a:prstDash val="solid"/>
+                <a:miter lim="800000"/>
+              </a14:hiddenLine>
+            </a:ext>
+          </a:extLst>
+        </p:spPr>
+        <p:style>
+          <a:lnRef idx="2">
+            <a:schemeClr val="accent1">
+              <a:shade val="15000"/>
+            </a:schemeClr>
+          </a:lnRef>
+          <a:fillRef idx="1">
+            <a:schemeClr val="accent1"/>
+          </a:fillRef>
+          <a:effectRef idx="0">
+            <a:schemeClr val="accent1"/>
+          </a:effectRef>
+          <a:fontRef idx="minor">
+            <a:schemeClr val="lt1"/>
+          </a:fontRef>
+        </p:style>
+        <p:txBody>
+          <a:bodyPr rtlCol="0" anchor="ctr"/>
+          <a:lstStyle/>
+          <a:p>
+            <a:pPr algn="ctr"/>
+            <a:r>
+              <a:rPr lang="en-AU" sz="1400" b="1">
+                <a:solidFill>
+                  <a:srgbClr val="FFFFFF"/>
+                </a:solidFill>
+              </a:rPr>
+              <a:t>4</a:t>
+            </a:r>
+          </a:p>
+        </p:txBody>
+      </p:sp>
+      <p:sp>
+        <p:nvSpPr>
+          <p:cNvPr id="11" name="Bead5">
+            <a:extLst>
+              <a:ext uri="{FF2B5EF4-FFF2-40B4-BE49-F238E27FC236}">
+                <a16:creationId xmlns:a16="http://schemas.microsoft.com/office/drawing/2014/main" id="{A5A47E3F-35ED-D52F-E60D-976282E764F2}"/>
+              </a:ext>
+            </a:extLst>
+          </p:cNvPr>
+          <p:cNvSpPr/>
+          <p:nvPr/>
+        </p:nvSpPr>
+        <p:spPr>
+          <a:xfrm>
+            <a:off x="3937000" y="5080000"/>
+            <a:ext cx="381000" cy="381000"/>
+          </a:xfrm>
+          <a:prstGeom prst="roundRect">
+            <a:avLst/>
+          </a:prstGeom>
+          <a:solidFill>
+            <a:srgbClr val="1F77B4"/>
+          </a:solidFill>
+          <a:ln w="19050" cap="flat" cmpd="sng" algn="ctr">
+            <a:noFill/>
+            <a:prstDash val="solid"/>
+            <a:miter lim="800000"/>
+          </a:ln>
+          <a:effectLst/>
+          <a:extLst>
+            <a:ext uri="{91240B29-F687-4F45-9708-019B960494DF}">
+              <a14:hiddenLine xmlns:a14="http://schemas.microsoft.com/office/drawing/2010/main" w="19050" cap="flat" cmpd="sng" algn="ctr">
+                <a:solidFill>
+                  <a:schemeClr val="accent1">
+                    <a:shade val="15000"/>
+                  </a:schemeClr>
+                </a:solidFill>
+                <a:prstDash val="solid"/>
+                <a:miter lim="800000"/>
+              </a14:hiddenLine>
+            </a:ext>
+          </a:extLst>
+        </p:spPr>
+        <p:style>
+          <a:lnRef idx="2">
+            <a:schemeClr val="accent1">
+              <a:shade val="15000"/>
+            </a:schemeClr>
+          </a:lnRef>
+          <a:fillRef idx="1">
+            <a:schemeClr val="accent1"/>
+          </a:fillRef>
+          <a:effectRef idx="0">
+            <a:schemeClr val="accent1"/>
+          </a:effectRef>
+          <a:fontRef idx="minor">
+            <a:schemeClr val="lt1"/>
+          </a:fontRef>
+        </p:style>
+        <p:txBody>
+          <a:bodyPr rtlCol="0" anchor="ctr"/>
+          <a:lstStyle/>
+          <a:p>
+            <a:pPr algn="ctr"/>
+            <a:r>
+              <a:rPr lang="en-AU" sz="1400" b="1">
+                <a:solidFill>
+                  <a:srgbClr val="FFFFFF"/>
+                </a:solidFill>
+              </a:rPr>
+              <a:t>5</a:t>
+            </a:r>
+          </a:p>
+        </p:txBody>
+      </p:sp>
+      <p:sp>
+        <p:nvSpPr>
+          <p:cNvPr id="12" name="Bead6">
+            <a:extLst>
+              <a:ext uri="{FF2B5EF4-FFF2-40B4-BE49-F238E27FC236}">
+                <a16:creationId xmlns:a16="http://schemas.microsoft.com/office/drawing/2014/main" id="{01ECE142-7BFC-5C21-3292-4EFAB800E61A}"/>
+              </a:ext>
+            </a:extLst>
+          </p:cNvPr>
+          <p:cNvSpPr/>
+          <p:nvPr/>
+        </p:nvSpPr>
+        <p:spPr>
+          <a:xfrm>
+            <a:off x="4572000" y="5080000"/>
+            <a:ext cx="381000" cy="381000"/>
+          </a:xfrm>
+          <a:prstGeom prst="roundRect">
+            <a:avLst/>
+          </a:prstGeom>
+          <a:solidFill>
+            <a:srgbClr val="1F77B4"/>
+          </a:solidFill>
+          <a:ln w="19050" cap="flat" cmpd="sng" algn="ctr">
+            <a:noFill/>
+            <a:prstDash val="solid"/>
+            <a:miter lim="800000"/>
+          </a:ln>
+          <a:effectLst/>
+          <a:extLst>
+            <a:ext uri="{91240B29-F687-4F45-9708-019B960494DF}">
+              <a14:hiddenLine xmlns:a14="http://schemas.microsoft.com/office/drawing/2010/main" w="19050" cap="flat" cmpd="sng" algn="ctr">
+                <a:solidFill>
+                  <a:schemeClr val="accent1">
+                    <a:shade val="15000"/>
+                  </a:schemeClr>
+                </a:solidFill>
+                <a:prstDash val="solid"/>
+                <a:miter lim="800000"/>
+              </a14:hiddenLine>
+            </a:ext>
+          </a:extLst>
+        </p:spPr>
+        <p:style>
+          <a:lnRef idx="2">
+            <a:schemeClr val="accent1">
+              <a:shade val="15000"/>
+            </a:schemeClr>
+          </a:lnRef>
+          <a:fillRef idx="1">
+            <a:schemeClr val="accent1"/>
+          </a:fillRef>
+          <a:effectRef idx="0">
+            <a:schemeClr val="accent1"/>
+          </a:effectRef>
+          <a:fontRef idx="minor">
+            <a:schemeClr val="lt1"/>
+          </a:fontRef>
+        </p:style>
+        <p:txBody>
+          <a:bodyPr rtlCol="0" anchor="ctr"/>
+          <a:lstStyle/>
+          <a:p>
+            <a:pPr algn="ctr"/>
+            <a:r>
+              <a:rPr lang="en-AU" sz="1400" b="1">
+                <a:solidFill>
+                  <a:srgbClr val="FFFFFF"/>
+                </a:solidFill>
+              </a:rPr>
+              <a:t>6</a:t>
+            </a:r>
+          </a:p>
+        </p:txBody>
+      </p:sp>
+      <p:sp>
+        <p:nvSpPr>
+          <p:cNvPr id="13" name="TextBox 12">
+            <a:extLst>
+              <a:ext uri="{FF2B5EF4-FFF2-40B4-BE49-F238E27FC236}">
+                <a16:creationId xmlns:a16="http://schemas.microsoft.com/office/drawing/2014/main" id="{7E98289B-A868-128B-689C-0D436BC819F7}"/>
+              </a:ext>
+            </a:extLst>
+          </p:cNvPr>
+          <p:cNvSpPr txBox="1"/>
+          <p:nvPr/>
+        </p:nvSpPr>
+        <p:spPr>
+          <a:xfrm>
+            <a:off x="508000" y="5715000"/>
+            <a:ext cx="11176000" cy="646331"/>
+          </a:xfrm>
+          <a:prstGeom prst="rect">
+            <a:avLst/>
+          </a:prstGeom>
+          <a:noFill/>
+        </p:spPr>
+        <p:txBody>
+          <a:bodyPr vert="horz" rtlCol="0">
+            <a:spAutoFit/>
+          </a:bodyPr>
+          <a:lstStyle/>
+          <a:p>
+            <a:r>
+              <a:rPr lang="en-AU" sz="1200">
+                <a:solidFill>
+                  <a:srgbClr val="7F7F7F"/>
+                </a:solidFill>
+              </a:rPr>
+              <a:t>Round an oval the beads go evenly from twelve o'clock, clockwise, with no overlap where the circle closes. Along an arc or a path they run from one end to the other. Rotate shapes (in the Duplicate group) turns each bead to follow the curve; Exact (pt) sets the distance between them. Duplicate a bead first, then distribute the copies round the ring, for a radial array.</a:t>
+            </a:r>
+          </a:p>
+        </p:txBody>
+      </p:sp>
+    </p:spTree>
+    <p:extLst>
+      <p:ext uri="{BB962C8B-B14F-4D97-AF65-F5344CB8AC3E}">
+        <p14:creationId xmlns:p14="http://schemas.microsoft.com/office/powerpoint/2010/main" val="2694734320"/>
       </p:ext>
     </p:extLst>
   </p:cSld>
@@ -5622,7 +7409,7 @@
           <p:cNvPr id="2" name="Heading">
             <a:extLst>
               <a:ext uri="{FF2B5EF4-FFF2-40B4-BE49-F238E27FC236}">
-                <a16:creationId xmlns:a16="http://schemas.microsoft.com/office/drawing/2014/main" id="{09FE611A-4C17-D32F-B856-FB32A8B1E9ED}"/>
+                <a16:creationId xmlns:a16="http://schemas.microsoft.com/office/drawing/2014/main" id="{1DDA39E9-1DF5-8E7E-CF47-390B55A8B7E5}"/>
               </a:ext>
             </a:extLst>
           </p:cNvPr>
@@ -5661,7 +7448,7 @@
           <p:cNvPr id="3" name="Instructions">
             <a:extLst>
               <a:ext uri="{FF2B5EF4-FFF2-40B4-BE49-F238E27FC236}">
-                <a16:creationId xmlns:a16="http://schemas.microsoft.com/office/drawing/2014/main" id="{14423CF9-3AED-329B-9035-AEE6F7EE14C1}"/>
+                <a16:creationId xmlns:a16="http://schemas.microsoft.com/office/drawing/2014/main" id="{2450E790-BF54-F559-C128-DACFF3ED53E6}"/>
               </a:ext>
             </a:extLst>
           </p:cNvPr>
@@ -5700,7 +7487,7 @@
           <p:cNvPr id="4" name="Plain1">
             <a:extLst>
               <a:ext uri="{FF2B5EF4-FFF2-40B4-BE49-F238E27FC236}">
-                <a16:creationId xmlns:a16="http://schemas.microsoft.com/office/drawing/2014/main" id="{D31B0E77-49D4-E61A-DDEB-1F18F66F5E04}"/>
+                <a16:creationId xmlns:a16="http://schemas.microsoft.com/office/drawing/2014/main" id="{3FE11738-77DB-40A9-5EBE-A18BBCFDB884}"/>
               </a:ext>
             </a:extLst>
           </p:cNvPr>
@@ -5775,7 +7562,7 @@
           <p:cNvPr id="5" name="Tall">
             <a:extLst>
               <a:ext uri="{FF2B5EF4-FFF2-40B4-BE49-F238E27FC236}">
-                <a16:creationId xmlns:a16="http://schemas.microsoft.com/office/drawing/2014/main" id="{232E0C09-2325-AE1D-AC64-0A0213953A8E}"/>
+                <a16:creationId xmlns:a16="http://schemas.microsoft.com/office/drawing/2014/main" id="{E07990BE-8418-6269-D42A-7D40CF0056EE}"/>
               </a:ext>
             </a:extLst>
           </p:cNvPr>
@@ -5850,7 +7637,7 @@
           <p:cNvPr id="6" name="Rotated">
             <a:extLst>
               <a:ext uri="{FF2B5EF4-FFF2-40B4-BE49-F238E27FC236}">
-                <a16:creationId xmlns:a16="http://schemas.microsoft.com/office/drawing/2014/main" id="{79000132-A80A-2ECA-8CEC-B59D6A66F410}"/>
+                <a16:creationId xmlns:a16="http://schemas.microsoft.com/office/drawing/2014/main" id="{47BD9F65-0107-5C40-EC77-C6113BB5E0A3}"/>
               </a:ext>
             </a:extLst>
           </p:cNvPr>
@@ -5925,7 +7712,7 @@
           <p:cNvPr id="7" name="Plain2">
             <a:extLst>
               <a:ext uri="{FF2B5EF4-FFF2-40B4-BE49-F238E27FC236}">
-                <a16:creationId xmlns:a16="http://schemas.microsoft.com/office/drawing/2014/main" id="{81F2BB79-FBA9-8B9D-C9E6-68FA039D43FD}"/>
+                <a16:creationId xmlns:a16="http://schemas.microsoft.com/office/drawing/2014/main" id="{1E351D04-9377-ABCC-9613-D7EBBA0BDD7A}"/>
               </a:ext>
             </a:extLst>
           </p:cNvPr>
@@ -6000,7 +7787,7 @@
           <p:cNvPr id="8" name="TextBox 7">
             <a:extLst>
               <a:ext uri="{FF2B5EF4-FFF2-40B4-BE49-F238E27FC236}">
-                <a16:creationId xmlns:a16="http://schemas.microsoft.com/office/drawing/2014/main" id="{07FCFCE0-3F47-1ACD-C79B-05DC2A788394}"/>
+                <a16:creationId xmlns:a16="http://schemas.microsoft.com/office/drawing/2014/main" id="{2A7B0A5B-981D-754D-7CCF-90CEEB36CEB3}"/>
               </a:ext>
             </a:extLst>
           </p:cNvPr>
@@ -6037,7 +7824,7 @@
     </p:spTree>
     <p:extLst>
       <p:ext uri="{BB962C8B-B14F-4D97-AF65-F5344CB8AC3E}">
-        <p14:creationId xmlns:p14="http://schemas.microsoft.com/office/powerpoint/2010/main" val="4283363063"/>
+        <p14:creationId xmlns:p14="http://schemas.microsoft.com/office/powerpoint/2010/main" val="2971739246"/>
       </p:ext>
     </p:extLst>
   </p:cSld>
@@ -6069,7 +7856,7 @@
           <p:cNvPr id="2" name="Heading">
             <a:extLst>
               <a:ext uri="{FF2B5EF4-FFF2-40B4-BE49-F238E27FC236}">
-                <a16:creationId xmlns:a16="http://schemas.microsoft.com/office/drawing/2014/main" id="{7C0228FC-87C4-DAA1-421B-6A16BDC46F60}"/>
+                <a16:creationId xmlns:a16="http://schemas.microsoft.com/office/drawing/2014/main" id="{1FE37963-9FAC-BFFB-6550-2E8D9B3EE442}"/>
               </a:ext>
             </a:extLst>
           </p:cNvPr>
@@ -6108,7 +7895,7 @@
           <p:cNvPr id="3" name="Instructions">
             <a:extLst>
               <a:ext uri="{FF2B5EF4-FFF2-40B4-BE49-F238E27FC236}">
-                <a16:creationId xmlns:a16="http://schemas.microsoft.com/office/drawing/2014/main" id="{ABEF2C34-ADE8-641A-5E9F-EAF15B06681D}"/>
+                <a16:creationId xmlns:a16="http://schemas.microsoft.com/office/drawing/2014/main" id="{17114A22-8496-37A3-EA1A-7BAD9249E54A}"/>
               </a:ext>
             </a:extLst>
           </p:cNvPr>
@@ -6147,7 +7934,7 @@
           <p:cNvPr id="4" name="Small1">
             <a:extLst>
               <a:ext uri="{FF2B5EF4-FFF2-40B4-BE49-F238E27FC236}">
-                <a16:creationId xmlns:a16="http://schemas.microsoft.com/office/drawing/2014/main" id="{FA270DD6-EB63-5AE4-2D9D-C37B1D604FCC}"/>
+                <a16:creationId xmlns:a16="http://schemas.microsoft.com/office/drawing/2014/main" id="{C72091D7-D271-4A54-4540-134CFB34A198}"/>
               </a:ext>
             </a:extLst>
           </p:cNvPr>
@@ -6222,7 +8009,7 @@
           <p:cNvPr id="5" name="Small2">
             <a:extLst>
               <a:ext uri="{FF2B5EF4-FFF2-40B4-BE49-F238E27FC236}">
-                <a16:creationId xmlns:a16="http://schemas.microsoft.com/office/drawing/2014/main" id="{87ACFC0F-5C3B-AF1F-13C9-6296AC9C5C42}"/>
+                <a16:creationId xmlns:a16="http://schemas.microsoft.com/office/drawing/2014/main" id="{10363F41-A6F0-1079-1E84-D985F34A23CE}"/>
               </a:ext>
             </a:extLst>
           </p:cNvPr>
@@ -6297,7 +8084,7 @@
           <p:cNvPr id="6" name="Small3">
             <a:extLst>
               <a:ext uri="{FF2B5EF4-FFF2-40B4-BE49-F238E27FC236}">
-                <a16:creationId xmlns:a16="http://schemas.microsoft.com/office/drawing/2014/main" id="{23A17AC3-4885-F85A-3ED2-7D270E60C262}"/>
+                <a16:creationId xmlns:a16="http://schemas.microsoft.com/office/drawing/2014/main" id="{2EF65603-920D-53A7-DFF5-FA42AD59963F}"/>
               </a:ext>
             </a:extLst>
           </p:cNvPr>
@@ -6372,7 +8159,7 @@
           <p:cNvPr id="7" name="Anchor">
             <a:extLst>
               <a:ext uri="{FF2B5EF4-FFF2-40B4-BE49-F238E27FC236}">
-                <a16:creationId xmlns:a16="http://schemas.microsoft.com/office/drawing/2014/main" id="{F53BFC30-1417-D475-32E1-5F832EB626F5}"/>
+                <a16:creationId xmlns:a16="http://schemas.microsoft.com/office/drawing/2014/main" id="{9ED3A2A8-F0A1-5FE2-527A-86AEC0012BAE}"/>
               </a:ext>
             </a:extLst>
           </p:cNvPr>
@@ -6445,7 +8232,7 @@
     </p:spTree>
     <p:extLst>
       <p:ext uri="{BB962C8B-B14F-4D97-AF65-F5344CB8AC3E}">
-        <p14:creationId xmlns:p14="http://schemas.microsoft.com/office/powerpoint/2010/main" val="3476995574"/>
+        <p14:creationId xmlns:p14="http://schemas.microsoft.com/office/powerpoint/2010/main" val="2618575694"/>
       </p:ext>
     </p:extLst>
   </p:cSld>
@@ -6477,7 +8264,7 @@
           <p:cNvPr id="2" name="Heading">
             <a:extLst>
               <a:ext uri="{FF2B5EF4-FFF2-40B4-BE49-F238E27FC236}">
-                <a16:creationId xmlns:a16="http://schemas.microsoft.com/office/drawing/2014/main" id="{6332B971-BE64-9C7C-A624-03F22469E4E3}"/>
+                <a16:creationId xmlns:a16="http://schemas.microsoft.com/office/drawing/2014/main" id="{9AD8B2A7-82D1-53EE-1289-AC1EDB138B55}"/>
               </a:ext>
             </a:extLst>
           </p:cNvPr>
@@ -6516,7 +8303,7 @@
           <p:cNvPr id="3" name="Instructions">
             <a:extLst>
               <a:ext uri="{FF2B5EF4-FFF2-40B4-BE49-F238E27FC236}">
-                <a16:creationId xmlns:a16="http://schemas.microsoft.com/office/drawing/2014/main" id="{EDC06EBE-633D-D9C5-CA7E-06F77C9F41F8}"/>
+                <a16:creationId xmlns:a16="http://schemas.microsoft.com/office/drawing/2014/main" id="{B6F959C0-1D56-9A18-14A4-700213B1D995}"/>
               </a:ext>
             </a:extLst>
           </p:cNvPr>
@@ -6555,7 +8342,7 @@
           <p:cNvPr id="4" name="W200">
             <a:extLst>
               <a:ext uri="{FF2B5EF4-FFF2-40B4-BE49-F238E27FC236}">
-                <a16:creationId xmlns:a16="http://schemas.microsoft.com/office/drawing/2014/main" id="{E5FCC0DC-5A6D-8598-E1A3-C531913B1E8A}"/>
+                <a16:creationId xmlns:a16="http://schemas.microsoft.com/office/drawing/2014/main" id="{7E515EEC-88E6-CB8A-32C1-8E9C5B4F6B76}"/>
               </a:ext>
             </a:extLst>
           </p:cNvPr>
@@ -6630,7 +8417,7 @@
           <p:cNvPr id="5" name="W60">
             <a:extLst>
               <a:ext uri="{FF2B5EF4-FFF2-40B4-BE49-F238E27FC236}">
-                <a16:creationId xmlns:a16="http://schemas.microsoft.com/office/drawing/2014/main" id="{465D2FB7-40A2-76F1-4229-1A0B42BADDF7}"/>
+                <a16:creationId xmlns:a16="http://schemas.microsoft.com/office/drawing/2014/main" id="{A4016496-3BDD-7698-928B-DF886F336FCB}"/>
               </a:ext>
             </a:extLst>
           </p:cNvPr>
@@ -6705,7 +8492,7 @@
           <p:cNvPr id="6" name="W120">
             <a:extLst>
               <a:ext uri="{FF2B5EF4-FFF2-40B4-BE49-F238E27FC236}">
-                <a16:creationId xmlns:a16="http://schemas.microsoft.com/office/drawing/2014/main" id="{AB952DE2-F194-37E5-6E70-1D420838C6B5}"/>
+                <a16:creationId xmlns:a16="http://schemas.microsoft.com/office/drawing/2014/main" id="{4D19D1A4-4987-BAA2-3429-4542273C33B8}"/>
               </a:ext>
             </a:extLst>
           </p:cNvPr>
@@ -6780,7 +8567,7 @@
           <p:cNvPr id="7" name="W40">
             <a:extLst>
               <a:ext uri="{FF2B5EF4-FFF2-40B4-BE49-F238E27FC236}">
-                <a16:creationId xmlns:a16="http://schemas.microsoft.com/office/drawing/2014/main" id="{6F76C219-1D0A-225A-BB06-0E805AE15262}"/>
+                <a16:creationId xmlns:a16="http://schemas.microsoft.com/office/drawing/2014/main" id="{F7A19768-7A95-167A-D124-13A2D388892E}"/>
               </a:ext>
             </a:extLst>
           </p:cNvPr>
@@ -6855,7 +8642,7 @@
           <p:cNvPr id="8" name="W150">
             <a:extLst>
               <a:ext uri="{FF2B5EF4-FFF2-40B4-BE49-F238E27FC236}">
-                <a16:creationId xmlns:a16="http://schemas.microsoft.com/office/drawing/2014/main" id="{13886150-C337-7387-F290-8A9AF692B510}"/>
+                <a16:creationId xmlns:a16="http://schemas.microsoft.com/office/drawing/2014/main" id="{F9D92E0B-7D21-2486-23AC-767D61DFEED6}"/>
               </a:ext>
             </a:extLst>
           </p:cNvPr>
@@ -6930,7 +8717,7 @@
           <p:cNvPr id="9" name="TextBox 8">
             <a:extLst>
               <a:ext uri="{FF2B5EF4-FFF2-40B4-BE49-F238E27FC236}">
-                <a16:creationId xmlns:a16="http://schemas.microsoft.com/office/drawing/2014/main" id="{8B8B6FA1-63AE-BBBD-99EF-6484832DE5EB}"/>
+                <a16:creationId xmlns:a16="http://schemas.microsoft.com/office/drawing/2014/main" id="{9187615B-D933-641D-305F-5A3F7F6918EF}"/>
               </a:ext>
             </a:extLst>
           </p:cNvPr>
@@ -6967,7 +8754,7 @@
     </p:spTree>
     <p:extLst>
       <p:ext uri="{BB962C8B-B14F-4D97-AF65-F5344CB8AC3E}">
-        <p14:creationId xmlns:p14="http://schemas.microsoft.com/office/powerpoint/2010/main" val="992412744"/>
+        <p14:creationId xmlns:p14="http://schemas.microsoft.com/office/powerpoint/2010/main" val="2600709844"/>
       </p:ext>
     </p:extLst>
   </p:cSld>
@@ -6999,7 +8786,7 @@
           <p:cNvPr id="2" name="Heading">
             <a:extLst>
               <a:ext uri="{FF2B5EF4-FFF2-40B4-BE49-F238E27FC236}">
-                <a16:creationId xmlns:a16="http://schemas.microsoft.com/office/drawing/2014/main" id="{C86FCAAE-86DC-AC34-5DAF-97B44E4F1944}"/>
+                <a16:creationId xmlns:a16="http://schemas.microsoft.com/office/drawing/2014/main" id="{BC2FE07A-C0DA-E46F-D561-D2F4291B1260}"/>
               </a:ext>
             </a:extLst>
           </p:cNvPr>
@@ -7038,7 +8825,7 @@
           <p:cNvPr id="3" name="Instructions">
             <a:extLst>
               <a:ext uri="{FF2B5EF4-FFF2-40B4-BE49-F238E27FC236}">
-                <a16:creationId xmlns:a16="http://schemas.microsoft.com/office/drawing/2014/main" id="{42A6A4B4-5F77-D6A0-80BE-D8E8D599162B}"/>
+                <a16:creationId xmlns:a16="http://schemas.microsoft.com/office/drawing/2014/main" id="{AAF3F2D7-BE96-E554-D996-2D9EB4DC6106}"/>
               </a:ext>
             </a:extLst>
           </p:cNvPr>
@@ -7077,7 +8864,7 @@
           <p:cNvPr id="4" name="Gap0">
             <a:extLst>
               <a:ext uri="{FF2B5EF4-FFF2-40B4-BE49-F238E27FC236}">
-                <a16:creationId xmlns:a16="http://schemas.microsoft.com/office/drawing/2014/main" id="{A71E0DEB-6C08-D6C2-7F23-8FF7AA2CA5FC}"/>
+                <a16:creationId xmlns:a16="http://schemas.microsoft.com/office/drawing/2014/main" id="{3F8658EA-7731-6724-E466-94BDDDE387ED}"/>
               </a:ext>
             </a:extLst>
           </p:cNvPr>
@@ -7152,7 +8939,7 @@
           <p:cNvPr id="5" name="Gap1">
             <a:extLst>
               <a:ext uri="{FF2B5EF4-FFF2-40B4-BE49-F238E27FC236}">
-                <a16:creationId xmlns:a16="http://schemas.microsoft.com/office/drawing/2014/main" id="{E298BCF6-8885-D187-7C8A-027EBDF7D393}"/>
+                <a16:creationId xmlns:a16="http://schemas.microsoft.com/office/drawing/2014/main" id="{7CA08527-592B-F4E1-840E-A22891CA77CF}"/>
               </a:ext>
             </a:extLst>
           </p:cNvPr>
@@ -7227,7 +9014,7 @@
           <p:cNvPr id="6" name="Gap2">
             <a:extLst>
               <a:ext uri="{FF2B5EF4-FFF2-40B4-BE49-F238E27FC236}">
-                <a16:creationId xmlns:a16="http://schemas.microsoft.com/office/drawing/2014/main" id="{011A2B62-E99E-19EA-3929-41E25E4DB1F0}"/>
+                <a16:creationId xmlns:a16="http://schemas.microsoft.com/office/drawing/2014/main" id="{DCCA2B29-A227-0608-86C0-23164387F313}"/>
               </a:ext>
             </a:extLst>
           </p:cNvPr>
@@ -7302,7 +9089,7 @@
           <p:cNvPr id="7" name="Gap3">
             <a:extLst>
               <a:ext uri="{FF2B5EF4-FFF2-40B4-BE49-F238E27FC236}">
-                <a16:creationId xmlns:a16="http://schemas.microsoft.com/office/drawing/2014/main" id="{6BDF2543-4370-0A60-E71C-BD2AB500178D}"/>
+                <a16:creationId xmlns:a16="http://schemas.microsoft.com/office/drawing/2014/main" id="{551034EB-CB3A-3CBF-54FD-65144CB7743C}"/>
               </a:ext>
             </a:extLst>
           </p:cNvPr>
@@ -7377,7 +9164,7 @@
           <p:cNvPr id="8" name="TextBox 7">
             <a:extLst>
               <a:ext uri="{FF2B5EF4-FFF2-40B4-BE49-F238E27FC236}">
-                <a16:creationId xmlns:a16="http://schemas.microsoft.com/office/drawing/2014/main" id="{A1011856-A0B3-204E-44C3-A45E4CB0C4C6}"/>
+                <a16:creationId xmlns:a16="http://schemas.microsoft.com/office/drawing/2014/main" id="{C7544001-9FD2-9756-387C-8BF4339F1DC7}"/>
               </a:ext>
             </a:extLst>
           </p:cNvPr>
@@ -7414,7 +9201,7 @@
     </p:spTree>
     <p:extLst>
       <p:ext uri="{BB962C8B-B14F-4D97-AF65-F5344CB8AC3E}">
-        <p14:creationId xmlns:p14="http://schemas.microsoft.com/office/powerpoint/2010/main" val="180292885"/>
+        <p14:creationId xmlns:p14="http://schemas.microsoft.com/office/powerpoint/2010/main" val="2752815333"/>
       </p:ext>
     </p:extLst>
   </p:cSld>
@@ -7446,7 +9233,7 @@
           <p:cNvPr id="2" name="Heading">
             <a:extLst>
               <a:ext uri="{FF2B5EF4-FFF2-40B4-BE49-F238E27FC236}">
-                <a16:creationId xmlns:a16="http://schemas.microsoft.com/office/drawing/2014/main" id="{5E095B06-FD02-D11F-11F8-A46076014E8C}"/>
+                <a16:creationId xmlns:a16="http://schemas.microsoft.com/office/drawing/2014/main" id="{D7C9E300-75A8-A200-A83D-7BCD4C023823}"/>
               </a:ext>
             </a:extLst>
           </p:cNvPr>
@@ -7485,7 +9272,7 @@
           <p:cNvPr id="3" name="Instructions">
             <a:extLst>
               <a:ext uri="{FF2B5EF4-FFF2-40B4-BE49-F238E27FC236}">
-                <a16:creationId xmlns:a16="http://schemas.microsoft.com/office/drawing/2014/main" id="{A9E16B01-F793-D325-67D3-DDEFB278DFC5}"/>
+                <a16:creationId xmlns:a16="http://schemas.microsoft.com/office/drawing/2014/main" id="{DB9CD109-C1C2-81FB-CCED-D4051A1D314D}"/>
               </a:ext>
             </a:extLst>
           </p:cNvPr>
@@ -7514,7 +9301,7 @@
                   <a:srgbClr val="7F7F7F"/>
                 </a:solidFill>
               </a:rPr>
-              <a:t>Select the three odd shapes, then Ctrl+click TARGET last. Match size &gt; Both. Try the From centre toggle too.</a:t>
+              <a:t>Select the three odd shapes, then Ctrl+click TARGET last. Match &gt; Both. Try the From centre toggle too.</a:t>
             </a:r>
           </a:p>
         </p:txBody>
@@ -7524,7 +9311,7 @@
           <p:cNvPr id="4" name="Odd1">
             <a:extLst>
               <a:ext uri="{FF2B5EF4-FFF2-40B4-BE49-F238E27FC236}">
-                <a16:creationId xmlns:a16="http://schemas.microsoft.com/office/drawing/2014/main" id="{28DDE9B6-7F84-A3A3-6FF8-E90812FF2C36}"/>
+                <a16:creationId xmlns:a16="http://schemas.microsoft.com/office/drawing/2014/main" id="{72825E67-862D-B4FB-BC97-E0471427C1BD}"/>
               </a:ext>
             </a:extLst>
           </p:cNvPr>
@@ -7599,7 +9386,7 @@
           <p:cNvPr id="5" name="Odd2">
             <a:extLst>
               <a:ext uri="{FF2B5EF4-FFF2-40B4-BE49-F238E27FC236}">
-                <a16:creationId xmlns:a16="http://schemas.microsoft.com/office/drawing/2014/main" id="{51ED0AA8-3C2A-AABB-7A9B-C7988494878B}"/>
+                <a16:creationId xmlns:a16="http://schemas.microsoft.com/office/drawing/2014/main" id="{2D4F2370-1FC0-F6F5-1894-36C9D4661723}"/>
               </a:ext>
             </a:extLst>
           </p:cNvPr>
@@ -7674,7 +9461,7 @@
           <p:cNvPr id="6" name="Odd3">
             <a:extLst>
               <a:ext uri="{FF2B5EF4-FFF2-40B4-BE49-F238E27FC236}">
-                <a16:creationId xmlns:a16="http://schemas.microsoft.com/office/drawing/2014/main" id="{9B220CDC-D6FA-D993-091B-A9170EA7CF08}"/>
+                <a16:creationId xmlns:a16="http://schemas.microsoft.com/office/drawing/2014/main" id="{8F3C72B1-32D3-DADF-75B3-7ACAA3AF4783}"/>
               </a:ext>
             </a:extLst>
           </p:cNvPr>
@@ -7749,7 +9536,7 @@
           <p:cNvPr id="7" name="Target">
             <a:extLst>
               <a:ext uri="{FF2B5EF4-FFF2-40B4-BE49-F238E27FC236}">
-                <a16:creationId xmlns:a16="http://schemas.microsoft.com/office/drawing/2014/main" id="{8DF0D298-825F-7C22-FFFE-DAE275244FD5}"/>
+                <a16:creationId xmlns:a16="http://schemas.microsoft.com/office/drawing/2014/main" id="{0D5E0F19-B6E2-4EA6-6EA5-698758B5408B}"/>
               </a:ext>
             </a:extLst>
           </p:cNvPr>
@@ -7822,7 +9609,7 @@
     </p:spTree>
     <p:extLst>
       <p:ext uri="{BB962C8B-B14F-4D97-AF65-F5344CB8AC3E}">
-        <p14:creationId xmlns:p14="http://schemas.microsoft.com/office/powerpoint/2010/main" val="2752170731"/>
+        <p14:creationId xmlns:p14="http://schemas.microsoft.com/office/powerpoint/2010/main" val="416029769"/>
       </p:ext>
     </p:extLst>
   </p:cSld>
@@ -7854,7 +9641,7 @@
           <p:cNvPr id="2" name="Heading">
             <a:extLst>
               <a:ext uri="{FF2B5EF4-FFF2-40B4-BE49-F238E27FC236}">
-                <a16:creationId xmlns:a16="http://schemas.microsoft.com/office/drawing/2014/main" id="{B2741571-2972-38FE-1C27-DF8926597877}"/>
+                <a16:creationId xmlns:a16="http://schemas.microsoft.com/office/drawing/2014/main" id="{DC03D324-67F6-07EE-0FA8-6A9E166C6343}"/>
               </a:ext>
             </a:extLst>
           </p:cNvPr>
@@ -7893,7 +9680,7 @@
           <p:cNvPr id="3" name="Instructions">
             <a:extLst>
               <a:ext uri="{FF2B5EF4-FFF2-40B4-BE49-F238E27FC236}">
-                <a16:creationId xmlns:a16="http://schemas.microsoft.com/office/drawing/2014/main" id="{9F71BDD3-13FD-BEEF-99F4-E0CE8DEB41B6}"/>
+                <a16:creationId xmlns:a16="http://schemas.microsoft.com/office/drawing/2014/main" id="{F59C305E-F6B2-28F8-1258-71491A9F75F9}"/>
               </a:ext>
             </a:extLst>
           </p:cNvPr>
@@ -7932,7 +9719,7 @@
           <p:cNvPr id="4" name="Card1">
             <a:extLst>
               <a:ext uri="{FF2B5EF4-FFF2-40B4-BE49-F238E27FC236}">
-                <a16:creationId xmlns:a16="http://schemas.microsoft.com/office/drawing/2014/main" id="{A01D2971-285D-1ECA-6395-1E375015EADE}"/>
+                <a16:creationId xmlns:a16="http://schemas.microsoft.com/office/drawing/2014/main" id="{EAD2D035-0BED-C626-6CB9-60A289E281F4}"/>
               </a:ext>
             </a:extLst>
           </p:cNvPr>
@@ -8007,7 +9794,7 @@
           <p:cNvPr id="5" name="BarA">
             <a:extLst>
               <a:ext uri="{FF2B5EF4-FFF2-40B4-BE49-F238E27FC236}">
-                <a16:creationId xmlns:a16="http://schemas.microsoft.com/office/drawing/2014/main" id="{5DC0411F-E130-D430-D45A-A75F93EAC7B3}"/>
+                <a16:creationId xmlns:a16="http://schemas.microsoft.com/office/drawing/2014/main" id="{D3E8B5E9-A3BE-1D80-DBB5-C3A0C86B13D3}"/>
               </a:ext>
             </a:extLst>
           </p:cNvPr>
@@ -8079,7 +9866,7 @@
           <p:cNvPr id="6" name="Card2">
             <a:extLst>
               <a:ext uri="{FF2B5EF4-FFF2-40B4-BE49-F238E27FC236}">
-                <a16:creationId xmlns:a16="http://schemas.microsoft.com/office/drawing/2014/main" id="{FBDC7E69-8783-587C-A1B9-F528FF8F39C9}"/>
+                <a16:creationId xmlns:a16="http://schemas.microsoft.com/office/drawing/2014/main" id="{48CFE070-1FE4-B764-DF53-AF28DCEFB976}"/>
               </a:ext>
             </a:extLst>
           </p:cNvPr>
@@ -8154,7 +9941,7 @@
           <p:cNvPr id="7" name="BarB">
             <a:extLst>
               <a:ext uri="{FF2B5EF4-FFF2-40B4-BE49-F238E27FC236}">
-                <a16:creationId xmlns:a16="http://schemas.microsoft.com/office/drawing/2014/main" id="{05954A50-81A3-B14A-ED12-070E3EAF308C}"/>
+                <a16:creationId xmlns:a16="http://schemas.microsoft.com/office/drawing/2014/main" id="{9630613B-2F15-FBFA-0359-FE150955A4C4}"/>
               </a:ext>
             </a:extLst>
           </p:cNvPr>
@@ -8226,7 +10013,7 @@
           <p:cNvPr id="8" name="Card3">
             <a:extLst>
               <a:ext uri="{FF2B5EF4-FFF2-40B4-BE49-F238E27FC236}">
-                <a16:creationId xmlns:a16="http://schemas.microsoft.com/office/drawing/2014/main" id="{746F86AB-B91B-F1FE-F05C-881A8721A4DE}"/>
+                <a16:creationId xmlns:a16="http://schemas.microsoft.com/office/drawing/2014/main" id="{30F42D4E-C5EE-086B-C0DF-2A30A294664F}"/>
               </a:ext>
             </a:extLst>
           </p:cNvPr>
@@ -8301,7 +10088,7 @@
           <p:cNvPr id="9" name="TextBox 8">
             <a:extLst>
               <a:ext uri="{FF2B5EF4-FFF2-40B4-BE49-F238E27FC236}">
-                <a16:creationId xmlns:a16="http://schemas.microsoft.com/office/drawing/2014/main" id="{208491E1-8DA1-7488-298E-5139D1F06AC1}"/>
+                <a16:creationId xmlns:a16="http://schemas.microsoft.com/office/drawing/2014/main" id="{389543DA-C31D-B4AF-F18D-8F7CA0ADBE3A}"/>
               </a:ext>
             </a:extLst>
           </p:cNvPr>
@@ -8338,7 +10125,7 @@
     </p:spTree>
     <p:extLst>
       <p:ext uri="{BB962C8B-B14F-4D97-AF65-F5344CB8AC3E}">
-        <p14:creationId xmlns:p14="http://schemas.microsoft.com/office/powerpoint/2010/main" val="1825567852"/>
+        <p14:creationId xmlns:p14="http://schemas.microsoft.com/office/powerpoint/2010/main" val="1690236990"/>
       </p:ext>
     </p:extLst>
   </p:cSld>
@@ -8370,7 +10157,7 @@
           <p:cNvPr id="2" name="Heading">
             <a:extLst>
               <a:ext uri="{FF2B5EF4-FFF2-40B4-BE49-F238E27FC236}">
-                <a16:creationId xmlns:a16="http://schemas.microsoft.com/office/drawing/2014/main" id="{3C5CFA6C-F51D-FAA9-8FAC-6B9C78B8D097}"/>
+                <a16:creationId xmlns:a16="http://schemas.microsoft.com/office/drawing/2014/main" id="{02812C76-5569-930D-10B4-3CE5EEEACCC7}"/>
               </a:ext>
             </a:extLst>
           </p:cNvPr>
@@ -8409,7 +10196,7 @@
           <p:cNvPr id="3" name="Instructions">
             <a:extLst>
               <a:ext uri="{FF2B5EF4-FFF2-40B4-BE49-F238E27FC236}">
-                <a16:creationId xmlns:a16="http://schemas.microsoft.com/office/drawing/2014/main" id="{A14E2947-AE52-933A-E2A4-6B539F59A58E}"/>
+                <a16:creationId xmlns:a16="http://schemas.microsoft.com/office/drawing/2014/main" id="{9070462C-1989-68EA-581C-BA368DF353E1}"/>
               </a:ext>
             </a:extLst>
           </p:cNvPr>
@@ -8438,7 +10225,7 @@
                   <a:srgbClr val="7F7F7F"/>
                 </a:solidFill>
               </a:rPr>
-              <a:t>Type 10 in Margin (pt) and set Apply margin = All the same. Select the three shapes, Ctrl+click TARGET last, then click Match size &gt; Both.</a:t>
+              <a:t>Type 10 in Margin (pt) and set Apply margin = All the same. Select the three shapes, Ctrl+click TARGET last, then click Match &gt; Both.</a:t>
             </a:r>
           </a:p>
         </p:txBody>
@@ -8448,7 +10235,7 @@
           <p:cNvPr id="4" name="Step1">
             <a:extLst>
               <a:ext uri="{FF2B5EF4-FFF2-40B4-BE49-F238E27FC236}">
-                <a16:creationId xmlns:a16="http://schemas.microsoft.com/office/drawing/2014/main" id="{E27AEB45-01B5-6961-6727-FB9F89D408B3}"/>
+                <a16:creationId xmlns:a16="http://schemas.microsoft.com/office/drawing/2014/main" id="{C6278B4A-FBC6-3C94-F6C9-4F9DF8747A41}"/>
               </a:ext>
             </a:extLst>
           </p:cNvPr>
@@ -8523,7 +10310,7 @@
           <p:cNvPr id="5" name="Step2">
             <a:extLst>
               <a:ext uri="{FF2B5EF4-FFF2-40B4-BE49-F238E27FC236}">
-                <a16:creationId xmlns:a16="http://schemas.microsoft.com/office/drawing/2014/main" id="{5667E7C2-FE78-916F-F3CD-38DE4211BDEE}"/>
+                <a16:creationId xmlns:a16="http://schemas.microsoft.com/office/drawing/2014/main" id="{A8AA8B9C-00AD-0D48-BD9D-CAC42BB806D8}"/>
               </a:ext>
             </a:extLst>
           </p:cNvPr>
@@ -8598,7 +10385,7 @@
           <p:cNvPr id="6" name="Step3">
             <a:extLst>
               <a:ext uri="{FF2B5EF4-FFF2-40B4-BE49-F238E27FC236}">
-                <a16:creationId xmlns:a16="http://schemas.microsoft.com/office/drawing/2014/main" id="{7CE9BAF0-3DA0-AED4-3C31-E688E439764B}"/>
+                <a16:creationId xmlns:a16="http://schemas.microsoft.com/office/drawing/2014/main" id="{BFBC13E0-98AD-7A3E-DCAD-443CF28B06EF}"/>
               </a:ext>
             </a:extLst>
           </p:cNvPr>
@@ -8673,7 +10460,7 @@
           <p:cNvPr id="7" name="MarginTarget">
             <a:extLst>
               <a:ext uri="{FF2B5EF4-FFF2-40B4-BE49-F238E27FC236}">
-                <a16:creationId xmlns:a16="http://schemas.microsoft.com/office/drawing/2014/main" id="{CDD79E97-6137-E6D0-69BC-76DED540DBE1}"/>
+                <a16:creationId xmlns:a16="http://schemas.microsoft.com/office/drawing/2014/main" id="{D7DA3CF5-C675-27FE-78A1-CA7479A2B9ED}"/>
               </a:ext>
             </a:extLst>
           </p:cNvPr>
@@ -8748,7 +10535,7 @@
           <p:cNvPr id="8" name="TextBox 7">
             <a:extLst>
               <a:ext uri="{FF2B5EF4-FFF2-40B4-BE49-F238E27FC236}">
-                <a16:creationId xmlns:a16="http://schemas.microsoft.com/office/drawing/2014/main" id="{B215EA4E-32A1-BB83-7721-F180356552EF}"/>
+                <a16:creationId xmlns:a16="http://schemas.microsoft.com/office/drawing/2014/main" id="{D55F4DED-5B97-1F81-E6E6-0AC7EF6C7C2D}"/>
               </a:ext>
             </a:extLst>
           </p:cNvPr>
@@ -8777,7 +10564,7 @@
                   <a:srgbClr val="7F7F7F"/>
                 </a:solidFill>
               </a:rPr>
-              <a:t>The margin is measured per side, so a margin of 10 takes 20 off each dimension and leaves a 10pt border showing all round. Now click AlignPro undo, set Apply margin to Cascade, select the shapes again in the same order and click Match size &gt; Both: the shapes tier along the order you selected in, and the one you selected first ends smallest.</a:t>
+              <a:t>The margin is measured per side, so a margin of 10 takes 20 off each dimension and leaves a 10pt border showing all round. Now click AlignPro undo, set Apply margin to Cascade, select the shapes again in the same order and click Match &gt; Both: the shapes tier along the order you selected in, and the one you selected first ends smallest.</a:t>
             </a:r>
           </a:p>
         </p:txBody>
@@ -8785,7 +10572,7 @@
     </p:spTree>
     <p:extLst>
       <p:ext uri="{BB962C8B-B14F-4D97-AF65-F5344CB8AC3E}">
-        <p14:creationId xmlns:p14="http://schemas.microsoft.com/office/powerpoint/2010/main" val="4172140221"/>
+        <p14:creationId xmlns:p14="http://schemas.microsoft.com/office/powerpoint/2010/main" val="2603174459"/>
       </p:ext>
     </p:extLst>
   </p:cSld>
@@ -8817,7 +10604,7 @@
           <p:cNvPr id="2" name="Heading">
             <a:extLst>
               <a:ext uri="{FF2B5EF4-FFF2-40B4-BE49-F238E27FC236}">
-                <a16:creationId xmlns:a16="http://schemas.microsoft.com/office/drawing/2014/main" id="{58BD0420-ED3B-A25A-DA90-3B45048A7D67}"/>
+                <a16:creationId xmlns:a16="http://schemas.microsoft.com/office/drawing/2014/main" id="{BCA55109-275B-238C-516A-87B50472D308}"/>
               </a:ext>
             </a:extLst>
           </p:cNvPr>
@@ -8856,7 +10643,7 @@
           <p:cNvPr id="3" name="Instructions">
             <a:extLst>
               <a:ext uri="{FF2B5EF4-FFF2-40B4-BE49-F238E27FC236}">
-                <a16:creationId xmlns:a16="http://schemas.microsoft.com/office/drawing/2014/main" id="{74F36F11-954C-2DFE-DF95-02DD86751D6F}"/>
+                <a16:creationId xmlns:a16="http://schemas.microsoft.com/office/drawing/2014/main" id="{305F9414-2FD5-FACF-9636-AB1164BFBB95}"/>
               </a:ext>
             </a:extLst>
           </p:cNvPr>
@@ -8885,7 +10672,7 @@
                   <a:srgbClr val="7F7F7F"/>
                 </a:solidFill>
               </a:rPr>
-              <a:t>Select 1st, then Ctrl+click 2nd, 3rd, 4th and 5th in turn. Click Align &gt; Centre, then Align &gt; Middle. Type 12 in Margin (pt), set Apply margin = Cascade, switch From centre on, then click Match size &gt; Both. Finish by clicking Order &gt; Stack.</a:t>
+              <a:t>Select 1st, then Ctrl+click 2nd, 3rd, 4th and 5th in turn. Click Align &gt; Centre, then Align &gt; Middle. Type 12 in Margin (pt), set Apply margin = Cascade, switch From centre on, then click Match &gt; Both. Finish by clicking Order &gt; Stack.</a:t>
             </a:r>
           </a:p>
         </p:txBody>
@@ -8895,7 +10682,7 @@
           <p:cNvPr id="4" name="Ring1">
             <a:extLst>
               <a:ext uri="{FF2B5EF4-FFF2-40B4-BE49-F238E27FC236}">
-                <a16:creationId xmlns:a16="http://schemas.microsoft.com/office/drawing/2014/main" id="{AA476AB9-1A68-EDB9-C84F-4296D577D4A7}"/>
+                <a16:creationId xmlns:a16="http://schemas.microsoft.com/office/drawing/2014/main" id="{CD7E57B7-0333-553E-27DB-0566EFD88DBD}"/>
               </a:ext>
             </a:extLst>
           </p:cNvPr>
@@ -8970,7 +10757,7 @@
           <p:cNvPr id="5" name="Ring2">
             <a:extLst>
               <a:ext uri="{FF2B5EF4-FFF2-40B4-BE49-F238E27FC236}">
-                <a16:creationId xmlns:a16="http://schemas.microsoft.com/office/drawing/2014/main" id="{52B21450-2310-5178-7907-26F425F98836}"/>
+                <a16:creationId xmlns:a16="http://schemas.microsoft.com/office/drawing/2014/main" id="{25A285F4-B409-CF54-CFA1-C0593F1F87AE}"/>
               </a:ext>
             </a:extLst>
           </p:cNvPr>
@@ -9045,7 +10832,7 @@
           <p:cNvPr id="6" name="Ring3">
             <a:extLst>
               <a:ext uri="{FF2B5EF4-FFF2-40B4-BE49-F238E27FC236}">
-                <a16:creationId xmlns:a16="http://schemas.microsoft.com/office/drawing/2014/main" id="{BF552B0C-6431-4B1E-4FE6-5345CCF9A4A0}"/>
+                <a16:creationId xmlns:a16="http://schemas.microsoft.com/office/drawing/2014/main" id="{8B6BBF25-7DBB-E9D1-6C71-03C8D55BC714}"/>
               </a:ext>
             </a:extLst>
           </p:cNvPr>
@@ -9120,7 +10907,7 @@
           <p:cNvPr id="7" name="Ring4">
             <a:extLst>
               <a:ext uri="{FF2B5EF4-FFF2-40B4-BE49-F238E27FC236}">
-                <a16:creationId xmlns:a16="http://schemas.microsoft.com/office/drawing/2014/main" id="{4EFBCC00-4C80-0217-FC0B-4F7FD48C74AF}"/>
+                <a16:creationId xmlns:a16="http://schemas.microsoft.com/office/drawing/2014/main" id="{53C5B7AC-DCBB-06C0-9E5D-63E578755C82}"/>
               </a:ext>
             </a:extLst>
           </p:cNvPr>
@@ -9195,7 +10982,7 @@
           <p:cNvPr id="8" name="Ring5">
             <a:extLst>
               <a:ext uri="{FF2B5EF4-FFF2-40B4-BE49-F238E27FC236}">
-                <a16:creationId xmlns:a16="http://schemas.microsoft.com/office/drawing/2014/main" id="{1352A869-4CB5-BDA5-9136-7D6F72198348}"/>
+                <a16:creationId xmlns:a16="http://schemas.microsoft.com/office/drawing/2014/main" id="{065516A0-6B9A-8B70-7B1B-E7C03401F2D6}"/>
               </a:ext>
             </a:extLst>
           </p:cNvPr>
@@ -9270,7 +11057,7 @@
           <p:cNvPr id="9" name="TextBox 8">
             <a:extLst>
               <a:ext uri="{FF2B5EF4-FFF2-40B4-BE49-F238E27FC236}">
-                <a16:creationId xmlns:a16="http://schemas.microsoft.com/office/drawing/2014/main" id="{65D40878-1D38-37E5-B6C1-FEB22C99C5B7}"/>
+                <a16:creationId xmlns:a16="http://schemas.microsoft.com/office/drawing/2014/main" id="{C67D9180-785D-87B3-7966-B3F06E958645}"/>
               </a:ext>
             </a:extLst>
           </p:cNvPr>
@@ -9307,7 +11094,7 @@
     </p:spTree>
     <p:extLst>
       <p:ext uri="{BB962C8B-B14F-4D97-AF65-F5344CB8AC3E}">
-        <p14:creationId xmlns:p14="http://schemas.microsoft.com/office/powerpoint/2010/main" val="3236276425"/>
+        <p14:creationId xmlns:p14="http://schemas.microsoft.com/office/powerpoint/2010/main" val="2240331504"/>
       </p:ext>
     </p:extLst>
   </p:cSld>

--- a/sample/AlignPro-Sample.pptx
+++ b/sample/AlignPro-Sample.pptx
@@ -22,6 +22,8 @@
     <p:sldId id="270" r:id="rId16"/>
     <p:sldId id="271" r:id="rId17"/>
     <p:sldId id="272" r:id="rId18"/>
+    <p:sldId id="273" r:id="rId19"/>
+    <p:sldId id="274" r:id="rId20"/>
   </p:sldIdLst>
   <p:sldSz cx="12192000" cy="6858000"/>
   <p:notesSz cx="6858000" cy="9144000"/>
@@ -145,7 +147,7 @@
           <p:cNvPr id="2" name="Title 1">
             <a:extLst>
               <a:ext uri="{FF2B5EF4-FFF2-40B4-BE49-F238E27FC236}">
-                <a16:creationId xmlns:a16="http://schemas.microsoft.com/office/drawing/2014/main" id="{B8BEC77E-BFAA-2875-1E2D-6B028BD1D209}"/>
+                <a16:creationId xmlns:a16="http://schemas.microsoft.com/office/drawing/2014/main" id="{576B18FA-FBF0-4FE4-B1B3-DC9221401379}"/>
               </a:ext>
             </a:extLst>
           </p:cNvPr>
@@ -183,7 +185,7 @@
           <p:cNvPr id="3" name="Subtitle 2">
             <a:extLst>
               <a:ext uri="{FF2B5EF4-FFF2-40B4-BE49-F238E27FC236}">
-                <a16:creationId xmlns:a16="http://schemas.microsoft.com/office/drawing/2014/main" id="{E9F9C06B-8050-675E-6167-837D8D1303E7}"/>
+                <a16:creationId xmlns:a16="http://schemas.microsoft.com/office/drawing/2014/main" id="{9B606DEC-87F8-0CDA-8001-DF4AF3E77C59}"/>
               </a:ext>
             </a:extLst>
           </p:cNvPr>
@@ -254,7 +256,7 @@
           <p:cNvPr id="4" name="Date Placeholder 3">
             <a:extLst>
               <a:ext uri="{FF2B5EF4-FFF2-40B4-BE49-F238E27FC236}">
-                <a16:creationId xmlns:a16="http://schemas.microsoft.com/office/drawing/2014/main" id="{ED7B3654-A0E3-6699-1096-E7642126CDAC}"/>
+                <a16:creationId xmlns:a16="http://schemas.microsoft.com/office/drawing/2014/main" id="{31FC4826-70A9-39D0-CA7A-82FEB91C6E2B}"/>
               </a:ext>
             </a:extLst>
           </p:cNvPr>
@@ -270,9 +272,9 @@
           <a:bodyPr/>
           <a:lstStyle/>
           <a:p>
-            <a:fld id="{31DDE284-78A4-49CA-804C-6A9295C02157}" type="datetimeFigureOut">
+            <a:fld id="{965718B5-E111-48C2-9805-526994096C52}" type="datetimeFigureOut">
               <a:rPr lang="en-AU" smtClean="0"/>
-              <a:t>23/09/2026</a:t>
+              <a:t>8/10/2026</a:t>
             </a:fld>
             <a:endParaRPr lang="en-AU"/>
           </a:p>
@@ -283,7 +285,7 @@
           <p:cNvPr id="5" name="Footer Placeholder 4">
             <a:extLst>
               <a:ext uri="{FF2B5EF4-FFF2-40B4-BE49-F238E27FC236}">
-                <a16:creationId xmlns:a16="http://schemas.microsoft.com/office/drawing/2014/main" id="{4764BB86-6D73-57C6-B745-0DCFCBD92BA9}"/>
+                <a16:creationId xmlns:a16="http://schemas.microsoft.com/office/drawing/2014/main" id="{30B6EE46-6F88-9415-B094-9B896AF797CA}"/>
               </a:ext>
             </a:extLst>
           </p:cNvPr>
@@ -308,7 +310,7 @@
           <p:cNvPr id="6" name="Slide Number Placeholder 5">
             <a:extLst>
               <a:ext uri="{FF2B5EF4-FFF2-40B4-BE49-F238E27FC236}">
-                <a16:creationId xmlns:a16="http://schemas.microsoft.com/office/drawing/2014/main" id="{8F9446A1-2E1A-FD7D-EE64-37E156839C3D}"/>
+                <a16:creationId xmlns:a16="http://schemas.microsoft.com/office/drawing/2014/main" id="{44447F2E-E72B-2D28-5DD0-BAF1002C166E}"/>
               </a:ext>
             </a:extLst>
           </p:cNvPr>
@@ -324,7 +326,7 @@
           <a:bodyPr/>
           <a:lstStyle/>
           <a:p>
-            <a:fld id="{0A635631-434B-460F-812D-B1531B39C8B0}" type="slidenum">
+            <a:fld id="{DEAFF70B-5DE2-4471-8296-B0BE239360DD}" type="slidenum">
               <a:rPr lang="en-AU" smtClean="0"/>
               <a:t>‹#›</a:t>
             </a:fld>
@@ -335,7 +337,7 @@
     </p:spTree>
     <p:extLst>
       <p:ext uri="{BB962C8B-B14F-4D97-AF65-F5344CB8AC3E}">
-        <p14:creationId xmlns:p14="http://schemas.microsoft.com/office/powerpoint/2010/main" val="1434544206"/>
+        <p14:creationId xmlns:p14="http://schemas.microsoft.com/office/powerpoint/2010/main" val="521479157"/>
       </p:ext>
     </p:extLst>
   </p:cSld>
@@ -367,7 +369,7 @@
           <p:cNvPr id="2" name="Title 1">
             <a:extLst>
               <a:ext uri="{FF2B5EF4-FFF2-40B4-BE49-F238E27FC236}">
-                <a16:creationId xmlns:a16="http://schemas.microsoft.com/office/drawing/2014/main" id="{D4212DC4-89EF-D668-B438-5E0C8119ED43}"/>
+                <a16:creationId xmlns:a16="http://schemas.microsoft.com/office/drawing/2014/main" id="{1B4DD4C6-8589-DDBF-F577-95A92C9322BF}"/>
               </a:ext>
             </a:extLst>
           </p:cNvPr>
@@ -396,7 +398,7 @@
           <p:cNvPr id="3" name="Vertical Text Placeholder 2">
             <a:extLst>
               <a:ext uri="{FF2B5EF4-FFF2-40B4-BE49-F238E27FC236}">
-                <a16:creationId xmlns:a16="http://schemas.microsoft.com/office/drawing/2014/main" id="{461F6FE7-941E-AF02-8E0E-0337CAC23CA4}"/>
+                <a16:creationId xmlns:a16="http://schemas.microsoft.com/office/drawing/2014/main" id="{817DDC66-6FE3-BED2-B0BA-7128FF94A79D}"/>
               </a:ext>
             </a:extLst>
           </p:cNvPr>
@@ -454,7 +456,7 @@
           <p:cNvPr id="4" name="Date Placeholder 3">
             <a:extLst>
               <a:ext uri="{FF2B5EF4-FFF2-40B4-BE49-F238E27FC236}">
-                <a16:creationId xmlns:a16="http://schemas.microsoft.com/office/drawing/2014/main" id="{11188BD6-85F4-2805-DE31-5FB34220AEA5}"/>
+                <a16:creationId xmlns:a16="http://schemas.microsoft.com/office/drawing/2014/main" id="{04E6A66F-FA1D-81BD-8044-CF39F7A0AE52}"/>
               </a:ext>
             </a:extLst>
           </p:cNvPr>
@@ -470,9 +472,9 @@
           <a:bodyPr/>
           <a:lstStyle/>
           <a:p>
-            <a:fld id="{31DDE284-78A4-49CA-804C-6A9295C02157}" type="datetimeFigureOut">
+            <a:fld id="{965718B5-E111-48C2-9805-526994096C52}" type="datetimeFigureOut">
               <a:rPr lang="en-AU" smtClean="0"/>
-              <a:t>23/09/2026</a:t>
+              <a:t>8/10/2026</a:t>
             </a:fld>
             <a:endParaRPr lang="en-AU"/>
           </a:p>
@@ -483,7 +485,7 @@
           <p:cNvPr id="5" name="Footer Placeholder 4">
             <a:extLst>
               <a:ext uri="{FF2B5EF4-FFF2-40B4-BE49-F238E27FC236}">
-                <a16:creationId xmlns:a16="http://schemas.microsoft.com/office/drawing/2014/main" id="{85AB4041-B03F-4AA2-D288-3B0208A67852}"/>
+                <a16:creationId xmlns:a16="http://schemas.microsoft.com/office/drawing/2014/main" id="{05DF345E-E92A-6AAA-FCF2-97A0A53EEE20}"/>
               </a:ext>
             </a:extLst>
           </p:cNvPr>
@@ -508,7 +510,7 @@
           <p:cNvPr id="6" name="Slide Number Placeholder 5">
             <a:extLst>
               <a:ext uri="{FF2B5EF4-FFF2-40B4-BE49-F238E27FC236}">
-                <a16:creationId xmlns:a16="http://schemas.microsoft.com/office/drawing/2014/main" id="{B614F442-8E17-DEB7-3AC3-DD1E408D55FF}"/>
+                <a16:creationId xmlns:a16="http://schemas.microsoft.com/office/drawing/2014/main" id="{D7DA98D0-8F00-FA6E-BD26-C9BF12637E0D}"/>
               </a:ext>
             </a:extLst>
           </p:cNvPr>
@@ -524,7 +526,7 @@
           <a:bodyPr/>
           <a:lstStyle/>
           <a:p>
-            <a:fld id="{0A635631-434B-460F-812D-B1531B39C8B0}" type="slidenum">
+            <a:fld id="{DEAFF70B-5DE2-4471-8296-B0BE239360DD}" type="slidenum">
               <a:rPr lang="en-AU" smtClean="0"/>
               <a:t>‹#›</a:t>
             </a:fld>
@@ -535,7 +537,7 @@
     </p:spTree>
     <p:extLst>
       <p:ext uri="{BB962C8B-B14F-4D97-AF65-F5344CB8AC3E}">
-        <p14:creationId xmlns:p14="http://schemas.microsoft.com/office/powerpoint/2010/main" val="3887727080"/>
+        <p14:creationId xmlns:p14="http://schemas.microsoft.com/office/powerpoint/2010/main" val="1319249289"/>
       </p:ext>
     </p:extLst>
   </p:cSld>
@@ -567,7 +569,7 @@
           <p:cNvPr id="2" name="Vertical Title 1">
             <a:extLst>
               <a:ext uri="{FF2B5EF4-FFF2-40B4-BE49-F238E27FC236}">
-                <a16:creationId xmlns:a16="http://schemas.microsoft.com/office/drawing/2014/main" id="{13437BFE-B3CA-BE87-FF0E-518833C00A06}"/>
+                <a16:creationId xmlns:a16="http://schemas.microsoft.com/office/drawing/2014/main" id="{402576B2-B30C-E4F5-03BD-FC80C8A4B300}"/>
               </a:ext>
             </a:extLst>
           </p:cNvPr>
@@ -601,7 +603,7 @@
           <p:cNvPr id="3" name="Vertical Text Placeholder 2">
             <a:extLst>
               <a:ext uri="{FF2B5EF4-FFF2-40B4-BE49-F238E27FC236}">
-                <a16:creationId xmlns:a16="http://schemas.microsoft.com/office/drawing/2014/main" id="{63E9EA55-4CD3-FFB6-8645-AD19C9FB1C05}"/>
+                <a16:creationId xmlns:a16="http://schemas.microsoft.com/office/drawing/2014/main" id="{2D65834C-DF52-6092-73D5-91648D544807}"/>
               </a:ext>
             </a:extLst>
           </p:cNvPr>
@@ -664,7 +666,7 @@
           <p:cNvPr id="4" name="Date Placeholder 3">
             <a:extLst>
               <a:ext uri="{FF2B5EF4-FFF2-40B4-BE49-F238E27FC236}">
-                <a16:creationId xmlns:a16="http://schemas.microsoft.com/office/drawing/2014/main" id="{F22D879F-51F2-EF4E-C0D8-3099A1B363F5}"/>
+                <a16:creationId xmlns:a16="http://schemas.microsoft.com/office/drawing/2014/main" id="{DA33F456-AECC-034F-FA5A-F68E5F9ECA47}"/>
               </a:ext>
             </a:extLst>
           </p:cNvPr>
@@ -680,9 +682,9 @@
           <a:bodyPr/>
           <a:lstStyle/>
           <a:p>
-            <a:fld id="{31DDE284-78A4-49CA-804C-6A9295C02157}" type="datetimeFigureOut">
+            <a:fld id="{965718B5-E111-48C2-9805-526994096C52}" type="datetimeFigureOut">
               <a:rPr lang="en-AU" smtClean="0"/>
-              <a:t>23/09/2026</a:t>
+              <a:t>8/10/2026</a:t>
             </a:fld>
             <a:endParaRPr lang="en-AU"/>
           </a:p>
@@ -693,7 +695,7 @@
           <p:cNvPr id="5" name="Footer Placeholder 4">
             <a:extLst>
               <a:ext uri="{FF2B5EF4-FFF2-40B4-BE49-F238E27FC236}">
-                <a16:creationId xmlns:a16="http://schemas.microsoft.com/office/drawing/2014/main" id="{A40BEFCB-F23E-0D87-44C3-3AD7DDFB0C61}"/>
+                <a16:creationId xmlns:a16="http://schemas.microsoft.com/office/drawing/2014/main" id="{4CFD0854-C08A-DB00-6449-80E22FE1A587}"/>
               </a:ext>
             </a:extLst>
           </p:cNvPr>
@@ -718,7 +720,7 @@
           <p:cNvPr id="6" name="Slide Number Placeholder 5">
             <a:extLst>
               <a:ext uri="{FF2B5EF4-FFF2-40B4-BE49-F238E27FC236}">
-                <a16:creationId xmlns:a16="http://schemas.microsoft.com/office/drawing/2014/main" id="{64E5508E-252A-7F45-3645-6A392409AB94}"/>
+                <a16:creationId xmlns:a16="http://schemas.microsoft.com/office/drawing/2014/main" id="{3B6A2043-76AC-E2C8-BF97-09A26FD9255F}"/>
               </a:ext>
             </a:extLst>
           </p:cNvPr>
@@ -734,7 +736,7 @@
           <a:bodyPr/>
           <a:lstStyle/>
           <a:p>
-            <a:fld id="{0A635631-434B-460F-812D-B1531B39C8B0}" type="slidenum">
+            <a:fld id="{DEAFF70B-5DE2-4471-8296-B0BE239360DD}" type="slidenum">
               <a:rPr lang="en-AU" smtClean="0"/>
               <a:t>‹#›</a:t>
             </a:fld>
@@ -745,7 +747,7 @@
     </p:spTree>
     <p:extLst>
       <p:ext uri="{BB962C8B-B14F-4D97-AF65-F5344CB8AC3E}">
-        <p14:creationId xmlns:p14="http://schemas.microsoft.com/office/powerpoint/2010/main" val="1034542168"/>
+        <p14:creationId xmlns:p14="http://schemas.microsoft.com/office/powerpoint/2010/main" val="2360563005"/>
       </p:ext>
     </p:extLst>
   </p:cSld>
@@ -777,7 +779,7 @@
           <p:cNvPr id="2" name="Title 1">
             <a:extLst>
               <a:ext uri="{FF2B5EF4-FFF2-40B4-BE49-F238E27FC236}">
-                <a16:creationId xmlns:a16="http://schemas.microsoft.com/office/drawing/2014/main" id="{2F6FFFBE-95F0-2057-131A-6BC52524D15F}"/>
+                <a16:creationId xmlns:a16="http://schemas.microsoft.com/office/drawing/2014/main" id="{DBF856F0-DE96-DF33-3AB6-6BAC9FF61BF4}"/>
               </a:ext>
             </a:extLst>
           </p:cNvPr>
@@ -806,7 +808,7 @@
           <p:cNvPr id="3" name="Content Placeholder 2">
             <a:extLst>
               <a:ext uri="{FF2B5EF4-FFF2-40B4-BE49-F238E27FC236}">
-                <a16:creationId xmlns:a16="http://schemas.microsoft.com/office/drawing/2014/main" id="{CA53B2D5-F376-E6A4-7D7E-67A1DB6D3252}"/>
+                <a16:creationId xmlns:a16="http://schemas.microsoft.com/office/drawing/2014/main" id="{29C1325A-7400-F57A-5895-B4ACEE257D2A}"/>
               </a:ext>
             </a:extLst>
           </p:cNvPr>
@@ -864,7 +866,7 @@
           <p:cNvPr id="4" name="Date Placeholder 3">
             <a:extLst>
               <a:ext uri="{FF2B5EF4-FFF2-40B4-BE49-F238E27FC236}">
-                <a16:creationId xmlns:a16="http://schemas.microsoft.com/office/drawing/2014/main" id="{7C990810-B2BE-4C72-D3D9-A4252ED085CD}"/>
+                <a16:creationId xmlns:a16="http://schemas.microsoft.com/office/drawing/2014/main" id="{11D8C71A-3B7B-78E8-80A6-77BFB0314131}"/>
               </a:ext>
             </a:extLst>
           </p:cNvPr>
@@ -880,9 +882,9 @@
           <a:bodyPr/>
           <a:lstStyle/>
           <a:p>
-            <a:fld id="{31DDE284-78A4-49CA-804C-6A9295C02157}" type="datetimeFigureOut">
+            <a:fld id="{965718B5-E111-48C2-9805-526994096C52}" type="datetimeFigureOut">
               <a:rPr lang="en-AU" smtClean="0"/>
-              <a:t>23/09/2026</a:t>
+              <a:t>8/10/2026</a:t>
             </a:fld>
             <a:endParaRPr lang="en-AU"/>
           </a:p>
@@ -893,7 +895,7 @@
           <p:cNvPr id="5" name="Footer Placeholder 4">
             <a:extLst>
               <a:ext uri="{FF2B5EF4-FFF2-40B4-BE49-F238E27FC236}">
-                <a16:creationId xmlns:a16="http://schemas.microsoft.com/office/drawing/2014/main" id="{2BC1083B-E91C-8EC6-DBC5-E5A64786742A}"/>
+                <a16:creationId xmlns:a16="http://schemas.microsoft.com/office/drawing/2014/main" id="{4CAEACC8-85C4-482E-195B-3530D54F9634}"/>
               </a:ext>
             </a:extLst>
           </p:cNvPr>
@@ -918,7 +920,7 @@
           <p:cNvPr id="6" name="Slide Number Placeholder 5">
             <a:extLst>
               <a:ext uri="{FF2B5EF4-FFF2-40B4-BE49-F238E27FC236}">
-                <a16:creationId xmlns:a16="http://schemas.microsoft.com/office/drawing/2014/main" id="{26003562-32F7-3E4B-FB1E-99F1F0A15532}"/>
+                <a16:creationId xmlns:a16="http://schemas.microsoft.com/office/drawing/2014/main" id="{2EC68366-F366-E9DA-9386-5336E9C0F646}"/>
               </a:ext>
             </a:extLst>
           </p:cNvPr>
@@ -934,7 +936,7 @@
           <a:bodyPr/>
           <a:lstStyle/>
           <a:p>
-            <a:fld id="{0A635631-434B-460F-812D-B1531B39C8B0}" type="slidenum">
+            <a:fld id="{DEAFF70B-5DE2-4471-8296-B0BE239360DD}" type="slidenum">
               <a:rPr lang="en-AU" smtClean="0"/>
               <a:t>‹#›</a:t>
             </a:fld>
@@ -945,7 +947,7 @@
     </p:spTree>
     <p:extLst>
       <p:ext uri="{BB962C8B-B14F-4D97-AF65-F5344CB8AC3E}">
-        <p14:creationId xmlns:p14="http://schemas.microsoft.com/office/powerpoint/2010/main" val="1310371225"/>
+        <p14:creationId xmlns:p14="http://schemas.microsoft.com/office/powerpoint/2010/main" val="1941887951"/>
       </p:ext>
     </p:extLst>
   </p:cSld>
@@ -977,7 +979,7 @@
           <p:cNvPr id="2" name="Title 1">
             <a:extLst>
               <a:ext uri="{FF2B5EF4-FFF2-40B4-BE49-F238E27FC236}">
-                <a16:creationId xmlns:a16="http://schemas.microsoft.com/office/drawing/2014/main" id="{A919B0AE-57DA-33CE-ABC4-E2C8BE7F1DC8}"/>
+                <a16:creationId xmlns:a16="http://schemas.microsoft.com/office/drawing/2014/main" id="{BFE7DE10-D1C1-DBC6-9BA3-1372D88C9228}"/>
               </a:ext>
             </a:extLst>
           </p:cNvPr>
@@ -1015,7 +1017,7 @@
           <p:cNvPr id="3" name="Text Placeholder 2">
             <a:extLst>
               <a:ext uri="{FF2B5EF4-FFF2-40B4-BE49-F238E27FC236}">
-                <a16:creationId xmlns:a16="http://schemas.microsoft.com/office/drawing/2014/main" id="{70E0D8C2-FDFE-F29F-334C-DD603F66C970}"/>
+                <a16:creationId xmlns:a16="http://schemas.microsoft.com/office/drawing/2014/main" id="{A107035E-5915-14F0-4EEB-1293FC91731D}"/>
               </a:ext>
             </a:extLst>
           </p:cNvPr>
@@ -1140,7 +1142,7 @@
           <p:cNvPr id="4" name="Date Placeholder 3">
             <a:extLst>
               <a:ext uri="{FF2B5EF4-FFF2-40B4-BE49-F238E27FC236}">
-                <a16:creationId xmlns:a16="http://schemas.microsoft.com/office/drawing/2014/main" id="{9783EAA0-23B4-AEEC-0279-2327BD1A6FED}"/>
+                <a16:creationId xmlns:a16="http://schemas.microsoft.com/office/drawing/2014/main" id="{A6DCDD8B-F461-78D9-FDA8-A976702DE64F}"/>
               </a:ext>
             </a:extLst>
           </p:cNvPr>
@@ -1156,9 +1158,9 @@
           <a:bodyPr/>
           <a:lstStyle/>
           <a:p>
-            <a:fld id="{31DDE284-78A4-49CA-804C-6A9295C02157}" type="datetimeFigureOut">
+            <a:fld id="{965718B5-E111-48C2-9805-526994096C52}" type="datetimeFigureOut">
               <a:rPr lang="en-AU" smtClean="0"/>
-              <a:t>23/09/2026</a:t>
+              <a:t>8/10/2026</a:t>
             </a:fld>
             <a:endParaRPr lang="en-AU"/>
           </a:p>
@@ -1169,7 +1171,7 @@
           <p:cNvPr id="5" name="Footer Placeholder 4">
             <a:extLst>
               <a:ext uri="{FF2B5EF4-FFF2-40B4-BE49-F238E27FC236}">
-                <a16:creationId xmlns:a16="http://schemas.microsoft.com/office/drawing/2014/main" id="{B10E1FA2-09C2-6E2F-2703-87545E6B693F}"/>
+                <a16:creationId xmlns:a16="http://schemas.microsoft.com/office/drawing/2014/main" id="{4359918F-19C8-E8AF-3653-4279EB7B96E0}"/>
               </a:ext>
             </a:extLst>
           </p:cNvPr>
@@ -1194,7 +1196,7 @@
           <p:cNvPr id="6" name="Slide Number Placeholder 5">
             <a:extLst>
               <a:ext uri="{FF2B5EF4-FFF2-40B4-BE49-F238E27FC236}">
-                <a16:creationId xmlns:a16="http://schemas.microsoft.com/office/drawing/2014/main" id="{3D516AF0-6433-1599-8A9F-925D5CFBFB5C}"/>
+                <a16:creationId xmlns:a16="http://schemas.microsoft.com/office/drawing/2014/main" id="{A38BB6C0-4324-AAE5-C8BB-69F83197DA3D}"/>
               </a:ext>
             </a:extLst>
           </p:cNvPr>
@@ -1210,7 +1212,7 @@
           <a:bodyPr/>
           <a:lstStyle/>
           <a:p>
-            <a:fld id="{0A635631-434B-460F-812D-B1531B39C8B0}" type="slidenum">
+            <a:fld id="{DEAFF70B-5DE2-4471-8296-B0BE239360DD}" type="slidenum">
               <a:rPr lang="en-AU" smtClean="0"/>
               <a:t>‹#›</a:t>
             </a:fld>
@@ -1221,7 +1223,7 @@
     </p:spTree>
     <p:extLst>
       <p:ext uri="{BB962C8B-B14F-4D97-AF65-F5344CB8AC3E}">
-        <p14:creationId xmlns:p14="http://schemas.microsoft.com/office/powerpoint/2010/main" val="1681288487"/>
+        <p14:creationId xmlns:p14="http://schemas.microsoft.com/office/powerpoint/2010/main" val="2145866792"/>
       </p:ext>
     </p:extLst>
   </p:cSld>
@@ -1253,7 +1255,7 @@
           <p:cNvPr id="2" name="Title 1">
             <a:extLst>
               <a:ext uri="{FF2B5EF4-FFF2-40B4-BE49-F238E27FC236}">
-                <a16:creationId xmlns:a16="http://schemas.microsoft.com/office/drawing/2014/main" id="{C40CC3A0-1ECE-2CB3-3CD1-93C2B3A88508}"/>
+                <a16:creationId xmlns:a16="http://schemas.microsoft.com/office/drawing/2014/main" id="{B1BB1FF1-62D2-21B9-5805-10393C8DD2C0}"/>
               </a:ext>
             </a:extLst>
           </p:cNvPr>
@@ -1282,7 +1284,7 @@
           <p:cNvPr id="3" name="Content Placeholder 2">
             <a:extLst>
               <a:ext uri="{FF2B5EF4-FFF2-40B4-BE49-F238E27FC236}">
-                <a16:creationId xmlns:a16="http://schemas.microsoft.com/office/drawing/2014/main" id="{BDB5D113-2DEA-4B04-01FF-855502852565}"/>
+                <a16:creationId xmlns:a16="http://schemas.microsoft.com/office/drawing/2014/main" id="{A564A53C-5769-9736-D470-AF89240D9900}"/>
               </a:ext>
             </a:extLst>
           </p:cNvPr>
@@ -1345,7 +1347,7 @@
           <p:cNvPr id="4" name="Content Placeholder 3">
             <a:extLst>
               <a:ext uri="{FF2B5EF4-FFF2-40B4-BE49-F238E27FC236}">
-                <a16:creationId xmlns:a16="http://schemas.microsoft.com/office/drawing/2014/main" id="{D074BD10-EAB4-E4BB-7661-523A2DE6FCDD}"/>
+                <a16:creationId xmlns:a16="http://schemas.microsoft.com/office/drawing/2014/main" id="{6B655837-C458-D2E1-6769-077160D95750}"/>
               </a:ext>
             </a:extLst>
           </p:cNvPr>
@@ -1408,7 +1410,7 @@
           <p:cNvPr id="5" name="Date Placeholder 4">
             <a:extLst>
               <a:ext uri="{FF2B5EF4-FFF2-40B4-BE49-F238E27FC236}">
-                <a16:creationId xmlns:a16="http://schemas.microsoft.com/office/drawing/2014/main" id="{5B31C7A0-B7F1-F2DF-45F7-EDCB80DA04B0}"/>
+                <a16:creationId xmlns:a16="http://schemas.microsoft.com/office/drawing/2014/main" id="{121E6140-8340-2641-1868-FFEB5171C897}"/>
               </a:ext>
             </a:extLst>
           </p:cNvPr>
@@ -1424,9 +1426,9 @@
           <a:bodyPr/>
           <a:lstStyle/>
           <a:p>
-            <a:fld id="{31DDE284-78A4-49CA-804C-6A9295C02157}" type="datetimeFigureOut">
+            <a:fld id="{965718B5-E111-48C2-9805-526994096C52}" type="datetimeFigureOut">
               <a:rPr lang="en-AU" smtClean="0"/>
-              <a:t>23/09/2026</a:t>
+              <a:t>8/10/2026</a:t>
             </a:fld>
             <a:endParaRPr lang="en-AU"/>
           </a:p>
@@ -1437,7 +1439,7 @@
           <p:cNvPr id="6" name="Footer Placeholder 5">
             <a:extLst>
               <a:ext uri="{FF2B5EF4-FFF2-40B4-BE49-F238E27FC236}">
-                <a16:creationId xmlns:a16="http://schemas.microsoft.com/office/drawing/2014/main" id="{CC2A33A1-C17A-BE38-8CD9-073BBDA4A65D}"/>
+                <a16:creationId xmlns:a16="http://schemas.microsoft.com/office/drawing/2014/main" id="{DE9B237B-E67D-A9E6-4411-EBAEFC693DE9}"/>
               </a:ext>
             </a:extLst>
           </p:cNvPr>
@@ -1462,7 +1464,7 @@
           <p:cNvPr id="7" name="Slide Number Placeholder 6">
             <a:extLst>
               <a:ext uri="{FF2B5EF4-FFF2-40B4-BE49-F238E27FC236}">
-                <a16:creationId xmlns:a16="http://schemas.microsoft.com/office/drawing/2014/main" id="{862919DC-2D11-3EAF-AC3D-30955D92C6DF}"/>
+                <a16:creationId xmlns:a16="http://schemas.microsoft.com/office/drawing/2014/main" id="{00A64262-A20E-6468-EA1D-27A13948CF5A}"/>
               </a:ext>
             </a:extLst>
           </p:cNvPr>
@@ -1478,7 +1480,7 @@
           <a:bodyPr/>
           <a:lstStyle/>
           <a:p>
-            <a:fld id="{0A635631-434B-460F-812D-B1531B39C8B0}" type="slidenum">
+            <a:fld id="{DEAFF70B-5DE2-4471-8296-B0BE239360DD}" type="slidenum">
               <a:rPr lang="en-AU" smtClean="0"/>
               <a:t>‹#›</a:t>
             </a:fld>
@@ -1489,7 +1491,7 @@
     </p:spTree>
     <p:extLst>
       <p:ext uri="{BB962C8B-B14F-4D97-AF65-F5344CB8AC3E}">
-        <p14:creationId xmlns:p14="http://schemas.microsoft.com/office/powerpoint/2010/main" val="1872761903"/>
+        <p14:creationId xmlns:p14="http://schemas.microsoft.com/office/powerpoint/2010/main" val="195757060"/>
       </p:ext>
     </p:extLst>
   </p:cSld>
@@ -1521,7 +1523,7 @@
           <p:cNvPr id="2" name="Title 1">
             <a:extLst>
               <a:ext uri="{FF2B5EF4-FFF2-40B4-BE49-F238E27FC236}">
-                <a16:creationId xmlns:a16="http://schemas.microsoft.com/office/drawing/2014/main" id="{5FC4346B-8520-7805-F583-47876AAA0103}"/>
+                <a16:creationId xmlns:a16="http://schemas.microsoft.com/office/drawing/2014/main" id="{CEE2D745-A3A5-D050-DC6A-E1508296CCB1}"/>
               </a:ext>
             </a:extLst>
           </p:cNvPr>
@@ -1555,7 +1557,7 @@
           <p:cNvPr id="3" name="Text Placeholder 2">
             <a:extLst>
               <a:ext uri="{FF2B5EF4-FFF2-40B4-BE49-F238E27FC236}">
-                <a16:creationId xmlns:a16="http://schemas.microsoft.com/office/drawing/2014/main" id="{9FAE6B56-C0C7-F9E3-6456-E3B118938778}"/>
+                <a16:creationId xmlns:a16="http://schemas.microsoft.com/office/drawing/2014/main" id="{850BCC43-7BE9-9F21-1E09-008BF3F03F8D}"/>
               </a:ext>
             </a:extLst>
           </p:cNvPr>
@@ -1626,7 +1628,7 @@
           <p:cNvPr id="4" name="Content Placeholder 3">
             <a:extLst>
               <a:ext uri="{FF2B5EF4-FFF2-40B4-BE49-F238E27FC236}">
-                <a16:creationId xmlns:a16="http://schemas.microsoft.com/office/drawing/2014/main" id="{CD3F6028-5ECD-3A67-F304-3DCBB08E6424}"/>
+                <a16:creationId xmlns:a16="http://schemas.microsoft.com/office/drawing/2014/main" id="{86C8AAE0-915B-8564-857A-15748DC8BC71}"/>
               </a:ext>
             </a:extLst>
           </p:cNvPr>
@@ -1689,7 +1691,7 @@
           <p:cNvPr id="5" name="Text Placeholder 4">
             <a:extLst>
               <a:ext uri="{FF2B5EF4-FFF2-40B4-BE49-F238E27FC236}">
-                <a16:creationId xmlns:a16="http://schemas.microsoft.com/office/drawing/2014/main" id="{5BBB2C2F-620B-85A2-5F30-E11B9307BD11}"/>
+                <a16:creationId xmlns:a16="http://schemas.microsoft.com/office/drawing/2014/main" id="{6B22CFFA-FA28-9033-75B6-55C1DBD818B2}"/>
               </a:ext>
             </a:extLst>
           </p:cNvPr>
@@ -1760,7 +1762,7 @@
           <p:cNvPr id="6" name="Content Placeholder 5">
             <a:extLst>
               <a:ext uri="{FF2B5EF4-FFF2-40B4-BE49-F238E27FC236}">
-                <a16:creationId xmlns:a16="http://schemas.microsoft.com/office/drawing/2014/main" id="{6C29B7FF-C284-F510-A7A8-5CD29D7DAADB}"/>
+                <a16:creationId xmlns:a16="http://schemas.microsoft.com/office/drawing/2014/main" id="{84E1D608-347A-1A12-ECFB-BFB87E122A30}"/>
               </a:ext>
             </a:extLst>
           </p:cNvPr>
@@ -1823,7 +1825,7 @@
           <p:cNvPr id="7" name="Date Placeholder 6">
             <a:extLst>
               <a:ext uri="{FF2B5EF4-FFF2-40B4-BE49-F238E27FC236}">
-                <a16:creationId xmlns:a16="http://schemas.microsoft.com/office/drawing/2014/main" id="{D8F6C9AF-3C5D-7CCE-A116-3C119CDFFC1A}"/>
+                <a16:creationId xmlns:a16="http://schemas.microsoft.com/office/drawing/2014/main" id="{69464242-E1D8-0594-ADCD-7350F3E939FF}"/>
               </a:ext>
             </a:extLst>
           </p:cNvPr>
@@ -1839,9 +1841,9 @@
           <a:bodyPr/>
           <a:lstStyle/>
           <a:p>
-            <a:fld id="{31DDE284-78A4-49CA-804C-6A9295C02157}" type="datetimeFigureOut">
+            <a:fld id="{965718B5-E111-48C2-9805-526994096C52}" type="datetimeFigureOut">
               <a:rPr lang="en-AU" smtClean="0"/>
-              <a:t>23/09/2026</a:t>
+              <a:t>8/10/2026</a:t>
             </a:fld>
             <a:endParaRPr lang="en-AU"/>
           </a:p>
@@ -1852,7 +1854,7 @@
           <p:cNvPr id="8" name="Footer Placeholder 7">
             <a:extLst>
               <a:ext uri="{FF2B5EF4-FFF2-40B4-BE49-F238E27FC236}">
-                <a16:creationId xmlns:a16="http://schemas.microsoft.com/office/drawing/2014/main" id="{7A7B9484-2F42-E356-8025-9E4C6094CFEA}"/>
+                <a16:creationId xmlns:a16="http://schemas.microsoft.com/office/drawing/2014/main" id="{BFC1597D-4B7E-0BFF-7DAA-0B1C4EDC86A5}"/>
               </a:ext>
             </a:extLst>
           </p:cNvPr>
@@ -1877,7 +1879,7 @@
           <p:cNvPr id="9" name="Slide Number Placeholder 8">
             <a:extLst>
               <a:ext uri="{FF2B5EF4-FFF2-40B4-BE49-F238E27FC236}">
-                <a16:creationId xmlns:a16="http://schemas.microsoft.com/office/drawing/2014/main" id="{F55E31AA-5BE3-3152-79B4-FC9BEFAE6E09}"/>
+                <a16:creationId xmlns:a16="http://schemas.microsoft.com/office/drawing/2014/main" id="{CF0BCE65-4A9A-EA39-D963-01D2E6B1AC95}"/>
               </a:ext>
             </a:extLst>
           </p:cNvPr>
@@ -1893,7 +1895,7 @@
           <a:bodyPr/>
           <a:lstStyle/>
           <a:p>
-            <a:fld id="{0A635631-434B-460F-812D-B1531B39C8B0}" type="slidenum">
+            <a:fld id="{DEAFF70B-5DE2-4471-8296-B0BE239360DD}" type="slidenum">
               <a:rPr lang="en-AU" smtClean="0"/>
               <a:t>‹#›</a:t>
             </a:fld>
@@ -1904,7 +1906,7 @@
     </p:spTree>
     <p:extLst>
       <p:ext uri="{BB962C8B-B14F-4D97-AF65-F5344CB8AC3E}">
-        <p14:creationId xmlns:p14="http://schemas.microsoft.com/office/powerpoint/2010/main" val="2187493322"/>
+        <p14:creationId xmlns:p14="http://schemas.microsoft.com/office/powerpoint/2010/main" val="578521613"/>
       </p:ext>
     </p:extLst>
   </p:cSld>
@@ -1936,7 +1938,7 @@
           <p:cNvPr id="2" name="Title 1">
             <a:extLst>
               <a:ext uri="{FF2B5EF4-FFF2-40B4-BE49-F238E27FC236}">
-                <a16:creationId xmlns:a16="http://schemas.microsoft.com/office/drawing/2014/main" id="{DEF61E75-D9CF-FF3B-65A2-074E422DE914}"/>
+                <a16:creationId xmlns:a16="http://schemas.microsoft.com/office/drawing/2014/main" id="{634B6A78-FBFC-3964-97E1-B6C81312667C}"/>
               </a:ext>
             </a:extLst>
           </p:cNvPr>
@@ -1965,7 +1967,7 @@
           <p:cNvPr id="3" name="Date Placeholder 2">
             <a:extLst>
               <a:ext uri="{FF2B5EF4-FFF2-40B4-BE49-F238E27FC236}">
-                <a16:creationId xmlns:a16="http://schemas.microsoft.com/office/drawing/2014/main" id="{7302ED5C-AB93-C4A3-3260-A7A7B1ABF973}"/>
+                <a16:creationId xmlns:a16="http://schemas.microsoft.com/office/drawing/2014/main" id="{64918EC0-B444-1B5F-67C1-08A1887DB43B}"/>
               </a:ext>
             </a:extLst>
           </p:cNvPr>
@@ -1981,9 +1983,9 @@
           <a:bodyPr/>
           <a:lstStyle/>
           <a:p>
-            <a:fld id="{31DDE284-78A4-49CA-804C-6A9295C02157}" type="datetimeFigureOut">
+            <a:fld id="{965718B5-E111-48C2-9805-526994096C52}" type="datetimeFigureOut">
               <a:rPr lang="en-AU" smtClean="0"/>
-              <a:t>23/09/2026</a:t>
+              <a:t>8/10/2026</a:t>
             </a:fld>
             <a:endParaRPr lang="en-AU"/>
           </a:p>
@@ -1994,7 +1996,7 @@
           <p:cNvPr id="4" name="Footer Placeholder 3">
             <a:extLst>
               <a:ext uri="{FF2B5EF4-FFF2-40B4-BE49-F238E27FC236}">
-                <a16:creationId xmlns:a16="http://schemas.microsoft.com/office/drawing/2014/main" id="{4751B8F7-7BB5-3BF3-2BB8-659AC232648A}"/>
+                <a16:creationId xmlns:a16="http://schemas.microsoft.com/office/drawing/2014/main" id="{ACE51512-D938-C2C5-5D49-4A1D39DDA8CB}"/>
               </a:ext>
             </a:extLst>
           </p:cNvPr>
@@ -2019,7 +2021,7 @@
           <p:cNvPr id="5" name="Slide Number Placeholder 4">
             <a:extLst>
               <a:ext uri="{FF2B5EF4-FFF2-40B4-BE49-F238E27FC236}">
-                <a16:creationId xmlns:a16="http://schemas.microsoft.com/office/drawing/2014/main" id="{A5C07EB8-ECF2-5914-500A-A6CEE80DFA8E}"/>
+                <a16:creationId xmlns:a16="http://schemas.microsoft.com/office/drawing/2014/main" id="{A71954BA-1F79-ED3D-9DE0-692D782255B9}"/>
               </a:ext>
             </a:extLst>
           </p:cNvPr>
@@ -2035,7 +2037,7 @@
           <a:bodyPr/>
           <a:lstStyle/>
           <a:p>
-            <a:fld id="{0A635631-434B-460F-812D-B1531B39C8B0}" type="slidenum">
+            <a:fld id="{DEAFF70B-5DE2-4471-8296-B0BE239360DD}" type="slidenum">
               <a:rPr lang="en-AU" smtClean="0"/>
               <a:t>‹#›</a:t>
             </a:fld>
@@ -2046,7 +2048,7 @@
     </p:spTree>
     <p:extLst>
       <p:ext uri="{BB962C8B-B14F-4D97-AF65-F5344CB8AC3E}">
-        <p14:creationId xmlns:p14="http://schemas.microsoft.com/office/powerpoint/2010/main" val="3890874400"/>
+        <p14:creationId xmlns:p14="http://schemas.microsoft.com/office/powerpoint/2010/main" val="1362610076"/>
       </p:ext>
     </p:extLst>
   </p:cSld>
@@ -2078,7 +2080,7 @@
           <p:cNvPr id="2" name="Date Placeholder 1">
             <a:extLst>
               <a:ext uri="{FF2B5EF4-FFF2-40B4-BE49-F238E27FC236}">
-                <a16:creationId xmlns:a16="http://schemas.microsoft.com/office/drawing/2014/main" id="{8B8EA94C-D041-13EF-0666-F5FB5A7BF4C4}"/>
+                <a16:creationId xmlns:a16="http://schemas.microsoft.com/office/drawing/2014/main" id="{C2C1E429-6087-A270-ABEA-013EC93EA538}"/>
               </a:ext>
             </a:extLst>
           </p:cNvPr>
@@ -2094,9 +2096,9 @@
           <a:bodyPr/>
           <a:lstStyle/>
           <a:p>
-            <a:fld id="{31DDE284-78A4-49CA-804C-6A9295C02157}" type="datetimeFigureOut">
+            <a:fld id="{965718B5-E111-48C2-9805-526994096C52}" type="datetimeFigureOut">
               <a:rPr lang="en-AU" smtClean="0"/>
-              <a:t>23/09/2026</a:t>
+              <a:t>8/10/2026</a:t>
             </a:fld>
             <a:endParaRPr lang="en-AU"/>
           </a:p>
@@ -2107,7 +2109,7 @@
           <p:cNvPr id="3" name="Footer Placeholder 2">
             <a:extLst>
               <a:ext uri="{FF2B5EF4-FFF2-40B4-BE49-F238E27FC236}">
-                <a16:creationId xmlns:a16="http://schemas.microsoft.com/office/drawing/2014/main" id="{02C79C94-40F6-7815-1F86-41F3BF03D371}"/>
+                <a16:creationId xmlns:a16="http://schemas.microsoft.com/office/drawing/2014/main" id="{3D4A65D8-C57D-DC0F-2B45-3D3F7879FCA3}"/>
               </a:ext>
             </a:extLst>
           </p:cNvPr>
@@ -2132,7 +2134,7 @@
           <p:cNvPr id="4" name="Slide Number Placeholder 3">
             <a:extLst>
               <a:ext uri="{FF2B5EF4-FFF2-40B4-BE49-F238E27FC236}">
-                <a16:creationId xmlns:a16="http://schemas.microsoft.com/office/drawing/2014/main" id="{91079046-BAB4-FEE7-1891-63EE04F3B71A}"/>
+                <a16:creationId xmlns:a16="http://schemas.microsoft.com/office/drawing/2014/main" id="{434D6AE3-9027-74A4-419D-E716BB4D214F}"/>
               </a:ext>
             </a:extLst>
           </p:cNvPr>
@@ -2148,7 +2150,7 @@
           <a:bodyPr/>
           <a:lstStyle/>
           <a:p>
-            <a:fld id="{0A635631-434B-460F-812D-B1531B39C8B0}" type="slidenum">
+            <a:fld id="{DEAFF70B-5DE2-4471-8296-B0BE239360DD}" type="slidenum">
               <a:rPr lang="en-AU" smtClean="0"/>
               <a:t>‹#›</a:t>
             </a:fld>
@@ -2159,7 +2161,7 @@
     </p:spTree>
     <p:extLst>
       <p:ext uri="{BB962C8B-B14F-4D97-AF65-F5344CB8AC3E}">
-        <p14:creationId xmlns:p14="http://schemas.microsoft.com/office/powerpoint/2010/main" val="354210299"/>
+        <p14:creationId xmlns:p14="http://schemas.microsoft.com/office/powerpoint/2010/main" val="3896724605"/>
       </p:ext>
     </p:extLst>
   </p:cSld>
@@ -2191,7 +2193,7 @@
           <p:cNvPr id="2" name="Title 1">
             <a:extLst>
               <a:ext uri="{FF2B5EF4-FFF2-40B4-BE49-F238E27FC236}">
-                <a16:creationId xmlns:a16="http://schemas.microsoft.com/office/drawing/2014/main" id="{4A68D8F1-8858-E827-2459-E57D1F1AB347}"/>
+                <a16:creationId xmlns:a16="http://schemas.microsoft.com/office/drawing/2014/main" id="{237ECB78-E052-BC2F-4929-94451D35A976}"/>
               </a:ext>
             </a:extLst>
           </p:cNvPr>
@@ -2229,7 +2231,7 @@
           <p:cNvPr id="3" name="Content Placeholder 2">
             <a:extLst>
               <a:ext uri="{FF2B5EF4-FFF2-40B4-BE49-F238E27FC236}">
-                <a16:creationId xmlns:a16="http://schemas.microsoft.com/office/drawing/2014/main" id="{88A43DD9-96C0-FD37-BF77-5D56B27DCD97}"/>
+                <a16:creationId xmlns:a16="http://schemas.microsoft.com/office/drawing/2014/main" id="{65EAA6AE-BA5A-6E7A-9DBD-6B9FF15705BC}"/>
               </a:ext>
             </a:extLst>
           </p:cNvPr>
@@ -2320,7 +2322,7 @@
           <p:cNvPr id="4" name="Text Placeholder 3">
             <a:extLst>
               <a:ext uri="{FF2B5EF4-FFF2-40B4-BE49-F238E27FC236}">
-                <a16:creationId xmlns:a16="http://schemas.microsoft.com/office/drawing/2014/main" id="{3A352D90-96F9-D45D-B47C-33943045823E}"/>
+                <a16:creationId xmlns:a16="http://schemas.microsoft.com/office/drawing/2014/main" id="{3589FD72-93C4-C2B3-1B82-CA4F36CD56D8}"/>
               </a:ext>
             </a:extLst>
           </p:cNvPr>
@@ -2391,7 +2393,7 @@
           <p:cNvPr id="5" name="Date Placeholder 4">
             <a:extLst>
               <a:ext uri="{FF2B5EF4-FFF2-40B4-BE49-F238E27FC236}">
-                <a16:creationId xmlns:a16="http://schemas.microsoft.com/office/drawing/2014/main" id="{ADE5E768-8C87-C8DB-83DC-9EEFCFF0DAE6}"/>
+                <a16:creationId xmlns:a16="http://schemas.microsoft.com/office/drawing/2014/main" id="{BFEEA89F-871B-F4D8-DF44-52F604479E20}"/>
               </a:ext>
             </a:extLst>
           </p:cNvPr>
@@ -2407,9 +2409,9 @@
           <a:bodyPr/>
           <a:lstStyle/>
           <a:p>
-            <a:fld id="{31DDE284-78A4-49CA-804C-6A9295C02157}" type="datetimeFigureOut">
+            <a:fld id="{965718B5-E111-48C2-9805-526994096C52}" type="datetimeFigureOut">
               <a:rPr lang="en-AU" smtClean="0"/>
-              <a:t>23/09/2026</a:t>
+              <a:t>8/10/2026</a:t>
             </a:fld>
             <a:endParaRPr lang="en-AU"/>
           </a:p>
@@ -2420,7 +2422,7 @@
           <p:cNvPr id="6" name="Footer Placeholder 5">
             <a:extLst>
               <a:ext uri="{FF2B5EF4-FFF2-40B4-BE49-F238E27FC236}">
-                <a16:creationId xmlns:a16="http://schemas.microsoft.com/office/drawing/2014/main" id="{3B15AB34-15C0-FD51-C9B5-DDAADF14CB15}"/>
+                <a16:creationId xmlns:a16="http://schemas.microsoft.com/office/drawing/2014/main" id="{1D8F771C-51A9-2779-4E0A-D5EDE3CE7B0F}"/>
               </a:ext>
             </a:extLst>
           </p:cNvPr>
@@ -2445,7 +2447,7 @@
           <p:cNvPr id="7" name="Slide Number Placeholder 6">
             <a:extLst>
               <a:ext uri="{FF2B5EF4-FFF2-40B4-BE49-F238E27FC236}">
-                <a16:creationId xmlns:a16="http://schemas.microsoft.com/office/drawing/2014/main" id="{19136DA1-8D3C-9773-CB9A-80279814C437}"/>
+                <a16:creationId xmlns:a16="http://schemas.microsoft.com/office/drawing/2014/main" id="{D633A494-B710-8474-CD6A-9679751CE270}"/>
               </a:ext>
             </a:extLst>
           </p:cNvPr>
@@ -2461,7 +2463,7 @@
           <a:bodyPr/>
           <a:lstStyle/>
           <a:p>
-            <a:fld id="{0A635631-434B-460F-812D-B1531B39C8B0}" type="slidenum">
+            <a:fld id="{DEAFF70B-5DE2-4471-8296-B0BE239360DD}" type="slidenum">
               <a:rPr lang="en-AU" smtClean="0"/>
               <a:t>‹#›</a:t>
             </a:fld>
@@ -2472,7 +2474,7 @@
     </p:spTree>
     <p:extLst>
       <p:ext uri="{BB962C8B-B14F-4D97-AF65-F5344CB8AC3E}">
-        <p14:creationId xmlns:p14="http://schemas.microsoft.com/office/powerpoint/2010/main" val="2235984444"/>
+        <p14:creationId xmlns:p14="http://schemas.microsoft.com/office/powerpoint/2010/main" val="3883296200"/>
       </p:ext>
     </p:extLst>
   </p:cSld>
@@ -2504,7 +2506,7 @@
           <p:cNvPr id="2" name="Title 1">
             <a:extLst>
               <a:ext uri="{FF2B5EF4-FFF2-40B4-BE49-F238E27FC236}">
-                <a16:creationId xmlns:a16="http://schemas.microsoft.com/office/drawing/2014/main" id="{5708E02F-8825-959E-63FB-EDAC917FB000}"/>
+                <a16:creationId xmlns:a16="http://schemas.microsoft.com/office/drawing/2014/main" id="{EFC8CC3C-A4AB-06C9-EFA0-231A88B8262E}"/>
               </a:ext>
             </a:extLst>
           </p:cNvPr>
@@ -2542,12 +2544,12 @@
           <p:cNvPr id="3" name="Picture Placeholder 2">
             <a:extLst>
               <a:ext uri="{FF2B5EF4-FFF2-40B4-BE49-F238E27FC236}">
-                <a16:creationId xmlns:a16="http://schemas.microsoft.com/office/drawing/2014/main" id="{498E6474-FD4B-B26C-5508-02561E938A4B}"/>
+                <a16:creationId xmlns:a16="http://schemas.microsoft.com/office/drawing/2014/main" id="{ACD6592D-97C1-114D-A31E-93D954351B3D}"/>
               </a:ext>
             </a:extLst>
           </p:cNvPr>
           <p:cNvSpPr>
-            <a:spLocks noGrp="1"/>
+            <a:spLocks noGrp="1" noChangeAspect="1"/>
           </p:cNvSpPr>
           <p:nvPr>
             <p:ph type="pic" idx="1"/>
@@ -2609,7 +2611,7 @@
           <p:cNvPr id="4" name="Text Placeholder 3">
             <a:extLst>
               <a:ext uri="{FF2B5EF4-FFF2-40B4-BE49-F238E27FC236}">
-                <a16:creationId xmlns:a16="http://schemas.microsoft.com/office/drawing/2014/main" id="{321DA39B-0CD0-7586-78E1-7D6E345E5705}"/>
+                <a16:creationId xmlns:a16="http://schemas.microsoft.com/office/drawing/2014/main" id="{C388FA7B-E046-157C-A07E-B0CC1029B15D}"/>
               </a:ext>
             </a:extLst>
           </p:cNvPr>
@@ -2680,7 +2682,7 @@
           <p:cNvPr id="5" name="Date Placeholder 4">
             <a:extLst>
               <a:ext uri="{FF2B5EF4-FFF2-40B4-BE49-F238E27FC236}">
-                <a16:creationId xmlns:a16="http://schemas.microsoft.com/office/drawing/2014/main" id="{401A7480-7C6B-26F4-5F32-AF49385681F9}"/>
+                <a16:creationId xmlns:a16="http://schemas.microsoft.com/office/drawing/2014/main" id="{D84384C2-A0E5-D162-A2F1-5E2D2C50BDB5}"/>
               </a:ext>
             </a:extLst>
           </p:cNvPr>
@@ -2696,9 +2698,9 @@
           <a:bodyPr/>
           <a:lstStyle/>
           <a:p>
-            <a:fld id="{31DDE284-78A4-49CA-804C-6A9295C02157}" type="datetimeFigureOut">
+            <a:fld id="{965718B5-E111-48C2-9805-526994096C52}" type="datetimeFigureOut">
               <a:rPr lang="en-AU" smtClean="0"/>
-              <a:t>23/09/2026</a:t>
+              <a:t>8/10/2026</a:t>
             </a:fld>
             <a:endParaRPr lang="en-AU"/>
           </a:p>
@@ -2709,7 +2711,7 @@
           <p:cNvPr id="6" name="Footer Placeholder 5">
             <a:extLst>
               <a:ext uri="{FF2B5EF4-FFF2-40B4-BE49-F238E27FC236}">
-                <a16:creationId xmlns:a16="http://schemas.microsoft.com/office/drawing/2014/main" id="{EA8CD120-B71A-D58F-AD4F-55E69EE1BFD7}"/>
+                <a16:creationId xmlns:a16="http://schemas.microsoft.com/office/drawing/2014/main" id="{0D1EA3DD-2AB2-1856-4EFE-FEEBAF010D8B}"/>
               </a:ext>
             </a:extLst>
           </p:cNvPr>
@@ -2734,7 +2736,7 @@
           <p:cNvPr id="7" name="Slide Number Placeholder 6">
             <a:extLst>
               <a:ext uri="{FF2B5EF4-FFF2-40B4-BE49-F238E27FC236}">
-                <a16:creationId xmlns:a16="http://schemas.microsoft.com/office/drawing/2014/main" id="{70F6C459-8EBD-2094-B9D0-5DCDEBCB59FD}"/>
+                <a16:creationId xmlns:a16="http://schemas.microsoft.com/office/drawing/2014/main" id="{DEA11A1E-D368-6D5E-1268-FB1FAABCFAB8}"/>
               </a:ext>
             </a:extLst>
           </p:cNvPr>
@@ -2750,7 +2752,7 @@
           <a:bodyPr/>
           <a:lstStyle/>
           <a:p>
-            <a:fld id="{0A635631-434B-460F-812D-B1531B39C8B0}" type="slidenum">
+            <a:fld id="{DEAFF70B-5DE2-4471-8296-B0BE239360DD}" type="slidenum">
               <a:rPr lang="en-AU" smtClean="0"/>
               <a:t>‹#›</a:t>
             </a:fld>
@@ -2761,7 +2763,7 @@
     </p:spTree>
     <p:extLst>
       <p:ext uri="{BB962C8B-B14F-4D97-AF65-F5344CB8AC3E}">
-        <p14:creationId xmlns:p14="http://schemas.microsoft.com/office/powerpoint/2010/main" val="561303914"/>
+        <p14:creationId xmlns:p14="http://schemas.microsoft.com/office/powerpoint/2010/main" val="2476233865"/>
       </p:ext>
     </p:extLst>
   </p:cSld>
@@ -2798,7 +2800,7 @@
           <p:cNvPr id="2" name="Title Placeholder 1">
             <a:extLst>
               <a:ext uri="{FF2B5EF4-FFF2-40B4-BE49-F238E27FC236}">
-                <a16:creationId xmlns:a16="http://schemas.microsoft.com/office/drawing/2014/main" id="{D972C24E-4E07-5AEC-1BAA-1AF0208EFEE5}"/>
+                <a16:creationId xmlns:a16="http://schemas.microsoft.com/office/drawing/2014/main" id="{7AB07ACF-8707-D354-791C-15E08C6F817E}"/>
               </a:ext>
             </a:extLst>
           </p:cNvPr>
@@ -2837,7 +2839,7 @@
           <p:cNvPr id="3" name="Text Placeholder 2">
             <a:extLst>
               <a:ext uri="{FF2B5EF4-FFF2-40B4-BE49-F238E27FC236}">
-                <a16:creationId xmlns:a16="http://schemas.microsoft.com/office/drawing/2014/main" id="{DCA7F556-2718-677A-C8B8-A3869569945A}"/>
+                <a16:creationId xmlns:a16="http://schemas.microsoft.com/office/drawing/2014/main" id="{82ED82DA-3363-A18B-6C4B-C35BFE8E25BF}"/>
               </a:ext>
             </a:extLst>
           </p:cNvPr>
@@ -2905,7 +2907,7 @@
           <p:cNvPr id="4" name="Date Placeholder 3">
             <a:extLst>
               <a:ext uri="{FF2B5EF4-FFF2-40B4-BE49-F238E27FC236}">
-                <a16:creationId xmlns:a16="http://schemas.microsoft.com/office/drawing/2014/main" id="{489C3F45-84D9-B81D-24A3-DB6A5AE55169}"/>
+                <a16:creationId xmlns:a16="http://schemas.microsoft.com/office/drawing/2014/main" id="{FC0E2CAE-2C50-D000-1FC9-A8C997D50D13}"/>
               </a:ext>
             </a:extLst>
           </p:cNvPr>
@@ -2939,9 +2941,9 @@
             </a:lvl1pPr>
           </a:lstStyle>
           <a:p>
-            <a:fld id="{31DDE284-78A4-49CA-804C-6A9295C02157}" type="datetimeFigureOut">
+            <a:fld id="{965718B5-E111-48C2-9805-526994096C52}" type="datetimeFigureOut">
               <a:rPr lang="en-AU" smtClean="0"/>
-              <a:t>23/09/2026</a:t>
+              <a:t>8/10/2026</a:t>
             </a:fld>
             <a:endParaRPr lang="en-AU"/>
           </a:p>
@@ -2952,7 +2954,7 @@
           <p:cNvPr id="5" name="Footer Placeholder 4">
             <a:extLst>
               <a:ext uri="{FF2B5EF4-FFF2-40B4-BE49-F238E27FC236}">
-                <a16:creationId xmlns:a16="http://schemas.microsoft.com/office/drawing/2014/main" id="{248A2E20-E2AE-46DA-50EE-2205A3C32009}"/>
+                <a16:creationId xmlns:a16="http://schemas.microsoft.com/office/drawing/2014/main" id="{B8FC2841-D29D-F3DB-C7A5-98AD5640255E}"/>
               </a:ext>
             </a:extLst>
           </p:cNvPr>
@@ -2995,7 +2997,7 @@
           <p:cNvPr id="6" name="Slide Number Placeholder 5">
             <a:extLst>
               <a:ext uri="{FF2B5EF4-FFF2-40B4-BE49-F238E27FC236}">
-                <a16:creationId xmlns:a16="http://schemas.microsoft.com/office/drawing/2014/main" id="{441D0795-2B7D-1971-B894-C0E24F42F8CA}"/>
+                <a16:creationId xmlns:a16="http://schemas.microsoft.com/office/drawing/2014/main" id="{9F0C0663-809C-60AD-BE4E-FD1C93E18562}"/>
               </a:ext>
             </a:extLst>
           </p:cNvPr>
@@ -3029,7 +3031,7 @@
             </a:lvl1pPr>
           </a:lstStyle>
           <a:p>
-            <a:fld id="{0A635631-434B-460F-812D-B1531B39C8B0}" type="slidenum">
+            <a:fld id="{DEAFF70B-5DE2-4471-8296-B0BE239360DD}" type="slidenum">
               <a:rPr lang="en-AU" smtClean="0"/>
               <a:t>‹#›</a:t>
             </a:fld>
@@ -3040,7 +3042,7 @@
     </p:spTree>
     <p:extLst>
       <p:ext uri="{BB962C8B-B14F-4D97-AF65-F5344CB8AC3E}">
-        <p14:creationId xmlns:p14="http://schemas.microsoft.com/office/powerpoint/2010/main" val="3099906517"/>
+        <p14:creationId xmlns:p14="http://schemas.microsoft.com/office/powerpoint/2010/main" val="860406752"/>
       </p:ext>
     </p:extLst>
   </p:cSld>
@@ -3363,7 +3365,7 @@
           <p:cNvPr id="2" name="Heading">
             <a:extLst>
               <a:ext uri="{FF2B5EF4-FFF2-40B4-BE49-F238E27FC236}">
-                <a16:creationId xmlns:a16="http://schemas.microsoft.com/office/drawing/2014/main" id="{F7A1C717-B700-BC40-8403-100BA89053D2}"/>
+                <a16:creationId xmlns:a16="http://schemas.microsoft.com/office/drawing/2014/main" id="{E52669BD-698A-BE79-7EE5-5B360BE848C5}"/>
               </a:ext>
             </a:extLst>
           </p:cNvPr>
@@ -3402,7 +3404,7 @@
           <p:cNvPr id="3" name="Instructions">
             <a:extLst>
               <a:ext uri="{FF2B5EF4-FFF2-40B4-BE49-F238E27FC236}">
-                <a16:creationId xmlns:a16="http://schemas.microsoft.com/office/drawing/2014/main" id="{18E8C144-20C3-36AC-73B1-51B5DB299C19}"/>
+                <a16:creationId xmlns:a16="http://schemas.microsoft.com/office/drawing/2014/main" id="{6215F4AF-6E06-144B-E3DC-FB87EB17D5A5}"/>
               </a:ext>
             </a:extLst>
           </p:cNvPr>
@@ -3441,7 +3443,7 @@
           <p:cNvPr id="4" name="TextBox 3">
             <a:extLst>
               <a:ext uri="{FF2B5EF4-FFF2-40B4-BE49-F238E27FC236}">
-                <a16:creationId xmlns:a16="http://schemas.microsoft.com/office/drawing/2014/main" id="{C914EE38-21A5-FDE2-B7AC-C66CE5FFA9B0}"/>
+                <a16:creationId xmlns:a16="http://schemas.microsoft.com/office/drawing/2014/main" id="{89A314FE-173E-B977-1AB2-A07EE7D81CAF}"/>
               </a:ext>
             </a:extLst>
           </p:cNvPr>
@@ -3487,7 +3489,7 @@
     </p:spTree>
     <p:extLst>
       <p:ext uri="{BB962C8B-B14F-4D97-AF65-F5344CB8AC3E}">
-        <p14:creationId xmlns:p14="http://schemas.microsoft.com/office/powerpoint/2010/main" val="3546679244"/>
+        <p14:creationId xmlns:p14="http://schemas.microsoft.com/office/powerpoint/2010/main" val="3475171839"/>
       </p:ext>
     </p:extLst>
   </p:cSld>
@@ -3519,7 +3521,7 @@
           <p:cNvPr id="2" name="Heading">
             <a:extLst>
               <a:ext uri="{FF2B5EF4-FFF2-40B4-BE49-F238E27FC236}">
-                <a16:creationId xmlns:a16="http://schemas.microsoft.com/office/drawing/2014/main" id="{4B046990-6147-F86D-DCC4-FDDB1FC6E154}"/>
+                <a16:creationId xmlns:a16="http://schemas.microsoft.com/office/drawing/2014/main" id="{303CF412-B77A-E875-1A5B-0E6E86C0CF05}"/>
               </a:ext>
             </a:extLst>
           </p:cNvPr>
@@ -3558,7 +3560,7 @@
           <p:cNvPr id="3" name="Instructions">
             <a:extLst>
               <a:ext uri="{FF2B5EF4-FFF2-40B4-BE49-F238E27FC236}">
-                <a16:creationId xmlns:a16="http://schemas.microsoft.com/office/drawing/2014/main" id="{A2ECAFD9-9521-BABE-D926-0B1AC09BBB12}"/>
+                <a16:creationId xmlns:a16="http://schemas.microsoft.com/office/drawing/2014/main" id="{48C829BB-B86F-287D-FDEA-508CCD6E8757}"/>
               </a:ext>
             </a:extLst>
           </p:cNvPr>
@@ -3597,7 +3599,7 @@
           <p:cNvPr id="4" name="Grow1">
             <a:extLst>
               <a:ext uri="{FF2B5EF4-FFF2-40B4-BE49-F238E27FC236}">
-                <a16:creationId xmlns:a16="http://schemas.microsoft.com/office/drawing/2014/main" id="{CC95CC7B-8BD7-82E7-3153-26B37302E7F2}"/>
+                <a16:creationId xmlns:a16="http://schemas.microsoft.com/office/drawing/2014/main" id="{135AEEEC-FFA4-C7E6-EFF4-BAA66A03C745}"/>
               </a:ext>
             </a:extLst>
           </p:cNvPr>
@@ -3672,7 +3674,7 @@
           <p:cNvPr id="5" name="Grow2">
             <a:extLst>
               <a:ext uri="{FF2B5EF4-FFF2-40B4-BE49-F238E27FC236}">
-                <a16:creationId xmlns:a16="http://schemas.microsoft.com/office/drawing/2014/main" id="{6A0C8852-48A4-F234-7975-B8A05722C42D}"/>
+                <a16:creationId xmlns:a16="http://schemas.microsoft.com/office/drawing/2014/main" id="{A6A20430-1CC8-C268-DBC8-D7028D0D7ED9}"/>
               </a:ext>
             </a:extLst>
           </p:cNvPr>
@@ -3747,7 +3749,7 @@
           <p:cNvPr id="6" name="Grow3">
             <a:extLst>
               <a:ext uri="{FF2B5EF4-FFF2-40B4-BE49-F238E27FC236}">
-                <a16:creationId xmlns:a16="http://schemas.microsoft.com/office/drawing/2014/main" id="{84FBA0C3-48B8-662D-A847-F3B7AEAD9ABD}"/>
+                <a16:creationId xmlns:a16="http://schemas.microsoft.com/office/drawing/2014/main" id="{539BA575-BA18-9B57-7C3E-13BEABB0CBFA}"/>
               </a:ext>
             </a:extLst>
           </p:cNvPr>
@@ -3822,7 +3824,7 @@
           <p:cNvPr id="7" name="Core">
             <a:extLst>
               <a:ext uri="{FF2B5EF4-FFF2-40B4-BE49-F238E27FC236}">
-                <a16:creationId xmlns:a16="http://schemas.microsoft.com/office/drawing/2014/main" id="{F08B86A5-916B-74D7-063A-5F2DD401D2F3}"/>
+                <a16:creationId xmlns:a16="http://schemas.microsoft.com/office/drawing/2014/main" id="{6D32E7FF-0EAF-1CD5-4CBF-A4AE2790CAB7}"/>
               </a:ext>
             </a:extLst>
           </p:cNvPr>
@@ -3897,7 +3899,7 @@
           <p:cNvPr id="8" name="TextBox 7">
             <a:extLst>
               <a:ext uri="{FF2B5EF4-FFF2-40B4-BE49-F238E27FC236}">
-                <a16:creationId xmlns:a16="http://schemas.microsoft.com/office/drawing/2014/main" id="{718D8530-6EA1-7814-37F6-E99389FF87E5}"/>
+                <a16:creationId xmlns:a16="http://schemas.microsoft.com/office/drawing/2014/main" id="{C7FD5EB3-757D-6054-D22A-EBAEEDC06E72}"/>
               </a:ext>
             </a:extLst>
           </p:cNvPr>
@@ -3934,7 +3936,7 @@
     </p:spTree>
     <p:extLst>
       <p:ext uri="{BB962C8B-B14F-4D97-AF65-F5344CB8AC3E}">
-        <p14:creationId xmlns:p14="http://schemas.microsoft.com/office/powerpoint/2010/main" val="2756119967"/>
+        <p14:creationId xmlns:p14="http://schemas.microsoft.com/office/powerpoint/2010/main" val="2025618359"/>
       </p:ext>
     </p:extLst>
   </p:cSld>
@@ -3966,7 +3968,7 @@
           <p:cNvPr id="2" name="Heading">
             <a:extLst>
               <a:ext uri="{FF2B5EF4-FFF2-40B4-BE49-F238E27FC236}">
-                <a16:creationId xmlns:a16="http://schemas.microsoft.com/office/drawing/2014/main" id="{8D5A9923-9525-28B2-F4A6-6C0208682769}"/>
+                <a16:creationId xmlns:a16="http://schemas.microsoft.com/office/drawing/2014/main" id="{9423F232-719F-5EBA-2340-EEEF91A98FD5}"/>
               </a:ext>
             </a:extLst>
           </p:cNvPr>
@@ -4005,7 +4007,7 @@
           <p:cNvPr id="3" name="Instructions">
             <a:extLst>
               <a:ext uri="{FF2B5EF4-FFF2-40B4-BE49-F238E27FC236}">
-                <a16:creationId xmlns:a16="http://schemas.microsoft.com/office/drawing/2014/main" id="{B600DD0F-4D79-8356-74C3-67309DBBDB11}"/>
+                <a16:creationId xmlns:a16="http://schemas.microsoft.com/office/drawing/2014/main" id="{423AED12-0E64-B2A8-B154-777975D7DFD7}"/>
               </a:ext>
             </a:extLst>
           </p:cNvPr>
@@ -4044,7 +4046,7 @@
           <p:cNvPr id="7" name="TheGroup">
             <a:extLst>
               <a:ext uri="{FF2B5EF4-FFF2-40B4-BE49-F238E27FC236}">
-                <a16:creationId xmlns:a16="http://schemas.microsoft.com/office/drawing/2014/main" id="{BACD3F8F-0F46-167A-B8ED-57F296CA5F62}"/>
+                <a16:creationId xmlns:a16="http://schemas.microsoft.com/office/drawing/2014/main" id="{77030700-A1D7-4949-4006-C2B9062C72D6}"/>
               </a:ext>
             </a:extLst>
           </p:cNvPr>
@@ -4064,7 +4066,7 @@
             <p:cNvPr id="4" name="G1">
               <a:extLst>
                 <a:ext uri="{FF2B5EF4-FFF2-40B4-BE49-F238E27FC236}">
-                  <a16:creationId xmlns:a16="http://schemas.microsoft.com/office/drawing/2014/main" id="{A4260E1E-B439-4679-DC74-E8FAF75953FE}"/>
+                  <a16:creationId xmlns:a16="http://schemas.microsoft.com/office/drawing/2014/main" id="{A98F00CB-04F0-E234-DC61-005DA0049635}"/>
                 </a:ext>
               </a:extLst>
             </p:cNvPr>
@@ -4139,7 +4141,7 @@
             <p:cNvPr id="5" name="G2">
               <a:extLst>
                 <a:ext uri="{FF2B5EF4-FFF2-40B4-BE49-F238E27FC236}">
-                  <a16:creationId xmlns:a16="http://schemas.microsoft.com/office/drawing/2014/main" id="{091087E4-1986-3C28-F97D-F8A2C8C4380B}"/>
+                  <a16:creationId xmlns:a16="http://schemas.microsoft.com/office/drawing/2014/main" id="{8089E7B2-C7DA-9421-B8D4-E609DD18CF22}"/>
                 </a:ext>
               </a:extLst>
             </p:cNvPr>
@@ -4214,7 +4216,7 @@
             <p:cNvPr id="6" name="G3">
               <a:extLst>
                 <a:ext uri="{FF2B5EF4-FFF2-40B4-BE49-F238E27FC236}">
-                  <a16:creationId xmlns:a16="http://schemas.microsoft.com/office/drawing/2014/main" id="{CAD32015-8A63-0943-84EC-07AA50581029}"/>
+                  <a16:creationId xmlns:a16="http://schemas.microsoft.com/office/drawing/2014/main" id="{E852B890-0AEB-C706-6282-3E3C991B0132}"/>
                 </a:ext>
               </a:extLst>
             </p:cNvPr>
@@ -4290,7 +4292,7 @@
           <p:cNvPr id="8" name="Loose1">
             <a:extLst>
               <a:ext uri="{FF2B5EF4-FFF2-40B4-BE49-F238E27FC236}">
-                <a16:creationId xmlns:a16="http://schemas.microsoft.com/office/drawing/2014/main" id="{8F1647AE-596E-7226-7B32-7A4031D30C34}"/>
+                <a16:creationId xmlns:a16="http://schemas.microsoft.com/office/drawing/2014/main" id="{5E15B04E-011F-4CC7-B95D-15EDD6C23B3B}"/>
               </a:ext>
             </a:extLst>
           </p:cNvPr>
@@ -4365,7 +4367,7 @@
           <p:cNvPr id="9" name="Loose2">
             <a:extLst>
               <a:ext uri="{FF2B5EF4-FFF2-40B4-BE49-F238E27FC236}">
-                <a16:creationId xmlns:a16="http://schemas.microsoft.com/office/drawing/2014/main" id="{71A195A6-0764-EA95-6CFD-A4315B9C738A}"/>
+                <a16:creationId xmlns:a16="http://schemas.microsoft.com/office/drawing/2014/main" id="{F5B3F2EA-8580-7A01-14A6-E868C3344DFB}"/>
               </a:ext>
             </a:extLst>
           </p:cNvPr>
@@ -4440,7 +4442,7 @@
           <p:cNvPr id="10" name="TextBox 9">
             <a:extLst>
               <a:ext uri="{FF2B5EF4-FFF2-40B4-BE49-F238E27FC236}">
-                <a16:creationId xmlns:a16="http://schemas.microsoft.com/office/drawing/2014/main" id="{482FFCD1-E64C-079D-D3AC-EF34AF401D48}"/>
+                <a16:creationId xmlns:a16="http://schemas.microsoft.com/office/drawing/2014/main" id="{1253E678-A0A5-BD20-A97D-084D8B934B17}"/>
               </a:ext>
             </a:extLst>
           </p:cNvPr>
@@ -4477,7 +4479,7 @@
     </p:spTree>
     <p:extLst>
       <p:ext uri="{BB962C8B-B14F-4D97-AF65-F5344CB8AC3E}">
-        <p14:creationId xmlns:p14="http://schemas.microsoft.com/office/powerpoint/2010/main" val="2670020389"/>
+        <p14:creationId xmlns:p14="http://schemas.microsoft.com/office/powerpoint/2010/main" val="2195206344"/>
       </p:ext>
     </p:extLst>
   </p:cSld>
@@ -4509,7 +4511,7 @@
           <p:cNvPr id="2" name="Heading">
             <a:extLst>
               <a:ext uri="{FF2B5EF4-FFF2-40B4-BE49-F238E27FC236}">
-                <a16:creationId xmlns:a16="http://schemas.microsoft.com/office/drawing/2014/main" id="{C94C02B1-449D-BF29-8C75-80B7C113E448}"/>
+                <a16:creationId xmlns:a16="http://schemas.microsoft.com/office/drawing/2014/main" id="{4ED19572-BBE5-80D3-0661-1AC644477F35}"/>
               </a:ext>
             </a:extLst>
           </p:cNvPr>
@@ -4548,7 +4550,7 @@
           <p:cNvPr id="3" name="Instructions">
             <a:extLst>
               <a:ext uri="{FF2B5EF4-FFF2-40B4-BE49-F238E27FC236}">
-                <a16:creationId xmlns:a16="http://schemas.microsoft.com/office/drawing/2014/main" id="{19CA6D15-D870-24FC-A552-70FA9B08FF8E}"/>
+                <a16:creationId xmlns:a16="http://schemas.microsoft.com/office/drawing/2014/main" id="{FCC070F3-5EED-38C5-EF56-E3122A56CD04}"/>
               </a:ext>
             </a:extLst>
           </p:cNvPr>
@@ -4587,7 +4589,7 @@
           <p:cNvPr id="4" name="Text0">
             <a:extLst>
               <a:ext uri="{FF2B5EF4-FFF2-40B4-BE49-F238E27FC236}">
-                <a16:creationId xmlns:a16="http://schemas.microsoft.com/office/drawing/2014/main" id="{154B5121-4C30-5AFB-9739-379CC828D74D}"/>
+                <a16:creationId xmlns:a16="http://schemas.microsoft.com/office/drawing/2014/main" id="{CEE2ACCD-033A-6679-72D9-879367BDF2E8}"/>
               </a:ext>
             </a:extLst>
           </p:cNvPr>
@@ -4647,7 +4649,7 @@
           <p:cNvPr id="5" name="Text1">
             <a:extLst>
               <a:ext uri="{FF2B5EF4-FFF2-40B4-BE49-F238E27FC236}">
-                <a16:creationId xmlns:a16="http://schemas.microsoft.com/office/drawing/2014/main" id="{F5C07AAA-B3E1-6FF5-5099-1F774C4EA241}"/>
+                <a16:creationId xmlns:a16="http://schemas.microsoft.com/office/drawing/2014/main" id="{CAC6C313-FF9A-B367-DA8D-C9008D3BF361}"/>
               </a:ext>
             </a:extLst>
           </p:cNvPr>
@@ -4708,7 +4710,7 @@
           <p:cNvPr id="6" name="Text2">
             <a:extLst>
               <a:ext uri="{FF2B5EF4-FFF2-40B4-BE49-F238E27FC236}">
-                <a16:creationId xmlns:a16="http://schemas.microsoft.com/office/drawing/2014/main" id="{574F9553-9131-B30C-6A02-6173203BB5F8}"/>
+                <a16:creationId xmlns:a16="http://schemas.microsoft.com/office/drawing/2014/main" id="{6C879EB5-5877-7FF2-3714-C105EA6647CD}"/>
               </a:ext>
             </a:extLst>
           </p:cNvPr>
@@ -4769,7 +4771,7 @@
           <p:cNvPr id="7" name="TextBox 6">
             <a:extLst>
               <a:ext uri="{FF2B5EF4-FFF2-40B4-BE49-F238E27FC236}">
-                <a16:creationId xmlns:a16="http://schemas.microsoft.com/office/drawing/2014/main" id="{28CC26DA-1DD3-4A63-1C80-E540A6325116}"/>
+                <a16:creationId xmlns:a16="http://schemas.microsoft.com/office/drawing/2014/main" id="{5597C498-B08A-C0FB-F67F-AA983584EC4D}"/>
               </a:ext>
             </a:extLst>
           </p:cNvPr>
@@ -4806,7 +4808,7 @@
     </p:spTree>
     <p:extLst>
       <p:ext uri="{BB962C8B-B14F-4D97-AF65-F5344CB8AC3E}">
-        <p14:creationId xmlns:p14="http://schemas.microsoft.com/office/powerpoint/2010/main" val="2313899332"/>
+        <p14:creationId xmlns:p14="http://schemas.microsoft.com/office/powerpoint/2010/main" val="2465076713"/>
       </p:ext>
     </p:extLst>
   </p:cSld>
@@ -4838,7 +4840,7 @@
           <p:cNvPr id="2" name="Heading">
             <a:extLst>
               <a:ext uri="{FF2B5EF4-FFF2-40B4-BE49-F238E27FC236}">
-                <a16:creationId xmlns:a16="http://schemas.microsoft.com/office/drawing/2014/main" id="{E0063245-517F-5D8D-7D4D-5D57BBEA4F7D}"/>
+                <a16:creationId xmlns:a16="http://schemas.microsoft.com/office/drawing/2014/main" id="{E3479571-6DA8-61E5-1DE5-4431F770FD95}"/>
               </a:ext>
             </a:extLst>
           </p:cNvPr>
@@ -4877,7 +4879,7 @@
           <p:cNvPr id="3" name="Instructions">
             <a:extLst>
               <a:ext uri="{FF2B5EF4-FFF2-40B4-BE49-F238E27FC236}">
-                <a16:creationId xmlns:a16="http://schemas.microsoft.com/office/drawing/2014/main" id="{BA8ADA75-458E-0C5F-6F6F-3B6BB7B6F249}"/>
+                <a16:creationId xmlns:a16="http://schemas.microsoft.com/office/drawing/2014/main" id="{B9D21081-DF6E-26F9-D319-FAA4CA5E17D6}"/>
               </a:ext>
             </a:extLst>
           </p:cNvPr>
@@ -4916,7 +4918,7 @@
           <p:cNvPr id="4" name="Dot0">
             <a:extLst>
               <a:ext uri="{FF2B5EF4-FFF2-40B4-BE49-F238E27FC236}">
-                <a16:creationId xmlns:a16="http://schemas.microsoft.com/office/drawing/2014/main" id="{57C56979-E104-7324-2BBA-12A8EE4F206B}"/>
+                <a16:creationId xmlns:a16="http://schemas.microsoft.com/office/drawing/2014/main" id="{397606B1-C9DF-AC39-3FC0-BE57F2E4D8A5}"/>
               </a:ext>
             </a:extLst>
           </p:cNvPr>
@@ -4991,7 +4993,7 @@
           <p:cNvPr id="5" name="Dot1">
             <a:extLst>
               <a:ext uri="{FF2B5EF4-FFF2-40B4-BE49-F238E27FC236}">
-                <a16:creationId xmlns:a16="http://schemas.microsoft.com/office/drawing/2014/main" id="{67AB020F-983B-E7AB-A1B1-22818B35CC6C}"/>
+                <a16:creationId xmlns:a16="http://schemas.microsoft.com/office/drawing/2014/main" id="{3EF6AB56-374B-D874-6EA2-F587E8F80601}"/>
               </a:ext>
             </a:extLst>
           </p:cNvPr>
@@ -5066,7 +5068,7 @@
           <p:cNvPr id="6" name="Dot2">
             <a:extLst>
               <a:ext uri="{FF2B5EF4-FFF2-40B4-BE49-F238E27FC236}">
-                <a16:creationId xmlns:a16="http://schemas.microsoft.com/office/drawing/2014/main" id="{983CE5CC-C9C4-CA9A-19BE-C5269B60E689}"/>
+                <a16:creationId xmlns:a16="http://schemas.microsoft.com/office/drawing/2014/main" id="{EC51F784-2571-22EF-82B3-092D42E3697B}"/>
               </a:ext>
             </a:extLst>
           </p:cNvPr>
@@ -5141,7 +5143,7 @@
           <p:cNvPr id="7" name="Dot3">
             <a:extLst>
               <a:ext uri="{FF2B5EF4-FFF2-40B4-BE49-F238E27FC236}">
-                <a16:creationId xmlns:a16="http://schemas.microsoft.com/office/drawing/2014/main" id="{D94C1D4D-32B0-6872-DE96-CE8F3C56DEF6}"/>
+                <a16:creationId xmlns:a16="http://schemas.microsoft.com/office/drawing/2014/main" id="{FD0C3A9C-9DA3-094A-DF0C-141342C81674}"/>
               </a:ext>
             </a:extLst>
           </p:cNvPr>
@@ -5216,7 +5218,7 @@
           <p:cNvPr id="8" name="Dot4">
             <a:extLst>
               <a:ext uri="{FF2B5EF4-FFF2-40B4-BE49-F238E27FC236}">
-                <a16:creationId xmlns:a16="http://schemas.microsoft.com/office/drawing/2014/main" id="{E2F905AD-D958-7BDF-067B-24C02C256495}"/>
+                <a16:creationId xmlns:a16="http://schemas.microsoft.com/office/drawing/2014/main" id="{7BA20AAF-1BE4-BF3A-2895-843A3097D83F}"/>
               </a:ext>
             </a:extLst>
           </p:cNvPr>
@@ -5291,7 +5293,7 @@
           <p:cNvPr id="9" name="Dot5">
             <a:extLst>
               <a:ext uri="{FF2B5EF4-FFF2-40B4-BE49-F238E27FC236}">
-                <a16:creationId xmlns:a16="http://schemas.microsoft.com/office/drawing/2014/main" id="{62B799E8-8677-D837-A02F-5AEAC2418969}"/>
+                <a16:creationId xmlns:a16="http://schemas.microsoft.com/office/drawing/2014/main" id="{FE711F46-D6C6-749B-C018-19365D4609D1}"/>
               </a:ext>
             </a:extLst>
           </p:cNvPr>
@@ -5366,7 +5368,7 @@
           <p:cNvPr id="10" name="Dot6">
             <a:extLst>
               <a:ext uri="{FF2B5EF4-FFF2-40B4-BE49-F238E27FC236}">
-                <a16:creationId xmlns:a16="http://schemas.microsoft.com/office/drawing/2014/main" id="{479FB203-E04E-9048-81B8-BA305A3E0987}"/>
+                <a16:creationId xmlns:a16="http://schemas.microsoft.com/office/drawing/2014/main" id="{0DE8A725-5145-8E70-4642-01CC0220C84F}"/>
               </a:ext>
             </a:extLst>
           </p:cNvPr>
@@ -5441,7 +5443,7 @@
           <p:cNvPr id="11" name="Dot7">
             <a:extLst>
               <a:ext uri="{FF2B5EF4-FFF2-40B4-BE49-F238E27FC236}">
-                <a16:creationId xmlns:a16="http://schemas.microsoft.com/office/drawing/2014/main" id="{A2351D57-BCA7-1F7D-8300-E81362D42EB1}"/>
+                <a16:creationId xmlns:a16="http://schemas.microsoft.com/office/drawing/2014/main" id="{8E0B51D7-92DD-6783-32E0-DCA1BA2126EB}"/>
               </a:ext>
             </a:extLst>
           </p:cNvPr>
@@ -5516,7 +5518,7 @@
           <p:cNvPr id="12" name="Dot8">
             <a:extLst>
               <a:ext uri="{FF2B5EF4-FFF2-40B4-BE49-F238E27FC236}">
-                <a16:creationId xmlns:a16="http://schemas.microsoft.com/office/drawing/2014/main" id="{B07E038A-BA95-524E-F36E-A9E3511620E8}"/>
+                <a16:creationId xmlns:a16="http://schemas.microsoft.com/office/drawing/2014/main" id="{C86ADD1B-5D8E-95CF-D76E-46731456025F}"/>
               </a:ext>
             </a:extLst>
           </p:cNvPr>
@@ -5591,7 +5593,7 @@
           <p:cNvPr id="13" name="TextBox 12">
             <a:extLst>
               <a:ext uri="{FF2B5EF4-FFF2-40B4-BE49-F238E27FC236}">
-                <a16:creationId xmlns:a16="http://schemas.microsoft.com/office/drawing/2014/main" id="{1D28EF18-C1F3-2181-E6C3-9FF1AC62560E}"/>
+                <a16:creationId xmlns:a16="http://schemas.microsoft.com/office/drawing/2014/main" id="{648071C2-F0E7-27EF-F5FC-4EEAF4813AD0}"/>
               </a:ext>
             </a:extLst>
           </p:cNvPr>
@@ -5628,7 +5630,7 @@
     </p:spTree>
     <p:extLst>
       <p:ext uri="{BB962C8B-B14F-4D97-AF65-F5344CB8AC3E}">
-        <p14:creationId xmlns:p14="http://schemas.microsoft.com/office/powerpoint/2010/main" val="3655201640"/>
+        <p14:creationId xmlns:p14="http://schemas.microsoft.com/office/powerpoint/2010/main" val="3660554855"/>
       </p:ext>
     </p:extLst>
   </p:cSld>
@@ -5660,7 +5662,7 @@
           <p:cNvPr id="2" name="Heading">
             <a:extLst>
               <a:ext uri="{FF2B5EF4-FFF2-40B4-BE49-F238E27FC236}">
-                <a16:creationId xmlns:a16="http://schemas.microsoft.com/office/drawing/2014/main" id="{8D6FDC8A-4263-7AA3-965E-0AF21B72852B}"/>
+                <a16:creationId xmlns:a16="http://schemas.microsoft.com/office/drawing/2014/main" id="{8D0985E0-B7DF-D711-5F53-25364920EEBD}"/>
               </a:ext>
             </a:extLst>
           </p:cNvPr>
@@ -5699,7 +5701,7 @@
           <p:cNvPr id="3" name="Instructions">
             <a:extLst>
               <a:ext uri="{FF2B5EF4-FFF2-40B4-BE49-F238E27FC236}">
-                <a16:creationId xmlns:a16="http://schemas.microsoft.com/office/drawing/2014/main" id="{1368349C-E372-A8FB-2130-049E8F5CBCC1}"/>
+                <a16:creationId xmlns:a16="http://schemas.microsoft.com/office/drawing/2014/main" id="{0A1368A6-8010-A714-F1A8-27C0C2C1A34B}"/>
               </a:ext>
             </a:extLst>
           </p:cNvPr>
@@ -5738,7 +5740,7 @@
           <p:cNvPr id="4" name="Wanderer">
             <a:extLst>
               <a:ext uri="{FF2B5EF4-FFF2-40B4-BE49-F238E27FC236}">
-                <a16:creationId xmlns:a16="http://schemas.microsoft.com/office/drawing/2014/main" id="{69815706-9F19-5655-FDC5-6824BFF77547}"/>
+                <a16:creationId xmlns:a16="http://schemas.microsoft.com/office/drawing/2014/main" id="{27808935-4A67-2AEA-CBCF-0C53E4F3BD83}"/>
               </a:ext>
             </a:extLst>
           </p:cNvPr>
@@ -5813,7 +5815,7 @@
           <p:cNvPr id="5" name="Friend">
             <a:extLst>
               <a:ext uri="{FF2B5EF4-FFF2-40B4-BE49-F238E27FC236}">
-                <a16:creationId xmlns:a16="http://schemas.microsoft.com/office/drawing/2014/main" id="{E2087A3A-44FF-14FE-F1B0-81EC3EF2D04C}"/>
+                <a16:creationId xmlns:a16="http://schemas.microsoft.com/office/drawing/2014/main" id="{B1A35E15-949B-6E43-9242-5B575F05FAD0}"/>
               </a:ext>
             </a:extLst>
           </p:cNvPr>
@@ -5888,7 +5890,7 @@
           <p:cNvPr id="6" name="TextBox 5">
             <a:extLst>
               <a:ext uri="{FF2B5EF4-FFF2-40B4-BE49-F238E27FC236}">
-                <a16:creationId xmlns:a16="http://schemas.microsoft.com/office/drawing/2014/main" id="{ABAA05EC-0701-8BC6-9BCC-40B596F8BD01}"/>
+                <a16:creationId xmlns:a16="http://schemas.microsoft.com/office/drawing/2014/main" id="{30E2F00E-AA27-D958-6C40-A2F95F5C4541}"/>
               </a:ext>
             </a:extLst>
           </p:cNvPr>
@@ -5925,7 +5927,7 @@
     </p:spTree>
     <p:extLst>
       <p:ext uri="{BB962C8B-B14F-4D97-AF65-F5344CB8AC3E}">
-        <p14:creationId xmlns:p14="http://schemas.microsoft.com/office/powerpoint/2010/main" val="327056292"/>
+        <p14:creationId xmlns:p14="http://schemas.microsoft.com/office/powerpoint/2010/main" val="1120490411"/>
       </p:ext>
     </p:extLst>
   </p:cSld>
@@ -5957,7 +5959,7 @@
           <p:cNvPr id="2" name="Heading">
             <a:extLst>
               <a:ext uri="{FF2B5EF4-FFF2-40B4-BE49-F238E27FC236}">
-                <a16:creationId xmlns:a16="http://schemas.microsoft.com/office/drawing/2014/main" id="{3B36B4B4-33EB-2E68-5ED2-9DBC8E76184C}"/>
+                <a16:creationId xmlns:a16="http://schemas.microsoft.com/office/drawing/2014/main" id="{4A6294AD-71A6-C736-C403-F6329814296F}"/>
               </a:ext>
             </a:extLst>
           </p:cNvPr>
@@ -5996,7 +5998,7 @@
           <p:cNvPr id="3" name="Instructions">
             <a:extLst>
               <a:ext uri="{FF2B5EF4-FFF2-40B4-BE49-F238E27FC236}">
-                <a16:creationId xmlns:a16="http://schemas.microsoft.com/office/drawing/2014/main" id="{93476BF3-2422-ABAB-5561-11BFA633F5D6}"/>
+                <a16:creationId xmlns:a16="http://schemas.microsoft.com/office/drawing/2014/main" id="{471D5253-3BF1-FB12-B08A-3153531C0671}"/>
               </a:ext>
             </a:extLst>
           </p:cNvPr>
@@ -6035,7 +6037,7 @@
           <p:cNvPr id="4" name="Tilt1">
             <a:extLst>
               <a:ext uri="{FF2B5EF4-FFF2-40B4-BE49-F238E27FC236}">
-                <a16:creationId xmlns:a16="http://schemas.microsoft.com/office/drawing/2014/main" id="{774E37F3-B045-D4CB-8F8E-1AD155D18214}"/>
+                <a16:creationId xmlns:a16="http://schemas.microsoft.com/office/drawing/2014/main" id="{D4D6F389-FBFE-5CC7-B358-70D618F0FAB9}"/>
               </a:ext>
             </a:extLst>
           </p:cNvPr>
@@ -6110,7 +6112,7 @@
           <p:cNvPr id="5" name="Tilt2">
             <a:extLst>
               <a:ext uri="{FF2B5EF4-FFF2-40B4-BE49-F238E27FC236}">
-                <a16:creationId xmlns:a16="http://schemas.microsoft.com/office/drawing/2014/main" id="{C9BE322E-08E4-EF67-F672-C0B25FA81DB7}"/>
+                <a16:creationId xmlns:a16="http://schemas.microsoft.com/office/drawing/2014/main" id="{5E283E0A-1778-073C-F02F-3F83116E6344}"/>
               </a:ext>
             </a:extLst>
           </p:cNvPr>
@@ -6185,7 +6187,7 @@
           <p:cNvPr id="6" name="Tilt3">
             <a:extLst>
               <a:ext uri="{FF2B5EF4-FFF2-40B4-BE49-F238E27FC236}">
-                <a16:creationId xmlns:a16="http://schemas.microsoft.com/office/drawing/2014/main" id="{0E018A60-3325-9384-9348-29C46291028E}"/>
+                <a16:creationId xmlns:a16="http://schemas.microsoft.com/office/drawing/2014/main" id="{12B748A5-2C83-BE03-CAC2-D98EDF3F45FA}"/>
               </a:ext>
             </a:extLst>
           </p:cNvPr>
@@ -6260,7 +6262,7 @@
           <p:cNvPr id="7" name="Level">
             <a:extLst>
               <a:ext uri="{FF2B5EF4-FFF2-40B4-BE49-F238E27FC236}">
-                <a16:creationId xmlns:a16="http://schemas.microsoft.com/office/drawing/2014/main" id="{F69E8CBD-AF96-ADD4-6447-B6B17BA53BF6}"/>
+                <a16:creationId xmlns:a16="http://schemas.microsoft.com/office/drawing/2014/main" id="{FFF11520-84C8-2DEE-7930-E519A701C2EA}"/>
               </a:ext>
             </a:extLst>
           </p:cNvPr>
@@ -6335,7 +6337,7 @@
           <p:cNvPr id="8" name="TextBox 7">
             <a:extLst>
               <a:ext uri="{FF2B5EF4-FFF2-40B4-BE49-F238E27FC236}">
-                <a16:creationId xmlns:a16="http://schemas.microsoft.com/office/drawing/2014/main" id="{667E12A8-34E7-A4C8-6CF6-D886C4E65C09}"/>
+                <a16:creationId xmlns:a16="http://schemas.microsoft.com/office/drawing/2014/main" id="{9B885568-2C03-5A12-20DC-D81079A1D166}"/>
               </a:ext>
             </a:extLst>
           </p:cNvPr>
@@ -6372,7 +6374,7 @@
     </p:spTree>
     <p:extLst>
       <p:ext uri="{BB962C8B-B14F-4D97-AF65-F5344CB8AC3E}">
-        <p14:creationId xmlns:p14="http://schemas.microsoft.com/office/powerpoint/2010/main" val="3471108026"/>
+        <p14:creationId xmlns:p14="http://schemas.microsoft.com/office/powerpoint/2010/main" val="2390458729"/>
       </p:ext>
     </p:extLst>
   </p:cSld>
@@ -6404,7 +6406,7 @@
           <p:cNvPr id="2" name="Heading">
             <a:extLst>
               <a:ext uri="{FF2B5EF4-FFF2-40B4-BE49-F238E27FC236}">
-                <a16:creationId xmlns:a16="http://schemas.microsoft.com/office/drawing/2014/main" id="{85B9912A-0CE1-8BB1-68BE-C3E12248C431}"/>
+                <a16:creationId xmlns:a16="http://schemas.microsoft.com/office/drawing/2014/main" id="{DEF8642C-A567-8103-2AA2-1269F890B044}"/>
               </a:ext>
             </a:extLst>
           </p:cNvPr>
@@ -6443,7 +6445,7 @@
           <p:cNvPr id="3" name="Instructions">
             <a:extLst>
               <a:ext uri="{FF2B5EF4-FFF2-40B4-BE49-F238E27FC236}">
-                <a16:creationId xmlns:a16="http://schemas.microsoft.com/office/drawing/2014/main" id="{A02FF7DA-FF08-2307-9C82-8A82DA6B26B1}"/>
+                <a16:creationId xmlns:a16="http://schemas.microsoft.com/office/drawing/2014/main" id="{72D21161-F203-97C8-A8AC-624FF86738A2}"/>
               </a:ext>
             </a:extLst>
           </p:cNvPr>
@@ -6482,7 +6484,7 @@
           <p:cNvPr id="4" name="Seed">
             <a:extLst>
               <a:ext uri="{FF2B5EF4-FFF2-40B4-BE49-F238E27FC236}">
-                <a16:creationId xmlns:a16="http://schemas.microsoft.com/office/drawing/2014/main" id="{EC133921-A3CF-28ED-0C80-9951B1F33897}"/>
+                <a16:creationId xmlns:a16="http://schemas.microsoft.com/office/drawing/2014/main" id="{5D8C498C-4377-A64D-2854-CC100C901F4D}"/>
               </a:ext>
             </a:extLst>
           </p:cNvPr>
@@ -6557,7 +6559,7 @@
           <p:cNvPr id="5" name="TextBox 4">
             <a:extLst>
               <a:ext uri="{FF2B5EF4-FFF2-40B4-BE49-F238E27FC236}">
-                <a16:creationId xmlns:a16="http://schemas.microsoft.com/office/drawing/2014/main" id="{39D6E102-6404-4299-BB98-2F22E2705B78}"/>
+                <a16:creationId xmlns:a16="http://schemas.microsoft.com/office/drawing/2014/main" id="{F95E53E5-529B-53AE-791E-B7F693D04FDF}"/>
               </a:ext>
             </a:extLst>
           </p:cNvPr>
@@ -6594,7 +6596,7 @@
     </p:spTree>
     <p:extLst>
       <p:ext uri="{BB962C8B-B14F-4D97-AF65-F5344CB8AC3E}">
-        <p14:creationId xmlns:p14="http://schemas.microsoft.com/office/powerpoint/2010/main" val="2606218522"/>
+        <p14:creationId xmlns:p14="http://schemas.microsoft.com/office/powerpoint/2010/main" val="468030498"/>
       </p:ext>
     </p:extLst>
   </p:cSld>
@@ -6626,7 +6628,7 @@
           <p:cNvPr id="2" name="Heading">
             <a:extLst>
               <a:ext uri="{FF2B5EF4-FFF2-40B4-BE49-F238E27FC236}">
-                <a16:creationId xmlns:a16="http://schemas.microsoft.com/office/drawing/2014/main" id="{828F9D36-3CAC-3A9E-A6D5-65A23C314C2C}"/>
+                <a16:creationId xmlns:a16="http://schemas.microsoft.com/office/drawing/2014/main" id="{00B8D8C3-1CC6-D18C-532E-66B86E8CD67A}"/>
               </a:ext>
             </a:extLst>
           </p:cNvPr>
@@ -6665,7 +6667,7 @@
           <p:cNvPr id="3" name="Instructions">
             <a:extLst>
               <a:ext uri="{FF2B5EF4-FFF2-40B4-BE49-F238E27FC236}">
-                <a16:creationId xmlns:a16="http://schemas.microsoft.com/office/drawing/2014/main" id="{E6C6D120-0FA8-1149-09A0-D92E356005DD}"/>
+                <a16:creationId xmlns:a16="http://schemas.microsoft.com/office/drawing/2014/main" id="{668C0847-7B03-D2FB-762F-69DB3E48C373}"/>
               </a:ext>
             </a:extLst>
           </p:cNvPr>
@@ -6704,7 +6706,7 @@
           <p:cNvPr id="4" name="Ring">
             <a:extLst>
               <a:ext uri="{FF2B5EF4-FFF2-40B4-BE49-F238E27FC236}">
-                <a16:creationId xmlns:a16="http://schemas.microsoft.com/office/drawing/2014/main" id="{9028C3D4-9662-6419-7DC1-FD5B4FB75B79}"/>
+                <a16:creationId xmlns:a16="http://schemas.microsoft.com/office/drawing/2014/main" id="{36054B84-A666-3A30-48BD-6BA6E65AAFCA}"/>
               </a:ext>
             </a:extLst>
           </p:cNvPr>
@@ -6768,7 +6770,7 @@
           <p:cNvPr id="5" name="Arc">
             <a:extLst>
               <a:ext uri="{FF2B5EF4-FFF2-40B4-BE49-F238E27FC236}">
-                <a16:creationId xmlns:a16="http://schemas.microsoft.com/office/drawing/2014/main" id="{59BC9C81-2515-9528-5BAB-F0F773990B3D}"/>
+                <a16:creationId xmlns:a16="http://schemas.microsoft.com/office/drawing/2014/main" id="{C681D972-A7DE-767A-4D0D-8D5684A47263}"/>
               </a:ext>
             </a:extLst>
           </p:cNvPr>
@@ -6820,7 +6822,7 @@
           <p:cNvPr id="6" name="Wave">
             <a:extLst>
               <a:ext uri="{FF2B5EF4-FFF2-40B4-BE49-F238E27FC236}">
-                <a16:creationId xmlns:a16="http://schemas.microsoft.com/office/drawing/2014/main" id="{CAB49992-A031-7EE5-55B7-65CE6FCAC7AB}"/>
+                <a16:creationId xmlns:a16="http://schemas.microsoft.com/office/drawing/2014/main" id="{54F5F6CF-AE41-4DA2-514C-051C2892FDC5}"/>
               </a:ext>
             </a:extLst>
           </p:cNvPr>
@@ -6890,7 +6892,7 @@
           <p:cNvPr id="7" name="Bead1">
             <a:extLst>
               <a:ext uri="{FF2B5EF4-FFF2-40B4-BE49-F238E27FC236}">
-                <a16:creationId xmlns:a16="http://schemas.microsoft.com/office/drawing/2014/main" id="{34960C85-239D-0C92-D414-53FBE1AEA1E7}"/>
+                <a16:creationId xmlns:a16="http://schemas.microsoft.com/office/drawing/2014/main" id="{96FA5A57-7976-0742-5710-4645C9FD1095}"/>
               </a:ext>
             </a:extLst>
           </p:cNvPr>
@@ -6965,7 +6967,7 @@
           <p:cNvPr id="8" name="Bead2">
             <a:extLst>
               <a:ext uri="{FF2B5EF4-FFF2-40B4-BE49-F238E27FC236}">
-                <a16:creationId xmlns:a16="http://schemas.microsoft.com/office/drawing/2014/main" id="{4A547E43-BA89-A40D-4CA4-31FB2523C49F}"/>
+                <a16:creationId xmlns:a16="http://schemas.microsoft.com/office/drawing/2014/main" id="{D5428671-2EC2-472C-5329-7E94BE5AFFE6}"/>
               </a:ext>
             </a:extLst>
           </p:cNvPr>
@@ -7040,7 +7042,7 @@
           <p:cNvPr id="9" name="Bead3">
             <a:extLst>
               <a:ext uri="{FF2B5EF4-FFF2-40B4-BE49-F238E27FC236}">
-                <a16:creationId xmlns:a16="http://schemas.microsoft.com/office/drawing/2014/main" id="{DDE55D5C-719F-52DD-DA1A-6BB10858C653}"/>
+                <a16:creationId xmlns:a16="http://schemas.microsoft.com/office/drawing/2014/main" id="{A47F43CA-4E4D-A0EF-006D-0CA1545B1459}"/>
               </a:ext>
             </a:extLst>
           </p:cNvPr>
@@ -7115,7 +7117,7 @@
           <p:cNvPr id="10" name="Bead4">
             <a:extLst>
               <a:ext uri="{FF2B5EF4-FFF2-40B4-BE49-F238E27FC236}">
-                <a16:creationId xmlns:a16="http://schemas.microsoft.com/office/drawing/2014/main" id="{9B2CFB7C-E665-293E-81E0-874DD30EC7DA}"/>
+                <a16:creationId xmlns:a16="http://schemas.microsoft.com/office/drawing/2014/main" id="{4BD1EE77-C014-E47F-5456-B6D1216BF352}"/>
               </a:ext>
             </a:extLst>
           </p:cNvPr>
@@ -7190,7 +7192,7 @@
           <p:cNvPr id="11" name="Bead5">
             <a:extLst>
               <a:ext uri="{FF2B5EF4-FFF2-40B4-BE49-F238E27FC236}">
-                <a16:creationId xmlns:a16="http://schemas.microsoft.com/office/drawing/2014/main" id="{A5A47E3F-35ED-D52F-E60D-976282E764F2}"/>
+                <a16:creationId xmlns:a16="http://schemas.microsoft.com/office/drawing/2014/main" id="{63815679-0D75-E39A-CCCE-33163F870242}"/>
               </a:ext>
             </a:extLst>
           </p:cNvPr>
@@ -7265,7 +7267,7 @@
           <p:cNvPr id="12" name="Bead6">
             <a:extLst>
               <a:ext uri="{FF2B5EF4-FFF2-40B4-BE49-F238E27FC236}">
-                <a16:creationId xmlns:a16="http://schemas.microsoft.com/office/drawing/2014/main" id="{01ECE142-7BFC-5C21-3292-4EFAB800E61A}"/>
+                <a16:creationId xmlns:a16="http://schemas.microsoft.com/office/drawing/2014/main" id="{B30CE0E5-8E10-62BE-2E6B-80E2A2DC50F1}"/>
               </a:ext>
             </a:extLst>
           </p:cNvPr>
@@ -7340,7 +7342,7 @@
           <p:cNvPr id="13" name="TextBox 12">
             <a:extLst>
               <a:ext uri="{FF2B5EF4-FFF2-40B4-BE49-F238E27FC236}">
-                <a16:creationId xmlns:a16="http://schemas.microsoft.com/office/drawing/2014/main" id="{7E98289B-A868-128B-689C-0D436BC819F7}"/>
+                <a16:creationId xmlns:a16="http://schemas.microsoft.com/office/drawing/2014/main" id="{299C49C3-F6B5-70A8-9FD0-BDA301798CB1}"/>
               </a:ext>
             </a:extLst>
           </p:cNvPr>
@@ -7377,7 +7379,937 @@
     </p:spTree>
     <p:extLst>
       <p:ext uri="{BB962C8B-B14F-4D97-AF65-F5344CB8AC3E}">
-        <p14:creationId xmlns:p14="http://schemas.microsoft.com/office/powerpoint/2010/main" val="2694734320"/>
+        <p14:creationId xmlns:p14="http://schemas.microsoft.com/office/powerpoint/2010/main" val="428068847"/>
+      </p:ext>
+    </p:extLst>
+  </p:cSld>
+  <p:clrMapOvr>
+    <a:masterClrMapping/>
+  </p:clrMapOvr>
+</p:sld>
+</file>
+
+<file path=ppt/slides/slide18.xml><?xml version="1.0" encoding="utf-8"?>
+<p:sld xmlns:a="http://schemas.openxmlformats.org/drawingml/2006/main" xmlns:r="http://schemas.openxmlformats.org/officeDocument/2006/relationships" xmlns:p="http://schemas.openxmlformats.org/presentationml/2006/main">
+  <p:cSld>
+    <p:spTree>
+      <p:nvGrpSpPr>
+        <p:cNvPr id="1" name=""/>
+        <p:cNvGrpSpPr/>
+        <p:nvPr/>
+      </p:nvGrpSpPr>
+      <p:grpSpPr>
+        <a:xfrm>
+          <a:off x="0" y="0"/>
+          <a:ext cx="0" cy="0"/>
+          <a:chOff x="0" y="0"/>
+          <a:chExt cx="0" cy="0"/>
+        </a:xfrm>
+      </p:grpSpPr>
+      <p:sp>
+        <p:nvSpPr>
+          <p:cNvPr id="2" name="Heading">
+            <a:extLst>
+              <a:ext uri="{FF2B5EF4-FFF2-40B4-BE49-F238E27FC236}">
+                <a16:creationId xmlns:a16="http://schemas.microsoft.com/office/drawing/2014/main" id="{6EE39E61-EBBD-D685-391D-F47C789BCFDE}"/>
+              </a:ext>
+            </a:extLst>
+          </p:cNvPr>
+          <p:cNvSpPr txBox="1"/>
+          <p:nvPr/>
+        </p:nvSpPr>
+        <p:spPr>
+          <a:xfrm>
+            <a:off x="508000" y="304800"/>
+            <a:ext cx="11176000" cy="461665"/>
+          </a:xfrm>
+          <a:prstGeom prst="rect">
+            <a:avLst/>
+          </a:prstGeom>
+          <a:noFill/>
+        </p:spPr>
+        <p:txBody>
+          <a:bodyPr vert="horz" rtlCol="0">
+            <a:spAutoFit/>
+          </a:bodyPr>
+          <a:lstStyle/>
+          <a:p>
+            <a:r>
+              <a:rPr lang="en-AU" sz="2400" b="1">
+                <a:solidFill>
+                  <a:srgbClr val="282828"/>
+                </a:solidFill>
+              </a:rPr>
+              <a:t>Inside a group</a:t>
+            </a:r>
+          </a:p>
+        </p:txBody>
+      </p:sp>
+      <p:sp>
+        <p:nvSpPr>
+          <p:cNvPr id="3" name="Instructions">
+            <a:extLst>
+              <a:ext uri="{FF2B5EF4-FFF2-40B4-BE49-F238E27FC236}">
+                <a16:creationId xmlns:a16="http://schemas.microsoft.com/office/drawing/2014/main" id="{789ECB06-9ADB-C7B9-45E2-567D7BBEE304}"/>
+              </a:ext>
+            </a:extLst>
+          </p:cNvPr>
+          <p:cNvSpPr txBox="1"/>
+          <p:nvPr/>
+        </p:nvSpPr>
+        <p:spPr>
+          <a:xfrm>
+            <a:off x="508000" y="762000"/>
+            <a:ext cx="11176000" cy="292388"/>
+          </a:xfrm>
+          <a:prstGeom prst="rect">
+            <a:avLst/>
+          </a:prstGeom>
+          <a:noFill/>
+        </p:spPr>
+        <p:txBody>
+          <a:bodyPr vert="horz" rtlCol="0">
+            <a:spAutoFit/>
+          </a:bodyPr>
+          <a:lstStyle/>
+          <a:p>
+            <a:r>
+              <a:rPr lang="en-AU" sz="1300">
+                <a:solidFill>
+                  <a:srgbClr val="7F7F7F"/>
+                </a:solidFill>
+              </a:rPr>
+              <a:t>Click the panel, then click Item 1 inside it and Ctrl+click Items 2 and 3. Align &gt; Left. Undo, then Reference = Group and Align &gt; Centre.</a:t>
+            </a:r>
+          </a:p>
+        </p:txBody>
+      </p:sp>
+      <p:grpSp>
+        <p:nvGrpSpPr>
+          <p:cNvPr id="8" name="Panel">
+            <a:extLst>
+              <a:ext uri="{FF2B5EF4-FFF2-40B4-BE49-F238E27FC236}">
+                <a16:creationId xmlns:a16="http://schemas.microsoft.com/office/drawing/2014/main" id="{5BA2ACB2-03A4-6507-8223-BDE32F9E38FF}"/>
+              </a:ext>
+            </a:extLst>
+          </p:cNvPr>
+          <p:cNvGrpSpPr/>
+          <p:nvPr/>
+        </p:nvGrpSpPr>
+        <p:grpSpPr>
+          <a:xfrm>
+            <a:off x="2794000" y="1651000"/>
+            <a:ext cx="6604000" cy="3810000"/>
+            <a:chOff x="2794000" y="1651000"/>
+            <a:chExt cx="6604000" cy="3810000"/>
+          </a:xfrm>
+        </p:grpSpPr>
+        <p:sp>
+          <p:nvSpPr>
+            <p:cNvPr id="4" name="Card">
+              <a:extLst>
+                <a:ext uri="{FF2B5EF4-FFF2-40B4-BE49-F238E27FC236}">
+                  <a16:creationId xmlns:a16="http://schemas.microsoft.com/office/drawing/2014/main" id="{B9FE6E1E-B75F-C059-C1A3-767264C6651A}"/>
+                </a:ext>
+              </a:extLst>
+            </p:cNvPr>
+            <p:cNvSpPr/>
+            <p:nvPr/>
+          </p:nvSpPr>
+          <p:spPr>
+            <a:xfrm>
+              <a:off x="2794000" y="1651000"/>
+              <a:ext cx="6604000" cy="3810000"/>
+            </a:xfrm>
+            <a:prstGeom prst="rect">
+              <a:avLst/>
+            </a:prstGeom>
+            <a:solidFill>
+              <a:srgbClr val="DEE2E8"/>
+            </a:solidFill>
+            <a:ln w="19050" cap="flat" cmpd="sng" algn="ctr">
+              <a:noFill/>
+              <a:prstDash val="solid"/>
+              <a:miter lim="800000"/>
+            </a:ln>
+            <a:effectLst/>
+            <a:extLst>
+              <a:ext uri="{91240B29-F687-4F45-9708-019B960494DF}">
+                <a14:hiddenLine xmlns:a14="http://schemas.microsoft.com/office/drawing/2010/main" w="19050" cap="flat" cmpd="sng" algn="ctr">
+                  <a:solidFill>
+                    <a:schemeClr val="accent1">
+                      <a:shade val="15000"/>
+                    </a:schemeClr>
+                  </a:solidFill>
+                  <a:prstDash val="solid"/>
+                  <a:miter lim="800000"/>
+                </a14:hiddenLine>
+              </a:ext>
+            </a:extLst>
+          </p:spPr>
+          <p:style>
+            <a:lnRef idx="2">
+              <a:schemeClr val="accent1">
+                <a:shade val="15000"/>
+              </a:schemeClr>
+            </a:lnRef>
+            <a:fillRef idx="1">
+              <a:schemeClr val="accent1"/>
+            </a:fillRef>
+            <a:effectRef idx="0">
+              <a:schemeClr val="accent1"/>
+            </a:effectRef>
+            <a:fontRef idx="minor">
+              <a:schemeClr val="lt1"/>
+            </a:fontRef>
+          </p:style>
+          <p:txBody>
+            <a:bodyPr rtlCol="0" anchor="ctr"/>
+            <a:lstStyle/>
+            <a:p>
+              <a:pPr algn="ctr"/>
+              <a:endParaRPr lang="en-AU" sz="1400" b="1">
+                <a:solidFill>
+                  <a:srgbClr val="FFFFFF"/>
+                </a:solidFill>
+              </a:endParaRPr>
+            </a:p>
+          </p:txBody>
+        </p:sp>
+        <p:sp>
+          <p:nvSpPr>
+            <p:cNvPr id="5" name="Item1">
+              <a:extLst>
+                <a:ext uri="{FF2B5EF4-FFF2-40B4-BE49-F238E27FC236}">
+                  <a16:creationId xmlns:a16="http://schemas.microsoft.com/office/drawing/2014/main" id="{577230F9-EF8C-0D44-8ADF-A0F3E2838E51}"/>
+                </a:ext>
+              </a:extLst>
+            </p:cNvPr>
+            <p:cNvSpPr/>
+            <p:nvPr/>
+          </p:nvSpPr>
+          <p:spPr>
+            <a:xfrm>
+              <a:off x="3302000" y="2032000"/>
+              <a:ext cx="1905000" cy="635000"/>
+            </a:xfrm>
+            <a:prstGeom prst="rect">
+              <a:avLst/>
+            </a:prstGeom>
+            <a:solidFill>
+              <a:srgbClr val="1F77B4"/>
+            </a:solidFill>
+            <a:ln w="19050" cap="flat" cmpd="sng" algn="ctr">
+              <a:noFill/>
+              <a:prstDash val="solid"/>
+              <a:miter lim="800000"/>
+            </a:ln>
+            <a:effectLst/>
+            <a:extLst>
+              <a:ext uri="{91240B29-F687-4F45-9708-019B960494DF}">
+                <a14:hiddenLine xmlns:a14="http://schemas.microsoft.com/office/drawing/2010/main" w="19050" cap="flat" cmpd="sng" algn="ctr">
+                  <a:solidFill>
+                    <a:schemeClr val="accent1">
+                      <a:shade val="15000"/>
+                    </a:schemeClr>
+                  </a:solidFill>
+                  <a:prstDash val="solid"/>
+                  <a:miter lim="800000"/>
+                </a14:hiddenLine>
+              </a:ext>
+            </a:extLst>
+          </p:spPr>
+          <p:style>
+            <a:lnRef idx="2">
+              <a:schemeClr val="accent1">
+                <a:shade val="15000"/>
+              </a:schemeClr>
+            </a:lnRef>
+            <a:fillRef idx="1">
+              <a:schemeClr val="accent1"/>
+            </a:fillRef>
+            <a:effectRef idx="0">
+              <a:schemeClr val="accent1"/>
+            </a:effectRef>
+            <a:fontRef idx="minor">
+              <a:schemeClr val="lt1"/>
+            </a:fontRef>
+          </p:style>
+          <p:txBody>
+            <a:bodyPr rtlCol="0" anchor="ctr"/>
+            <a:lstStyle/>
+            <a:p>
+              <a:pPr algn="ctr"/>
+              <a:r>
+                <a:rPr lang="en-AU" sz="1400" b="1">
+                  <a:solidFill>
+                    <a:srgbClr val="FFFFFF"/>
+                  </a:solidFill>
+                </a:rPr>
+                <a:t>Item 1</a:t>
+              </a:r>
+            </a:p>
+          </p:txBody>
+        </p:sp>
+        <p:sp>
+          <p:nvSpPr>
+            <p:cNvPr id="6" name="Item2">
+              <a:extLst>
+                <a:ext uri="{FF2B5EF4-FFF2-40B4-BE49-F238E27FC236}">
+                  <a16:creationId xmlns:a16="http://schemas.microsoft.com/office/drawing/2014/main" id="{6E48CA0C-4DDC-8D42-E79C-107E47228511}"/>
+                </a:ext>
+              </a:extLst>
+            </p:cNvPr>
+            <p:cNvSpPr/>
+            <p:nvPr/>
+          </p:nvSpPr>
+          <p:spPr>
+            <a:xfrm>
+              <a:off x="4191000" y="3175000"/>
+              <a:ext cx="2413000" cy="635000"/>
+            </a:xfrm>
+            <a:prstGeom prst="rect">
+              <a:avLst/>
+            </a:prstGeom>
+            <a:solidFill>
+              <a:srgbClr val="2CA02C"/>
+            </a:solidFill>
+            <a:ln w="19050" cap="flat" cmpd="sng" algn="ctr">
+              <a:noFill/>
+              <a:prstDash val="solid"/>
+              <a:miter lim="800000"/>
+            </a:ln>
+            <a:effectLst/>
+            <a:extLst>
+              <a:ext uri="{91240B29-F687-4F45-9708-019B960494DF}">
+                <a14:hiddenLine xmlns:a14="http://schemas.microsoft.com/office/drawing/2010/main" w="19050" cap="flat" cmpd="sng" algn="ctr">
+                  <a:solidFill>
+                    <a:schemeClr val="accent1">
+                      <a:shade val="15000"/>
+                    </a:schemeClr>
+                  </a:solidFill>
+                  <a:prstDash val="solid"/>
+                  <a:miter lim="800000"/>
+                </a14:hiddenLine>
+              </a:ext>
+            </a:extLst>
+          </p:spPr>
+          <p:style>
+            <a:lnRef idx="2">
+              <a:schemeClr val="accent1">
+                <a:shade val="15000"/>
+              </a:schemeClr>
+            </a:lnRef>
+            <a:fillRef idx="1">
+              <a:schemeClr val="accent1"/>
+            </a:fillRef>
+            <a:effectRef idx="0">
+              <a:schemeClr val="accent1"/>
+            </a:effectRef>
+            <a:fontRef idx="minor">
+              <a:schemeClr val="lt1"/>
+            </a:fontRef>
+          </p:style>
+          <p:txBody>
+            <a:bodyPr rtlCol="0" anchor="ctr"/>
+            <a:lstStyle/>
+            <a:p>
+              <a:pPr algn="ctr"/>
+              <a:r>
+                <a:rPr lang="en-AU" sz="1400" b="1">
+                  <a:solidFill>
+                    <a:srgbClr val="FFFFFF"/>
+                  </a:solidFill>
+                </a:rPr>
+                <a:t>Item 2</a:t>
+              </a:r>
+            </a:p>
+          </p:txBody>
+        </p:sp>
+        <p:sp>
+          <p:nvSpPr>
+            <p:cNvPr id="7" name="Item3">
+              <a:extLst>
+                <a:ext uri="{FF2B5EF4-FFF2-40B4-BE49-F238E27FC236}">
+                  <a16:creationId xmlns:a16="http://schemas.microsoft.com/office/drawing/2014/main" id="{A5DBD787-72E3-806B-DF47-81593EF642D1}"/>
+                </a:ext>
+              </a:extLst>
+            </p:cNvPr>
+            <p:cNvSpPr/>
+            <p:nvPr/>
+          </p:nvSpPr>
+          <p:spPr>
+            <a:xfrm>
+              <a:off x="3683000" y="4318000"/>
+              <a:ext cx="1524000" cy="635000"/>
+            </a:xfrm>
+            <a:prstGeom prst="rect">
+              <a:avLst/>
+            </a:prstGeom>
+            <a:solidFill>
+              <a:srgbClr val="FF7F0E"/>
+            </a:solidFill>
+            <a:ln w="19050" cap="flat" cmpd="sng" algn="ctr">
+              <a:noFill/>
+              <a:prstDash val="solid"/>
+              <a:miter lim="800000"/>
+            </a:ln>
+            <a:effectLst/>
+            <a:extLst>
+              <a:ext uri="{91240B29-F687-4F45-9708-019B960494DF}">
+                <a14:hiddenLine xmlns:a14="http://schemas.microsoft.com/office/drawing/2010/main" w="19050" cap="flat" cmpd="sng" algn="ctr">
+                  <a:solidFill>
+                    <a:schemeClr val="accent1">
+                      <a:shade val="15000"/>
+                    </a:schemeClr>
+                  </a:solidFill>
+                  <a:prstDash val="solid"/>
+                  <a:miter lim="800000"/>
+                </a14:hiddenLine>
+              </a:ext>
+            </a:extLst>
+          </p:spPr>
+          <p:style>
+            <a:lnRef idx="2">
+              <a:schemeClr val="accent1">
+                <a:shade val="15000"/>
+              </a:schemeClr>
+            </a:lnRef>
+            <a:fillRef idx="1">
+              <a:schemeClr val="accent1"/>
+            </a:fillRef>
+            <a:effectRef idx="0">
+              <a:schemeClr val="accent1"/>
+            </a:effectRef>
+            <a:fontRef idx="minor">
+              <a:schemeClr val="lt1"/>
+            </a:fontRef>
+          </p:style>
+          <p:txBody>
+            <a:bodyPr rtlCol="0" anchor="ctr"/>
+            <a:lstStyle/>
+            <a:p>
+              <a:pPr algn="ctr"/>
+              <a:r>
+                <a:rPr lang="en-AU" sz="1400" b="1">
+                  <a:solidFill>
+                    <a:srgbClr val="FFFFFF"/>
+                  </a:solidFill>
+                </a:rPr>
+                <a:t>Item 3</a:t>
+              </a:r>
+            </a:p>
+          </p:txBody>
+        </p:sp>
+      </p:grpSp>
+      <p:sp>
+        <p:nvSpPr>
+          <p:cNvPr id="9" name="TextBox 8">
+            <a:extLst>
+              <a:ext uri="{FF2B5EF4-FFF2-40B4-BE49-F238E27FC236}">
+                <a16:creationId xmlns:a16="http://schemas.microsoft.com/office/drawing/2014/main" id="{F19F5F15-1230-9858-7194-0F8964A16ED8}"/>
+              </a:ext>
+            </a:extLst>
+          </p:cNvPr>
+          <p:cNvSpPr txBox="1"/>
+          <p:nvPr/>
+        </p:nvSpPr>
+        <p:spPr>
+          <a:xfrm>
+            <a:off x="508000" y="5715000"/>
+            <a:ext cx="11176000" cy="646331"/>
+          </a:xfrm>
+          <a:prstGeom prst="rect">
+            <a:avLst/>
+          </a:prstGeom>
+          <a:noFill/>
+        </p:spPr>
+        <p:txBody>
+          <a:bodyPr vert="horz" rtlCol="0">
+            <a:spAutoFit/>
+          </a:bodyPr>
+          <a:lstStyle/>
+          <a:p>
+            <a:r>
+              <a:rPr lang="en-AU" sz="1200">
+                <a:solidFill>
+                  <a:srgbClr val="7F7F7F"/>
+                </a:solidFill>
+              </a:rPr>
+              <a:t>Shapes picked inside a group are aligned on their own, and the group stays a group. Select the whole panel instead and it moves as one piece. Reference = Group measures against the group's edges - here the grey card's - and needs only one shape: try centring Item 2 alone. Order and Duplicate work in here too, and copies stay in the group.</a:t>
+            </a:r>
+          </a:p>
+        </p:txBody>
+      </p:sp>
+    </p:spTree>
+    <p:extLst>
+      <p:ext uri="{BB962C8B-B14F-4D97-AF65-F5344CB8AC3E}">
+        <p14:creationId xmlns:p14="http://schemas.microsoft.com/office/powerpoint/2010/main" val="4234474179"/>
+      </p:ext>
+    </p:extLst>
+  </p:cSld>
+  <p:clrMapOvr>
+    <a:masterClrMapping/>
+  </p:clrMapOvr>
+</p:sld>
+</file>
+
+<file path=ppt/slides/slide19.xml><?xml version="1.0" encoding="utf-8"?>
+<p:sld xmlns:a="http://schemas.openxmlformats.org/drawingml/2006/main" xmlns:r="http://schemas.openxmlformats.org/officeDocument/2006/relationships" xmlns:p="http://schemas.openxmlformats.org/presentationml/2006/main">
+  <p:cSld>
+    <p:spTree>
+      <p:nvGrpSpPr>
+        <p:cNvPr id="1" name=""/>
+        <p:cNvGrpSpPr/>
+        <p:nvPr/>
+      </p:nvGrpSpPr>
+      <p:grpSpPr>
+        <a:xfrm>
+          <a:off x="0" y="0"/>
+          <a:ext cx="0" cy="0"/>
+          <a:chOff x="0" y="0"/>
+          <a:chExt cx="0" cy="0"/>
+        </a:xfrm>
+      </p:grpSpPr>
+      <p:sp>
+        <p:nvSpPr>
+          <p:cNvPr id="2" name="Heading">
+            <a:extLst>
+              <a:ext uri="{FF2B5EF4-FFF2-40B4-BE49-F238E27FC236}">
+                <a16:creationId xmlns:a16="http://schemas.microsoft.com/office/drawing/2014/main" id="{235FB603-6F81-B50C-6CA2-2CD07300E426}"/>
+              </a:ext>
+            </a:extLst>
+          </p:cNvPr>
+          <p:cNvSpPr txBox="1"/>
+          <p:nvPr/>
+        </p:nvSpPr>
+        <p:spPr>
+          <a:xfrm>
+            <a:off x="508000" y="304800"/>
+            <a:ext cx="11176000" cy="461665"/>
+          </a:xfrm>
+          <a:prstGeom prst="rect">
+            <a:avLst/>
+          </a:prstGeom>
+          <a:noFill/>
+        </p:spPr>
+        <p:txBody>
+          <a:bodyPr vert="horz" rtlCol="0">
+            <a:spAutoFit/>
+          </a:bodyPr>
+          <a:lstStyle/>
+          <a:p>
+            <a:r>
+              <a:rPr lang="en-AU" sz="2400" b="1">
+                <a:solidFill>
+                  <a:srgbClr val="282828"/>
+                </a:solidFill>
+              </a:rPr>
+              <a:t>Inside a rotated group</a:t>
+            </a:r>
+          </a:p>
+        </p:txBody>
+      </p:sp>
+      <p:sp>
+        <p:nvSpPr>
+          <p:cNvPr id="3" name="Instructions">
+            <a:extLst>
+              <a:ext uri="{FF2B5EF4-FFF2-40B4-BE49-F238E27FC236}">
+                <a16:creationId xmlns:a16="http://schemas.microsoft.com/office/drawing/2014/main" id="{D8259570-2BAA-BD8A-0041-6D414424CE1C}"/>
+              </a:ext>
+            </a:extLst>
+          </p:cNvPr>
+          <p:cNvSpPr txBox="1"/>
+          <p:nvPr/>
+        </p:nvSpPr>
+        <p:spPr>
+          <a:xfrm>
+            <a:off x="508000" y="762000"/>
+            <a:ext cx="11176000" cy="292388"/>
+          </a:xfrm>
+          <a:prstGeom prst="rect">
+            <a:avLst/>
+          </a:prstGeom>
+          <a:noFill/>
+        </p:spPr>
+        <p:txBody>
+          <a:bodyPr vert="horz" rtlCol="0">
+            <a:spAutoFit/>
+          </a:bodyPr>
+          <a:lstStyle/>
+          <a:p>
+            <a:r>
+              <a:rPr lang="en-AU" sz="1300">
+                <a:solidFill>
+                  <a:srgbClr val="7F7F7F"/>
+                </a:solidFill>
+              </a:rPr>
+              <a:t>Click the tilted panel, then pick Items 1 to 3 inside it. Align &gt; Left: they line up along the panel's edge, not the slide's.</a:t>
+            </a:r>
+          </a:p>
+        </p:txBody>
+      </p:sp>
+      <p:grpSp>
+        <p:nvGrpSpPr>
+          <p:cNvPr id="8" name="TiltPanel">
+            <a:extLst>
+              <a:ext uri="{FF2B5EF4-FFF2-40B4-BE49-F238E27FC236}">
+                <a16:creationId xmlns:a16="http://schemas.microsoft.com/office/drawing/2014/main" id="{F86D84E3-129B-5519-3939-358DFD878D30}"/>
+              </a:ext>
+            </a:extLst>
+          </p:cNvPr>
+          <p:cNvGrpSpPr/>
+          <p:nvPr/>
+        </p:nvGrpSpPr>
+        <p:grpSpPr>
+          <a:xfrm rot="900000">
+            <a:off x="2921000" y="1905000"/>
+            <a:ext cx="6350000" cy="3302000"/>
+            <a:chOff x="2921000" y="1905000"/>
+            <a:chExt cx="6350000" cy="3302000"/>
+          </a:xfrm>
+        </p:grpSpPr>
+        <p:sp>
+          <p:nvSpPr>
+            <p:cNvPr id="4" name="TiltCard">
+              <a:extLst>
+                <a:ext uri="{FF2B5EF4-FFF2-40B4-BE49-F238E27FC236}">
+                  <a16:creationId xmlns:a16="http://schemas.microsoft.com/office/drawing/2014/main" id="{520FAA42-FBF9-E327-D88C-FA5293B5E3F3}"/>
+                </a:ext>
+              </a:extLst>
+            </p:cNvPr>
+            <p:cNvSpPr/>
+            <p:nvPr/>
+          </p:nvSpPr>
+          <p:spPr>
+            <a:xfrm>
+              <a:off x="2921000" y="1905000"/>
+              <a:ext cx="6350000" cy="3302000"/>
+            </a:xfrm>
+            <a:prstGeom prst="rect">
+              <a:avLst/>
+            </a:prstGeom>
+            <a:solidFill>
+              <a:srgbClr val="DEE2E8"/>
+            </a:solidFill>
+            <a:ln w="19050" cap="flat" cmpd="sng" algn="ctr">
+              <a:noFill/>
+              <a:prstDash val="solid"/>
+              <a:miter lim="800000"/>
+            </a:ln>
+            <a:effectLst/>
+            <a:extLst>
+              <a:ext uri="{91240B29-F687-4F45-9708-019B960494DF}">
+                <a14:hiddenLine xmlns:a14="http://schemas.microsoft.com/office/drawing/2010/main" w="19050" cap="flat" cmpd="sng" algn="ctr">
+                  <a:solidFill>
+                    <a:schemeClr val="accent1">
+                      <a:shade val="15000"/>
+                    </a:schemeClr>
+                  </a:solidFill>
+                  <a:prstDash val="solid"/>
+                  <a:miter lim="800000"/>
+                </a14:hiddenLine>
+              </a:ext>
+            </a:extLst>
+          </p:spPr>
+          <p:style>
+            <a:lnRef idx="2">
+              <a:schemeClr val="accent1">
+                <a:shade val="15000"/>
+              </a:schemeClr>
+            </a:lnRef>
+            <a:fillRef idx="1">
+              <a:schemeClr val="accent1"/>
+            </a:fillRef>
+            <a:effectRef idx="0">
+              <a:schemeClr val="accent1"/>
+            </a:effectRef>
+            <a:fontRef idx="minor">
+              <a:schemeClr val="lt1"/>
+            </a:fontRef>
+          </p:style>
+          <p:txBody>
+            <a:bodyPr rtlCol="0" anchor="ctr"/>
+            <a:lstStyle/>
+            <a:p>
+              <a:pPr algn="ctr"/>
+              <a:endParaRPr lang="en-AU" sz="1400" b="1">
+                <a:solidFill>
+                  <a:srgbClr val="FFFFFF"/>
+                </a:solidFill>
+              </a:endParaRPr>
+            </a:p>
+          </p:txBody>
+        </p:sp>
+        <p:sp>
+          <p:nvSpPr>
+            <p:cNvPr id="5" name="TiltItem1">
+              <a:extLst>
+                <a:ext uri="{FF2B5EF4-FFF2-40B4-BE49-F238E27FC236}">
+                  <a16:creationId xmlns:a16="http://schemas.microsoft.com/office/drawing/2014/main" id="{5DA095F8-D51E-8483-9966-AA1EE0FAB883}"/>
+                </a:ext>
+              </a:extLst>
+            </p:cNvPr>
+            <p:cNvSpPr/>
+            <p:nvPr/>
+          </p:nvSpPr>
+          <p:spPr>
+            <a:xfrm>
+              <a:off x="3429000" y="2222500"/>
+              <a:ext cx="1905000" cy="635000"/>
+            </a:xfrm>
+            <a:prstGeom prst="rect">
+              <a:avLst/>
+            </a:prstGeom>
+            <a:solidFill>
+              <a:srgbClr val="1F77B4"/>
+            </a:solidFill>
+            <a:ln w="19050" cap="flat" cmpd="sng" algn="ctr">
+              <a:noFill/>
+              <a:prstDash val="solid"/>
+              <a:miter lim="800000"/>
+            </a:ln>
+            <a:effectLst/>
+            <a:extLst>
+              <a:ext uri="{91240B29-F687-4F45-9708-019B960494DF}">
+                <a14:hiddenLine xmlns:a14="http://schemas.microsoft.com/office/drawing/2010/main" w="19050" cap="flat" cmpd="sng" algn="ctr">
+                  <a:solidFill>
+                    <a:schemeClr val="accent1">
+                      <a:shade val="15000"/>
+                    </a:schemeClr>
+                  </a:solidFill>
+                  <a:prstDash val="solid"/>
+                  <a:miter lim="800000"/>
+                </a14:hiddenLine>
+              </a:ext>
+            </a:extLst>
+          </p:spPr>
+          <p:style>
+            <a:lnRef idx="2">
+              <a:schemeClr val="accent1">
+                <a:shade val="15000"/>
+              </a:schemeClr>
+            </a:lnRef>
+            <a:fillRef idx="1">
+              <a:schemeClr val="accent1"/>
+            </a:fillRef>
+            <a:effectRef idx="0">
+              <a:schemeClr val="accent1"/>
+            </a:effectRef>
+            <a:fontRef idx="minor">
+              <a:schemeClr val="lt1"/>
+            </a:fontRef>
+          </p:style>
+          <p:txBody>
+            <a:bodyPr rtlCol="0" anchor="ctr"/>
+            <a:lstStyle/>
+            <a:p>
+              <a:pPr algn="ctr"/>
+              <a:r>
+                <a:rPr lang="en-AU" sz="1400" b="1">
+                  <a:solidFill>
+                    <a:srgbClr val="FFFFFF"/>
+                  </a:solidFill>
+                </a:rPr>
+                <a:t>Item 1</a:t>
+              </a:r>
+            </a:p>
+          </p:txBody>
+        </p:sp>
+        <p:sp>
+          <p:nvSpPr>
+            <p:cNvPr id="6" name="TiltItem2">
+              <a:extLst>
+                <a:ext uri="{FF2B5EF4-FFF2-40B4-BE49-F238E27FC236}">
+                  <a16:creationId xmlns:a16="http://schemas.microsoft.com/office/drawing/2014/main" id="{AC5E17F1-634A-3543-E7D6-28938428847F}"/>
+                </a:ext>
+              </a:extLst>
+            </p:cNvPr>
+            <p:cNvSpPr/>
+            <p:nvPr/>
+          </p:nvSpPr>
+          <p:spPr>
+            <a:xfrm>
+              <a:off x="4318000" y="3238500"/>
+              <a:ext cx="2413000" cy="635000"/>
+            </a:xfrm>
+            <a:prstGeom prst="rect">
+              <a:avLst/>
+            </a:prstGeom>
+            <a:solidFill>
+              <a:srgbClr val="2CA02C"/>
+            </a:solidFill>
+            <a:ln w="19050" cap="flat" cmpd="sng" algn="ctr">
+              <a:noFill/>
+              <a:prstDash val="solid"/>
+              <a:miter lim="800000"/>
+            </a:ln>
+            <a:effectLst/>
+            <a:extLst>
+              <a:ext uri="{91240B29-F687-4F45-9708-019B960494DF}">
+                <a14:hiddenLine xmlns:a14="http://schemas.microsoft.com/office/drawing/2010/main" w="19050" cap="flat" cmpd="sng" algn="ctr">
+                  <a:solidFill>
+                    <a:schemeClr val="accent1">
+                      <a:shade val="15000"/>
+                    </a:schemeClr>
+                  </a:solidFill>
+                  <a:prstDash val="solid"/>
+                  <a:miter lim="800000"/>
+                </a14:hiddenLine>
+              </a:ext>
+            </a:extLst>
+          </p:spPr>
+          <p:style>
+            <a:lnRef idx="2">
+              <a:schemeClr val="accent1">
+                <a:shade val="15000"/>
+              </a:schemeClr>
+            </a:lnRef>
+            <a:fillRef idx="1">
+              <a:schemeClr val="accent1"/>
+            </a:fillRef>
+            <a:effectRef idx="0">
+              <a:schemeClr val="accent1"/>
+            </a:effectRef>
+            <a:fontRef idx="minor">
+              <a:schemeClr val="lt1"/>
+            </a:fontRef>
+          </p:style>
+          <p:txBody>
+            <a:bodyPr rtlCol="0" anchor="ctr"/>
+            <a:lstStyle/>
+            <a:p>
+              <a:pPr algn="ctr"/>
+              <a:r>
+                <a:rPr lang="en-AU" sz="1400" b="1">
+                  <a:solidFill>
+                    <a:srgbClr val="FFFFFF"/>
+                  </a:solidFill>
+                </a:rPr>
+                <a:t>Item 2</a:t>
+              </a:r>
+            </a:p>
+          </p:txBody>
+        </p:sp>
+        <p:sp>
+          <p:nvSpPr>
+            <p:cNvPr id="7" name="TiltItem3">
+              <a:extLst>
+                <a:ext uri="{FF2B5EF4-FFF2-40B4-BE49-F238E27FC236}">
+                  <a16:creationId xmlns:a16="http://schemas.microsoft.com/office/drawing/2014/main" id="{E37839A2-D5CC-B814-8824-50EC94A47436}"/>
+                </a:ext>
+              </a:extLst>
+            </p:cNvPr>
+            <p:cNvSpPr/>
+            <p:nvPr/>
+          </p:nvSpPr>
+          <p:spPr>
+            <a:xfrm>
+              <a:off x="3810000" y="4254500"/>
+              <a:ext cx="1524000" cy="635000"/>
+            </a:xfrm>
+            <a:prstGeom prst="rect">
+              <a:avLst/>
+            </a:prstGeom>
+            <a:solidFill>
+              <a:srgbClr val="FF7F0E"/>
+            </a:solidFill>
+            <a:ln w="19050" cap="flat" cmpd="sng" algn="ctr">
+              <a:noFill/>
+              <a:prstDash val="solid"/>
+              <a:miter lim="800000"/>
+            </a:ln>
+            <a:effectLst/>
+            <a:extLst>
+              <a:ext uri="{91240B29-F687-4F45-9708-019B960494DF}">
+                <a14:hiddenLine xmlns:a14="http://schemas.microsoft.com/office/drawing/2010/main" w="19050" cap="flat" cmpd="sng" algn="ctr">
+                  <a:solidFill>
+                    <a:schemeClr val="accent1">
+                      <a:shade val="15000"/>
+                    </a:schemeClr>
+                  </a:solidFill>
+                  <a:prstDash val="solid"/>
+                  <a:miter lim="800000"/>
+                </a14:hiddenLine>
+              </a:ext>
+            </a:extLst>
+          </p:spPr>
+          <p:style>
+            <a:lnRef idx="2">
+              <a:schemeClr val="accent1">
+                <a:shade val="15000"/>
+              </a:schemeClr>
+            </a:lnRef>
+            <a:fillRef idx="1">
+              <a:schemeClr val="accent1"/>
+            </a:fillRef>
+            <a:effectRef idx="0">
+              <a:schemeClr val="accent1"/>
+            </a:effectRef>
+            <a:fontRef idx="minor">
+              <a:schemeClr val="lt1"/>
+            </a:fontRef>
+          </p:style>
+          <p:txBody>
+            <a:bodyPr rtlCol="0" anchor="ctr"/>
+            <a:lstStyle/>
+            <a:p>
+              <a:pPr algn="ctr"/>
+              <a:r>
+                <a:rPr lang="en-AU" sz="1400" b="1">
+                  <a:solidFill>
+                    <a:srgbClr val="FFFFFF"/>
+                  </a:solidFill>
+                </a:rPr>
+                <a:t>Item 3</a:t>
+              </a:r>
+            </a:p>
+          </p:txBody>
+        </p:sp>
+      </p:grpSp>
+      <p:sp>
+        <p:nvSpPr>
+          <p:cNvPr id="9" name="TextBox 8">
+            <a:extLst>
+              <a:ext uri="{FF2B5EF4-FFF2-40B4-BE49-F238E27FC236}">
+                <a16:creationId xmlns:a16="http://schemas.microsoft.com/office/drawing/2014/main" id="{F2E5E971-F32A-5EE6-EA47-B1D1372F1A55}"/>
+              </a:ext>
+            </a:extLst>
+          </p:cNvPr>
+          <p:cNvSpPr txBox="1"/>
+          <p:nvPr/>
+        </p:nvSpPr>
+        <p:spPr>
+          <a:xfrm>
+            <a:off x="508000" y="5842000"/>
+            <a:ext cx="11176000" cy="461665"/>
+          </a:xfrm>
+          <a:prstGeom prst="rect">
+            <a:avLst/>
+          </a:prstGeom>
+          <a:noFill/>
+        </p:spPr>
+        <p:txBody>
+          <a:bodyPr vert="horz" rtlCol="0">
+            <a:spAutoFit/>
+          </a:bodyPr>
+          <a:lstStyle/>
+          <a:p>
+            <a:r>
+              <a:rPr lang="en-AU" sz="1200">
+                <a:solidFill>
+                  <a:srgbClr val="7F7F7F"/>
+                </a:solidFill>
+              </a:rPr>
+              <a:t>Inside a rotated group, left, top, centre and spacing all follow the group's own edges. Reference = Group works too. Slide, Slide margins, Content placeholder and Measure = Text bounds are refused here, because they run along the slide instead.</a:t>
+            </a:r>
+          </a:p>
+        </p:txBody>
+      </p:sp>
+    </p:spTree>
+    <p:extLst>
+      <p:ext uri="{BB962C8B-B14F-4D97-AF65-F5344CB8AC3E}">
+        <p14:creationId xmlns:p14="http://schemas.microsoft.com/office/powerpoint/2010/main" val="616811528"/>
       </p:ext>
     </p:extLst>
   </p:cSld>
@@ -7409,7 +8341,7 @@
           <p:cNvPr id="2" name="Heading">
             <a:extLst>
               <a:ext uri="{FF2B5EF4-FFF2-40B4-BE49-F238E27FC236}">
-                <a16:creationId xmlns:a16="http://schemas.microsoft.com/office/drawing/2014/main" id="{1DDA39E9-1DF5-8E7E-CF47-390B55A8B7E5}"/>
+                <a16:creationId xmlns:a16="http://schemas.microsoft.com/office/drawing/2014/main" id="{D1A3E26A-ED70-F54C-E269-CB851A3F5B26}"/>
               </a:ext>
             </a:extLst>
           </p:cNvPr>
@@ -7448,7 +8380,7 @@
           <p:cNvPr id="3" name="Instructions">
             <a:extLst>
               <a:ext uri="{FF2B5EF4-FFF2-40B4-BE49-F238E27FC236}">
-                <a16:creationId xmlns:a16="http://schemas.microsoft.com/office/drawing/2014/main" id="{2450E790-BF54-F559-C128-DACFF3ED53E6}"/>
+                <a16:creationId xmlns:a16="http://schemas.microsoft.com/office/drawing/2014/main" id="{9494A255-5EB9-39EC-69E0-CB3453EF6704}"/>
               </a:ext>
             </a:extLst>
           </p:cNvPr>
@@ -7487,7 +8419,7 @@
           <p:cNvPr id="4" name="Plain1">
             <a:extLst>
               <a:ext uri="{FF2B5EF4-FFF2-40B4-BE49-F238E27FC236}">
-                <a16:creationId xmlns:a16="http://schemas.microsoft.com/office/drawing/2014/main" id="{3FE11738-77DB-40A9-5EBE-A18BBCFDB884}"/>
+                <a16:creationId xmlns:a16="http://schemas.microsoft.com/office/drawing/2014/main" id="{18CC06E4-A236-E4E4-A3C6-B95F1711204A}"/>
               </a:ext>
             </a:extLst>
           </p:cNvPr>
@@ -7562,7 +8494,7 @@
           <p:cNvPr id="5" name="Tall">
             <a:extLst>
               <a:ext uri="{FF2B5EF4-FFF2-40B4-BE49-F238E27FC236}">
-                <a16:creationId xmlns:a16="http://schemas.microsoft.com/office/drawing/2014/main" id="{E07990BE-8418-6269-D42A-7D40CF0056EE}"/>
+                <a16:creationId xmlns:a16="http://schemas.microsoft.com/office/drawing/2014/main" id="{A46B54C3-39D4-2452-7FAC-2276A1FBA264}"/>
               </a:ext>
             </a:extLst>
           </p:cNvPr>
@@ -7637,7 +8569,7 @@
           <p:cNvPr id="6" name="Rotated">
             <a:extLst>
               <a:ext uri="{FF2B5EF4-FFF2-40B4-BE49-F238E27FC236}">
-                <a16:creationId xmlns:a16="http://schemas.microsoft.com/office/drawing/2014/main" id="{47BD9F65-0107-5C40-EC77-C6113BB5E0A3}"/>
+                <a16:creationId xmlns:a16="http://schemas.microsoft.com/office/drawing/2014/main" id="{2E643411-8029-55CB-0CA1-9DF38B9A88A2}"/>
               </a:ext>
             </a:extLst>
           </p:cNvPr>
@@ -7712,7 +8644,7 @@
           <p:cNvPr id="7" name="Plain2">
             <a:extLst>
               <a:ext uri="{FF2B5EF4-FFF2-40B4-BE49-F238E27FC236}">
-                <a16:creationId xmlns:a16="http://schemas.microsoft.com/office/drawing/2014/main" id="{1E351D04-9377-ABCC-9613-D7EBBA0BDD7A}"/>
+                <a16:creationId xmlns:a16="http://schemas.microsoft.com/office/drawing/2014/main" id="{126120C7-DFF2-FB2D-4158-C23B19BA3C39}"/>
               </a:ext>
             </a:extLst>
           </p:cNvPr>
@@ -7787,7 +8719,7 @@
           <p:cNvPr id="8" name="TextBox 7">
             <a:extLst>
               <a:ext uri="{FF2B5EF4-FFF2-40B4-BE49-F238E27FC236}">
-                <a16:creationId xmlns:a16="http://schemas.microsoft.com/office/drawing/2014/main" id="{2A7B0A5B-981D-754D-7CCF-90CEEB36CEB3}"/>
+                <a16:creationId xmlns:a16="http://schemas.microsoft.com/office/drawing/2014/main" id="{39254A30-9122-C86A-6CC5-156D34F81D51}"/>
               </a:ext>
             </a:extLst>
           </p:cNvPr>
@@ -7824,7 +8756,7 @@
     </p:spTree>
     <p:extLst>
       <p:ext uri="{BB962C8B-B14F-4D97-AF65-F5344CB8AC3E}">
-        <p14:creationId xmlns:p14="http://schemas.microsoft.com/office/powerpoint/2010/main" val="2971739246"/>
+        <p14:creationId xmlns:p14="http://schemas.microsoft.com/office/powerpoint/2010/main" val="1643005224"/>
       </p:ext>
     </p:extLst>
   </p:cSld>
@@ -7856,7 +8788,7 @@
           <p:cNvPr id="2" name="Heading">
             <a:extLst>
               <a:ext uri="{FF2B5EF4-FFF2-40B4-BE49-F238E27FC236}">
-                <a16:creationId xmlns:a16="http://schemas.microsoft.com/office/drawing/2014/main" id="{1FE37963-9FAC-BFFB-6550-2E8D9B3EE442}"/>
+                <a16:creationId xmlns:a16="http://schemas.microsoft.com/office/drawing/2014/main" id="{986C52E9-6ECC-B684-DF39-BF2EDF699F2F}"/>
               </a:ext>
             </a:extLst>
           </p:cNvPr>
@@ -7895,7 +8827,7 @@
           <p:cNvPr id="3" name="Instructions">
             <a:extLst>
               <a:ext uri="{FF2B5EF4-FFF2-40B4-BE49-F238E27FC236}">
-                <a16:creationId xmlns:a16="http://schemas.microsoft.com/office/drawing/2014/main" id="{17114A22-8496-37A3-EA1A-7BAD9249E54A}"/>
+                <a16:creationId xmlns:a16="http://schemas.microsoft.com/office/drawing/2014/main" id="{3E8413A1-45B9-D6F3-A5D8-E3A72811E6A8}"/>
               </a:ext>
             </a:extLst>
           </p:cNvPr>
@@ -7934,7 +8866,7 @@
           <p:cNvPr id="4" name="Small1">
             <a:extLst>
               <a:ext uri="{FF2B5EF4-FFF2-40B4-BE49-F238E27FC236}">
-                <a16:creationId xmlns:a16="http://schemas.microsoft.com/office/drawing/2014/main" id="{C72091D7-D271-4A54-4540-134CFB34A198}"/>
+                <a16:creationId xmlns:a16="http://schemas.microsoft.com/office/drawing/2014/main" id="{B74CECF4-7D20-7CB0-C48D-C6E4676FB53A}"/>
               </a:ext>
             </a:extLst>
           </p:cNvPr>
@@ -8009,7 +8941,7 @@
           <p:cNvPr id="5" name="Small2">
             <a:extLst>
               <a:ext uri="{FF2B5EF4-FFF2-40B4-BE49-F238E27FC236}">
-                <a16:creationId xmlns:a16="http://schemas.microsoft.com/office/drawing/2014/main" id="{10363F41-A6F0-1079-1E84-D985F34A23CE}"/>
+                <a16:creationId xmlns:a16="http://schemas.microsoft.com/office/drawing/2014/main" id="{70B3423E-FA47-E429-23E1-3A9D6AED9D27}"/>
               </a:ext>
             </a:extLst>
           </p:cNvPr>
@@ -8084,7 +9016,7 @@
           <p:cNvPr id="6" name="Small3">
             <a:extLst>
               <a:ext uri="{FF2B5EF4-FFF2-40B4-BE49-F238E27FC236}">
-                <a16:creationId xmlns:a16="http://schemas.microsoft.com/office/drawing/2014/main" id="{2EF65603-920D-53A7-DFF5-FA42AD59963F}"/>
+                <a16:creationId xmlns:a16="http://schemas.microsoft.com/office/drawing/2014/main" id="{581FBC19-FE64-B5FE-3723-293B53E47305}"/>
               </a:ext>
             </a:extLst>
           </p:cNvPr>
@@ -8159,7 +9091,7 @@
           <p:cNvPr id="7" name="Anchor">
             <a:extLst>
               <a:ext uri="{FF2B5EF4-FFF2-40B4-BE49-F238E27FC236}">
-                <a16:creationId xmlns:a16="http://schemas.microsoft.com/office/drawing/2014/main" id="{9ED3A2A8-F0A1-5FE2-527A-86AEC0012BAE}"/>
+                <a16:creationId xmlns:a16="http://schemas.microsoft.com/office/drawing/2014/main" id="{B6ED94BA-5EFD-9124-A7DC-9D7C88CF52D1}"/>
               </a:ext>
             </a:extLst>
           </p:cNvPr>
@@ -8232,7 +9164,7 @@
     </p:spTree>
     <p:extLst>
       <p:ext uri="{BB962C8B-B14F-4D97-AF65-F5344CB8AC3E}">
-        <p14:creationId xmlns:p14="http://schemas.microsoft.com/office/powerpoint/2010/main" val="2618575694"/>
+        <p14:creationId xmlns:p14="http://schemas.microsoft.com/office/powerpoint/2010/main" val="3058848618"/>
       </p:ext>
     </p:extLst>
   </p:cSld>
@@ -8264,7 +9196,7 @@
           <p:cNvPr id="2" name="Heading">
             <a:extLst>
               <a:ext uri="{FF2B5EF4-FFF2-40B4-BE49-F238E27FC236}">
-                <a16:creationId xmlns:a16="http://schemas.microsoft.com/office/drawing/2014/main" id="{9AD8B2A7-82D1-53EE-1289-AC1EDB138B55}"/>
+                <a16:creationId xmlns:a16="http://schemas.microsoft.com/office/drawing/2014/main" id="{155450BB-4454-4421-708F-99BE804C592B}"/>
               </a:ext>
             </a:extLst>
           </p:cNvPr>
@@ -8303,7 +9235,7 @@
           <p:cNvPr id="3" name="Instructions">
             <a:extLst>
               <a:ext uri="{FF2B5EF4-FFF2-40B4-BE49-F238E27FC236}">
-                <a16:creationId xmlns:a16="http://schemas.microsoft.com/office/drawing/2014/main" id="{B6F959C0-1D56-9A18-14A4-700213B1D995}"/>
+                <a16:creationId xmlns:a16="http://schemas.microsoft.com/office/drawing/2014/main" id="{9CCAC67F-EACA-2EBE-E7A2-46ADE69B202B}"/>
               </a:ext>
             </a:extLst>
           </p:cNvPr>
@@ -8342,7 +9274,7 @@
           <p:cNvPr id="4" name="W200">
             <a:extLst>
               <a:ext uri="{FF2B5EF4-FFF2-40B4-BE49-F238E27FC236}">
-                <a16:creationId xmlns:a16="http://schemas.microsoft.com/office/drawing/2014/main" id="{7E515EEC-88E6-CB8A-32C1-8E9C5B4F6B76}"/>
+                <a16:creationId xmlns:a16="http://schemas.microsoft.com/office/drawing/2014/main" id="{602153ED-C4D9-40F3-172F-1D767AFDFDE3}"/>
               </a:ext>
             </a:extLst>
           </p:cNvPr>
@@ -8417,7 +9349,7 @@
           <p:cNvPr id="5" name="W60">
             <a:extLst>
               <a:ext uri="{FF2B5EF4-FFF2-40B4-BE49-F238E27FC236}">
-                <a16:creationId xmlns:a16="http://schemas.microsoft.com/office/drawing/2014/main" id="{A4016496-3BDD-7698-928B-DF886F336FCB}"/>
+                <a16:creationId xmlns:a16="http://schemas.microsoft.com/office/drawing/2014/main" id="{1D2E6B6B-6CA9-B472-6689-FDE94217CCD4}"/>
               </a:ext>
             </a:extLst>
           </p:cNvPr>
@@ -8492,7 +9424,7 @@
           <p:cNvPr id="6" name="W120">
             <a:extLst>
               <a:ext uri="{FF2B5EF4-FFF2-40B4-BE49-F238E27FC236}">
-                <a16:creationId xmlns:a16="http://schemas.microsoft.com/office/drawing/2014/main" id="{4D19D1A4-4987-BAA2-3429-4542273C33B8}"/>
+                <a16:creationId xmlns:a16="http://schemas.microsoft.com/office/drawing/2014/main" id="{9225B384-5CB8-FBE8-EBC7-62BB96224997}"/>
               </a:ext>
             </a:extLst>
           </p:cNvPr>
@@ -8567,7 +9499,7 @@
           <p:cNvPr id="7" name="W40">
             <a:extLst>
               <a:ext uri="{FF2B5EF4-FFF2-40B4-BE49-F238E27FC236}">
-                <a16:creationId xmlns:a16="http://schemas.microsoft.com/office/drawing/2014/main" id="{F7A19768-7A95-167A-D124-13A2D388892E}"/>
+                <a16:creationId xmlns:a16="http://schemas.microsoft.com/office/drawing/2014/main" id="{AB334C30-A6CF-7399-C5E7-07BA88D9BAD7}"/>
               </a:ext>
             </a:extLst>
           </p:cNvPr>
@@ -8642,7 +9574,7 @@
           <p:cNvPr id="8" name="W150">
             <a:extLst>
               <a:ext uri="{FF2B5EF4-FFF2-40B4-BE49-F238E27FC236}">
-                <a16:creationId xmlns:a16="http://schemas.microsoft.com/office/drawing/2014/main" id="{F9D92E0B-7D21-2486-23AC-767D61DFEED6}"/>
+                <a16:creationId xmlns:a16="http://schemas.microsoft.com/office/drawing/2014/main" id="{A0286630-09C5-982F-19B7-DF6E33FE7E11}"/>
               </a:ext>
             </a:extLst>
           </p:cNvPr>
@@ -8717,7 +9649,7 @@
           <p:cNvPr id="9" name="TextBox 8">
             <a:extLst>
               <a:ext uri="{FF2B5EF4-FFF2-40B4-BE49-F238E27FC236}">
-                <a16:creationId xmlns:a16="http://schemas.microsoft.com/office/drawing/2014/main" id="{9187615B-D933-641D-305F-5A3F7F6918EF}"/>
+                <a16:creationId xmlns:a16="http://schemas.microsoft.com/office/drawing/2014/main" id="{840EFFDE-D7FD-4809-5656-E282E8F86049}"/>
               </a:ext>
             </a:extLst>
           </p:cNvPr>
@@ -8754,7 +9686,7 @@
     </p:spTree>
     <p:extLst>
       <p:ext uri="{BB962C8B-B14F-4D97-AF65-F5344CB8AC3E}">
-        <p14:creationId xmlns:p14="http://schemas.microsoft.com/office/powerpoint/2010/main" val="2600709844"/>
+        <p14:creationId xmlns:p14="http://schemas.microsoft.com/office/powerpoint/2010/main" val="2917858536"/>
       </p:ext>
     </p:extLst>
   </p:cSld>
@@ -8786,7 +9718,7 @@
           <p:cNvPr id="2" name="Heading">
             <a:extLst>
               <a:ext uri="{FF2B5EF4-FFF2-40B4-BE49-F238E27FC236}">
-                <a16:creationId xmlns:a16="http://schemas.microsoft.com/office/drawing/2014/main" id="{BC2FE07A-C0DA-E46F-D561-D2F4291B1260}"/>
+                <a16:creationId xmlns:a16="http://schemas.microsoft.com/office/drawing/2014/main" id="{61A2506A-E02C-8236-9C79-82202DD318F0}"/>
               </a:ext>
             </a:extLst>
           </p:cNvPr>
@@ -8825,7 +9757,7 @@
           <p:cNvPr id="3" name="Instructions">
             <a:extLst>
               <a:ext uri="{FF2B5EF4-FFF2-40B4-BE49-F238E27FC236}">
-                <a16:creationId xmlns:a16="http://schemas.microsoft.com/office/drawing/2014/main" id="{AAF3F2D7-BE96-E554-D996-2D9EB4DC6106}"/>
+                <a16:creationId xmlns:a16="http://schemas.microsoft.com/office/drawing/2014/main" id="{838AC774-FE8B-A40D-06ED-9F9CF866C5DA}"/>
               </a:ext>
             </a:extLst>
           </p:cNvPr>
@@ -8864,7 +9796,7 @@
           <p:cNvPr id="4" name="Gap0">
             <a:extLst>
               <a:ext uri="{FF2B5EF4-FFF2-40B4-BE49-F238E27FC236}">
-                <a16:creationId xmlns:a16="http://schemas.microsoft.com/office/drawing/2014/main" id="{3F8658EA-7731-6724-E466-94BDDDE387ED}"/>
+                <a16:creationId xmlns:a16="http://schemas.microsoft.com/office/drawing/2014/main" id="{385ADD94-1B38-CD1B-0FB6-EE022FCEE5A5}"/>
               </a:ext>
             </a:extLst>
           </p:cNvPr>
@@ -8939,7 +9871,7 @@
           <p:cNvPr id="5" name="Gap1">
             <a:extLst>
               <a:ext uri="{FF2B5EF4-FFF2-40B4-BE49-F238E27FC236}">
-                <a16:creationId xmlns:a16="http://schemas.microsoft.com/office/drawing/2014/main" id="{7CA08527-592B-F4E1-840E-A22891CA77CF}"/>
+                <a16:creationId xmlns:a16="http://schemas.microsoft.com/office/drawing/2014/main" id="{2B0D1BBB-8782-2160-CB65-972D5F287DFE}"/>
               </a:ext>
             </a:extLst>
           </p:cNvPr>
@@ -9014,7 +9946,7 @@
           <p:cNvPr id="6" name="Gap2">
             <a:extLst>
               <a:ext uri="{FF2B5EF4-FFF2-40B4-BE49-F238E27FC236}">
-                <a16:creationId xmlns:a16="http://schemas.microsoft.com/office/drawing/2014/main" id="{DCCA2B29-A227-0608-86C0-23164387F313}"/>
+                <a16:creationId xmlns:a16="http://schemas.microsoft.com/office/drawing/2014/main" id="{D23B8E60-0ED3-A467-C5C3-FC9458A54225}"/>
               </a:ext>
             </a:extLst>
           </p:cNvPr>
@@ -9089,7 +10021,7 @@
           <p:cNvPr id="7" name="Gap3">
             <a:extLst>
               <a:ext uri="{FF2B5EF4-FFF2-40B4-BE49-F238E27FC236}">
-                <a16:creationId xmlns:a16="http://schemas.microsoft.com/office/drawing/2014/main" id="{551034EB-CB3A-3CBF-54FD-65144CB7743C}"/>
+                <a16:creationId xmlns:a16="http://schemas.microsoft.com/office/drawing/2014/main" id="{9D240117-A63E-B762-4D93-3135D82256BF}"/>
               </a:ext>
             </a:extLst>
           </p:cNvPr>
@@ -9164,7 +10096,7 @@
           <p:cNvPr id="8" name="TextBox 7">
             <a:extLst>
               <a:ext uri="{FF2B5EF4-FFF2-40B4-BE49-F238E27FC236}">
-                <a16:creationId xmlns:a16="http://schemas.microsoft.com/office/drawing/2014/main" id="{C7544001-9FD2-9756-387C-8BF4339F1DC7}"/>
+                <a16:creationId xmlns:a16="http://schemas.microsoft.com/office/drawing/2014/main" id="{869D6F4A-A3F0-E9E7-72D0-1CDEBA832AE7}"/>
               </a:ext>
             </a:extLst>
           </p:cNvPr>
@@ -9201,7 +10133,7 @@
     </p:spTree>
     <p:extLst>
       <p:ext uri="{BB962C8B-B14F-4D97-AF65-F5344CB8AC3E}">
-        <p14:creationId xmlns:p14="http://schemas.microsoft.com/office/powerpoint/2010/main" val="2752815333"/>
+        <p14:creationId xmlns:p14="http://schemas.microsoft.com/office/powerpoint/2010/main" val="1888434000"/>
       </p:ext>
     </p:extLst>
   </p:cSld>
@@ -9233,7 +10165,7 @@
           <p:cNvPr id="2" name="Heading">
             <a:extLst>
               <a:ext uri="{FF2B5EF4-FFF2-40B4-BE49-F238E27FC236}">
-                <a16:creationId xmlns:a16="http://schemas.microsoft.com/office/drawing/2014/main" id="{D7C9E300-75A8-A200-A83D-7BCD4C023823}"/>
+                <a16:creationId xmlns:a16="http://schemas.microsoft.com/office/drawing/2014/main" id="{EDA02801-A36E-89CE-44DC-75ACFFAC0915}"/>
               </a:ext>
             </a:extLst>
           </p:cNvPr>
@@ -9272,7 +10204,7 @@
           <p:cNvPr id="3" name="Instructions">
             <a:extLst>
               <a:ext uri="{FF2B5EF4-FFF2-40B4-BE49-F238E27FC236}">
-                <a16:creationId xmlns:a16="http://schemas.microsoft.com/office/drawing/2014/main" id="{DB9CD109-C1C2-81FB-CCED-D4051A1D314D}"/>
+                <a16:creationId xmlns:a16="http://schemas.microsoft.com/office/drawing/2014/main" id="{EB3E5981-2954-BAC6-B50B-865A735E0040}"/>
               </a:ext>
             </a:extLst>
           </p:cNvPr>
@@ -9311,7 +10243,7 @@
           <p:cNvPr id="4" name="Odd1">
             <a:extLst>
               <a:ext uri="{FF2B5EF4-FFF2-40B4-BE49-F238E27FC236}">
-                <a16:creationId xmlns:a16="http://schemas.microsoft.com/office/drawing/2014/main" id="{72825E67-862D-B4FB-BC97-E0471427C1BD}"/>
+                <a16:creationId xmlns:a16="http://schemas.microsoft.com/office/drawing/2014/main" id="{0D8EA6CC-4422-0434-7EBB-EC77ED8B7D02}"/>
               </a:ext>
             </a:extLst>
           </p:cNvPr>
@@ -9386,7 +10318,7 @@
           <p:cNvPr id="5" name="Odd2">
             <a:extLst>
               <a:ext uri="{FF2B5EF4-FFF2-40B4-BE49-F238E27FC236}">
-                <a16:creationId xmlns:a16="http://schemas.microsoft.com/office/drawing/2014/main" id="{2D4F2370-1FC0-F6F5-1894-36C9D4661723}"/>
+                <a16:creationId xmlns:a16="http://schemas.microsoft.com/office/drawing/2014/main" id="{813F234B-F690-F650-2BB8-8EA12BCBC0B1}"/>
               </a:ext>
             </a:extLst>
           </p:cNvPr>
@@ -9461,7 +10393,7 @@
           <p:cNvPr id="6" name="Odd3">
             <a:extLst>
               <a:ext uri="{FF2B5EF4-FFF2-40B4-BE49-F238E27FC236}">
-                <a16:creationId xmlns:a16="http://schemas.microsoft.com/office/drawing/2014/main" id="{8F3C72B1-32D3-DADF-75B3-7ACAA3AF4783}"/>
+                <a16:creationId xmlns:a16="http://schemas.microsoft.com/office/drawing/2014/main" id="{7C211400-5708-1D60-812B-EB7B72EA56B9}"/>
               </a:ext>
             </a:extLst>
           </p:cNvPr>
@@ -9536,7 +10468,7 @@
           <p:cNvPr id="7" name="Target">
             <a:extLst>
               <a:ext uri="{FF2B5EF4-FFF2-40B4-BE49-F238E27FC236}">
-                <a16:creationId xmlns:a16="http://schemas.microsoft.com/office/drawing/2014/main" id="{0D5E0F19-B6E2-4EA6-6EA5-698758B5408B}"/>
+                <a16:creationId xmlns:a16="http://schemas.microsoft.com/office/drawing/2014/main" id="{CD397A8F-0123-8314-8036-9DF87E610287}"/>
               </a:ext>
             </a:extLst>
           </p:cNvPr>
@@ -9609,7 +10541,7 @@
     </p:spTree>
     <p:extLst>
       <p:ext uri="{BB962C8B-B14F-4D97-AF65-F5344CB8AC3E}">
-        <p14:creationId xmlns:p14="http://schemas.microsoft.com/office/powerpoint/2010/main" val="416029769"/>
+        <p14:creationId xmlns:p14="http://schemas.microsoft.com/office/powerpoint/2010/main" val="2716272557"/>
       </p:ext>
     </p:extLst>
   </p:cSld>
@@ -9641,7 +10573,7 @@
           <p:cNvPr id="2" name="Heading">
             <a:extLst>
               <a:ext uri="{FF2B5EF4-FFF2-40B4-BE49-F238E27FC236}">
-                <a16:creationId xmlns:a16="http://schemas.microsoft.com/office/drawing/2014/main" id="{DC03D324-67F6-07EE-0FA8-6A9E166C6343}"/>
+                <a16:creationId xmlns:a16="http://schemas.microsoft.com/office/drawing/2014/main" id="{3E2BDFC0-3568-8A9B-CBA5-DDB44E7CB79F}"/>
               </a:ext>
             </a:extLst>
           </p:cNvPr>
@@ -9680,7 +10612,7 @@
           <p:cNvPr id="3" name="Instructions">
             <a:extLst>
               <a:ext uri="{FF2B5EF4-FFF2-40B4-BE49-F238E27FC236}">
-                <a16:creationId xmlns:a16="http://schemas.microsoft.com/office/drawing/2014/main" id="{F59C305E-F6B2-28F8-1258-71491A9F75F9}"/>
+                <a16:creationId xmlns:a16="http://schemas.microsoft.com/office/drawing/2014/main" id="{F3EDD9F4-01E4-CFB8-EEA4-E01C457DC827}"/>
               </a:ext>
             </a:extLst>
           </p:cNvPr>
@@ -9719,7 +10651,7 @@
           <p:cNvPr id="4" name="Card1">
             <a:extLst>
               <a:ext uri="{FF2B5EF4-FFF2-40B4-BE49-F238E27FC236}">
-                <a16:creationId xmlns:a16="http://schemas.microsoft.com/office/drawing/2014/main" id="{EAD2D035-0BED-C626-6CB9-60A289E281F4}"/>
+                <a16:creationId xmlns:a16="http://schemas.microsoft.com/office/drawing/2014/main" id="{356855AF-40D4-3BAA-1B98-3FB9CFC8D349}"/>
               </a:ext>
             </a:extLst>
           </p:cNvPr>
@@ -9794,7 +10726,7 @@
           <p:cNvPr id="5" name="BarA">
             <a:extLst>
               <a:ext uri="{FF2B5EF4-FFF2-40B4-BE49-F238E27FC236}">
-                <a16:creationId xmlns:a16="http://schemas.microsoft.com/office/drawing/2014/main" id="{D3E8B5E9-A3BE-1D80-DBB5-C3A0C86B13D3}"/>
+                <a16:creationId xmlns:a16="http://schemas.microsoft.com/office/drawing/2014/main" id="{98838886-E63A-F291-3182-AD817711B807}"/>
               </a:ext>
             </a:extLst>
           </p:cNvPr>
@@ -9866,7 +10798,7 @@
           <p:cNvPr id="6" name="Card2">
             <a:extLst>
               <a:ext uri="{FF2B5EF4-FFF2-40B4-BE49-F238E27FC236}">
-                <a16:creationId xmlns:a16="http://schemas.microsoft.com/office/drawing/2014/main" id="{48CFE070-1FE4-B764-DF53-AF28DCEFB976}"/>
+                <a16:creationId xmlns:a16="http://schemas.microsoft.com/office/drawing/2014/main" id="{83739B7E-EBE7-8F22-9C23-A1BADB39E134}"/>
               </a:ext>
             </a:extLst>
           </p:cNvPr>
@@ -9941,7 +10873,7 @@
           <p:cNvPr id="7" name="BarB">
             <a:extLst>
               <a:ext uri="{FF2B5EF4-FFF2-40B4-BE49-F238E27FC236}">
-                <a16:creationId xmlns:a16="http://schemas.microsoft.com/office/drawing/2014/main" id="{9630613B-2F15-FBFA-0359-FE150955A4C4}"/>
+                <a16:creationId xmlns:a16="http://schemas.microsoft.com/office/drawing/2014/main" id="{BD3FB2D4-2EB3-96D9-BB2E-89F9331FC75D}"/>
               </a:ext>
             </a:extLst>
           </p:cNvPr>
@@ -10013,7 +10945,7 @@
           <p:cNvPr id="8" name="Card3">
             <a:extLst>
               <a:ext uri="{FF2B5EF4-FFF2-40B4-BE49-F238E27FC236}">
-                <a16:creationId xmlns:a16="http://schemas.microsoft.com/office/drawing/2014/main" id="{30F42D4E-C5EE-086B-C0DF-2A30A294664F}"/>
+                <a16:creationId xmlns:a16="http://schemas.microsoft.com/office/drawing/2014/main" id="{B16E9752-F839-01EB-C3E7-345938474E6C}"/>
               </a:ext>
             </a:extLst>
           </p:cNvPr>
@@ -10088,7 +11020,7 @@
           <p:cNvPr id="9" name="TextBox 8">
             <a:extLst>
               <a:ext uri="{FF2B5EF4-FFF2-40B4-BE49-F238E27FC236}">
-                <a16:creationId xmlns:a16="http://schemas.microsoft.com/office/drawing/2014/main" id="{389543DA-C31D-B4AF-F18D-8F7CA0ADBE3A}"/>
+                <a16:creationId xmlns:a16="http://schemas.microsoft.com/office/drawing/2014/main" id="{604F4EC8-BA29-A4D3-1F37-1B94A33038B7}"/>
               </a:ext>
             </a:extLst>
           </p:cNvPr>
@@ -10125,7 +11057,7 @@
     </p:spTree>
     <p:extLst>
       <p:ext uri="{BB962C8B-B14F-4D97-AF65-F5344CB8AC3E}">
-        <p14:creationId xmlns:p14="http://schemas.microsoft.com/office/powerpoint/2010/main" val="1690236990"/>
+        <p14:creationId xmlns:p14="http://schemas.microsoft.com/office/powerpoint/2010/main" val="2355846704"/>
       </p:ext>
     </p:extLst>
   </p:cSld>
@@ -10157,7 +11089,7 @@
           <p:cNvPr id="2" name="Heading">
             <a:extLst>
               <a:ext uri="{FF2B5EF4-FFF2-40B4-BE49-F238E27FC236}">
-                <a16:creationId xmlns:a16="http://schemas.microsoft.com/office/drawing/2014/main" id="{02812C76-5569-930D-10B4-3CE5EEEACCC7}"/>
+                <a16:creationId xmlns:a16="http://schemas.microsoft.com/office/drawing/2014/main" id="{4EC9C65D-489A-13FF-4622-6707C225FAC2}"/>
               </a:ext>
             </a:extLst>
           </p:cNvPr>
@@ -10196,7 +11128,7 @@
           <p:cNvPr id="3" name="Instructions">
             <a:extLst>
               <a:ext uri="{FF2B5EF4-FFF2-40B4-BE49-F238E27FC236}">
-                <a16:creationId xmlns:a16="http://schemas.microsoft.com/office/drawing/2014/main" id="{9070462C-1989-68EA-581C-BA368DF353E1}"/>
+                <a16:creationId xmlns:a16="http://schemas.microsoft.com/office/drawing/2014/main" id="{3FDE753C-249B-3827-FAC1-5509C6D88A71}"/>
               </a:ext>
             </a:extLst>
           </p:cNvPr>
@@ -10235,7 +11167,7 @@
           <p:cNvPr id="4" name="Step1">
             <a:extLst>
               <a:ext uri="{FF2B5EF4-FFF2-40B4-BE49-F238E27FC236}">
-                <a16:creationId xmlns:a16="http://schemas.microsoft.com/office/drawing/2014/main" id="{C6278B4A-FBC6-3C94-F6C9-4F9DF8747A41}"/>
+                <a16:creationId xmlns:a16="http://schemas.microsoft.com/office/drawing/2014/main" id="{1E65E548-4953-E17B-9975-478C731BB194}"/>
               </a:ext>
             </a:extLst>
           </p:cNvPr>
@@ -10310,7 +11242,7 @@
           <p:cNvPr id="5" name="Step2">
             <a:extLst>
               <a:ext uri="{FF2B5EF4-FFF2-40B4-BE49-F238E27FC236}">
-                <a16:creationId xmlns:a16="http://schemas.microsoft.com/office/drawing/2014/main" id="{A8AA8B9C-00AD-0D48-BD9D-CAC42BB806D8}"/>
+                <a16:creationId xmlns:a16="http://schemas.microsoft.com/office/drawing/2014/main" id="{C0EDEB55-755F-4B1B-DFA6-91D67FE553CF}"/>
               </a:ext>
             </a:extLst>
           </p:cNvPr>
@@ -10385,7 +11317,7 @@
           <p:cNvPr id="6" name="Step3">
             <a:extLst>
               <a:ext uri="{FF2B5EF4-FFF2-40B4-BE49-F238E27FC236}">
-                <a16:creationId xmlns:a16="http://schemas.microsoft.com/office/drawing/2014/main" id="{BFBC13E0-98AD-7A3E-DCAD-443CF28B06EF}"/>
+                <a16:creationId xmlns:a16="http://schemas.microsoft.com/office/drawing/2014/main" id="{A81A9CB5-3465-25A2-82CB-BA33D22333A4}"/>
               </a:ext>
             </a:extLst>
           </p:cNvPr>
@@ -10460,7 +11392,7 @@
           <p:cNvPr id="7" name="MarginTarget">
             <a:extLst>
               <a:ext uri="{FF2B5EF4-FFF2-40B4-BE49-F238E27FC236}">
-                <a16:creationId xmlns:a16="http://schemas.microsoft.com/office/drawing/2014/main" id="{D7DA3CF5-C675-27FE-78A1-CA7479A2B9ED}"/>
+                <a16:creationId xmlns:a16="http://schemas.microsoft.com/office/drawing/2014/main" id="{E2910351-11B6-7A5D-74C0-5EF74FE340B7}"/>
               </a:ext>
             </a:extLst>
           </p:cNvPr>
@@ -10535,7 +11467,7 @@
           <p:cNvPr id="8" name="TextBox 7">
             <a:extLst>
               <a:ext uri="{FF2B5EF4-FFF2-40B4-BE49-F238E27FC236}">
-                <a16:creationId xmlns:a16="http://schemas.microsoft.com/office/drawing/2014/main" id="{D55F4DED-5B97-1F81-E6E6-0AC7EF6C7C2D}"/>
+                <a16:creationId xmlns:a16="http://schemas.microsoft.com/office/drawing/2014/main" id="{8094A238-3889-CFB9-3D99-54DEAC8EB25D}"/>
               </a:ext>
             </a:extLst>
           </p:cNvPr>
@@ -10572,7 +11504,7 @@
     </p:spTree>
     <p:extLst>
       <p:ext uri="{BB962C8B-B14F-4D97-AF65-F5344CB8AC3E}">
-        <p14:creationId xmlns:p14="http://schemas.microsoft.com/office/powerpoint/2010/main" val="2603174459"/>
+        <p14:creationId xmlns:p14="http://schemas.microsoft.com/office/powerpoint/2010/main" val="144825909"/>
       </p:ext>
     </p:extLst>
   </p:cSld>
@@ -10604,7 +11536,7 @@
           <p:cNvPr id="2" name="Heading">
             <a:extLst>
               <a:ext uri="{FF2B5EF4-FFF2-40B4-BE49-F238E27FC236}">
-                <a16:creationId xmlns:a16="http://schemas.microsoft.com/office/drawing/2014/main" id="{BCA55109-275B-238C-516A-87B50472D308}"/>
+                <a16:creationId xmlns:a16="http://schemas.microsoft.com/office/drawing/2014/main" id="{A454DE5D-FA03-CEEC-7407-D8BC9BBD6F4E}"/>
               </a:ext>
             </a:extLst>
           </p:cNvPr>
@@ -10643,7 +11575,7 @@
           <p:cNvPr id="3" name="Instructions">
             <a:extLst>
               <a:ext uri="{FF2B5EF4-FFF2-40B4-BE49-F238E27FC236}">
-                <a16:creationId xmlns:a16="http://schemas.microsoft.com/office/drawing/2014/main" id="{305F9414-2FD5-FACF-9636-AB1164BFBB95}"/>
+                <a16:creationId xmlns:a16="http://schemas.microsoft.com/office/drawing/2014/main" id="{DDB3937C-200C-E9C5-DB5F-EC32A60CB9FF}"/>
               </a:ext>
             </a:extLst>
           </p:cNvPr>
@@ -10682,7 +11614,7 @@
           <p:cNvPr id="4" name="Ring1">
             <a:extLst>
               <a:ext uri="{FF2B5EF4-FFF2-40B4-BE49-F238E27FC236}">
-                <a16:creationId xmlns:a16="http://schemas.microsoft.com/office/drawing/2014/main" id="{CD7E57B7-0333-553E-27DB-0566EFD88DBD}"/>
+                <a16:creationId xmlns:a16="http://schemas.microsoft.com/office/drawing/2014/main" id="{5B59E80E-E8F4-2874-ABA3-FC3C9901FD9D}"/>
               </a:ext>
             </a:extLst>
           </p:cNvPr>
@@ -10757,7 +11689,7 @@
           <p:cNvPr id="5" name="Ring2">
             <a:extLst>
               <a:ext uri="{FF2B5EF4-FFF2-40B4-BE49-F238E27FC236}">
-                <a16:creationId xmlns:a16="http://schemas.microsoft.com/office/drawing/2014/main" id="{25A285F4-B409-CF54-CFA1-C0593F1F87AE}"/>
+                <a16:creationId xmlns:a16="http://schemas.microsoft.com/office/drawing/2014/main" id="{15DCD142-DD5A-8989-4610-29145C9A8B5B}"/>
               </a:ext>
             </a:extLst>
           </p:cNvPr>
@@ -10832,7 +11764,7 @@
           <p:cNvPr id="6" name="Ring3">
             <a:extLst>
               <a:ext uri="{FF2B5EF4-FFF2-40B4-BE49-F238E27FC236}">
-                <a16:creationId xmlns:a16="http://schemas.microsoft.com/office/drawing/2014/main" id="{8B6BBF25-7DBB-E9D1-6C71-03C8D55BC714}"/>
+                <a16:creationId xmlns:a16="http://schemas.microsoft.com/office/drawing/2014/main" id="{6F4804C5-6E32-B6A3-53C5-3E4C52301FBE}"/>
               </a:ext>
             </a:extLst>
           </p:cNvPr>
@@ -10907,7 +11839,7 @@
           <p:cNvPr id="7" name="Ring4">
             <a:extLst>
               <a:ext uri="{FF2B5EF4-FFF2-40B4-BE49-F238E27FC236}">
-                <a16:creationId xmlns:a16="http://schemas.microsoft.com/office/drawing/2014/main" id="{53C5B7AC-DCBB-06C0-9E5D-63E578755C82}"/>
+                <a16:creationId xmlns:a16="http://schemas.microsoft.com/office/drawing/2014/main" id="{C96A0B3B-03D0-C610-92ED-F64962D4AC2B}"/>
               </a:ext>
             </a:extLst>
           </p:cNvPr>
@@ -10982,7 +11914,7 @@
           <p:cNvPr id="8" name="Ring5">
             <a:extLst>
               <a:ext uri="{FF2B5EF4-FFF2-40B4-BE49-F238E27FC236}">
-                <a16:creationId xmlns:a16="http://schemas.microsoft.com/office/drawing/2014/main" id="{065516A0-6B9A-8B70-7B1B-E7C03401F2D6}"/>
+                <a16:creationId xmlns:a16="http://schemas.microsoft.com/office/drawing/2014/main" id="{2231524A-BF30-C0C4-96D7-7B27A1D8F594}"/>
               </a:ext>
             </a:extLst>
           </p:cNvPr>
@@ -11057,7 +11989,7 @@
           <p:cNvPr id="9" name="TextBox 8">
             <a:extLst>
               <a:ext uri="{FF2B5EF4-FFF2-40B4-BE49-F238E27FC236}">
-                <a16:creationId xmlns:a16="http://schemas.microsoft.com/office/drawing/2014/main" id="{C67D9180-785D-87B3-7966-B3F06E958645}"/>
+                <a16:creationId xmlns:a16="http://schemas.microsoft.com/office/drawing/2014/main" id="{8DC3EE30-DC3D-581D-D1DE-4E39B32AEDAD}"/>
               </a:ext>
             </a:extLst>
           </p:cNvPr>
@@ -11094,7 +12026,7 @@
     </p:spTree>
     <p:extLst>
       <p:ext uri="{BB962C8B-B14F-4D97-AF65-F5344CB8AC3E}">
-        <p14:creationId xmlns:p14="http://schemas.microsoft.com/office/powerpoint/2010/main" val="2240331504"/>
+        <p14:creationId xmlns:p14="http://schemas.microsoft.com/office/powerpoint/2010/main" val="1172250025"/>
       </p:ext>
     </p:extLst>
   </p:cSld>

--- a/sample/AlignPro-Sample.pptx
+++ b/sample/AlignPro-Sample.pptx
@@ -24,6 +24,7 @@
     <p:sldId id="272" r:id="rId18"/>
     <p:sldId id="273" r:id="rId19"/>
     <p:sldId id="274" r:id="rId20"/>
+    <p:sldId id="275" r:id="rId21"/>
   </p:sldIdLst>
   <p:sldSz cx="12192000" cy="6858000"/>
   <p:notesSz cx="6858000" cy="9144000"/>
@@ -147,7 +148,7 @@
           <p:cNvPr id="2" name="Title 1">
             <a:extLst>
               <a:ext uri="{FF2B5EF4-FFF2-40B4-BE49-F238E27FC236}">
-                <a16:creationId xmlns:a16="http://schemas.microsoft.com/office/drawing/2014/main" id="{576B18FA-FBF0-4FE4-B1B3-DC9221401379}"/>
+                <a16:creationId xmlns:a16="http://schemas.microsoft.com/office/drawing/2014/main" id="{23F49F87-39FF-9DC4-0BD5-74D4BB059F08}"/>
               </a:ext>
             </a:extLst>
           </p:cNvPr>
@@ -185,7 +186,7 @@
           <p:cNvPr id="3" name="Subtitle 2">
             <a:extLst>
               <a:ext uri="{FF2B5EF4-FFF2-40B4-BE49-F238E27FC236}">
-                <a16:creationId xmlns:a16="http://schemas.microsoft.com/office/drawing/2014/main" id="{9B606DEC-87F8-0CDA-8001-DF4AF3E77C59}"/>
+                <a16:creationId xmlns:a16="http://schemas.microsoft.com/office/drawing/2014/main" id="{AFC6EA8A-E73D-7CAA-FFD9-3F1900F17B63}"/>
               </a:ext>
             </a:extLst>
           </p:cNvPr>
@@ -256,7 +257,7 @@
           <p:cNvPr id="4" name="Date Placeholder 3">
             <a:extLst>
               <a:ext uri="{FF2B5EF4-FFF2-40B4-BE49-F238E27FC236}">
-                <a16:creationId xmlns:a16="http://schemas.microsoft.com/office/drawing/2014/main" id="{31FC4826-70A9-39D0-CA7A-82FEB91C6E2B}"/>
+                <a16:creationId xmlns:a16="http://schemas.microsoft.com/office/drawing/2014/main" id="{41423988-5240-00A9-1D11-6EAF51607ADA}"/>
               </a:ext>
             </a:extLst>
           </p:cNvPr>
@@ -272,7 +273,7 @@
           <a:bodyPr/>
           <a:lstStyle/>
           <a:p>
-            <a:fld id="{965718B5-E111-48C2-9805-526994096C52}" type="datetimeFigureOut">
+            <a:fld id="{AABDB7DB-0982-4DA3-AE23-FF8EB01401B3}" type="datetimeFigureOut">
               <a:rPr lang="en-AU" smtClean="0"/>
               <a:t>8/10/2026</a:t>
             </a:fld>
@@ -285,7 +286,7 @@
           <p:cNvPr id="5" name="Footer Placeholder 4">
             <a:extLst>
               <a:ext uri="{FF2B5EF4-FFF2-40B4-BE49-F238E27FC236}">
-                <a16:creationId xmlns:a16="http://schemas.microsoft.com/office/drawing/2014/main" id="{30B6EE46-6F88-9415-B094-9B896AF797CA}"/>
+                <a16:creationId xmlns:a16="http://schemas.microsoft.com/office/drawing/2014/main" id="{7708A039-82D7-4C83-3632-B04EF0D4DF69}"/>
               </a:ext>
             </a:extLst>
           </p:cNvPr>
@@ -310,7 +311,7 @@
           <p:cNvPr id="6" name="Slide Number Placeholder 5">
             <a:extLst>
               <a:ext uri="{FF2B5EF4-FFF2-40B4-BE49-F238E27FC236}">
-                <a16:creationId xmlns:a16="http://schemas.microsoft.com/office/drawing/2014/main" id="{44447F2E-E72B-2D28-5DD0-BAF1002C166E}"/>
+                <a16:creationId xmlns:a16="http://schemas.microsoft.com/office/drawing/2014/main" id="{2847DC01-CB32-E370-5995-D7E593FDF8C2}"/>
               </a:ext>
             </a:extLst>
           </p:cNvPr>
@@ -326,7 +327,7 @@
           <a:bodyPr/>
           <a:lstStyle/>
           <a:p>
-            <a:fld id="{DEAFF70B-5DE2-4471-8296-B0BE239360DD}" type="slidenum">
+            <a:fld id="{EF9535BA-5C7D-47B3-A2E2-05A4E0CD4755}" type="slidenum">
               <a:rPr lang="en-AU" smtClean="0"/>
               <a:t>‹#›</a:t>
             </a:fld>
@@ -337,7 +338,7 @@
     </p:spTree>
     <p:extLst>
       <p:ext uri="{BB962C8B-B14F-4D97-AF65-F5344CB8AC3E}">
-        <p14:creationId xmlns:p14="http://schemas.microsoft.com/office/powerpoint/2010/main" val="521479157"/>
+        <p14:creationId xmlns:p14="http://schemas.microsoft.com/office/powerpoint/2010/main" val="2733050541"/>
       </p:ext>
     </p:extLst>
   </p:cSld>
@@ -369,7 +370,7 @@
           <p:cNvPr id="2" name="Title 1">
             <a:extLst>
               <a:ext uri="{FF2B5EF4-FFF2-40B4-BE49-F238E27FC236}">
-                <a16:creationId xmlns:a16="http://schemas.microsoft.com/office/drawing/2014/main" id="{1B4DD4C6-8589-DDBF-F577-95A92C9322BF}"/>
+                <a16:creationId xmlns:a16="http://schemas.microsoft.com/office/drawing/2014/main" id="{6A5FE538-C598-EFA9-2DAE-447DB0ADCC26}"/>
               </a:ext>
             </a:extLst>
           </p:cNvPr>
@@ -398,7 +399,7 @@
           <p:cNvPr id="3" name="Vertical Text Placeholder 2">
             <a:extLst>
               <a:ext uri="{FF2B5EF4-FFF2-40B4-BE49-F238E27FC236}">
-                <a16:creationId xmlns:a16="http://schemas.microsoft.com/office/drawing/2014/main" id="{817DDC66-6FE3-BED2-B0BA-7128FF94A79D}"/>
+                <a16:creationId xmlns:a16="http://schemas.microsoft.com/office/drawing/2014/main" id="{D2D4338B-6386-AAED-6F6C-E10272C68C50}"/>
               </a:ext>
             </a:extLst>
           </p:cNvPr>
@@ -456,7 +457,7 @@
           <p:cNvPr id="4" name="Date Placeholder 3">
             <a:extLst>
               <a:ext uri="{FF2B5EF4-FFF2-40B4-BE49-F238E27FC236}">
-                <a16:creationId xmlns:a16="http://schemas.microsoft.com/office/drawing/2014/main" id="{04E6A66F-FA1D-81BD-8044-CF39F7A0AE52}"/>
+                <a16:creationId xmlns:a16="http://schemas.microsoft.com/office/drawing/2014/main" id="{6E85DA98-C9C4-9E48-22C4-321BF74E6631}"/>
               </a:ext>
             </a:extLst>
           </p:cNvPr>
@@ -472,7 +473,7 @@
           <a:bodyPr/>
           <a:lstStyle/>
           <a:p>
-            <a:fld id="{965718B5-E111-48C2-9805-526994096C52}" type="datetimeFigureOut">
+            <a:fld id="{AABDB7DB-0982-4DA3-AE23-FF8EB01401B3}" type="datetimeFigureOut">
               <a:rPr lang="en-AU" smtClean="0"/>
               <a:t>8/10/2026</a:t>
             </a:fld>
@@ -485,7 +486,7 @@
           <p:cNvPr id="5" name="Footer Placeholder 4">
             <a:extLst>
               <a:ext uri="{FF2B5EF4-FFF2-40B4-BE49-F238E27FC236}">
-                <a16:creationId xmlns:a16="http://schemas.microsoft.com/office/drawing/2014/main" id="{05DF345E-E92A-6AAA-FCF2-97A0A53EEE20}"/>
+                <a16:creationId xmlns:a16="http://schemas.microsoft.com/office/drawing/2014/main" id="{A407D88A-D71A-8FB3-74DD-CDDEC4D817B8}"/>
               </a:ext>
             </a:extLst>
           </p:cNvPr>
@@ -510,7 +511,7 @@
           <p:cNvPr id="6" name="Slide Number Placeholder 5">
             <a:extLst>
               <a:ext uri="{FF2B5EF4-FFF2-40B4-BE49-F238E27FC236}">
-                <a16:creationId xmlns:a16="http://schemas.microsoft.com/office/drawing/2014/main" id="{D7DA98D0-8F00-FA6E-BD26-C9BF12637E0D}"/>
+                <a16:creationId xmlns:a16="http://schemas.microsoft.com/office/drawing/2014/main" id="{C0909D88-D8A7-8CAB-7D03-3F531C7CC33A}"/>
               </a:ext>
             </a:extLst>
           </p:cNvPr>
@@ -526,7 +527,7 @@
           <a:bodyPr/>
           <a:lstStyle/>
           <a:p>
-            <a:fld id="{DEAFF70B-5DE2-4471-8296-B0BE239360DD}" type="slidenum">
+            <a:fld id="{EF9535BA-5C7D-47B3-A2E2-05A4E0CD4755}" type="slidenum">
               <a:rPr lang="en-AU" smtClean="0"/>
               <a:t>‹#›</a:t>
             </a:fld>
@@ -537,7 +538,7 @@
     </p:spTree>
     <p:extLst>
       <p:ext uri="{BB962C8B-B14F-4D97-AF65-F5344CB8AC3E}">
-        <p14:creationId xmlns:p14="http://schemas.microsoft.com/office/powerpoint/2010/main" val="1319249289"/>
+        <p14:creationId xmlns:p14="http://schemas.microsoft.com/office/powerpoint/2010/main" val="3145032970"/>
       </p:ext>
     </p:extLst>
   </p:cSld>
@@ -569,7 +570,7 @@
           <p:cNvPr id="2" name="Vertical Title 1">
             <a:extLst>
               <a:ext uri="{FF2B5EF4-FFF2-40B4-BE49-F238E27FC236}">
-                <a16:creationId xmlns:a16="http://schemas.microsoft.com/office/drawing/2014/main" id="{402576B2-B30C-E4F5-03BD-FC80C8A4B300}"/>
+                <a16:creationId xmlns:a16="http://schemas.microsoft.com/office/drawing/2014/main" id="{387F938C-5985-560D-64A1-DD96F7BF0012}"/>
               </a:ext>
             </a:extLst>
           </p:cNvPr>
@@ -603,7 +604,7 @@
           <p:cNvPr id="3" name="Vertical Text Placeholder 2">
             <a:extLst>
               <a:ext uri="{FF2B5EF4-FFF2-40B4-BE49-F238E27FC236}">
-                <a16:creationId xmlns:a16="http://schemas.microsoft.com/office/drawing/2014/main" id="{2D65834C-DF52-6092-73D5-91648D544807}"/>
+                <a16:creationId xmlns:a16="http://schemas.microsoft.com/office/drawing/2014/main" id="{016276AD-6E42-803E-BFF3-E4C2D06A794C}"/>
               </a:ext>
             </a:extLst>
           </p:cNvPr>
@@ -666,7 +667,7 @@
           <p:cNvPr id="4" name="Date Placeholder 3">
             <a:extLst>
               <a:ext uri="{FF2B5EF4-FFF2-40B4-BE49-F238E27FC236}">
-                <a16:creationId xmlns:a16="http://schemas.microsoft.com/office/drawing/2014/main" id="{DA33F456-AECC-034F-FA5A-F68E5F9ECA47}"/>
+                <a16:creationId xmlns:a16="http://schemas.microsoft.com/office/drawing/2014/main" id="{06C7696D-1DF7-EB64-F413-54EE68B7E5E2}"/>
               </a:ext>
             </a:extLst>
           </p:cNvPr>
@@ -682,7 +683,7 @@
           <a:bodyPr/>
           <a:lstStyle/>
           <a:p>
-            <a:fld id="{965718B5-E111-48C2-9805-526994096C52}" type="datetimeFigureOut">
+            <a:fld id="{AABDB7DB-0982-4DA3-AE23-FF8EB01401B3}" type="datetimeFigureOut">
               <a:rPr lang="en-AU" smtClean="0"/>
               <a:t>8/10/2026</a:t>
             </a:fld>
@@ -695,7 +696,7 @@
           <p:cNvPr id="5" name="Footer Placeholder 4">
             <a:extLst>
               <a:ext uri="{FF2B5EF4-FFF2-40B4-BE49-F238E27FC236}">
-                <a16:creationId xmlns:a16="http://schemas.microsoft.com/office/drawing/2014/main" id="{4CFD0854-C08A-DB00-6449-80E22FE1A587}"/>
+                <a16:creationId xmlns:a16="http://schemas.microsoft.com/office/drawing/2014/main" id="{190448E3-0041-EDFB-E23F-D5B849748B5B}"/>
               </a:ext>
             </a:extLst>
           </p:cNvPr>
@@ -720,7 +721,7 @@
           <p:cNvPr id="6" name="Slide Number Placeholder 5">
             <a:extLst>
               <a:ext uri="{FF2B5EF4-FFF2-40B4-BE49-F238E27FC236}">
-                <a16:creationId xmlns:a16="http://schemas.microsoft.com/office/drawing/2014/main" id="{3B6A2043-76AC-E2C8-BF97-09A26FD9255F}"/>
+                <a16:creationId xmlns:a16="http://schemas.microsoft.com/office/drawing/2014/main" id="{795DCDB6-184D-06D6-12F9-A682C9A7C847}"/>
               </a:ext>
             </a:extLst>
           </p:cNvPr>
@@ -736,7 +737,7 @@
           <a:bodyPr/>
           <a:lstStyle/>
           <a:p>
-            <a:fld id="{DEAFF70B-5DE2-4471-8296-B0BE239360DD}" type="slidenum">
+            <a:fld id="{EF9535BA-5C7D-47B3-A2E2-05A4E0CD4755}" type="slidenum">
               <a:rPr lang="en-AU" smtClean="0"/>
               <a:t>‹#›</a:t>
             </a:fld>
@@ -747,7 +748,7 @@
     </p:spTree>
     <p:extLst>
       <p:ext uri="{BB962C8B-B14F-4D97-AF65-F5344CB8AC3E}">
-        <p14:creationId xmlns:p14="http://schemas.microsoft.com/office/powerpoint/2010/main" val="2360563005"/>
+        <p14:creationId xmlns:p14="http://schemas.microsoft.com/office/powerpoint/2010/main" val="153161520"/>
       </p:ext>
     </p:extLst>
   </p:cSld>
@@ -779,7 +780,7 @@
           <p:cNvPr id="2" name="Title 1">
             <a:extLst>
               <a:ext uri="{FF2B5EF4-FFF2-40B4-BE49-F238E27FC236}">
-                <a16:creationId xmlns:a16="http://schemas.microsoft.com/office/drawing/2014/main" id="{DBF856F0-DE96-DF33-3AB6-6BAC9FF61BF4}"/>
+                <a16:creationId xmlns:a16="http://schemas.microsoft.com/office/drawing/2014/main" id="{31E6C708-1D81-2022-09F5-61680DD4F7F1}"/>
               </a:ext>
             </a:extLst>
           </p:cNvPr>
@@ -808,7 +809,7 @@
           <p:cNvPr id="3" name="Content Placeholder 2">
             <a:extLst>
               <a:ext uri="{FF2B5EF4-FFF2-40B4-BE49-F238E27FC236}">
-                <a16:creationId xmlns:a16="http://schemas.microsoft.com/office/drawing/2014/main" id="{29C1325A-7400-F57A-5895-B4ACEE257D2A}"/>
+                <a16:creationId xmlns:a16="http://schemas.microsoft.com/office/drawing/2014/main" id="{24F4D603-2E08-9316-C924-4247472875B5}"/>
               </a:ext>
             </a:extLst>
           </p:cNvPr>
@@ -866,7 +867,7 @@
           <p:cNvPr id="4" name="Date Placeholder 3">
             <a:extLst>
               <a:ext uri="{FF2B5EF4-FFF2-40B4-BE49-F238E27FC236}">
-                <a16:creationId xmlns:a16="http://schemas.microsoft.com/office/drawing/2014/main" id="{11D8C71A-3B7B-78E8-80A6-77BFB0314131}"/>
+                <a16:creationId xmlns:a16="http://schemas.microsoft.com/office/drawing/2014/main" id="{30EACFCE-7A38-C9F6-53EF-C4D94A7FF717}"/>
               </a:ext>
             </a:extLst>
           </p:cNvPr>
@@ -882,7 +883,7 @@
           <a:bodyPr/>
           <a:lstStyle/>
           <a:p>
-            <a:fld id="{965718B5-E111-48C2-9805-526994096C52}" type="datetimeFigureOut">
+            <a:fld id="{AABDB7DB-0982-4DA3-AE23-FF8EB01401B3}" type="datetimeFigureOut">
               <a:rPr lang="en-AU" smtClean="0"/>
               <a:t>8/10/2026</a:t>
             </a:fld>
@@ -895,7 +896,7 @@
           <p:cNvPr id="5" name="Footer Placeholder 4">
             <a:extLst>
               <a:ext uri="{FF2B5EF4-FFF2-40B4-BE49-F238E27FC236}">
-                <a16:creationId xmlns:a16="http://schemas.microsoft.com/office/drawing/2014/main" id="{4CAEACC8-85C4-482E-195B-3530D54F9634}"/>
+                <a16:creationId xmlns:a16="http://schemas.microsoft.com/office/drawing/2014/main" id="{83D176D9-CBCC-66D3-F9F6-FC5606A879B2}"/>
               </a:ext>
             </a:extLst>
           </p:cNvPr>
@@ -920,7 +921,7 @@
           <p:cNvPr id="6" name="Slide Number Placeholder 5">
             <a:extLst>
               <a:ext uri="{FF2B5EF4-FFF2-40B4-BE49-F238E27FC236}">
-                <a16:creationId xmlns:a16="http://schemas.microsoft.com/office/drawing/2014/main" id="{2EC68366-F366-E9DA-9386-5336E9C0F646}"/>
+                <a16:creationId xmlns:a16="http://schemas.microsoft.com/office/drawing/2014/main" id="{9DE94AD8-B743-0D99-9855-3221AD6152CA}"/>
               </a:ext>
             </a:extLst>
           </p:cNvPr>
@@ -936,7 +937,7 @@
           <a:bodyPr/>
           <a:lstStyle/>
           <a:p>
-            <a:fld id="{DEAFF70B-5DE2-4471-8296-B0BE239360DD}" type="slidenum">
+            <a:fld id="{EF9535BA-5C7D-47B3-A2E2-05A4E0CD4755}" type="slidenum">
               <a:rPr lang="en-AU" smtClean="0"/>
               <a:t>‹#›</a:t>
             </a:fld>
@@ -947,7 +948,7 @@
     </p:spTree>
     <p:extLst>
       <p:ext uri="{BB962C8B-B14F-4D97-AF65-F5344CB8AC3E}">
-        <p14:creationId xmlns:p14="http://schemas.microsoft.com/office/powerpoint/2010/main" val="1941887951"/>
+        <p14:creationId xmlns:p14="http://schemas.microsoft.com/office/powerpoint/2010/main" val="2525010037"/>
       </p:ext>
     </p:extLst>
   </p:cSld>
@@ -979,7 +980,7 @@
           <p:cNvPr id="2" name="Title 1">
             <a:extLst>
               <a:ext uri="{FF2B5EF4-FFF2-40B4-BE49-F238E27FC236}">
-                <a16:creationId xmlns:a16="http://schemas.microsoft.com/office/drawing/2014/main" id="{BFE7DE10-D1C1-DBC6-9BA3-1372D88C9228}"/>
+                <a16:creationId xmlns:a16="http://schemas.microsoft.com/office/drawing/2014/main" id="{2F5856E2-7E9F-7BC1-58C8-42F3C34C3207}"/>
               </a:ext>
             </a:extLst>
           </p:cNvPr>
@@ -1017,7 +1018,7 @@
           <p:cNvPr id="3" name="Text Placeholder 2">
             <a:extLst>
               <a:ext uri="{FF2B5EF4-FFF2-40B4-BE49-F238E27FC236}">
-                <a16:creationId xmlns:a16="http://schemas.microsoft.com/office/drawing/2014/main" id="{A107035E-5915-14F0-4EEB-1293FC91731D}"/>
+                <a16:creationId xmlns:a16="http://schemas.microsoft.com/office/drawing/2014/main" id="{65CAFFDD-C081-0C3E-808B-66221713540C}"/>
               </a:ext>
             </a:extLst>
           </p:cNvPr>
@@ -1142,7 +1143,7 @@
           <p:cNvPr id="4" name="Date Placeholder 3">
             <a:extLst>
               <a:ext uri="{FF2B5EF4-FFF2-40B4-BE49-F238E27FC236}">
-                <a16:creationId xmlns:a16="http://schemas.microsoft.com/office/drawing/2014/main" id="{A6DCDD8B-F461-78D9-FDA8-A976702DE64F}"/>
+                <a16:creationId xmlns:a16="http://schemas.microsoft.com/office/drawing/2014/main" id="{1F067048-3D18-258F-20A6-A4CCC5C63AA1}"/>
               </a:ext>
             </a:extLst>
           </p:cNvPr>
@@ -1158,7 +1159,7 @@
           <a:bodyPr/>
           <a:lstStyle/>
           <a:p>
-            <a:fld id="{965718B5-E111-48C2-9805-526994096C52}" type="datetimeFigureOut">
+            <a:fld id="{AABDB7DB-0982-4DA3-AE23-FF8EB01401B3}" type="datetimeFigureOut">
               <a:rPr lang="en-AU" smtClean="0"/>
               <a:t>8/10/2026</a:t>
             </a:fld>
@@ -1171,7 +1172,7 @@
           <p:cNvPr id="5" name="Footer Placeholder 4">
             <a:extLst>
               <a:ext uri="{FF2B5EF4-FFF2-40B4-BE49-F238E27FC236}">
-                <a16:creationId xmlns:a16="http://schemas.microsoft.com/office/drawing/2014/main" id="{4359918F-19C8-E8AF-3653-4279EB7B96E0}"/>
+                <a16:creationId xmlns:a16="http://schemas.microsoft.com/office/drawing/2014/main" id="{3B64527F-4723-237F-587E-3B8B62003EEE}"/>
               </a:ext>
             </a:extLst>
           </p:cNvPr>
@@ -1196,7 +1197,7 @@
           <p:cNvPr id="6" name="Slide Number Placeholder 5">
             <a:extLst>
               <a:ext uri="{FF2B5EF4-FFF2-40B4-BE49-F238E27FC236}">
-                <a16:creationId xmlns:a16="http://schemas.microsoft.com/office/drawing/2014/main" id="{A38BB6C0-4324-AAE5-C8BB-69F83197DA3D}"/>
+                <a16:creationId xmlns:a16="http://schemas.microsoft.com/office/drawing/2014/main" id="{C44CB930-AB33-93AF-5441-6D12DD38752E}"/>
               </a:ext>
             </a:extLst>
           </p:cNvPr>
@@ -1212,7 +1213,7 @@
           <a:bodyPr/>
           <a:lstStyle/>
           <a:p>
-            <a:fld id="{DEAFF70B-5DE2-4471-8296-B0BE239360DD}" type="slidenum">
+            <a:fld id="{EF9535BA-5C7D-47B3-A2E2-05A4E0CD4755}" type="slidenum">
               <a:rPr lang="en-AU" smtClean="0"/>
               <a:t>‹#›</a:t>
             </a:fld>
@@ -1223,7 +1224,7 @@
     </p:spTree>
     <p:extLst>
       <p:ext uri="{BB962C8B-B14F-4D97-AF65-F5344CB8AC3E}">
-        <p14:creationId xmlns:p14="http://schemas.microsoft.com/office/powerpoint/2010/main" val="2145866792"/>
+        <p14:creationId xmlns:p14="http://schemas.microsoft.com/office/powerpoint/2010/main" val="888511375"/>
       </p:ext>
     </p:extLst>
   </p:cSld>
@@ -1255,7 +1256,7 @@
           <p:cNvPr id="2" name="Title 1">
             <a:extLst>
               <a:ext uri="{FF2B5EF4-FFF2-40B4-BE49-F238E27FC236}">
-                <a16:creationId xmlns:a16="http://schemas.microsoft.com/office/drawing/2014/main" id="{B1BB1FF1-62D2-21B9-5805-10393C8DD2C0}"/>
+                <a16:creationId xmlns:a16="http://schemas.microsoft.com/office/drawing/2014/main" id="{8008CCA8-7BC4-C360-A389-7A1BA38593B7}"/>
               </a:ext>
             </a:extLst>
           </p:cNvPr>
@@ -1284,7 +1285,7 @@
           <p:cNvPr id="3" name="Content Placeholder 2">
             <a:extLst>
               <a:ext uri="{FF2B5EF4-FFF2-40B4-BE49-F238E27FC236}">
-                <a16:creationId xmlns:a16="http://schemas.microsoft.com/office/drawing/2014/main" id="{A564A53C-5769-9736-D470-AF89240D9900}"/>
+                <a16:creationId xmlns:a16="http://schemas.microsoft.com/office/drawing/2014/main" id="{56C911E2-4A9A-DB6B-B52B-6EF582067F80}"/>
               </a:ext>
             </a:extLst>
           </p:cNvPr>
@@ -1347,7 +1348,7 @@
           <p:cNvPr id="4" name="Content Placeholder 3">
             <a:extLst>
               <a:ext uri="{FF2B5EF4-FFF2-40B4-BE49-F238E27FC236}">
-                <a16:creationId xmlns:a16="http://schemas.microsoft.com/office/drawing/2014/main" id="{6B655837-C458-D2E1-6769-077160D95750}"/>
+                <a16:creationId xmlns:a16="http://schemas.microsoft.com/office/drawing/2014/main" id="{C3C46218-AC5E-CBFF-76E0-4BC5EBA2C5F2}"/>
               </a:ext>
             </a:extLst>
           </p:cNvPr>
@@ -1410,7 +1411,7 @@
           <p:cNvPr id="5" name="Date Placeholder 4">
             <a:extLst>
               <a:ext uri="{FF2B5EF4-FFF2-40B4-BE49-F238E27FC236}">
-                <a16:creationId xmlns:a16="http://schemas.microsoft.com/office/drawing/2014/main" id="{121E6140-8340-2641-1868-FFEB5171C897}"/>
+                <a16:creationId xmlns:a16="http://schemas.microsoft.com/office/drawing/2014/main" id="{F998E064-03FA-4D8B-30D5-A9DE14922F21}"/>
               </a:ext>
             </a:extLst>
           </p:cNvPr>
@@ -1426,7 +1427,7 @@
           <a:bodyPr/>
           <a:lstStyle/>
           <a:p>
-            <a:fld id="{965718B5-E111-48C2-9805-526994096C52}" type="datetimeFigureOut">
+            <a:fld id="{AABDB7DB-0982-4DA3-AE23-FF8EB01401B3}" type="datetimeFigureOut">
               <a:rPr lang="en-AU" smtClean="0"/>
               <a:t>8/10/2026</a:t>
             </a:fld>
@@ -1439,7 +1440,7 @@
           <p:cNvPr id="6" name="Footer Placeholder 5">
             <a:extLst>
               <a:ext uri="{FF2B5EF4-FFF2-40B4-BE49-F238E27FC236}">
-                <a16:creationId xmlns:a16="http://schemas.microsoft.com/office/drawing/2014/main" id="{DE9B237B-E67D-A9E6-4411-EBAEFC693DE9}"/>
+                <a16:creationId xmlns:a16="http://schemas.microsoft.com/office/drawing/2014/main" id="{CA212161-2F94-DA99-A135-AFA14542EF02}"/>
               </a:ext>
             </a:extLst>
           </p:cNvPr>
@@ -1464,7 +1465,7 @@
           <p:cNvPr id="7" name="Slide Number Placeholder 6">
             <a:extLst>
               <a:ext uri="{FF2B5EF4-FFF2-40B4-BE49-F238E27FC236}">
-                <a16:creationId xmlns:a16="http://schemas.microsoft.com/office/drawing/2014/main" id="{00A64262-A20E-6468-EA1D-27A13948CF5A}"/>
+                <a16:creationId xmlns:a16="http://schemas.microsoft.com/office/drawing/2014/main" id="{116A3455-9BEB-5771-71E7-48D9D44E8960}"/>
               </a:ext>
             </a:extLst>
           </p:cNvPr>
@@ -1480,7 +1481,7 @@
           <a:bodyPr/>
           <a:lstStyle/>
           <a:p>
-            <a:fld id="{DEAFF70B-5DE2-4471-8296-B0BE239360DD}" type="slidenum">
+            <a:fld id="{EF9535BA-5C7D-47B3-A2E2-05A4E0CD4755}" type="slidenum">
               <a:rPr lang="en-AU" smtClean="0"/>
               <a:t>‹#›</a:t>
             </a:fld>
@@ -1491,7 +1492,7 @@
     </p:spTree>
     <p:extLst>
       <p:ext uri="{BB962C8B-B14F-4D97-AF65-F5344CB8AC3E}">
-        <p14:creationId xmlns:p14="http://schemas.microsoft.com/office/powerpoint/2010/main" val="195757060"/>
+        <p14:creationId xmlns:p14="http://schemas.microsoft.com/office/powerpoint/2010/main" val="2647763499"/>
       </p:ext>
     </p:extLst>
   </p:cSld>
@@ -1523,7 +1524,7 @@
           <p:cNvPr id="2" name="Title 1">
             <a:extLst>
               <a:ext uri="{FF2B5EF4-FFF2-40B4-BE49-F238E27FC236}">
-                <a16:creationId xmlns:a16="http://schemas.microsoft.com/office/drawing/2014/main" id="{CEE2D745-A3A5-D050-DC6A-E1508296CCB1}"/>
+                <a16:creationId xmlns:a16="http://schemas.microsoft.com/office/drawing/2014/main" id="{4D178C13-D0C2-E4AC-0BF7-2CCF9E19E847}"/>
               </a:ext>
             </a:extLst>
           </p:cNvPr>
@@ -1557,7 +1558,7 @@
           <p:cNvPr id="3" name="Text Placeholder 2">
             <a:extLst>
               <a:ext uri="{FF2B5EF4-FFF2-40B4-BE49-F238E27FC236}">
-                <a16:creationId xmlns:a16="http://schemas.microsoft.com/office/drawing/2014/main" id="{850BCC43-7BE9-9F21-1E09-008BF3F03F8D}"/>
+                <a16:creationId xmlns:a16="http://schemas.microsoft.com/office/drawing/2014/main" id="{AEDDA1AC-142F-4451-1579-B382A9E70A2C}"/>
               </a:ext>
             </a:extLst>
           </p:cNvPr>
@@ -1628,7 +1629,7 @@
           <p:cNvPr id="4" name="Content Placeholder 3">
             <a:extLst>
               <a:ext uri="{FF2B5EF4-FFF2-40B4-BE49-F238E27FC236}">
-                <a16:creationId xmlns:a16="http://schemas.microsoft.com/office/drawing/2014/main" id="{86C8AAE0-915B-8564-857A-15748DC8BC71}"/>
+                <a16:creationId xmlns:a16="http://schemas.microsoft.com/office/drawing/2014/main" id="{29ABA109-763D-7BED-0BD2-D7DE6A4087DE}"/>
               </a:ext>
             </a:extLst>
           </p:cNvPr>
@@ -1691,7 +1692,7 @@
           <p:cNvPr id="5" name="Text Placeholder 4">
             <a:extLst>
               <a:ext uri="{FF2B5EF4-FFF2-40B4-BE49-F238E27FC236}">
-                <a16:creationId xmlns:a16="http://schemas.microsoft.com/office/drawing/2014/main" id="{6B22CFFA-FA28-9033-75B6-55C1DBD818B2}"/>
+                <a16:creationId xmlns:a16="http://schemas.microsoft.com/office/drawing/2014/main" id="{2827E7EA-AD0E-9D7F-80CA-95D3D4084728}"/>
               </a:ext>
             </a:extLst>
           </p:cNvPr>
@@ -1762,7 +1763,7 @@
           <p:cNvPr id="6" name="Content Placeholder 5">
             <a:extLst>
               <a:ext uri="{FF2B5EF4-FFF2-40B4-BE49-F238E27FC236}">
-                <a16:creationId xmlns:a16="http://schemas.microsoft.com/office/drawing/2014/main" id="{84E1D608-347A-1A12-ECFB-BFB87E122A30}"/>
+                <a16:creationId xmlns:a16="http://schemas.microsoft.com/office/drawing/2014/main" id="{E151DCB1-504C-3BCF-37AC-B6E8BD38B159}"/>
               </a:ext>
             </a:extLst>
           </p:cNvPr>
@@ -1825,7 +1826,7 @@
           <p:cNvPr id="7" name="Date Placeholder 6">
             <a:extLst>
               <a:ext uri="{FF2B5EF4-FFF2-40B4-BE49-F238E27FC236}">
-                <a16:creationId xmlns:a16="http://schemas.microsoft.com/office/drawing/2014/main" id="{69464242-E1D8-0594-ADCD-7350F3E939FF}"/>
+                <a16:creationId xmlns:a16="http://schemas.microsoft.com/office/drawing/2014/main" id="{5790C124-ECF8-1936-E8F7-6CD4122E967F}"/>
               </a:ext>
             </a:extLst>
           </p:cNvPr>
@@ -1841,7 +1842,7 @@
           <a:bodyPr/>
           <a:lstStyle/>
           <a:p>
-            <a:fld id="{965718B5-E111-48C2-9805-526994096C52}" type="datetimeFigureOut">
+            <a:fld id="{AABDB7DB-0982-4DA3-AE23-FF8EB01401B3}" type="datetimeFigureOut">
               <a:rPr lang="en-AU" smtClean="0"/>
               <a:t>8/10/2026</a:t>
             </a:fld>
@@ -1854,7 +1855,7 @@
           <p:cNvPr id="8" name="Footer Placeholder 7">
             <a:extLst>
               <a:ext uri="{FF2B5EF4-FFF2-40B4-BE49-F238E27FC236}">
-                <a16:creationId xmlns:a16="http://schemas.microsoft.com/office/drawing/2014/main" id="{BFC1597D-4B7E-0BFF-7DAA-0B1C4EDC86A5}"/>
+                <a16:creationId xmlns:a16="http://schemas.microsoft.com/office/drawing/2014/main" id="{0E5CD84C-B8E0-90A8-A3AC-3ABCEF27C192}"/>
               </a:ext>
             </a:extLst>
           </p:cNvPr>
@@ -1879,7 +1880,7 @@
           <p:cNvPr id="9" name="Slide Number Placeholder 8">
             <a:extLst>
               <a:ext uri="{FF2B5EF4-FFF2-40B4-BE49-F238E27FC236}">
-                <a16:creationId xmlns:a16="http://schemas.microsoft.com/office/drawing/2014/main" id="{CF0BCE65-4A9A-EA39-D963-01D2E6B1AC95}"/>
+                <a16:creationId xmlns:a16="http://schemas.microsoft.com/office/drawing/2014/main" id="{10F588CB-8135-B45C-13C3-51583B0D1458}"/>
               </a:ext>
             </a:extLst>
           </p:cNvPr>
@@ -1895,7 +1896,7 @@
           <a:bodyPr/>
           <a:lstStyle/>
           <a:p>
-            <a:fld id="{DEAFF70B-5DE2-4471-8296-B0BE239360DD}" type="slidenum">
+            <a:fld id="{EF9535BA-5C7D-47B3-A2E2-05A4E0CD4755}" type="slidenum">
               <a:rPr lang="en-AU" smtClean="0"/>
               <a:t>‹#›</a:t>
             </a:fld>
@@ -1906,7 +1907,7 @@
     </p:spTree>
     <p:extLst>
       <p:ext uri="{BB962C8B-B14F-4D97-AF65-F5344CB8AC3E}">
-        <p14:creationId xmlns:p14="http://schemas.microsoft.com/office/powerpoint/2010/main" val="578521613"/>
+        <p14:creationId xmlns:p14="http://schemas.microsoft.com/office/powerpoint/2010/main" val="550982409"/>
       </p:ext>
     </p:extLst>
   </p:cSld>
@@ -1938,7 +1939,7 @@
           <p:cNvPr id="2" name="Title 1">
             <a:extLst>
               <a:ext uri="{FF2B5EF4-FFF2-40B4-BE49-F238E27FC236}">
-                <a16:creationId xmlns:a16="http://schemas.microsoft.com/office/drawing/2014/main" id="{634B6A78-FBFC-3964-97E1-B6C81312667C}"/>
+                <a16:creationId xmlns:a16="http://schemas.microsoft.com/office/drawing/2014/main" id="{5DDFF948-94AD-8CF2-0FB9-6254E3F33185}"/>
               </a:ext>
             </a:extLst>
           </p:cNvPr>
@@ -1967,7 +1968,7 @@
           <p:cNvPr id="3" name="Date Placeholder 2">
             <a:extLst>
               <a:ext uri="{FF2B5EF4-FFF2-40B4-BE49-F238E27FC236}">
-                <a16:creationId xmlns:a16="http://schemas.microsoft.com/office/drawing/2014/main" id="{64918EC0-B444-1B5F-67C1-08A1887DB43B}"/>
+                <a16:creationId xmlns:a16="http://schemas.microsoft.com/office/drawing/2014/main" id="{37C4B6A3-A265-F005-BB6A-1498BB635C83}"/>
               </a:ext>
             </a:extLst>
           </p:cNvPr>
@@ -1983,7 +1984,7 @@
           <a:bodyPr/>
           <a:lstStyle/>
           <a:p>
-            <a:fld id="{965718B5-E111-48C2-9805-526994096C52}" type="datetimeFigureOut">
+            <a:fld id="{AABDB7DB-0982-4DA3-AE23-FF8EB01401B3}" type="datetimeFigureOut">
               <a:rPr lang="en-AU" smtClean="0"/>
               <a:t>8/10/2026</a:t>
             </a:fld>
@@ -1996,7 +1997,7 @@
           <p:cNvPr id="4" name="Footer Placeholder 3">
             <a:extLst>
               <a:ext uri="{FF2B5EF4-FFF2-40B4-BE49-F238E27FC236}">
-                <a16:creationId xmlns:a16="http://schemas.microsoft.com/office/drawing/2014/main" id="{ACE51512-D938-C2C5-5D49-4A1D39DDA8CB}"/>
+                <a16:creationId xmlns:a16="http://schemas.microsoft.com/office/drawing/2014/main" id="{EFAE0624-E038-0493-5E24-BC56930A8EF4}"/>
               </a:ext>
             </a:extLst>
           </p:cNvPr>
@@ -2021,7 +2022,7 @@
           <p:cNvPr id="5" name="Slide Number Placeholder 4">
             <a:extLst>
               <a:ext uri="{FF2B5EF4-FFF2-40B4-BE49-F238E27FC236}">
-                <a16:creationId xmlns:a16="http://schemas.microsoft.com/office/drawing/2014/main" id="{A71954BA-1F79-ED3D-9DE0-692D782255B9}"/>
+                <a16:creationId xmlns:a16="http://schemas.microsoft.com/office/drawing/2014/main" id="{E7AB6329-B951-CFD1-A8E7-75568563E041}"/>
               </a:ext>
             </a:extLst>
           </p:cNvPr>
@@ -2037,7 +2038,7 @@
           <a:bodyPr/>
           <a:lstStyle/>
           <a:p>
-            <a:fld id="{DEAFF70B-5DE2-4471-8296-B0BE239360DD}" type="slidenum">
+            <a:fld id="{EF9535BA-5C7D-47B3-A2E2-05A4E0CD4755}" type="slidenum">
               <a:rPr lang="en-AU" smtClean="0"/>
               <a:t>‹#›</a:t>
             </a:fld>
@@ -2048,7 +2049,7 @@
     </p:spTree>
     <p:extLst>
       <p:ext uri="{BB962C8B-B14F-4D97-AF65-F5344CB8AC3E}">
-        <p14:creationId xmlns:p14="http://schemas.microsoft.com/office/powerpoint/2010/main" val="1362610076"/>
+        <p14:creationId xmlns:p14="http://schemas.microsoft.com/office/powerpoint/2010/main" val="2044331702"/>
       </p:ext>
     </p:extLst>
   </p:cSld>
@@ -2080,7 +2081,7 @@
           <p:cNvPr id="2" name="Date Placeholder 1">
             <a:extLst>
               <a:ext uri="{FF2B5EF4-FFF2-40B4-BE49-F238E27FC236}">
-                <a16:creationId xmlns:a16="http://schemas.microsoft.com/office/drawing/2014/main" id="{C2C1E429-6087-A270-ABEA-013EC93EA538}"/>
+                <a16:creationId xmlns:a16="http://schemas.microsoft.com/office/drawing/2014/main" id="{5ADEBF25-12A3-4B32-3C82-7CEB2C0BB4E8}"/>
               </a:ext>
             </a:extLst>
           </p:cNvPr>
@@ -2096,7 +2097,7 @@
           <a:bodyPr/>
           <a:lstStyle/>
           <a:p>
-            <a:fld id="{965718B5-E111-48C2-9805-526994096C52}" type="datetimeFigureOut">
+            <a:fld id="{AABDB7DB-0982-4DA3-AE23-FF8EB01401B3}" type="datetimeFigureOut">
               <a:rPr lang="en-AU" smtClean="0"/>
               <a:t>8/10/2026</a:t>
             </a:fld>
@@ -2109,7 +2110,7 @@
           <p:cNvPr id="3" name="Footer Placeholder 2">
             <a:extLst>
               <a:ext uri="{FF2B5EF4-FFF2-40B4-BE49-F238E27FC236}">
-                <a16:creationId xmlns:a16="http://schemas.microsoft.com/office/drawing/2014/main" id="{3D4A65D8-C57D-DC0F-2B45-3D3F7879FCA3}"/>
+                <a16:creationId xmlns:a16="http://schemas.microsoft.com/office/drawing/2014/main" id="{C3BCC708-EA1F-0D86-3380-4CAA63073648}"/>
               </a:ext>
             </a:extLst>
           </p:cNvPr>
@@ -2134,7 +2135,7 @@
           <p:cNvPr id="4" name="Slide Number Placeholder 3">
             <a:extLst>
               <a:ext uri="{FF2B5EF4-FFF2-40B4-BE49-F238E27FC236}">
-                <a16:creationId xmlns:a16="http://schemas.microsoft.com/office/drawing/2014/main" id="{434D6AE3-9027-74A4-419D-E716BB4D214F}"/>
+                <a16:creationId xmlns:a16="http://schemas.microsoft.com/office/drawing/2014/main" id="{D1B9589F-FE66-D71A-2E32-CB6733937E2B}"/>
               </a:ext>
             </a:extLst>
           </p:cNvPr>
@@ -2150,7 +2151,7 @@
           <a:bodyPr/>
           <a:lstStyle/>
           <a:p>
-            <a:fld id="{DEAFF70B-5DE2-4471-8296-B0BE239360DD}" type="slidenum">
+            <a:fld id="{EF9535BA-5C7D-47B3-A2E2-05A4E0CD4755}" type="slidenum">
               <a:rPr lang="en-AU" smtClean="0"/>
               <a:t>‹#›</a:t>
             </a:fld>
@@ -2161,7 +2162,7 @@
     </p:spTree>
     <p:extLst>
       <p:ext uri="{BB962C8B-B14F-4D97-AF65-F5344CB8AC3E}">
-        <p14:creationId xmlns:p14="http://schemas.microsoft.com/office/powerpoint/2010/main" val="3896724605"/>
+        <p14:creationId xmlns:p14="http://schemas.microsoft.com/office/powerpoint/2010/main" val="1500953755"/>
       </p:ext>
     </p:extLst>
   </p:cSld>
@@ -2193,7 +2194,7 @@
           <p:cNvPr id="2" name="Title 1">
             <a:extLst>
               <a:ext uri="{FF2B5EF4-FFF2-40B4-BE49-F238E27FC236}">
-                <a16:creationId xmlns:a16="http://schemas.microsoft.com/office/drawing/2014/main" id="{237ECB78-E052-BC2F-4929-94451D35A976}"/>
+                <a16:creationId xmlns:a16="http://schemas.microsoft.com/office/drawing/2014/main" id="{119DE03B-FBA6-8559-62AF-4E6AB028E922}"/>
               </a:ext>
             </a:extLst>
           </p:cNvPr>
@@ -2231,7 +2232,7 @@
           <p:cNvPr id="3" name="Content Placeholder 2">
             <a:extLst>
               <a:ext uri="{FF2B5EF4-FFF2-40B4-BE49-F238E27FC236}">
-                <a16:creationId xmlns:a16="http://schemas.microsoft.com/office/drawing/2014/main" id="{65EAA6AE-BA5A-6E7A-9DBD-6B9FF15705BC}"/>
+                <a16:creationId xmlns:a16="http://schemas.microsoft.com/office/drawing/2014/main" id="{95AE287D-4B04-9551-6B1B-891C973BFBAC}"/>
               </a:ext>
             </a:extLst>
           </p:cNvPr>
@@ -2322,7 +2323,7 @@
           <p:cNvPr id="4" name="Text Placeholder 3">
             <a:extLst>
               <a:ext uri="{FF2B5EF4-FFF2-40B4-BE49-F238E27FC236}">
-                <a16:creationId xmlns:a16="http://schemas.microsoft.com/office/drawing/2014/main" id="{3589FD72-93C4-C2B3-1B82-CA4F36CD56D8}"/>
+                <a16:creationId xmlns:a16="http://schemas.microsoft.com/office/drawing/2014/main" id="{F8703F97-ED88-8BF1-9A72-5BA4D9176208}"/>
               </a:ext>
             </a:extLst>
           </p:cNvPr>
@@ -2393,7 +2394,7 @@
           <p:cNvPr id="5" name="Date Placeholder 4">
             <a:extLst>
               <a:ext uri="{FF2B5EF4-FFF2-40B4-BE49-F238E27FC236}">
-                <a16:creationId xmlns:a16="http://schemas.microsoft.com/office/drawing/2014/main" id="{BFEEA89F-871B-F4D8-DF44-52F604479E20}"/>
+                <a16:creationId xmlns:a16="http://schemas.microsoft.com/office/drawing/2014/main" id="{8FFC157B-BDF2-633E-67E8-811D44427EE4}"/>
               </a:ext>
             </a:extLst>
           </p:cNvPr>
@@ -2409,7 +2410,7 @@
           <a:bodyPr/>
           <a:lstStyle/>
           <a:p>
-            <a:fld id="{965718B5-E111-48C2-9805-526994096C52}" type="datetimeFigureOut">
+            <a:fld id="{AABDB7DB-0982-4DA3-AE23-FF8EB01401B3}" type="datetimeFigureOut">
               <a:rPr lang="en-AU" smtClean="0"/>
               <a:t>8/10/2026</a:t>
             </a:fld>
@@ -2422,7 +2423,7 @@
           <p:cNvPr id="6" name="Footer Placeholder 5">
             <a:extLst>
               <a:ext uri="{FF2B5EF4-FFF2-40B4-BE49-F238E27FC236}">
-                <a16:creationId xmlns:a16="http://schemas.microsoft.com/office/drawing/2014/main" id="{1D8F771C-51A9-2779-4E0A-D5EDE3CE7B0F}"/>
+                <a16:creationId xmlns:a16="http://schemas.microsoft.com/office/drawing/2014/main" id="{9281E9A6-7663-1B89-33E4-1312C312F127}"/>
               </a:ext>
             </a:extLst>
           </p:cNvPr>
@@ -2447,7 +2448,7 @@
           <p:cNvPr id="7" name="Slide Number Placeholder 6">
             <a:extLst>
               <a:ext uri="{FF2B5EF4-FFF2-40B4-BE49-F238E27FC236}">
-                <a16:creationId xmlns:a16="http://schemas.microsoft.com/office/drawing/2014/main" id="{D633A494-B710-8474-CD6A-9679751CE270}"/>
+                <a16:creationId xmlns:a16="http://schemas.microsoft.com/office/drawing/2014/main" id="{6AEE1251-3027-68E8-55A6-0F690358BBAE}"/>
               </a:ext>
             </a:extLst>
           </p:cNvPr>
@@ -2463,7 +2464,7 @@
           <a:bodyPr/>
           <a:lstStyle/>
           <a:p>
-            <a:fld id="{DEAFF70B-5DE2-4471-8296-B0BE239360DD}" type="slidenum">
+            <a:fld id="{EF9535BA-5C7D-47B3-A2E2-05A4E0CD4755}" type="slidenum">
               <a:rPr lang="en-AU" smtClean="0"/>
               <a:t>‹#›</a:t>
             </a:fld>
@@ -2474,7 +2475,7 @@
     </p:spTree>
     <p:extLst>
       <p:ext uri="{BB962C8B-B14F-4D97-AF65-F5344CB8AC3E}">
-        <p14:creationId xmlns:p14="http://schemas.microsoft.com/office/powerpoint/2010/main" val="3883296200"/>
+        <p14:creationId xmlns:p14="http://schemas.microsoft.com/office/powerpoint/2010/main" val="3790053268"/>
       </p:ext>
     </p:extLst>
   </p:cSld>
@@ -2506,7 +2507,7 @@
           <p:cNvPr id="2" name="Title 1">
             <a:extLst>
               <a:ext uri="{FF2B5EF4-FFF2-40B4-BE49-F238E27FC236}">
-                <a16:creationId xmlns:a16="http://schemas.microsoft.com/office/drawing/2014/main" id="{EFC8CC3C-A4AB-06C9-EFA0-231A88B8262E}"/>
+                <a16:creationId xmlns:a16="http://schemas.microsoft.com/office/drawing/2014/main" id="{D59D061E-D1CB-9467-13AA-06AEB5C3069E}"/>
               </a:ext>
             </a:extLst>
           </p:cNvPr>
@@ -2544,7 +2545,7 @@
           <p:cNvPr id="3" name="Picture Placeholder 2">
             <a:extLst>
               <a:ext uri="{FF2B5EF4-FFF2-40B4-BE49-F238E27FC236}">
-                <a16:creationId xmlns:a16="http://schemas.microsoft.com/office/drawing/2014/main" id="{ACD6592D-97C1-114D-A31E-93D954351B3D}"/>
+                <a16:creationId xmlns:a16="http://schemas.microsoft.com/office/drawing/2014/main" id="{F6DDC746-3C96-66C2-7D48-B7506BB6D68C}"/>
               </a:ext>
             </a:extLst>
           </p:cNvPr>
@@ -2611,7 +2612,7 @@
           <p:cNvPr id="4" name="Text Placeholder 3">
             <a:extLst>
               <a:ext uri="{FF2B5EF4-FFF2-40B4-BE49-F238E27FC236}">
-                <a16:creationId xmlns:a16="http://schemas.microsoft.com/office/drawing/2014/main" id="{C388FA7B-E046-157C-A07E-B0CC1029B15D}"/>
+                <a16:creationId xmlns:a16="http://schemas.microsoft.com/office/drawing/2014/main" id="{A9D4368C-3372-B635-BB43-13CE2EC73A19}"/>
               </a:ext>
             </a:extLst>
           </p:cNvPr>
@@ -2682,7 +2683,7 @@
           <p:cNvPr id="5" name="Date Placeholder 4">
             <a:extLst>
               <a:ext uri="{FF2B5EF4-FFF2-40B4-BE49-F238E27FC236}">
-                <a16:creationId xmlns:a16="http://schemas.microsoft.com/office/drawing/2014/main" id="{D84384C2-A0E5-D162-A2F1-5E2D2C50BDB5}"/>
+                <a16:creationId xmlns:a16="http://schemas.microsoft.com/office/drawing/2014/main" id="{4A33C768-67CE-DE27-8447-D02BA575D3C4}"/>
               </a:ext>
             </a:extLst>
           </p:cNvPr>
@@ -2698,7 +2699,7 @@
           <a:bodyPr/>
           <a:lstStyle/>
           <a:p>
-            <a:fld id="{965718B5-E111-48C2-9805-526994096C52}" type="datetimeFigureOut">
+            <a:fld id="{AABDB7DB-0982-4DA3-AE23-FF8EB01401B3}" type="datetimeFigureOut">
               <a:rPr lang="en-AU" smtClean="0"/>
               <a:t>8/10/2026</a:t>
             </a:fld>
@@ -2711,7 +2712,7 @@
           <p:cNvPr id="6" name="Footer Placeholder 5">
             <a:extLst>
               <a:ext uri="{FF2B5EF4-FFF2-40B4-BE49-F238E27FC236}">
-                <a16:creationId xmlns:a16="http://schemas.microsoft.com/office/drawing/2014/main" id="{0D1EA3DD-2AB2-1856-4EFE-FEEBAF010D8B}"/>
+                <a16:creationId xmlns:a16="http://schemas.microsoft.com/office/drawing/2014/main" id="{FC4C9F83-4405-EAA5-05E0-AEB781E1E3F4}"/>
               </a:ext>
             </a:extLst>
           </p:cNvPr>
@@ -2736,7 +2737,7 @@
           <p:cNvPr id="7" name="Slide Number Placeholder 6">
             <a:extLst>
               <a:ext uri="{FF2B5EF4-FFF2-40B4-BE49-F238E27FC236}">
-                <a16:creationId xmlns:a16="http://schemas.microsoft.com/office/drawing/2014/main" id="{DEA11A1E-D368-6D5E-1268-FB1FAABCFAB8}"/>
+                <a16:creationId xmlns:a16="http://schemas.microsoft.com/office/drawing/2014/main" id="{DD488609-F3C6-F4D5-6F6A-56FA58362220}"/>
               </a:ext>
             </a:extLst>
           </p:cNvPr>
@@ -2752,7 +2753,7 @@
           <a:bodyPr/>
           <a:lstStyle/>
           <a:p>
-            <a:fld id="{DEAFF70B-5DE2-4471-8296-B0BE239360DD}" type="slidenum">
+            <a:fld id="{EF9535BA-5C7D-47B3-A2E2-05A4E0CD4755}" type="slidenum">
               <a:rPr lang="en-AU" smtClean="0"/>
               <a:t>‹#›</a:t>
             </a:fld>
@@ -2763,7 +2764,7 @@
     </p:spTree>
     <p:extLst>
       <p:ext uri="{BB962C8B-B14F-4D97-AF65-F5344CB8AC3E}">
-        <p14:creationId xmlns:p14="http://schemas.microsoft.com/office/powerpoint/2010/main" val="2476233865"/>
+        <p14:creationId xmlns:p14="http://schemas.microsoft.com/office/powerpoint/2010/main" val="684113758"/>
       </p:ext>
     </p:extLst>
   </p:cSld>
@@ -2800,7 +2801,7 @@
           <p:cNvPr id="2" name="Title Placeholder 1">
             <a:extLst>
               <a:ext uri="{FF2B5EF4-FFF2-40B4-BE49-F238E27FC236}">
-                <a16:creationId xmlns:a16="http://schemas.microsoft.com/office/drawing/2014/main" id="{7AB07ACF-8707-D354-791C-15E08C6F817E}"/>
+                <a16:creationId xmlns:a16="http://schemas.microsoft.com/office/drawing/2014/main" id="{C3F9F34D-702F-28A6-03C1-A8ACA5400DB7}"/>
               </a:ext>
             </a:extLst>
           </p:cNvPr>
@@ -2839,7 +2840,7 @@
           <p:cNvPr id="3" name="Text Placeholder 2">
             <a:extLst>
               <a:ext uri="{FF2B5EF4-FFF2-40B4-BE49-F238E27FC236}">
-                <a16:creationId xmlns:a16="http://schemas.microsoft.com/office/drawing/2014/main" id="{82ED82DA-3363-A18B-6C4B-C35BFE8E25BF}"/>
+                <a16:creationId xmlns:a16="http://schemas.microsoft.com/office/drawing/2014/main" id="{8184AC0A-E2CB-19E1-EBD5-4D14AFC16C32}"/>
               </a:ext>
             </a:extLst>
           </p:cNvPr>
@@ -2907,7 +2908,7 @@
           <p:cNvPr id="4" name="Date Placeholder 3">
             <a:extLst>
               <a:ext uri="{FF2B5EF4-FFF2-40B4-BE49-F238E27FC236}">
-                <a16:creationId xmlns:a16="http://schemas.microsoft.com/office/drawing/2014/main" id="{FC0E2CAE-2C50-D000-1FC9-A8C997D50D13}"/>
+                <a16:creationId xmlns:a16="http://schemas.microsoft.com/office/drawing/2014/main" id="{3C658B42-76FF-B916-D641-774DAEF75EAB}"/>
               </a:ext>
             </a:extLst>
           </p:cNvPr>
@@ -2941,7 +2942,7 @@
             </a:lvl1pPr>
           </a:lstStyle>
           <a:p>
-            <a:fld id="{965718B5-E111-48C2-9805-526994096C52}" type="datetimeFigureOut">
+            <a:fld id="{AABDB7DB-0982-4DA3-AE23-FF8EB01401B3}" type="datetimeFigureOut">
               <a:rPr lang="en-AU" smtClean="0"/>
               <a:t>8/10/2026</a:t>
             </a:fld>
@@ -2954,7 +2955,7 @@
           <p:cNvPr id="5" name="Footer Placeholder 4">
             <a:extLst>
               <a:ext uri="{FF2B5EF4-FFF2-40B4-BE49-F238E27FC236}">
-                <a16:creationId xmlns:a16="http://schemas.microsoft.com/office/drawing/2014/main" id="{B8FC2841-D29D-F3DB-C7A5-98AD5640255E}"/>
+                <a16:creationId xmlns:a16="http://schemas.microsoft.com/office/drawing/2014/main" id="{8A925FEF-4CCB-AEEF-B36A-A9C86B640EE1}"/>
               </a:ext>
             </a:extLst>
           </p:cNvPr>
@@ -2997,7 +2998,7 @@
           <p:cNvPr id="6" name="Slide Number Placeholder 5">
             <a:extLst>
               <a:ext uri="{FF2B5EF4-FFF2-40B4-BE49-F238E27FC236}">
-                <a16:creationId xmlns:a16="http://schemas.microsoft.com/office/drawing/2014/main" id="{9F0C0663-809C-60AD-BE4E-FD1C93E18562}"/>
+                <a16:creationId xmlns:a16="http://schemas.microsoft.com/office/drawing/2014/main" id="{D932A58E-4B12-7ED7-19B5-27255F53EE36}"/>
               </a:ext>
             </a:extLst>
           </p:cNvPr>
@@ -3031,7 +3032,7 @@
             </a:lvl1pPr>
           </a:lstStyle>
           <a:p>
-            <a:fld id="{DEAFF70B-5DE2-4471-8296-B0BE239360DD}" type="slidenum">
+            <a:fld id="{EF9535BA-5C7D-47B3-A2E2-05A4E0CD4755}" type="slidenum">
               <a:rPr lang="en-AU" smtClean="0"/>
               <a:t>‹#›</a:t>
             </a:fld>
@@ -3042,7 +3043,7 @@
     </p:spTree>
     <p:extLst>
       <p:ext uri="{BB962C8B-B14F-4D97-AF65-F5344CB8AC3E}">
-        <p14:creationId xmlns:p14="http://schemas.microsoft.com/office/powerpoint/2010/main" val="860406752"/>
+        <p14:creationId xmlns:p14="http://schemas.microsoft.com/office/powerpoint/2010/main" val="683106731"/>
       </p:ext>
     </p:extLst>
   </p:cSld>
@@ -3365,7 +3366,7 @@
           <p:cNvPr id="2" name="Heading">
             <a:extLst>
               <a:ext uri="{FF2B5EF4-FFF2-40B4-BE49-F238E27FC236}">
-                <a16:creationId xmlns:a16="http://schemas.microsoft.com/office/drawing/2014/main" id="{E52669BD-698A-BE79-7EE5-5B360BE848C5}"/>
+                <a16:creationId xmlns:a16="http://schemas.microsoft.com/office/drawing/2014/main" id="{F126295A-942D-2CC9-F4B3-9627E718FC0C}"/>
               </a:ext>
             </a:extLst>
           </p:cNvPr>
@@ -3404,7 +3405,7 @@
           <p:cNvPr id="3" name="Instructions">
             <a:extLst>
               <a:ext uri="{FF2B5EF4-FFF2-40B4-BE49-F238E27FC236}">
-                <a16:creationId xmlns:a16="http://schemas.microsoft.com/office/drawing/2014/main" id="{6215F4AF-6E06-144B-E3DC-FB87EB17D5A5}"/>
+                <a16:creationId xmlns:a16="http://schemas.microsoft.com/office/drawing/2014/main" id="{206434F8-425B-A8AF-BB47-E3D4D0FF932A}"/>
               </a:ext>
             </a:extLst>
           </p:cNvPr>
@@ -3443,7 +3444,7 @@
           <p:cNvPr id="4" name="TextBox 3">
             <a:extLst>
               <a:ext uri="{FF2B5EF4-FFF2-40B4-BE49-F238E27FC236}">
-                <a16:creationId xmlns:a16="http://schemas.microsoft.com/office/drawing/2014/main" id="{89A314FE-173E-B977-1AB2-A07EE7D81CAF}"/>
+                <a16:creationId xmlns:a16="http://schemas.microsoft.com/office/drawing/2014/main" id="{1EBA1BAD-D7A5-EF4F-70E3-91D12E4C74EC}"/>
               </a:ext>
             </a:extLst>
           </p:cNvPr>
@@ -3489,7 +3490,7 @@
     </p:spTree>
     <p:extLst>
       <p:ext uri="{BB962C8B-B14F-4D97-AF65-F5344CB8AC3E}">
-        <p14:creationId xmlns:p14="http://schemas.microsoft.com/office/powerpoint/2010/main" val="3475171839"/>
+        <p14:creationId xmlns:p14="http://schemas.microsoft.com/office/powerpoint/2010/main" val="4221450197"/>
       </p:ext>
     </p:extLst>
   </p:cSld>
@@ -3521,7 +3522,7 @@
           <p:cNvPr id="2" name="Heading">
             <a:extLst>
               <a:ext uri="{FF2B5EF4-FFF2-40B4-BE49-F238E27FC236}">
-                <a16:creationId xmlns:a16="http://schemas.microsoft.com/office/drawing/2014/main" id="{303CF412-B77A-E875-1A5B-0E6E86C0CF05}"/>
+                <a16:creationId xmlns:a16="http://schemas.microsoft.com/office/drawing/2014/main" id="{8BF9AB4E-1ABF-12D7-7BF4-DFF4F7D7F110}"/>
               </a:ext>
             </a:extLst>
           </p:cNvPr>
@@ -3560,7 +3561,7 @@
           <p:cNvPr id="3" name="Instructions">
             <a:extLst>
               <a:ext uri="{FF2B5EF4-FFF2-40B4-BE49-F238E27FC236}">
-                <a16:creationId xmlns:a16="http://schemas.microsoft.com/office/drawing/2014/main" id="{48C829BB-B86F-287D-FDEA-508CCD6E8757}"/>
+                <a16:creationId xmlns:a16="http://schemas.microsoft.com/office/drawing/2014/main" id="{83BA255F-638F-9D63-2772-3F73918A3AE8}"/>
               </a:ext>
             </a:extLst>
           </p:cNvPr>
@@ -3599,7 +3600,7 @@
           <p:cNvPr id="4" name="Grow1">
             <a:extLst>
               <a:ext uri="{FF2B5EF4-FFF2-40B4-BE49-F238E27FC236}">
-                <a16:creationId xmlns:a16="http://schemas.microsoft.com/office/drawing/2014/main" id="{135AEEEC-FFA4-C7E6-EFF4-BAA66A03C745}"/>
+                <a16:creationId xmlns:a16="http://schemas.microsoft.com/office/drawing/2014/main" id="{9D7052AD-5FD3-4023-A368-C2FA40680988}"/>
               </a:ext>
             </a:extLst>
           </p:cNvPr>
@@ -3674,7 +3675,7 @@
           <p:cNvPr id="5" name="Grow2">
             <a:extLst>
               <a:ext uri="{FF2B5EF4-FFF2-40B4-BE49-F238E27FC236}">
-                <a16:creationId xmlns:a16="http://schemas.microsoft.com/office/drawing/2014/main" id="{A6A20430-1CC8-C268-DBC8-D7028D0D7ED9}"/>
+                <a16:creationId xmlns:a16="http://schemas.microsoft.com/office/drawing/2014/main" id="{F2EFCF12-B1B2-8659-154A-7D52435BB163}"/>
               </a:ext>
             </a:extLst>
           </p:cNvPr>
@@ -3749,7 +3750,7 @@
           <p:cNvPr id="6" name="Grow3">
             <a:extLst>
               <a:ext uri="{FF2B5EF4-FFF2-40B4-BE49-F238E27FC236}">
-                <a16:creationId xmlns:a16="http://schemas.microsoft.com/office/drawing/2014/main" id="{539BA575-BA18-9B57-7C3E-13BEABB0CBFA}"/>
+                <a16:creationId xmlns:a16="http://schemas.microsoft.com/office/drawing/2014/main" id="{40EF70FE-93B0-FB7E-8D32-1A4683D82AC2}"/>
               </a:ext>
             </a:extLst>
           </p:cNvPr>
@@ -3824,7 +3825,7 @@
           <p:cNvPr id="7" name="Core">
             <a:extLst>
               <a:ext uri="{FF2B5EF4-FFF2-40B4-BE49-F238E27FC236}">
-                <a16:creationId xmlns:a16="http://schemas.microsoft.com/office/drawing/2014/main" id="{6D32E7FF-0EAF-1CD5-4CBF-A4AE2790CAB7}"/>
+                <a16:creationId xmlns:a16="http://schemas.microsoft.com/office/drawing/2014/main" id="{87D4D8B4-6F2B-7E87-C44F-CB29190140FA}"/>
               </a:ext>
             </a:extLst>
           </p:cNvPr>
@@ -3899,7 +3900,7 @@
           <p:cNvPr id="8" name="TextBox 7">
             <a:extLst>
               <a:ext uri="{FF2B5EF4-FFF2-40B4-BE49-F238E27FC236}">
-                <a16:creationId xmlns:a16="http://schemas.microsoft.com/office/drawing/2014/main" id="{C7FD5EB3-757D-6054-D22A-EBAEEDC06E72}"/>
+                <a16:creationId xmlns:a16="http://schemas.microsoft.com/office/drawing/2014/main" id="{3F6F3C9F-27E3-4EA2-7002-F54E66341D71}"/>
               </a:ext>
             </a:extLst>
           </p:cNvPr>
@@ -3936,7 +3937,7 @@
     </p:spTree>
     <p:extLst>
       <p:ext uri="{BB962C8B-B14F-4D97-AF65-F5344CB8AC3E}">
-        <p14:creationId xmlns:p14="http://schemas.microsoft.com/office/powerpoint/2010/main" val="2025618359"/>
+        <p14:creationId xmlns:p14="http://schemas.microsoft.com/office/powerpoint/2010/main" val="1562491817"/>
       </p:ext>
     </p:extLst>
   </p:cSld>
@@ -3968,7 +3969,7 @@
           <p:cNvPr id="2" name="Heading">
             <a:extLst>
               <a:ext uri="{FF2B5EF4-FFF2-40B4-BE49-F238E27FC236}">
-                <a16:creationId xmlns:a16="http://schemas.microsoft.com/office/drawing/2014/main" id="{9423F232-719F-5EBA-2340-EEEF91A98FD5}"/>
+                <a16:creationId xmlns:a16="http://schemas.microsoft.com/office/drawing/2014/main" id="{80CDE59D-16BA-83D5-1780-0840F7539A46}"/>
               </a:ext>
             </a:extLst>
           </p:cNvPr>
@@ -4007,7 +4008,7 @@
           <p:cNvPr id="3" name="Instructions">
             <a:extLst>
               <a:ext uri="{FF2B5EF4-FFF2-40B4-BE49-F238E27FC236}">
-                <a16:creationId xmlns:a16="http://schemas.microsoft.com/office/drawing/2014/main" id="{423AED12-0E64-B2A8-B154-777975D7DFD7}"/>
+                <a16:creationId xmlns:a16="http://schemas.microsoft.com/office/drawing/2014/main" id="{4AF07295-ED72-6BF6-E8BA-2D223B6862A5}"/>
               </a:ext>
             </a:extLst>
           </p:cNvPr>
@@ -4046,7 +4047,7 @@
           <p:cNvPr id="7" name="TheGroup">
             <a:extLst>
               <a:ext uri="{FF2B5EF4-FFF2-40B4-BE49-F238E27FC236}">
-                <a16:creationId xmlns:a16="http://schemas.microsoft.com/office/drawing/2014/main" id="{77030700-A1D7-4949-4006-C2B9062C72D6}"/>
+                <a16:creationId xmlns:a16="http://schemas.microsoft.com/office/drawing/2014/main" id="{78BA4C20-DD57-9DB8-BFF0-09B7ED4FB231}"/>
               </a:ext>
             </a:extLst>
           </p:cNvPr>
@@ -4066,7 +4067,7 @@
             <p:cNvPr id="4" name="G1">
               <a:extLst>
                 <a:ext uri="{FF2B5EF4-FFF2-40B4-BE49-F238E27FC236}">
-                  <a16:creationId xmlns:a16="http://schemas.microsoft.com/office/drawing/2014/main" id="{A98F00CB-04F0-E234-DC61-005DA0049635}"/>
+                  <a16:creationId xmlns:a16="http://schemas.microsoft.com/office/drawing/2014/main" id="{531D482F-3CF7-7C12-DACC-8CDC8E40D8E8}"/>
                 </a:ext>
               </a:extLst>
             </p:cNvPr>
@@ -4141,7 +4142,7 @@
             <p:cNvPr id="5" name="G2">
               <a:extLst>
                 <a:ext uri="{FF2B5EF4-FFF2-40B4-BE49-F238E27FC236}">
-                  <a16:creationId xmlns:a16="http://schemas.microsoft.com/office/drawing/2014/main" id="{8089E7B2-C7DA-9421-B8D4-E609DD18CF22}"/>
+                  <a16:creationId xmlns:a16="http://schemas.microsoft.com/office/drawing/2014/main" id="{B4587858-DAC0-B8D9-A759-7021F1DF7270}"/>
                 </a:ext>
               </a:extLst>
             </p:cNvPr>
@@ -4216,7 +4217,7 @@
             <p:cNvPr id="6" name="G3">
               <a:extLst>
                 <a:ext uri="{FF2B5EF4-FFF2-40B4-BE49-F238E27FC236}">
-                  <a16:creationId xmlns:a16="http://schemas.microsoft.com/office/drawing/2014/main" id="{E852B890-0AEB-C706-6282-3E3C991B0132}"/>
+                  <a16:creationId xmlns:a16="http://schemas.microsoft.com/office/drawing/2014/main" id="{76738695-A776-409A-5F34-52AEBCB522B2}"/>
                 </a:ext>
               </a:extLst>
             </p:cNvPr>
@@ -4292,7 +4293,7 @@
           <p:cNvPr id="8" name="Loose1">
             <a:extLst>
               <a:ext uri="{FF2B5EF4-FFF2-40B4-BE49-F238E27FC236}">
-                <a16:creationId xmlns:a16="http://schemas.microsoft.com/office/drawing/2014/main" id="{5E15B04E-011F-4CC7-B95D-15EDD6C23B3B}"/>
+                <a16:creationId xmlns:a16="http://schemas.microsoft.com/office/drawing/2014/main" id="{53A5C459-2DC0-170A-F953-D1D354474D2B}"/>
               </a:ext>
             </a:extLst>
           </p:cNvPr>
@@ -4367,7 +4368,7 @@
           <p:cNvPr id="9" name="Loose2">
             <a:extLst>
               <a:ext uri="{FF2B5EF4-FFF2-40B4-BE49-F238E27FC236}">
-                <a16:creationId xmlns:a16="http://schemas.microsoft.com/office/drawing/2014/main" id="{F5B3F2EA-8580-7A01-14A6-E868C3344DFB}"/>
+                <a16:creationId xmlns:a16="http://schemas.microsoft.com/office/drawing/2014/main" id="{0759C33D-1BE5-0D8F-D85B-83466291E5FB}"/>
               </a:ext>
             </a:extLst>
           </p:cNvPr>
@@ -4442,7 +4443,7 @@
           <p:cNvPr id="10" name="TextBox 9">
             <a:extLst>
               <a:ext uri="{FF2B5EF4-FFF2-40B4-BE49-F238E27FC236}">
-                <a16:creationId xmlns:a16="http://schemas.microsoft.com/office/drawing/2014/main" id="{1253E678-A0A5-BD20-A97D-084D8B934B17}"/>
+                <a16:creationId xmlns:a16="http://schemas.microsoft.com/office/drawing/2014/main" id="{7AE51A69-E1B6-D7D2-B8DD-8548C5E14B75}"/>
               </a:ext>
             </a:extLst>
           </p:cNvPr>
@@ -4479,7 +4480,7 @@
     </p:spTree>
     <p:extLst>
       <p:ext uri="{BB962C8B-B14F-4D97-AF65-F5344CB8AC3E}">
-        <p14:creationId xmlns:p14="http://schemas.microsoft.com/office/powerpoint/2010/main" val="2195206344"/>
+        <p14:creationId xmlns:p14="http://schemas.microsoft.com/office/powerpoint/2010/main" val="286558584"/>
       </p:ext>
     </p:extLst>
   </p:cSld>
@@ -4511,7 +4512,7 @@
           <p:cNvPr id="2" name="Heading">
             <a:extLst>
               <a:ext uri="{FF2B5EF4-FFF2-40B4-BE49-F238E27FC236}">
-                <a16:creationId xmlns:a16="http://schemas.microsoft.com/office/drawing/2014/main" id="{4ED19572-BBE5-80D3-0661-1AC644477F35}"/>
+                <a16:creationId xmlns:a16="http://schemas.microsoft.com/office/drawing/2014/main" id="{27BD6A1E-E1EA-A345-78DA-ADAB87E34466}"/>
               </a:ext>
             </a:extLst>
           </p:cNvPr>
@@ -4550,7 +4551,7 @@
           <p:cNvPr id="3" name="Instructions">
             <a:extLst>
               <a:ext uri="{FF2B5EF4-FFF2-40B4-BE49-F238E27FC236}">
-                <a16:creationId xmlns:a16="http://schemas.microsoft.com/office/drawing/2014/main" id="{FCC070F3-5EED-38C5-EF56-E3122A56CD04}"/>
+                <a16:creationId xmlns:a16="http://schemas.microsoft.com/office/drawing/2014/main" id="{45FE9086-4817-9237-B16F-CCB530EFC8F9}"/>
               </a:ext>
             </a:extLst>
           </p:cNvPr>
@@ -4589,7 +4590,7 @@
           <p:cNvPr id="4" name="Text0">
             <a:extLst>
               <a:ext uri="{FF2B5EF4-FFF2-40B4-BE49-F238E27FC236}">
-                <a16:creationId xmlns:a16="http://schemas.microsoft.com/office/drawing/2014/main" id="{CEE2ACCD-033A-6679-72D9-879367BDF2E8}"/>
+                <a16:creationId xmlns:a16="http://schemas.microsoft.com/office/drawing/2014/main" id="{FAC3E549-5802-0EE2-340A-742A64C845B9}"/>
               </a:ext>
             </a:extLst>
           </p:cNvPr>
@@ -4649,7 +4650,7 @@
           <p:cNvPr id="5" name="Text1">
             <a:extLst>
               <a:ext uri="{FF2B5EF4-FFF2-40B4-BE49-F238E27FC236}">
-                <a16:creationId xmlns:a16="http://schemas.microsoft.com/office/drawing/2014/main" id="{CAC6C313-FF9A-B367-DA8D-C9008D3BF361}"/>
+                <a16:creationId xmlns:a16="http://schemas.microsoft.com/office/drawing/2014/main" id="{962C0A8A-0219-0450-B28B-1C0E9C94C892}"/>
               </a:ext>
             </a:extLst>
           </p:cNvPr>
@@ -4710,7 +4711,7 @@
           <p:cNvPr id="6" name="Text2">
             <a:extLst>
               <a:ext uri="{FF2B5EF4-FFF2-40B4-BE49-F238E27FC236}">
-                <a16:creationId xmlns:a16="http://schemas.microsoft.com/office/drawing/2014/main" id="{6C879EB5-5877-7FF2-3714-C105EA6647CD}"/>
+                <a16:creationId xmlns:a16="http://schemas.microsoft.com/office/drawing/2014/main" id="{6B68DD8B-9F3F-A672-AB32-AE9BFB66A9D3}"/>
               </a:ext>
             </a:extLst>
           </p:cNvPr>
@@ -4771,7 +4772,7 @@
           <p:cNvPr id="7" name="TextBox 6">
             <a:extLst>
               <a:ext uri="{FF2B5EF4-FFF2-40B4-BE49-F238E27FC236}">
-                <a16:creationId xmlns:a16="http://schemas.microsoft.com/office/drawing/2014/main" id="{5597C498-B08A-C0FB-F67F-AA983584EC4D}"/>
+                <a16:creationId xmlns:a16="http://schemas.microsoft.com/office/drawing/2014/main" id="{921DE20A-DD09-42E0-F9E3-D75C453130CF}"/>
               </a:ext>
             </a:extLst>
           </p:cNvPr>
@@ -4808,7 +4809,7 @@
     </p:spTree>
     <p:extLst>
       <p:ext uri="{BB962C8B-B14F-4D97-AF65-F5344CB8AC3E}">
-        <p14:creationId xmlns:p14="http://schemas.microsoft.com/office/powerpoint/2010/main" val="2465076713"/>
+        <p14:creationId xmlns:p14="http://schemas.microsoft.com/office/powerpoint/2010/main" val="4225654635"/>
       </p:ext>
     </p:extLst>
   </p:cSld>
@@ -4840,7 +4841,7 @@
           <p:cNvPr id="2" name="Heading">
             <a:extLst>
               <a:ext uri="{FF2B5EF4-FFF2-40B4-BE49-F238E27FC236}">
-                <a16:creationId xmlns:a16="http://schemas.microsoft.com/office/drawing/2014/main" id="{E3479571-6DA8-61E5-1DE5-4431F770FD95}"/>
+                <a16:creationId xmlns:a16="http://schemas.microsoft.com/office/drawing/2014/main" id="{6F0BCD17-ED2B-B173-B80D-DA67A85EA9BE}"/>
               </a:ext>
             </a:extLst>
           </p:cNvPr>
@@ -4879,7 +4880,7 @@
           <p:cNvPr id="3" name="Instructions">
             <a:extLst>
               <a:ext uri="{FF2B5EF4-FFF2-40B4-BE49-F238E27FC236}">
-                <a16:creationId xmlns:a16="http://schemas.microsoft.com/office/drawing/2014/main" id="{B9D21081-DF6E-26F9-D319-FAA4CA5E17D6}"/>
+                <a16:creationId xmlns:a16="http://schemas.microsoft.com/office/drawing/2014/main" id="{A2FB4844-EA0A-0BE2-788D-F68B11515A57}"/>
               </a:ext>
             </a:extLst>
           </p:cNvPr>
@@ -4918,7 +4919,7 @@
           <p:cNvPr id="4" name="Dot0">
             <a:extLst>
               <a:ext uri="{FF2B5EF4-FFF2-40B4-BE49-F238E27FC236}">
-                <a16:creationId xmlns:a16="http://schemas.microsoft.com/office/drawing/2014/main" id="{397606B1-C9DF-AC39-3FC0-BE57F2E4D8A5}"/>
+                <a16:creationId xmlns:a16="http://schemas.microsoft.com/office/drawing/2014/main" id="{EBDBC94F-280D-0D38-312D-41A902D61AA3}"/>
               </a:ext>
             </a:extLst>
           </p:cNvPr>
@@ -4993,7 +4994,7 @@
           <p:cNvPr id="5" name="Dot1">
             <a:extLst>
               <a:ext uri="{FF2B5EF4-FFF2-40B4-BE49-F238E27FC236}">
-                <a16:creationId xmlns:a16="http://schemas.microsoft.com/office/drawing/2014/main" id="{3EF6AB56-374B-D874-6EA2-F587E8F80601}"/>
+                <a16:creationId xmlns:a16="http://schemas.microsoft.com/office/drawing/2014/main" id="{11983938-C07A-DB1F-D2CB-D09EB69E52C5}"/>
               </a:ext>
             </a:extLst>
           </p:cNvPr>
@@ -5068,7 +5069,7 @@
           <p:cNvPr id="6" name="Dot2">
             <a:extLst>
               <a:ext uri="{FF2B5EF4-FFF2-40B4-BE49-F238E27FC236}">
-                <a16:creationId xmlns:a16="http://schemas.microsoft.com/office/drawing/2014/main" id="{EC51F784-2571-22EF-82B3-092D42E3697B}"/>
+                <a16:creationId xmlns:a16="http://schemas.microsoft.com/office/drawing/2014/main" id="{52A9F69B-6345-CC01-25B0-447C46E7153A}"/>
               </a:ext>
             </a:extLst>
           </p:cNvPr>
@@ -5143,7 +5144,7 @@
           <p:cNvPr id="7" name="Dot3">
             <a:extLst>
               <a:ext uri="{FF2B5EF4-FFF2-40B4-BE49-F238E27FC236}">
-                <a16:creationId xmlns:a16="http://schemas.microsoft.com/office/drawing/2014/main" id="{FD0C3A9C-9DA3-094A-DF0C-141342C81674}"/>
+                <a16:creationId xmlns:a16="http://schemas.microsoft.com/office/drawing/2014/main" id="{23042845-FE2B-7F0F-6A1E-F4F76B281595}"/>
               </a:ext>
             </a:extLst>
           </p:cNvPr>
@@ -5218,7 +5219,7 @@
           <p:cNvPr id="8" name="Dot4">
             <a:extLst>
               <a:ext uri="{FF2B5EF4-FFF2-40B4-BE49-F238E27FC236}">
-                <a16:creationId xmlns:a16="http://schemas.microsoft.com/office/drawing/2014/main" id="{7BA20AAF-1BE4-BF3A-2895-843A3097D83F}"/>
+                <a16:creationId xmlns:a16="http://schemas.microsoft.com/office/drawing/2014/main" id="{7A4B98E7-0144-E032-D345-B6AB7E1E8381}"/>
               </a:ext>
             </a:extLst>
           </p:cNvPr>
@@ -5293,7 +5294,7 @@
           <p:cNvPr id="9" name="Dot5">
             <a:extLst>
               <a:ext uri="{FF2B5EF4-FFF2-40B4-BE49-F238E27FC236}">
-                <a16:creationId xmlns:a16="http://schemas.microsoft.com/office/drawing/2014/main" id="{FE711F46-D6C6-749B-C018-19365D4609D1}"/>
+                <a16:creationId xmlns:a16="http://schemas.microsoft.com/office/drawing/2014/main" id="{D7BF68C8-EE08-00DE-3940-2A03C0967B42}"/>
               </a:ext>
             </a:extLst>
           </p:cNvPr>
@@ -5368,7 +5369,7 @@
           <p:cNvPr id="10" name="Dot6">
             <a:extLst>
               <a:ext uri="{FF2B5EF4-FFF2-40B4-BE49-F238E27FC236}">
-                <a16:creationId xmlns:a16="http://schemas.microsoft.com/office/drawing/2014/main" id="{0DE8A725-5145-8E70-4642-01CC0220C84F}"/>
+                <a16:creationId xmlns:a16="http://schemas.microsoft.com/office/drawing/2014/main" id="{AF5AB7E4-ED47-6B05-6DA9-2FEBDBEA9A9B}"/>
               </a:ext>
             </a:extLst>
           </p:cNvPr>
@@ -5443,7 +5444,7 @@
           <p:cNvPr id="11" name="Dot7">
             <a:extLst>
               <a:ext uri="{FF2B5EF4-FFF2-40B4-BE49-F238E27FC236}">
-                <a16:creationId xmlns:a16="http://schemas.microsoft.com/office/drawing/2014/main" id="{8E0B51D7-92DD-6783-32E0-DCA1BA2126EB}"/>
+                <a16:creationId xmlns:a16="http://schemas.microsoft.com/office/drawing/2014/main" id="{F35B6702-4325-13D8-919F-C09251E75459}"/>
               </a:ext>
             </a:extLst>
           </p:cNvPr>
@@ -5518,7 +5519,7 @@
           <p:cNvPr id="12" name="Dot8">
             <a:extLst>
               <a:ext uri="{FF2B5EF4-FFF2-40B4-BE49-F238E27FC236}">
-                <a16:creationId xmlns:a16="http://schemas.microsoft.com/office/drawing/2014/main" id="{C86ADD1B-5D8E-95CF-D76E-46731456025F}"/>
+                <a16:creationId xmlns:a16="http://schemas.microsoft.com/office/drawing/2014/main" id="{F365206F-9DEB-C35E-E32C-DB5C68FD918A}"/>
               </a:ext>
             </a:extLst>
           </p:cNvPr>
@@ -5593,7 +5594,7 @@
           <p:cNvPr id="13" name="TextBox 12">
             <a:extLst>
               <a:ext uri="{FF2B5EF4-FFF2-40B4-BE49-F238E27FC236}">
-                <a16:creationId xmlns:a16="http://schemas.microsoft.com/office/drawing/2014/main" id="{648071C2-F0E7-27EF-F5FC-4EEAF4813AD0}"/>
+                <a16:creationId xmlns:a16="http://schemas.microsoft.com/office/drawing/2014/main" id="{9E2A82B7-66A0-5C6B-FC6E-FC20612D76B5}"/>
               </a:ext>
             </a:extLst>
           </p:cNvPr>
@@ -5630,7 +5631,7 @@
     </p:spTree>
     <p:extLst>
       <p:ext uri="{BB962C8B-B14F-4D97-AF65-F5344CB8AC3E}">
-        <p14:creationId xmlns:p14="http://schemas.microsoft.com/office/powerpoint/2010/main" val="3660554855"/>
+        <p14:creationId xmlns:p14="http://schemas.microsoft.com/office/powerpoint/2010/main" val="789282361"/>
       </p:ext>
     </p:extLst>
   </p:cSld>
@@ -5662,7 +5663,7 @@
           <p:cNvPr id="2" name="Heading">
             <a:extLst>
               <a:ext uri="{FF2B5EF4-FFF2-40B4-BE49-F238E27FC236}">
-                <a16:creationId xmlns:a16="http://schemas.microsoft.com/office/drawing/2014/main" id="{8D0985E0-B7DF-D711-5F53-25364920EEBD}"/>
+                <a16:creationId xmlns:a16="http://schemas.microsoft.com/office/drawing/2014/main" id="{F87EB6A6-BCC0-EE0F-7B9D-9EE52547D425}"/>
               </a:ext>
             </a:extLst>
           </p:cNvPr>
@@ -5701,7 +5702,7 @@
           <p:cNvPr id="3" name="Instructions">
             <a:extLst>
               <a:ext uri="{FF2B5EF4-FFF2-40B4-BE49-F238E27FC236}">
-                <a16:creationId xmlns:a16="http://schemas.microsoft.com/office/drawing/2014/main" id="{0A1368A6-8010-A714-F1A8-27C0C2C1A34B}"/>
+                <a16:creationId xmlns:a16="http://schemas.microsoft.com/office/drawing/2014/main" id="{A950DEE6-9FD1-CF33-E26B-DD8181142797}"/>
               </a:ext>
             </a:extLst>
           </p:cNvPr>
@@ -5740,7 +5741,7 @@
           <p:cNvPr id="4" name="Wanderer">
             <a:extLst>
               <a:ext uri="{FF2B5EF4-FFF2-40B4-BE49-F238E27FC236}">
-                <a16:creationId xmlns:a16="http://schemas.microsoft.com/office/drawing/2014/main" id="{27808935-4A67-2AEA-CBCF-0C53E4F3BD83}"/>
+                <a16:creationId xmlns:a16="http://schemas.microsoft.com/office/drawing/2014/main" id="{170A030E-2C98-AFA3-A50E-B0C77DE9F967}"/>
               </a:ext>
             </a:extLst>
           </p:cNvPr>
@@ -5815,7 +5816,7 @@
           <p:cNvPr id="5" name="Friend">
             <a:extLst>
               <a:ext uri="{FF2B5EF4-FFF2-40B4-BE49-F238E27FC236}">
-                <a16:creationId xmlns:a16="http://schemas.microsoft.com/office/drawing/2014/main" id="{B1A35E15-949B-6E43-9242-5B575F05FAD0}"/>
+                <a16:creationId xmlns:a16="http://schemas.microsoft.com/office/drawing/2014/main" id="{AF83CA23-4FDA-195D-805E-17D6CE587FC8}"/>
               </a:ext>
             </a:extLst>
           </p:cNvPr>
@@ -5890,7 +5891,7 @@
           <p:cNvPr id="6" name="TextBox 5">
             <a:extLst>
               <a:ext uri="{FF2B5EF4-FFF2-40B4-BE49-F238E27FC236}">
-                <a16:creationId xmlns:a16="http://schemas.microsoft.com/office/drawing/2014/main" id="{30E2F00E-AA27-D958-6C40-A2F95F5C4541}"/>
+                <a16:creationId xmlns:a16="http://schemas.microsoft.com/office/drawing/2014/main" id="{BB70938C-33D9-C54E-6A1F-BA4CB9497E52}"/>
               </a:ext>
             </a:extLst>
           </p:cNvPr>
@@ -5927,7 +5928,7 @@
     </p:spTree>
     <p:extLst>
       <p:ext uri="{BB962C8B-B14F-4D97-AF65-F5344CB8AC3E}">
-        <p14:creationId xmlns:p14="http://schemas.microsoft.com/office/powerpoint/2010/main" val="1120490411"/>
+        <p14:creationId xmlns:p14="http://schemas.microsoft.com/office/powerpoint/2010/main" val="2480787310"/>
       </p:ext>
     </p:extLst>
   </p:cSld>
@@ -5959,7 +5960,7 @@
           <p:cNvPr id="2" name="Heading">
             <a:extLst>
               <a:ext uri="{FF2B5EF4-FFF2-40B4-BE49-F238E27FC236}">
-                <a16:creationId xmlns:a16="http://schemas.microsoft.com/office/drawing/2014/main" id="{4A6294AD-71A6-C736-C403-F6329814296F}"/>
+                <a16:creationId xmlns:a16="http://schemas.microsoft.com/office/drawing/2014/main" id="{7B92F84C-B16A-E2B7-5B75-FB5C7C669891}"/>
               </a:ext>
             </a:extLst>
           </p:cNvPr>
@@ -5998,7 +5999,7 @@
           <p:cNvPr id="3" name="Instructions">
             <a:extLst>
               <a:ext uri="{FF2B5EF4-FFF2-40B4-BE49-F238E27FC236}">
-                <a16:creationId xmlns:a16="http://schemas.microsoft.com/office/drawing/2014/main" id="{471D5253-3BF1-FB12-B08A-3153531C0671}"/>
+                <a16:creationId xmlns:a16="http://schemas.microsoft.com/office/drawing/2014/main" id="{864985A4-0904-7954-1708-785A73B50C17}"/>
               </a:ext>
             </a:extLst>
           </p:cNvPr>
@@ -6037,7 +6038,7 @@
           <p:cNvPr id="4" name="Tilt1">
             <a:extLst>
               <a:ext uri="{FF2B5EF4-FFF2-40B4-BE49-F238E27FC236}">
-                <a16:creationId xmlns:a16="http://schemas.microsoft.com/office/drawing/2014/main" id="{D4D6F389-FBFE-5CC7-B358-70D618F0FAB9}"/>
+                <a16:creationId xmlns:a16="http://schemas.microsoft.com/office/drawing/2014/main" id="{98C067A1-87CC-2A0A-A974-380C5CFEF4AA}"/>
               </a:ext>
             </a:extLst>
           </p:cNvPr>
@@ -6112,7 +6113,7 @@
           <p:cNvPr id="5" name="Tilt2">
             <a:extLst>
               <a:ext uri="{FF2B5EF4-FFF2-40B4-BE49-F238E27FC236}">
-                <a16:creationId xmlns:a16="http://schemas.microsoft.com/office/drawing/2014/main" id="{5E283E0A-1778-073C-F02F-3F83116E6344}"/>
+                <a16:creationId xmlns:a16="http://schemas.microsoft.com/office/drawing/2014/main" id="{5192A6DE-0745-0EB2-0EE1-1AAFC55A2296}"/>
               </a:ext>
             </a:extLst>
           </p:cNvPr>
@@ -6187,7 +6188,7 @@
           <p:cNvPr id="6" name="Tilt3">
             <a:extLst>
               <a:ext uri="{FF2B5EF4-FFF2-40B4-BE49-F238E27FC236}">
-                <a16:creationId xmlns:a16="http://schemas.microsoft.com/office/drawing/2014/main" id="{12B748A5-2C83-BE03-CAC2-D98EDF3F45FA}"/>
+                <a16:creationId xmlns:a16="http://schemas.microsoft.com/office/drawing/2014/main" id="{A15B7D3B-92E3-420F-55E8-BDD74BE841A3}"/>
               </a:ext>
             </a:extLst>
           </p:cNvPr>
@@ -6262,7 +6263,7 @@
           <p:cNvPr id="7" name="Level">
             <a:extLst>
               <a:ext uri="{FF2B5EF4-FFF2-40B4-BE49-F238E27FC236}">
-                <a16:creationId xmlns:a16="http://schemas.microsoft.com/office/drawing/2014/main" id="{FFF11520-84C8-2DEE-7930-E519A701C2EA}"/>
+                <a16:creationId xmlns:a16="http://schemas.microsoft.com/office/drawing/2014/main" id="{B93F325B-FBFC-7D49-A4AB-6F0BEB647DA0}"/>
               </a:ext>
             </a:extLst>
           </p:cNvPr>
@@ -6337,7 +6338,7 @@
           <p:cNvPr id="8" name="TextBox 7">
             <a:extLst>
               <a:ext uri="{FF2B5EF4-FFF2-40B4-BE49-F238E27FC236}">
-                <a16:creationId xmlns:a16="http://schemas.microsoft.com/office/drawing/2014/main" id="{9B885568-2C03-5A12-20DC-D81079A1D166}"/>
+                <a16:creationId xmlns:a16="http://schemas.microsoft.com/office/drawing/2014/main" id="{661ADC97-0A8A-32DC-924E-9712F6C7B311}"/>
               </a:ext>
             </a:extLst>
           </p:cNvPr>
@@ -6374,7 +6375,7 @@
     </p:spTree>
     <p:extLst>
       <p:ext uri="{BB962C8B-B14F-4D97-AF65-F5344CB8AC3E}">
-        <p14:creationId xmlns:p14="http://schemas.microsoft.com/office/powerpoint/2010/main" val="2390458729"/>
+        <p14:creationId xmlns:p14="http://schemas.microsoft.com/office/powerpoint/2010/main" val="2090723286"/>
       </p:ext>
     </p:extLst>
   </p:cSld>
@@ -6406,7 +6407,7 @@
           <p:cNvPr id="2" name="Heading">
             <a:extLst>
               <a:ext uri="{FF2B5EF4-FFF2-40B4-BE49-F238E27FC236}">
-                <a16:creationId xmlns:a16="http://schemas.microsoft.com/office/drawing/2014/main" id="{DEF8642C-A567-8103-2AA2-1269F890B044}"/>
+                <a16:creationId xmlns:a16="http://schemas.microsoft.com/office/drawing/2014/main" id="{D8E983AF-EDED-F608-CBB9-522317D534A1}"/>
               </a:ext>
             </a:extLst>
           </p:cNvPr>
@@ -6445,7 +6446,7 @@
           <p:cNvPr id="3" name="Instructions">
             <a:extLst>
               <a:ext uri="{FF2B5EF4-FFF2-40B4-BE49-F238E27FC236}">
-                <a16:creationId xmlns:a16="http://schemas.microsoft.com/office/drawing/2014/main" id="{72D21161-F203-97C8-A8AC-624FF86738A2}"/>
+                <a16:creationId xmlns:a16="http://schemas.microsoft.com/office/drawing/2014/main" id="{F0006F5A-2BAB-2D82-A396-750D0DFCC5E6}"/>
               </a:ext>
             </a:extLst>
           </p:cNvPr>
@@ -6484,7 +6485,7 @@
           <p:cNvPr id="4" name="Seed">
             <a:extLst>
               <a:ext uri="{FF2B5EF4-FFF2-40B4-BE49-F238E27FC236}">
-                <a16:creationId xmlns:a16="http://schemas.microsoft.com/office/drawing/2014/main" id="{5D8C498C-4377-A64D-2854-CC100C901F4D}"/>
+                <a16:creationId xmlns:a16="http://schemas.microsoft.com/office/drawing/2014/main" id="{F5158C0C-1CC0-EDEC-E9E1-13925DF084EB}"/>
               </a:ext>
             </a:extLst>
           </p:cNvPr>
@@ -6559,7 +6560,7 @@
           <p:cNvPr id="5" name="TextBox 4">
             <a:extLst>
               <a:ext uri="{FF2B5EF4-FFF2-40B4-BE49-F238E27FC236}">
-                <a16:creationId xmlns:a16="http://schemas.microsoft.com/office/drawing/2014/main" id="{F95E53E5-529B-53AE-791E-B7F693D04FDF}"/>
+                <a16:creationId xmlns:a16="http://schemas.microsoft.com/office/drawing/2014/main" id="{0BD37DF2-C5E1-E2B1-8CEE-82AA92ABA149}"/>
               </a:ext>
             </a:extLst>
           </p:cNvPr>
@@ -6596,7 +6597,7 @@
     </p:spTree>
     <p:extLst>
       <p:ext uri="{BB962C8B-B14F-4D97-AF65-F5344CB8AC3E}">
-        <p14:creationId xmlns:p14="http://schemas.microsoft.com/office/powerpoint/2010/main" val="468030498"/>
+        <p14:creationId xmlns:p14="http://schemas.microsoft.com/office/powerpoint/2010/main" val="1068115620"/>
       </p:ext>
     </p:extLst>
   </p:cSld>
@@ -6628,7 +6629,7 @@
           <p:cNvPr id="2" name="Heading">
             <a:extLst>
               <a:ext uri="{FF2B5EF4-FFF2-40B4-BE49-F238E27FC236}">
-                <a16:creationId xmlns:a16="http://schemas.microsoft.com/office/drawing/2014/main" id="{00B8D8C3-1CC6-D18C-532E-66B86E8CD67A}"/>
+                <a16:creationId xmlns:a16="http://schemas.microsoft.com/office/drawing/2014/main" id="{D15D5905-08A1-0986-89CF-E40669C5106F}"/>
               </a:ext>
             </a:extLst>
           </p:cNvPr>
@@ -6667,7 +6668,7 @@
           <p:cNvPr id="3" name="Instructions">
             <a:extLst>
               <a:ext uri="{FF2B5EF4-FFF2-40B4-BE49-F238E27FC236}">
-                <a16:creationId xmlns:a16="http://schemas.microsoft.com/office/drawing/2014/main" id="{668C0847-7B03-D2FB-762F-69DB3E48C373}"/>
+                <a16:creationId xmlns:a16="http://schemas.microsoft.com/office/drawing/2014/main" id="{467EA227-041B-D742-BBF2-F64C2B8C31B4}"/>
               </a:ext>
             </a:extLst>
           </p:cNvPr>
@@ -6706,7 +6707,7 @@
           <p:cNvPr id="4" name="Ring">
             <a:extLst>
               <a:ext uri="{FF2B5EF4-FFF2-40B4-BE49-F238E27FC236}">
-                <a16:creationId xmlns:a16="http://schemas.microsoft.com/office/drawing/2014/main" id="{36054B84-A666-3A30-48BD-6BA6E65AAFCA}"/>
+                <a16:creationId xmlns:a16="http://schemas.microsoft.com/office/drawing/2014/main" id="{9C73BA7C-128F-2D9E-A2F1-6DC815E2B96C}"/>
               </a:ext>
             </a:extLst>
           </p:cNvPr>
@@ -6770,7 +6771,7 @@
           <p:cNvPr id="5" name="Arc">
             <a:extLst>
               <a:ext uri="{FF2B5EF4-FFF2-40B4-BE49-F238E27FC236}">
-                <a16:creationId xmlns:a16="http://schemas.microsoft.com/office/drawing/2014/main" id="{C681D972-A7DE-767A-4D0D-8D5684A47263}"/>
+                <a16:creationId xmlns:a16="http://schemas.microsoft.com/office/drawing/2014/main" id="{106C4676-F66A-4473-E502-C6172B19F025}"/>
               </a:ext>
             </a:extLst>
           </p:cNvPr>
@@ -6822,7 +6823,7 @@
           <p:cNvPr id="6" name="Wave">
             <a:extLst>
               <a:ext uri="{FF2B5EF4-FFF2-40B4-BE49-F238E27FC236}">
-                <a16:creationId xmlns:a16="http://schemas.microsoft.com/office/drawing/2014/main" id="{54F5F6CF-AE41-4DA2-514C-051C2892FDC5}"/>
+                <a16:creationId xmlns:a16="http://schemas.microsoft.com/office/drawing/2014/main" id="{BF658ECA-B6BB-949C-157C-6B51BBEEDB79}"/>
               </a:ext>
             </a:extLst>
           </p:cNvPr>
@@ -6892,7 +6893,7 @@
           <p:cNvPr id="7" name="Bead1">
             <a:extLst>
               <a:ext uri="{FF2B5EF4-FFF2-40B4-BE49-F238E27FC236}">
-                <a16:creationId xmlns:a16="http://schemas.microsoft.com/office/drawing/2014/main" id="{96FA5A57-7976-0742-5710-4645C9FD1095}"/>
+                <a16:creationId xmlns:a16="http://schemas.microsoft.com/office/drawing/2014/main" id="{5A2648A5-A3D3-2350-AA30-E17F7B15382C}"/>
               </a:ext>
             </a:extLst>
           </p:cNvPr>
@@ -6967,7 +6968,7 @@
           <p:cNvPr id="8" name="Bead2">
             <a:extLst>
               <a:ext uri="{FF2B5EF4-FFF2-40B4-BE49-F238E27FC236}">
-                <a16:creationId xmlns:a16="http://schemas.microsoft.com/office/drawing/2014/main" id="{D5428671-2EC2-472C-5329-7E94BE5AFFE6}"/>
+                <a16:creationId xmlns:a16="http://schemas.microsoft.com/office/drawing/2014/main" id="{B5795336-4E46-D0C6-E835-A3E9845C2661}"/>
               </a:ext>
             </a:extLst>
           </p:cNvPr>
@@ -7042,7 +7043,7 @@
           <p:cNvPr id="9" name="Bead3">
             <a:extLst>
               <a:ext uri="{FF2B5EF4-FFF2-40B4-BE49-F238E27FC236}">
-                <a16:creationId xmlns:a16="http://schemas.microsoft.com/office/drawing/2014/main" id="{A47F43CA-4E4D-A0EF-006D-0CA1545B1459}"/>
+                <a16:creationId xmlns:a16="http://schemas.microsoft.com/office/drawing/2014/main" id="{6BEA922B-CBB5-AE00-8F44-0B6AA9AC7273}"/>
               </a:ext>
             </a:extLst>
           </p:cNvPr>
@@ -7117,7 +7118,7 @@
           <p:cNvPr id="10" name="Bead4">
             <a:extLst>
               <a:ext uri="{FF2B5EF4-FFF2-40B4-BE49-F238E27FC236}">
-                <a16:creationId xmlns:a16="http://schemas.microsoft.com/office/drawing/2014/main" id="{4BD1EE77-C014-E47F-5456-B6D1216BF352}"/>
+                <a16:creationId xmlns:a16="http://schemas.microsoft.com/office/drawing/2014/main" id="{0F8581C3-0759-63F1-8663-61EEDE0A8870}"/>
               </a:ext>
             </a:extLst>
           </p:cNvPr>
@@ -7192,7 +7193,7 @@
           <p:cNvPr id="11" name="Bead5">
             <a:extLst>
               <a:ext uri="{FF2B5EF4-FFF2-40B4-BE49-F238E27FC236}">
-                <a16:creationId xmlns:a16="http://schemas.microsoft.com/office/drawing/2014/main" id="{63815679-0D75-E39A-CCCE-33163F870242}"/>
+                <a16:creationId xmlns:a16="http://schemas.microsoft.com/office/drawing/2014/main" id="{30EF1F8B-D415-FDD3-069E-EA46B3B06F1F}"/>
               </a:ext>
             </a:extLst>
           </p:cNvPr>
@@ -7267,7 +7268,7 @@
           <p:cNvPr id="12" name="Bead6">
             <a:extLst>
               <a:ext uri="{FF2B5EF4-FFF2-40B4-BE49-F238E27FC236}">
-                <a16:creationId xmlns:a16="http://schemas.microsoft.com/office/drawing/2014/main" id="{B30CE0E5-8E10-62BE-2E6B-80E2A2DC50F1}"/>
+                <a16:creationId xmlns:a16="http://schemas.microsoft.com/office/drawing/2014/main" id="{FE16C849-AF77-2F0A-B7D1-D4D62204B3D3}"/>
               </a:ext>
             </a:extLst>
           </p:cNvPr>
@@ -7342,7 +7343,7 @@
           <p:cNvPr id="13" name="TextBox 12">
             <a:extLst>
               <a:ext uri="{FF2B5EF4-FFF2-40B4-BE49-F238E27FC236}">
-                <a16:creationId xmlns:a16="http://schemas.microsoft.com/office/drawing/2014/main" id="{299C49C3-F6B5-70A8-9FD0-BDA301798CB1}"/>
+                <a16:creationId xmlns:a16="http://schemas.microsoft.com/office/drawing/2014/main" id="{D8656D25-E645-9237-B7B6-54F06284D0CD}"/>
               </a:ext>
             </a:extLst>
           </p:cNvPr>
@@ -7379,7 +7380,7 @@
     </p:spTree>
     <p:extLst>
       <p:ext uri="{BB962C8B-B14F-4D97-AF65-F5344CB8AC3E}">
-        <p14:creationId xmlns:p14="http://schemas.microsoft.com/office/powerpoint/2010/main" val="428068847"/>
+        <p14:creationId xmlns:p14="http://schemas.microsoft.com/office/powerpoint/2010/main" val="402629719"/>
       </p:ext>
     </p:extLst>
   </p:cSld>
@@ -7411,7 +7412,7 @@
           <p:cNvPr id="2" name="Heading">
             <a:extLst>
               <a:ext uri="{FF2B5EF4-FFF2-40B4-BE49-F238E27FC236}">
-                <a16:creationId xmlns:a16="http://schemas.microsoft.com/office/drawing/2014/main" id="{6EE39E61-EBBD-D685-391D-F47C789BCFDE}"/>
+                <a16:creationId xmlns:a16="http://schemas.microsoft.com/office/drawing/2014/main" id="{D2BF98B2-17A6-0726-71D1-2F7E359B2348}"/>
               </a:ext>
             </a:extLst>
           </p:cNvPr>
@@ -7450,7 +7451,7 @@
           <p:cNvPr id="3" name="Instructions">
             <a:extLst>
               <a:ext uri="{FF2B5EF4-FFF2-40B4-BE49-F238E27FC236}">
-                <a16:creationId xmlns:a16="http://schemas.microsoft.com/office/drawing/2014/main" id="{789ECB06-9ADB-C7B9-45E2-567D7BBEE304}"/>
+                <a16:creationId xmlns:a16="http://schemas.microsoft.com/office/drawing/2014/main" id="{C9B3476F-2E13-9D87-8D19-2EA50CA40361}"/>
               </a:ext>
             </a:extLst>
           </p:cNvPr>
@@ -7489,7 +7490,7 @@
           <p:cNvPr id="8" name="Panel">
             <a:extLst>
               <a:ext uri="{FF2B5EF4-FFF2-40B4-BE49-F238E27FC236}">
-                <a16:creationId xmlns:a16="http://schemas.microsoft.com/office/drawing/2014/main" id="{5BA2ACB2-03A4-6507-8223-BDE32F9E38FF}"/>
+                <a16:creationId xmlns:a16="http://schemas.microsoft.com/office/drawing/2014/main" id="{760B168B-60EF-FCEF-49D7-C595B77EF994}"/>
               </a:ext>
             </a:extLst>
           </p:cNvPr>
@@ -7509,7 +7510,7 @@
             <p:cNvPr id="4" name="Card">
               <a:extLst>
                 <a:ext uri="{FF2B5EF4-FFF2-40B4-BE49-F238E27FC236}">
-                  <a16:creationId xmlns:a16="http://schemas.microsoft.com/office/drawing/2014/main" id="{B9FE6E1E-B75F-C059-C1A3-767264C6651A}"/>
+                  <a16:creationId xmlns:a16="http://schemas.microsoft.com/office/drawing/2014/main" id="{55D67CCD-2811-8C6E-03F1-D0109CA9AF21}"/>
                 </a:ext>
               </a:extLst>
             </p:cNvPr>
@@ -7581,7 +7582,7 @@
             <p:cNvPr id="5" name="Item1">
               <a:extLst>
                 <a:ext uri="{FF2B5EF4-FFF2-40B4-BE49-F238E27FC236}">
-                  <a16:creationId xmlns:a16="http://schemas.microsoft.com/office/drawing/2014/main" id="{577230F9-EF8C-0D44-8ADF-A0F3E2838E51}"/>
+                  <a16:creationId xmlns:a16="http://schemas.microsoft.com/office/drawing/2014/main" id="{A74AF8AD-A6EE-596C-5BC9-9FFB3C00D43D}"/>
                 </a:ext>
               </a:extLst>
             </p:cNvPr>
@@ -7656,7 +7657,7 @@
             <p:cNvPr id="6" name="Item2">
               <a:extLst>
                 <a:ext uri="{FF2B5EF4-FFF2-40B4-BE49-F238E27FC236}">
-                  <a16:creationId xmlns:a16="http://schemas.microsoft.com/office/drawing/2014/main" id="{6E48CA0C-4DDC-8D42-E79C-107E47228511}"/>
+                  <a16:creationId xmlns:a16="http://schemas.microsoft.com/office/drawing/2014/main" id="{5ECA8E19-3D62-BCAB-1E99-7FCA722F239E}"/>
                 </a:ext>
               </a:extLst>
             </p:cNvPr>
@@ -7731,7 +7732,7 @@
             <p:cNvPr id="7" name="Item3">
               <a:extLst>
                 <a:ext uri="{FF2B5EF4-FFF2-40B4-BE49-F238E27FC236}">
-                  <a16:creationId xmlns:a16="http://schemas.microsoft.com/office/drawing/2014/main" id="{A5DBD787-72E3-806B-DF47-81593EF642D1}"/>
+                  <a16:creationId xmlns:a16="http://schemas.microsoft.com/office/drawing/2014/main" id="{EACF9D31-4F5D-AF71-168A-9B67B72F013D}"/>
                 </a:ext>
               </a:extLst>
             </p:cNvPr>
@@ -7807,7 +7808,7 @@
           <p:cNvPr id="9" name="TextBox 8">
             <a:extLst>
               <a:ext uri="{FF2B5EF4-FFF2-40B4-BE49-F238E27FC236}">
-                <a16:creationId xmlns:a16="http://schemas.microsoft.com/office/drawing/2014/main" id="{F19F5F15-1230-9858-7194-0F8964A16ED8}"/>
+                <a16:creationId xmlns:a16="http://schemas.microsoft.com/office/drawing/2014/main" id="{458F1C8C-4B83-6F05-E77C-A13DC53CCB08}"/>
               </a:ext>
             </a:extLst>
           </p:cNvPr>
@@ -7844,7 +7845,7 @@
     </p:spTree>
     <p:extLst>
       <p:ext uri="{BB962C8B-B14F-4D97-AF65-F5344CB8AC3E}">
-        <p14:creationId xmlns:p14="http://schemas.microsoft.com/office/powerpoint/2010/main" val="4234474179"/>
+        <p14:creationId xmlns:p14="http://schemas.microsoft.com/office/powerpoint/2010/main" val="1440176121"/>
       </p:ext>
     </p:extLst>
   </p:cSld>
@@ -7876,7 +7877,7 @@
           <p:cNvPr id="2" name="Heading">
             <a:extLst>
               <a:ext uri="{FF2B5EF4-FFF2-40B4-BE49-F238E27FC236}">
-                <a16:creationId xmlns:a16="http://schemas.microsoft.com/office/drawing/2014/main" id="{235FB603-6F81-B50C-6CA2-2CD07300E426}"/>
+                <a16:creationId xmlns:a16="http://schemas.microsoft.com/office/drawing/2014/main" id="{5AA747EF-D01A-5C3D-5E59-86C7A23A0824}"/>
               </a:ext>
             </a:extLst>
           </p:cNvPr>
@@ -7915,7 +7916,7 @@
           <p:cNvPr id="3" name="Instructions">
             <a:extLst>
               <a:ext uri="{FF2B5EF4-FFF2-40B4-BE49-F238E27FC236}">
-                <a16:creationId xmlns:a16="http://schemas.microsoft.com/office/drawing/2014/main" id="{D8259570-2BAA-BD8A-0041-6D414424CE1C}"/>
+                <a16:creationId xmlns:a16="http://schemas.microsoft.com/office/drawing/2014/main" id="{5A5B36E2-5E97-173F-8A85-00D8A062D048}"/>
               </a:ext>
             </a:extLst>
           </p:cNvPr>
@@ -7954,7 +7955,7 @@
           <p:cNvPr id="8" name="TiltPanel">
             <a:extLst>
               <a:ext uri="{FF2B5EF4-FFF2-40B4-BE49-F238E27FC236}">
-                <a16:creationId xmlns:a16="http://schemas.microsoft.com/office/drawing/2014/main" id="{F86D84E3-129B-5519-3939-358DFD878D30}"/>
+                <a16:creationId xmlns:a16="http://schemas.microsoft.com/office/drawing/2014/main" id="{F71AF14A-F606-945F-3FB5-63C94090A00F}"/>
               </a:ext>
             </a:extLst>
           </p:cNvPr>
@@ -7974,7 +7975,7 @@
             <p:cNvPr id="4" name="TiltCard">
               <a:extLst>
                 <a:ext uri="{FF2B5EF4-FFF2-40B4-BE49-F238E27FC236}">
-                  <a16:creationId xmlns:a16="http://schemas.microsoft.com/office/drawing/2014/main" id="{520FAA42-FBF9-E327-D88C-FA5293B5E3F3}"/>
+                  <a16:creationId xmlns:a16="http://schemas.microsoft.com/office/drawing/2014/main" id="{B9EB2EBF-0E21-8013-0041-DFEEF183418B}"/>
                 </a:ext>
               </a:extLst>
             </p:cNvPr>
@@ -8046,7 +8047,7 @@
             <p:cNvPr id="5" name="TiltItem1">
               <a:extLst>
                 <a:ext uri="{FF2B5EF4-FFF2-40B4-BE49-F238E27FC236}">
-                  <a16:creationId xmlns:a16="http://schemas.microsoft.com/office/drawing/2014/main" id="{5DA095F8-D51E-8483-9966-AA1EE0FAB883}"/>
+                  <a16:creationId xmlns:a16="http://schemas.microsoft.com/office/drawing/2014/main" id="{D01A7C72-33F0-C79B-A61F-4928C2CF2D07}"/>
                 </a:ext>
               </a:extLst>
             </p:cNvPr>
@@ -8121,7 +8122,7 @@
             <p:cNvPr id="6" name="TiltItem2">
               <a:extLst>
                 <a:ext uri="{FF2B5EF4-FFF2-40B4-BE49-F238E27FC236}">
-                  <a16:creationId xmlns:a16="http://schemas.microsoft.com/office/drawing/2014/main" id="{AC5E17F1-634A-3543-E7D6-28938428847F}"/>
+                  <a16:creationId xmlns:a16="http://schemas.microsoft.com/office/drawing/2014/main" id="{87EDB778-3F6D-FCFE-B6FA-EB3838B73729}"/>
                 </a:ext>
               </a:extLst>
             </p:cNvPr>
@@ -8196,7 +8197,7 @@
             <p:cNvPr id="7" name="TiltItem3">
               <a:extLst>
                 <a:ext uri="{FF2B5EF4-FFF2-40B4-BE49-F238E27FC236}">
-                  <a16:creationId xmlns:a16="http://schemas.microsoft.com/office/drawing/2014/main" id="{E37839A2-D5CC-B814-8824-50EC94A47436}"/>
+                  <a16:creationId xmlns:a16="http://schemas.microsoft.com/office/drawing/2014/main" id="{0D16BAC5-814F-CAD4-504D-F50701F7943C}"/>
                 </a:ext>
               </a:extLst>
             </p:cNvPr>
@@ -8272,7 +8273,7 @@
           <p:cNvPr id="9" name="TextBox 8">
             <a:extLst>
               <a:ext uri="{FF2B5EF4-FFF2-40B4-BE49-F238E27FC236}">
-                <a16:creationId xmlns:a16="http://schemas.microsoft.com/office/drawing/2014/main" id="{F2E5E971-F32A-5EE6-EA47-B1D1372F1A55}"/>
+                <a16:creationId xmlns:a16="http://schemas.microsoft.com/office/drawing/2014/main" id="{6A1D1AC0-C3F0-4AEA-7803-CB8D7DB8910B}"/>
               </a:ext>
             </a:extLst>
           </p:cNvPr>
@@ -8309,7 +8310,7 @@
     </p:spTree>
     <p:extLst>
       <p:ext uri="{BB962C8B-B14F-4D97-AF65-F5344CB8AC3E}">
-        <p14:creationId xmlns:p14="http://schemas.microsoft.com/office/powerpoint/2010/main" val="616811528"/>
+        <p14:creationId xmlns:p14="http://schemas.microsoft.com/office/powerpoint/2010/main" val="789748947"/>
       </p:ext>
     </p:extLst>
   </p:cSld>
@@ -8341,7 +8342,7 @@
           <p:cNvPr id="2" name="Heading">
             <a:extLst>
               <a:ext uri="{FF2B5EF4-FFF2-40B4-BE49-F238E27FC236}">
-                <a16:creationId xmlns:a16="http://schemas.microsoft.com/office/drawing/2014/main" id="{D1A3E26A-ED70-F54C-E269-CB851A3F5B26}"/>
+                <a16:creationId xmlns:a16="http://schemas.microsoft.com/office/drawing/2014/main" id="{0D684645-1CCE-D9A1-435D-494167E1FA5F}"/>
               </a:ext>
             </a:extLst>
           </p:cNvPr>
@@ -8380,7 +8381,7 @@
           <p:cNvPr id="3" name="Instructions">
             <a:extLst>
               <a:ext uri="{FF2B5EF4-FFF2-40B4-BE49-F238E27FC236}">
-                <a16:creationId xmlns:a16="http://schemas.microsoft.com/office/drawing/2014/main" id="{9494A255-5EB9-39EC-69E0-CB3453EF6704}"/>
+                <a16:creationId xmlns:a16="http://schemas.microsoft.com/office/drawing/2014/main" id="{1F5347AB-3E58-2A85-44A5-61FD20835D55}"/>
               </a:ext>
             </a:extLst>
           </p:cNvPr>
@@ -8419,7 +8420,7 @@
           <p:cNvPr id="4" name="Plain1">
             <a:extLst>
               <a:ext uri="{FF2B5EF4-FFF2-40B4-BE49-F238E27FC236}">
-                <a16:creationId xmlns:a16="http://schemas.microsoft.com/office/drawing/2014/main" id="{18CC06E4-A236-E4E4-A3C6-B95F1711204A}"/>
+                <a16:creationId xmlns:a16="http://schemas.microsoft.com/office/drawing/2014/main" id="{835DDEE9-E9A5-8D3A-702D-8C76ACC6F2C4}"/>
               </a:ext>
             </a:extLst>
           </p:cNvPr>
@@ -8494,7 +8495,7 @@
           <p:cNvPr id="5" name="Tall">
             <a:extLst>
               <a:ext uri="{FF2B5EF4-FFF2-40B4-BE49-F238E27FC236}">
-                <a16:creationId xmlns:a16="http://schemas.microsoft.com/office/drawing/2014/main" id="{A46B54C3-39D4-2452-7FAC-2276A1FBA264}"/>
+                <a16:creationId xmlns:a16="http://schemas.microsoft.com/office/drawing/2014/main" id="{22FA5EA6-1883-370E-2476-B5C5ECE48C51}"/>
               </a:ext>
             </a:extLst>
           </p:cNvPr>
@@ -8569,7 +8570,7 @@
           <p:cNvPr id="6" name="Rotated">
             <a:extLst>
               <a:ext uri="{FF2B5EF4-FFF2-40B4-BE49-F238E27FC236}">
-                <a16:creationId xmlns:a16="http://schemas.microsoft.com/office/drawing/2014/main" id="{2E643411-8029-55CB-0CA1-9DF38B9A88A2}"/>
+                <a16:creationId xmlns:a16="http://schemas.microsoft.com/office/drawing/2014/main" id="{978BE4BD-5955-DDB0-F152-126E130BE9DE}"/>
               </a:ext>
             </a:extLst>
           </p:cNvPr>
@@ -8644,7 +8645,7 @@
           <p:cNvPr id="7" name="Plain2">
             <a:extLst>
               <a:ext uri="{FF2B5EF4-FFF2-40B4-BE49-F238E27FC236}">
-                <a16:creationId xmlns:a16="http://schemas.microsoft.com/office/drawing/2014/main" id="{126120C7-DFF2-FB2D-4158-C23B19BA3C39}"/>
+                <a16:creationId xmlns:a16="http://schemas.microsoft.com/office/drawing/2014/main" id="{807A5D87-3734-27BD-A1BA-E791EBFAB259}"/>
               </a:ext>
             </a:extLst>
           </p:cNvPr>
@@ -8719,7 +8720,7 @@
           <p:cNvPr id="8" name="TextBox 7">
             <a:extLst>
               <a:ext uri="{FF2B5EF4-FFF2-40B4-BE49-F238E27FC236}">
-                <a16:creationId xmlns:a16="http://schemas.microsoft.com/office/drawing/2014/main" id="{39254A30-9122-C86A-6CC5-156D34F81D51}"/>
+                <a16:creationId xmlns:a16="http://schemas.microsoft.com/office/drawing/2014/main" id="{0C5A9E08-31A9-EFF3-3ABE-90CE76FC70D6}"/>
               </a:ext>
             </a:extLst>
           </p:cNvPr>
@@ -8756,7 +8757,1324 @@
     </p:spTree>
     <p:extLst>
       <p:ext uri="{BB962C8B-B14F-4D97-AF65-F5344CB8AC3E}">
-        <p14:creationId xmlns:p14="http://schemas.microsoft.com/office/powerpoint/2010/main" val="1643005224"/>
+        <p14:creationId xmlns:p14="http://schemas.microsoft.com/office/powerpoint/2010/main" val="2416924771"/>
+      </p:ext>
+    </p:extLst>
+  </p:cSld>
+  <p:clrMapOvr>
+    <a:masterClrMapping/>
+  </p:clrMapOvr>
+</p:sld>
+</file>
+
+<file path=ppt/slides/slide20.xml><?xml version="1.0" encoding="utf-8"?>
+<p:sld xmlns:a="http://schemas.openxmlformats.org/drawingml/2006/main" xmlns:r="http://schemas.openxmlformats.org/officeDocument/2006/relationships" xmlns:p="http://schemas.openxmlformats.org/presentationml/2006/main">
+  <p:cSld>
+    <p:spTree>
+      <p:nvGrpSpPr>
+        <p:cNvPr id="1" name=""/>
+        <p:cNvGrpSpPr/>
+        <p:nvPr/>
+      </p:nvGrpSpPr>
+      <p:grpSpPr>
+        <a:xfrm>
+          <a:off x="0" y="0"/>
+          <a:ext cx="0" cy="0"/>
+          <a:chOff x="0" y="0"/>
+          <a:chExt cx="0" cy="0"/>
+        </a:xfrm>
+      </p:grpSpPr>
+      <p:sp>
+        <p:nvSpPr>
+          <p:cNvPr id="2" name="Heading">
+            <a:extLst>
+              <a:ext uri="{FF2B5EF4-FFF2-40B4-BE49-F238E27FC236}">
+                <a16:creationId xmlns:a16="http://schemas.microsoft.com/office/drawing/2014/main" id="{D7FD9A55-EB78-B921-0808-D156671386B3}"/>
+              </a:ext>
+            </a:extLst>
+          </p:cNvPr>
+          <p:cNvSpPr txBox="1"/>
+          <p:nvPr/>
+        </p:nvSpPr>
+        <p:spPr>
+          <a:xfrm>
+            <a:off x="508000" y="304800"/>
+            <a:ext cx="11176000" cy="461665"/>
+          </a:xfrm>
+          <a:prstGeom prst="rect">
+            <a:avLst/>
+          </a:prstGeom>
+          <a:noFill/>
+        </p:spPr>
+        <p:txBody>
+          <a:bodyPr vert="horz" rtlCol="0">
+            <a:spAutoFit/>
+          </a:bodyPr>
+          <a:lstStyle/>
+          <a:p>
+            <a:r>
+              <a:rPr lang="en-AU" sz="2400" b="1">
+                <a:solidFill>
+                  <a:srgbClr val="282828"/>
+                </a:solidFill>
+              </a:rPr>
+              <a:t>Tidy: fix a slide built by eye</a:t>
+            </a:r>
+          </a:p>
+        </p:txBody>
+      </p:sp>
+      <p:sp>
+        <p:nvSpPr>
+          <p:cNvPr id="3" name="Instructions">
+            <a:extLst>
+              <a:ext uri="{FF2B5EF4-FFF2-40B4-BE49-F238E27FC236}">
+                <a16:creationId xmlns:a16="http://schemas.microsoft.com/office/drawing/2014/main" id="{BD21C95B-BFD4-EAF6-1EDB-4CA42B80AA40}"/>
+              </a:ext>
+            </a:extLst>
+          </p:cNvPr>
+          <p:cNvSpPr txBox="1"/>
+          <p:nvPr/>
+        </p:nvSpPr>
+        <p:spPr>
+          <a:xfrm>
+            <a:off x="508000" y="762000"/>
+            <a:ext cx="11176000" cy="292388"/>
+          </a:xfrm>
+          <a:prstGeom prst="rect">
+            <a:avLst/>
+          </a:prstGeom>
+          <a:noFill/>
+        </p:spPr>
+        <p:txBody>
+          <a:bodyPr vert="horz" rtlCol="0">
+            <a:spAutoFit/>
+          </a:bodyPr>
+          <a:lstStyle/>
+          <a:p>
+            <a:r>
+              <a:rPr lang="en-AU" sz="1300">
+                <a:solidFill>
+                  <a:srgbClr val="7F7F7F"/>
+                </a:solidFill>
+              </a:rPr>
+              <a:t>Drag a box round all the coloured shapes to select them, then Arrange &gt; Tidy. Undo, then try Tolerance (pt) = 1.</a:t>
+            </a:r>
+          </a:p>
+        </p:txBody>
+      </p:sp>
+      <p:sp>
+        <p:nvSpPr>
+          <p:cNvPr id="4" name="Cell1">
+            <a:extLst>
+              <a:ext uri="{FF2B5EF4-FFF2-40B4-BE49-F238E27FC236}">
+                <a16:creationId xmlns:a16="http://schemas.microsoft.com/office/drawing/2014/main" id="{04970427-C237-4C5D-E227-F197D58F9562}"/>
+              </a:ext>
+            </a:extLst>
+          </p:cNvPr>
+          <p:cNvSpPr/>
+          <p:nvPr/>
+        </p:nvSpPr>
+        <p:spPr>
+          <a:xfrm>
+            <a:off x="1021080" y="1893570"/>
+            <a:ext cx="635000" cy="508000"/>
+          </a:xfrm>
+          <a:prstGeom prst="rect">
+            <a:avLst/>
+          </a:prstGeom>
+          <a:solidFill>
+            <a:srgbClr val="1F77B4"/>
+          </a:solidFill>
+          <a:ln w="19050" cap="flat" cmpd="sng" algn="ctr">
+            <a:noFill/>
+            <a:prstDash val="solid"/>
+            <a:miter lim="800000"/>
+          </a:ln>
+          <a:effectLst/>
+          <a:extLst>
+            <a:ext uri="{91240B29-F687-4F45-9708-019B960494DF}">
+              <a14:hiddenLine xmlns:a14="http://schemas.microsoft.com/office/drawing/2010/main" w="19050" cap="flat" cmpd="sng" algn="ctr">
+                <a:solidFill>
+                  <a:schemeClr val="accent1">
+                    <a:shade val="15000"/>
+                  </a:schemeClr>
+                </a:solidFill>
+                <a:prstDash val="solid"/>
+                <a:miter lim="800000"/>
+              </a14:hiddenLine>
+            </a:ext>
+          </a:extLst>
+        </p:spPr>
+        <p:style>
+          <a:lnRef idx="2">
+            <a:schemeClr val="accent1">
+              <a:shade val="15000"/>
+            </a:schemeClr>
+          </a:lnRef>
+          <a:fillRef idx="1">
+            <a:schemeClr val="accent1"/>
+          </a:fillRef>
+          <a:effectRef idx="0">
+            <a:schemeClr val="accent1"/>
+          </a:effectRef>
+          <a:fontRef idx="minor">
+            <a:schemeClr val="lt1"/>
+          </a:fontRef>
+        </p:style>
+        <p:txBody>
+          <a:bodyPr rtlCol="0" anchor="ctr"/>
+          <a:lstStyle/>
+          <a:p>
+            <a:pPr algn="ctr"/>
+            <a:r>
+              <a:rPr lang="en-AU" sz="1400" b="1">
+                <a:solidFill>
+                  <a:srgbClr val="FFFFFF"/>
+                </a:solidFill>
+              </a:rPr>
+              <a:t>1</a:t>
+            </a:r>
+          </a:p>
+        </p:txBody>
+      </p:sp>
+      <p:sp>
+        <p:nvSpPr>
+          <p:cNvPr id="5" name="Cell2">
+            <a:extLst>
+              <a:ext uri="{FF2B5EF4-FFF2-40B4-BE49-F238E27FC236}">
+                <a16:creationId xmlns:a16="http://schemas.microsoft.com/office/drawing/2014/main" id="{075B9284-86CC-710D-B277-BA041485C21B}"/>
+              </a:ext>
+            </a:extLst>
+          </p:cNvPr>
+          <p:cNvSpPr/>
+          <p:nvPr/>
+        </p:nvSpPr>
+        <p:spPr>
+          <a:xfrm>
+            <a:off x="2167890" y="1901190"/>
+            <a:ext cx="635000" cy="508000"/>
+          </a:xfrm>
+          <a:prstGeom prst="rect">
+            <a:avLst/>
+          </a:prstGeom>
+          <a:solidFill>
+            <a:srgbClr val="1F77B4"/>
+          </a:solidFill>
+          <a:ln w="19050" cap="flat" cmpd="sng" algn="ctr">
+            <a:noFill/>
+            <a:prstDash val="solid"/>
+            <a:miter lim="800000"/>
+          </a:ln>
+          <a:effectLst/>
+          <a:extLst>
+            <a:ext uri="{91240B29-F687-4F45-9708-019B960494DF}">
+              <a14:hiddenLine xmlns:a14="http://schemas.microsoft.com/office/drawing/2010/main" w="19050" cap="flat" cmpd="sng" algn="ctr">
+                <a:solidFill>
+                  <a:schemeClr val="accent1">
+                    <a:shade val="15000"/>
+                  </a:schemeClr>
+                </a:solidFill>
+                <a:prstDash val="solid"/>
+                <a:miter lim="800000"/>
+              </a14:hiddenLine>
+            </a:ext>
+          </a:extLst>
+        </p:spPr>
+        <p:style>
+          <a:lnRef idx="2">
+            <a:schemeClr val="accent1">
+              <a:shade val="15000"/>
+            </a:schemeClr>
+          </a:lnRef>
+          <a:fillRef idx="1">
+            <a:schemeClr val="accent1"/>
+          </a:fillRef>
+          <a:effectRef idx="0">
+            <a:schemeClr val="accent1"/>
+          </a:effectRef>
+          <a:fontRef idx="minor">
+            <a:schemeClr val="lt1"/>
+          </a:fontRef>
+        </p:style>
+        <p:txBody>
+          <a:bodyPr rtlCol="0" anchor="ctr"/>
+          <a:lstStyle/>
+          <a:p>
+            <a:pPr algn="ctr"/>
+            <a:r>
+              <a:rPr lang="en-AU" sz="1400" b="1">
+                <a:solidFill>
+                  <a:srgbClr val="FFFFFF"/>
+                </a:solidFill>
+              </a:rPr>
+              <a:t>2</a:t>
+            </a:r>
+          </a:p>
+        </p:txBody>
+      </p:sp>
+      <p:sp>
+        <p:nvSpPr>
+          <p:cNvPr id="6" name="Cell3">
+            <a:extLst>
+              <a:ext uri="{FF2B5EF4-FFF2-40B4-BE49-F238E27FC236}">
+                <a16:creationId xmlns:a16="http://schemas.microsoft.com/office/drawing/2014/main" id="{8C4B6FC3-02CD-AF63-AEAC-D7755129C19E}"/>
+              </a:ext>
+            </a:extLst>
+          </p:cNvPr>
+          <p:cNvSpPr/>
+          <p:nvPr/>
+        </p:nvSpPr>
+        <p:spPr>
+          <a:xfrm>
+            <a:off x="3314700" y="1897380"/>
+            <a:ext cx="635000" cy="508000"/>
+          </a:xfrm>
+          <a:prstGeom prst="rect">
+            <a:avLst/>
+          </a:prstGeom>
+          <a:solidFill>
+            <a:srgbClr val="1F77B4"/>
+          </a:solidFill>
+          <a:ln w="19050" cap="flat" cmpd="sng" algn="ctr">
+            <a:noFill/>
+            <a:prstDash val="solid"/>
+            <a:miter lim="800000"/>
+          </a:ln>
+          <a:effectLst/>
+          <a:extLst>
+            <a:ext uri="{91240B29-F687-4F45-9708-019B960494DF}">
+              <a14:hiddenLine xmlns:a14="http://schemas.microsoft.com/office/drawing/2010/main" w="19050" cap="flat" cmpd="sng" algn="ctr">
+                <a:solidFill>
+                  <a:schemeClr val="accent1">
+                    <a:shade val="15000"/>
+                  </a:schemeClr>
+                </a:solidFill>
+                <a:prstDash val="solid"/>
+                <a:miter lim="800000"/>
+              </a14:hiddenLine>
+            </a:ext>
+          </a:extLst>
+        </p:spPr>
+        <p:style>
+          <a:lnRef idx="2">
+            <a:schemeClr val="accent1">
+              <a:shade val="15000"/>
+            </a:schemeClr>
+          </a:lnRef>
+          <a:fillRef idx="1">
+            <a:schemeClr val="accent1"/>
+          </a:fillRef>
+          <a:effectRef idx="0">
+            <a:schemeClr val="accent1"/>
+          </a:effectRef>
+          <a:fontRef idx="minor">
+            <a:schemeClr val="lt1"/>
+          </a:fontRef>
+        </p:style>
+        <p:txBody>
+          <a:bodyPr rtlCol="0" anchor="ctr"/>
+          <a:lstStyle/>
+          <a:p>
+            <a:pPr algn="ctr"/>
+            <a:r>
+              <a:rPr lang="en-AU" sz="1400" b="1">
+                <a:solidFill>
+                  <a:srgbClr val="FFFFFF"/>
+                </a:solidFill>
+              </a:rPr>
+              <a:t>3</a:t>
+            </a:r>
+          </a:p>
+        </p:txBody>
+      </p:sp>
+      <p:sp>
+        <p:nvSpPr>
+          <p:cNvPr id="7" name="Cell4">
+            <a:extLst>
+              <a:ext uri="{FF2B5EF4-FFF2-40B4-BE49-F238E27FC236}">
+                <a16:creationId xmlns:a16="http://schemas.microsoft.com/office/drawing/2014/main" id="{F440332B-EFFB-40B5-3FF3-127E4F9A6A45}"/>
+              </a:ext>
+            </a:extLst>
+          </p:cNvPr>
+          <p:cNvSpPr/>
+          <p:nvPr/>
+        </p:nvSpPr>
+        <p:spPr>
+          <a:xfrm>
+            <a:off x="1018540" y="2908300"/>
+            <a:ext cx="635000" cy="508000"/>
+          </a:xfrm>
+          <a:prstGeom prst="rect">
+            <a:avLst/>
+          </a:prstGeom>
+          <a:solidFill>
+            <a:srgbClr val="1F77B4"/>
+          </a:solidFill>
+          <a:ln w="19050" cap="flat" cmpd="sng" algn="ctr">
+            <a:noFill/>
+            <a:prstDash val="solid"/>
+            <a:miter lim="800000"/>
+          </a:ln>
+          <a:effectLst/>
+          <a:extLst>
+            <a:ext uri="{91240B29-F687-4F45-9708-019B960494DF}">
+              <a14:hiddenLine xmlns:a14="http://schemas.microsoft.com/office/drawing/2010/main" w="19050" cap="flat" cmpd="sng" algn="ctr">
+                <a:solidFill>
+                  <a:schemeClr val="accent1">
+                    <a:shade val="15000"/>
+                  </a:schemeClr>
+                </a:solidFill>
+                <a:prstDash val="solid"/>
+                <a:miter lim="800000"/>
+              </a14:hiddenLine>
+            </a:ext>
+          </a:extLst>
+        </p:spPr>
+        <p:style>
+          <a:lnRef idx="2">
+            <a:schemeClr val="accent1">
+              <a:shade val="15000"/>
+            </a:schemeClr>
+          </a:lnRef>
+          <a:fillRef idx="1">
+            <a:schemeClr val="accent1"/>
+          </a:fillRef>
+          <a:effectRef idx="0">
+            <a:schemeClr val="accent1"/>
+          </a:effectRef>
+          <a:fontRef idx="minor">
+            <a:schemeClr val="lt1"/>
+          </a:fontRef>
+        </p:style>
+        <p:txBody>
+          <a:bodyPr rtlCol="0" anchor="ctr"/>
+          <a:lstStyle/>
+          <a:p>
+            <a:pPr algn="ctr"/>
+            <a:r>
+              <a:rPr lang="en-AU" sz="1400" b="1">
+                <a:solidFill>
+                  <a:srgbClr val="FFFFFF"/>
+                </a:solidFill>
+              </a:rPr>
+              <a:t>4</a:t>
+            </a:r>
+          </a:p>
+        </p:txBody>
+      </p:sp>
+      <p:sp>
+        <p:nvSpPr>
+          <p:cNvPr id="8" name="Cell5">
+            <a:extLst>
+              <a:ext uri="{FF2B5EF4-FFF2-40B4-BE49-F238E27FC236}">
+                <a16:creationId xmlns:a16="http://schemas.microsoft.com/office/drawing/2014/main" id="{F3AAC36B-15AC-EB33-C197-3CF685112225}"/>
+              </a:ext>
+            </a:extLst>
+          </p:cNvPr>
+          <p:cNvSpPr/>
+          <p:nvPr/>
+        </p:nvSpPr>
+        <p:spPr>
+          <a:xfrm>
+            <a:off x="2169160" y="2914650"/>
+            <a:ext cx="635000" cy="508000"/>
+          </a:xfrm>
+          <a:prstGeom prst="rect">
+            <a:avLst/>
+          </a:prstGeom>
+          <a:solidFill>
+            <a:srgbClr val="1F77B4"/>
+          </a:solidFill>
+          <a:ln w="19050" cap="flat" cmpd="sng" algn="ctr">
+            <a:noFill/>
+            <a:prstDash val="solid"/>
+            <a:miter lim="800000"/>
+          </a:ln>
+          <a:effectLst/>
+          <a:extLst>
+            <a:ext uri="{91240B29-F687-4F45-9708-019B960494DF}">
+              <a14:hiddenLine xmlns:a14="http://schemas.microsoft.com/office/drawing/2010/main" w="19050" cap="flat" cmpd="sng" algn="ctr">
+                <a:solidFill>
+                  <a:schemeClr val="accent1">
+                    <a:shade val="15000"/>
+                  </a:schemeClr>
+                </a:solidFill>
+                <a:prstDash val="solid"/>
+                <a:miter lim="800000"/>
+              </a14:hiddenLine>
+            </a:ext>
+          </a:extLst>
+        </p:spPr>
+        <p:style>
+          <a:lnRef idx="2">
+            <a:schemeClr val="accent1">
+              <a:shade val="15000"/>
+            </a:schemeClr>
+          </a:lnRef>
+          <a:fillRef idx="1">
+            <a:schemeClr val="accent1"/>
+          </a:fillRef>
+          <a:effectRef idx="0">
+            <a:schemeClr val="accent1"/>
+          </a:effectRef>
+          <a:fontRef idx="minor">
+            <a:schemeClr val="lt1"/>
+          </a:fontRef>
+        </p:style>
+        <p:txBody>
+          <a:bodyPr rtlCol="0" anchor="ctr"/>
+          <a:lstStyle/>
+          <a:p>
+            <a:pPr algn="ctr"/>
+            <a:r>
+              <a:rPr lang="en-AU" sz="1400" b="1">
+                <a:solidFill>
+                  <a:srgbClr val="FFFFFF"/>
+                </a:solidFill>
+              </a:rPr>
+              <a:t>5</a:t>
+            </a:r>
+          </a:p>
+        </p:txBody>
+      </p:sp>
+      <p:sp>
+        <p:nvSpPr>
+          <p:cNvPr id="9" name="Cell6">
+            <a:extLst>
+              <a:ext uri="{FF2B5EF4-FFF2-40B4-BE49-F238E27FC236}">
+                <a16:creationId xmlns:a16="http://schemas.microsoft.com/office/drawing/2014/main" id="{2C92142E-EE04-156D-A668-09494B125479}"/>
+              </a:ext>
+            </a:extLst>
+          </p:cNvPr>
+          <p:cNvSpPr/>
+          <p:nvPr/>
+        </p:nvSpPr>
+        <p:spPr>
+          <a:xfrm>
+            <a:off x="3313430" y="2918460"/>
+            <a:ext cx="635000" cy="508000"/>
+          </a:xfrm>
+          <a:prstGeom prst="rect">
+            <a:avLst/>
+          </a:prstGeom>
+          <a:solidFill>
+            <a:srgbClr val="1F77B4"/>
+          </a:solidFill>
+          <a:ln w="19050" cap="flat" cmpd="sng" algn="ctr">
+            <a:noFill/>
+            <a:prstDash val="solid"/>
+            <a:miter lim="800000"/>
+          </a:ln>
+          <a:effectLst/>
+          <a:extLst>
+            <a:ext uri="{91240B29-F687-4F45-9708-019B960494DF}">
+              <a14:hiddenLine xmlns:a14="http://schemas.microsoft.com/office/drawing/2010/main" w="19050" cap="flat" cmpd="sng" algn="ctr">
+                <a:solidFill>
+                  <a:schemeClr val="accent1">
+                    <a:shade val="15000"/>
+                  </a:schemeClr>
+                </a:solidFill>
+                <a:prstDash val="solid"/>
+                <a:miter lim="800000"/>
+              </a14:hiddenLine>
+            </a:ext>
+          </a:extLst>
+        </p:spPr>
+        <p:style>
+          <a:lnRef idx="2">
+            <a:schemeClr val="accent1">
+              <a:shade val="15000"/>
+            </a:schemeClr>
+          </a:lnRef>
+          <a:fillRef idx="1">
+            <a:schemeClr val="accent1"/>
+          </a:fillRef>
+          <a:effectRef idx="0">
+            <a:schemeClr val="accent1"/>
+          </a:effectRef>
+          <a:fontRef idx="minor">
+            <a:schemeClr val="lt1"/>
+          </a:fontRef>
+        </p:style>
+        <p:txBody>
+          <a:bodyPr rtlCol="0" anchor="ctr"/>
+          <a:lstStyle/>
+          <a:p>
+            <a:pPr algn="ctr"/>
+            <a:r>
+              <a:rPr lang="en-AU" sz="1400" b="1">
+                <a:solidFill>
+                  <a:srgbClr val="FFFFFF"/>
+                </a:solidFill>
+              </a:rPr>
+              <a:t>6</a:t>
+            </a:r>
+          </a:p>
+        </p:txBody>
+      </p:sp>
+      <p:sp>
+        <p:nvSpPr>
+          <p:cNvPr id="10" name="Cell7">
+            <a:extLst>
+              <a:ext uri="{FF2B5EF4-FFF2-40B4-BE49-F238E27FC236}">
+                <a16:creationId xmlns:a16="http://schemas.microsoft.com/office/drawing/2014/main" id="{EF5C7E2B-4C13-BAE8-C385-0BCC9E238D02}"/>
+              </a:ext>
+            </a:extLst>
+          </p:cNvPr>
+          <p:cNvSpPr/>
+          <p:nvPr/>
+        </p:nvSpPr>
+        <p:spPr>
+          <a:xfrm>
+            <a:off x="1023620" y="3926840"/>
+            <a:ext cx="635000" cy="508000"/>
+          </a:xfrm>
+          <a:prstGeom prst="rect">
+            <a:avLst/>
+          </a:prstGeom>
+          <a:solidFill>
+            <a:srgbClr val="1F77B4"/>
+          </a:solidFill>
+          <a:ln w="19050" cap="flat" cmpd="sng" algn="ctr">
+            <a:noFill/>
+            <a:prstDash val="solid"/>
+            <a:miter lim="800000"/>
+          </a:ln>
+          <a:effectLst/>
+          <a:extLst>
+            <a:ext uri="{91240B29-F687-4F45-9708-019B960494DF}">
+              <a14:hiddenLine xmlns:a14="http://schemas.microsoft.com/office/drawing/2010/main" w="19050" cap="flat" cmpd="sng" algn="ctr">
+                <a:solidFill>
+                  <a:schemeClr val="accent1">
+                    <a:shade val="15000"/>
+                  </a:schemeClr>
+                </a:solidFill>
+                <a:prstDash val="solid"/>
+                <a:miter lim="800000"/>
+              </a14:hiddenLine>
+            </a:ext>
+          </a:extLst>
+        </p:spPr>
+        <p:style>
+          <a:lnRef idx="2">
+            <a:schemeClr val="accent1">
+              <a:shade val="15000"/>
+            </a:schemeClr>
+          </a:lnRef>
+          <a:fillRef idx="1">
+            <a:schemeClr val="accent1"/>
+          </a:fillRef>
+          <a:effectRef idx="0">
+            <a:schemeClr val="accent1"/>
+          </a:effectRef>
+          <a:fontRef idx="minor">
+            <a:schemeClr val="lt1"/>
+          </a:fontRef>
+        </p:style>
+        <p:txBody>
+          <a:bodyPr rtlCol="0" anchor="ctr"/>
+          <a:lstStyle/>
+          <a:p>
+            <a:pPr algn="ctr"/>
+            <a:r>
+              <a:rPr lang="en-AU" sz="1400" b="1">
+                <a:solidFill>
+                  <a:srgbClr val="FFFFFF"/>
+                </a:solidFill>
+              </a:rPr>
+              <a:t>7</a:t>
+            </a:r>
+          </a:p>
+        </p:txBody>
+      </p:sp>
+      <p:sp>
+        <p:nvSpPr>
+          <p:cNvPr id="11" name="Cell8">
+            <a:extLst>
+              <a:ext uri="{FF2B5EF4-FFF2-40B4-BE49-F238E27FC236}">
+                <a16:creationId xmlns:a16="http://schemas.microsoft.com/office/drawing/2014/main" id="{FC242D84-F9D6-ADF1-B065-25373DBABBB3}"/>
+              </a:ext>
+            </a:extLst>
+          </p:cNvPr>
+          <p:cNvSpPr/>
+          <p:nvPr/>
+        </p:nvSpPr>
+        <p:spPr>
+          <a:xfrm>
+            <a:off x="2160270" y="3931920"/>
+            <a:ext cx="635000" cy="508000"/>
+          </a:xfrm>
+          <a:prstGeom prst="rect">
+            <a:avLst/>
+          </a:prstGeom>
+          <a:solidFill>
+            <a:srgbClr val="1F77B4"/>
+          </a:solidFill>
+          <a:ln w="19050" cap="flat" cmpd="sng" algn="ctr">
+            <a:noFill/>
+            <a:prstDash val="solid"/>
+            <a:miter lim="800000"/>
+          </a:ln>
+          <a:effectLst/>
+          <a:extLst>
+            <a:ext uri="{91240B29-F687-4F45-9708-019B960494DF}">
+              <a14:hiddenLine xmlns:a14="http://schemas.microsoft.com/office/drawing/2010/main" w="19050" cap="flat" cmpd="sng" algn="ctr">
+                <a:solidFill>
+                  <a:schemeClr val="accent1">
+                    <a:shade val="15000"/>
+                  </a:schemeClr>
+                </a:solidFill>
+                <a:prstDash val="solid"/>
+                <a:miter lim="800000"/>
+              </a14:hiddenLine>
+            </a:ext>
+          </a:extLst>
+        </p:spPr>
+        <p:style>
+          <a:lnRef idx="2">
+            <a:schemeClr val="accent1">
+              <a:shade val="15000"/>
+            </a:schemeClr>
+          </a:lnRef>
+          <a:fillRef idx="1">
+            <a:schemeClr val="accent1"/>
+          </a:fillRef>
+          <a:effectRef idx="0">
+            <a:schemeClr val="accent1"/>
+          </a:effectRef>
+          <a:fontRef idx="minor">
+            <a:schemeClr val="lt1"/>
+          </a:fontRef>
+        </p:style>
+        <p:txBody>
+          <a:bodyPr rtlCol="0" anchor="ctr"/>
+          <a:lstStyle/>
+          <a:p>
+            <a:pPr algn="ctr"/>
+            <a:r>
+              <a:rPr lang="en-AU" sz="1400" b="1">
+                <a:solidFill>
+                  <a:srgbClr val="FFFFFF"/>
+                </a:solidFill>
+              </a:rPr>
+              <a:t>8</a:t>
+            </a:r>
+          </a:p>
+        </p:txBody>
+      </p:sp>
+      <p:sp>
+        <p:nvSpPr>
+          <p:cNvPr id="12" name="Cell9">
+            <a:extLst>
+              <a:ext uri="{FF2B5EF4-FFF2-40B4-BE49-F238E27FC236}">
+                <a16:creationId xmlns:a16="http://schemas.microsoft.com/office/drawing/2014/main" id="{CE6D8535-E89A-F23C-9E94-D99DBF029B2D}"/>
+              </a:ext>
+            </a:extLst>
+          </p:cNvPr>
+          <p:cNvSpPr/>
+          <p:nvPr/>
+        </p:nvSpPr>
+        <p:spPr>
+          <a:xfrm>
+            <a:off x="3308350" y="3928110"/>
+            <a:ext cx="635000" cy="508000"/>
+          </a:xfrm>
+          <a:prstGeom prst="rect">
+            <a:avLst/>
+          </a:prstGeom>
+          <a:solidFill>
+            <a:srgbClr val="1F77B4"/>
+          </a:solidFill>
+          <a:ln w="19050" cap="flat" cmpd="sng" algn="ctr">
+            <a:noFill/>
+            <a:prstDash val="solid"/>
+            <a:miter lim="800000"/>
+          </a:ln>
+          <a:effectLst/>
+          <a:extLst>
+            <a:ext uri="{91240B29-F687-4F45-9708-019B960494DF}">
+              <a14:hiddenLine xmlns:a14="http://schemas.microsoft.com/office/drawing/2010/main" w="19050" cap="flat" cmpd="sng" algn="ctr">
+                <a:solidFill>
+                  <a:schemeClr val="accent1">
+                    <a:shade val="15000"/>
+                  </a:schemeClr>
+                </a:solidFill>
+                <a:prstDash val="solid"/>
+                <a:miter lim="800000"/>
+              </a14:hiddenLine>
+            </a:ext>
+          </a:extLst>
+        </p:spPr>
+        <p:style>
+          <a:lnRef idx="2">
+            <a:schemeClr val="accent1">
+              <a:shade val="15000"/>
+            </a:schemeClr>
+          </a:lnRef>
+          <a:fillRef idx="1">
+            <a:schemeClr val="accent1"/>
+          </a:fillRef>
+          <a:effectRef idx="0">
+            <a:schemeClr val="accent1"/>
+          </a:effectRef>
+          <a:fontRef idx="minor">
+            <a:schemeClr val="lt1"/>
+          </a:fontRef>
+        </p:style>
+        <p:txBody>
+          <a:bodyPr rtlCol="0" anchor="ctr"/>
+          <a:lstStyle/>
+          <a:p>
+            <a:pPr algn="ctr"/>
+            <a:r>
+              <a:rPr lang="en-AU" sz="1400" b="1">
+                <a:solidFill>
+                  <a:srgbClr val="FFFFFF"/>
+                </a:solidFill>
+              </a:rPr>
+              <a:t>9</a:t>
+            </a:r>
+          </a:p>
+        </p:txBody>
+      </p:sp>
+      <p:cxnSp>
+        <p:nvCxnSpPr>
+          <p:cNvPr id="13" name="Link">
+            <a:extLst>
+              <a:ext uri="{FF2B5EF4-FFF2-40B4-BE49-F238E27FC236}">
+                <a16:creationId xmlns:a16="http://schemas.microsoft.com/office/drawing/2014/main" id="{C705802A-F1D1-62F3-A045-F4AA36DEFCA5}"/>
+              </a:ext>
+            </a:extLst>
+          </p:cNvPr>
+          <p:cNvCxnSpPr>
+            <a:cxnSpLocks/>
+            <a:stCxn id="4" idx="3"/>
+            <a:endCxn id="5" idx="1"/>
+          </p:cNvCxnSpPr>
+          <p:nvPr/>
+        </p:nvCxnSpPr>
+        <p:spPr>
+          <a:xfrm>
+            <a:off x="1656080" y="2147570"/>
+            <a:ext cx="511810" cy="7620"/>
+          </a:xfrm>
+          <a:prstGeom prst="straightConnector1">
+            <a:avLst/>
+          </a:prstGeom>
+          <a:ln>
+            <a:solidFill>
+              <a:srgbClr val="7F7F7F"/>
+            </a:solidFill>
+          </a:ln>
+        </p:spPr>
+        <p:style>
+          <a:lnRef idx="2">
+            <a:schemeClr val="accent1"/>
+          </a:lnRef>
+          <a:fillRef idx="0">
+            <a:schemeClr val="accent1"/>
+          </a:fillRef>
+          <a:effectRef idx="1">
+            <a:schemeClr val="accent1"/>
+          </a:effectRef>
+          <a:fontRef idx="minor">
+            <a:schemeClr val="tx1"/>
+          </a:fontRef>
+        </p:style>
+      </p:cxnSp>
+      <p:sp>
+        <p:nvSpPr>
+          <p:cNvPr id="14" name="Step1">
+            <a:extLst>
+              <a:ext uri="{FF2B5EF4-FFF2-40B4-BE49-F238E27FC236}">
+                <a16:creationId xmlns:a16="http://schemas.microsoft.com/office/drawing/2014/main" id="{D4715F3E-C2A0-2B93-6A6B-50F4FA1B97BA}"/>
+              </a:ext>
+            </a:extLst>
+          </p:cNvPr>
+          <p:cNvSpPr/>
+          <p:nvPr/>
+        </p:nvSpPr>
+        <p:spPr>
+          <a:xfrm>
+            <a:off x="6096000" y="2032000"/>
+            <a:ext cx="635000" cy="508000"/>
+          </a:xfrm>
+          <a:prstGeom prst="rect">
+            <a:avLst/>
+          </a:prstGeom>
+          <a:solidFill>
+            <a:srgbClr val="2CA02C"/>
+          </a:solidFill>
+          <a:ln w="19050" cap="flat" cmpd="sng" algn="ctr">
+            <a:noFill/>
+            <a:prstDash val="solid"/>
+            <a:miter lim="800000"/>
+          </a:ln>
+          <a:effectLst/>
+          <a:extLst>
+            <a:ext uri="{91240B29-F687-4F45-9708-019B960494DF}">
+              <a14:hiddenLine xmlns:a14="http://schemas.microsoft.com/office/drawing/2010/main" w="19050" cap="flat" cmpd="sng" algn="ctr">
+                <a:solidFill>
+                  <a:schemeClr val="accent1">
+                    <a:shade val="15000"/>
+                  </a:schemeClr>
+                </a:solidFill>
+                <a:prstDash val="solid"/>
+                <a:miter lim="800000"/>
+              </a14:hiddenLine>
+            </a:ext>
+          </a:extLst>
+        </p:spPr>
+        <p:style>
+          <a:lnRef idx="2">
+            <a:schemeClr val="accent1">
+              <a:shade val="15000"/>
+            </a:schemeClr>
+          </a:lnRef>
+          <a:fillRef idx="1">
+            <a:schemeClr val="accent1"/>
+          </a:fillRef>
+          <a:effectRef idx="0">
+            <a:schemeClr val="accent1"/>
+          </a:effectRef>
+          <a:fontRef idx="minor">
+            <a:schemeClr val="lt1"/>
+          </a:fontRef>
+        </p:style>
+        <p:txBody>
+          <a:bodyPr rtlCol="0" anchor="ctr"/>
+          <a:lstStyle/>
+          <a:p>
+            <a:pPr algn="ctr"/>
+            <a:r>
+              <a:rPr lang="en-AU" sz="1400" b="1">
+                <a:solidFill>
+                  <a:srgbClr val="FFFFFF"/>
+                </a:solidFill>
+              </a:rPr>
+              <a:t>1</a:t>
+            </a:r>
+          </a:p>
+        </p:txBody>
+      </p:sp>
+      <p:sp>
+        <p:nvSpPr>
+          <p:cNvPr id="15" name="Step2">
+            <a:extLst>
+              <a:ext uri="{FF2B5EF4-FFF2-40B4-BE49-F238E27FC236}">
+                <a16:creationId xmlns:a16="http://schemas.microsoft.com/office/drawing/2014/main" id="{50A26994-18BF-2860-AAA9-E86891E1C5E4}"/>
+              </a:ext>
+            </a:extLst>
+          </p:cNvPr>
+          <p:cNvSpPr/>
+          <p:nvPr/>
+        </p:nvSpPr>
+        <p:spPr>
+          <a:xfrm>
+            <a:off x="6959600" y="2042160"/>
+            <a:ext cx="635000" cy="508000"/>
+          </a:xfrm>
+          <a:prstGeom prst="rect">
+            <a:avLst/>
+          </a:prstGeom>
+          <a:solidFill>
+            <a:srgbClr val="2CA02C"/>
+          </a:solidFill>
+          <a:ln w="19050" cap="flat" cmpd="sng" algn="ctr">
+            <a:noFill/>
+            <a:prstDash val="solid"/>
+            <a:miter lim="800000"/>
+          </a:ln>
+          <a:effectLst/>
+          <a:extLst>
+            <a:ext uri="{91240B29-F687-4F45-9708-019B960494DF}">
+              <a14:hiddenLine xmlns:a14="http://schemas.microsoft.com/office/drawing/2010/main" w="19050" cap="flat" cmpd="sng" algn="ctr">
+                <a:solidFill>
+                  <a:schemeClr val="accent1">
+                    <a:shade val="15000"/>
+                  </a:schemeClr>
+                </a:solidFill>
+                <a:prstDash val="solid"/>
+                <a:miter lim="800000"/>
+              </a14:hiddenLine>
+            </a:ext>
+          </a:extLst>
+        </p:spPr>
+        <p:style>
+          <a:lnRef idx="2">
+            <a:schemeClr val="accent1">
+              <a:shade val="15000"/>
+            </a:schemeClr>
+          </a:lnRef>
+          <a:fillRef idx="1">
+            <a:schemeClr val="accent1"/>
+          </a:fillRef>
+          <a:effectRef idx="0">
+            <a:schemeClr val="accent1"/>
+          </a:effectRef>
+          <a:fontRef idx="minor">
+            <a:schemeClr val="lt1"/>
+          </a:fontRef>
+        </p:style>
+        <p:txBody>
+          <a:bodyPr rtlCol="0" anchor="ctr"/>
+          <a:lstStyle/>
+          <a:p>
+            <a:pPr algn="ctr"/>
+            <a:r>
+              <a:rPr lang="en-AU" sz="1400" b="1">
+                <a:solidFill>
+                  <a:srgbClr val="FFFFFF"/>
+                </a:solidFill>
+              </a:rPr>
+              <a:t>2</a:t>
+            </a:r>
+          </a:p>
+        </p:txBody>
+      </p:sp>
+      <p:sp>
+        <p:nvSpPr>
+          <p:cNvPr id="16" name="Step3">
+            <a:extLst>
+              <a:ext uri="{FF2B5EF4-FFF2-40B4-BE49-F238E27FC236}">
+                <a16:creationId xmlns:a16="http://schemas.microsoft.com/office/drawing/2014/main" id="{F29022B4-7C8F-705E-0AAF-DB8F977EDC2F}"/>
+              </a:ext>
+            </a:extLst>
+          </p:cNvPr>
+          <p:cNvSpPr/>
+          <p:nvPr/>
+        </p:nvSpPr>
+        <p:spPr>
+          <a:xfrm>
+            <a:off x="7848600" y="2025650"/>
+            <a:ext cx="635000" cy="508000"/>
+          </a:xfrm>
+          <a:prstGeom prst="rect">
+            <a:avLst/>
+          </a:prstGeom>
+          <a:solidFill>
+            <a:srgbClr val="2CA02C"/>
+          </a:solidFill>
+          <a:ln w="19050" cap="flat" cmpd="sng" algn="ctr">
+            <a:noFill/>
+            <a:prstDash val="solid"/>
+            <a:miter lim="800000"/>
+          </a:ln>
+          <a:effectLst/>
+          <a:extLst>
+            <a:ext uri="{91240B29-F687-4F45-9708-019B960494DF}">
+              <a14:hiddenLine xmlns:a14="http://schemas.microsoft.com/office/drawing/2010/main" w="19050" cap="flat" cmpd="sng" algn="ctr">
+                <a:solidFill>
+                  <a:schemeClr val="accent1">
+                    <a:shade val="15000"/>
+                  </a:schemeClr>
+                </a:solidFill>
+                <a:prstDash val="solid"/>
+                <a:miter lim="800000"/>
+              </a14:hiddenLine>
+            </a:ext>
+          </a:extLst>
+        </p:spPr>
+        <p:style>
+          <a:lnRef idx="2">
+            <a:schemeClr val="accent1">
+              <a:shade val="15000"/>
+            </a:schemeClr>
+          </a:lnRef>
+          <a:fillRef idx="1">
+            <a:schemeClr val="accent1"/>
+          </a:fillRef>
+          <a:effectRef idx="0">
+            <a:schemeClr val="accent1"/>
+          </a:effectRef>
+          <a:fontRef idx="minor">
+            <a:schemeClr val="lt1"/>
+          </a:fontRef>
+        </p:style>
+        <p:txBody>
+          <a:bodyPr rtlCol="0" anchor="ctr"/>
+          <a:lstStyle/>
+          <a:p>
+            <a:pPr algn="ctr"/>
+            <a:r>
+              <a:rPr lang="en-AU" sz="1400" b="1">
+                <a:solidFill>
+                  <a:srgbClr val="FFFFFF"/>
+                </a:solidFill>
+              </a:rPr>
+              <a:t>3</a:t>
+            </a:r>
+          </a:p>
+        </p:txBody>
+      </p:sp>
+      <p:sp>
+        <p:nvSpPr>
+          <p:cNvPr id="17" name="Step4">
+            <a:extLst>
+              <a:ext uri="{FF2B5EF4-FFF2-40B4-BE49-F238E27FC236}">
+                <a16:creationId xmlns:a16="http://schemas.microsoft.com/office/drawing/2014/main" id="{702EE548-8C1E-31F9-0301-ECDF6D71D9CF}"/>
+              </a:ext>
+            </a:extLst>
+          </p:cNvPr>
+          <p:cNvSpPr/>
+          <p:nvPr/>
+        </p:nvSpPr>
+        <p:spPr>
+          <a:xfrm>
+            <a:off x="8750300" y="2037080"/>
+            <a:ext cx="635000" cy="508000"/>
+          </a:xfrm>
+          <a:prstGeom prst="rect">
+            <a:avLst/>
+          </a:prstGeom>
+          <a:solidFill>
+            <a:srgbClr val="2CA02C"/>
+          </a:solidFill>
+          <a:ln w="19050" cap="flat" cmpd="sng" algn="ctr">
+            <a:noFill/>
+            <a:prstDash val="solid"/>
+            <a:miter lim="800000"/>
+          </a:ln>
+          <a:effectLst/>
+          <a:extLst>
+            <a:ext uri="{91240B29-F687-4F45-9708-019B960494DF}">
+              <a14:hiddenLine xmlns:a14="http://schemas.microsoft.com/office/drawing/2010/main" w="19050" cap="flat" cmpd="sng" algn="ctr">
+                <a:solidFill>
+                  <a:schemeClr val="accent1">
+                    <a:shade val="15000"/>
+                  </a:schemeClr>
+                </a:solidFill>
+                <a:prstDash val="solid"/>
+                <a:miter lim="800000"/>
+              </a14:hiddenLine>
+            </a:ext>
+          </a:extLst>
+        </p:spPr>
+        <p:style>
+          <a:lnRef idx="2">
+            <a:schemeClr val="accent1">
+              <a:shade val="15000"/>
+            </a:schemeClr>
+          </a:lnRef>
+          <a:fillRef idx="1">
+            <a:schemeClr val="accent1"/>
+          </a:fillRef>
+          <a:effectRef idx="0">
+            <a:schemeClr val="accent1"/>
+          </a:effectRef>
+          <a:fontRef idx="minor">
+            <a:schemeClr val="lt1"/>
+          </a:fontRef>
+        </p:style>
+        <p:txBody>
+          <a:bodyPr rtlCol="0" anchor="ctr"/>
+          <a:lstStyle/>
+          <a:p>
+            <a:pPr algn="ctr"/>
+            <a:r>
+              <a:rPr lang="en-AU" sz="1400" b="1">
+                <a:solidFill>
+                  <a:srgbClr val="FFFFFF"/>
+                </a:solidFill>
+              </a:rPr>
+              <a:t>4</a:t>
+            </a:r>
+          </a:p>
+        </p:txBody>
+      </p:sp>
+      <p:sp>
+        <p:nvSpPr>
+          <p:cNvPr id="18" name="StagA">
+            <a:extLst>
+              <a:ext uri="{FF2B5EF4-FFF2-40B4-BE49-F238E27FC236}">
+                <a16:creationId xmlns:a16="http://schemas.microsoft.com/office/drawing/2014/main" id="{5A80ECF4-6A5F-2FDC-9D84-0EEA68EE9B49}"/>
+              </a:ext>
+            </a:extLst>
+          </p:cNvPr>
+          <p:cNvSpPr/>
+          <p:nvPr/>
+        </p:nvSpPr>
+        <p:spPr>
+          <a:xfrm>
+            <a:off x="6604000" y="3810000"/>
+            <a:ext cx="2032000" cy="508000"/>
+          </a:xfrm>
+          <a:prstGeom prst="rect">
+            <a:avLst/>
+          </a:prstGeom>
+          <a:solidFill>
+            <a:srgbClr val="FF7F0E"/>
+          </a:solidFill>
+          <a:ln w="19050" cap="flat" cmpd="sng" algn="ctr">
+            <a:noFill/>
+            <a:prstDash val="solid"/>
+            <a:miter lim="800000"/>
+          </a:ln>
+          <a:effectLst/>
+          <a:extLst>
+            <a:ext uri="{91240B29-F687-4F45-9708-019B960494DF}">
+              <a14:hiddenLine xmlns:a14="http://schemas.microsoft.com/office/drawing/2010/main" w="19050" cap="flat" cmpd="sng" algn="ctr">
+                <a:solidFill>
+                  <a:schemeClr val="accent1">
+                    <a:shade val="15000"/>
+                  </a:schemeClr>
+                </a:solidFill>
+                <a:prstDash val="solid"/>
+                <a:miter lim="800000"/>
+              </a14:hiddenLine>
+            </a:ext>
+          </a:extLst>
+        </p:spPr>
+        <p:style>
+          <a:lnRef idx="2">
+            <a:schemeClr val="accent1">
+              <a:shade val="15000"/>
+            </a:schemeClr>
+          </a:lnRef>
+          <a:fillRef idx="1">
+            <a:schemeClr val="accent1"/>
+          </a:fillRef>
+          <a:effectRef idx="0">
+            <a:schemeClr val="accent1"/>
+          </a:effectRef>
+          <a:fontRef idx="minor">
+            <a:schemeClr val="lt1"/>
+          </a:fontRef>
+        </p:style>
+        <p:txBody>
+          <a:bodyPr rtlCol="0" anchor="ctr"/>
+          <a:lstStyle/>
+          <a:p>
+            <a:pPr algn="ctr"/>
+            <a:r>
+              <a:rPr lang="en-AU" sz="1400" b="1">
+                <a:solidFill>
+                  <a:srgbClr val="FFFFFF"/>
+                </a:solidFill>
+              </a:rPr>
+              <a:t>Stagger</a:t>
+            </a:r>
+          </a:p>
+        </p:txBody>
+      </p:sp>
+      <p:sp>
+        <p:nvSpPr>
+          <p:cNvPr id="19" name="StagB">
+            <a:extLst>
+              <a:ext uri="{FF2B5EF4-FFF2-40B4-BE49-F238E27FC236}">
+                <a16:creationId xmlns:a16="http://schemas.microsoft.com/office/drawing/2014/main" id="{2593E151-0FB3-F903-BABC-92BDC68B0F08}"/>
+              </a:ext>
+            </a:extLst>
+          </p:cNvPr>
+          <p:cNvSpPr/>
+          <p:nvPr/>
+        </p:nvSpPr>
+        <p:spPr>
+          <a:xfrm>
+            <a:off x="6680200" y="4572000"/>
+            <a:ext cx="2032000" cy="508000"/>
+          </a:xfrm>
+          <a:prstGeom prst="rect">
+            <a:avLst/>
+          </a:prstGeom>
+          <a:solidFill>
+            <a:srgbClr val="FF7F0E"/>
+          </a:solidFill>
+          <a:ln w="19050" cap="flat" cmpd="sng" algn="ctr">
+            <a:noFill/>
+            <a:prstDash val="solid"/>
+            <a:miter lim="800000"/>
+          </a:ln>
+          <a:effectLst/>
+          <a:extLst>
+            <a:ext uri="{91240B29-F687-4F45-9708-019B960494DF}">
+              <a14:hiddenLine xmlns:a14="http://schemas.microsoft.com/office/drawing/2010/main" w="19050" cap="flat" cmpd="sng" algn="ctr">
+                <a:solidFill>
+                  <a:schemeClr val="accent1">
+                    <a:shade val="15000"/>
+                  </a:schemeClr>
+                </a:solidFill>
+                <a:prstDash val="solid"/>
+                <a:miter lim="800000"/>
+              </a14:hiddenLine>
+            </a:ext>
+          </a:extLst>
+        </p:spPr>
+        <p:style>
+          <a:lnRef idx="2">
+            <a:schemeClr val="accent1">
+              <a:shade val="15000"/>
+            </a:schemeClr>
+          </a:lnRef>
+          <a:fillRef idx="1">
+            <a:schemeClr val="accent1"/>
+          </a:fillRef>
+          <a:effectRef idx="0">
+            <a:schemeClr val="accent1"/>
+          </a:effectRef>
+          <a:fontRef idx="minor">
+            <a:schemeClr val="lt1"/>
+          </a:fontRef>
+        </p:style>
+        <p:txBody>
+          <a:bodyPr rtlCol="0" anchor="ctr"/>
+          <a:lstStyle/>
+          <a:p>
+            <a:pPr algn="ctr"/>
+            <a:r>
+              <a:rPr lang="en-AU" sz="1400" b="1">
+                <a:solidFill>
+                  <a:srgbClr val="FFFFFF"/>
+                </a:solidFill>
+              </a:rPr>
+              <a:t>6pt in</a:t>
+            </a:r>
+          </a:p>
+        </p:txBody>
+      </p:sp>
+      <p:sp>
+        <p:nvSpPr>
+          <p:cNvPr id="20" name="TextBox 19">
+            <a:extLst>
+              <a:ext uri="{FF2B5EF4-FFF2-40B4-BE49-F238E27FC236}">
+                <a16:creationId xmlns:a16="http://schemas.microsoft.com/office/drawing/2014/main" id="{ACA92511-2A42-1A28-E53D-3700D4DB09DF}"/>
+              </a:ext>
+            </a:extLst>
+          </p:cNvPr>
+          <p:cNvSpPr txBox="1"/>
+          <p:nvPr/>
+        </p:nvSpPr>
+        <p:spPr>
+          <a:xfrm>
+            <a:off x="508000" y="5715000"/>
+            <a:ext cx="11176000" cy="461665"/>
+          </a:xfrm>
+          <a:prstGeom prst="rect">
+            <a:avLst/>
+          </a:prstGeom>
+          <a:noFill/>
+        </p:spPr>
+        <p:txBody>
+          <a:bodyPr vert="horz" rtlCol="0">
+            <a:spAutoFit/>
+          </a:bodyPr>
+          <a:lstStyle/>
+          <a:p>
+            <a:r>
+              <a:rPr lang="en-AU" sz="1200">
+                <a:solidFill>
+                  <a:srgbClr val="7F7F7F"/>
+                </a:solidFill>
+              </a:rPr>
+              <a:t>Tidy lines up edges and centres that are within the Tolerance of each other, and evens out rows and columns that are nearly evenly spaced. It only moves shapes, and it says what it did. The orange pair is 6pt apart, which at 3pt reads as deliberate, so it stays; the connector is left to follow its boxes.</a:t>
+            </a:r>
+          </a:p>
+        </p:txBody>
+      </p:sp>
+    </p:spTree>
+    <p:extLst>
+      <p:ext uri="{BB962C8B-B14F-4D97-AF65-F5344CB8AC3E}">
+        <p14:creationId xmlns:p14="http://schemas.microsoft.com/office/powerpoint/2010/main" val="802554201"/>
       </p:ext>
     </p:extLst>
   </p:cSld>
@@ -8788,7 +10106,7 @@
           <p:cNvPr id="2" name="Heading">
             <a:extLst>
               <a:ext uri="{FF2B5EF4-FFF2-40B4-BE49-F238E27FC236}">
-                <a16:creationId xmlns:a16="http://schemas.microsoft.com/office/drawing/2014/main" id="{986C52E9-6ECC-B684-DF39-BF2EDF699F2F}"/>
+                <a16:creationId xmlns:a16="http://schemas.microsoft.com/office/drawing/2014/main" id="{0B4D43F9-C13A-5628-D701-12B806D7CCB6}"/>
               </a:ext>
             </a:extLst>
           </p:cNvPr>
@@ -8827,7 +10145,7 @@
           <p:cNvPr id="3" name="Instructions">
             <a:extLst>
               <a:ext uri="{FF2B5EF4-FFF2-40B4-BE49-F238E27FC236}">
-                <a16:creationId xmlns:a16="http://schemas.microsoft.com/office/drawing/2014/main" id="{3E8413A1-45B9-D6F3-A5D8-E3A72811E6A8}"/>
+                <a16:creationId xmlns:a16="http://schemas.microsoft.com/office/drawing/2014/main" id="{6E904152-AD2F-197C-D236-72FCB87096F7}"/>
               </a:ext>
             </a:extLst>
           </p:cNvPr>
@@ -8866,7 +10184,7 @@
           <p:cNvPr id="4" name="Small1">
             <a:extLst>
               <a:ext uri="{FF2B5EF4-FFF2-40B4-BE49-F238E27FC236}">
-                <a16:creationId xmlns:a16="http://schemas.microsoft.com/office/drawing/2014/main" id="{B74CECF4-7D20-7CB0-C48D-C6E4676FB53A}"/>
+                <a16:creationId xmlns:a16="http://schemas.microsoft.com/office/drawing/2014/main" id="{A0ED2C7B-D88A-2248-CC2A-5806F325659F}"/>
               </a:ext>
             </a:extLst>
           </p:cNvPr>
@@ -8941,7 +10259,7 @@
           <p:cNvPr id="5" name="Small2">
             <a:extLst>
               <a:ext uri="{FF2B5EF4-FFF2-40B4-BE49-F238E27FC236}">
-                <a16:creationId xmlns:a16="http://schemas.microsoft.com/office/drawing/2014/main" id="{70B3423E-FA47-E429-23E1-3A9D6AED9D27}"/>
+                <a16:creationId xmlns:a16="http://schemas.microsoft.com/office/drawing/2014/main" id="{48EBCFCD-FA66-6DE7-25B9-855ABACEAE34}"/>
               </a:ext>
             </a:extLst>
           </p:cNvPr>
@@ -9016,7 +10334,7 @@
           <p:cNvPr id="6" name="Small3">
             <a:extLst>
               <a:ext uri="{FF2B5EF4-FFF2-40B4-BE49-F238E27FC236}">
-                <a16:creationId xmlns:a16="http://schemas.microsoft.com/office/drawing/2014/main" id="{581FBC19-FE64-B5FE-3723-293B53E47305}"/>
+                <a16:creationId xmlns:a16="http://schemas.microsoft.com/office/drawing/2014/main" id="{44E39636-0C30-DCA2-88F9-8A1C9ACBDD3F}"/>
               </a:ext>
             </a:extLst>
           </p:cNvPr>
@@ -9091,7 +10409,7 @@
           <p:cNvPr id="7" name="Anchor">
             <a:extLst>
               <a:ext uri="{FF2B5EF4-FFF2-40B4-BE49-F238E27FC236}">
-                <a16:creationId xmlns:a16="http://schemas.microsoft.com/office/drawing/2014/main" id="{B6ED94BA-5EFD-9124-A7DC-9D7C88CF52D1}"/>
+                <a16:creationId xmlns:a16="http://schemas.microsoft.com/office/drawing/2014/main" id="{CAC59A5A-470A-0A31-F344-B2547F05E7D7}"/>
               </a:ext>
             </a:extLst>
           </p:cNvPr>
@@ -9164,7 +10482,7 @@
     </p:spTree>
     <p:extLst>
       <p:ext uri="{BB962C8B-B14F-4D97-AF65-F5344CB8AC3E}">
-        <p14:creationId xmlns:p14="http://schemas.microsoft.com/office/powerpoint/2010/main" val="3058848618"/>
+        <p14:creationId xmlns:p14="http://schemas.microsoft.com/office/powerpoint/2010/main" val="3387627564"/>
       </p:ext>
     </p:extLst>
   </p:cSld>
@@ -9196,7 +10514,7 @@
           <p:cNvPr id="2" name="Heading">
             <a:extLst>
               <a:ext uri="{FF2B5EF4-FFF2-40B4-BE49-F238E27FC236}">
-                <a16:creationId xmlns:a16="http://schemas.microsoft.com/office/drawing/2014/main" id="{155450BB-4454-4421-708F-99BE804C592B}"/>
+                <a16:creationId xmlns:a16="http://schemas.microsoft.com/office/drawing/2014/main" id="{A0EB5AF1-6BE6-4FDA-575C-B9CCDDD658D2}"/>
               </a:ext>
             </a:extLst>
           </p:cNvPr>
@@ -9235,7 +10553,7 @@
           <p:cNvPr id="3" name="Instructions">
             <a:extLst>
               <a:ext uri="{FF2B5EF4-FFF2-40B4-BE49-F238E27FC236}">
-                <a16:creationId xmlns:a16="http://schemas.microsoft.com/office/drawing/2014/main" id="{9CCAC67F-EACA-2EBE-E7A2-46ADE69B202B}"/>
+                <a16:creationId xmlns:a16="http://schemas.microsoft.com/office/drawing/2014/main" id="{37B2AE7D-B3D3-53FB-49A6-C369536B9F2F}"/>
               </a:ext>
             </a:extLst>
           </p:cNvPr>
@@ -9274,7 +10592,7 @@
           <p:cNvPr id="4" name="W200">
             <a:extLst>
               <a:ext uri="{FF2B5EF4-FFF2-40B4-BE49-F238E27FC236}">
-                <a16:creationId xmlns:a16="http://schemas.microsoft.com/office/drawing/2014/main" id="{602153ED-C4D9-40F3-172F-1D767AFDFDE3}"/>
+                <a16:creationId xmlns:a16="http://schemas.microsoft.com/office/drawing/2014/main" id="{29D8FE00-F944-55FA-E693-B5F37ECA18BC}"/>
               </a:ext>
             </a:extLst>
           </p:cNvPr>
@@ -9349,7 +10667,7 @@
           <p:cNvPr id="5" name="W60">
             <a:extLst>
               <a:ext uri="{FF2B5EF4-FFF2-40B4-BE49-F238E27FC236}">
-                <a16:creationId xmlns:a16="http://schemas.microsoft.com/office/drawing/2014/main" id="{1D2E6B6B-6CA9-B472-6689-FDE94217CCD4}"/>
+                <a16:creationId xmlns:a16="http://schemas.microsoft.com/office/drawing/2014/main" id="{EFD6C477-6C94-BE77-E604-572DBC28136F}"/>
               </a:ext>
             </a:extLst>
           </p:cNvPr>
@@ -9424,7 +10742,7 @@
           <p:cNvPr id="6" name="W120">
             <a:extLst>
               <a:ext uri="{FF2B5EF4-FFF2-40B4-BE49-F238E27FC236}">
-                <a16:creationId xmlns:a16="http://schemas.microsoft.com/office/drawing/2014/main" id="{9225B384-5CB8-FBE8-EBC7-62BB96224997}"/>
+                <a16:creationId xmlns:a16="http://schemas.microsoft.com/office/drawing/2014/main" id="{07ACC6E0-C13C-1D95-CEF9-4795DA95CD96}"/>
               </a:ext>
             </a:extLst>
           </p:cNvPr>
@@ -9499,7 +10817,7 @@
           <p:cNvPr id="7" name="W40">
             <a:extLst>
               <a:ext uri="{FF2B5EF4-FFF2-40B4-BE49-F238E27FC236}">
-                <a16:creationId xmlns:a16="http://schemas.microsoft.com/office/drawing/2014/main" id="{AB334C30-A6CF-7399-C5E7-07BA88D9BAD7}"/>
+                <a16:creationId xmlns:a16="http://schemas.microsoft.com/office/drawing/2014/main" id="{5BD1A741-AC46-D2B6-A682-F4075180F418}"/>
               </a:ext>
             </a:extLst>
           </p:cNvPr>
@@ -9574,7 +10892,7 @@
           <p:cNvPr id="8" name="W150">
             <a:extLst>
               <a:ext uri="{FF2B5EF4-FFF2-40B4-BE49-F238E27FC236}">
-                <a16:creationId xmlns:a16="http://schemas.microsoft.com/office/drawing/2014/main" id="{A0286630-09C5-982F-19B7-DF6E33FE7E11}"/>
+                <a16:creationId xmlns:a16="http://schemas.microsoft.com/office/drawing/2014/main" id="{C87987EC-DE4F-8BE7-783B-B6D95621BBB8}"/>
               </a:ext>
             </a:extLst>
           </p:cNvPr>
@@ -9649,7 +10967,7 @@
           <p:cNvPr id="9" name="TextBox 8">
             <a:extLst>
               <a:ext uri="{FF2B5EF4-FFF2-40B4-BE49-F238E27FC236}">
-                <a16:creationId xmlns:a16="http://schemas.microsoft.com/office/drawing/2014/main" id="{840EFFDE-D7FD-4809-5656-E282E8F86049}"/>
+                <a16:creationId xmlns:a16="http://schemas.microsoft.com/office/drawing/2014/main" id="{530D99F4-270A-9DF8-932F-F2708ECBFF73}"/>
               </a:ext>
             </a:extLst>
           </p:cNvPr>
@@ -9686,7 +11004,7 @@
     </p:spTree>
     <p:extLst>
       <p:ext uri="{BB962C8B-B14F-4D97-AF65-F5344CB8AC3E}">
-        <p14:creationId xmlns:p14="http://schemas.microsoft.com/office/powerpoint/2010/main" val="2917858536"/>
+        <p14:creationId xmlns:p14="http://schemas.microsoft.com/office/powerpoint/2010/main" val="2762994669"/>
       </p:ext>
     </p:extLst>
   </p:cSld>
@@ -9718,7 +11036,7 @@
           <p:cNvPr id="2" name="Heading">
             <a:extLst>
               <a:ext uri="{FF2B5EF4-FFF2-40B4-BE49-F238E27FC236}">
-                <a16:creationId xmlns:a16="http://schemas.microsoft.com/office/drawing/2014/main" id="{61A2506A-E02C-8236-9C79-82202DD318F0}"/>
+                <a16:creationId xmlns:a16="http://schemas.microsoft.com/office/drawing/2014/main" id="{A2BDC096-0983-BC9F-5BD9-F384D80D98FE}"/>
               </a:ext>
             </a:extLst>
           </p:cNvPr>
@@ -9757,7 +11075,7 @@
           <p:cNvPr id="3" name="Instructions">
             <a:extLst>
               <a:ext uri="{FF2B5EF4-FFF2-40B4-BE49-F238E27FC236}">
-                <a16:creationId xmlns:a16="http://schemas.microsoft.com/office/drawing/2014/main" id="{838AC774-FE8B-A40D-06ED-9F9CF866C5DA}"/>
+                <a16:creationId xmlns:a16="http://schemas.microsoft.com/office/drawing/2014/main" id="{AB51892E-7B81-4B23-868C-A0EEEEA701A5}"/>
               </a:ext>
             </a:extLst>
           </p:cNvPr>
@@ -9796,7 +11114,7 @@
           <p:cNvPr id="4" name="Gap0">
             <a:extLst>
               <a:ext uri="{FF2B5EF4-FFF2-40B4-BE49-F238E27FC236}">
-                <a16:creationId xmlns:a16="http://schemas.microsoft.com/office/drawing/2014/main" id="{385ADD94-1B38-CD1B-0FB6-EE022FCEE5A5}"/>
+                <a16:creationId xmlns:a16="http://schemas.microsoft.com/office/drawing/2014/main" id="{A80F8E55-2785-BE71-F002-C7DD54796DFE}"/>
               </a:ext>
             </a:extLst>
           </p:cNvPr>
@@ -9871,7 +11189,7 @@
           <p:cNvPr id="5" name="Gap1">
             <a:extLst>
               <a:ext uri="{FF2B5EF4-FFF2-40B4-BE49-F238E27FC236}">
-                <a16:creationId xmlns:a16="http://schemas.microsoft.com/office/drawing/2014/main" id="{2B0D1BBB-8782-2160-CB65-972D5F287DFE}"/>
+                <a16:creationId xmlns:a16="http://schemas.microsoft.com/office/drawing/2014/main" id="{3E3826CC-8841-AAE5-0CC1-D82BD01A1055}"/>
               </a:ext>
             </a:extLst>
           </p:cNvPr>
@@ -9946,7 +11264,7 @@
           <p:cNvPr id="6" name="Gap2">
             <a:extLst>
               <a:ext uri="{FF2B5EF4-FFF2-40B4-BE49-F238E27FC236}">
-                <a16:creationId xmlns:a16="http://schemas.microsoft.com/office/drawing/2014/main" id="{D23B8E60-0ED3-A467-C5C3-FC9458A54225}"/>
+                <a16:creationId xmlns:a16="http://schemas.microsoft.com/office/drawing/2014/main" id="{A96328EE-662C-679D-CC36-73298E3C25EA}"/>
               </a:ext>
             </a:extLst>
           </p:cNvPr>
@@ -10021,7 +11339,7 @@
           <p:cNvPr id="7" name="Gap3">
             <a:extLst>
               <a:ext uri="{FF2B5EF4-FFF2-40B4-BE49-F238E27FC236}">
-                <a16:creationId xmlns:a16="http://schemas.microsoft.com/office/drawing/2014/main" id="{9D240117-A63E-B762-4D93-3135D82256BF}"/>
+                <a16:creationId xmlns:a16="http://schemas.microsoft.com/office/drawing/2014/main" id="{BED305A0-DE0B-4D24-D820-E0E21998CE43}"/>
               </a:ext>
             </a:extLst>
           </p:cNvPr>
@@ -10096,7 +11414,7 @@
           <p:cNvPr id="8" name="TextBox 7">
             <a:extLst>
               <a:ext uri="{FF2B5EF4-FFF2-40B4-BE49-F238E27FC236}">
-                <a16:creationId xmlns:a16="http://schemas.microsoft.com/office/drawing/2014/main" id="{869D6F4A-A3F0-E9E7-72D0-1CDEBA832AE7}"/>
+                <a16:creationId xmlns:a16="http://schemas.microsoft.com/office/drawing/2014/main" id="{29F28C66-C3DE-2D27-0A79-C9691B4D9378}"/>
               </a:ext>
             </a:extLst>
           </p:cNvPr>
@@ -10133,7 +11451,7 @@
     </p:spTree>
     <p:extLst>
       <p:ext uri="{BB962C8B-B14F-4D97-AF65-F5344CB8AC3E}">
-        <p14:creationId xmlns:p14="http://schemas.microsoft.com/office/powerpoint/2010/main" val="1888434000"/>
+        <p14:creationId xmlns:p14="http://schemas.microsoft.com/office/powerpoint/2010/main" val="2157892607"/>
       </p:ext>
     </p:extLst>
   </p:cSld>
@@ -10165,7 +11483,7 @@
           <p:cNvPr id="2" name="Heading">
             <a:extLst>
               <a:ext uri="{FF2B5EF4-FFF2-40B4-BE49-F238E27FC236}">
-                <a16:creationId xmlns:a16="http://schemas.microsoft.com/office/drawing/2014/main" id="{EDA02801-A36E-89CE-44DC-75ACFFAC0915}"/>
+                <a16:creationId xmlns:a16="http://schemas.microsoft.com/office/drawing/2014/main" id="{93BC19E6-A370-DAD8-9EC4-F886F55ACF09}"/>
               </a:ext>
             </a:extLst>
           </p:cNvPr>
@@ -10204,7 +11522,7 @@
           <p:cNvPr id="3" name="Instructions">
             <a:extLst>
               <a:ext uri="{FF2B5EF4-FFF2-40B4-BE49-F238E27FC236}">
-                <a16:creationId xmlns:a16="http://schemas.microsoft.com/office/drawing/2014/main" id="{EB3E5981-2954-BAC6-B50B-865A735E0040}"/>
+                <a16:creationId xmlns:a16="http://schemas.microsoft.com/office/drawing/2014/main" id="{13C744E3-F82B-70F3-995C-ABC071710E41}"/>
               </a:ext>
             </a:extLst>
           </p:cNvPr>
@@ -10243,7 +11561,7 @@
           <p:cNvPr id="4" name="Odd1">
             <a:extLst>
               <a:ext uri="{FF2B5EF4-FFF2-40B4-BE49-F238E27FC236}">
-                <a16:creationId xmlns:a16="http://schemas.microsoft.com/office/drawing/2014/main" id="{0D8EA6CC-4422-0434-7EBB-EC77ED8B7D02}"/>
+                <a16:creationId xmlns:a16="http://schemas.microsoft.com/office/drawing/2014/main" id="{6C67EB7C-C6EC-05C3-2630-52EA8E77D0AD}"/>
               </a:ext>
             </a:extLst>
           </p:cNvPr>
@@ -10318,7 +11636,7 @@
           <p:cNvPr id="5" name="Odd2">
             <a:extLst>
               <a:ext uri="{FF2B5EF4-FFF2-40B4-BE49-F238E27FC236}">
-                <a16:creationId xmlns:a16="http://schemas.microsoft.com/office/drawing/2014/main" id="{813F234B-F690-F650-2BB8-8EA12BCBC0B1}"/>
+                <a16:creationId xmlns:a16="http://schemas.microsoft.com/office/drawing/2014/main" id="{4D0534BC-9C7C-58FE-94EE-9B2AF13ACC99}"/>
               </a:ext>
             </a:extLst>
           </p:cNvPr>
@@ -10393,7 +11711,7 @@
           <p:cNvPr id="6" name="Odd3">
             <a:extLst>
               <a:ext uri="{FF2B5EF4-FFF2-40B4-BE49-F238E27FC236}">
-                <a16:creationId xmlns:a16="http://schemas.microsoft.com/office/drawing/2014/main" id="{7C211400-5708-1D60-812B-EB7B72EA56B9}"/>
+                <a16:creationId xmlns:a16="http://schemas.microsoft.com/office/drawing/2014/main" id="{A399D68D-A9B2-B271-7F09-A6A5563FF828}"/>
               </a:ext>
             </a:extLst>
           </p:cNvPr>
@@ -10468,7 +11786,7 @@
           <p:cNvPr id="7" name="Target">
             <a:extLst>
               <a:ext uri="{FF2B5EF4-FFF2-40B4-BE49-F238E27FC236}">
-                <a16:creationId xmlns:a16="http://schemas.microsoft.com/office/drawing/2014/main" id="{CD397A8F-0123-8314-8036-9DF87E610287}"/>
+                <a16:creationId xmlns:a16="http://schemas.microsoft.com/office/drawing/2014/main" id="{7050CBF2-259D-E3F0-35D8-378F7347F66D}"/>
               </a:ext>
             </a:extLst>
           </p:cNvPr>
@@ -10541,7 +11859,7 @@
     </p:spTree>
     <p:extLst>
       <p:ext uri="{BB962C8B-B14F-4D97-AF65-F5344CB8AC3E}">
-        <p14:creationId xmlns:p14="http://schemas.microsoft.com/office/powerpoint/2010/main" val="2716272557"/>
+        <p14:creationId xmlns:p14="http://schemas.microsoft.com/office/powerpoint/2010/main" val="2144529165"/>
       </p:ext>
     </p:extLst>
   </p:cSld>
@@ -10573,7 +11891,7 @@
           <p:cNvPr id="2" name="Heading">
             <a:extLst>
               <a:ext uri="{FF2B5EF4-FFF2-40B4-BE49-F238E27FC236}">
-                <a16:creationId xmlns:a16="http://schemas.microsoft.com/office/drawing/2014/main" id="{3E2BDFC0-3568-8A9B-CBA5-DDB44E7CB79F}"/>
+                <a16:creationId xmlns:a16="http://schemas.microsoft.com/office/drawing/2014/main" id="{B4AC968B-2889-08B8-6C7D-FBC396AE216B}"/>
               </a:ext>
             </a:extLst>
           </p:cNvPr>
@@ -10612,7 +11930,7 @@
           <p:cNvPr id="3" name="Instructions">
             <a:extLst>
               <a:ext uri="{FF2B5EF4-FFF2-40B4-BE49-F238E27FC236}">
-                <a16:creationId xmlns:a16="http://schemas.microsoft.com/office/drawing/2014/main" id="{F3EDD9F4-01E4-CFB8-EEA4-E01C457DC827}"/>
+                <a16:creationId xmlns:a16="http://schemas.microsoft.com/office/drawing/2014/main" id="{D78F6EAC-5CF8-3149-3A88-D87BA0B810DE}"/>
               </a:ext>
             </a:extLst>
           </p:cNvPr>
@@ -10651,7 +11969,7 @@
           <p:cNvPr id="4" name="Card1">
             <a:extLst>
               <a:ext uri="{FF2B5EF4-FFF2-40B4-BE49-F238E27FC236}">
-                <a16:creationId xmlns:a16="http://schemas.microsoft.com/office/drawing/2014/main" id="{356855AF-40D4-3BAA-1B98-3FB9CFC8D349}"/>
+                <a16:creationId xmlns:a16="http://schemas.microsoft.com/office/drawing/2014/main" id="{4B076291-520B-EDE4-3CF6-051B21F7D734}"/>
               </a:ext>
             </a:extLst>
           </p:cNvPr>
@@ -10726,7 +12044,7 @@
           <p:cNvPr id="5" name="BarA">
             <a:extLst>
               <a:ext uri="{FF2B5EF4-FFF2-40B4-BE49-F238E27FC236}">
-                <a16:creationId xmlns:a16="http://schemas.microsoft.com/office/drawing/2014/main" id="{98838886-E63A-F291-3182-AD817711B807}"/>
+                <a16:creationId xmlns:a16="http://schemas.microsoft.com/office/drawing/2014/main" id="{11150C6B-92DB-75FD-CD25-A304EE05A30B}"/>
               </a:ext>
             </a:extLst>
           </p:cNvPr>
@@ -10798,7 +12116,7 @@
           <p:cNvPr id="6" name="Card2">
             <a:extLst>
               <a:ext uri="{FF2B5EF4-FFF2-40B4-BE49-F238E27FC236}">
-                <a16:creationId xmlns:a16="http://schemas.microsoft.com/office/drawing/2014/main" id="{83739B7E-EBE7-8F22-9C23-A1BADB39E134}"/>
+                <a16:creationId xmlns:a16="http://schemas.microsoft.com/office/drawing/2014/main" id="{97F0F394-7FE1-877D-3DE3-578F6483E92C}"/>
               </a:ext>
             </a:extLst>
           </p:cNvPr>
@@ -10873,7 +12191,7 @@
           <p:cNvPr id="7" name="BarB">
             <a:extLst>
               <a:ext uri="{FF2B5EF4-FFF2-40B4-BE49-F238E27FC236}">
-                <a16:creationId xmlns:a16="http://schemas.microsoft.com/office/drawing/2014/main" id="{BD3FB2D4-2EB3-96D9-BB2E-89F9331FC75D}"/>
+                <a16:creationId xmlns:a16="http://schemas.microsoft.com/office/drawing/2014/main" id="{8C493E13-64CC-0518-A69D-059B896AB50B}"/>
               </a:ext>
             </a:extLst>
           </p:cNvPr>
@@ -10945,7 +12263,7 @@
           <p:cNvPr id="8" name="Card3">
             <a:extLst>
               <a:ext uri="{FF2B5EF4-FFF2-40B4-BE49-F238E27FC236}">
-                <a16:creationId xmlns:a16="http://schemas.microsoft.com/office/drawing/2014/main" id="{B16E9752-F839-01EB-C3E7-345938474E6C}"/>
+                <a16:creationId xmlns:a16="http://schemas.microsoft.com/office/drawing/2014/main" id="{4AED36A8-1386-ABE0-8338-7458CD49C1EA}"/>
               </a:ext>
             </a:extLst>
           </p:cNvPr>
@@ -11020,7 +12338,7 @@
           <p:cNvPr id="9" name="TextBox 8">
             <a:extLst>
               <a:ext uri="{FF2B5EF4-FFF2-40B4-BE49-F238E27FC236}">
-                <a16:creationId xmlns:a16="http://schemas.microsoft.com/office/drawing/2014/main" id="{604F4EC8-BA29-A4D3-1F37-1B94A33038B7}"/>
+                <a16:creationId xmlns:a16="http://schemas.microsoft.com/office/drawing/2014/main" id="{8EB9BB31-AB4C-F082-D361-BE2E34443253}"/>
               </a:ext>
             </a:extLst>
           </p:cNvPr>
@@ -11057,7 +12375,7 @@
     </p:spTree>
     <p:extLst>
       <p:ext uri="{BB962C8B-B14F-4D97-AF65-F5344CB8AC3E}">
-        <p14:creationId xmlns:p14="http://schemas.microsoft.com/office/powerpoint/2010/main" val="2355846704"/>
+        <p14:creationId xmlns:p14="http://schemas.microsoft.com/office/powerpoint/2010/main" val="4267545175"/>
       </p:ext>
     </p:extLst>
   </p:cSld>
@@ -11089,7 +12407,7 @@
           <p:cNvPr id="2" name="Heading">
             <a:extLst>
               <a:ext uri="{FF2B5EF4-FFF2-40B4-BE49-F238E27FC236}">
-                <a16:creationId xmlns:a16="http://schemas.microsoft.com/office/drawing/2014/main" id="{4EC9C65D-489A-13FF-4622-6707C225FAC2}"/>
+                <a16:creationId xmlns:a16="http://schemas.microsoft.com/office/drawing/2014/main" id="{D28E94A6-2629-A24A-B6CE-2BB10F89B315}"/>
               </a:ext>
             </a:extLst>
           </p:cNvPr>
@@ -11128,7 +12446,7 @@
           <p:cNvPr id="3" name="Instructions">
             <a:extLst>
               <a:ext uri="{FF2B5EF4-FFF2-40B4-BE49-F238E27FC236}">
-                <a16:creationId xmlns:a16="http://schemas.microsoft.com/office/drawing/2014/main" id="{3FDE753C-249B-3827-FAC1-5509C6D88A71}"/>
+                <a16:creationId xmlns:a16="http://schemas.microsoft.com/office/drawing/2014/main" id="{8B22EA39-8D63-413A-C511-FDD90F619FC4}"/>
               </a:ext>
             </a:extLst>
           </p:cNvPr>
@@ -11167,7 +12485,7 @@
           <p:cNvPr id="4" name="Step1">
             <a:extLst>
               <a:ext uri="{FF2B5EF4-FFF2-40B4-BE49-F238E27FC236}">
-                <a16:creationId xmlns:a16="http://schemas.microsoft.com/office/drawing/2014/main" id="{1E65E548-4953-E17B-9975-478C731BB194}"/>
+                <a16:creationId xmlns:a16="http://schemas.microsoft.com/office/drawing/2014/main" id="{32CFC9BA-06E1-7A6C-A031-B1B0F1CC07C0}"/>
               </a:ext>
             </a:extLst>
           </p:cNvPr>
@@ -11242,7 +12560,7 @@
           <p:cNvPr id="5" name="Step2">
             <a:extLst>
               <a:ext uri="{FF2B5EF4-FFF2-40B4-BE49-F238E27FC236}">
-                <a16:creationId xmlns:a16="http://schemas.microsoft.com/office/drawing/2014/main" id="{C0EDEB55-755F-4B1B-DFA6-91D67FE553CF}"/>
+                <a16:creationId xmlns:a16="http://schemas.microsoft.com/office/drawing/2014/main" id="{9395A103-5D1F-62C5-A7A3-C4E365316DE1}"/>
               </a:ext>
             </a:extLst>
           </p:cNvPr>
@@ -11317,7 +12635,7 @@
           <p:cNvPr id="6" name="Step3">
             <a:extLst>
               <a:ext uri="{FF2B5EF4-FFF2-40B4-BE49-F238E27FC236}">
-                <a16:creationId xmlns:a16="http://schemas.microsoft.com/office/drawing/2014/main" id="{A81A9CB5-3465-25A2-82CB-BA33D22333A4}"/>
+                <a16:creationId xmlns:a16="http://schemas.microsoft.com/office/drawing/2014/main" id="{A12F8115-8323-23D1-ECE1-80970F9F0990}"/>
               </a:ext>
             </a:extLst>
           </p:cNvPr>
@@ -11392,7 +12710,7 @@
           <p:cNvPr id="7" name="MarginTarget">
             <a:extLst>
               <a:ext uri="{FF2B5EF4-FFF2-40B4-BE49-F238E27FC236}">
-                <a16:creationId xmlns:a16="http://schemas.microsoft.com/office/drawing/2014/main" id="{E2910351-11B6-7A5D-74C0-5EF74FE340B7}"/>
+                <a16:creationId xmlns:a16="http://schemas.microsoft.com/office/drawing/2014/main" id="{0D70124B-E351-4FBA-7D87-C20B35B0E525}"/>
               </a:ext>
             </a:extLst>
           </p:cNvPr>
@@ -11467,7 +12785,7 @@
           <p:cNvPr id="8" name="TextBox 7">
             <a:extLst>
               <a:ext uri="{FF2B5EF4-FFF2-40B4-BE49-F238E27FC236}">
-                <a16:creationId xmlns:a16="http://schemas.microsoft.com/office/drawing/2014/main" id="{8094A238-3889-CFB9-3D99-54DEAC8EB25D}"/>
+                <a16:creationId xmlns:a16="http://schemas.microsoft.com/office/drawing/2014/main" id="{F3DBF5B8-6BC9-BA28-19AB-BB51C832EF01}"/>
               </a:ext>
             </a:extLst>
           </p:cNvPr>
@@ -11504,7 +12822,7 @@
     </p:spTree>
     <p:extLst>
       <p:ext uri="{BB962C8B-B14F-4D97-AF65-F5344CB8AC3E}">
-        <p14:creationId xmlns:p14="http://schemas.microsoft.com/office/powerpoint/2010/main" val="144825909"/>
+        <p14:creationId xmlns:p14="http://schemas.microsoft.com/office/powerpoint/2010/main" val="1159629544"/>
       </p:ext>
     </p:extLst>
   </p:cSld>
@@ -11536,7 +12854,7 @@
           <p:cNvPr id="2" name="Heading">
             <a:extLst>
               <a:ext uri="{FF2B5EF4-FFF2-40B4-BE49-F238E27FC236}">
-                <a16:creationId xmlns:a16="http://schemas.microsoft.com/office/drawing/2014/main" id="{A454DE5D-FA03-CEEC-7407-D8BC9BBD6F4E}"/>
+                <a16:creationId xmlns:a16="http://schemas.microsoft.com/office/drawing/2014/main" id="{0415D797-A94D-50F3-DC93-BD0D7C689630}"/>
               </a:ext>
             </a:extLst>
           </p:cNvPr>
@@ -11575,7 +12893,7 @@
           <p:cNvPr id="3" name="Instructions">
             <a:extLst>
               <a:ext uri="{FF2B5EF4-FFF2-40B4-BE49-F238E27FC236}">
-                <a16:creationId xmlns:a16="http://schemas.microsoft.com/office/drawing/2014/main" id="{DDB3937C-200C-E9C5-DB5F-EC32A60CB9FF}"/>
+                <a16:creationId xmlns:a16="http://schemas.microsoft.com/office/drawing/2014/main" id="{7364D1C3-F966-B735-4921-8EE4F658A92F}"/>
               </a:ext>
             </a:extLst>
           </p:cNvPr>
@@ -11614,7 +12932,7 @@
           <p:cNvPr id="4" name="Ring1">
             <a:extLst>
               <a:ext uri="{FF2B5EF4-FFF2-40B4-BE49-F238E27FC236}">
-                <a16:creationId xmlns:a16="http://schemas.microsoft.com/office/drawing/2014/main" id="{5B59E80E-E8F4-2874-ABA3-FC3C9901FD9D}"/>
+                <a16:creationId xmlns:a16="http://schemas.microsoft.com/office/drawing/2014/main" id="{EFCE7847-6CEE-F380-F787-8CA3E9000570}"/>
               </a:ext>
             </a:extLst>
           </p:cNvPr>
@@ -11689,7 +13007,7 @@
           <p:cNvPr id="5" name="Ring2">
             <a:extLst>
               <a:ext uri="{FF2B5EF4-FFF2-40B4-BE49-F238E27FC236}">
-                <a16:creationId xmlns:a16="http://schemas.microsoft.com/office/drawing/2014/main" id="{15DCD142-DD5A-8989-4610-29145C9A8B5B}"/>
+                <a16:creationId xmlns:a16="http://schemas.microsoft.com/office/drawing/2014/main" id="{07B7F1FF-D7C5-CA0D-5317-E4187D143560}"/>
               </a:ext>
             </a:extLst>
           </p:cNvPr>
@@ -11764,7 +13082,7 @@
           <p:cNvPr id="6" name="Ring3">
             <a:extLst>
               <a:ext uri="{FF2B5EF4-FFF2-40B4-BE49-F238E27FC236}">
-                <a16:creationId xmlns:a16="http://schemas.microsoft.com/office/drawing/2014/main" id="{6F4804C5-6E32-B6A3-53C5-3E4C52301FBE}"/>
+                <a16:creationId xmlns:a16="http://schemas.microsoft.com/office/drawing/2014/main" id="{94CFAC13-C70E-5025-9C74-A041E977E41F}"/>
               </a:ext>
             </a:extLst>
           </p:cNvPr>
@@ -11839,7 +13157,7 @@
           <p:cNvPr id="7" name="Ring4">
             <a:extLst>
               <a:ext uri="{FF2B5EF4-FFF2-40B4-BE49-F238E27FC236}">
-                <a16:creationId xmlns:a16="http://schemas.microsoft.com/office/drawing/2014/main" id="{C96A0B3B-03D0-C610-92ED-F64962D4AC2B}"/>
+                <a16:creationId xmlns:a16="http://schemas.microsoft.com/office/drawing/2014/main" id="{3A94D560-D060-DB0C-8E39-1D3BFB2BBFAA}"/>
               </a:ext>
             </a:extLst>
           </p:cNvPr>
@@ -11914,7 +13232,7 @@
           <p:cNvPr id="8" name="Ring5">
             <a:extLst>
               <a:ext uri="{FF2B5EF4-FFF2-40B4-BE49-F238E27FC236}">
-                <a16:creationId xmlns:a16="http://schemas.microsoft.com/office/drawing/2014/main" id="{2231524A-BF30-C0C4-96D7-7B27A1D8F594}"/>
+                <a16:creationId xmlns:a16="http://schemas.microsoft.com/office/drawing/2014/main" id="{EE7BD16B-D4CA-1454-4594-3AE288EB4C57}"/>
               </a:ext>
             </a:extLst>
           </p:cNvPr>
@@ -11989,7 +13307,7 @@
           <p:cNvPr id="9" name="TextBox 8">
             <a:extLst>
               <a:ext uri="{FF2B5EF4-FFF2-40B4-BE49-F238E27FC236}">
-                <a16:creationId xmlns:a16="http://schemas.microsoft.com/office/drawing/2014/main" id="{8DC3EE30-DC3D-581D-D1DE-4E39B32AEDAD}"/>
+                <a16:creationId xmlns:a16="http://schemas.microsoft.com/office/drawing/2014/main" id="{C551659A-9A01-0980-ED3E-B28C8F8FE887}"/>
               </a:ext>
             </a:extLst>
           </p:cNvPr>
@@ -12026,7 +13344,7 @@
     </p:spTree>
     <p:extLst>
       <p:ext uri="{BB962C8B-B14F-4D97-AF65-F5344CB8AC3E}">
-        <p14:creationId xmlns:p14="http://schemas.microsoft.com/office/powerpoint/2010/main" val="1172250025"/>
+        <p14:creationId xmlns:p14="http://schemas.microsoft.com/office/powerpoint/2010/main" val="220641163"/>
       </p:ext>
     </p:extLst>
   </p:cSld>
